--- a/docs/slides/slides.pptx
+++ b/docs/slides/slides.pptx
@@ -55,6 +55,7 @@
     <p:sldId id="303" r:id="rId49"/>
     <p:sldId id="304" r:id="rId50"/>
     <p:sldId id="305" r:id="rId51"/>
+    <p:sldId id="306" r:id="rId52"/>
   </p:sldIdLst>
   <p:sldSz cx="9144000" cy="5143500" type="screen16x9"/>
   <p:notesSz cx="6858000" cy="9144000"/>
@@ -5754,7 +5755,7 @@
                       </a:pPr>
                       <a:r>
                         <a:rPr/>
-                        <a:t>5 trang</a:t>
+                        <a:t>3 trang</a:t>
                       </a:r>
                     </a:p>
                   </a:txBody>
@@ -12875,7 +12876,7 @@
             </a:pPr>
             <a:r>
               <a:rPr b="1"/>
-              <a:t>5 trang trong một khung ứng dụng chung:</a:t>
+              <a:t>3 trang trong một khung ứng dụng chung:</a:t>
             </a:r>
           </a:p>
         </p:txBody>
@@ -12955,45 +12956,11 @@
                       </a:r>
                       <a:r>
                         <a:rPr/>
-                        <a:t> — Tổng quan</a:t>
-                      </a:r>
-                    </a:p>
-                  </a:txBody>
-                </a:tc>
-                <a:tc>
-                  <a:txBody>
-                    <a:bodyPr/>
-                    <a:lstStyle/>
-                    <a:p>
-                      <a:pPr lvl="0" indent="0" marL="0">
-                        <a:buNone/>
-                      </a:pPr>
-                      <a:r>
-                        <a:rPr/>
-                        <a:t>4 thẻ chỉ số · trạng thái hệ thống · hoạt động 7 ngày · phân bố theo nguồn · 5 nhận dạng gần nhất</a:t>
-                      </a:r>
-                    </a:p>
-                  </a:txBody>
-                </a:tc>
-              </a:tr>
-              <a:tr h="0">
-                <a:tc>
-                  <a:txBody>
-                    <a:bodyPr/>
-                    <a:lstStyle/>
-                    <a:p>
-                      <a:pPr lvl="0" indent="0" marL="0">
-                        <a:buNone/>
-                      </a:pPr>
-                      <a:r>
-                        <a:rPr>
-                          <a:latin typeface="Courier"/>
-                        </a:rPr>
-                        <a:t>/image</a:t>
-                      </a:r>
-                      <a:r>
-                        <a:rPr/>
-                        <a:t> — Nhận dạng ảnh</a:t>
+                        <a:t> — Nhận dạng ảnh </a:t>
+                      </a:r>
+                      <a:r>
+                        <a:rPr i="1"/>
+                        <a:t>(trang chủ)</a:t>
                       </a:r>
                     </a:p>
                   </a:txBody>
@@ -13067,44 +13034,6 @@
                       <a:r>
                         <a:rPr/>
                         <a:t> → hỏi tiến độ định kỳ → video có gắn nhãn</a:t>
-                      </a:r>
-                    </a:p>
-                  </a:txBody>
-                </a:tc>
-              </a:tr>
-              <a:tr h="0">
-                <a:tc>
-                  <a:txBody>
-                    <a:bodyPr/>
-                    <a:lstStyle/>
-                    <a:p>
-                      <a:pPr lvl="0" indent="0" marL="0">
-                        <a:buNone/>
-                      </a:pPr>
-                      <a:r>
-                        <a:rPr>
-                          <a:latin typeface="Courier"/>
-                        </a:rPr>
-                        <a:t>/webcam</a:t>
-                      </a:r>
-                      <a:r>
-                        <a:rPr/>
-                        <a:t> — Thời gian thực</a:t>
-                      </a:r>
-                    </a:p>
-                  </a:txBody>
-                </a:tc>
-                <a:tc>
-                  <a:txBody>
-                    <a:bodyPr/>
-                    <a:lstStyle/>
-                    <a:p>
-                      <a:pPr lvl="0" indent="0" marL="0">
-                        <a:buNone/>
-                      </a:pPr>
-                      <a:r>
-                        <a:rPr/>
-                        <a:t>Gửi từng khung qua HTTP, mục tiêu ~5 FPS</a:t>
                       </a:r>
                     </a:p>
                   </a:txBody>
@@ -13166,6 +13095,287 @@
 </file>
 
 <file path=ppt/slides/slide38.xml><?xml version="1.0" encoding="utf-8"?>
+<p:sld xmlns:a="http://schemas.openxmlformats.org/drawingml/2006/main" xmlns:r="http://schemas.openxmlformats.org/officeDocument/2006/relationships" xmlns:p="http://schemas.openxmlformats.org/presentationml/2006/main">
+  <p:cSld>
+    <p:spTree>
+      <p:nvGrpSpPr>
+        <p:cNvPr id="1" name=""/>
+        <p:cNvGrpSpPr/>
+        <p:nvPr/>
+      </p:nvGrpSpPr>
+      <p:grpSpPr>
+        <a:xfrm>
+          <a:off x="0" y="0"/>
+          <a:ext cx="0" cy="0"/>
+          <a:chOff x="0" y="0"/>
+          <a:chExt cx="0" cy="0"/>
+        </a:xfrm>
+      </p:grpSpPr>
+      <p:sp>
+        <p:nvSpPr>
+          <p:cNvPr id="4" name="Text Placeholder 3"/>
+          <p:cNvSpPr>
+            <a:spLocks noGrp="1"/>
+          </p:cNvSpPr>
+          <p:nvPr>
+            <p:ph idx="2" sz="half" type="body"/>
+          </p:nvPr>
+        </p:nvSpPr>
+        <p:spPr/>
+        <p:txBody>
+          <a:bodyPr/>
+          <a:lstStyle/>
+          <a:p>
+            <a:pPr lvl="0" indent="0" marL="0">
+              <a:buNone/>
+            </a:pPr>
+            <a:r>
+              <a:rPr i="1"/>
+              <a:t>Chế độ thời gian thực (webcam) giữ ở tầng API — </a:t>
+            </a:r>
+            <a:r>
+              <a:rPr i="1">
+                <a:latin typeface="Courier"/>
+              </a:rPr>
+              <a:t>POST /api/detect/frame</a:t>
+            </a:r>
+            <a:r>
+              <a:rPr i="1"/>
+              <a:t>, gửi từng khung qua HTTP, mục tiêu ~5 FPS; trang Webcam đã gỡ khỏi giao diện 2026-07-20.</a:t>
+            </a:r>
+          </a:p>
+          <a:p>
+            <a:pPr lvl="0" indent="0" marL="0">
+              <a:buNone/>
+            </a:pPr>
+            <a:r>
+              <a:rPr b="1"/>
+              <a:t>Hai lần thu gọn phạm vi giao diện trong ngày 2026-07-20 — nói thẳng, đừng để hội đồng tự phát hiện:</a:t>
+            </a:r>
+          </a:p>
+        </p:txBody>
+      </p:sp>
+      <p:graphicFrame>
+        <p:nvGraphicFramePr>
+          <p:cNvPr id="6" name="Content Placeholder 5"/>
+          <p:cNvGraphicFramePr>
+            <a:graphicFrameLocks noGrp="1"/>
+          </p:cNvGraphicFramePr>
+          <p:nvPr>
+            <p:ph idx="1"/>
+          </p:nvPr>
+        </p:nvGraphicFramePr>
+        <p:xfrm>
+          <a:off x="3568700" y="203200"/>
+          <a:ext cx="5105400" cy="4381500"/>
+        </p:xfrm>
+        <a:graphic>
+          <a:graphicData uri="http://schemas.openxmlformats.org/drawingml/2006/table">
+            <a:tbl>
+              <a:tblPr firstRow="1" bandRow="1">
+                <a:tableStyleId>{5C22544A-7EE6-4342-B048-85BDC9FD1C3A}</a:tableStyleId>
+              </a:tblPr>
+              <a:tblGrid>
+                <a:gridCol w="1701800"/>
+                <a:gridCol w="1701800"/>
+                <a:gridCol w="1701800"/>
+              </a:tblGrid>
+              <a:tr h="0">
+                <a:tc>
+                  <a:txBody>
+                    <a:bodyPr/>
+                    <a:lstStyle/>
+                    <a:p>
+                      <a:pPr lvl="0" indent="0" marL="0">
+                        <a:buNone/>
+                      </a:pPr>
+                      <a:r>
+                        <a:rPr/>
+                        <a:t>Trang gỡ</a:t>
+                      </a:r>
+                    </a:p>
+                  </a:txBody>
+                  <a:tcPr/>
+                </a:tc>
+                <a:tc>
+                  <a:txBody>
+                    <a:bodyPr/>
+                    <a:lstStyle/>
+                    <a:p>
+                      <a:pPr lvl="0" indent="0" marL="0">
+                        <a:buNone/>
+                      </a:pPr>
+                      <a:r>
+                        <a:rPr/>
+                        <a:t>Yêu cầu bị ảnh hưởng</a:t>
+                      </a:r>
+                    </a:p>
+                  </a:txBody>
+                  <a:tcPr/>
+                </a:tc>
+                <a:tc>
+                  <a:txBody>
+                    <a:bodyPr/>
+                    <a:lstStyle/>
+                    <a:p>
+                      <a:pPr lvl="0" indent="0" marL="0">
+                        <a:buNone/>
+                      </a:pPr>
+                      <a:r>
+                        <a:rPr/>
+                        <a:t>Năng lực còn lại</a:t>
+                      </a:r>
+                    </a:p>
+                  </a:txBody>
+                  <a:tcPr/>
+                </a:tc>
+              </a:tr>
+              <a:tr h="0">
+                <a:tc>
+                  <a:txBody>
+                    <a:bodyPr/>
+                    <a:lstStyle/>
+                    <a:p>
+                      <a:pPr lvl="0" indent="0" marL="0">
+                        <a:buNone/>
+                      </a:pPr>
+                      <a:r>
+                        <a:rPr/>
+                        <a:t>Webcam</a:t>
+                      </a:r>
+                    </a:p>
+                  </a:txBody>
+                </a:tc>
+                <a:tc>
+                  <a:txBody>
+                    <a:bodyPr/>
+                    <a:lstStyle/>
+                    <a:p>
+                      <a:pPr lvl="0" indent="0" marL="0">
+                        <a:buNone/>
+                      </a:pPr>
+                      <a:r>
+                        <a:rPr/>
+                        <a:t>FR-3.1, FR-3.4 (M/M → </a:t>
+                      </a:r>
+                      <a:r>
+                        <a:rPr b="1"/>
+                        <a:t>W</a:t>
+                      </a:r>
+                      <a:r>
+                        <a:rPr/>
+                        <a:t>)</a:t>
+                      </a:r>
+                    </a:p>
+                  </a:txBody>
+                </a:tc>
+                <a:tc>
+                  <a:txBody>
+                    <a:bodyPr/>
+                    <a:lstStyle/>
+                    <a:p>
+                      <a:pPr lvl="0" indent="0" marL="0">
+                        <a:buNone/>
+                      </a:pPr>
+                      <a:r>
+                        <a:rPr>
+                          <a:latin typeface="Courier"/>
+                        </a:rPr>
+                        <a:t>POST /api/detect/frame</a:t>
+                      </a:r>
+                      <a:r>
+                        <a:rPr/>
+                        <a:t> — không đổi một dòng, vẫn có kiểm thử</a:t>
+                      </a:r>
+                    </a:p>
+                  </a:txBody>
+                </a:tc>
+              </a:tr>
+              <a:tr h="0">
+                <a:tc>
+                  <a:txBody>
+                    <a:bodyPr/>
+                    <a:lstStyle/>
+                    <a:p>
+                      <a:pPr lvl="0" indent="0" marL="0">
+                        <a:buNone/>
+                      </a:pPr>
+                      <a:r>
+                        <a:rPr b="1"/>
+                        <a:t>Tổng quan (Dashboard)</a:t>
+                      </a:r>
+                    </a:p>
+                  </a:txBody>
+                </a:tc>
+                <a:tc>
+                  <a:txBody>
+                    <a:bodyPr/>
+                    <a:lstStyle/>
+                    <a:p>
+                      <a:pPr lvl="0" indent="0" marL="0">
+                        <a:buNone/>
+                      </a:pPr>
+                      <a:r>
+                        <a:rPr b="1"/>
+                        <a:t>FR-4.1 (M → W)</a:t>
+                      </a:r>
+                      <a:r>
+                        <a:rPr/>
+                        <a:t>, FR-4.2 (S → W)</a:t>
+                      </a:r>
+                    </a:p>
+                  </a:txBody>
+                </a:tc>
+                <a:tc>
+                  <a:txBody>
+                    <a:bodyPr/>
+                    <a:lstStyle/>
+                    <a:p>
+                      <a:pPr lvl="0" indent="0" marL="0">
+                        <a:buNone/>
+                      </a:pPr>
+                      <a:r>
+                        <a:rPr>
+                          <a:latin typeface="Courier"/>
+                        </a:rPr>
+                        <a:t>GET /api/statistics</a:t>
+                      </a:r>
+                      <a:r>
+                        <a:rPr/>
+                        <a:t> và </a:t>
+                      </a:r>
+                      <a:r>
+                        <a:rPr>
+                          <a:latin typeface="Courier"/>
+                        </a:rPr>
+                        <a:t>GET /health</a:t>
+                      </a:r>
+                      <a:r>
+                        <a:rPr/>
+                        <a:t> </a:t>
+                      </a:r>
+                      <a:r>
+                        <a:rPr b="1"/>
+                        <a:t>vẫn phục vụ</a:t>
+                      </a:r>
+                      <a:r>
+                        <a:rPr/>
+                        <a:t>, vẫn có kiểm thử tích hợp</a:t>
+                      </a:r>
+                    </a:p>
+                  </a:txBody>
+                </a:tc>
+              </a:tr>
+            </a:tbl>
+          </a:graphicData>
+        </a:graphic>
+      </p:graphicFrame>
+    </p:spTree>
+  </p:cSld>
+</p:sld>
+</file>
+
+<file path=ppt/slides/slide39.xml><?xml version="1.0" encoding="utf-8"?>
 <p:sld xmlns:a="http://schemas.openxmlformats.org/drawingml/2006/main" xmlns:r="http://schemas.openxmlformats.org/officeDocument/2006/relationships" xmlns:p="http://schemas.openxmlformats.org/presentationml/2006/main">
   <p:cSld>
     <p:spTree>
@@ -13201,6 +13411,67 @@
               <a:buNone/>
             </a:pPr>
             <a:r>
+              <a:rPr/>
+              <a:t>⚠️ </a:t>
+            </a:r>
+            <a:r>
+              <a:rPr b="1"/>
+              <a:t>FR-4.1 là lần đầu một yêu cầu mức </a:t>
+            </a:r>
+            <a:r>
+              <a:rPr b="1" i="1"/>
+              <a:t>Must</a:t>
+            </a:r>
+            <a:r>
+              <a:rPr b="1"/>
+              <a:t> bị đưa ra khỏi phạm vi.</a:t>
+            </a:r>
+            <a:r>
+              <a:rPr/>
+              <a:t> Đây là quyết định thu gọn demo, không phải một chức năng thất bại — trang đã từng chạy thật và còn nguyên trong lịch sử git. Đánh đổi đo được: gỡ </a:t>
+            </a:r>
+            <a:r>
+              <a:rPr>
+                <a:latin typeface="Courier"/>
+              </a:rPr>
+              <a:t>recharts</a:t>
+            </a:r>
+            <a:r>
+              <a:rPr/>
+              <a:t> làm gói tải về giảm từ ~730 KB xuống </a:t>
+            </a:r>
+            <a:r>
+              <a:rPr b="1"/>
+              <a:t>328,8 KB (−55%)</a:t>
+            </a:r>
+            <a:r>
+              <a:rPr/>
+              <a:t>. Chi tiết trả lời ở </a:t>
+            </a:r>
+            <a:r>
+              <a:rPr b="1"/>
+              <a:t>E4c</a:t>
+            </a:r>
+            <a:r>
+              <a:rPr/>
+              <a:t> của </a:t>
+            </a:r>
+            <a:r>
+              <a:rPr>
+                <a:latin typeface="Courier"/>
+              </a:rPr>
+              <a:t>10-defense-qa.md</a:t>
+            </a:r>
+            <a:r>
+              <a:rPr/>
+              <a:t>.</a:t>
+            </a:r>
+          </a:p>
+          <a:p>
+            <a:pPr lvl="0" indent="0" marL="0">
+              <a:buNone/>
+            </a:pPr>
+            <a:r>
               <a:rPr b="1"/>
               <a:t>Bốn nguyên tắc giao diện:</a:t>
             </a:r>
@@ -13302,7 +13573,15 @@
             </a:r>
             <a:r>
               <a:rPr/>
-              <a:t> — đã có sẵn trong </a:t>
+              <a:t> — dùng </a:t>
+            </a:r>
+            <a:r>
+              <a:rPr b="1"/>
+              <a:t>3 tệp</a:t>
+            </a:r>
+            <a:r>
+              <a:rPr/>
+              <a:t> trong </a:t>
             </a:r>
             <a:r>
               <a:rPr>
@@ -13321,11 +13600,11 @@
               <a:rPr>
                 <a:latin typeface="Courier"/>
               </a:rPr>
-              <a:t>dashboard.png</a:t>
-            </a:r>
-            <a:r>
-              <a:rPr/>
-              <a:t> (ảnh lớn, chiếm ~55% slide)</a:t>
+              <a:t>image-detection.png</a:t>
+            </a:r>
+            <a:r>
+              <a:rPr/>
+              <a:t> (ảnh lớn — quan trọng nhất vì hiện kết quả AI thật)</a:t>
             </a:r>
           </a:p>
           <a:p>
@@ -13334,15 +13613,12 @@
               <a:rPr>
                 <a:latin typeface="Courier"/>
               </a:rPr>
-              <a:t>image-detection.png</a:t>
-            </a:r>
-            <a:r>
-              <a:rPr/>
-              <a:t> (ảnh vừa — quan trọng nhất vì hiện kết quả AI thật)</a:t>
-            </a:r>
-          </a:p>
-          <a:p>
-            <a:pPr lvl="1"/>
+              <a:t>video-detection.png</a:t>
+            </a:r>
+            <a:r>
+              <a:rPr/>
+              <a:t>, </a:t>
+            </a:r>
             <a:r>
               <a:rPr>
                 <a:latin typeface="Courier"/>
@@ -13351,617 +13627,161 @@
             </a:r>
             <a:r>
               <a:rPr/>
-              <a:t>, </a:t>
-            </a:r>
-            <a:r>
-              <a:rPr>
-                <a:latin typeface="Courier"/>
-              </a:rPr>
-              <a:t>webcam.png</a:t>
-            </a:r>
-            <a:r>
-              <a:rPr/>
-              <a:t>, </a:t>
-            </a:r>
-            <a:r>
-              <a:rPr>
-                <a:latin typeface="Courier"/>
-              </a:rPr>
-              <a:t>video-detection.png</a:t>
-            </a:r>
-            <a:r>
-              <a:rPr/>
-              <a:t> (3 ảnh nhỏ xếp hàng dưới)</a:t>
-            </a:r>
-          </a:p>
-          <a:p>
-            <a:pPr lvl="0" indent="0" marL="0">
-              <a:buNone/>
-            </a:pPr>
-            <a:r>
-              <a:rPr b="1"/>
-              <a:t>Speaker notes</a:t>
-            </a:r>
-            <a:r>
-              <a:rPr/>
-              <a:t> </a:t>
-            </a:r>
-            <a:r>
-              <a:rPr i="1"/>
-              <a:t>(40 s)</a:t>
-            </a:r>
-          </a:p>
-          <a:p>
-            <a:pPr lvl="0" indent="0" marL="1270000">
-              <a:buNone/>
-            </a:pPr>
-            <a:r>
-              <a:rPr sz="2000"/>
-              <a:t>Giao diện gồm năm trang: tổng quan, nhận dạng ảnh, nhận dạng video, webcam và lịch sử. Ba trang nhận dạng là nguồn sinh dữ liệu, tất cả đổ về cùng một bảng lịch sử.</a:t>
-            </a:r>
-          </a:p>
-          <a:p>
-            <a:pPr lvl="0" indent="0" marL="1270000">
-              <a:buNone/>
-            </a:pPr>
-            <a:r>
-              <a:rPr sz="2000"/>
-              <a:t>Em xin nêu hai chi tiết thiết kế. Thứ nhất, mỗi vùng dữ liệu đều xử lý đủ bốn trạng thái, và riêng trạng thái rỗng em còn tách nhỏ theo nguyên nhân — chưa gửi gì, đã xử lý mà không thấy biển, hay không khớp bộ lọc — vì cách thoát khỏi mỗi trạng thái là khác nhau. Thứ hai, kiểu dữ liệu ở frontend dùng đúng tên trường của JSON API, không có lớp chuyển đổi ở giữa. Nhờ vậy nếu backend đổi schema thì TypeScript báo lỗi ngay lúc biên dịch, thay vì một trường lặng lẽ thành undefined lúc chạy.</a:t>
-            </a:r>
-          </a:p>
-          <a:p>
-            <a:pPr lvl="0" indent="0" marL="1270000">
-              <a:buNone/>
-            </a:pPr>
-            <a:r>
-              <a:rPr sz="2000"/>
-              <a:t>Nếu thầy cô muốn, em có thể demo trực tiếp sau phần trình bày.</a:t>
-            </a:r>
-          </a:p>
-        </p:txBody>
-      </p:sp>
-    </p:spTree>
-  </p:cSld>
-</p:sld>
-</file>
-
-<file path=ppt/slides/slide39.xml><?xml version="1.0" encoding="utf-8"?>
-<p:sld xmlns:a="http://schemas.openxmlformats.org/drawingml/2006/main" xmlns:r="http://schemas.openxmlformats.org/officeDocument/2006/relationships" xmlns:p="http://schemas.openxmlformats.org/presentationml/2006/main">
-  <p:cSld>
-    <p:spTree>
-      <p:nvGrpSpPr>
-        <p:cNvPr id="1" name=""/>
-        <p:cNvGrpSpPr/>
-        <p:nvPr/>
-      </p:nvGrpSpPr>
-      <p:grpSpPr>
-        <a:xfrm>
-          <a:off x="0" y="0"/>
-          <a:ext cx="0" cy="0"/>
-          <a:chOff x="0" y="0"/>
-          <a:chExt cx="0" cy="0"/>
-        </a:xfrm>
-      </p:grpSpPr>
-      <p:sp>
-        <p:nvSpPr>
-          <p:cNvPr id="4" name="Text Placeholder 3"/>
-          <p:cNvSpPr>
-            <a:spLocks noGrp="1"/>
-          </p:cNvSpPr>
-          <p:nvPr>
-            <p:ph idx="2" sz="half" type="body"/>
-          </p:nvPr>
-        </p:nvSpPr>
-        <p:spPr/>
-        <p:txBody>
-          <a:bodyPr/>
-          <a:lstStyle/>
-          <a:p>
-            <a:pPr lvl="0" indent="0" marL="0">
-              <a:spcBef>
-                <a:spcPts val="3000"/>
-              </a:spcBef>
-              <a:buNone/>
-            </a:pPr>
-            <a:r>
-              <a:rPr b="1"/>
-              <a:t>S17 — Hiệu năng trên CPU ✅ ĐÃ ĐO (NFR-P1 ĐẠT)</a:t>
-            </a:r>
-          </a:p>
-          <a:p>
-            <a:pPr lvl="0" indent="0" marL="1270000">
-              <a:buNone/>
-            </a:pPr>
-            <a:r>
-              <a:rPr sz="2000" b="1"/>
-              <a:t>Đã đo trên </a:t>
-            </a:r>
-            <a:r>
-              <a:rPr sz="2000" b="1">
-                <a:latin typeface="Courier"/>
-              </a:rPr>
-              <a:t>models/best.pt</a:t>
-            </a:r>
-            <a:r>
-              <a:rPr sz="2000" b="1"/>
-              <a:t>, máy rảnh: p95 731 ms client / 780 ms in-process.</a:t>
-            </a:r>
-          </a:p>
-          <a:p>
-            <a:pPr lvl="0" indent="0" marL="0">
-              <a:buNone/>
-            </a:pPr>
-            <a:r>
-              <a:rPr b="1"/>
-              <a:t>Nội dung trên slide</a:t>
-            </a:r>
-          </a:p>
-          <a:p>
-            <a:pPr lvl="0" indent="0" marL="0">
-              <a:buNone/>
-            </a:pPr>
-            <a:r>
-              <a:rPr b="1"/>
-              <a:t>Phần cứng đo (bắt buộc công bố kèm mọi con số):</a:t>
-            </a:r>
-            <a:r>
-              <a:rPr/>
-              <a:t> Intel Core i5-14600K · 14 nhân / 20 luồng · </a:t>
-            </a:r>
-            <a:r>
-              <a:rPr b="1"/>
-              <a:t>không có GPU CUDA</a:t>
-            </a:r>
-            <a:r>
-              <a:rPr/>
-              <a:t> · backend suy luận PyTorch · </a:t>
-            </a:r>
-            <a:r>
-              <a:rPr>
-                <a:latin typeface="Courier"/>
-              </a:rPr>
-              <a:t>imgsz</a:t>
-            </a:r>
-            <a:r>
-              <a:rPr/>
-              <a:t> 640 · một ảnh mỗi lần gọi</a:t>
-            </a:r>
-          </a:p>
-          <a:p>
-            <a:pPr lvl="0" indent="0" marL="0">
-              <a:buNone/>
-            </a:pPr>
-            <a:r>
-              <a:rPr b="1"/>
-              <a:t>Bảng công bố — ĐÃ ĐO trên </a:t>
+              <a:t> (2 ảnh nhỏ xếp hàng dưới)</a:t>
+            </a:r>
+          </a:p>
+          <a:p>
+            <a:pPr lvl="1"/>
+            <a:r>
+              <a:rPr/>
+              <a:t>❌ </a:t>
+            </a:r>
+            <a:r>
+              <a:rPr b="1"/>
+              <a:t>Không dùng </a:t>
             </a:r>
             <a:r>
               <a:rPr b="1">
                 <a:latin typeface="Courier"/>
               </a:rPr>
-              <a:t>models/best.pt</a:t>
-            </a:r>
-            <a:r>
-              <a:rPr b="1"/>
-              <a:t>, máy rảnh:</a:t>
+              <a:t>dashboard.png</a:t>
+            </a:r>
+            <a:r>
+              <a:rPr/>
+              <a:t> — trang Tổng quan đã gỡ khỏi giao diện</a:t>
+            </a:r>
+          </a:p>
+          <a:p>
+            <a:pPr lvl="0" indent="0" marL="1270000">
+              <a:buNone/>
+            </a:pPr>
+            <a:r>
+              <a:rPr sz="2000"/>
+              <a:t>⚠️ </a:t>
+            </a:r>
+            <a:r>
+              <a:rPr sz="2000" b="1"/>
+              <a:t>Phải chụp lại 3 ảnh này trước khi nộp.</a:t>
+            </a:r>
+            <a:r>
+              <a:rPr sz="2000"/>
+              <a:t> Bản hiện có được chụp khi sidebar còn </a:t>
+            </a:r>
+            <a:r>
+              <a:rPr sz="2000" b="1"/>
+              <a:t>5 mục</a:t>
+            </a:r>
+            <a:r>
+              <a:rPr sz="2000"/>
+              <a:t> và trang chủ còn là </a:t>
+            </a:r>
+            <a:r>
+              <a:rPr sz="2000" b="1"/>
+              <a:t>Tổng quan</a:t>
+            </a:r>
+            <a:r>
+              <a:rPr sz="2000"/>
+              <a:t>. Giao diện bây giờ chỉ còn </a:t>
+            </a:r>
+            <a:r>
+              <a:rPr sz="2000" b="1"/>
+              <a:t>3 mục</a:t>
+            </a:r>
+            <a:r>
+              <a:rPr sz="2000"/>
+              <a:t>, trang chủ là </a:t>
+            </a:r>
+            <a:r>
+              <a:rPr sz="2000" b="1"/>
+              <a:t>Nhận dạng ảnh</a:t>
+            </a:r>
+            <a:r>
+              <a:rPr sz="2000"/>
+              <a:t> và </a:t>
+            </a:r>
+            <a:r>
+              <a:rPr sz="2000" b="1"/>
+              <a:t>không còn trang Tổng quan</a:t>
+            </a:r>
+            <a:r>
+              <a:rPr sz="2000"/>
+              <a:t> — chiếu ảnh cũ lên slide sẽ mâu thuẫn với chính lời nói ở dưới.</a:t>
+            </a:r>
+          </a:p>
+          <a:p>
+            <a:pPr lvl="0" indent="0" marL="0">
+              <a:buNone/>
+            </a:pPr>
+            <a:r>
+              <a:rPr b="1"/>
+              <a:t>Speaker notes</a:t>
+            </a:r>
+            <a:r>
+              <a:rPr/>
+              <a:t> </a:t>
+            </a:r>
+            <a:r>
+              <a:rPr i="1"/>
+              <a:t>(40 s)</a:t>
+            </a:r>
+          </a:p>
+          <a:p>
+            <a:pPr lvl="0" indent="0" marL="1270000">
+              <a:buNone/>
+            </a:pPr>
+            <a:r>
+              <a:rPr sz="2000"/>
+              <a:t>Giao diện gồm ba trang: nhận dạng ảnh (trang chủ), nhận dạng video và lịch sử. Hai trang nhận dạng là nguồn sinh dữ liệu, cùng đổ về một bảng lịch sử. Em xin nói thẳng hai chỗ đã thu gọn: trang webcam và trang tổng quan đều đã được gỡ khỏi giao diện ngày 20 tháng 7. Cả hai năng lực vẫn còn nguyên ở tầng API — </a:t>
+            </a:r>
+            <a:r>
+              <a:rPr sz="2000">
+                <a:latin typeface="Courier"/>
+              </a:rPr>
+              <a:t>POST /api/detect/frame</a:t>
+            </a:r>
+            <a:r>
+              <a:rPr sz="2000"/>
+              <a:t> cho thời gian thực và </a:t>
+            </a:r>
+            <a:r>
+              <a:rPr sz="2000">
+                <a:latin typeface="Courier"/>
+              </a:rPr>
+              <a:t>GET /api/statistics</a:t>
+            </a:r>
+            <a:r>
+              <a:rPr sz="2000"/>
+              <a:t> cho số liệu tổng hợp, cả hai vẫn có kiểm thử tự động. Riêng việc gỡ trang tổng quan đưa FR-4.1, một yêu cầu mức </a:t>
+            </a:r>
+            <a:r>
+              <a:rPr sz="2000" i="1"/>
+              <a:t>bắt buộc</a:t>
+            </a:r>
+            <a:r>
+              <a:rPr sz="2000"/>
+              <a:t>, ra khỏi phạm vi bản này; em nói rõ điều đó và sẵn sàng trả lời kỹ ở phần hỏi đáp.</a:t>
+            </a:r>
+          </a:p>
+          <a:p>
+            <a:pPr lvl="0" indent="0" marL="1270000">
+              <a:buNone/>
+            </a:pPr>
+            <a:r>
+              <a:rPr sz="2000"/>
+              <a:t>Em xin nêu hai chi tiết thiết kế. Thứ nhất, mỗi vùng dữ liệu đều xử lý đủ bốn trạng thái, và riêng trạng thái rỗng em còn tách nhỏ theo nguyên nhân — chưa gửi gì, đã xử lý mà không thấy biển, hay không khớp bộ lọc — vì cách thoát khỏi mỗi trạng thái là khác nhau. Thứ hai, kiểu dữ liệu ở frontend dùng đúng tên trường của JSON API, không có lớp chuyển đổi ở giữa. Nhờ vậy nếu backend đổi schema thì TypeScript báo lỗi ngay lúc biên dịch, thay vì một trường lặng lẽ thành undefined lúc chạy.</a:t>
+            </a:r>
+          </a:p>
+          <a:p>
+            <a:pPr lvl="0" indent="0" marL="1270000">
+              <a:buNone/>
+            </a:pPr>
+            <a:r>
+              <a:rPr sz="2000"/>
+              <a:t>Nếu thầy cô muốn, em có thể demo trực tiếp sau phần trình bày.</a:t>
             </a:r>
           </a:p>
         </p:txBody>
       </p:sp>
-      <p:graphicFrame>
-        <p:nvGraphicFramePr>
-          <p:cNvPr id="6" name="Content Placeholder 5"/>
-          <p:cNvGraphicFramePr>
-            <a:graphicFrameLocks noGrp="1"/>
-          </p:cNvGraphicFramePr>
-          <p:nvPr>
-            <p:ph idx="1"/>
-          </p:nvPr>
-        </p:nvGraphicFramePr>
-        <p:xfrm>
-          <a:off x="3568700" y="203200"/>
-          <a:ext cx="5105400" cy="4381500"/>
-        </p:xfrm>
-        <a:graphic>
-          <a:graphicData uri="http://schemas.openxmlformats.org/drawingml/2006/table">
-            <a:tbl>
-              <a:tblPr firstRow="1" bandRow="1">
-                <a:tableStyleId>{5C22544A-7EE6-4342-B048-85BDC9FD1C3A}</a:tableStyleId>
-              </a:tblPr>
-              <a:tblGrid>
-                <a:gridCol w="850900"/>
-                <a:gridCol w="850900"/>
-                <a:gridCol w="850900"/>
-                <a:gridCol w="850900"/>
-                <a:gridCol w="850900"/>
-                <a:gridCol w="850900"/>
-              </a:tblGrid>
-              <a:tr h="0">
-                <a:tc>
-                  <a:txBody>
-                    <a:bodyPr/>
-                    <a:lstStyle/>
-                    <a:p>
-                      <a:pPr lvl="0" indent="0" marL="0">
-                        <a:buNone/>
-                      </a:pPr>
-                      <a:r>
-                        <a:rPr/>
-                        <a:t>Chỉ tiêu</a:t>
-                      </a:r>
-                    </a:p>
-                  </a:txBody>
-                  <a:tcPr/>
-                </a:tc>
-                <a:tc>
-                  <a:txBody>
-                    <a:bodyPr/>
-                    <a:lstStyle/>
-                    <a:p>
-                      <a:pPr lvl="0" indent="0" marL="0" algn="ctr">
-                        <a:buNone/>
-                      </a:pPr>
-                      <a:r>
-                        <a:rPr/>
-                        <a:t>p50</a:t>
-                      </a:r>
-                    </a:p>
-                  </a:txBody>
-                  <a:tcPr/>
-                </a:tc>
-                <a:tc>
-                  <a:txBody>
-                    <a:bodyPr/>
-                    <a:lstStyle/>
-                    <a:p>
-                      <a:pPr lvl="0" indent="0" marL="0" algn="ctr">
-                        <a:buNone/>
-                      </a:pPr>
-                      <a:r>
-                        <a:rPr/>
-                        <a:t>p95</a:t>
-                      </a:r>
-                    </a:p>
-                  </a:txBody>
-                  <a:tcPr/>
-                </a:tc>
-                <a:tc>
-                  <a:txBody>
-                    <a:bodyPr/>
-                    <a:lstStyle/>
-                    <a:p>
-                      <a:pPr lvl="0" indent="0" marL="0" algn="ctr">
-                        <a:buNone/>
-                      </a:pPr>
-                      <a:r>
-                        <a:rPr/>
-                        <a:t>p99</a:t>
-                      </a:r>
-                    </a:p>
-                  </a:txBody>
-                  <a:tcPr/>
-                </a:tc>
-                <a:tc>
-                  <a:txBody>
-                    <a:bodyPr/>
-                    <a:lstStyle/>
-                    <a:p>
-                      <a:pPr lvl="0" indent="0" marL="0" algn="ctr">
-                        <a:buNone/>
-                      </a:pPr>
-                      <a:r>
-                        <a:rPr/>
-                        <a:t>Đạt?</a:t>
-                      </a:r>
-                    </a:p>
-                  </a:txBody>
-                  <a:tcPr/>
-                </a:tc>
-                <a:tc>
-                  <a:txBody>
-                    <a:bodyPr/>
-                    <a:lstStyle/>
-                    <a:p>
-                      <a:pPr lvl="0" indent="0" marL="0" algn="ctr">
-                        <a:buNone/>
-                      </a:pPr>
-                      <a:r>
-                        <a:rPr/>
-                        <a:t>Ngưỡng</a:t>
-                      </a:r>
-                    </a:p>
-                  </a:txBody>
-                  <a:tcPr/>
-                </a:tc>
-              </a:tr>
-              <a:tr h="0">
-                <a:tc>
-                  <a:txBody>
-                    <a:bodyPr/>
-                    <a:lstStyle/>
-                    <a:p>
-                      <a:pPr lvl="0" indent="0" marL="0">
-                        <a:buNone/>
-                      </a:pPr>
-                      <a:r>
-                        <a:rPr/>
-                        <a:t>NFR-P1 — độ trễ 1 ảnh (client-side, HTTP)</a:t>
-                      </a:r>
-                    </a:p>
-                  </a:txBody>
-                </a:tc>
-                <a:tc>
-                  <a:txBody>
-                    <a:bodyPr/>
-                    <a:lstStyle/>
-                    <a:p>
-                      <a:pPr lvl="0" indent="0" marL="0" algn="ctr">
-                        <a:buNone/>
-                      </a:pPr>
-                      <a:r>
-                        <a:rPr/>
-                        <a:t>415 ms</a:t>
-                      </a:r>
-                    </a:p>
-                  </a:txBody>
-                </a:tc>
-                <a:tc>
-                  <a:txBody>
-                    <a:bodyPr/>
-                    <a:lstStyle/>
-                    <a:p>
-                      <a:pPr lvl="0" indent="0" marL="0" algn="ctr">
-                        <a:buNone/>
-                      </a:pPr>
-                      <a:r>
-                        <a:rPr b="1"/>
-                        <a:t>731 ms</a:t>
-                      </a:r>
-                    </a:p>
-                  </a:txBody>
-                </a:tc>
-                <a:tc>
-                  <a:txBody>
-                    <a:bodyPr/>
-                    <a:lstStyle/>
-                    <a:p>
-                      <a:pPr lvl="0" indent="0" marL="0" algn="ctr">
-                        <a:buNone/>
-                      </a:pPr>
-                      <a:r>
-                        <a:rPr/>
-                        <a:t>948 ms</a:t>
-                      </a:r>
-                    </a:p>
-                  </a:txBody>
-                </a:tc>
-                <a:tc>
-                  <a:txBody>
-                    <a:bodyPr/>
-                    <a:lstStyle/>
-                    <a:p>
-                      <a:pPr lvl="0" indent="0" marL="0" algn="ctr">
-                        <a:buNone/>
-                      </a:pPr>
-                      <a:r>
-                        <a:rPr/>
-                        <a:t>✅</a:t>
-                      </a:r>
-                    </a:p>
-                  </a:txBody>
-                </a:tc>
-                <a:tc>
-                  <a:txBody>
-                    <a:bodyPr/>
-                    <a:lstStyle/>
-                    <a:p>
-                      <a:pPr lvl="0" indent="0" marL="0" algn="ctr">
-                        <a:buNone/>
-                      </a:pPr>
-                      <a:r>
-                        <a:rPr/>
-                        <a:t>p95 ≤ 800 ms</a:t>
-                      </a:r>
-                    </a:p>
-                  </a:txBody>
-                </a:tc>
-              </a:tr>
-              <a:tr h="0">
-                <a:tc>
-                  <a:txBody>
-                    <a:bodyPr/>
-                    <a:lstStyle/>
-                    <a:p>
-                      <a:pPr lvl="0" indent="0" marL="0">
-                        <a:buNone/>
-                      </a:pPr>
-                      <a:r>
-                        <a:rPr/>
-                        <a:t>NFR-P1 — độ trễ 1 ảnh (in-process)</a:t>
-                      </a:r>
-                    </a:p>
-                  </a:txBody>
-                </a:tc>
-                <a:tc>
-                  <a:txBody>
-                    <a:bodyPr/>
-                    <a:lstStyle/>
-                    <a:p>
-                      <a:pPr lvl="0" indent="0" marL="0" algn="ctr">
-                        <a:buNone/>
-                      </a:pPr>
-                      <a:r>
-                        <a:rPr/>
-                        <a:t>419 ms</a:t>
-                      </a:r>
-                    </a:p>
-                  </a:txBody>
-                </a:tc>
-                <a:tc>
-                  <a:txBody>
-                    <a:bodyPr/>
-                    <a:lstStyle/>
-                    <a:p>
-                      <a:pPr lvl="0" indent="0" marL="0" algn="ctr">
-                        <a:buNone/>
-                      </a:pPr>
-                      <a:r>
-                        <a:rPr b="1"/>
-                        <a:t>780 ms</a:t>
-                      </a:r>
-                    </a:p>
-                  </a:txBody>
-                </a:tc>
-                <a:tc>
-                  <a:txBody>
-                    <a:bodyPr/>
-                    <a:lstStyle/>
-                    <a:p>
-                      <a:pPr lvl="0" indent="0" marL="0" algn="ctr">
-                        <a:buNone/>
-                      </a:pPr>
-                      <a:r>
-                        <a:rPr/>
-                        <a:t>948 ms</a:t>
-                      </a:r>
-                    </a:p>
-                  </a:txBody>
-                </a:tc>
-                <a:tc>
-                  <a:txBody>
-                    <a:bodyPr/>
-                    <a:lstStyle/>
-                    <a:p>
-                      <a:pPr lvl="0" indent="0" marL="0" algn="ctr">
-                        <a:buNone/>
-                      </a:pPr>
-                      <a:r>
-                        <a:rPr/>
-                        <a:t>✅</a:t>
-                      </a:r>
-                    </a:p>
-                  </a:txBody>
-                </a:tc>
-                <a:tc>
-                  <a:txBody>
-                    <a:bodyPr/>
-                    <a:lstStyle/>
-                    <a:p>
-                      <a:pPr lvl="0" indent="0" marL="0" algn="ctr">
-                        <a:buNone/>
-                      </a:pPr>
-                      <a:r>
-                        <a:rPr/>
-                        <a:t>p95 ≤ 800 ms</a:t>
-                      </a:r>
-                    </a:p>
-                  </a:txBody>
-                </a:tc>
-              </a:tr>
-              <a:tr h="0">
-                <a:tc>
-                  <a:txBody>
-                    <a:bodyPr/>
-                    <a:lstStyle/>
-                    <a:p>
-                      <a:pPr lvl="0" indent="0" marL="0">
-                        <a:buNone/>
-                      </a:pPr>
-                      <a:r>
-                        <a:rPr/>
-                        <a:t>NFR-SC1 — yêu cầu đồng thời</a:t>
-                      </a:r>
-                    </a:p>
-                  </a:txBody>
-                </a:tc>
-                <a:tc>
-                  <a:txBody>
-                    <a:bodyPr/>
-                    <a:lstStyle/>
-                    <a:p>
-                      <a:pPr lvl="0" indent="0" marL="0" algn="ctr">
-                        <a:buNone/>
-                      </a:pPr>
-                      <a:r>
-                        <a:rPr/>
-                        <a:t>—</a:t>
-                      </a:r>
-                    </a:p>
-                  </a:txBody>
-                </a:tc>
-                <a:tc>
-                  <a:txBody>
-                    <a:bodyPr/>
-                    <a:lstStyle/>
-                    <a:p>
-                      <a:pPr lvl="0" indent="0" marL="0" algn="ctr">
-                        <a:buNone/>
-                      </a:pPr>
-                      <a:r>
-                        <a:rPr/>
-                        <a:t>—</a:t>
-                      </a:r>
-                    </a:p>
-                  </a:txBody>
-                </a:tc>
-                <a:tc>
-                  <a:txBody>
-                    <a:bodyPr/>
-                    <a:lstStyle/>
-                    <a:p>
-                      <a:pPr lvl="0" indent="0" marL="0" algn="ctr">
-                        <a:buNone/>
-                      </a:pPr>
-                      <a:r>
-                        <a:rPr/>
-                        <a:t>—</a:t>
-                      </a:r>
-                    </a:p>
-                  </a:txBody>
-                </a:tc>
-                <a:tc>
-                  <a:txBody>
-                    <a:bodyPr/>
-                    <a:lstStyle/>
-                    <a:p>
-                      <a:pPr lvl="0" indent="0" marL="0" algn="ctr">
-                        <a:buNone/>
-                      </a:pPr>
-                      <a:r>
-                        <a:rPr/>
-                        <a:t>✅ (</a:t>
-                      </a:r>
-                      <a:r>
-                        <a:rPr b="1"/>
-                        <a:t>10</a:t>
-                      </a:r>
-                      <a:r>
-                        <a:rPr/>
-                        <a:t>)</a:t>
-                      </a:r>
-                    </a:p>
-                  </a:txBody>
-                </a:tc>
-                <a:tc>
-                  <a:txBody>
-                    <a:bodyPr/>
-                    <a:lstStyle/>
-                    <a:p>
-                      <a:pPr lvl="0" indent="0" marL="0" algn="ctr">
-                        <a:buNone/>
-                      </a:pPr>
-                      <a:r>
-                        <a:rPr/>
-                        <a:t>≥ 5</a:t>
-                      </a:r>
-                    </a:p>
-                  </a:txBody>
-                </a:tc>
-              </a:tr>
-            </a:tbl>
-          </a:graphicData>
-        </a:graphic>
-      </p:graphicFrame>
     </p:spTree>
   </p:cSld>
 </p:sld>
@@ -14099,6 +13919,548 @@
           <a:lstStyle/>
           <a:p>
             <a:pPr lvl="0" indent="0" marL="0">
+              <a:spcBef>
+                <a:spcPts val="3000"/>
+              </a:spcBef>
+              <a:buNone/>
+            </a:pPr>
+            <a:r>
+              <a:rPr b="1"/>
+              <a:t>S17 — Hiệu năng trên CPU ✅ ĐÃ ĐO (NFR-P1 ĐẠT)</a:t>
+            </a:r>
+          </a:p>
+          <a:p>
+            <a:pPr lvl="0" indent="0" marL="1270000">
+              <a:buNone/>
+            </a:pPr>
+            <a:r>
+              <a:rPr sz="2000" b="1"/>
+              <a:t>Đã đo trên </a:t>
+            </a:r>
+            <a:r>
+              <a:rPr sz="2000" b="1">
+                <a:latin typeface="Courier"/>
+              </a:rPr>
+              <a:t>models/best.pt</a:t>
+            </a:r>
+            <a:r>
+              <a:rPr sz="2000" b="1"/>
+              <a:t>, máy rảnh: p95 731 ms client / 780 ms in-process.</a:t>
+            </a:r>
+          </a:p>
+          <a:p>
+            <a:pPr lvl="0" indent="0" marL="0">
+              <a:buNone/>
+            </a:pPr>
+            <a:r>
+              <a:rPr b="1"/>
+              <a:t>Nội dung trên slide</a:t>
+            </a:r>
+          </a:p>
+          <a:p>
+            <a:pPr lvl="0" indent="0" marL="0">
+              <a:buNone/>
+            </a:pPr>
+            <a:r>
+              <a:rPr b="1"/>
+              <a:t>Phần cứng đo (bắt buộc công bố kèm mọi con số):</a:t>
+            </a:r>
+            <a:r>
+              <a:rPr/>
+              <a:t> Intel Core i5-14600K · 14 nhân / 20 luồng · </a:t>
+            </a:r>
+            <a:r>
+              <a:rPr b="1"/>
+              <a:t>không có GPU CUDA</a:t>
+            </a:r>
+            <a:r>
+              <a:rPr/>
+              <a:t> · backend suy luận PyTorch · </a:t>
+            </a:r>
+            <a:r>
+              <a:rPr>
+                <a:latin typeface="Courier"/>
+              </a:rPr>
+              <a:t>imgsz</a:t>
+            </a:r>
+            <a:r>
+              <a:rPr/>
+              <a:t> 640 · một ảnh mỗi lần gọi</a:t>
+            </a:r>
+          </a:p>
+          <a:p>
+            <a:pPr lvl="0" indent="0" marL="0">
+              <a:buNone/>
+            </a:pPr>
+            <a:r>
+              <a:rPr b="1"/>
+              <a:t>Bảng công bố — ĐÃ ĐO trên </a:t>
+            </a:r>
+            <a:r>
+              <a:rPr b="1">
+                <a:latin typeface="Courier"/>
+              </a:rPr>
+              <a:t>models/best.pt</a:t>
+            </a:r>
+            <a:r>
+              <a:rPr b="1"/>
+              <a:t>, máy rảnh:</a:t>
+            </a:r>
+          </a:p>
+        </p:txBody>
+      </p:sp>
+      <p:graphicFrame>
+        <p:nvGraphicFramePr>
+          <p:cNvPr id="6" name="Content Placeholder 5"/>
+          <p:cNvGraphicFramePr>
+            <a:graphicFrameLocks noGrp="1"/>
+          </p:cNvGraphicFramePr>
+          <p:nvPr>
+            <p:ph idx="1"/>
+          </p:nvPr>
+        </p:nvGraphicFramePr>
+        <p:xfrm>
+          <a:off x="3568700" y="203200"/>
+          <a:ext cx="5105400" cy="4381500"/>
+        </p:xfrm>
+        <a:graphic>
+          <a:graphicData uri="http://schemas.openxmlformats.org/drawingml/2006/table">
+            <a:tbl>
+              <a:tblPr firstRow="1" bandRow="1">
+                <a:tableStyleId>{5C22544A-7EE6-4342-B048-85BDC9FD1C3A}</a:tableStyleId>
+              </a:tblPr>
+              <a:tblGrid>
+                <a:gridCol w="850900"/>
+                <a:gridCol w="850900"/>
+                <a:gridCol w="850900"/>
+                <a:gridCol w="850900"/>
+                <a:gridCol w="850900"/>
+                <a:gridCol w="850900"/>
+              </a:tblGrid>
+              <a:tr h="0">
+                <a:tc>
+                  <a:txBody>
+                    <a:bodyPr/>
+                    <a:lstStyle/>
+                    <a:p>
+                      <a:pPr lvl="0" indent="0" marL="0">
+                        <a:buNone/>
+                      </a:pPr>
+                      <a:r>
+                        <a:rPr/>
+                        <a:t>Chỉ tiêu</a:t>
+                      </a:r>
+                    </a:p>
+                  </a:txBody>
+                  <a:tcPr/>
+                </a:tc>
+                <a:tc>
+                  <a:txBody>
+                    <a:bodyPr/>
+                    <a:lstStyle/>
+                    <a:p>
+                      <a:pPr lvl="0" indent="0" marL="0" algn="ctr">
+                        <a:buNone/>
+                      </a:pPr>
+                      <a:r>
+                        <a:rPr/>
+                        <a:t>p50</a:t>
+                      </a:r>
+                    </a:p>
+                  </a:txBody>
+                  <a:tcPr/>
+                </a:tc>
+                <a:tc>
+                  <a:txBody>
+                    <a:bodyPr/>
+                    <a:lstStyle/>
+                    <a:p>
+                      <a:pPr lvl="0" indent="0" marL="0" algn="ctr">
+                        <a:buNone/>
+                      </a:pPr>
+                      <a:r>
+                        <a:rPr/>
+                        <a:t>p95</a:t>
+                      </a:r>
+                    </a:p>
+                  </a:txBody>
+                  <a:tcPr/>
+                </a:tc>
+                <a:tc>
+                  <a:txBody>
+                    <a:bodyPr/>
+                    <a:lstStyle/>
+                    <a:p>
+                      <a:pPr lvl="0" indent="0" marL="0" algn="ctr">
+                        <a:buNone/>
+                      </a:pPr>
+                      <a:r>
+                        <a:rPr/>
+                        <a:t>p99</a:t>
+                      </a:r>
+                    </a:p>
+                  </a:txBody>
+                  <a:tcPr/>
+                </a:tc>
+                <a:tc>
+                  <a:txBody>
+                    <a:bodyPr/>
+                    <a:lstStyle/>
+                    <a:p>
+                      <a:pPr lvl="0" indent="0" marL="0" algn="ctr">
+                        <a:buNone/>
+                      </a:pPr>
+                      <a:r>
+                        <a:rPr/>
+                        <a:t>Đạt?</a:t>
+                      </a:r>
+                    </a:p>
+                  </a:txBody>
+                  <a:tcPr/>
+                </a:tc>
+                <a:tc>
+                  <a:txBody>
+                    <a:bodyPr/>
+                    <a:lstStyle/>
+                    <a:p>
+                      <a:pPr lvl="0" indent="0" marL="0" algn="ctr">
+                        <a:buNone/>
+                      </a:pPr>
+                      <a:r>
+                        <a:rPr/>
+                        <a:t>Ngưỡng</a:t>
+                      </a:r>
+                    </a:p>
+                  </a:txBody>
+                  <a:tcPr/>
+                </a:tc>
+              </a:tr>
+              <a:tr h="0">
+                <a:tc>
+                  <a:txBody>
+                    <a:bodyPr/>
+                    <a:lstStyle/>
+                    <a:p>
+                      <a:pPr lvl="0" indent="0" marL="0">
+                        <a:buNone/>
+                      </a:pPr>
+                      <a:r>
+                        <a:rPr/>
+                        <a:t>NFR-P1 — độ trễ 1 ảnh (client-side, HTTP)</a:t>
+                      </a:r>
+                    </a:p>
+                  </a:txBody>
+                </a:tc>
+                <a:tc>
+                  <a:txBody>
+                    <a:bodyPr/>
+                    <a:lstStyle/>
+                    <a:p>
+                      <a:pPr lvl="0" indent="0" marL="0" algn="ctr">
+                        <a:buNone/>
+                      </a:pPr>
+                      <a:r>
+                        <a:rPr/>
+                        <a:t>415 ms</a:t>
+                      </a:r>
+                    </a:p>
+                  </a:txBody>
+                </a:tc>
+                <a:tc>
+                  <a:txBody>
+                    <a:bodyPr/>
+                    <a:lstStyle/>
+                    <a:p>
+                      <a:pPr lvl="0" indent="0" marL="0" algn="ctr">
+                        <a:buNone/>
+                      </a:pPr>
+                      <a:r>
+                        <a:rPr b="1"/>
+                        <a:t>731 ms</a:t>
+                      </a:r>
+                    </a:p>
+                  </a:txBody>
+                </a:tc>
+                <a:tc>
+                  <a:txBody>
+                    <a:bodyPr/>
+                    <a:lstStyle/>
+                    <a:p>
+                      <a:pPr lvl="0" indent="0" marL="0" algn="ctr">
+                        <a:buNone/>
+                      </a:pPr>
+                      <a:r>
+                        <a:rPr/>
+                        <a:t>948 ms</a:t>
+                      </a:r>
+                    </a:p>
+                  </a:txBody>
+                </a:tc>
+                <a:tc>
+                  <a:txBody>
+                    <a:bodyPr/>
+                    <a:lstStyle/>
+                    <a:p>
+                      <a:pPr lvl="0" indent="0" marL="0" algn="ctr">
+                        <a:buNone/>
+                      </a:pPr>
+                      <a:r>
+                        <a:rPr/>
+                        <a:t>✅</a:t>
+                      </a:r>
+                    </a:p>
+                  </a:txBody>
+                </a:tc>
+                <a:tc>
+                  <a:txBody>
+                    <a:bodyPr/>
+                    <a:lstStyle/>
+                    <a:p>
+                      <a:pPr lvl="0" indent="0" marL="0" algn="ctr">
+                        <a:buNone/>
+                      </a:pPr>
+                      <a:r>
+                        <a:rPr/>
+                        <a:t>p95 ≤ 800 ms</a:t>
+                      </a:r>
+                    </a:p>
+                  </a:txBody>
+                </a:tc>
+              </a:tr>
+              <a:tr h="0">
+                <a:tc>
+                  <a:txBody>
+                    <a:bodyPr/>
+                    <a:lstStyle/>
+                    <a:p>
+                      <a:pPr lvl="0" indent="0" marL="0">
+                        <a:buNone/>
+                      </a:pPr>
+                      <a:r>
+                        <a:rPr/>
+                        <a:t>NFR-P1 — độ trễ 1 ảnh (in-process)</a:t>
+                      </a:r>
+                    </a:p>
+                  </a:txBody>
+                </a:tc>
+                <a:tc>
+                  <a:txBody>
+                    <a:bodyPr/>
+                    <a:lstStyle/>
+                    <a:p>
+                      <a:pPr lvl="0" indent="0" marL="0" algn="ctr">
+                        <a:buNone/>
+                      </a:pPr>
+                      <a:r>
+                        <a:rPr/>
+                        <a:t>419 ms</a:t>
+                      </a:r>
+                    </a:p>
+                  </a:txBody>
+                </a:tc>
+                <a:tc>
+                  <a:txBody>
+                    <a:bodyPr/>
+                    <a:lstStyle/>
+                    <a:p>
+                      <a:pPr lvl="0" indent="0" marL="0" algn="ctr">
+                        <a:buNone/>
+                      </a:pPr>
+                      <a:r>
+                        <a:rPr b="1"/>
+                        <a:t>780 ms</a:t>
+                      </a:r>
+                    </a:p>
+                  </a:txBody>
+                </a:tc>
+                <a:tc>
+                  <a:txBody>
+                    <a:bodyPr/>
+                    <a:lstStyle/>
+                    <a:p>
+                      <a:pPr lvl="0" indent="0" marL="0" algn="ctr">
+                        <a:buNone/>
+                      </a:pPr>
+                      <a:r>
+                        <a:rPr/>
+                        <a:t>948 ms</a:t>
+                      </a:r>
+                    </a:p>
+                  </a:txBody>
+                </a:tc>
+                <a:tc>
+                  <a:txBody>
+                    <a:bodyPr/>
+                    <a:lstStyle/>
+                    <a:p>
+                      <a:pPr lvl="0" indent="0" marL="0" algn="ctr">
+                        <a:buNone/>
+                      </a:pPr>
+                      <a:r>
+                        <a:rPr/>
+                        <a:t>✅</a:t>
+                      </a:r>
+                    </a:p>
+                  </a:txBody>
+                </a:tc>
+                <a:tc>
+                  <a:txBody>
+                    <a:bodyPr/>
+                    <a:lstStyle/>
+                    <a:p>
+                      <a:pPr lvl="0" indent="0" marL="0" algn="ctr">
+                        <a:buNone/>
+                      </a:pPr>
+                      <a:r>
+                        <a:rPr/>
+                        <a:t>p95 ≤ 800 ms</a:t>
+                      </a:r>
+                    </a:p>
+                  </a:txBody>
+                </a:tc>
+              </a:tr>
+              <a:tr h="0">
+                <a:tc>
+                  <a:txBody>
+                    <a:bodyPr/>
+                    <a:lstStyle/>
+                    <a:p>
+                      <a:pPr lvl="0" indent="0" marL="0">
+                        <a:buNone/>
+                      </a:pPr>
+                      <a:r>
+                        <a:rPr/>
+                        <a:t>NFR-SC1 — yêu cầu đồng thời</a:t>
+                      </a:r>
+                    </a:p>
+                  </a:txBody>
+                </a:tc>
+                <a:tc>
+                  <a:txBody>
+                    <a:bodyPr/>
+                    <a:lstStyle/>
+                    <a:p>
+                      <a:pPr lvl="0" indent="0" marL="0" algn="ctr">
+                        <a:buNone/>
+                      </a:pPr>
+                      <a:r>
+                        <a:rPr/>
+                        <a:t>—</a:t>
+                      </a:r>
+                    </a:p>
+                  </a:txBody>
+                </a:tc>
+                <a:tc>
+                  <a:txBody>
+                    <a:bodyPr/>
+                    <a:lstStyle/>
+                    <a:p>
+                      <a:pPr lvl="0" indent="0" marL="0" algn="ctr">
+                        <a:buNone/>
+                      </a:pPr>
+                      <a:r>
+                        <a:rPr/>
+                        <a:t>—</a:t>
+                      </a:r>
+                    </a:p>
+                  </a:txBody>
+                </a:tc>
+                <a:tc>
+                  <a:txBody>
+                    <a:bodyPr/>
+                    <a:lstStyle/>
+                    <a:p>
+                      <a:pPr lvl="0" indent="0" marL="0" algn="ctr">
+                        <a:buNone/>
+                      </a:pPr>
+                      <a:r>
+                        <a:rPr/>
+                        <a:t>—</a:t>
+                      </a:r>
+                    </a:p>
+                  </a:txBody>
+                </a:tc>
+                <a:tc>
+                  <a:txBody>
+                    <a:bodyPr/>
+                    <a:lstStyle/>
+                    <a:p>
+                      <a:pPr lvl="0" indent="0" marL="0" algn="ctr">
+                        <a:buNone/>
+                      </a:pPr>
+                      <a:r>
+                        <a:rPr/>
+                        <a:t>✅ (</a:t>
+                      </a:r>
+                      <a:r>
+                        <a:rPr b="1"/>
+                        <a:t>10</a:t>
+                      </a:r>
+                      <a:r>
+                        <a:rPr/>
+                        <a:t>)</a:t>
+                      </a:r>
+                    </a:p>
+                  </a:txBody>
+                </a:tc>
+                <a:tc>
+                  <a:txBody>
+                    <a:bodyPr/>
+                    <a:lstStyle/>
+                    <a:p>
+                      <a:pPr lvl="0" indent="0" marL="0" algn="ctr">
+                        <a:buNone/>
+                      </a:pPr>
+                      <a:r>
+                        <a:rPr/>
+                        <a:t>≥ 5</a:t>
+                      </a:r>
+                    </a:p>
+                  </a:txBody>
+                </a:tc>
+              </a:tr>
+            </a:tbl>
+          </a:graphicData>
+        </a:graphic>
+      </p:graphicFrame>
+    </p:spTree>
+  </p:cSld>
+</p:sld>
+</file>
+
+<file path=ppt/slides/slide41.xml><?xml version="1.0" encoding="utf-8"?>
+<p:sld xmlns:a="http://schemas.openxmlformats.org/drawingml/2006/main" xmlns:r="http://schemas.openxmlformats.org/officeDocument/2006/relationships" xmlns:p="http://schemas.openxmlformats.org/presentationml/2006/main">
+  <p:cSld>
+    <p:spTree>
+      <p:nvGrpSpPr>
+        <p:cNvPr id="1" name=""/>
+        <p:cNvGrpSpPr/>
+        <p:nvPr/>
+      </p:nvGrpSpPr>
+      <p:grpSpPr>
+        <a:xfrm>
+          <a:off x="0" y="0"/>
+          <a:ext cx="0" cy="0"/>
+          <a:chOff x="0" y="0"/>
+          <a:chExt cx="0" cy="0"/>
+        </a:xfrm>
+      </p:grpSpPr>
+      <p:sp>
+        <p:nvSpPr>
+          <p:cNvPr id="4" name="Text Placeholder 3"/>
+          <p:cNvSpPr>
+            <a:spLocks noGrp="1"/>
+          </p:cNvSpPr>
+          <p:nvPr>
+            <p:ph idx="2" sz="half" type="body"/>
+          </p:nvPr>
+        </p:nvSpPr>
+        <p:spPr/>
+        <p:txBody>
+          <a:bodyPr/>
+          <a:lstStyle/>
+          <a:p>
+            <a:pPr lvl="0" indent="0" marL="0">
               <a:buNone/>
             </a:pPr>
             <a:r>
@@ -14529,7 +14891,7 @@
 </p:sld>
 </file>
 
-<file path=ppt/slides/slide41.xml><?xml version="1.0" encoding="utf-8"?>
+<file path=ppt/slides/slide42.xml><?xml version="1.0" encoding="utf-8"?>
 <p:sld xmlns:a="http://schemas.openxmlformats.org/drawingml/2006/main" xmlns:r="http://schemas.openxmlformats.org/officeDocument/2006/relationships" xmlns:p="http://schemas.openxmlformats.org/presentationml/2006/main">
   <p:cSld>
     <p:spTree>
@@ -14776,7 +15138,7 @@
 </p:sld>
 </file>
 
-<file path=ppt/slides/slide42.xml><?xml version="1.0" encoding="utf-8"?>
+<file path=ppt/slides/slide43.xml><?xml version="1.0" encoding="utf-8"?>
 <p:sld xmlns:a="http://schemas.openxmlformats.org/drawingml/2006/main" xmlns:r="http://schemas.openxmlformats.org/officeDocument/2006/relationships" xmlns:p="http://schemas.openxmlformats.org/presentationml/2006/main">
   <p:cSld>
     <p:spTree>
@@ -15549,136 +15911,104 @@
                   </a:txBody>
                 </a:tc>
               </a:tr>
+              <a:tr h="0">
+                <a:tc>
+                  <a:txBody>
+                    <a:bodyPr/>
+                    <a:lstStyle/>
+                    <a:p>
+                      <a:pPr lvl="0" indent="0" marL="0">
+                        <a:buNone/>
+                      </a:pPr>
+                      <a:r>
+                        <a:rPr/>
+                        <a:t>10</a:t>
+                      </a:r>
+                    </a:p>
+                  </a:txBody>
+                </a:tc>
+                <a:tc>
+                  <a:txBody>
+                    <a:bodyPr/>
+                    <a:lstStyle/>
+                    <a:p>
+                      <a:pPr lvl="0" indent="0" marL="0">
+                        <a:buNone/>
+                      </a:pPr>
+                      <a:r>
+                        <a:rPr b="1"/>
+                        <a:t>FR-4.1 (Must) và FR-4.2 (Should) đưa ra khỏi phạm vi</a:t>
+                      </a:r>
+                      <a:r>
+                        <a:rPr/>
+                        <a:t> — trang Tổng quan gỡ khỏi giao diện 2026-07-20</a:t>
+                      </a:r>
+                    </a:p>
+                  </a:txBody>
+                </a:tc>
+                <a:tc>
+                  <a:txBody>
+                    <a:bodyPr/>
+                    <a:lstStyle/>
+                    <a:p>
+                      <a:pPr lvl="0" indent="0" marL="0" algn="ctr">
+                        <a:buNone/>
+                      </a:pPr>
+                      <a:r>
+                        <a:rPr/>
+                        <a:t>⚠️</a:t>
+                      </a:r>
+                    </a:p>
+                  </a:txBody>
+                </a:tc>
+                <a:tc>
+                  <a:txBody>
+                    <a:bodyPr/>
+                    <a:lstStyle/>
+                    <a:p>
+                      <a:pPr lvl="0" indent="0" marL="0">
+                        <a:buNone/>
+                      </a:pPr>
+                      <a:r>
+                        <a:rPr/>
+                        <a:t>Quyết định thu gọn demo, </a:t>
+                      </a:r>
+                      <a:r>
+                        <a:rPr b="1"/>
+                        <a:t>không</a:t>
+                      </a:r>
+                      <a:r>
+                        <a:rPr/>
+                        <a:t> phải chức năng thất bại. </a:t>
+                      </a:r>
+                      <a:r>
+                        <a:rPr>
+                          <a:latin typeface="Courier"/>
+                        </a:rPr>
+                        <a:t>GET /api/statistics</a:t>
+                      </a:r>
+                      <a:r>
+                        <a:rPr/>
+                        <a:t> + </a:t>
+                      </a:r>
+                      <a:r>
+                        <a:rPr>
+                          <a:latin typeface="Courier"/>
+                        </a:rPr>
+                        <a:t>GET /health</a:t>
+                      </a:r>
+                      <a:r>
+                        <a:rPr/>
+                        <a:t> vẫn phục vụ và vẫn có kiểm thử; đổi lại gói tải về giảm 55% (~730 KB → 328,8 KB)</a:t>
+                      </a:r>
+                    </a:p>
+                  </a:txBody>
+                </a:tc>
+              </a:tr>
             </a:tbl>
           </a:graphicData>
         </a:graphic>
       </p:graphicFrame>
-    </p:spTree>
-  </p:cSld>
-</p:sld>
-</file>
-
-<file path=ppt/slides/slide43.xml><?xml version="1.0" encoding="utf-8"?>
-<p:sld xmlns:a="http://schemas.openxmlformats.org/drawingml/2006/main" xmlns:r="http://schemas.openxmlformats.org/officeDocument/2006/relationships" xmlns:p="http://schemas.openxmlformats.org/presentationml/2006/main">
-  <p:cSld>
-    <p:spTree>
-      <p:nvGrpSpPr>
-        <p:cNvPr id="1" name=""/>
-        <p:cNvGrpSpPr/>
-        <p:nvPr/>
-      </p:nvGrpSpPr>
-      <p:grpSpPr>
-        <a:xfrm>
-          <a:off x="0" y="0"/>
-          <a:ext cx="0" cy="0"/>
-          <a:chOff x="0" y="0"/>
-          <a:chExt cx="0" cy="0"/>
-        </a:xfrm>
-      </p:grpSpPr>
-      <p:sp>
-        <p:nvSpPr>
-          <p:cNvPr id="3" name="Content Placeholder 2"/>
-          <p:cNvSpPr>
-            <a:spLocks noGrp="1"/>
-          </p:cNvSpPr>
-          <p:nvPr>
-            <p:ph idx="1"/>
-          </p:nvPr>
-        </p:nvSpPr>
-        <p:spPr/>
-        <p:txBody>
-          <a:bodyPr/>
-          <a:lstStyle/>
-          <a:p>
-            <a:pPr lvl="0" indent="0" marL="0">
-              <a:buNone/>
-            </a:pPr>
-            <a:r>
-              <a:rPr b="1"/>
-              <a:t>Ba thiên lệch dữ liệu đã đo được:</a:t>
-            </a:r>
-            <a:r>
-              <a:rPr/>
-              <a:t> ảnh gần như chỉ có 1 biển (90,8%) · biển tập trung giữa khung (heatmap x≈0,46–0,50) · box cực nhỏ tập trung ở biển xe máy (p05 diện tích 0,244% so với 1,002%)</a:t>
-            </a:r>
-          </a:p>
-          <a:p>
-            <a:pPr lvl="0" indent="0" marL="0">
-              <a:buNone/>
-            </a:pPr>
-            <a:r>
-              <a:rPr b="1"/>
-              <a:t>Hình / Bảng</a:t>
-            </a:r>
-          </a:p>
-          <a:p>
-            <a:pPr lvl="0"/>
-            <a:r>
-              <a:rPr/>
-              <a:t>Bảng như trên, cột trạng thái dùng ký hiệu ❌ / ⚠️ nhất quán</a:t>
-            </a:r>
-          </a:p>
-          <a:p>
-            <a:pPr lvl="0"/>
-            <a:r>
-              <a:rPr/>
-              <a:t>Không thêm hình — slide này để chữ nói</a:t>
-            </a:r>
-          </a:p>
-          <a:p>
-            <a:pPr lvl="0" indent="0" marL="0">
-              <a:buNone/>
-            </a:pPr>
-            <a:r>
-              <a:rPr b="1"/>
-              <a:t>Speaker notes</a:t>
-            </a:r>
-            <a:r>
-              <a:rPr/>
-              <a:t> </a:t>
-            </a:r>
-            <a:r>
-              <a:rPr i="1"/>
-              <a:t>(45 s)</a:t>
-            </a:r>
-          </a:p>
-          <a:p>
-            <a:pPr lvl="0" indent="0" marL="1270000">
-              <a:buNone/>
-            </a:pPr>
-            <a:r>
-              <a:rPr sz="2000"/>
-              <a:t>Đây là slide em muốn trình bày thẳng.</a:t>
-            </a:r>
-          </a:p>
-          <a:p>
-            <a:pPr lvl="0" indent="0" marL="1270000">
-              <a:buNone/>
-            </a:pPr>
-            <a:r>
-              <a:rPr sz="2000"/>
-              <a:t>Hạn chế lớn nhất, và em nói thẳng: </a:t>
-            </a:r>
-            <a:r>
-              <a:rPr sz="2000" b="1"/>
-              <a:t>OCR biển hai dòng không đạt chỉ tiêu</a:t>
-            </a:r>
-            <a:r>
-              <a:rPr sz="2000"/>
-              <a:t>. Char-accuracy tổng 0,873, exact-match sau xử lý 0,656 — đều dưới ngưỡng. Toàn bộ khoảng cách nằm ở biển hai dòng: biển một dòng đạt 0,99 và 0,95, vượt mục tiêu; biển hai dòng chỉ 0,85 và 0,58. Vì xe máy chiếm gần 80% tập nhãn nên nó kéo tổng xuống. Đây là kết quả thật, em không tô hồng, và em đã phân tích nguyên nhân: OCR dòng đơn đọc kém hai dòng dù đã tách-rồi-ghép.</a:t>
-            </a:r>
-          </a:p>
-          <a:p>
-            <a:pPr lvl="0" indent="0" marL="1270000">
-              <a:buNone/>
-            </a:pPr>
-            <a:r>
-              <a:rPr sz="2000"/>
-              <a:t>Hai, NFR-A7 đo E2E ra 0,52 nhưng con số này không đại diện, vì không bộ dữ liệu nào vừa có ảnh toàn cảnh vừa có chuỗi biển, nên em buộc phải đo trên ảnh crop — ngoài phân bố của detector. Ba, một số chỉ tiêu như FPS webcam, xử lý video, điều kiện ảnh thì em chưa đo. Ngoài ra Docker mới có cấu hình hợp lệ chứ chưa build thật, và giấy phép một phần bộ dữ liệu chưa rõ — em ghi nhận từ đầu.</a:t>
-            </a:r>
-          </a:p>
-        </p:txBody>
-      </p:sp>
     </p:spTree>
   </p:cSld>
 </p:sld>
@@ -15717,14 +16047,15 @@
           <a:lstStyle/>
           <a:p>
             <a:pPr lvl="0" indent="0" marL="0">
-              <a:spcBef>
-                <a:spcPts val="3000"/>
-              </a:spcBef>
-              <a:buNone/>
-            </a:pPr>
-            <a:r>
-              <a:rPr b="1"/>
-              <a:t>S19 — Hướng phát triển</a:t>
+              <a:buNone/>
+            </a:pPr>
+            <a:r>
+              <a:rPr b="1"/>
+              <a:t>Ba thiên lệch dữ liệu đã đo được:</a:t>
+            </a:r>
+            <a:r>
+              <a:rPr/>
+              <a:t> ảnh gần như chỉ có 1 biển (90,8%) · biển tập trung giữa khung (heatmap x≈0,46–0,50) · box cực nhỏ tập trung ở biển xe máy (p05 diện tích 0,244% so với 1,002%)</a:t>
             </a:r>
           </a:p>
           <a:p>
@@ -15733,7 +16064,21 @@
             </a:pPr>
             <a:r>
               <a:rPr b="1"/>
-              <a:t>Nội dung trên slide</a:t>
+              <a:t>Hình / Bảng</a:t>
+            </a:r>
+          </a:p>
+          <a:p>
+            <a:pPr lvl="0"/>
+            <a:r>
+              <a:rPr/>
+              <a:t>Bảng như trên, cột trạng thái dùng ký hiệu ❌ / ⚠️ nhất quán</a:t>
+            </a:r>
+          </a:p>
+          <a:p>
+            <a:pPr lvl="0"/>
+            <a:r>
+              <a:rPr/>
+              <a:t>Không thêm hình — slide này để chữ nói</a:t>
             </a:r>
           </a:p>
           <a:p>
@@ -15742,183 +16087,6 @@
             </a:pPr>
             <a:r>
               <a:rPr b="1"/>
-              <a:t>Ngắn hạn — xử lý nút thắt còn lại:</a:t>
-            </a:r>
-          </a:p>
-          <a:p>
-            <a:pPr lvl="0" indent="-342900" marL="342900">
-              <a:buAutoNum type="arabicPeriod"/>
-            </a:pPr>
-            <a:r>
-              <a:rPr b="1"/>
-              <a:t>Cải thiện OCR biển 2 dòng</a:t>
-            </a:r>
-            <a:r>
-              <a:rPr/>
-              <a:t> — nơi chứa toàn bộ 36,8 điểm khoảng cách. Sửa hai luật ánh xạ sai đích (</a:t>
-            </a:r>
-            <a:r>
-              <a:rPr>
-                <a:latin typeface="Courier"/>
-              </a:rPr>
-              <a:t>L→1</a:t>
-            </a:r>
-            <a:r>
-              <a:rPr/>
-              <a:t> phải là </a:t>
-            </a:r>
-            <a:r>
-              <a:rPr>
-                <a:latin typeface="Courier"/>
-              </a:rPr>
-              <a:t>L→4</a:t>
-            </a:r>
-            <a:r>
-              <a:rPr/>
-              <a:t>; </a:t>
-            </a:r>
-            <a:r>
-              <a:rPr>
-                <a:latin typeface="Courier"/>
-              </a:rPr>
-              <a:t>7→T</a:t>
-            </a:r>
-            <a:r>
-              <a:rPr/>
-              <a:t> phải là </a:t>
-            </a:r>
-            <a:r>
-              <a:rPr>
-                <a:latin typeface="Courier"/>
-              </a:rPr>
-              <a:t>7→Z</a:t>
-            </a:r>
-            <a:r>
-              <a:rPr/>
-              <a:t>), xử lý 217 ca mất trọn một dòng và ký tự ma ở đường ghép hstack</a:t>
-            </a:r>
-          </a:p>
-          <a:p>
-            <a:pPr lvl="0" indent="-342900" marL="342900">
-              <a:buAutoNum type="arabicPeriod"/>
-            </a:pPr>
-            <a:r>
-              <a:rPr b="1"/>
-              <a:t>Gán nhãn chuỗi cho 300–500 ảnh test v3</a:t>
-            </a:r>
-            <a:r>
-              <a:rPr/>
-              <a:t> ⇒ đo được NFR-A7 đúng cách (không phải trên crop ngoài phân bố)</a:t>
-            </a:r>
-          </a:p>
-          <a:p>
-            <a:pPr lvl="0" indent="-342900" marL="342900">
-              <a:buAutoNum type="arabicPeriod"/>
-            </a:pPr>
-            <a:r>
-              <a:rPr b="1"/>
-              <a:t>Tự benchmark 3 engine OCR</a:t>
-            </a:r>
-            <a:r>
-              <a:rPr/>
-              <a:t> trên tập biển số Việt Nam có nhãn</a:t>
-            </a:r>
-          </a:p>
-          <a:p>
-            <a:pPr lvl="0" indent="-342900" marL="342900">
-              <a:buAutoNum type="arabicPeriod"/>
-            </a:pPr>
-            <a:r>
-              <a:rPr b="1"/>
-              <a:t>Đo NFR-P2/P3 (webcam/video), A9, R5</a:t>
-            </a:r>
-            <a:r>
-              <a:rPr/>
-              <a:t> — các chế độ còn thiếu</a:t>
-            </a:r>
-          </a:p>
-          <a:p>
-            <a:pPr lvl="0" indent="0" marL="0">
-              <a:buNone/>
-            </a:pPr>
-            <a:r>
-              <a:rPr b="1"/>
-              <a:t>Trung hạn — nâng chất lượng:</a:t>
-            </a:r>
-            <a:r>
-              <a:rPr/>
-              <a:t> 5. Fine-tune OCR trên biển số Việt Nam (charset </a:t>
-            </a:r>
-            <a:r>
-              <a:rPr b="1"/>
-              <a:t>36 ký tự</a:t>
-            </a:r>
-            <a:r>
-              <a:rPr/>
-              <a:t>, không thu hẹp) 6. Huấn luyện </a:t>
-            </a:r>
-            <a:r>
-              <a:rPr b="1"/>
-              <a:t>YOLO26n song song làm đối chứng</a:t>
-            </a:r>
-            <a:r>
-              <a:rPr/>
-              <a:t> — trên giấy tờ tốt hơn ở cả 3 chỉ số nhưng chưa có tiền lệ ALPR nào 7. Xuất </a:t>
-            </a:r>
-            <a:r>
-              <a:rPr b="1"/>
-              <a:t>ONNX Runtime</a:t>
-            </a:r>
-            <a:r>
-              <a:rPr/>
-              <a:t> để giảm độ trễ — đường tối ưu đầu tiên, trước khi nghĩ tới giảm </a:t>
-            </a:r>
-            <a:r>
-              <a:rPr>
-                <a:latin typeface="Courier"/>
-              </a:rPr>
-              <a:t>imgsz</a:t>
-            </a:r>
-            <a:r>
-              <a:rPr/>
-              <a:t> 8. Tự chụp một bộ test có nhãn ở đúng bối cảnh triển khai (bãi xe, cổng cơ quan)</a:t>
-            </a:r>
-          </a:p>
-          <a:p>
-            <a:pPr lvl="0" indent="0" marL="0">
-              <a:buNone/>
-            </a:pPr>
-            <a:r>
-              <a:rPr b="1"/>
-              <a:t>Nếu triển khai thật — 6 việc theo thứ tự ưu tiên:</a:t>
-            </a:r>
-            <a:r>
-              <a:rPr/>
-              <a:t> xác thực + phân quyền → SQLite sang PostgreSQL → kiểm thử chịu tải → ONNX Runtime → làm rõ giấy phép dữ liệu → giám sát suy giảm mô hình</a:t>
-            </a:r>
-          </a:p>
-          <a:p>
-            <a:pPr lvl="0" indent="0" marL="0">
-              <a:buNone/>
-            </a:pPr>
-            <a:r>
-              <a:rPr b="1"/>
-              <a:t>Hình / Bảng</a:t>
-            </a:r>
-          </a:p>
-          <a:p>
-            <a:pPr lvl="0"/>
-            <a:r>
-              <a:rPr/>
-              <a:t>Lộ trình 3 mốc theo trục ngang: ngắn hạn / trung hạn / triển khai thật</a:t>
-            </a:r>
-          </a:p>
-          <a:p>
-            <a:pPr lvl="0" indent="0" marL="0">
-              <a:buNone/>
-            </a:pPr>
-            <a:r>
-              <a:rPr b="1"/>
               <a:t>Speaker notes</a:t>
             </a:r>
             <a:r>
@@ -15927,7 +16095,7 @@
             </a:r>
             <a:r>
               <a:rPr i="1"/>
-              <a:t>(35 s)</a:t>
+              <a:t>(45 s)</a:t>
             </a:r>
           </a:p>
           <a:p>
@@ -15936,7 +16104,7 @@
             </a:pPr>
             <a:r>
               <a:rPr sz="2000"/>
-              <a:t>Hướng phát triển của em chia ba mốc.</a:t>
+              <a:t>Đây là slide em muốn trình bày thẳng.</a:t>
             </a:r>
           </a:p>
           <a:p>
@@ -15945,7 +16113,15 @@
             </a:pPr>
             <a:r>
               <a:rPr sz="2000"/>
-              <a:t>Ngắn hạn là mở khoá những thứ đang bị chặn: hoàn thành huấn luyện, gộp xong hai bộ dữ liệu có nhãn ký tự — riêng việc này mở khoá bốn chỉ tiêu cùng lúc — và tự chạy benchmark ba engine OCR. Đó là việc đầu tiên em làm nếu tiếp tục đề tài.</a:t>
+              <a:t>Hạn chế lớn nhất, và em nói thẳng: </a:t>
+            </a:r>
+            <a:r>
+              <a:rPr sz="2000" b="1"/>
+              <a:t>OCR biển hai dòng không đạt chỉ tiêu</a:t>
+            </a:r>
+            <a:r>
+              <a:rPr sz="2000"/>
+              <a:t>. Char-accuracy tổng 0,873, exact-match sau xử lý 0,656 — đều dưới ngưỡng. Toàn bộ khoảng cách nằm ở biển hai dòng: biển một dòng đạt 0,99 và 0,95, vượt mục tiêu; biển hai dòng chỉ 0,85 và 0,58. Vì xe máy chiếm gần 80% tập nhãn nên nó kéo tổng xuống. Đây là kết quả thật, em không tô hồng, và em đã phân tích nguyên nhân: OCR dòng đơn đọc kém hai dòng dù đã tách-rồi-ghép.</a:t>
             </a:r>
           </a:p>
           <a:p>
@@ -15954,16 +16130,7 @@
             </a:pPr>
             <a:r>
               <a:rPr sz="2000"/>
-              <a:t>Trung hạn là fine-tune OCR trên biển số Việt Nam, huấn luyện YOLO26 song song làm đối chứng, và xuất sang ONNX Runtime để giảm độ trễ.</a:t>
-            </a:r>
-          </a:p>
-          <a:p>
-            <a:pPr lvl="0" indent="0" marL="1270000">
-              <a:buNone/>
-            </a:pPr>
-            <a:r>
-              <a:rPr sz="2000"/>
-              <a:t>Còn nếu triển khai thật thì việc số một là xác thực và phân quyền — vì lịch sử biển số là dữ liệu có thể truy vết cá nhân, không có xác thực thì bất kỳ ai vào được mạng đều xem được toàn bộ.</a:t>
+              <a:t>Hai, NFR-A7 đo E2E ra 0,52 nhưng con số này không đại diện, vì không bộ dữ liệu nào vừa có ảnh toàn cảnh vừa có chuỗi biển, nên em buộc phải đo trên ảnh crop — ngoài phân bố của detector. Ba, một số chỉ tiêu như FPS webcam, xử lý video, điều kiện ảnh thì em chưa đo. Ngoài ra Docker mới có cấu hình hợp lệ chứ chưa build thật, và giấy phép một phần bộ dữ liệu chưa rõ — em ghi nhận từ đầu.</a:t>
             </a:r>
           </a:p>
         </p:txBody>
@@ -15974,6 +16141,295 @@
 </file>
 
 <file path=ppt/slides/slide45.xml><?xml version="1.0" encoding="utf-8"?>
+<p:sld xmlns:a="http://schemas.openxmlformats.org/drawingml/2006/main" xmlns:r="http://schemas.openxmlformats.org/officeDocument/2006/relationships" xmlns:p="http://schemas.openxmlformats.org/presentationml/2006/main">
+  <p:cSld>
+    <p:spTree>
+      <p:nvGrpSpPr>
+        <p:cNvPr id="1" name=""/>
+        <p:cNvGrpSpPr/>
+        <p:nvPr/>
+      </p:nvGrpSpPr>
+      <p:grpSpPr>
+        <a:xfrm>
+          <a:off x="0" y="0"/>
+          <a:ext cx="0" cy="0"/>
+          <a:chOff x="0" y="0"/>
+          <a:chExt cx="0" cy="0"/>
+        </a:xfrm>
+      </p:grpSpPr>
+      <p:sp>
+        <p:nvSpPr>
+          <p:cNvPr id="3" name="Content Placeholder 2"/>
+          <p:cNvSpPr>
+            <a:spLocks noGrp="1"/>
+          </p:cNvSpPr>
+          <p:nvPr>
+            <p:ph idx="1"/>
+          </p:nvPr>
+        </p:nvSpPr>
+        <p:spPr/>
+        <p:txBody>
+          <a:bodyPr/>
+          <a:lstStyle/>
+          <a:p>
+            <a:pPr lvl="0" indent="0" marL="0">
+              <a:spcBef>
+                <a:spcPts val="3000"/>
+              </a:spcBef>
+              <a:buNone/>
+            </a:pPr>
+            <a:r>
+              <a:rPr b="1"/>
+              <a:t>S19 — Hướng phát triển</a:t>
+            </a:r>
+          </a:p>
+          <a:p>
+            <a:pPr lvl="0" indent="0" marL="0">
+              <a:buNone/>
+            </a:pPr>
+            <a:r>
+              <a:rPr b="1"/>
+              <a:t>Nội dung trên slide</a:t>
+            </a:r>
+          </a:p>
+          <a:p>
+            <a:pPr lvl="0" indent="0" marL="0">
+              <a:buNone/>
+            </a:pPr>
+            <a:r>
+              <a:rPr b="1"/>
+              <a:t>Ngắn hạn — xử lý nút thắt còn lại:</a:t>
+            </a:r>
+          </a:p>
+          <a:p>
+            <a:pPr lvl="0" indent="-342900" marL="342900">
+              <a:buAutoNum type="arabicPeriod"/>
+            </a:pPr>
+            <a:r>
+              <a:rPr b="1"/>
+              <a:t>Cải thiện OCR biển 2 dòng</a:t>
+            </a:r>
+            <a:r>
+              <a:rPr/>
+              <a:t> — nơi chứa toàn bộ 36,8 điểm khoảng cách. Sửa hai luật ánh xạ sai đích (</a:t>
+            </a:r>
+            <a:r>
+              <a:rPr>
+                <a:latin typeface="Courier"/>
+              </a:rPr>
+              <a:t>L→1</a:t>
+            </a:r>
+            <a:r>
+              <a:rPr/>
+              <a:t> phải là </a:t>
+            </a:r>
+            <a:r>
+              <a:rPr>
+                <a:latin typeface="Courier"/>
+              </a:rPr>
+              <a:t>L→4</a:t>
+            </a:r>
+            <a:r>
+              <a:rPr/>
+              <a:t>; </a:t>
+            </a:r>
+            <a:r>
+              <a:rPr>
+                <a:latin typeface="Courier"/>
+              </a:rPr>
+              <a:t>7→T</a:t>
+            </a:r>
+            <a:r>
+              <a:rPr/>
+              <a:t> phải là </a:t>
+            </a:r>
+            <a:r>
+              <a:rPr>
+                <a:latin typeface="Courier"/>
+              </a:rPr>
+              <a:t>7→Z</a:t>
+            </a:r>
+            <a:r>
+              <a:rPr/>
+              <a:t>), xử lý 217 ca mất trọn một dòng và ký tự ma ở đường ghép hstack</a:t>
+            </a:r>
+          </a:p>
+          <a:p>
+            <a:pPr lvl="0" indent="-342900" marL="342900">
+              <a:buAutoNum type="arabicPeriod"/>
+            </a:pPr>
+            <a:r>
+              <a:rPr b="1"/>
+              <a:t>Gán nhãn chuỗi cho 300–500 ảnh test v3</a:t>
+            </a:r>
+            <a:r>
+              <a:rPr/>
+              <a:t> ⇒ đo được NFR-A7 đúng cách (không phải trên crop ngoài phân bố)</a:t>
+            </a:r>
+          </a:p>
+          <a:p>
+            <a:pPr lvl="0" indent="-342900" marL="342900">
+              <a:buAutoNum type="arabicPeriod"/>
+            </a:pPr>
+            <a:r>
+              <a:rPr b="1"/>
+              <a:t>Tự benchmark 3 engine OCR</a:t>
+            </a:r>
+            <a:r>
+              <a:rPr/>
+              <a:t> trên tập biển số Việt Nam có nhãn</a:t>
+            </a:r>
+          </a:p>
+          <a:p>
+            <a:pPr lvl="0" indent="-342900" marL="342900">
+              <a:buAutoNum type="arabicPeriod"/>
+            </a:pPr>
+            <a:r>
+              <a:rPr b="1"/>
+              <a:t>Đo NFR-P2/P3 (webcam/video), A9, R5</a:t>
+            </a:r>
+            <a:r>
+              <a:rPr/>
+              <a:t> — các chế độ còn thiếu</a:t>
+            </a:r>
+          </a:p>
+          <a:p>
+            <a:pPr lvl="0" indent="0" marL="0">
+              <a:buNone/>
+            </a:pPr>
+            <a:r>
+              <a:rPr b="1"/>
+              <a:t>Trung hạn — nâng chất lượng:</a:t>
+            </a:r>
+            <a:r>
+              <a:rPr/>
+              <a:t> 5. Fine-tune OCR trên biển số Việt Nam (charset </a:t>
+            </a:r>
+            <a:r>
+              <a:rPr b="1"/>
+              <a:t>36 ký tự</a:t>
+            </a:r>
+            <a:r>
+              <a:rPr/>
+              <a:t>, không thu hẹp) 6. Huấn luyện </a:t>
+            </a:r>
+            <a:r>
+              <a:rPr b="1"/>
+              <a:t>YOLO26n song song làm đối chứng</a:t>
+            </a:r>
+            <a:r>
+              <a:rPr/>
+              <a:t> — trên giấy tờ tốt hơn ở cả 3 chỉ số nhưng chưa có tiền lệ ALPR nào 7. Xuất </a:t>
+            </a:r>
+            <a:r>
+              <a:rPr b="1"/>
+              <a:t>ONNX Runtime</a:t>
+            </a:r>
+            <a:r>
+              <a:rPr/>
+              <a:t> để giảm độ trễ — đường tối ưu đầu tiên, trước khi nghĩ tới giảm </a:t>
+            </a:r>
+            <a:r>
+              <a:rPr>
+                <a:latin typeface="Courier"/>
+              </a:rPr>
+              <a:t>imgsz</a:t>
+            </a:r>
+            <a:r>
+              <a:rPr/>
+              <a:t> 8. Tự chụp một bộ test có nhãn ở đúng bối cảnh triển khai (bãi xe, cổng cơ quan)</a:t>
+            </a:r>
+          </a:p>
+          <a:p>
+            <a:pPr lvl="0" indent="0" marL="0">
+              <a:buNone/>
+            </a:pPr>
+            <a:r>
+              <a:rPr b="1"/>
+              <a:t>Nếu triển khai thật — 6 việc theo thứ tự ưu tiên:</a:t>
+            </a:r>
+            <a:r>
+              <a:rPr/>
+              <a:t> xác thực + phân quyền → SQLite sang PostgreSQL → kiểm thử chịu tải → ONNX Runtime → làm rõ giấy phép dữ liệu → giám sát suy giảm mô hình</a:t>
+            </a:r>
+          </a:p>
+          <a:p>
+            <a:pPr lvl="0" indent="0" marL="0">
+              <a:buNone/>
+            </a:pPr>
+            <a:r>
+              <a:rPr b="1"/>
+              <a:t>Hình / Bảng</a:t>
+            </a:r>
+          </a:p>
+          <a:p>
+            <a:pPr lvl="0"/>
+            <a:r>
+              <a:rPr/>
+              <a:t>Lộ trình 3 mốc theo trục ngang: ngắn hạn / trung hạn / triển khai thật</a:t>
+            </a:r>
+          </a:p>
+          <a:p>
+            <a:pPr lvl="0" indent="0" marL="0">
+              <a:buNone/>
+            </a:pPr>
+            <a:r>
+              <a:rPr b="1"/>
+              <a:t>Speaker notes</a:t>
+            </a:r>
+            <a:r>
+              <a:rPr/>
+              <a:t> </a:t>
+            </a:r>
+            <a:r>
+              <a:rPr i="1"/>
+              <a:t>(35 s)</a:t>
+            </a:r>
+          </a:p>
+          <a:p>
+            <a:pPr lvl="0" indent="0" marL="1270000">
+              <a:buNone/>
+            </a:pPr>
+            <a:r>
+              <a:rPr sz="2000"/>
+              <a:t>Hướng phát triển của em chia ba mốc.</a:t>
+            </a:r>
+          </a:p>
+          <a:p>
+            <a:pPr lvl="0" indent="0" marL="1270000">
+              <a:buNone/>
+            </a:pPr>
+            <a:r>
+              <a:rPr sz="2000"/>
+              <a:t>Ngắn hạn là mở khoá những thứ đang bị chặn: hoàn thành huấn luyện, gộp xong hai bộ dữ liệu có nhãn ký tự — riêng việc này mở khoá bốn chỉ tiêu cùng lúc — và tự chạy benchmark ba engine OCR. Đó là việc đầu tiên em làm nếu tiếp tục đề tài.</a:t>
+            </a:r>
+          </a:p>
+          <a:p>
+            <a:pPr lvl="0" indent="0" marL="1270000">
+              <a:buNone/>
+            </a:pPr>
+            <a:r>
+              <a:rPr sz="2000"/>
+              <a:t>Trung hạn là fine-tune OCR trên biển số Việt Nam, huấn luyện YOLO26 song song làm đối chứng, và xuất sang ONNX Runtime để giảm độ trễ.</a:t>
+            </a:r>
+          </a:p>
+          <a:p>
+            <a:pPr lvl="0" indent="0" marL="1270000">
+              <a:buNone/>
+            </a:pPr>
+            <a:r>
+              <a:rPr sz="2000"/>
+              <a:t>Còn nếu triển khai thật thì việc số một là xác thực và phân quyền — vì lịch sử biển số là dữ liệu có thể truy vết cá nhân, không có xác thực thì bất kỳ ai vào được mạng đều xem được toàn bộ.</a:t>
+            </a:r>
+          </a:p>
+        </p:txBody>
+      </p:sp>
+    </p:spTree>
+  </p:cSld>
+</p:sld>
+</file>
+
+<file path=ppt/slides/slide46.xml><?xml version="1.0" encoding="utf-8"?>
 <p:sld xmlns:a="http://schemas.openxmlformats.org/drawingml/2006/main" xmlns:r="http://schemas.openxmlformats.org/officeDocument/2006/relationships" xmlns:p="http://schemas.openxmlformats.org/presentationml/2006/main">
   <p:cSld>
     <p:spTree>
@@ -16460,7 +16916,7 @@
                       </a:pPr>
                       <a:r>
                         <a:rPr/>
-                        <a:t>5 tầng · 10 endpoint · 5 trang</a:t>
+                        <a:t>5 tầng · 10 endpoint · 3 trang</a:t>
                       </a:r>
                     </a:p>
                   </a:txBody>
@@ -16475,7 +16931,7 @@
 </p:sld>
 </file>
 
-<file path=ppt/slides/slide46.xml><?xml version="1.0" encoding="utf-8"?>
+<file path=ppt/slides/slide47.xml><?xml version="1.0" encoding="utf-8"?>
 <p:sld xmlns:a="http://schemas.openxmlformats.org/drawingml/2006/main" xmlns:r="http://schemas.openxmlformats.org/officeDocument/2006/relationships" xmlns:p="http://schemas.openxmlformats.org/presentationml/2006/main">
   <p:cSld>
     <p:spTree>
@@ -16639,7 +17095,7 @@
 </p:sld>
 </file>
 
-<file path=ppt/slides/slide47.xml><?xml version="1.0" encoding="utf-8"?>
+<file path=ppt/slides/slide48.xml><?xml version="1.0" encoding="utf-8"?>
 <p:sld xmlns:a="http://schemas.openxmlformats.org/drawingml/2006/main" xmlns:r="http://schemas.openxmlformats.org/officeDocument/2006/relationships" xmlns:p="http://schemas.openxmlformats.org/presentationml/2006/main">
   <p:cSld>
     <p:spTree>
@@ -17011,93 +17467,6 @@
           </a:graphicData>
         </a:graphic>
       </p:graphicFrame>
-    </p:spTree>
-  </p:cSld>
-</p:sld>
-</file>
-
-<file path=ppt/slides/slide48.xml><?xml version="1.0" encoding="utf-8"?>
-<p:sld xmlns:a="http://schemas.openxmlformats.org/drawingml/2006/main" xmlns:r="http://schemas.openxmlformats.org/officeDocument/2006/relationships" xmlns:p="http://schemas.openxmlformats.org/presentationml/2006/main">
-  <p:cSld>
-    <p:spTree>
-      <p:nvGrpSpPr>
-        <p:cNvPr id="1" name=""/>
-        <p:cNvGrpSpPr/>
-        <p:nvPr/>
-      </p:nvGrpSpPr>
-      <p:grpSpPr>
-        <a:xfrm>
-          <a:off x="0" y="0"/>
-          <a:ext cx="0" cy="0"/>
-          <a:chOff x="0" y="0"/>
-          <a:chExt cx="0" cy="0"/>
-        </a:xfrm>
-      </p:grpSpPr>
-      <p:sp>
-        <p:nvSpPr>
-          <p:cNvPr id="3" name="Content Placeholder 2"/>
-          <p:cNvSpPr>
-            <a:spLocks noGrp="1"/>
-          </p:cNvSpPr>
-          <p:nvPr>
-            <p:ph idx="1"/>
-          </p:nvPr>
-        </p:nvSpPr>
-        <p:spPr/>
-        <p:txBody>
-          <a:bodyPr/>
-          <a:lstStyle/>
-          <a:p>
-            <a:pPr lvl="0" indent="0" marL="0">
-              <a:buNone/>
-            </a:pPr>
-            <a:r>
-              <a:rPr b="1"/>
-              <a:t>Hình / Bảng</a:t>
-            </a:r>
-          </a:p>
-          <a:p>
-            <a:pPr lvl="0"/>
-            <a:r>
-              <a:rPr/>
-              <a:t>Nền tối giản, chữ lớn</a:t>
-            </a:r>
-          </a:p>
-          <a:p>
-            <a:pPr lvl="0"/>
-            <a:r>
-              <a:rPr/>
-              <a:t>Không dùng hình động</a:t>
-            </a:r>
-          </a:p>
-          <a:p>
-            <a:pPr lvl="0" indent="0" marL="0">
-              <a:buNone/>
-            </a:pPr>
-            <a:r>
-              <a:rPr b="1"/>
-              <a:t>Speaker notes</a:t>
-            </a:r>
-            <a:r>
-              <a:rPr/>
-              <a:t> </a:t>
-            </a:r>
-            <a:r>
-              <a:rPr i="1"/>
-              <a:t>(20 s)</a:t>
-            </a:r>
-          </a:p>
-          <a:p>
-            <a:pPr lvl="0" indent="0" marL="1270000">
-              <a:buNone/>
-            </a:pPr>
-            <a:r>
-              <a:rPr sz="2000"/>
-              <a:t>Phần trình bày của em đến đây là hết. Em xin chân thành cảm ơn thầy/cô [tên] đã hướng dẫn em trong suốt quá trình làm đồ án, và cảm ơn hội đồng đã lắng nghe. Em xin sẵn sàng nhận câu hỏi ạ.</a:t>
-            </a:r>
-          </a:p>
-        </p:txBody>
-      </p:sp>
     </p:spTree>
   </p:cSld>
 </p:sld>
@@ -17136,14 +17505,25 @@
           <a:lstStyle/>
           <a:p>
             <a:pPr lvl="0" indent="0" marL="0">
-              <a:spcBef>
-                <a:spcPts val="3000"/>
-              </a:spcBef>
-              <a:buNone/>
-            </a:pPr>
-            <a:r>
-              <a:rPr b="1"/>
-              <a:t>Checklist trước khi vào phòng</a:t>
+              <a:buNone/>
+            </a:pPr>
+            <a:r>
+              <a:rPr b="1"/>
+              <a:t>Hình / Bảng</a:t>
+            </a:r>
+          </a:p>
+          <a:p>
+            <a:pPr lvl="0"/>
+            <a:r>
+              <a:rPr/>
+              <a:t>Nền tối giản, chữ lớn</a:t>
+            </a:r>
+          </a:p>
+          <a:p>
+            <a:pPr lvl="0"/>
+            <a:r>
+              <a:rPr/>
+              <a:t>Không dùng hình động</a:t>
             </a:r>
           </a:p>
           <a:p>
@@ -17152,155 +17532,24 @@
             </a:pPr>
             <a:r>
               <a:rPr b="1"/>
-              <a:t>Về nội dung slide</a:t>
-            </a:r>
-          </a:p>
-          <a:p>
-            <a:pPr lvl="0"/>
-            <a:r>
-              <a:rPr/>
-              <a:t>☐ S12, S15, S17 — cập nhật số mới nhất nếu huấn luyện / đo đã có kết quả; nếu chưa thì </a:t>
-            </a:r>
-            <a:r>
-              <a:rPr b="1"/>
-              <a:t>giữ nguyên ô trống</a:t>
-            </a:r>
-            <a:r>
-              <a:rPr/>
-              <a:t>, đừng xoá bảng</a:t>
-            </a:r>
-          </a:p>
-          <a:p>
-            <a:pPr lvl="0"/>
-            <a:r>
-              <a:rPr/>
-              <a:t>☐ S13 — đã render ảnh minh hoạ split-then-hstack chưa (hình quan trọng nhất, hiện </a:t>
-            </a:r>
-            <a:r>
-              <a:rPr b="1"/>
-              <a:t>còn thiếu</a:t>
-            </a:r>
-            <a:r>
-              <a:rPr/>
-              <a:t>)</a:t>
-            </a:r>
-          </a:p>
-          <a:p>
-            <a:pPr lvl="0"/>
-            <a:r>
-              <a:rPr/>
-              <a:t>☐ Mọi con số trên slide đọc lại từ file nguồn, không chép tay</a:t>
-            </a:r>
-          </a:p>
-          <a:p>
-            <a:pPr lvl="0"/>
-            <a:r>
-              <a:rPr/>
-              <a:t>☐ Slide S2 ghi rõ cảnh báo phạm vi áp dụng "số liệu Brazil, không phải Việt Nam"</a:t>
-            </a:r>
-          </a:p>
-          <a:p>
-            <a:pPr lvl="0" indent="0" marL="0">
-              <a:buNone/>
-            </a:pPr>
-            <a:r>
-              <a:rPr b="1"/>
-              <a:t>Về kỹ thuật</a:t>
-            </a:r>
-          </a:p>
-          <a:p>
-            <a:pPr lvl="0"/>
-            <a:r>
-              <a:rPr/>
-              <a:t>☐ Backend và frontend </a:t>
-            </a:r>
-            <a:r>
-              <a:rPr b="1"/>
-              <a:t>đã khởi động trước khi vào phòng</a:t>
-            </a:r>
-            <a:r>
-              <a:rPr/>
-              <a:t> — đừng để lần chạy đầu của buổi bảo vệ là lần khởi động server</a:t>
-            </a:r>
-          </a:p>
-          <a:p>
-            <a:pPr lvl="0"/>
-            <a:r>
-              <a:rPr/>
-              <a:t>☐ 2–3 ảnh test đã biết chắc chạy được, để sẵn trên desktop</a:t>
-            </a:r>
-          </a:p>
-          <a:p>
-            <a:pPr lvl="0"/>
-            <a:r>
-              <a:rPr/>
-              <a:t>☐ Tab Swagger mở sẵn</a:t>
-            </a:r>
-          </a:p>
-          <a:p>
-            <a:pPr lvl="0"/>
-            <a:r>
-              <a:rPr/>
-              <a:t>☐ File slide xuất </a:t>
-            </a:r>
-            <a:r>
-              <a:rPr b="1"/>
-              <a:t>PDF dự phòng</a:t>
-            </a:r>
-            <a:r>
-              <a:rPr/>
-              <a:t> — không phụ thuộc máy chiếu hiểu được định dạng gốc</a:t>
-            </a:r>
-          </a:p>
-          <a:p>
-            <a:pPr lvl="0"/>
-            <a:r>
-              <a:rPr/>
-              <a:t>☐ Ảnh nhúng hết vào file, không link ngoài</a:t>
-            </a:r>
-          </a:p>
-          <a:p>
-            <a:pPr lvl="0" indent="0" marL="0">
-              <a:buNone/>
-            </a:pPr>
-            <a:r>
-              <a:rPr b="1"/>
-              <a:t>Về trả lời</a:t>
-            </a:r>
-          </a:p>
-          <a:p>
-            <a:pPr lvl="0"/>
-            <a:r>
-              <a:rPr/>
-              <a:t>☐ Đọc lại </a:t>
-            </a:r>
-            <a:r>
-              <a:rPr>
-                <a:latin typeface="Courier"/>
-              </a:rPr>
-              <a:t>docs/slides/10-defense-qa.md</a:t>
-            </a:r>
-            <a:r>
-              <a:rPr/>
-              <a:t>, đặc biệt mục "Ba câu dễ trả lời sai nhất": mAP 0,983 có rò rỉ không (C3) · vì sao OCR biển 2 dòng không đạt (D1) · tốc độ bao nhiêu, sao con số cũ 5.857 ms (F3)</a:t>
-            </a:r>
-          </a:p>
-          <a:p>
-            <a:pPr lvl="0"/>
-            <a:r>
-              <a:rPr/>
-              <a:t>☐ Thuộc bảng số liệu tra nhanh ở S21</a:t>
-            </a:r>
-          </a:p>
-          <a:p>
-            <a:pPr lvl="0"/>
-            <a:r>
-              <a:rPr/>
-              <a:t>☐ Nhớ nguyên tắc: </a:t>
-            </a:r>
-            <a:r>
-              <a:rPr b="1"/>
-              <a:t>chưa đo thì nói chưa đo</a:t>
+              <a:t>Speaker notes</a:t>
+            </a:r>
+            <a:r>
+              <a:rPr/>
+              <a:t> </a:t>
+            </a:r>
+            <a:r>
+              <a:rPr i="1"/>
+              <a:t>(20 s)</a:t>
+            </a:r>
+          </a:p>
+          <a:p>
+            <a:pPr lvl="0" indent="0" marL="1270000">
+              <a:buNone/>
+            </a:pPr>
+            <a:r>
+              <a:rPr sz="2000"/>
+              <a:t>Phần trình bày của em đến đây là hết. Em xin chân thành cảm ơn thầy/cô [tên] đã hướng dẫn em trong suốt quá trình làm đồ án, và cảm ơn hội đồng đã lắng nghe. Em xin sẵn sàng nhận câu hỏi ạ.</a:t>
             </a:r>
           </a:p>
         </p:txBody>
@@ -17770,28 +18019,96 @@
                       </a:pPr>
                       <a:r>
                         <a:rPr/>
-                        <a:t>✅ Có ảnh</a:t>
-                      </a:r>
-                    </a:p>
-                  </a:txBody>
-                </a:tc>
-                <a:tc>
-                  <a:txBody>
-                    <a:bodyPr/>
-                    <a:lstStyle/>
-                    <a:p>
-                      <a:pPr lvl="0" indent="0" marL="0">
-                        <a:buNone/>
-                      </a:pPr>
-                      <a:r>
-                        <a:rPr/>
-                        <a:t>Đã có 5 ảnh trong </a:t>
+                        <a:t>⚠️ Có ảnh, </a:t>
+                      </a:r>
+                      <a:r>
+                        <a:rPr b="1"/>
+                        <a:t>cần chụp lại</a:t>
+                      </a:r>
+                    </a:p>
+                  </a:txBody>
+                </a:tc>
+                <a:tc>
+                  <a:txBody>
+                    <a:bodyPr/>
+                    <a:lstStyle/>
+                    <a:p>
+                      <a:pPr lvl="0" indent="0" marL="0">
+                        <a:buNone/>
+                      </a:pPr>
+                      <a:r>
+                        <a:rPr/>
+                        <a:t>Còn </a:t>
+                      </a:r>
+                      <a:r>
+                        <a:rPr b="1"/>
+                        <a:t>3 ảnh dùng được</a:t>
+                      </a:r>
+                      <a:r>
+                        <a:rPr/>
+                        <a:t> trong </a:t>
                       </a:r>
                       <a:r>
                         <a:rPr>
                           <a:latin typeface="Courier"/>
                         </a:rPr>
                         <a:t>docs/screenshots/</a:t>
+                      </a:r>
+                      <a:r>
+                        <a:rPr/>
+                        <a:t> (</a:t>
+                      </a:r>
+                      <a:r>
+                        <a:rPr>
+                          <a:latin typeface="Courier"/>
+                        </a:rPr>
+                        <a:t>image-detection</a:t>
+                      </a:r>
+                      <a:r>
+                        <a:rPr/>
+                        <a:t> · </a:t>
+                      </a:r>
+                      <a:r>
+                        <a:rPr>
+                          <a:latin typeface="Courier"/>
+                        </a:rPr>
+                        <a:t>video-detection</a:t>
+                      </a:r>
+                      <a:r>
+                        <a:rPr/>
+                        <a:t> · </a:t>
+                      </a:r>
+                      <a:r>
+                        <a:rPr>
+                          <a:latin typeface="Courier"/>
+                        </a:rPr>
+                        <a:t>history</a:t>
+                      </a:r>
+                      <a:r>
+                        <a:rPr/>
+                        <a:t>). </a:t>
+                      </a:r>
+                      <a:r>
+                        <a:rPr>
+                          <a:latin typeface="Courier"/>
+                        </a:rPr>
+                        <a:t>dashboard.png</a:t>
+                      </a:r>
+                      <a:r>
+                        <a:rPr/>
+                        <a:t> </a:t>
+                      </a:r>
+                      <a:r>
+                        <a:rPr b="1"/>
+                        <a:t>bỏ</a:t>
+                      </a:r>
+                      <a:r>
+                        <a:rPr/>
+                        <a:t> — trang Tổng quan đã gỡ 2026-07-20. Cả 3 ảnh chụp khi sidebar còn 5 mục và trang chủ còn là Tổng quan ⇒ </a:t>
+                      </a:r>
+                      <a:r>
+                        <a:rPr b="1"/>
+                        <a:t>chụp lại trước khi nộp</a:t>
                       </a:r>
                     </a:p>
                   </a:txBody>
@@ -17962,6 +18279,280 @@
 </file>
 
 <file path=ppt/slides/slide50.xml><?xml version="1.0" encoding="utf-8"?>
+<p:sld xmlns:a="http://schemas.openxmlformats.org/drawingml/2006/main" xmlns:r="http://schemas.openxmlformats.org/officeDocument/2006/relationships" xmlns:p="http://schemas.openxmlformats.org/presentationml/2006/main">
+  <p:cSld>
+    <p:spTree>
+      <p:nvGrpSpPr>
+        <p:cNvPr id="1" name=""/>
+        <p:cNvGrpSpPr/>
+        <p:nvPr/>
+      </p:nvGrpSpPr>
+      <p:grpSpPr>
+        <a:xfrm>
+          <a:off x="0" y="0"/>
+          <a:ext cx="0" cy="0"/>
+          <a:chOff x="0" y="0"/>
+          <a:chExt cx="0" cy="0"/>
+        </a:xfrm>
+      </p:grpSpPr>
+      <p:sp>
+        <p:nvSpPr>
+          <p:cNvPr id="3" name="Content Placeholder 2"/>
+          <p:cNvSpPr>
+            <a:spLocks noGrp="1"/>
+          </p:cNvSpPr>
+          <p:nvPr>
+            <p:ph idx="1"/>
+          </p:nvPr>
+        </p:nvSpPr>
+        <p:spPr/>
+        <p:txBody>
+          <a:bodyPr/>
+          <a:lstStyle/>
+          <a:p>
+            <a:pPr lvl="0" indent="0" marL="0">
+              <a:spcBef>
+                <a:spcPts val="3000"/>
+              </a:spcBef>
+              <a:buNone/>
+            </a:pPr>
+            <a:r>
+              <a:rPr b="1"/>
+              <a:t>Checklist trước khi vào phòng</a:t>
+            </a:r>
+          </a:p>
+          <a:p>
+            <a:pPr lvl="0" indent="0" marL="0">
+              <a:buNone/>
+            </a:pPr>
+            <a:r>
+              <a:rPr b="1"/>
+              <a:t>Về nội dung slide</a:t>
+            </a:r>
+          </a:p>
+          <a:p>
+            <a:pPr lvl="0"/>
+            <a:r>
+              <a:rPr/>
+              <a:t>☐ S12, S15, S17 — cập nhật số mới nhất nếu huấn luyện / đo đã có kết quả; nếu chưa thì </a:t>
+            </a:r>
+            <a:r>
+              <a:rPr b="1"/>
+              <a:t>giữ nguyên ô trống</a:t>
+            </a:r>
+            <a:r>
+              <a:rPr/>
+              <a:t>, đừng xoá bảng</a:t>
+            </a:r>
+          </a:p>
+          <a:p>
+            <a:pPr lvl="0"/>
+            <a:r>
+              <a:rPr/>
+              <a:t>☐ S13 — đã render ảnh minh hoạ split-then-hstack chưa (hình quan trọng nhất, hiện </a:t>
+            </a:r>
+            <a:r>
+              <a:rPr b="1"/>
+              <a:t>còn thiếu</a:t>
+            </a:r>
+            <a:r>
+              <a:rPr/>
+              <a:t>)</a:t>
+            </a:r>
+          </a:p>
+          <a:p>
+            <a:pPr lvl="0"/>
+            <a:r>
+              <a:rPr/>
+              <a:t>☐ Mọi con số trên slide đọc lại từ file nguồn, không chép tay</a:t>
+            </a:r>
+          </a:p>
+          <a:p>
+            <a:pPr lvl="0"/>
+            <a:r>
+              <a:rPr/>
+              <a:t>☐ Slide S2 ghi rõ cảnh báo phạm vi áp dụng "số liệu Brazil, không phải Việt Nam"</a:t>
+            </a:r>
+          </a:p>
+          <a:p>
+            <a:pPr lvl="0"/>
+            <a:r>
+              <a:rPr/>
+              <a:t>☐ </a:t>
+            </a:r>
+            <a:r>
+              <a:rPr b="1"/>
+              <a:t>S16 — chụp lại 3 ảnh màn hình</a:t>
+            </a:r>
+            <a:r>
+              <a:rPr/>
+              <a:t> (</a:t>
+            </a:r>
+            <a:r>
+              <a:rPr>
+                <a:latin typeface="Courier"/>
+              </a:rPr>
+              <a:t>image-detection</a:t>
+            </a:r>
+            <a:r>
+              <a:rPr/>
+              <a:t> · </a:t>
+            </a:r>
+            <a:r>
+              <a:rPr>
+                <a:latin typeface="Courier"/>
+              </a:rPr>
+              <a:t>video-detection</a:t>
+            </a:r>
+            <a:r>
+              <a:rPr/>
+              <a:t> · </a:t>
+            </a:r>
+            <a:r>
+              <a:rPr>
+                <a:latin typeface="Courier"/>
+              </a:rPr>
+              <a:t>history</a:t>
+            </a:r>
+            <a:r>
+              <a:rPr/>
+              <a:t>). Bản đang có chụp lúc sidebar còn 5 mục và trang chủ còn là Tổng quan; giao diện nay còn </a:t>
+            </a:r>
+            <a:r>
+              <a:rPr b="1"/>
+              <a:t>3 trang</a:t>
+            </a:r>
+            <a:r>
+              <a:rPr/>
+              <a:t>, trang chủ là Nhận dạng ảnh, </a:t>
+            </a:r>
+            <a:r>
+              <a:rPr b="1"/>
+              <a:t>không còn trang Tổng quan</a:t>
+            </a:r>
+            <a:r>
+              <a:rPr/>
+              <a:t>. Không dùng </a:t>
+            </a:r>
+            <a:r>
+              <a:rPr>
+                <a:latin typeface="Courier"/>
+              </a:rPr>
+              <a:t>dashboard.png</a:t>
+            </a:r>
+          </a:p>
+          <a:p>
+            <a:pPr lvl="0" indent="0" marL="0">
+              <a:buNone/>
+            </a:pPr>
+            <a:r>
+              <a:rPr b="1"/>
+              <a:t>Về kỹ thuật</a:t>
+            </a:r>
+          </a:p>
+          <a:p>
+            <a:pPr lvl="0"/>
+            <a:r>
+              <a:rPr/>
+              <a:t>☐ Backend và frontend </a:t>
+            </a:r>
+            <a:r>
+              <a:rPr b="1"/>
+              <a:t>đã khởi động trước khi vào phòng</a:t>
+            </a:r>
+            <a:r>
+              <a:rPr/>
+              <a:t> — đừng để lần chạy đầu của buổi bảo vệ là lần khởi động server</a:t>
+            </a:r>
+          </a:p>
+          <a:p>
+            <a:pPr lvl="0"/>
+            <a:r>
+              <a:rPr/>
+              <a:t>☐ 2–3 ảnh test đã biết chắc chạy được, để sẵn trên desktop</a:t>
+            </a:r>
+          </a:p>
+          <a:p>
+            <a:pPr lvl="0"/>
+            <a:r>
+              <a:rPr/>
+              <a:t>☐ Tab Swagger mở sẵn</a:t>
+            </a:r>
+          </a:p>
+          <a:p>
+            <a:pPr lvl="0"/>
+            <a:r>
+              <a:rPr/>
+              <a:t>☐ File slide xuất </a:t>
+            </a:r>
+            <a:r>
+              <a:rPr b="1"/>
+              <a:t>PDF dự phòng</a:t>
+            </a:r>
+            <a:r>
+              <a:rPr/>
+              <a:t> — không phụ thuộc máy chiếu hiểu được định dạng gốc</a:t>
+            </a:r>
+          </a:p>
+          <a:p>
+            <a:pPr lvl="0"/>
+            <a:r>
+              <a:rPr/>
+              <a:t>☐ Ảnh nhúng hết vào file, không link ngoài</a:t>
+            </a:r>
+          </a:p>
+          <a:p>
+            <a:pPr lvl="0" indent="0" marL="0">
+              <a:buNone/>
+            </a:pPr>
+            <a:r>
+              <a:rPr b="1"/>
+              <a:t>Về trả lời</a:t>
+            </a:r>
+          </a:p>
+          <a:p>
+            <a:pPr lvl="0"/>
+            <a:r>
+              <a:rPr/>
+              <a:t>☐ Đọc lại </a:t>
+            </a:r>
+            <a:r>
+              <a:rPr>
+                <a:latin typeface="Courier"/>
+              </a:rPr>
+              <a:t>docs/slides/10-defense-qa.md</a:t>
+            </a:r>
+            <a:r>
+              <a:rPr/>
+              <a:t>, đặc biệt mục "Ba câu dễ trả lời sai nhất": mAP 0,983 có rò rỉ không (C3) · vì sao OCR biển 2 dòng không đạt (D1) · tốc độ bao nhiêu, sao con số cũ 5.857 ms (F3)</a:t>
+            </a:r>
+          </a:p>
+          <a:p>
+            <a:pPr lvl="0"/>
+            <a:r>
+              <a:rPr/>
+              <a:t>☐ Thuộc bảng số liệu tra nhanh ở S21</a:t>
+            </a:r>
+          </a:p>
+          <a:p>
+            <a:pPr lvl="0"/>
+            <a:r>
+              <a:rPr/>
+              <a:t>☐ Nhớ nguyên tắc: </a:t>
+            </a:r>
+            <a:r>
+              <a:rPr b="1"/>
+              <a:t>chưa đo thì nói chưa đo</a:t>
+            </a:r>
+          </a:p>
+        </p:txBody>
+      </p:sp>
+    </p:spTree>
+  </p:cSld>
+</p:sld>
+</file>
+
+<file path=ppt/slides/slide51.xml><?xml version="1.0" encoding="utf-8"?>
 <p:sld xmlns:a="http://schemas.openxmlformats.org/drawingml/2006/main" xmlns:r="http://schemas.openxmlformats.org/officeDocument/2006/relationships" xmlns:p="http://schemas.openxmlformats.org/presentationml/2006/main">
   <p:cSld>
     <p:spTree>
@@ -18573,6 +19164,65 @@
                       <a:r>
                         <a:rPr b="1"/>
                         <a:t>D6</a:t>
+                      </a:r>
+                    </a:p>
+                  </a:txBody>
+                </a:tc>
+              </a:tr>
+              <a:tr h="0">
+                <a:tc>
+                  <a:txBody>
+                    <a:bodyPr/>
+                    <a:lstStyle/>
+                    <a:p>
+                      <a:pPr lvl="0" indent="0" marL="0">
+                        <a:buNone/>
+                      </a:pPr>
+                      <a:r>
+                        <a:rPr b="1"/>
+                        <a:t>S16</a:t>
+                      </a:r>
+                    </a:p>
+                  </a:txBody>
+                </a:tc>
+                <a:tc>
+                  <a:txBody>
+                    <a:bodyPr/>
+                    <a:lstStyle/>
+                    <a:p>
+                      <a:pPr lvl="0" indent="0" marL="0">
+                        <a:buNone/>
+                      </a:pPr>
+                      <a:r>
+                        <a:rPr/>
+                        <a:t>⚠️ </a:t>
+                      </a:r>
+                      <a:r>
+                        <a:rPr b="1"/>
+                        <a:t>"Sao bỏ hẳn một yêu cầu mức Must (FR-4.1)?"</a:t>
+                      </a:r>
+                      <a:r>
+                        <a:rPr/>
+                        <a:t> · "Sao không còn trang Webcam?"</a:t>
+                      </a:r>
+                    </a:p>
+                  </a:txBody>
+                </a:tc>
+                <a:tc>
+                  <a:txBody>
+                    <a:bodyPr/>
+                    <a:lstStyle/>
+                    <a:p>
+                      <a:pPr lvl="0" indent="0" marL="0">
+                        <a:buNone/>
+                      </a:pPr>
+                      <a:r>
+                        <a:rPr b="1"/>
+                        <a:t>E4c</a:t>
+                      </a:r>
+                      <a:r>
+                        <a:rPr/>
+                        <a:t>, E4b</a:t>
                       </a:r>
                     </a:p>
                   </a:txBody>
@@ -18991,17 +19641,25 @@
             </a:r>
             <a:r>
               <a:rPr/>
-              <a:t> dùng ảnh stock. Nguồn: chạy </a:t>
+              <a:t> dùng ảnh stock. Nguồn: chạy trang </a:t>
+            </a:r>
+            <a:r>
+              <a:rPr b="1"/>
+              <a:t>Nhận dạng ảnh</a:t>
+            </a:r>
+            <a:r>
+              <a:rPr/>
+              <a:t> (</a:t>
             </a:r>
             <a:r>
               <a:rPr>
                 <a:latin typeface="Courier"/>
               </a:rPr>
-              <a:t>/image</a:t>
-            </a:r>
-            <a:r>
-              <a:rPr/>
-              <a:t> rồi chụp vùng kết quả.</a:t>
+              <a:t>/</a:t>
+            </a:r>
+            <a:r>
+              <a:rPr/>
+              <a:t>, trang chủ) rồi chụp vùng kết quả.</a:t>
             </a:r>
           </a:p>
           <a:p>

--- a/docs/slides/slides.pptx
+++ b/docs/slides/slides.pptx
@@ -34,23 +34,29 @@
     <p:sldId id="282" r:id="rId31"/>
     <p:sldId id="283" r:id="rId32"/>
     <p:sldId id="284" r:id="rId33"/>
+    <p:sldId id="285" r:id="rId34"/>
+    <p:sldId id="286" r:id="rId35"/>
+    <p:sldId id="287" r:id="rId36"/>
+    <p:sldId id="288" r:id="rId37"/>
+    <p:sldId id="289" r:id="rId38"/>
+    <p:sldId id="290" r:id="rId39"/>
   </p:sldIdLst>
   <p:sldSz cx="12192000" cy="6858000"/>
   <p:notesSz cx="6858000" cy="9144000"/>
   <p:embeddedFontLst>
     <p:embeddedFont>
       <p:font typeface="Roboto"/>
-      <p:regular r:id="rId34"/>
-      <p:bold r:id="rId35"/>
-      <p:italic r:id="rId36"/>
-      <p:boldItalic r:id="rId37"/>
+      <p:regular r:id="rId40"/>
+      <p:bold r:id="rId41"/>
+      <p:italic r:id="rId42"/>
+      <p:boldItalic r:id="rId43"/>
     </p:embeddedFont>
     <p:embeddedFont>
       <p:font typeface="Open Sans"/>
-      <p:regular r:id="rId38"/>
-      <p:bold r:id="rId39"/>
-      <p:italic r:id="rId40"/>
-      <p:boldItalic r:id="rId41"/>
+      <p:regular r:id="rId44"/>
+      <p:bold r:id="rId45"/>
+      <p:italic r:id="rId46"/>
+      <p:boldItalic r:id="rId47"/>
     </p:embeddedFont>
   </p:embeddedFontLst>
   <p:defaultTextStyle>
@@ -284,7 +290,7 @@
   </p:defaultTextStyle>
   <p:extLst>
     <p:ext uri="GoogleSlidesCustomDataVersion2">
-      <go:slidesCustomData xmlns:go="http://customooxmlschemas.google.com/" roundtripDataSignature="AMtx7mhu5dURU4INwSlvEO7StWDXKr50jg==" r:id="rId42"/>
+      <go:slidesCustomData xmlns:go="http://customooxmlschemas.google.com/" roundtripDataSignature="AMtx7mhu5dURU4INwSlvEO7StWDXKr50jg==" r:id="rId48"/>
     </p:ext>
   </p:extLst>
 </p:presentation>
@@ -3291,7 +3297,7 @@
             <a:normAutofit/>
           </a:bodyPr>
           <a:lstStyle>
-            <a:lvl1pPr indent="-406400" lvl="0" marL="457200" algn="just">
+            <a:lvl1pPr indent="-406400" lvl="0" marL="457200" algn="l">
               <a:lnSpc>
                 <a:spcPct val="130000"/>
               </a:lnSpc>
@@ -3313,7 +3319,7 @@
                 <a:sym typeface="Arial"/>
               </a:defRPr>
             </a:lvl1pPr>
-            <a:lvl2pPr indent="-381000" lvl="1" marL="914400" algn="just">
+            <a:lvl2pPr indent="-381000" lvl="1" marL="914400" algn="l">
               <a:lnSpc>
                 <a:spcPct val="130000"/>
               </a:lnSpc>
@@ -3335,7 +3341,7 @@
                 <a:sym typeface="Arial"/>
               </a:defRPr>
             </a:lvl2pPr>
-            <a:lvl3pPr indent="-355600" lvl="2" marL="1371600" algn="just">
+            <a:lvl3pPr indent="-355600" lvl="2" marL="1371600" algn="l">
               <a:lnSpc>
                 <a:spcPct val="130000"/>
               </a:lnSpc>
@@ -3357,7 +3363,7 @@
                 <a:sym typeface="Arial"/>
               </a:defRPr>
             </a:lvl3pPr>
-            <a:lvl4pPr indent="-342900" lvl="3" marL="1828800" algn="just">
+            <a:lvl4pPr indent="-342900" lvl="3" marL="1828800" algn="l">
               <a:lnSpc>
                 <a:spcPct val="130000"/>
               </a:lnSpc>
@@ -3379,7 +3385,7 @@
                 <a:sym typeface="Arial"/>
               </a:defRPr>
             </a:lvl4pPr>
-            <a:lvl5pPr indent="-342900" lvl="4" marL="2286000" algn="just">
+            <a:lvl5pPr indent="-342900" lvl="4" marL="2286000" algn="l">
               <a:lnSpc>
                 <a:spcPct val="130000"/>
               </a:lnSpc>
@@ -5860,7 +5866,7 @@
             <a:normAutofit/>
           </a:bodyPr>
           <a:lstStyle>
-            <a:lvl1pPr indent="-406400" lvl="0" marL="457200" algn="just">
+            <a:lvl1pPr indent="-406400" lvl="0" marL="457200" algn="l">
               <a:lnSpc>
                 <a:spcPct val="130000"/>
               </a:lnSpc>
@@ -5882,7 +5888,7 @@
                 <a:sym typeface="Arial"/>
               </a:defRPr>
             </a:lvl1pPr>
-            <a:lvl2pPr indent="-381000" lvl="1" marL="914400" algn="just">
+            <a:lvl2pPr indent="-381000" lvl="1" marL="914400" algn="l">
               <a:lnSpc>
                 <a:spcPct val="130000"/>
               </a:lnSpc>
@@ -5904,7 +5910,7 @@
                 <a:sym typeface="Arial"/>
               </a:defRPr>
             </a:lvl2pPr>
-            <a:lvl3pPr indent="-355600" lvl="2" marL="1371600" algn="just">
+            <a:lvl3pPr indent="-355600" lvl="2" marL="1371600" algn="l">
               <a:lnSpc>
                 <a:spcPct val="130000"/>
               </a:lnSpc>
@@ -5926,7 +5932,7 @@
                 <a:sym typeface="Arial"/>
               </a:defRPr>
             </a:lvl3pPr>
-            <a:lvl4pPr indent="-342900" lvl="3" marL="1828800" algn="just">
+            <a:lvl4pPr indent="-342900" lvl="3" marL="1828800" algn="l">
               <a:lnSpc>
                 <a:spcPct val="130000"/>
               </a:lnSpc>
@@ -5948,7 +5954,7 @@
                 <a:sym typeface="Arial"/>
               </a:defRPr>
             </a:lvl4pPr>
-            <a:lvl5pPr indent="-342900" lvl="4" marL="2286000" algn="just">
+            <a:lvl5pPr indent="-342900" lvl="4" marL="2286000" algn="l">
               <a:lnSpc>
                 <a:spcPct val="130000"/>
               </a:lnSpc>
@@ -7056,7 +7062,7 @@
             <a:normAutofit/>
           </a:bodyPr>
           <a:lstStyle>
-            <a:lvl1pPr indent="-406400" lvl="0" marL="457200" algn="just">
+            <a:lvl1pPr indent="-406400" lvl="0" marL="457200" algn="l">
               <a:lnSpc>
                 <a:spcPct val="130000"/>
               </a:lnSpc>
@@ -7078,7 +7084,7 @@
                 <a:sym typeface="Arial"/>
               </a:defRPr>
             </a:lvl1pPr>
-            <a:lvl2pPr indent="-381000" lvl="1" marL="914400" algn="just">
+            <a:lvl2pPr indent="-381000" lvl="1" marL="914400" algn="l">
               <a:lnSpc>
                 <a:spcPct val="130000"/>
               </a:lnSpc>
@@ -7100,7 +7106,7 @@
                 <a:sym typeface="Arial"/>
               </a:defRPr>
             </a:lvl2pPr>
-            <a:lvl3pPr indent="-355600" lvl="2" marL="1371600" algn="just">
+            <a:lvl3pPr indent="-355600" lvl="2" marL="1371600" algn="l">
               <a:lnSpc>
                 <a:spcPct val="130000"/>
               </a:lnSpc>
@@ -7122,7 +7128,7 @@
                 <a:sym typeface="Arial"/>
               </a:defRPr>
             </a:lvl3pPr>
-            <a:lvl4pPr indent="-342900" lvl="3" marL="1828800" algn="just">
+            <a:lvl4pPr indent="-342900" lvl="3" marL="1828800" algn="l">
               <a:lnSpc>
                 <a:spcPct val="130000"/>
               </a:lnSpc>
@@ -7144,7 +7150,7 @@
                 <a:sym typeface="Arial"/>
               </a:defRPr>
             </a:lvl4pPr>
-            <a:lvl5pPr indent="-342900" lvl="4" marL="2286000" algn="just">
+            <a:lvl5pPr indent="-342900" lvl="4" marL="2286000" algn="l">
               <a:lnSpc>
                 <a:spcPct val="130000"/>
               </a:lnSpc>
@@ -16642,7 +16648,7 @@
             <a:normAutofit/>
           </a:bodyPr>
           <a:lstStyle>
-            <a:lvl1pPr indent="-368300" lvl="0" marL="457200" algn="just">
+            <a:lvl1pPr indent="-368300" lvl="0" marL="457200" algn="l">
               <a:lnSpc>
                 <a:spcPct val="90000"/>
               </a:lnSpc>
@@ -17609,7 +17615,7 @@
             <a:normAutofit/>
           </a:bodyPr>
           <a:lstStyle>
-            <a:lvl1pPr indent="-406400" lvl="0" marL="457200" algn="just">
+            <a:lvl1pPr indent="-406400" lvl="0" marL="457200" algn="l">
               <a:lnSpc>
                 <a:spcPct val="130000"/>
               </a:lnSpc>
@@ -17631,7 +17637,7 @@
                 <a:sym typeface="Arial"/>
               </a:defRPr>
             </a:lvl1pPr>
-            <a:lvl2pPr indent="-381000" lvl="1" marL="914400" algn="just">
+            <a:lvl2pPr indent="-381000" lvl="1" marL="914400" algn="l">
               <a:lnSpc>
                 <a:spcPct val="130000"/>
               </a:lnSpc>
@@ -17653,7 +17659,7 @@
                 <a:sym typeface="Arial"/>
               </a:defRPr>
             </a:lvl2pPr>
-            <a:lvl3pPr indent="-355600" lvl="2" marL="1371600" algn="just">
+            <a:lvl3pPr indent="-355600" lvl="2" marL="1371600" algn="l">
               <a:lnSpc>
                 <a:spcPct val="130000"/>
               </a:lnSpc>
@@ -17675,7 +17681,7 @@
                 <a:sym typeface="Arial"/>
               </a:defRPr>
             </a:lvl3pPr>
-            <a:lvl4pPr indent="-342900" lvl="3" marL="1828800" algn="just">
+            <a:lvl4pPr indent="-342900" lvl="3" marL="1828800" algn="l">
               <a:lnSpc>
                 <a:spcPct val="130000"/>
               </a:lnSpc>
@@ -17697,7 +17703,7 @@
                 <a:sym typeface="Arial"/>
               </a:defRPr>
             </a:lvl4pPr>
-            <a:lvl5pPr indent="-342900" lvl="4" marL="2286000" algn="just">
+            <a:lvl5pPr indent="-342900" lvl="4" marL="2286000" algn="l">
               <a:lnSpc>
                 <a:spcPct val="130000"/>
               </a:lnSpc>
@@ -20622,7 +20628,7 @@
             <a:normAutofit/>
           </a:bodyPr>
           <a:lstStyle>
-            <a:lvl1pPr indent="-406400" lvl="0" marL="457200" algn="just">
+            <a:lvl1pPr indent="-406400" lvl="0" marL="457200" algn="l">
               <a:lnSpc>
                 <a:spcPct val="130000"/>
               </a:lnSpc>
@@ -20644,7 +20650,7 @@
                 <a:sym typeface="Arial"/>
               </a:defRPr>
             </a:lvl1pPr>
-            <a:lvl2pPr indent="-381000" lvl="1" marL="914400" algn="just">
+            <a:lvl2pPr indent="-381000" lvl="1" marL="914400" algn="l">
               <a:lnSpc>
                 <a:spcPct val="130000"/>
               </a:lnSpc>
@@ -20666,7 +20672,7 @@
                 <a:sym typeface="Arial"/>
               </a:defRPr>
             </a:lvl2pPr>
-            <a:lvl3pPr indent="-355600" lvl="2" marL="1371600" algn="just">
+            <a:lvl3pPr indent="-355600" lvl="2" marL="1371600" algn="l">
               <a:lnSpc>
                 <a:spcPct val="130000"/>
               </a:lnSpc>
@@ -20688,7 +20694,7 @@
                 <a:sym typeface="Arial"/>
               </a:defRPr>
             </a:lvl3pPr>
-            <a:lvl4pPr indent="-342900" lvl="3" marL="1828800" algn="just">
+            <a:lvl4pPr indent="-342900" lvl="3" marL="1828800" algn="l">
               <a:lnSpc>
                 <a:spcPct val="130000"/>
               </a:lnSpc>
@@ -20710,7 +20716,7 @@
                 <a:sym typeface="Arial"/>
               </a:defRPr>
             </a:lvl4pPr>
-            <a:lvl5pPr indent="-342900" lvl="4" marL="2286000" algn="just">
+            <a:lvl5pPr indent="-342900" lvl="4" marL="2286000" algn="l">
               <a:lnSpc>
                 <a:spcPct val="130000"/>
               </a:lnSpc>
@@ -23191,7 +23197,7 @@
             <a:normAutofit/>
           </a:bodyPr>
           <a:lstStyle>
-            <a:lvl1pPr indent="-406400" lvl="0" marL="457200" algn="just">
+            <a:lvl1pPr indent="-406400" lvl="0" marL="457200" algn="l">
               <a:lnSpc>
                 <a:spcPct val="130000"/>
               </a:lnSpc>
@@ -23213,7 +23219,7 @@
                 <a:sym typeface="Arial"/>
               </a:defRPr>
             </a:lvl1pPr>
-            <a:lvl2pPr indent="-381000" lvl="1" marL="914400" algn="just">
+            <a:lvl2pPr indent="-381000" lvl="1" marL="914400" algn="l">
               <a:lnSpc>
                 <a:spcPct val="130000"/>
               </a:lnSpc>
@@ -23235,7 +23241,7 @@
                 <a:sym typeface="Arial"/>
               </a:defRPr>
             </a:lvl2pPr>
-            <a:lvl3pPr indent="-355600" lvl="2" marL="1371600" algn="just">
+            <a:lvl3pPr indent="-355600" lvl="2" marL="1371600" algn="l">
               <a:lnSpc>
                 <a:spcPct val="130000"/>
               </a:lnSpc>
@@ -23257,7 +23263,7 @@
                 <a:sym typeface="Arial"/>
               </a:defRPr>
             </a:lvl3pPr>
-            <a:lvl4pPr indent="-342900" lvl="3" marL="1828800" algn="just">
+            <a:lvl4pPr indent="-342900" lvl="3" marL="1828800" algn="l">
               <a:lnSpc>
                 <a:spcPct val="130000"/>
               </a:lnSpc>
@@ -23279,7 +23285,7 @@
                 <a:sym typeface="Arial"/>
               </a:defRPr>
             </a:lvl4pPr>
-            <a:lvl5pPr indent="-342900" lvl="4" marL="2286000" algn="just">
+            <a:lvl5pPr indent="-342900" lvl="4" marL="2286000" algn="l">
               <a:lnSpc>
                 <a:spcPct val="130000"/>
               </a:lnSpc>
@@ -30314,7 +30320,7 @@
             <a:normAutofit/>
           </a:bodyPr>
           <a:lstStyle>
-            <a:lvl1pPr indent="-406400" lvl="0" marL="457200" algn="just">
+            <a:lvl1pPr indent="-406400" lvl="0" marL="457200" algn="l">
               <a:lnSpc>
                 <a:spcPct val="130000"/>
               </a:lnSpc>
@@ -39037,7 +39043,7 @@
             <a:normAutofit/>
           </a:bodyPr>
           <a:lstStyle>
-            <a:lvl1pPr indent="-406400" lvl="0" marL="457200" algn="just">
+            <a:lvl1pPr indent="-406400" lvl="0" marL="457200" algn="l">
               <a:lnSpc>
                 <a:spcPct val="130000"/>
               </a:lnSpc>
@@ -39059,7 +39065,7 @@
                 <a:sym typeface="Arial"/>
               </a:defRPr>
             </a:lvl1pPr>
-            <a:lvl2pPr indent="-381000" lvl="1" marL="914400" algn="just">
+            <a:lvl2pPr indent="-381000" lvl="1" marL="914400" algn="l">
               <a:lnSpc>
                 <a:spcPct val="130000"/>
               </a:lnSpc>
@@ -39081,7 +39087,7 @@
                 <a:sym typeface="Arial"/>
               </a:defRPr>
             </a:lvl2pPr>
-            <a:lvl3pPr indent="-355600" lvl="2" marL="1371600" algn="just">
+            <a:lvl3pPr indent="-355600" lvl="2" marL="1371600" algn="l">
               <a:lnSpc>
                 <a:spcPct val="130000"/>
               </a:lnSpc>
@@ -39103,7 +39109,7 @@
                 <a:sym typeface="Arial"/>
               </a:defRPr>
             </a:lvl3pPr>
-            <a:lvl4pPr indent="-342900" lvl="3" marL="1828800" algn="just">
+            <a:lvl4pPr indent="-342900" lvl="3" marL="1828800" algn="l">
               <a:lnSpc>
                 <a:spcPct val="130000"/>
               </a:lnSpc>
@@ -39125,7 +39131,7 @@
                 <a:sym typeface="Arial"/>
               </a:defRPr>
             </a:lvl4pPr>
-            <a:lvl5pPr indent="-342900" lvl="4" marL="2286000" algn="just">
+            <a:lvl5pPr indent="-342900" lvl="4" marL="2286000" algn="l">
               <a:lnSpc>
                 <a:spcPct val="130000"/>
               </a:lnSpc>
@@ -41606,7 +41612,7 @@
             <a:normAutofit/>
           </a:bodyPr>
           <a:lstStyle>
-            <a:lvl1pPr indent="-406400" lvl="0" marL="457200" algn="just">
+            <a:lvl1pPr indent="-406400" lvl="0" marL="457200" algn="l">
               <a:lnSpc>
                 <a:spcPct val="130000"/>
               </a:lnSpc>
@@ -41628,7 +41634,7 @@
                 <a:sym typeface="Arial"/>
               </a:defRPr>
             </a:lvl1pPr>
-            <a:lvl2pPr indent="-381000" lvl="1" marL="914400" algn="just">
+            <a:lvl2pPr indent="-381000" lvl="1" marL="914400" algn="l">
               <a:lnSpc>
                 <a:spcPct val="130000"/>
               </a:lnSpc>
@@ -41650,7 +41656,7 @@
                 <a:sym typeface="Arial"/>
               </a:defRPr>
             </a:lvl2pPr>
-            <a:lvl3pPr indent="-355600" lvl="2" marL="1371600" algn="just">
+            <a:lvl3pPr indent="-355600" lvl="2" marL="1371600" algn="l">
               <a:lnSpc>
                 <a:spcPct val="130000"/>
               </a:lnSpc>
@@ -41672,7 +41678,7 @@
                 <a:sym typeface="Arial"/>
               </a:defRPr>
             </a:lvl3pPr>
-            <a:lvl4pPr indent="-342900" lvl="3" marL="1828800" algn="just">
+            <a:lvl4pPr indent="-342900" lvl="3" marL="1828800" algn="l">
               <a:lnSpc>
                 <a:spcPct val="130000"/>
               </a:lnSpc>
@@ -41694,7 +41700,7 @@
                 <a:sym typeface="Arial"/>
               </a:defRPr>
             </a:lvl4pPr>
-            <a:lvl5pPr indent="-342900" lvl="4" marL="2286000" algn="just">
+            <a:lvl5pPr indent="-342900" lvl="4" marL="2286000" algn="l">
               <a:lnSpc>
                 <a:spcPct val="130000"/>
               </a:lnSpc>
@@ -43981,7 +43987,7 @@
   <p:cSld>
     <p:spTree>
       <p:nvGrpSpPr>
-        <p:cNvPr id="134" name="Shape 134"/>
+        <p:cNvPr id="428" name="Shape 428"/>
         <p:cNvGrpSpPr/>
         <p:nvPr/>
       </p:nvGrpSpPr>
@@ -43995,7 +44001,7 @@
       </p:grpSpPr>
       <p:sp>
         <p:nvSpPr>
-          <p:cNvPr id="142" name="Google Shape;142;p23"/>
+          <p:cNvPr id="436" name="Google Shape;436;p31"/>
           <p:cNvSpPr txBox="1"/>
           <p:nvPr>
             <p:ph type="title"/>
@@ -44003,8 +44009,8 @@
         </p:nvSpPr>
         <p:spPr>
           <a:xfrm>
-            <a:off x="774145" y="223964"/>
-            <a:ext cx="10579655" cy="785896"/>
+            <a:off x="774146" y="202009"/>
+            <a:ext cx="3932227" cy="1698043"/>
           </a:xfrm>
           <a:prstGeom prst="rect">
             <a:avLst/>
@@ -44024,6 +44030,41 @@
             <a:r>
               <a:rPr/>
               <a:t>Kiến trúc 5 tầng</a:t>
+            </a:r>
+          </a:p>
+        </p:txBody>
+      </p:sp>
+      <p:sp>
+        <p:nvSpPr>
+          <p:cNvPr id="437" name="Google Shape;437;p31"/>
+          <p:cNvSpPr txBox="1"/>
+          <p:nvPr>
+            <p:ph idx="2" sz="half" type="body"/>
+          </p:nvPr>
+        </p:nvSpPr>
+        <p:spPr/>
+        <p:txBody>
+          <a:bodyPr/>
+          <a:lstStyle/>
+          <a:p>
+            <a:pPr lvl="0" indent="0" marL="0">
+              <a:buNone/>
+            </a:pPr>
+            <a:r>
+              <a:rPr/>
+              <a:t>Tầng AI là </a:t>
+            </a:r>
+            <a:r>
+              <a:rPr b="1"/>
+              <a:t>Python thuần</a:t>
+            </a:r>
+            <a:r>
+              <a:rPr/>
+              <a:t> — cấm import FastAPI hoặc Pydantic. Nó không có mũi tên nào đi lên, nên thay engine OCR </a:t>
+            </a:r>
+            <a:r>
+              <a:rPr b="1"/>
+              <a:t>không đụng một dòng mã API</a:t>
             </a:r>
           </a:p>
         </p:txBody>
@@ -44039,8 +44080,8 @@
           </p:nvPr>
         </p:nvGraphicFramePr>
         <p:xfrm>
-          <a:off x="762000" y="1231900"/>
-          <a:ext cx="10579100" cy="4940300"/>
+          <a:off x="5156200" y="190500"/>
+          <a:ext cx="6235700" cy="5969000"/>
         </p:xfrm>
         <a:graphic>
           <a:graphicData uri="http://schemas.openxmlformats.org/drawingml/2006/table">
@@ -44049,8 +44090,8 @@
                 <a:tableStyleId>{45BEF19B-5B1D-4A26-B267-ECC71EF7E2D4}</a:tableStyleId>
               </a:tblPr>
               <a:tblGrid>
-                <a:gridCol w="5283200"/>
-                <a:gridCol w="5283200"/>
+                <a:gridCol w="3111500"/>
+                <a:gridCol w="3111500"/>
               </a:tblGrid>
               <a:tr h="0">
                 <a:tc>
@@ -44256,6 +44297,711 @@
       </p:graphicFrame>
       <p:sp>
         <p:nvSpPr>
+          <p:cNvPr id="449" name="Google Shape;449;p31"/>
+          <p:cNvSpPr txBox="1"/>
+          <p:nvPr>
+            <p:ph idx="12" type="sldNum"/>
+          </p:nvPr>
+        </p:nvSpPr>
+        <p:spPr>
+          <a:xfrm>
+            <a:off x="58380" y="6508358"/>
+            <a:ext cx="349642" cy="349642"/>
+          </a:xfrm>
+          <a:prstGeom prst="rect">
+            <a:avLst/>
+          </a:prstGeom>
+          <a:noFill/>
+          <a:ln>
+            <a:noFill/>
+          </a:ln>
+        </p:spPr>
+        <p:txBody>
+          <a:bodyPr anchor="ctr" anchorCtr="0" bIns="45700" lIns="91425" rIns="91425" spcFirstLastPara="1" tIns="45700" wrap="square">
+            <a:noAutofit/>
+          </a:bodyPr>
+          <a:lstStyle>
+            <a:lvl1pPr algn="ctr" indent="0" lvl="0" marL="0">
+              <a:spcBef>
+                <a:spcPts val="0"/>
+              </a:spcBef>
+              <a:buNone/>
+              <a:defRPr sz="700">
+                <a:solidFill>
+                  <a:schemeClr val="dk1"/>
+                </a:solidFill>
+                <a:latin typeface="Arial"/>
+                <a:ea typeface="Arial"/>
+                <a:cs typeface="Arial"/>
+                <a:sym typeface="Arial"/>
+              </a:defRPr>
+            </a:lvl1pPr>
+            <a:lvl2pPr algn="ctr" indent="0" lvl="1" marL="0">
+              <a:spcBef>
+                <a:spcPts val="0"/>
+              </a:spcBef>
+              <a:buNone/>
+              <a:defRPr sz="700">
+                <a:solidFill>
+                  <a:schemeClr val="dk1"/>
+                </a:solidFill>
+                <a:latin typeface="Arial"/>
+                <a:ea typeface="Arial"/>
+                <a:cs typeface="Arial"/>
+                <a:sym typeface="Arial"/>
+              </a:defRPr>
+            </a:lvl2pPr>
+            <a:lvl3pPr algn="ctr" indent="0" lvl="2" marL="0">
+              <a:spcBef>
+                <a:spcPts val="0"/>
+              </a:spcBef>
+              <a:buNone/>
+              <a:defRPr sz="700">
+                <a:solidFill>
+                  <a:schemeClr val="dk1"/>
+                </a:solidFill>
+                <a:latin typeface="Arial"/>
+                <a:ea typeface="Arial"/>
+                <a:cs typeface="Arial"/>
+                <a:sym typeface="Arial"/>
+              </a:defRPr>
+            </a:lvl3pPr>
+            <a:lvl4pPr algn="ctr" indent="0" lvl="3" marL="0">
+              <a:spcBef>
+                <a:spcPts val="0"/>
+              </a:spcBef>
+              <a:buNone/>
+              <a:defRPr sz="700">
+                <a:solidFill>
+                  <a:schemeClr val="dk1"/>
+                </a:solidFill>
+                <a:latin typeface="Arial"/>
+                <a:ea typeface="Arial"/>
+                <a:cs typeface="Arial"/>
+                <a:sym typeface="Arial"/>
+              </a:defRPr>
+            </a:lvl4pPr>
+            <a:lvl5pPr algn="ctr" indent="0" lvl="4" marL="0">
+              <a:spcBef>
+                <a:spcPts val="0"/>
+              </a:spcBef>
+              <a:buNone/>
+              <a:defRPr sz="700">
+                <a:solidFill>
+                  <a:schemeClr val="dk1"/>
+                </a:solidFill>
+                <a:latin typeface="Arial"/>
+                <a:ea typeface="Arial"/>
+                <a:cs typeface="Arial"/>
+                <a:sym typeface="Arial"/>
+              </a:defRPr>
+            </a:lvl5pPr>
+            <a:lvl6pPr algn="ctr" indent="0" lvl="5" marL="0">
+              <a:spcBef>
+                <a:spcPts val="0"/>
+              </a:spcBef>
+              <a:buNone/>
+              <a:defRPr sz="700">
+                <a:solidFill>
+                  <a:schemeClr val="dk1"/>
+                </a:solidFill>
+                <a:latin typeface="Arial"/>
+                <a:ea typeface="Arial"/>
+                <a:cs typeface="Arial"/>
+                <a:sym typeface="Arial"/>
+              </a:defRPr>
+            </a:lvl6pPr>
+            <a:lvl7pPr algn="ctr" indent="0" lvl="6" marL="0">
+              <a:spcBef>
+                <a:spcPts val="0"/>
+              </a:spcBef>
+              <a:buNone/>
+              <a:defRPr sz="700">
+                <a:solidFill>
+                  <a:schemeClr val="dk1"/>
+                </a:solidFill>
+                <a:latin typeface="Arial"/>
+                <a:ea typeface="Arial"/>
+                <a:cs typeface="Arial"/>
+                <a:sym typeface="Arial"/>
+              </a:defRPr>
+            </a:lvl7pPr>
+            <a:lvl8pPr algn="ctr" indent="0" lvl="7" marL="0">
+              <a:spcBef>
+                <a:spcPts val="0"/>
+              </a:spcBef>
+              <a:buNone/>
+              <a:defRPr sz="700">
+                <a:solidFill>
+                  <a:schemeClr val="dk1"/>
+                </a:solidFill>
+                <a:latin typeface="Arial"/>
+                <a:ea typeface="Arial"/>
+                <a:cs typeface="Arial"/>
+                <a:sym typeface="Arial"/>
+              </a:defRPr>
+            </a:lvl8pPr>
+            <a:lvl9pPr algn="ctr" indent="0" lvl="8" marL="0">
+              <a:spcBef>
+                <a:spcPts val="0"/>
+              </a:spcBef>
+              <a:buNone/>
+              <a:defRPr sz="700">
+                <a:solidFill>
+                  <a:schemeClr val="dk1"/>
+                </a:solidFill>
+                <a:latin typeface="Arial"/>
+                <a:ea typeface="Arial"/>
+                <a:cs typeface="Arial"/>
+                <a:sym typeface="Arial"/>
+              </a:defRPr>
+            </a:lvl9pPr>
+          </a:lstStyle>
+          <a:p>
+            <a:pPr algn="ctr" indent="0" lvl="0" marL="0" rtl="0">
+              <a:spcBef>
+                <a:spcPts val="0"/>
+              </a:spcBef>
+              <a:spcAft>
+                <a:spcPts val="0"/>
+              </a:spcAft>
+              <a:buNone/>
+            </a:pPr>
+            <a:fld id="{00000000-1234-1234-1234-123412341234}" type="slidenum">
+              <a:rPr lang="en-US"/>
+              <a:t>‹#›</a:t>
+            </a:fld>
+            <a:endParaRPr/>
+          </a:p>
+        </p:txBody>
+      </p:sp>
+    </p:spTree>
+  </p:cSld>
+</p:sld>
+</file>
+
+<file path=ppt/slides/slide11.xml><?xml version="1.0" encoding="utf-8"?>
+<p:sld xmlns:a="http://schemas.openxmlformats.org/drawingml/2006/main" xmlns:r="http://schemas.openxmlformats.org/officeDocument/2006/relationships" xmlns:p="http://schemas.openxmlformats.org/presentationml/2006/main">
+  <p:cSld>
+    <p:spTree>
+      <p:nvGrpSpPr>
+        <p:cNvPr id="428" name="Shape 428"/>
+        <p:cNvGrpSpPr/>
+        <p:nvPr/>
+      </p:nvGrpSpPr>
+      <p:grpSpPr>
+        <a:xfrm>
+          <a:off x="0" y="0"/>
+          <a:ext cx="0" cy="0"/>
+          <a:chOff x="0" y="0"/>
+          <a:chExt cx="0" cy="0"/>
+        </a:xfrm>
+      </p:grpSpPr>
+      <p:sp>
+        <p:nvSpPr>
+          <p:cNvPr id="436" name="Google Shape;436;p31"/>
+          <p:cNvSpPr txBox="1"/>
+          <p:nvPr>
+            <p:ph type="title"/>
+          </p:nvPr>
+        </p:nvSpPr>
+        <p:spPr>
+          <a:xfrm>
+            <a:off x="774146" y="202009"/>
+            <a:ext cx="3932227" cy="1698043"/>
+          </a:xfrm>
+          <a:prstGeom prst="rect">
+            <a:avLst/>
+          </a:prstGeom>
+          <a:noFill/>
+          <a:ln>
+            <a:noFill/>
+          </a:ln>
+        </p:spPr>
+        <p:txBody>
+          <a:bodyPr/>
+          <a:lstStyle/>
+          <a:p>
+            <a:pPr lvl="0" indent="0" marL="0">
+              <a:buNone/>
+            </a:pPr>
+            <a:r>
+              <a:rPr/>
+              <a:t>Cơ sở dữ liệu — một cột làm nên đóng góp</a:t>
+            </a:r>
+          </a:p>
+        </p:txBody>
+      </p:sp>
+      <p:sp>
+        <p:nvSpPr>
+          <p:cNvPr id="437" name="Google Shape;437;p31"/>
+          <p:cNvSpPr txBox="1"/>
+          <p:nvPr>
+            <p:ph idx="2" sz="half" type="body"/>
+          </p:nvPr>
+        </p:nvSpPr>
+        <p:spPr/>
+        <p:txBody>
+          <a:bodyPr/>
+          <a:lstStyle/>
+          <a:p>
+            <a:pPr lvl="0" indent="0" marL="0">
+              <a:buNone/>
+            </a:pPr>
+            <a:r>
+              <a:rPr/>
+              <a:t>Bảng </a:t>
+            </a:r>
+            <a:r>
+              <a:rPr>
+                <a:latin typeface="Courier"/>
+              </a:rPr>
+              <a:t>detection_history</a:t>
+            </a:r>
+            <a:r>
+              <a:rPr/>
+              <a:t> lưu </a:t>
+            </a:r>
+            <a:r>
+              <a:rPr b="1"/>
+              <a:t>cả hai</a:t>
+            </a:r>
+            <a:r>
+              <a:rPr/>
+              <a:t> chuỗi trên </a:t>
+            </a:r>
+            <a:r>
+              <a:rPr b="1"/>
+              <a:t>cùng một bản ghi</a:t>
+            </a:r>
+          </a:p>
+        </p:txBody>
+      </p:sp>
+      <p:graphicFrame>
+        <p:nvGraphicFramePr>
+          <p:cNvPr id="6" name="Content Placeholder 5"/>
+          <p:cNvGraphicFramePr>
+            <a:graphicFrameLocks noGrp="1"/>
+          </p:cNvGraphicFramePr>
+          <p:nvPr>
+            <p:ph idx="1"/>
+          </p:nvPr>
+        </p:nvGraphicFramePr>
+        <p:xfrm>
+          <a:off x="5156200" y="190500"/>
+          <a:ext cx="6235700" cy="5969000"/>
+        </p:xfrm>
+        <a:graphic>
+          <a:graphicData uri="http://schemas.openxmlformats.org/drawingml/2006/table">
+            <a:tbl>
+              <a:tblPr firstRow="1" bandRow="1">
+                <a:tableStyleId>{45BEF19B-5B1D-4A26-B267-ECC71EF7E2D4}</a:tableStyleId>
+              </a:tblPr>
+              <a:tblGrid>
+                <a:gridCol w="3111500"/>
+                <a:gridCol w="3111500"/>
+              </a:tblGrid>
+              <a:tr h="0">
+                <a:tc>
+                  <a:txBody>
+                    <a:bodyPr/>
+                    <a:lstStyle/>
+                    <a:p>
+                      <a:pPr lvl="0" indent="0" marL="0">
+                        <a:buNone/>
+                      </a:pPr>
+                      <a:r>
+                        <a:rPr/>
+                        <a:t>Cột</a:t>
+                      </a:r>
+                    </a:p>
+                  </a:txBody>
+                  <a:tcPr/>
+                </a:tc>
+                <a:tc>
+                  <a:txBody>
+                    <a:bodyPr/>
+                    <a:lstStyle/>
+                    <a:p>
+                      <a:pPr lvl="0" indent="0" marL="0">
+                        <a:buNone/>
+                      </a:pPr>
+                      <a:r>
+                        <a:rPr/>
+                        <a:t>Nội dung</a:t>
+                      </a:r>
+                    </a:p>
+                  </a:txBody>
+                  <a:tcPr/>
+                </a:tc>
+              </a:tr>
+              <a:tr h="0">
+                <a:tc>
+                  <a:txBody>
+                    <a:bodyPr/>
+                    <a:lstStyle/>
+                    <a:p>
+                      <a:pPr lvl="0" indent="0" marL="0">
+                        <a:buNone/>
+                      </a:pPr>
+                      <a:r>
+                        <a:rPr>
+                          <a:latin typeface="Courier"/>
+                        </a:rPr>
+                        <a:t>raw_ocr_text</a:t>
+                      </a:r>
+                    </a:p>
+                  </a:txBody>
+                </a:tc>
+                <a:tc>
+                  <a:txBody>
+                    <a:bodyPr/>
+                    <a:lstStyle/>
+                    <a:p>
+                      <a:pPr lvl="0" indent="0" marL="0">
+                        <a:buNone/>
+                      </a:pPr>
+                      <a:r>
+                        <a:rPr/>
+                        <a:t>Chuỗi </a:t>
+                      </a:r>
+                      <a:r>
+                        <a:rPr b="1"/>
+                        <a:t>thô</a:t>
+                      </a:r>
+                      <a:r>
+                        <a:rPr/>
+                        <a:t> do PaddleOCR trả về</a:t>
+                      </a:r>
+                    </a:p>
+                  </a:txBody>
+                </a:tc>
+              </a:tr>
+              <a:tr h="0">
+                <a:tc>
+                  <a:txBody>
+                    <a:bodyPr/>
+                    <a:lstStyle/>
+                    <a:p>
+                      <a:pPr lvl="0" indent="0" marL="0">
+                        <a:buNone/>
+                      </a:pPr>
+                      <a:r>
+                        <a:rPr>
+                          <a:latin typeface="Courier"/>
+                        </a:rPr>
+                        <a:t>plate_number</a:t>
+                      </a:r>
+                    </a:p>
+                  </a:txBody>
+                </a:tc>
+                <a:tc>
+                  <a:txBody>
+                    <a:bodyPr/>
+                    <a:lstStyle/>
+                    <a:p>
+                      <a:pPr lvl="0" indent="0" marL="0">
+                        <a:buNone/>
+                      </a:pPr>
+                      <a:r>
+                        <a:rPr/>
+                        <a:t>Chuỗi </a:t>
+                      </a:r>
+                      <a:r>
+                        <a:rPr b="1"/>
+                        <a:t>sau</a:t>
+                      </a:r>
+                      <a:r>
+                        <a:rPr/>
+                        <a:t> bộ luật hậu xử lý</a:t>
+                      </a:r>
+                    </a:p>
+                  </a:txBody>
+                </a:tc>
+              </a:tr>
+              <a:tr h="0">
+                <a:tc>
+                  <a:txBody>
+                    <a:bodyPr/>
+                    <a:lstStyle/>
+                    <a:p>
+                      <a:pPr lvl="0" indent="0" marL="0">
+                        <a:buNone/>
+                      </a:pPr>
+                      <a:r>
+                        <a:rPr>
+                          <a:latin typeface="Courier"/>
+                        </a:rPr>
+                        <a:t>is_valid_format</a:t>
+                      </a:r>
+                    </a:p>
+                  </a:txBody>
+                </a:tc>
+                <a:tc>
+                  <a:txBody>
+                    <a:bodyPr/>
+                    <a:lstStyle/>
+                    <a:p>
+                      <a:pPr lvl="0" indent="0" marL="0">
+                        <a:buNone/>
+                      </a:pPr>
+                      <a:r>
+                        <a:rPr/>
+                        <a:t>Hợp quy cách Việt Nam hay không</a:t>
+                      </a:r>
+                    </a:p>
+                  </a:txBody>
+                </a:tc>
+              </a:tr>
+            </a:tbl>
+          </a:graphicData>
+        </a:graphic>
+      </p:graphicFrame>
+      <p:sp>
+        <p:nvSpPr>
+          <p:cNvPr id="449" name="Google Shape;449;p31"/>
+          <p:cNvSpPr txBox="1"/>
+          <p:nvPr>
+            <p:ph idx="12" type="sldNum"/>
+          </p:nvPr>
+        </p:nvSpPr>
+        <p:spPr>
+          <a:xfrm>
+            <a:off x="58380" y="6508358"/>
+            <a:ext cx="349642" cy="349642"/>
+          </a:xfrm>
+          <a:prstGeom prst="rect">
+            <a:avLst/>
+          </a:prstGeom>
+          <a:noFill/>
+          <a:ln>
+            <a:noFill/>
+          </a:ln>
+        </p:spPr>
+        <p:txBody>
+          <a:bodyPr anchor="ctr" anchorCtr="0" bIns="45700" lIns="91425" rIns="91425" spcFirstLastPara="1" tIns="45700" wrap="square">
+            <a:noAutofit/>
+          </a:bodyPr>
+          <a:lstStyle>
+            <a:lvl1pPr algn="ctr" indent="0" lvl="0" marL="0">
+              <a:spcBef>
+                <a:spcPts val="0"/>
+              </a:spcBef>
+              <a:buNone/>
+              <a:defRPr sz="700">
+                <a:solidFill>
+                  <a:schemeClr val="dk1"/>
+                </a:solidFill>
+                <a:latin typeface="Arial"/>
+                <a:ea typeface="Arial"/>
+                <a:cs typeface="Arial"/>
+                <a:sym typeface="Arial"/>
+              </a:defRPr>
+            </a:lvl1pPr>
+            <a:lvl2pPr algn="ctr" indent="0" lvl="1" marL="0">
+              <a:spcBef>
+                <a:spcPts val="0"/>
+              </a:spcBef>
+              <a:buNone/>
+              <a:defRPr sz="700">
+                <a:solidFill>
+                  <a:schemeClr val="dk1"/>
+                </a:solidFill>
+                <a:latin typeface="Arial"/>
+                <a:ea typeface="Arial"/>
+                <a:cs typeface="Arial"/>
+                <a:sym typeface="Arial"/>
+              </a:defRPr>
+            </a:lvl2pPr>
+            <a:lvl3pPr algn="ctr" indent="0" lvl="2" marL="0">
+              <a:spcBef>
+                <a:spcPts val="0"/>
+              </a:spcBef>
+              <a:buNone/>
+              <a:defRPr sz="700">
+                <a:solidFill>
+                  <a:schemeClr val="dk1"/>
+                </a:solidFill>
+                <a:latin typeface="Arial"/>
+                <a:ea typeface="Arial"/>
+                <a:cs typeface="Arial"/>
+                <a:sym typeface="Arial"/>
+              </a:defRPr>
+            </a:lvl3pPr>
+            <a:lvl4pPr algn="ctr" indent="0" lvl="3" marL="0">
+              <a:spcBef>
+                <a:spcPts val="0"/>
+              </a:spcBef>
+              <a:buNone/>
+              <a:defRPr sz="700">
+                <a:solidFill>
+                  <a:schemeClr val="dk1"/>
+                </a:solidFill>
+                <a:latin typeface="Arial"/>
+                <a:ea typeface="Arial"/>
+                <a:cs typeface="Arial"/>
+                <a:sym typeface="Arial"/>
+              </a:defRPr>
+            </a:lvl4pPr>
+            <a:lvl5pPr algn="ctr" indent="0" lvl="4" marL="0">
+              <a:spcBef>
+                <a:spcPts val="0"/>
+              </a:spcBef>
+              <a:buNone/>
+              <a:defRPr sz="700">
+                <a:solidFill>
+                  <a:schemeClr val="dk1"/>
+                </a:solidFill>
+                <a:latin typeface="Arial"/>
+                <a:ea typeface="Arial"/>
+                <a:cs typeface="Arial"/>
+                <a:sym typeface="Arial"/>
+              </a:defRPr>
+            </a:lvl5pPr>
+            <a:lvl6pPr algn="ctr" indent="0" lvl="5" marL="0">
+              <a:spcBef>
+                <a:spcPts val="0"/>
+              </a:spcBef>
+              <a:buNone/>
+              <a:defRPr sz="700">
+                <a:solidFill>
+                  <a:schemeClr val="dk1"/>
+                </a:solidFill>
+                <a:latin typeface="Arial"/>
+                <a:ea typeface="Arial"/>
+                <a:cs typeface="Arial"/>
+                <a:sym typeface="Arial"/>
+              </a:defRPr>
+            </a:lvl6pPr>
+            <a:lvl7pPr algn="ctr" indent="0" lvl="6" marL="0">
+              <a:spcBef>
+                <a:spcPts val="0"/>
+              </a:spcBef>
+              <a:buNone/>
+              <a:defRPr sz="700">
+                <a:solidFill>
+                  <a:schemeClr val="dk1"/>
+                </a:solidFill>
+                <a:latin typeface="Arial"/>
+                <a:ea typeface="Arial"/>
+                <a:cs typeface="Arial"/>
+                <a:sym typeface="Arial"/>
+              </a:defRPr>
+            </a:lvl7pPr>
+            <a:lvl8pPr algn="ctr" indent="0" lvl="7" marL="0">
+              <a:spcBef>
+                <a:spcPts val="0"/>
+              </a:spcBef>
+              <a:buNone/>
+              <a:defRPr sz="700">
+                <a:solidFill>
+                  <a:schemeClr val="dk1"/>
+                </a:solidFill>
+                <a:latin typeface="Arial"/>
+                <a:ea typeface="Arial"/>
+                <a:cs typeface="Arial"/>
+                <a:sym typeface="Arial"/>
+              </a:defRPr>
+            </a:lvl8pPr>
+            <a:lvl9pPr algn="ctr" indent="0" lvl="8" marL="0">
+              <a:spcBef>
+                <a:spcPts val="0"/>
+              </a:spcBef>
+              <a:buNone/>
+              <a:defRPr sz="700">
+                <a:solidFill>
+                  <a:schemeClr val="dk1"/>
+                </a:solidFill>
+                <a:latin typeface="Arial"/>
+                <a:ea typeface="Arial"/>
+                <a:cs typeface="Arial"/>
+                <a:sym typeface="Arial"/>
+              </a:defRPr>
+            </a:lvl9pPr>
+          </a:lstStyle>
+          <a:p>
+            <a:pPr algn="ctr" indent="0" lvl="0" marL="0" rtl="0">
+              <a:spcBef>
+                <a:spcPts val="0"/>
+              </a:spcBef>
+              <a:spcAft>
+                <a:spcPts val="0"/>
+              </a:spcAft>
+              <a:buNone/>
+            </a:pPr>
+            <a:fld id="{00000000-1234-1234-1234-123412341234}" type="slidenum">
+              <a:rPr lang="en-US"/>
+              <a:t>‹#›</a:t>
+            </a:fld>
+            <a:endParaRPr/>
+          </a:p>
+        </p:txBody>
+      </p:sp>
+    </p:spTree>
+  </p:cSld>
+</p:sld>
+</file>
+
+<file path=ppt/slides/slide12.xml><?xml version="1.0" encoding="utf-8"?>
+<p:sld xmlns:a="http://schemas.openxmlformats.org/drawingml/2006/main" xmlns:r="http://schemas.openxmlformats.org/officeDocument/2006/relationships" xmlns:p="http://schemas.openxmlformats.org/presentationml/2006/main">
+  <p:cSld>
+    <p:spTree>
+      <p:nvGrpSpPr>
+        <p:cNvPr id="134" name="Shape 134"/>
+        <p:cNvGrpSpPr/>
+        <p:nvPr/>
+      </p:nvGrpSpPr>
+      <p:grpSpPr>
+        <a:xfrm>
+          <a:off x="0" y="0"/>
+          <a:ext cx="0" cy="0"/>
+          <a:chOff x="0" y="0"/>
+          <a:chExt cx="0" cy="0"/>
+        </a:xfrm>
+      </p:grpSpPr>
+      <p:sp>
+        <p:nvSpPr>
+          <p:cNvPr id="143" name="Google Shape;143;p23"/>
+          <p:cNvSpPr txBox="1"/>
+          <p:nvPr>
+            <p:ph idx="1"/>
+          </p:nvPr>
+        </p:nvSpPr>
+        <p:spPr/>
+        <p:txBody>
+          <a:bodyPr/>
+          <a:lstStyle/>
+          <a:p>
+            <a:pPr lvl="0" indent="0" marL="0">
+              <a:buNone/>
+            </a:pPr>
+            <a:r>
+              <a:rPr/>
+              <a:t>⇒ Không có cột </a:t>
+            </a:r>
+            <a:r>
+              <a:rPr>
+                <a:latin typeface="Courier"/>
+              </a:rPr>
+              <a:t>raw_ocr_text</a:t>
+            </a:r>
+            <a:r>
+              <a:rPr/>
+              <a:t> thì </a:t>
+            </a:r>
+            <a:r>
+              <a:rPr b="1"/>
+              <a:t>không đo được</a:t>
+            </a:r>
+            <a:r>
+              <a:rPr/>
+              <a:t> đóng góp của hậu xử lý. Đây là quyết định thiết kế từ Phase 0, không phải cột gỡ lỗi thừa</a:t>
+            </a:r>
+          </a:p>
+        </p:txBody>
+      </p:sp>
+      <p:sp>
+        <p:nvSpPr>
           <p:cNvPr id="155" name="Google Shape;155;p23"/>
           <p:cNvSpPr txBox="1"/>
           <p:nvPr>
@@ -44439,7 +45185,7 @@
 </p:sld>
 </file>
 
-<file path=ppt/slides/slide11.xml><?xml version="1.0" encoding="utf-8"?>
+<file path=ppt/slides/slide13.xml><?xml version="1.0" encoding="utf-8"?>
 <p:sld xmlns:a="http://schemas.openxmlformats.org/drawingml/2006/main" xmlns:r="http://schemas.openxmlformats.org/officeDocument/2006/relationships" xmlns:p="http://schemas.openxmlformats.org/presentationml/2006/main">
   <p:cSld>
     <p:spTree>
@@ -44486,379 +45232,6 @@
             </a:pPr>
             <a:r>
               <a:rPr/>
-              <a:t>Tách tầng AI khỏi tầng API</a:t>
-            </a:r>
-          </a:p>
-        </p:txBody>
-      </p:sp>
-      <p:sp>
-        <p:nvSpPr>
-          <p:cNvPr id="143" name="Google Shape;143;p23"/>
-          <p:cNvSpPr txBox="1"/>
-          <p:nvPr>
-            <p:ph idx="1"/>
-          </p:nvPr>
-        </p:nvSpPr>
-        <p:spPr/>
-        <p:txBody>
-          <a:bodyPr/>
-          <a:lstStyle/>
-          <a:p>
-            <a:pPr lvl="0" indent="0" marL="0">
-              <a:buNone/>
-            </a:pPr>
-            <a:r>
-              <a:rPr b="1"/>
-              <a:t>Ràng buộc:</a:t>
-            </a:r>
-            <a:r>
-              <a:rPr/>
-              <a:t> </a:t>
-            </a:r>
-            <a:r>
-              <a:rPr>
-                <a:latin typeface="Courier"/>
-              </a:rPr>
-              <a:t>ai/inference/</a:t>
-            </a:r>
-            <a:r>
-              <a:rPr/>
-              <a:t> cấm import FastAPI hoặc Pydantic</a:t>
-            </a:r>
-          </a:p>
-          <a:p>
-            <a:pPr lvl="0"/>
-            <a:r>
-              <a:rPr/>
-              <a:t>Khối AI </a:t>
-            </a:r>
-            <a:r>
-              <a:rPr b="1"/>
-              <a:t>không có mũi tên nào đi lên</a:t>
-            </a:r>
-            <a:r>
-              <a:rPr/>
-              <a:t> — không biết gì về HTTP, CSDL hay ai gọi nó</a:t>
-            </a:r>
-          </a:p>
-          <a:p>
-            <a:pPr lvl="0"/>
-            <a:r>
-              <a:rPr/>
-              <a:t>Kiểm thử độc lập, không cần dựng server</a:t>
-            </a:r>
-          </a:p>
-          <a:p>
-            <a:pPr lvl="0"/>
-            <a:r>
-              <a:rPr/>
-              <a:t>Cùng một pipeline dùng cho huấn luyện, đánh giá và phục vụ</a:t>
-            </a:r>
-          </a:p>
-          <a:p>
-            <a:pPr lvl="0"/>
-            <a:r>
-              <a:rPr/>
-              <a:t>Thay engine OCR </a:t>
-            </a:r>
-            <a:r>
-              <a:rPr b="1"/>
-              <a:t>không đụng một dòng mã API</a:t>
-            </a:r>
-          </a:p>
-          <a:p>
-            <a:pPr lvl="0" indent="0">
-              <a:buNone/>
-            </a:pPr>
-            <a:r>
-              <a:rPr>
-                <a:solidFill>
-                  <a:srgbClr val="06287E"/>
-                </a:solidFill>
-                <a:latin typeface="Courier"/>
-              </a:rPr>
-              <a:t>grep</a:t>
-            </a:r>
-            <a:r>
-              <a:rPr>
-                <a:latin typeface="Courier"/>
-              </a:rPr>
-              <a:t> </a:t>
-            </a:r>
-            <a:r>
-              <a:rPr>
-                <a:solidFill>
-                  <a:srgbClr val="7D9029"/>
-                </a:solidFill>
-                <a:latin typeface="Courier"/>
-              </a:rPr>
-              <a:t>-r</a:t>
-            </a:r>
-            <a:r>
-              <a:rPr>
-                <a:latin typeface="Courier"/>
-              </a:rPr>
-              <a:t> </a:t>
-            </a:r>
-            <a:r>
-              <a:rPr>
-                <a:solidFill>
-                  <a:srgbClr val="4070A0"/>
-                </a:solidFill>
-                <a:latin typeface="Courier"/>
-              </a:rPr>
-              <a:t>"fastapi\|pydantic"</a:t>
-            </a:r>
-            <a:r>
-              <a:rPr>
-                <a:latin typeface="Courier"/>
-              </a:rPr>
-              <a:t> ai/inference/   </a:t>
-            </a:r>
-            <a:r>
-              <a:rPr i="1">
-                <a:solidFill>
-                  <a:srgbClr val="60A0B0"/>
-                </a:solidFill>
-                <a:latin typeface="Courier"/>
-              </a:rPr>
-              <a:t># phải ra rỗng</a:t>
-            </a:r>
-          </a:p>
-        </p:txBody>
-      </p:sp>
-      <p:sp>
-        <p:nvSpPr>
-          <p:cNvPr id="155" name="Google Shape;155;p23"/>
-          <p:cNvSpPr txBox="1"/>
-          <p:nvPr>
-            <p:ph idx="12" type="sldNum"/>
-          </p:nvPr>
-        </p:nvSpPr>
-        <p:spPr>
-          <a:xfrm>
-            <a:off x="58380" y="6508358"/>
-            <a:ext cx="349642" cy="349642"/>
-          </a:xfrm>
-          <a:prstGeom prst="rect">
-            <a:avLst/>
-          </a:prstGeom>
-          <a:noFill/>
-          <a:ln>
-            <a:noFill/>
-          </a:ln>
-        </p:spPr>
-        <p:txBody>
-          <a:bodyPr anchor="ctr" anchorCtr="0" bIns="45700" lIns="91425" rIns="91425" spcFirstLastPara="1" tIns="45700" wrap="square">
-            <a:noAutofit/>
-          </a:bodyPr>
-          <a:lstStyle>
-            <a:lvl1pPr algn="ctr" indent="0" lvl="0" marL="0">
-              <a:spcBef>
-                <a:spcPts val="0"/>
-              </a:spcBef>
-              <a:buNone/>
-              <a:defRPr sz="700">
-                <a:solidFill>
-                  <a:schemeClr val="dk1"/>
-                </a:solidFill>
-                <a:latin typeface="Arial"/>
-                <a:ea typeface="Arial"/>
-                <a:cs typeface="Arial"/>
-                <a:sym typeface="Arial"/>
-              </a:defRPr>
-            </a:lvl1pPr>
-            <a:lvl2pPr algn="ctr" indent="0" lvl="1" marL="0">
-              <a:spcBef>
-                <a:spcPts val="0"/>
-              </a:spcBef>
-              <a:buNone/>
-              <a:defRPr sz="700">
-                <a:solidFill>
-                  <a:schemeClr val="dk1"/>
-                </a:solidFill>
-                <a:latin typeface="Arial"/>
-                <a:ea typeface="Arial"/>
-                <a:cs typeface="Arial"/>
-                <a:sym typeface="Arial"/>
-              </a:defRPr>
-            </a:lvl2pPr>
-            <a:lvl3pPr algn="ctr" indent="0" lvl="2" marL="0">
-              <a:spcBef>
-                <a:spcPts val="0"/>
-              </a:spcBef>
-              <a:buNone/>
-              <a:defRPr sz="700">
-                <a:solidFill>
-                  <a:schemeClr val="dk1"/>
-                </a:solidFill>
-                <a:latin typeface="Arial"/>
-                <a:ea typeface="Arial"/>
-                <a:cs typeface="Arial"/>
-                <a:sym typeface="Arial"/>
-              </a:defRPr>
-            </a:lvl3pPr>
-            <a:lvl4pPr algn="ctr" indent="0" lvl="3" marL="0">
-              <a:spcBef>
-                <a:spcPts val="0"/>
-              </a:spcBef>
-              <a:buNone/>
-              <a:defRPr sz="700">
-                <a:solidFill>
-                  <a:schemeClr val="dk1"/>
-                </a:solidFill>
-                <a:latin typeface="Arial"/>
-                <a:ea typeface="Arial"/>
-                <a:cs typeface="Arial"/>
-                <a:sym typeface="Arial"/>
-              </a:defRPr>
-            </a:lvl4pPr>
-            <a:lvl5pPr algn="ctr" indent="0" lvl="4" marL="0">
-              <a:spcBef>
-                <a:spcPts val="0"/>
-              </a:spcBef>
-              <a:buNone/>
-              <a:defRPr sz="700">
-                <a:solidFill>
-                  <a:schemeClr val="dk1"/>
-                </a:solidFill>
-                <a:latin typeface="Arial"/>
-                <a:ea typeface="Arial"/>
-                <a:cs typeface="Arial"/>
-                <a:sym typeface="Arial"/>
-              </a:defRPr>
-            </a:lvl5pPr>
-            <a:lvl6pPr algn="ctr" indent="0" lvl="5" marL="0">
-              <a:spcBef>
-                <a:spcPts val="0"/>
-              </a:spcBef>
-              <a:buNone/>
-              <a:defRPr sz="700">
-                <a:solidFill>
-                  <a:schemeClr val="dk1"/>
-                </a:solidFill>
-                <a:latin typeface="Arial"/>
-                <a:ea typeface="Arial"/>
-                <a:cs typeface="Arial"/>
-                <a:sym typeface="Arial"/>
-              </a:defRPr>
-            </a:lvl6pPr>
-            <a:lvl7pPr algn="ctr" indent="0" lvl="6" marL="0">
-              <a:spcBef>
-                <a:spcPts val="0"/>
-              </a:spcBef>
-              <a:buNone/>
-              <a:defRPr sz="700">
-                <a:solidFill>
-                  <a:schemeClr val="dk1"/>
-                </a:solidFill>
-                <a:latin typeface="Arial"/>
-                <a:ea typeface="Arial"/>
-                <a:cs typeface="Arial"/>
-                <a:sym typeface="Arial"/>
-              </a:defRPr>
-            </a:lvl7pPr>
-            <a:lvl8pPr algn="ctr" indent="0" lvl="7" marL="0">
-              <a:spcBef>
-                <a:spcPts val="0"/>
-              </a:spcBef>
-              <a:buNone/>
-              <a:defRPr sz="700">
-                <a:solidFill>
-                  <a:schemeClr val="dk1"/>
-                </a:solidFill>
-                <a:latin typeface="Arial"/>
-                <a:ea typeface="Arial"/>
-                <a:cs typeface="Arial"/>
-                <a:sym typeface="Arial"/>
-              </a:defRPr>
-            </a:lvl8pPr>
-            <a:lvl9pPr algn="ctr" indent="0" lvl="8" marL="0">
-              <a:spcBef>
-                <a:spcPts val="0"/>
-              </a:spcBef>
-              <a:buNone/>
-              <a:defRPr sz="700">
-                <a:solidFill>
-                  <a:schemeClr val="dk1"/>
-                </a:solidFill>
-                <a:latin typeface="Arial"/>
-                <a:ea typeface="Arial"/>
-                <a:cs typeface="Arial"/>
-                <a:sym typeface="Arial"/>
-              </a:defRPr>
-            </a:lvl9pPr>
-          </a:lstStyle>
-          <a:p>
-            <a:pPr algn="ctr" indent="0" lvl="0" marL="0" rtl="0">
-              <a:spcBef>
-                <a:spcPts val="0"/>
-              </a:spcBef>
-              <a:spcAft>
-                <a:spcPts val="0"/>
-              </a:spcAft>
-              <a:buNone/>
-            </a:pPr>
-            <a:fld id="{00000000-1234-1234-1234-123412341234}" type="slidenum">
-              <a:rPr lang="en-US"/>
-              <a:t>‹#›</a:t>
-            </a:fld>
-            <a:endParaRPr/>
-          </a:p>
-        </p:txBody>
-      </p:sp>
-    </p:spTree>
-  </p:cSld>
-</p:sld>
-</file>
-
-<file path=ppt/slides/slide12.xml><?xml version="1.0" encoding="utf-8"?>
-<p:sld xmlns:a="http://schemas.openxmlformats.org/drawingml/2006/main" xmlns:r="http://schemas.openxmlformats.org/officeDocument/2006/relationships" xmlns:p="http://schemas.openxmlformats.org/presentationml/2006/main">
-  <p:cSld>
-    <p:spTree>
-      <p:nvGrpSpPr>
-        <p:cNvPr id="134" name="Shape 134"/>
-        <p:cNvGrpSpPr/>
-        <p:nvPr/>
-      </p:nvGrpSpPr>
-      <p:grpSpPr>
-        <a:xfrm>
-          <a:off x="0" y="0"/>
-          <a:ext cx="0" cy="0"/>
-          <a:chOff x="0" y="0"/>
-          <a:chExt cx="0" cy="0"/>
-        </a:xfrm>
-      </p:grpSpPr>
-      <p:sp>
-        <p:nvSpPr>
-          <p:cNvPr id="142" name="Google Shape;142;p23"/>
-          <p:cNvSpPr txBox="1"/>
-          <p:nvPr>
-            <p:ph type="title"/>
-          </p:nvPr>
-        </p:nvSpPr>
-        <p:spPr>
-          <a:xfrm>
-            <a:off x="774145" y="223964"/>
-            <a:ext cx="10579655" cy="785896"/>
-          </a:xfrm>
-          <a:prstGeom prst="rect">
-            <a:avLst/>
-          </a:prstGeom>
-          <a:noFill/>
-          <a:ln>
-            <a:noFill/>
-          </a:ln>
-        </p:spPr>
-        <p:txBody>
-          <a:bodyPr/>
-          <a:lstStyle/>
-          <a:p>
-            <a:pPr lvl="0" indent="0" marL="0">
-              <a:buNone/>
-            </a:pPr>
-            <a:r>
-              <a:rPr/>
               <a:t>Pipeline AI</a:t>
             </a:r>
           </a:p>
@@ -45096,7 +45469,7 @@
 </p:sld>
 </file>
 
-<file path=ppt/slides/slide13.xml><?xml version="1.0" encoding="utf-8"?>
+<file path=ppt/slides/slide14.xml><?xml version="1.0" encoding="utf-8"?>
 <p:sld xmlns:a="http://schemas.openxmlformats.org/drawingml/2006/main" xmlns:r="http://schemas.openxmlformats.org/officeDocument/2006/relationships" xmlns:p="http://schemas.openxmlformats.org/presentationml/2006/main">
   <p:cSld>
     <p:spTree>
@@ -45333,7 +45706,7 @@
 </p:sld>
 </file>
 
-<file path=ppt/slides/slide14.xml><?xml version="1.0" encoding="utf-8"?>
+<file path=ppt/slides/slide15.xml><?xml version="1.0" encoding="utf-8"?>
 <p:sld xmlns:a="http://schemas.openxmlformats.org/drawingml/2006/main" xmlns:r="http://schemas.openxmlformats.org/officeDocument/2006/relationships" xmlns:p="http://schemas.openxmlformats.org/presentationml/2006/main">
   <p:cSld>
     <p:spTree>
@@ -45664,7 +46037,7 @@
 </p:sld>
 </file>
 
-<file path=ppt/slides/slide15.xml><?xml version="1.0" encoding="utf-8"?>
+<file path=ppt/slides/slide16.xml><?xml version="1.0" encoding="utf-8"?>
 <p:sld xmlns:a="http://schemas.openxmlformats.org/drawingml/2006/main" xmlns:r="http://schemas.openxmlformats.org/officeDocument/2006/relationships" xmlns:p="http://schemas.openxmlformats.org/presentationml/2006/main">
   <p:cSld>
     <p:spTree>
@@ -45992,7 +46365,7 @@
 </p:sld>
 </file>
 
-<file path=ppt/slides/slide16.xml><?xml version="1.0" encoding="utf-8"?>
+<file path=ppt/slides/slide17.xml><?xml version="1.0" encoding="utf-8"?>
 <p:sld xmlns:a="http://schemas.openxmlformats.org/drawingml/2006/main" xmlns:r="http://schemas.openxmlformats.org/officeDocument/2006/relationships" xmlns:p="http://schemas.openxmlformats.org/presentationml/2006/main">
   <p:cSld>
     <p:spTree>
@@ -46748,7 +47121,7 @@
 </p:sld>
 </file>
 
-<file path=ppt/slides/slide17.xml><?xml version="1.0" encoding="utf-8"?>
+<file path=ppt/slides/slide18.xml><?xml version="1.0" encoding="utf-8"?>
 <p:sld xmlns:a="http://schemas.openxmlformats.org/drawingml/2006/main" xmlns:r="http://schemas.openxmlformats.org/officeDocument/2006/relationships" xmlns:p="http://schemas.openxmlformats.org/presentationml/2006/main">
   <p:cSld>
     <p:spTree>
@@ -46985,7 +47358,7 @@
 </p:sld>
 </file>
 
-<file path=ppt/slides/slide18.xml><?xml version="1.0" encoding="utf-8"?>
+<file path=ppt/slides/slide19.xml><?xml version="1.0" encoding="utf-8"?>
 <p:sld xmlns:a="http://schemas.openxmlformats.org/drawingml/2006/main" xmlns:r="http://schemas.openxmlformats.org/officeDocument/2006/relationships" xmlns:p="http://schemas.openxmlformats.org/presentationml/2006/main">
   <p:cSld>
     <p:spTree>
@@ -47314,7 +47687,244 @@
 </p:sld>
 </file>
 
-<file path=ppt/slides/slide19.xml><?xml version="1.0" encoding="utf-8"?>
+<file path=ppt/slides/slide2.xml><?xml version="1.0" encoding="utf-8"?>
+<p:sld xmlns:a="http://schemas.openxmlformats.org/drawingml/2006/main" xmlns:r="http://schemas.openxmlformats.org/officeDocument/2006/relationships" xmlns:p="http://schemas.openxmlformats.org/presentationml/2006/main">
+  <p:cSld>
+    <p:spTree>
+      <p:nvGrpSpPr>
+        <p:cNvPr id="318" name="Shape 318"/>
+        <p:cNvGrpSpPr/>
+        <p:nvPr/>
+      </p:nvGrpSpPr>
+      <p:grpSpPr>
+        <a:xfrm>
+          <a:off x="0" y="0"/>
+          <a:ext cx="0" cy="0"/>
+          <a:chOff x="0" y="0"/>
+          <a:chExt cx="0" cy="0"/>
+        </a:xfrm>
+      </p:grpSpPr>
+      <p:sp>
+        <p:nvSpPr>
+          <p:cNvPr id="332" name="Google Shape;332;p28"/>
+          <p:cNvSpPr txBox="1"/>
+          <p:nvPr>
+            <p:ph type="title"/>
+          </p:nvPr>
+        </p:nvSpPr>
+        <p:spPr>
+          <a:xfrm>
+            <a:off x="1470929" y="2095027"/>
+            <a:ext cx="9941071" cy="884656"/>
+          </a:xfrm>
+          <a:prstGeom prst="rect">
+            <a:avLst/>
+          </a:prstGeom>
+          <a:noFill/>
+          <a:ln>
+            <a:noFill/>
+          </a:ln>
+        </p:spPr>
+        <p:txBody>
+          <a:bodyPr/>
+          <a:lstStyle/>
+          <a:p>
+            <a:pPr lvl="0" indent="0" marL="0">
+              <a:buNone/>
+            </a:pPr>
+            <a:r>
+              <a:rPr/>
+              <a:t>Mở đầu</a:t>
+            </a:r>
+          </a:p>
+        </p:txBody>
+      </p:sp>
+      <p:sp>
+        <p:nvSpPr>
+          <p:cNvPr id="347" name="Google Shape;347;p28"/>
+          <p:cNvSpPr txBox="1"/>
+          <p:nvPr>
+            <p:ph idx="12" type="sldNum"/>
+          </p:nvPr>
+        </p:nvSpPr>
+        <p:spPr>
+          <a:xfrm>
+            <a:off x="65862" y="6542216"/>
+            <a:ext cx="292608" cy="315784"/>
+          </a:xfrm>
+          <a:prstGeom prst="rect">
+            <a:avLst/>
+          </a:prstGeom>
+          <a:noFill/>
+          <a:ln>
+            <a:noFill/>
+          </a:ln>
+        </p:spPr>
+        <p:txBody>
+          <a:bodyPr anchor="ctr" anchorCtr="0" bIns="45700" lIns="91425" rIns="91425" spcFirstLastPara="1" tIns="45700" wrap="square">
+            <a:noAutofit/>
+          </a:bodyPr>
+          <a:lstStyle>
+            <a:lvl1pPr algn="ctr" indent="0" lvl="0" marL="0">
+              <a:spcBef>
+                <a:spcPts val="0"/>
+              </a:spcBef>
+              <a:buNone/>
+              <a:defRPr sz="700">
+                <a:solidFill>
+                  <a:schemeClr val="dk1"/>
+                </a:solidFill>
+                <a:latin typeface="Arial"/>
+                <a:ea typeface="Arial"/>
+                <a:cs typeface="Arial"/>
+                <a:sym typeface="Arial"/>
+              </a:defRPr>
+            </a:lvl1pPr>
+            <a:lvl2pPr algn="ctr" indent="0" lvl="1" marL="0">
+              <a:spcBef>
+                <a:spcPts val="0"/>
+              </a:spcBef>
+              <a:buNone/>
+              <a:defRPr sz="700">
+                <a:solidFill>
+                  <a:schemeClr val="dk1"/>
+                </a:solidFill>
+                <a:latin typeface="Arial"/>
+                <a:ea typeface="Arial"/>
+                <a:cs typeface="Arial"/>
+                <a:sym typeface="Arial"/>
+              </a:defRPr>
+            </a:lvl2pPr>
+            <a:lvl3pPr algn="ctr" indent="0" lvl="2" marL="0">
+              <a:spcBef>
+                <a:spcPts val="0"/>
+              </a:spcBef>
+              <a:buNone/>
+              <a:defRPr sz="700">
+                <a:solidFill>
+                  <a:schemeClr val="dk1"/>
+                </a:solidFill>
+                <a:latin typeface="Arial"/>
+                <a:ea typeface="Arial"/>
+                <a:cs typeface="Arial"/>
+                <a:sym typeface="Arial"/>
+              </a:defRPr>
+            </a:lvl3pPr>
+            <a:lvl4pPr algn="ctr" indent="0" lvl="3" marL="0">
+              <a:spcBef>
+                <a:spcPts val="0"/>
+              </a:spcBef>
+              <a:buNone/>
+              <a:defRPr sz="700">
+                <a:solidFill>
+                  <a:schemeClr val="dk1"/>
+                </a:solidFill>
+                <a:latin typeface="Arial"/>
+                <a:ea typeface="Arial"/>
+                <a:cs typeface="Arial"/>
+                <a:sym typeface="Arial"/>
+              </a:defRPr>
+            </a:lvl4pPr>
+            <a:lvl5pPr algn="ctr" indent="0" lvl="4" marL="0">
+              <a:spcBef>
+                <a:spcPts val="0"/>
+              </a:spcBef>
+              <a:buNone/>
+              <a:defRPr sz="700">
+                <a:solidFill>
+                  <a:schemeClr val="dk1"/>
+                </a:solidFill>
+                <a:latin typeface="Arial"/>
+                <a:ea typeface="Arial"/>
+                <a:cs typeface="Arial"/>
+                <a:sym typeface="Arial"/>
+              </a:defRPr>
+            </a:lvl5pPr>
+            <a:lvl6pPr algn="ctr" indent="0" lvl="5" marL="0">
+              <a:spcBef>
+                <a:spcPts val="0"/>
+              </a:spcBef>
+              <a:buNone/>
+              <a:defRPr sz="700">
+                <a:solidFill>
+                  <a:schemeClr val="dk1"/>
+                </a:solidFill>
+                <a:latin typeface="Arial"/>
+                <a:ea typeface="Arial"/>
+                <a:cs typeface="Arial"/>
+                <a:sym typeface="Arial"/>
+              </a:defRPr>
+            </a:lvl6pPr>
+            <a:lvl7pPr algn="ctr" indent="0" lvl="6" marL="0">
+              <a:spcBef>
+                <a:spcPts val="0"/>
+              </a:spcBef>
+              <a:buNone/>
+              <a:defRPr sz="700">
+                <a:solidFill>
+                  <a:schemeClr val="dk1"/>
+                </a:solidFill>
+                <a:latin typeface="Arial"/>
+                <a:ea typeface="Arial"/>
+                <a:cs typeface="Arial"/>
+                <a:sym typeface="Arial"/>
+              </a:defRPr>
+            </a:lvl7pPr>
+            <a:lvl8pPr algn="ctr" indent="0" lvl="7" marL="0">
+              <a:spcBef>
+                <a:spcPts val="0"/>
+              </a:spcBef>
+              <a:buNone/>
+              <a:defRPr sz="700">
+                <a:solidFill>
+                  <a:schemeClr val="dk1"/>
+                </a:solidFill>
+                <a:latin typeface="Arial"/>
+                <a:ea typeface="Arial"/>
+                <a:cs typeface="Arial"/>
+                <a:sym typeface="Arial"/>
+              </a:defRPr>
+            </a:lvl8pPr>
+            <a:lvl9pPr algn="ctr" indent="0" lvl="8" marL="0">
+              <a:spcBef>
+                <a:spcPts val="0"/>
+              </a:spcBef>
+              <a:buNone/>
+              <a:defRPr sz="700">
+                <a:solidFill>
+                  <a:schemeClr val="dk1"/>
+                </a:solidFill>
+                <a:latin typeface="Arial"/>
+                <a:ea typeface="Arial"/>
+                <a:cs typeface="Arial"/>
+                <a:sym typeface="Arial"/>
+              </a:defRPr>
+            </a:lvl9pPr>
+          </a:lstStyle>
+          <a:p>
+            <a:pPr algn="ctr" indent="0" lvl="0" marL="0" rtl="0">
+              <a:spcBef>
+                <a:spcPts val="0"/>
+              </a:spcBef>
+              <a:spcAft>
+                <a:spcPts val="0"/>
+              </a:spcAft>
+              <a:buNone/>
+            </a:pPr>
+            <a:fld id="{00000000-1234-1234-1234-123412341234}" type="slidenum">
+              <a:rPr lang="en-US"/>
+              <a:t>‹#›</a:t>
+            </a:fld>
+            <a:endParaRPr/>
+          </a:p>
+        </p:txBody>
+      </p:sp>
+    </p:spTree>
+  </p:cSld>
+</p:sld>
+</file>
+
+<file path=ppt/slides/slide20.xml><?xml version="1.0" encoding="utf-8"?>
 <p:sld xmlns:a="http://schemas.openxmlformats.org/drawingml/2006/main" xmlns:r="http://schemas.openxmlformats.org/officeDocument/2006/relationships" xmlns:p="http://schemas.openxmlformats.org/presentationml/2006/main">
   <p:cSld>
     <p:spTree>
@@ -47913,12 +48523,12 @@
 </p:sld>
 </file>
 
-<file path=ppt/slides/slide2.xml><?xml version="1.0" encoding="utf-8"?>
+<file path=ppt/slides/slide21.xml><?xml version="1.0" encoding="utf-8"?>
 <p:sld xmlns:a="http://schemas.openxmlformats.org/drawingml/2006/main" xmlns:r="http://schemas.openxmlformats.org/officeDocument/2006/relationships" xmlns:p="http://schemas.openxmlformats.org/presentationml/2006/main">
   <p:cSld>
     <p:spTree>
       <p:nvGrpSpPr>
-        <p:cNvPr id="318" name="Shape 318"/>
+        <p:cNvPr id="428" name="Shape 428"/>
         <p:cNvGrpSpPr/>
         <p:nvPr/>
       </p:nvGrpSpPr>
@@ -47932,7 +48542,7 @@
       </p:grpSpPr>
       <p:sp>
         <p:nvSpPr>
-          <p:cNvPr id="332" name="Google Shape;332;p28"/>
+          <p:cNvPr id="436" name="Google Shape;436;p31"/>
           <p:cNvSpPr txBox="1"/>
           <p:nvPr>
             <p:ph type="title"/>
@@ -47940,8 +48550,8 @@
         </p:nvSpPr>
         <p:spPr>
           <a:xfrm>
-            <a:off x="1470929" y="2095027"/>
-            <a:ext cx="9941071" cy="884656"/>
+            <a:off x="774146" y="202009"/>
+            <a:ext cx="3932227" cy="1698043"/>
           </a:xfrm>
           <a:prstGeom prst="rect">
             <a:avLst/>
@@ -47960,14 +48570,391 @@
             </a:pPr>
             <a:r>
               <a:rPr/>
-              <a:t>Mở đầu</a:t>
+              <a:t>Kết quả OCR — nói thẳng phần chưa đạt</a:t>
             </a:r>
           </a:p>
         </p:txBody>
       </p:sp>
       <p:sp>
         <p:nvSpPr>
-          <p:cNvPr id="347" name="Google Shape;347;p28"/>
+          <p:cNvPr id="437" name="Google Shape;437;p31"/>
+          <p:cNvSpPr txBox="1"/>
+          <p:nvPr>
+            <p:ph idx="2" sz="half" type="body"/>
+          </p:nvPr>
+        </p:nvSpPr>
+        <p:spPr/>
+        <p:txBody>
+          <a:bodyPr/>
+          <a:lstStyle/>
+          <a:p>
+            <a:pPr lvl="0" indent="0" marL="0">
+              <a:buNone/>
+            </a:pPr>
+            <a:r>
+              <a:rPr/>
+              <a:t>Toàn bộ khoảng cách nằm ở </a:t>
+            </a:r>
+            <a:r>
+              <a:rPr b="1"/>
+              <a:t>biển 2 dòng</a:t>
+            </a:r>
+            <a:r>
+              <a:rPr/>
+              <a:t>: 0,6996 so với </a:t>
+            </a:r>
+            <a:r>
+              <a:rPr b="1"/>
+              <a:t>0,9541</a:t>
+            </a:r>
+            <a:r>
+              <a:rPr/>
+              <a:t> của biển 1 dòng</a:t>
+            </a:r>
+          </a:p>
+        </p:txBody>
+      </p:sp>
+      <p:graphicFrame>
+        <p:nvGraphicFramePr>
+          <p:cNvPr id="6" name="Content Placeholder 5"/>
+          <p:cNvGraphicFramePr>
+            <a:graphicFrameLocks noGrp="1"/>
+          </p:cNvGraphicFramePr>
+          <p:nvPr>
+            <p:ph idx="1"/>
+          </p:nvPr>
+        </p:nvGraphicFramePr>
+        <p:xfrm>
+          <a:off x="5156200" y="190500"/>
+          <a:ext cx="6235700" cy="5969000"/>
+        </p:xfrm>
+        <a:graphic>
+          <a:graphicData uri="http://schemas.openxmlformats.org/drawingml/2006/table">
+            <a:tbl>
+              <a:tblPr firstRow="1" bandRow="1">
+                <a:tableStyleId>{45BEF19B-5B1D-4A26-B267-ECC71EF7E2D4}</a:tableStyleId>
+              </a:tblPr>
+              <a:tblGrid>
+                <a:gridCol w="1549400"/>
+                <a:gridCol w="1549400"/>
+                <a:gridCol w="1549400"/>
+                <a:gridCol w="1549400"/>
+              </a:tblGrid>
+              <a:tr h="0">
+                <a:tc>
+                  <a:txBody>
+                    <a:bodyPr/>
+                    <a:lstStyle/>
+                    <a:p>
+                      <a:pPr lvl="0" indent="0" marL="0">
+                        <a:buNone/>
+                      </a:pPr>
+                      <a:r>
+                        <a:rPr/>
+                        <a:t>Chỉ tiêu</a:t>
+                      </a:r>
+                    </a:p>
+                  </a:txBody>
+                  <a:tcPr/>
+                </a:tc>
+                <a:tc>
+                  <a:txBody>
+                    <a:bodyPr/>
+                    <a:lstStyle/>
+                    <a:p>
+                      <a:pPr lvl="0" indent="0" marL="0" algn="r">
+                        <a:buNone/>
+                      </a:pPr>
+                      <a:r>
+                        <a:rPr/>
+                        <a:t>Đo được</a:t>
+                      </a:r>
+                    </a:p>
+                  </a:txBody>
+                  <a:tcPr/>
+                </a:tc>
+                <a:tc>
+                  <a:txBody>
+                    <a:bodyPr/>
+                    <a:lstStyle/>
+                    <a:p>
+                      <a:pPr lvl="0" indent="0" marL="0" algn="r">
+                        <a:buNone/>
+                      </a:pPr>
+                      <a:r>
+                        <a:rPr/>
+                        <a:t>Ngưỡng</a:t>
+                      </a:r>
+                    </a:p>
+                  </a:txBody>
+                  <a:tcPr/>
+                </a:tc>
+                <a:tc>
+                  <a:txBody>
+                    <a:bodyPr/>
+                    <a:lstStyle/>
+                    <a:p>
+                      <a:endParaRPr/>
+                    </a:p>
+                  </a:txBody>
+                  <a:tcPr/>
+                </a:tc>
+              </a:tr>
+              <a:tr h="0">
+                <a:tc>
+                  <a:txBody>
+                    <a:bodyPr/>
+                    <a:lstStyle/>
+                    <a:p>
+                      <a:pPr lvl="0" indent="0" marL="0">
+                        <a:buNone/>
+                      </a:pPr>
+                      <a:r>
+                        <a:rPr/>
+                        <a:t>A4 — chính xác ký tự</a:t>
+                      </a:r>
+                    </a:p>
+                  </a:txBody>
+                </a:tc>
+                <a:tc>
+                  <a:txBody>
+                    <a:bodyPr/>
+                    <a:lstStyle/>
+                    <a:p>
+                      <a:pPr lvl="0" indent="0" marL="0" algn="r">
+                        <a:buNone/>
+                      </a:pPr>
+                      <a:r>
+                        <a:rPr b="1"/>
+                        <a:t>0,9454</a:t>
+                      </a:r>
+                    </a:p>
+                  </a:txBody>
+                </a:tc>
+                <a:tc>
+                  <a:txBody>
+                    <a:bodyPr/>
+                    <a:lstStyle/>
+                    <a:p>
+                      <a:pPr lvl="0" indent="0" marL="0" algn="r">
+                        <a:buNone/>
+                      </a:pPr>
+                      <a:r>
+                        <a:rPr/>
+                        <a:t>0,92</a:t>
+                      </a:r>
+                    </a:p>
+                  </a:txBody>
+                </a:tc>
+                <a:tc>
+                  <a:txBody>
+                    <a:bodyPr/>
+                    <a:lstStyle/>
+                    <a:p>
+                      <a:pPr lvl="0" indent="0" marL="0" algn="ctr">
+                        <a:buNone/>
+                      </a:pPr>
+                      <a:r>
+                        <a:rPr/>
+                        <a:t>🟡</a:t>
+                      </a:r>
+                    </a:p>
+                  </a:txBody>
+                </a:tc>
+              </a:tr>
+              <a:tr h="0">
+                <a:tc>
+                  <a:txBody>
+                    <a:bodyPr/>
+                    <a:lstStyle/>
+                    <a:p>
+                      <a:pPr lvl="0" indent="0" marL="0">
+                        <a:buNone/>
+                      </a:pPr>
+                      <a:r>
+                        <a:rPr/>
+                        <a:t>A5 — chuỗi trước hậu xử lý</a:t>
+                      </a:r>
+                    </a:p>
+                  </a:txBody>
+                </a:tc>
+                <a:tc>
+                  <a:txBody>
+                    <a:bodyPr/>
+                    <a:lstStyle/>
+                    <a:p>
+                      <a:pPr lvl="0" indent="0" marL="0" algn="r">
+                        <a:buNone/>
+                      </a:pPr>
+                      <a:r>
+                        <a:rPr/>
+                        <a:t>0,6373</a:t>
+                      </a:r>
+                    </a:p>
+                  </a:txBody>
+                </a:tc>
+                <a:tc>
+                  <a:txBody>
+                    <a:bodyPr/>
+                    <a:lstStyle/>
+                    <a:p>
+                      <a:pPr lvl="0" indent="0" marL="0" algn="r">
+                        <a:buNone/>
+                      </a:pPr>
+                      <a:r>
+                        <a:rPr/>
+                        <a:t>0,80</a:t>
+                      </a:r>
+                    </a:p>
+                  </a:txBody>
+                </a:tc>
+                <a:tc>
+                  <a:txBody>
+                    <a:bodyPr/>
+                    <a:lstStyle/>
+                    <a:p>
+                      <a:pPr lvl="0" indent="0" marL="0" algn="ctr">
+                        <a:buNone/>
+                      </a:pPr>
+                      <a:r>
+                        <a:rPr/>
+                        <a:t>❌</a:t>
+                      </a:r>
+                    </a:p>
+                  </a:txBody>
+                </a:tc>
+              </a:tr>
+              <a:tr h="0">
+                <a:tc>
+                  <a:txBody>
+                    <a:bodyPr/>
+                    <a:lstStyle/>
+                    <a:p>
+                      <a:pPr lvl="0" indent="0" marL="0">
+                        <a:buNone/>
+                      </a:pPr>
+                      <a:r>
+                        <a:rPr/>
+                        <a:t>A6 — chuỗi sau hậu xử lý</a:t>
+                      </a:r>
+                    </a:p>
+                  </a:txBody>
+                </a:tc>
+                <a:tc>
+                  <a:txBody>
+                    <a:bodyPr/>
+                    <a:lstStyle/>
+                    <a:p>
+                      <a:pPr lvl="0" indent="0" marL="0" algn="r">
+                        <a:buNone/>
+                      </a:pPr>
+                      <a:r>
+                        <a:rPr b="1"/>
+                        <a:t>0,7512</a:t>
+                      </a:r>
+                    </a:p>
+                  </a:txBody>
+                </a:tc>
+                <a:tc>
+                  <a:txBody>
+                    <a:bodyPr/>
+                    <a:lstStyle/>
+                    <a:p>
+                      <a:pPr lvl="0" indent="0" marL="0" algn="r">
+                        <a:buNone/>
+                      </a:pPr>
+                      <a:r>
+                        <a:rPr/>
+                        <a:t>0,85</a:t>
+                      </a:r>
+                    </a:p>
+                  </a:txBody>
+                </a:tc>
+                <a:tc>
+                  <a:txBody>
+                    <a:bodyPr/>
+                    <a:lstStyle/>
+                    <a:p>
+                      <a:pPr lvl="0" indent="0" marL="0" algn="ctr">
+                        <a:buNone/>
+                      </a:pPr>
+                      <a:r>
+                        <a:rPr/>
+                        <a:t>❌</a:t>
+                      </a:r>
+                    </a:p>
+                  </a:txBody>
+                </a:tc>
+              </a:tr>
+              <a:tr h="0">
+                <a:tc>
+                  <a:txBody>
+                    <a:bodyPr/>
+                    <a:lstStyle/>
+                    <a:p>
+                      <a:pPr lvl="0" indent="0" marL="0">
+                        <a:buNone/>
+                      </a:pPr>
+                      <a:r>
+                        <a:rPr/>
+                        <a:t>A7 — đầu-cuối</a:t>
+                      </a:r>
+                    </a:p>
+                  </a:txBody>
+                </a:tc>
+                <a:tc>
+                  <a:txBody>
+                    <a:bodyPr/>
+                    <a:lstStyle/>
+                    <a:p>
+                      <a:pPr lvl="0" indent="0" marL="0" algn="r">
+                        <a:buNone/>
+                      </a:pPr>
+                      <a:r>
+                        <a:rPr/>
+                        <a:t>0,5552</a:t>
+                      </a:r>
+                    </a:p>
+                  </a:txBody>
+                </a:tc>
+                <a:tc>
+                  <a:txBody>
+                    <a:bodyPr/>
+                    <a:lstStyle/>
+                    <a:p>
+                      <a:pPr lvl="0" indent="0" marL="0" algn="r">
+                        <a:buNone/>
+                      </a:pPr>
+                      <a:r>
+                        <a:rPr/>
+                        <a:t>0,82</a:t>
+                      </a:r>
+                    </a:p>
+                  </a:txBody>
+                </a:tc>
+                <a:tc>
+                  <a:txBody>
+                    <a:bodyPr/>
+                    <a:lstStyle/>
+                    <a:p>
+                      <a:pPr lvl="0" indent="0" marL="0" algn="ctr">
+                        <a:buNone/>
+                      </a:pPr>
+                      <a:r>
+                        <a:rPr/>
+                        <a:t>❌</a:t>
+                      </a:r>
+                    </a:p>
+                  </a:txBody>
+                </a:tc>
+              </a:tr>
+            </a:tbl>
+          </a:graphicData>
+        </a:graphic>
+      </p:graphicFrame>
+      <p:sp>
+        <p:nvSpPr>
+          <p:cNvPr id="449" name="Google Shape;449;p31"/>
           <p:cNvSpPr txBox="1"/>
           <p:nvPr>
             <p:ph idx="12" type="sldNum"/>
@@ -47975,8 +48962,8 @@
         </p:nvSpPr>
         <p:spPr>
           <a:xfrm>
-            <a:off x="65862" y="6542216"/>
-            <a:ext cx="292608" cy="315784"/>
+            <a:off x="58380" y="6508358"/>
+            <a:ext cx="349642" cy="349642"/>
           </a:xfrm>
           <a:prstGeom prst="rect">
             <a:avLst/>
@@ -48150,7 +49137,7 @@
 </p:sld>
 </file>
 
-<file path=ppt/slides/slide20.xml><?xml version="1.0" encoding="utf-8"?>
+<file path=ppt/slides/slide22.xml><?xml version="1.0" encoding="utf-8"?>
 <p:sld xmlns:a="http://schemas.openxmlformats.org/drawingml/2006/main" xmlns:r="http://schemas.openxmlformats.org/officeDocument/2006/relationships" xmlns:p="http://schemas.openxmlformats.org/presentationml/2006/main">
   <p:cSld>
     <p:spTree>
@@ -48645,7 +49632,7 @@
 </p:sld>
 </file>
 
-<file path=ppt/slides/slide21.xml><?xml version="1.0" encoding="utf-8"?>
+<file path=ppt/slides/slide23.xml><?xml version="1.0" encoding="utf-8"?>
 <p:sld xmlns:a="http://schemas.openxmlformats.org/drawingml/2006/main" xmlns:r="http://schemas.openxmlformats.org/officeDocument/2006/relationships" xmlns:p="http://schemas.openxmlformats.org/presentationml/2006/main">
   <p:cSld>
     <p:spTree>
@@ -49052,7 +50039,7 @@
 </p:sld>
 </file>
 
-<file path=ppt/slides/slide22.xml><?xml version="1.0" encoding="utf-8"?>
+<file path=ppt/slides/slide24.xml><?xml version="1.0" encoding="utf-8"?>
 <p:sld xmlns:a="http://schemas.openxmlformats.org/drawingml/2006/main" xmlns:r="http://schemas.openxmlformats.org/officeDocument/2006/relationships" xmlns:p="http://schemas.openxmlformats.org/presentationml/2006/main">
   <p:cSld>
     <p:spTree>
@@ -49289,7 +50276,7 @@
 </p:sld>
 </file>
 
-<file path=ppt/slides/slide23.xml><?xml version="1.0" encoding="utf-8"?>
+<file path=ppt/slides/slide25.xml><?xml version="1.0" encoding="utf-8"?>
 <p:sld xmlns:a="http://schemas.openxmlformats.org/drawingml/2006/main" xmlns:r="http://schemas.openxmlformats.org/officeDocument/2006/relationships" xmlns:p="http://schemas.openxmlformats.org/presentationml/2006/main">
   <p:cSld>
     <p:spTree>
@@ -49733,7 +50720,749 @@
 </p:sld>
 </file>
 
-<file path=ppt/slides/slide24.xml><?xml version="1.0" encoding="utf-8"?>
+<file path=ppt/slides/slide26.xml><?xml version="1.0" encoding="utf-8"?>
+<p:sld xmlns:a="http://schemas.openxmlformats.org/drawingml/2006/main" xmlns:r="http://schemas.openxmlformats.org/officeDocument/2006/relationships" xmlns:p="http://schemas.openxmlformats.org/presentationml/2006/main">
+  <p:cSld>
+    <p:spTree>
+      <p:nvGrpSpPr>
+        <p:cNvPr id="428" name="Shape 428"/>
+        <p:cNvGrpSpPr/>
+        <p:nvPr/>
+      </p:nvGrpSpPr>
+      <p:grpSpPr>
+        <a:xfrm>
+          <a:off x="0" y="0"/>
+          <a:ext cx="0" cy="0"/>
+          <a:chOff x="0" y="0"/>
+          <a:chExt cx="0" cy="0"/>
+        </a:xfrm>
+      </p:grpSpPr>
+      <p:sp>
+        <p:nvSpPr>
+          <p:cNvPr id="436" name="Google Shape;436;p31"/>
+          <p:cNvSpPr txBox="1"/>
+          <p:nvPr>
+            <p:ph type="title"/>
+          </p:nvPr>
+        </p:nvSpPr>
+        <p:spPr>
+          <a:xfrm>
+            <a:off x="774146" y="202009"/>
+            <a:ext cx="3932227" cy="1698043"/>
+          </a:xfrm>
+          <a:prstGeom prst="rect">
+            <a:avLst/>
+          </a:prstGeom>
+          <a:noFill/>
+          <a:ln>
+            <a:noFill/>
+          </a:ln>
+        </p:spPr>
+        <p:txBody>
+          <a:bodyPr/>
+          <a:lstStyle/>
+          <a:p>
+            <a:pPr lvl="0" indent="0" marL="0">
+              <a:buNone/>
+            </a:pPr>
+            <a:r>
+              <a:rPr/>
+              <a:t>Demo trực tiếp</a:t>
+            </a:r>
+          </a:p>
+        </p:txBody>
+      </p:sp>
+      <p:sp>
+        <p:nvSpPr>
+          <p:cNvPr id="437" name="Google Shape;437;p31"/>
+          <p:cNvSpPr txBox="1"/>
+          <p:nvPr>
+            <p:ph idx="2" sz="half" type="body"/>
+          </p:nvPr>
+        </p:nvSpPr>
+        <p:spPr/>
+        <p:txBody>
+          <a:bodyPr/>
+          <a:lstStyle/>
+          <a:p>
+            <a:pPr lvl="0" indent="0" marL="0">
+              <a:buNone/>
+            </a:pPr>
+            <a:r>
+              <a:rPr/>
+              <a:t>Ba tình huống, chạy trên máy thật — </a:t>
+            </a:r>
+            <a:r>
+              <a:rPr b="1"/>
+              <a:t>không phải video quay sẵn</a:t>
+            </a:r>
+          </a:p>
+        </p:txBody>
+      </p:sp>
+      <p:graphicFrame>
+        <p:nvGraphicFramePr>
+          <p:cNvPr id="6" name="Content Placeholder 5"/>
+          <p:cNvGraphicFramePr>
+            <a:graphicFrameLocks noGrp="1"/>
+          </p:cNvGraphicFramePr>
+          <p:nvPr>
+            <p:ph idx="1"/>
+          </p:nvPr>
+        </p:nvGraphicFramePr>
+        <p:xfrm>
+          <a:off x="5156200" y="190500"/>
+          <a:ext cx="6235700" cy="5969000"/>
+        </p:xfrm>
+        <a:graphic>
+          <a:graphicData uri="http://schemas.openxmlformats.org/drawingml/2006/table">
+            <a:tbl>
+              <a:tblPr firstRow="1" bandRow="1">
+                <a:tableStyleId>{45BEF19B-5B1D-4A26-B267-ECC71EF7E2D4}</a:tableStyleId>
+              </a:tblPr>
+              <a:tblGrid>
+                <a:gridCol w="3111500"/>
+                <a:gridCol w="3111500"/>
+              </a:tblGrid>
+              <a:tr h="0">
+                <a:tc>
+                  <a:txBody>
+                    <a:bodyPr/>
+                    <a:lstStyle/>
+                    <a:p>
+                      <a:pPr lvl="0" indent="0" marL="0">
+                        <a:buNone/>
+                      </a:pPr>
+                      <a:r>
+                        <a:rPr/>
+                        <a:t>Bước</a:t>
+                      </a:r>
+                    </a:p>
+                  </a:txBody>
+                  <a:tcPr/>
+                </a:tc>
+                <a:tc>
+                  <a:txBody>
+                    <a:bodyPr/>
+                    <a:lstStyle/>
+                    <a:p>
+                      <a:pPr lvl="0" indent="0" marL="0">
+                        <a:buNone/>
+                      </a:pPr>
+                      <a:r>
+                        <a:rPr/>
+                        <a:t>Cho thấy điều gì</a:t>
+                      </a:r>
+                    </a:p>
+                  </a:txBody>
+                  <a:tcPr/>
+                </a:tc>
+              </a:tr>
+              <a:tr h="0">
+                <a:tc>
+                  <a:txBody>
+                    <a:bodyPr/>
+                    <a:lstStyle/>
+                    <a:p>
+                      <a:pPr lvl="0" indent="0" marL="0">
+                        <a:buNone/>
+                      </a:pPr>
+                      <a:r>
+                        <a:rPr/>
+                        <a:t>Ảnh ô tô — biển 1 dòng</a:t>
+                      </a:r>
+                    </a:p>
+                  </a:txBody>
+                </a:tc>
+                <a:tc>
+                  <a:txBody>
+                    <a:bodyPr/>
+                    <a:lstStyle/>
+                    <a:p>
+                      <a:pPr lvl="0" indent="0" marL="0">
+                        <a:buNone/>
+                      </a:pPr>
+                      <a:r>
+                        <a:rPr/>
+                        <a:t>Đường đi cơ bản, đọc đúng, dưới 1 giây</a:t>
+                      </a:r>
+                    </a:p>
+                  </a:txBody>
+                </a:tc>
+              </a:tr>
+              <a:tr h="0">
+                <a:tc>
+                  <a:txBody>
+                    <a:bodyPr/>
+                    <a:lstStyle/>
+                    <a:p>
+                      <a:pPr lvl="0" indent="0" marL="0">
+                        <a:buNone/>
+                      </a:pPr>
+                      <a:r>
+                        <a:rPr/>
+                        <a:t>Ảnh xe máy — biển 2 dòng</a:t>
+                      </a:r>
+                    </a:p>
+                  </a:txBody>
+                </a:tc>
+                <a:tc>
+                  <a:txBody>
+                    <a:bodyPr/>
+                    <a:lstStyle/>
+                    <a:p>
+                      <a:pPr lvl="0" indent="0" marL="0">
+                        <a:buNone/>
+                      </a:pPr>
+                      <a:r>
+                        <a:rPr/>
+                        <a:t>Chính chỗ khó nhất, split-then-hstack chạy thật</a:t>
+                      </a:r>
+                    </a:p>
+                  </a:txBody>
+                </a:tc>
+              </a:tr>
+              <a:tr h="0">
+                <a:tc>
+                  <a:txBody>
+                    <a:bodyPr/>
+                    <a:lstStyle/>
+                    <a:p>
+                      <a:pPr lvl="0" indent="0" marL="0">
+                        <a:buNone/>
+                      </a:pPr>
+                      <a:r>
+                        <a:rPr/>
+                        <a:t>Video + Lịch sử</a:t>
+                      </a:r>
+                    </a:p>
+                  </a:txBody>
+                </a:tc>
+                <a:tc>
+                  <a:txBody>
+                    <a:bodyPr/>
+                    <a:lstStyle/>
+                    <a:p>
+                      <a:pPr lvl="0" indent="0" marL="0">
+                        <a:buNone/>
+                      </a:pPr>
+                      <a:r>
+                        <a:rPr/>
+                        <a:t>Xử lý bất đồng bộ, tra cứu lại kết quả</a:t>
+                      </a:r>
+                    </a:p>
+                  </a:txBody>
+                </a:tc>
+              </a:tr>
+            </a:tbl>
+          </a:graphicData>
+        </a:graphic>
+      </p:graphicFrame>
+      <p:sp>
+        <p:nvSpPr>
+          <p:cNvPr id="449" name="Google Shape;449;p31"/>
+          <p:cNvSpPr txBox="1"/>
+          <p:nvPr>
+            <p:ph idx="12" type="sldNum"/>
+          </p:nvPr>
+        </p:nvSpPr>
+        <p:spPr>
+          <a:xfrm>
+            <a:off x="58380" y="6508358"/>
+            <a:ext cx="349642" cy="349642"/>
+          </a:xfrm>
+          <a:prstGeom prst="rect">
+            <a:avLst/>
+          </a:prstGeom>
+          <a:noFill/>
+          <a:ln>
+            <a:noFill/>
+          </a:ln>
+        </p:spPr>
+        <p:txBody>
+          <a:bodyPr anchor="ctr" anchorCtr="0" bIns="45700" lIns="91425" rIns="91425" spcFirstLastPara="1" tIns="45700" wrap="square">
+            <a:noAutofit/>
+          </a:bodyPr>
+          <a:lstStyle>
+            <a:lvl1pPr algn="ctr" indent="0" lvl="0" marL="0">
+              <a:spcBef>
+                <a:spcPts val="0"/>
+              </a:spcBef>
+              <a:buNone/>
+              <a:defRPr sz="700">
+                <a:solidFill>
+                  <a:schemeClr val="dk1"/>
+                </a:solidFill>
+                <a:latin typeface="Arial"/>
+                <a:ea typeface="Arial"/>
+                <a:cs typeface="Arial"/>
+                <a:sym typeface="Arial"/>
+              </a:defRPr>
+            </a:lvl1pPr>
+            <a:lvl2pPr algn="ctr" indent="0" lvl="1" marL="0">
+              <a:spcBef>
+                <a:spcPts val="0"/>
+              </a:spcBef>
+              <a:buNone/>
+              <a:defRPr sz="700">
+                <a:solidFill>
+                  <a:schemeClr val="dk1"/>
+                </a:solidFill>
+                <a:latin typeface="Arial"/>
+                <a:ea typeface="Arial"/>
+                <a:cs typeface="Arial"/>
+                <a:sym typeface="Arial"/>
+              </a:defRPr>
+            </a:lvl2pPr>
+            <a:lvl3pPr algn="ctr" indent="0" lvl="2" marL="0">
+              <a:spcBef>
+                <a:spcPts val="0"/>
+              </a:spcBef>
+              <a:buNone/>
+              <a:defRPr sz="700">
+                <a:solidFill>
+                  <a:schemeClr val="dk1"/>
+                </a:solidFill>
+                <a:latin typeface="Arial"/>
+                <a:ea typeface="Arial"/>
+                <a:cs typeface="Arial"/>
+                <a:sym typeface="Arial"/>
+              </a:defRPr>
+            </a:lvl3pPr>
+            <a:lvl4pPr algn="ctr" indent="0" lvl="3" marL="0">
+              <a:spcBef>
+                <a:spcPts val="0"/>
+              </a:spcBef>
+              <a:buNone/>
+              <a:defRPr sz="700">
+                <a:solidFill>
+                  <a:schemeClr val="dk1"/>
+                </a:solidFill>
+                <a:latin typeface="Arial"/>
+                <a:ea typeface="Arial"/>
+                <a:cs typeface="Arial"/>
+                <a:sym typeface="Arial"/>
+              </a:defRPr>
+            </a:lvl4pPr>
+            <a:lvl5pPr algn="ctr" indent="0" lvl="4" marL="0">
+              <a:spcBef>
+                <a:spcPts val="0"/>
+              </a:spcBef>
+              <a:buNone/>
+              <a:defRPr sz="700">
+                <a:solidFill>
+                  <a:schemeClr val="dk1"/>
+                </a:solidFill>
+                <a:latin typeface="Arial"/>
+                <a:ea typeface="Arial"/>
+                <a:cs typeface="Arial"/>
+                <a:sym typeface="Arial"/>
+              </a:defRPr>
+            </a:lvl5pPr>
+            <a:lvl6pPr algn="ctr" indent="0" lvl="5" marL="0">
+              <a:spcBef>
+                <a:spcPts val="0"/>
+              </a:spcBef>
+              <a:buNone/>
+              <a:defRPr sz="700">
+                <a:solidFill>
+                  <a:schemeClr val="dk1"/>
+                </a:solidFill>
+                <a:latin typeface="Arial"/>
+                <a:ea typeface="Arial"/>
+                <a:cs typeface="Arial"/>
+                <a:sym typeface="Arial"/>
+              </a:defRPr>
+            </a:lvl6pPr>
+            <a:lvl7pPr algn="ctr" indent="0" lvl="6" marL="0">
+              <a:spcBef>
+                <a:spcPts val="0"/>
+              </a:spcBef>
+              <a:buNone/>
+              <a:defRPr sz="700">
+                <a:solidFill>
+                  <a:schemeClr val="dk1"/>
+                </a:solidFill>
+                <a:latin typeface="Arial"/>
+                <a:ea typeface="Arial"/>
+                <a:cs typeface="Arial"/>
+                <a:sym typeface="Arial"/>
+              </a:defRPr>
+            </a:lvl7pPr>
+            <a:lvl8pPr algn="ctr" indent="0" lvl="7" marL="0">
+              <a:spcBef>
+                <a:spcPts val="0"/>
+              </a:spcBef>
+              <a:buNone/>
+              <a:defRPr sz="700">
+                <a:solidFill>
+                  <a:schemeClr val="dk1"/>
+                </a:solidFill>
+                <a:latin typeface="Arial"/>
+                <a:ea typeface="Arial"/>
+                <a:cs typeface="Arial"/>
+                <a:sym typeface="Arial"/>
+              </a:defRPr>
+            </a:lvl8pPr>
+            <a:lvl9pPr algn="ctr" indent="0" lvl="8" marL="0">
+              <a:spcBef>
+                <a:spcPts val="0"/>
+              </a:spcBef>
+              <a:buNone/>
+              <a:defRPr sz="700">
+                <a:solidFill>
+                  <a:schemeClr val="dk1"/>
+                </a:solidFill>
+                <a:latin typeface="Arial"/>
+                <a:ea typeface="Arial"/>
+                <a:cs typeface="Arial"/>
+                <a:sym typeface="Arial"/>
+              </a:defRPr>
+            </a:lvl9pPr>
+          </a:lstStyle>
+          <a:p>
+            <a:pPr algn="ctr" indent="0" lvl="0" marL="0" rtl="0">
+              <a:spcBef>
+                <a:spcPts val="0"/>
+              </a:spcBef>
+              <a:spcAft>
+                <a:spcPts val="0"/>
+              </a:spcAft>
+              <a:buNone/>
+            </a:pPr>
+            <a:fld id="{00000000-1234-1234-1234-123412341234}" type="slidenum">
+              <a:rPr lang="en-US"/>
+              <a:t>‹#›</a:t>
+            </a:fld>
+            <a:endParaRPr/>
+          </a:p>
+        </p:txBody>
+      </p:sp>
+    </p:spTree>
+  </p:cSld>
+</p:sld>
+</file>
+
+<file path=ppt/slides/slide27.xml><?xml version="1.0" encoding="utf-8"?>
+<p:sld xmlns:a="http://schemas.openxmlformats.org/drawingml/2006/main" xmlns:r="http://schemas.openxmlformats.org/officeDocument/2006/relationships" xmlns:p="http://schemas.openxmlformats.org/presentationml/2006/main">
+  <p:cSld>
+    <p:spTree>
+      <p:nvGrpSpPr>
+        <p:cNvPr id="134" name="Shape 134"/>
+        <p:cNvGrpSpPr/>
+        <p:nvPr/>
+      </p:nvGrpSpPr>
+      <p:grpSpPr>
+        <a:xfrm>
+          <a:off x="0" y="0"/>
+          <a:ext cx="0" cy="0"/>
+          <a:chOff x="0" y="0"/>
+          <a:chExt cx="0" cy="0"/>
+        </a:xfrm>
+      </p:grpSpPr>
+      <p:sp>
+        <p:nvSpPr>
+          <p:cNvPr id="142" name="Google Shape;142;p23"/>
+          <p:cNvSpPr txBox="1"/>
+          <p:nvPr>
+            <p:ph type="title"/>
+          </p:nvPr>
+        </p:nvSpPr>
+        <p:spPr>
+          <a:xfrm>
+            <a:off x="774145" y="223964"/>
+            <a:ext cx="10579655" cy="785896"/>
+          </a:xfrm>
+          <a:prstGeom prst="rect">
+            <a:avLst/>
+          </a:prstGeom>
+          <a:noFill/>
+          <a:ln>
+            <a:noFill/>
+          </a:ln>
+        </p:spPr>
+        <p:txBody>
+          <a:bodyPr/>
+          <a:lstStyle/>
+          <a:p>
+            <a:pPr lvl="0" indent="0" marL="0">
+              <a:buNone/>
+            </a:pPr>
+            <a:r>
+              <a:rPr/>
+              <a:t>Kiểm thử và triển khai</a:t>
+            </a:r>
+          </a:p>
+        </p:txBody>
+      </p:sp>
+      <p:sp>
+        <p:nvSpPr>
+          <p:cNvPr id="143" name="Google Shape;143;p23"/>
+          <p:cNvSpPr txBox="1"/>
+          <p:nvPr>
+            <p:ph idx="1"/>
+          </p:nvPr>
+        </p:nvSpPr>
+        <p:spPr/>
+        <p:txBody>
+          <a:bodyPr/>
+          <a:lstStyle/>
+          <a:p>
+            <a:pPr lvl="0"/>
+            <a:r>
+              <a:rPr b="1"/>
+              <a:t>999 kiểm thử tự động</a:t>
+            </a:r>
+            <a:r>
+              <a:rPr/>
+              <a:t> đạt · bao phủ tầng nghiệp vụ </a:t>
+            </a:r>
+            <a:r>
+              <a:rPr b="1"/>
+              <a:t>87,7%</a:t>
+            </a:r>
+          </a:p>
+          <a:p>
+            <a:pPr lvl="0"/>
+            <a:r>
+              <a:rPr/>
+              <a:t>Kiểm thử </a:t>
+            </a:r>
+            <a:r>
+              <a:rPr b="1"/>
+              <a:t>đơn vị · tích hợp · độ chính xác AI · hiệu năng · chịu tải</a:t>
+            </a:r>
+          </a:p>
+          <a:p>
+            <a:pPr lvl="0"/>
+            <a:r>
+              <a:rPr/>
+              <a:t>Tầng AI có bộ test </a:t>
+            </a:r>
+            <a:r>
+              <a:rPr b="1"/>
+              <a:t>chạy không cần dựng server</a:t>
+            </a:r>
+          </a:p>
+          <a:p>
+            <a:pPr lvl="0"/>
+            <a:r>
+              <a:rPr>
+                <a:latin typeface="Courier"/>
+              </a:rPr>
+              <a:t>docker compose up</a:t>
+            </a:r>
+            <a:r>
+              <a:rPr/>
+              <a:t> — </a:t>
+            </a:r>
+            <a:r>
+              <a:rPr b="1"/>
+              <a:t>một lệnh</a:t>
+            </a:r>
+            <a:r>
+              <a:rPr/>
+              <a:t>, đã dựng và xác minh chạy được</a:t>
+            </a:r>
+          </a:p>
+          <a:p>
+            <a:pPr lvl="0"/>
+            <a:r>
+              <a:rPr/>
+              <a:t>Soak 300 giây: </a:t>
+            </a:r>
+            <a:r>
+              <a:rPr b="1"/>
+              <a:t>1.684 yêu cầu, không rò rỉ bộ nhớ</a:t>
+            </a:r>
+          </a:p>
+        </p:txBody>
+      </p:sp>
+      <p:sp>
+        <p:nvSpPr>
+          <p:cNvPr id="155" name="Google Shape;155;p23"/>
+          <p:cNvSpPr txBox="1"/>
+          <p:nvPr>
+            <p:ph idx="12" type="sldNum"/>
+          </p:nvPr>
+        </p:nvSpPr>
+        <p:spPr>
+          <a:xfrm>
+            <a:off x="58380" y="6508358"/>
+            <a:ext cx="349642" cy="349642"/>
+          </a:xfrm>
+          <a:prstGeom prst="rect">
+            <a:avLst/>
+          </a:prstGeom>
+          <a:noFill/>
+          <a:ln>
+            <a:noFill/>
+          </a:ln>
+        </p:spPr>
+        <p:txBody>
+          <a:bodyPr anchor="ctr" anchorCtr="0" bIns="45700" lIns="91425" rIns="91425" spcFirstLastPara="1" tIns="45700" wrap="square">
+            <a:noAutofit/>
+          </a:bodyPr>
+          <a:lstStyle>
+            <a:lvl1pPr algn="ctr" indent="0" lvl="0" marL="0">
+              <a:spcBef>
+                <a:spcPts val="0"/>
+              </a:spcBef>
+              <a:buNone/>
+              <a:defRPr sz="700">
+                <a:solidFill>
+                  <a:schemeClr val="dk1"/>
+                </a:solidFill>
+                <a:latin typeface="Arial"/>
+                <a:ea typeface="Arial"/>
+                <a:cs typeface="Arial"/>
+                <a:sym typeface="Arial"/>
+              </a:defRPr>
+            </a:lvl1pPr>
+            <a:lvl2pPr algn="ctr" indent="0" lvl="1" marL="0">
+              <a:spcBef>
+                <a:spcPts val="0"/>
+              </a:spcBef>
+              <a:buNone/>
+              <a:defRPr sz="700">
+                <a:solidFill>
+                  <a:schemeClr val="dk1"/>
+                </a:solidFill>
+                <a:latin typeface="Arial"/>
+                <a:ea typeface="Arial"/>
+                <a:cs typeface="Arial"/>
+                <a:sym typeface="Arial"/>
+              </a:defRPr>
+            </a:lvl2pPr>
+            <a:lvl3pPr algn="ctr" indent="0" lvl="2" marL="0">
+              <a:spcBef>
+                <a:spcPts val="0"/>
+              </a:spcBef>
+              <a:buNone/>
+              <a:defRPr sz="700">
+                <a:solidFill>
+                  <a:schemeClr val="dk1"/>
+                </a:solidFill>
+                <a:latin typeface="Arial"/>
+                <a:ea typeface="Arial"/>
+                <a:cs typeface="Arial"/>
+                <a:sym typeface="Arial"/>
+              </a:defRPr>
+            </a:lvl3pPr>
+            <a:lvl4pPr algn="ctr" indent="0" lvl="3" marL="0">
+              <a:spcBef>
+                <a:spcPts val="0"/>
+              </a:spcBef>
+              <a:buNone/>
+              <a:defRPr sz="700">
+                <a:solidFill>
+                  <a:schemeClr val="dk1"/>
+                </a:solidFill>
+                <a:latin typeface="Arial"/>
+                <a:ea typeface="Arial"/>
+                <a:cs typeface="Arial"/>
+                <a:sym typeface="Arial"/>
+              </a:defRPr>
+            </a:lvl4pPr>
+            <a:lvl5pPr algn="ctr" indent="0" lvl="4" marL="0">
+              <a:spcBef>
+                <a:spcPts val="0"/>
+              </a:spcBef>
+              <a:buNone/>
+              <a:defRPr sz="700">
+                <a:solidFill>
+                  <a:schemeClr val="dk1"/>
+                </a:solidFill>
+                <a:latin typeface="Arial"/>
+                <a:ea typeface="Arial"/>
+                <a:cs typeface="Arial"/>
+                <a:sym typeface="Arial"/>
+              </a:defRPr>
+            </a:lvl5pPr>
+            <a:lvl6pPr algn="ctr" indent="0" lvl="5" marL="0">
+              <a:spcBef>
+                <a:spcPts val="0"/>
+              </a:spcBef>
+              <a:buNone/>
+              <a:defRPr sz="700">
+                <a:solidFill>
+                  <a:schemeClr val="dk1"/>
+                </a:solidFill>
+                <a:latin typeface="Arial"/>
+                <a:ea typeface="Arial"/>
+                <a:cs typeface="Arial"/>
+                <a:sym typeface="Arial"/>
+              </a:defRPr>
+            </a:lvl6pPr>
+            <a:lvl7pPr algn="ctr" indent="0" lvl="6" marL="0">
+              <a:spcBef>
+                <a:spcPts val="0"/>
+              </a:spcBef>
+              <a:buNone/>
+              <a:defRPr sz="700">
+                <a:solidFill>
+                  <a:schemeClr val="dk1"/>
+                </a:solidFill>
+                <a:latin typeface="Arial"/>
+                <a:ea typeface="Arial"/>
+                <a:cs typeface="Arial"/>
+                <a:sym typeface="Arial"/>
+              </a:defRPr>
+            </a:lvl7pPr>
+            <a:lvl8pPr algn="ctr" indent="0" lvl="7" marL="0">
+              <a:spcBef>
+                <a:spcPts val="0"/>
+              </a:spcBef>
+              <a:buNone/>
+              <a:defRPr sz="700">
+                <a:solidFill>
+                  <a:schemeClr val="dk1"/>
+                </a:solidFill>
+                <a:latin typeface="Arial"/>
+                <a:ea typeface="Arial"/>
+                <a:cs typeface="Arial"/>
+                <a:sym typeface="Arial"/>
+              </a:defRPr>
+            </a:lvl8pPr>
+            <a:lvl9pPr algn="ctr" indent="0" lvl="8" marL="0">
+              <a:spcBef>
+                <a:spcPts val="0"/>
+              </a:spcBef>
+              <a:buNone/>
+              <a:defRPr sz="700">
+                <a:solidFill>
+                  <a:schemeClr val="dk1"/>
+                </a:solidFill>
+                <a:latin typeface="Arial"/>
+                <a:ea typeface="Arial"/>
+                <a:cs typeface="Arial"/>
+                <a:sym typeface="Arial"/>
+              </a:defRPr>
+            </a:lvl9pPr>
+          </a:lstStyle>
+          <a:p>
+            <a:pPr algn="ctr" indent="0" lvl="0" marL="0" rtl="0">
+              <a:spcBef>
+                <a:spcPts val="0"/>
+              </a:spcBef>
+              <a:spcAft>
+                <a:spcPts val="0"/>
+              </a:spcAft>
+              <a:buNone/>
+            </a:pPr>
+            <a:fld id="{00000000-1234-1234-1234-123412341234}" type="slidenum">
+              <a:rPr lang="en-US"/>
+              <a:t>‹#›</a:t>
+            </a:fld>
+            <a:endParaRPr/>
+          </a:p>
+        </p:txBody>
+      </p:sp>
+    </p:spTree>
+  </p:cSld>
+</p:sld>
+</file>
+
+<file path=ppt/slides/slide28.xml><?xml version="1.0" encoding="utf-8"?>
 <p:sld xmlns:a="http://schemas.openxmlformats.org/drawingml/2006/main" xmlns:r="http://schemas.openxmlformats.org/officeDocument/2006/relationships" xmlns:p="http://schemas.openxmlformats.org/presentationml/2006/main">
   <p:cSld>
     <p:spTree>
@@ -50238,7 +51967,7 @@
 </p:sld>
 </file>
 
-<file path=ppt/slides/slide25.xml><?xml version="1.0" encoding="utf-8"?>
+<file path=ppt/slides/slide29.xml><?xml version="1.0" encoding="utf-8"?>
 <p:sld xmlns:a="http://schemas.openxmlformats.org/drawingml/2006/main" xmlns:r="http://schemas.openxmlformats.org/officeDocument/2006/relationships" xmlns:p="http://schemas.openxmlformats.org/presentationml/2006/main">
   <p:cSld>
     <p:spTree>
@@ -50475,7 +52204,1154 @@
 </p:sld>
 </file>
 
-<file path=ppt/slides/slide26.xml><?xml version="1.0" encoding="utf-8"?>
+<file path=ppt/slides/slide3.xml><?xml version="1.0" encoding="utf-8"?>
+<p:sld xmlns:a="http://schemas.openxmlformats.org/drawingml/2006/main" xmlns:r="http://schemas.openxmlformats.org/officeDocument/2006/relationships" xmlns:p="http://schemas.openxmlformats.org/presentationml/2006/main">
+  <p:cSld>
+    <p:spTree>
+      <p:nvGrpSpPr>
+        <p:cNvPr id="428" name="Shape 428"/>
+        <p:cNvGrpSpPr/>
+        <p:nvPr/>
+      </p:nvGrpSpPr>
+      <p:grpSpPr>
+        <a:xfrm>
+          <a:off x="0" y="0"/>
+          <a:ext cx="0" cy="0"/>
+          <a:chOff x="0" y="0"/>
+          <a:chExt cx="0" cy="0"/>
+        </a:xfrm>
+      </p:grpSpPr>
+      <p:sp>
+        <p:nvSpPr>
+          <p:cNvPr id="436" name="Google Shape;436;p31"/>
+          <p:cNvSpPr txBox="1"/>
+          <p:nvPr>
+            <p:ph type="title"/>
+          </p:nvPr>
+        </p:nvSpPr>
+        <p:spPr>
+          <a:xfrm>
+            <a:off x="774146" y="202009"/>
+            <a:ext cx="3932227" cy="1698043"/>
+          </a:xfrm>
+          <a:prstGeom prst="rect">
+            <a:avLst/>
+          </a:prstGeom>
+          <a:noFill/>
+          <a:ln>
+            <a:noFill/>
+          </a:ln>
+        </p:spPr>
+        <p:txBody>
+          <a:bodyPr/>
+          <a:lstStyle/>
+          <a:p>
+            <a:pPr lvl="0" indent="0" marL="0">
+              <a:buNone/>
+            </a:pPr>
+            <a:r>
+              <a:rPr/>
+              <a:t>Vì sao đề tài này</a:t>
+            </a:r>
+          </a:p>
+        </p:txBody>
+      </p:sp>
+      <p:sp>
+        <p:nvSpPr>
+          <p:cNvPr id="437" name="Google Shape;437;p31"/>
+          <p:cNvSpPr txBox="1"/>
+          <p:nvPr>
+            <p:ph idx="2" sz="half" type="body"/>
+          </p:nvPr>
+        </p:nvSpPr>
+        <p:spPr/>
+        <p:txBody>
+          <a:bodyPr/>
+          <a:lstStyle/>
+          <a:p>
+            <a:pPr lvl="0" indent="0" marL="0">
+              <a:buNone/>
+            </a:pPr>
+            <a:r>
+              <a:rPr b="1"/>
+              <a:t>~77 triệu xe máy</a:t>
+            </a:r>
+            <a:r>
+              <a:rPr/>
+              <a:t> — </a:t>
+            </a:r>
+            <a:r>
+              <a:rPr b="1"/>
+              <a:t>85–90%</a:t>
+            </a:r>
+            <a:r>
+              <a:rPr/>
+              <a:t> lưu lượng đường bộ Việt Nam</a:t>
+            </a:r>
+          </a:p>
+          <a:p>
+            <a:pPr lvl="0" indent="0" marL="0">
+              <a:buNone/>
+            </a:pPr>
+            <a:r>
+              <a:rPr/>
+              <a:t>Cùng hệ thống, cùng phép đo: </a:t>
+            </a:r>
+            <a:r>
+              <a:rPr b="1"/>
+              <a:t>chênh 48,6 điểm</a:t>
+            </a:r>
+            <a:r>
+              <a:rPr/>
+              <a:t>, chỉ khác bố cục</a:t>
+            </a:r>
+          </a:p>
+          <a:p>
+            <a:pPr lvl="0" indent="0" marL="0">
+              <a:buNone/>
+            </a:pPr>
+            <a:r>
+              <a:rPr i="1"/>
+              <a:t>Số liệu Brazil, không phải Việt Nam</a:t>
+            </a:r>
+          </a:p>
+        </p:txBody>
+      </p:sp>
+      <p:graphicFrame>
+        <p:nvGraphicFramePr>
+          <p:cNvPr id="6" name="Content Placeholder 5"/>
+          <p:cNvGraphicFramePr>
+            <a:graphicFrameLocks noGrp="1"/>
+          </p:cNvGraphicFramePr>
+          <p:nvPr>
+            <p:ph idx="1"/>
+          </p:nvPr>
+        </p:nvGraphicFramePr>
+        <p:xfrm>
+          <a:off x="5156200" y="190500"/>
+          <a:ext cx="6235700" cy="5969000"/>
+        </p:xfrm>
+        <a:graphic>
+          <a:graphicData uri="http://schemas.openxmlformats.org/drawingml/2006/table">
+            <a:tbl>
+              <a:tblPr firstRow="1" bandRow="1">
+                <a:tableStyleId>{45BEF19B-5B1D-4A26-B267-ECC71EF7E2D4}</a:tableStyleId>
+              </a:tblPr>
+              <a:tblGrid>
+                <a:gridCol w="2070100"/>
+                <a:gridCol w="2070100"/>
+                <a:gridCol w="2070100"/>
+              </a:tblGrid>
+              <a:tr h="0">
+                <a:tc>
+                  <a:txBody>
+                    <a:bodyPr/>
+                    <a:lstStyle/>
+                    <a:p>
+                      <a:pPr lvl="0" indent="0" marL="0">
+                        <a:buNone/>
+                      </a:pPr>
+                      <a:r>
+                        <a:rPr/>
+                        <a:t>Loại xe</a:t>
+                      </a:r>
+                    </a:p>
+                  </a:txBody>
+                  <a:tcPr/>
+                </a:tc>
+                <a:tc>
+                  <a:txBody>
+                    <a:bodyPr/>
+                    <a:lstStyle/>
+                    <a:p>
+                      <a:pPr lvl="0" indent="0" marL="0">
+                        <a:buNone/>
+                      </a:pPr>
+                      <a:r>
+                        <a:rPr/>
+                        <a:t>Bố cục</a:t>
+                      </a:r>
+                    </a:p>
+                  </a:txBody>
+                  <a:tcPr/>
+                </a:tc>
+                <a:tc>
+                  <a:txBody>
+                    <a:bodyPr/>
+                    <a:lstStyle/>
+                    <a:p>
+                      <a:pPr lvl="0" indent="0" marL="0" algn="r">
+                        <a:buNone/>
+                      </a:pPr>
+                      <a:r>
+                        <a:rPr/>
+                        <a:t>Đọc đúng</a:t>
+                      </a:r>
+                    </a:p>
+                  </a:txBody>
+                  <a:tcPr/>
+                </a:tc>
+              </a:tr>
+              <a:tr h="0">
+                <a:tc>
+                  <a:txBody>
+                    <a:bodyPr/>
+                    <a:lstStyle/>
+                    <a:p>
+                      <a:pPr lvl="0" indent="0" marL="0">
+                        <a:buNone/>
+                      </a:pPr>
+                      <a:r>
+                        <a:rPr/>
+                        <a:t>Ô tô</a:t>
+                      </a:r>
+                    </a:p>
+                  </a:txBody>
+                </a:tc>
+                <a:tc>
+                  <a:txBody>
+                    <a:bodyPr/>
+                    <a:lstStyle/>
+                    <a:p>
+                      <a:pPr lvl="0" indent="0" marL="0">
+                        <a:buNone/>
+                      </a:pPr>
+                      <a:r>
+                        <a:rPr/>
+                        <a:t>1 dòng</a:t>
+                      </a:r>
+                    </a:p>
+                  </a:txBody>
+                </a:tc>
+                <a:tc>
+                  <a:txBody>
+                    <a:bodyPr/>
+                    <a:lstStyle/>
+                    <a:p>
+                      <a:pPr lvl="0" indent="0" marL="0" algn="r">
+                        <a:buNone/>
+                      </a:pPr>
+                      <a:r>
+                        <a:rPr b="1"/>
+                        <a:t>94,3%</a:t>
+                      </a:r>
+                    </a:p>
+                  </a:txBody>
+                </a:tc>
+              </a:tr>
+              <a:tr h="0">
+                <a:tc>
+                  <a:txBody>
+                    <a:bodyPr/>
+                    <a:lstStyle/>
+                    <a:p>
+                      <a:pPr lvl="0" indent="0" marL="0">
+                        <a:buNone/>
+                      </a:pPr>
+                      <a:r>
+                        <a:rPr/>
+                        <a:t>Xe máy</a:t>
+                      </a:r>
+                    </a:p>
+                  </a:txBody>
+                </a:tc>
+                <a:tc>
+                  <a:txBody>
+                    <a:bodyPr/>
+                    <a:lstStyle/>
+                    <a:p>
+                      <a:pPr lvl="0" indent="0" marL="0">
+                        <a:buNone/>
+                      </a:pPr>
+                      <a:r>
+                        <a:rPr b="1"/>
+                        <a:t>2 dòng</a:t>
+                      </a:r>
+                    </a:p>
+                  </a:txBody>
+                </a:tc>
+                <a:tc>
+                  <a:txBody>
+                    <a:bodyPr/>
+                    <a:lstStyle/>
+                    <a:p>
+                      <a:pPr lvl="0" indent="0" marL="0" algn="r">
+                        <a:buNone/>
+                      </a:pPr>
+                      <a:r>
+                        <a:rPr b="1"/>
+                        <a:t>45,7%</a:t>
+                      </a:r>
+                    </a:p>
+                  </a:txBody>
+                </a:tc>
+              </a:tr>
+            </a:tbl>
+          </a:graphicData>
+        </a:graphic>
+      </p:graphicFrame>
+      <p:sp>
+        <p:nvSpPr>
+          <p:cNvPr id="449" name="Google Shape;449;p31"/>
+          <p:cNvSpPr txBox="1"/>
+          <p:nvPr>
+            <p:ph idx="12" type="sldNum"/>
+          </p:nvPr>
+        </p:nvSpPr>
+        <p:spPr>
+          <a:xfrm>
+            <a:off x="58380" y="6508358"/>
+            <a:ext cx="349642" cy="349642"/>
+          </a:xfrm>
+          <a:prstGeom prst="rect">
+            <a:avLst/>
+          </a:prstGeom>
+          <a:noFill/>
+          <a:ln>
+            <a:noFill/>
+          </a:ln>
+        </p:spPr>
+        <p:txBody>
+          <a:bodyPr anchor="ctr" anchorCtr="0" bIns="45700" lIns="91425" rIns="91425" spcFirstLastPara="1" tIns="45700" wrap="square">
+            <a:noAutofit/>
+          </a:bodyPr>
+          <a:lstStyle>
+            <a:lvl1pPr algn="ctr" indent="0" lvl="0" marL="0">
+              <a:spcBef>
+                <a:spcPts val="0"/>
+              </a:spcBef>
+              <a:buNone/>
+              <a:defRPr sz="700">
+                <a:solidFill>
+                  <a:schemeClr val="dk1"/>
+                </a:solidFill>
+                <a:latin typeface="Arial"/>
+                <a:ea typeface="Arial"/>
+                <a:cs typeface="Arial"/>
+                <a:sym typeface="Arial"/>
+              </a:defRPr>
+            </a:lvl1pPr>
+            <a:lvl2pPr algn="ctr" indent="0" lvl="1" marL="0">
+              <a:spcBef>
+                <a:spcPts val="0"/>
+              </a:spcBef>
+              <a:buNone/>
+              <a:defRPr sz="700">
+                <a:solidFill>
+                  <a:schemeClr val="dk1"/>
+                </a:solidFill>
+                <a:latin typeface="Arial"/>
+                <a:ea typeface="Arial"/>
+                <a:cs typeface="Arial"/>
+                <a:sym typeface="Arial"/>
+              </a:defRPr>
+            </a:lvl2pPr>
+            <a:lvl3pPr algn="ctr" indent="0" lvl="2" marL="0">
+              <a:spcBef>
+                <a:spcPts val="0"/>
+              </a:spcBef>
+              <a:buNone/>
+              <a:defRPr sz="700">
+                <a:solidFill>
+                  <a:schemeClr val="dk1"/>
+                </a:solidFill>
+                <a:latin typeface="Arial"/>
+                <a:ea typeface="Arial"/>
+                <a:cs typeface="Arial"/>
+                <a:sym typeface="Arial"/>
+              </a:defRPr>
+            </a:lvl3pPr>
+            <a:lvl4pPr algn="ctr" indent="0" lvl="3" marL="0">
+              <a:spcBef>
+                <a:spcPts val="0"/>
+              </a:spcBef>
+              <a:buNone/>
+              <a:defRPr sz="700">
+                <a:solidFill>
+                  <a:schemeClr val="dk1"/>
+                </a:solidFill>
+                <a:latin typeface="Arial"/>
+                <a:ea typeface="Arial"/>
+                <a:cs typeface="Arial"/>
+                <a:sym typeface="Arial"/>
+              </a:defRPr>
+            </a:lvl4pPr>
+            <a:lvl5pPr algn="ctr" indent="0" lvl="4" marL="0">
+              <a:spcBef>
+                <a:spcPts val="0"/>
+              </a:spcBef>
+              <a:buNone/>
+              <a:defRPr sz="700">
+                <a:solidFill>
+                  <a:schemeClr val="dk1"/>
+                </a:solidFill>
+                <a:latin typeface="Arial"/>
+                <a:ea typeface="Arial"/>
+                <a:cs typeface="Arial"/>
+                <a:sym typeface="Arial"/>
+              </a:defRPr>
+            </a:lvl5pPr>
+            <a:lvl6pPr algn="ctr" indent="0" lvl="5" marL="0">
+              <a:spcBef>
+                <a:spcPts val="0"/>
+              </a:spcBef>
+              <a:buNone/>
+              <a:defRPr sz="700">
+                <a:solidFill>
+                  <a:schemeClr val="dk1"/>
+                </a:solidFill>
+                <a:latin typeface="Arial"/>
+                <a:ea typeface="Arial"/>
+                <a:cs typeface="Arial"/>
+                <a:sym typeface="Arial"/>
+              </a:defRPr>
+            </a:lvl6pPr>
+            <a:lvl7pPr algn="ctr" indent="0" lvl="6" marL="0">
+              <a:spcBef>
+                <a:spcPts val="0"/>
+              </a:spcBef>
+              <a:buNone/>
+              <a:defRPr sz="700">
+                <a:solidFill>
+                  <a:schemeClr val="dk1"/>
+                </a:solidFill>
+                <a:latin typeface="Arial"/>
+                <a:ea typeface="Arial"/>
+                <a:cs typeface="Arial"/>
+                <a:sym typeface="Arial"/>
+              </a:defRPr>
+            </a:lvl7pPr>
+            <a:lvl8pPr algn="ctr" indent="0" lvl="7" marL="0">
+              <a:spcBef>
+                <a:spcPts val="0"/>
+              </a:spcBef>
+              <a:buNone/>
+              <a:defRPr sz="700">
+                <a:solidFill>
+                  <a:schemeClr val="dk1"/>
+                </a:solidFill>
+                <a:latin typeface="Arial"/>
+                <a:ea typeface="Arial"/>
+                <a:cs typeface="Arial"/>
+                <a:sym typeface="Arial"/>
+              </a:defRPr>
+            </a:lvl8pPr>
+            <a:lvl9pPr algn="ctr" indent="0" lvl="8" marL="0">
+              <a:spcBef>
+                <a:spcPts val="0"/>
+              </a:spcBef>
+              <a:buNone/>
+              <a:defRPr sz="700">
+                <a:solidFill>
+                  <a:schemeClr val="dk1"/>
+                </a:solidFill>
+                <a:latin typeface="Arial"/>
+                <a:ea typeface="Arial"/>
+                <a:cs typeface="Arial"/>
+                <a:sym typeface="Arial"/>
+              </a:defRPr>
+            </a:lvl9pPr>
+          </a:lstStyle>
+          <a:p>
+            <a:pPr algn="ctr" indent="0" lvl="0" marL="0" rtl="0">
+              <a:spcBef>
+                <a:spcPts val="0"/>
+              </a:spcBef>
+              <a:spcAft>
+                <a:spcPts val="0"/>
+              </a:spcAft>
+              <a:buNone/>
+            </a:pPr>
+            <a:fld id="{00000000-1234-1234-1234-123412341234}" type="slidenum">
+              <a:rPr lang="en-US"/>
+              <a:t>‹#›</a:t>
+            </a:fld>
+            <a:endParaRPr/>
+          </a:p>
+        </p:txBody>
+      </p:sp>
+    </p:spTree>
+  </p:cSld>
+</p:sld>
+</file>
+
+<file path=ppt/slides/slide30.xml><?xml version="1.0" encoding="utf-8"?>
+<p:sld xmlns:a="http://schemas.openxmlformats.org/drawingml/2006/main" xmlns:r="http://schemas.openxmlformats.org/officeDocument/2006/relationships" xmlns:p="http://schemas.openxmlformats.org/presentationml/2006/main">
+  <p:cSld>
+    <p:spTree>
+      <p:nvGrpSpPr>
+        <p:cNvPr id="428" name="Shape 428"/>
+        <p:cNvGrpSpPr/>
+        <p:nvPr/>
+      </p:nvGrpSpPr>
+      <p:grpSpPr>
+        <a:xfrm>
+          <a:off x="0" y="0"/>
+          <a:ext cx="0" cy="0"/>
+          <a:chOff x="0" y="0"/>
+          <a:chExt cx="0" cy="0"/>
+        </a:xfrm>
+      </p:grpSpPr>
+      <p:sp>
+        <p:nvSpPr>
+          <p:cNvPr id="436" name="Google Shape;436;p31"/>
+          <p:cNvSpPr txBox="1"/>
+          <p:nvPr>
+            <p:ph type="title"/>
+          </p:nvPr>
+        </p:nvSpPr>
+        <p:spPr>
+          <a:xfrm>
+            <a:off x="774146" y="202009"/>
+            <a:ext cx="3932227" cy="1698043"/>
+          </a:xfrm>
+          <a:prstGeom prst="rect">
+            <a:avLst/>
+          </a:prstGeom>
+          <a:noFill/>
+          <a:ln>
+            <a:noFill/>
+          </a:ln>
+        </p:spPr>
+        <p:txBody>
+          <a:bodyPr/>
+          <a:lstStyle/>
+          <a:p>
+            <a:pPr lvl="0" indent="0" marL="0">
+              <a:buNone/>
+            </a:pPr>
+            <a:r>
+              <a:rPr/>
+              <a:t>Đối chiếu chỉ tiêu — bảng chốt hạ</a:t>
+            </a:r>
+          </a:p>
+        </p:txBody>
+      </p:sp>
+      <p:sp>
+        <p:nvSpPr>
+          <p:cNvPr id="437" name="Google Shape;437;p31"/>
+          <p:cNvSpPr txBox="1"/>
+          <p:nvPr>
+            <p:ph idx="2" sz="half" type="body"/>
+          </p:nvPr>
+        </p:nvSpPr>
+        <p:spPr/>
+        <p:txBody>
+          <a:bodyPr/>
+          <a:lstStyle/>
+          <a:p>
+            <a:pPr lvl="0" indent="0" marL="0">
+              <a:buNone/>
+            </a:pPr>
+            <a:r>
+              <a:rPr/>
+              <a:t>✅ đạt mục tiêu · 🟡 đạt ngưỡng tối thiểu · ❌ chưa đạt</a:t>
+            </a:r>
+          </a:p>
+        </p:txBody>
+      </p:sp>
+      <p:graphicFrame>
+        <p:nvGraphicFramePr>
+          <p:cNvPr id="6" name="Content Placeholder 5"/>
+          <p:cNvGraphicFramePr>
+            <a:graphicFrameLocks noGrp="1"/>
+          </p:cNvGraphicFramePr>
+          <p:nvPr>
+            <p:ph idx="1"/>
+          </p:nvPr>
+        </p:nvGraphicFramePr>
+        <p:xfrm>
+          <a:off x="5156200" y="190500"/>
+          <a:ext cx="6235700" cy="5969000"/>
+        </p:xfrm>
+        <a:graphic>
+          <a:graphicData uri="http://schemas.openxmlformats.org/drawingml/2006/table">
+            <a:tbl>
+              <a:tblPr firstRow="1" bandRow="1">
+                <a:tableStyleId>{45BEF19B-5B1D-4A26-B267-ECC71EF7E2D4}</a:tableStyleId>
+              </a:tblPr>
+              <a:tblGrid>
+                <a:gridCol w="2070100"/>
+                <a:gridCol w="2070100"/>
+                <a:gridCol w="2070100"/>
+              </a:tblGrid>
+              <a:tr h="0">
+                <a:tc>
+                  <a:txBody>
+                    <a:bodyPr/>
+                    <a:lstStyle/>
+                    <a:p>
+                      <a:pPr lvl="0" indent="0" marL="0">
+                        <a:buNone/>
+                      </a:pPr>
+                      <a:r>
+                        <a:rPr/>
+                        <a:t>Nhóm</a:t>
+                      </a:r>
+                    </a:p>
+                  </a:txBody>
+                  <a:tcPr/>
+                </a:tc>
+                <a:tc>
+                  <a:txBody>
+                    <a:bodyPr/>
+                    <a:lstStyle/>
+                    <a:p>
+                      <a:pPr lvl="0" indent="0" marL="0">
+                        <a:buNone/>
+                      </a:pPr>
+                      <a:r>
+                        <a:rPr/>
+                        <a:t>Chỉ tiêu</a:t>
+                      </a:r>
+                    </a:p>
+                  </a:txBody>
+                  <a:tcPr/>
+                </a:tc>
+                <a:tc>
+                  <a:txBody>
+                    <a:bodyPr/>
+                    <a:lstStyle/>
+                    <a:p>
+                      <a:pPr lvl="0" indent="0" marL="0" algn="ctr">
+                        <a:buNone/>
+                      </a:pPr>
+                      <a:r>
+                        <a:rPr/>
+                        <a:t>Kết quả</a:t>
+                      </a:r>
+                    </a:p>
+                  </a:txBody>
+                  <a:tcPr/>
+                </a:tc>
+              </a:tr>
+              <a:tr h="0">
+                <a:tc>
+                  <a:txBody>
+                    <a:bodyPr/>
+                    <a:lstStyle/>
+                    <a:p>
+                      <a:pPr lvl="0" indent="0" marL="0">
+                        <a:buNone/>
+                      </a:pPr>
+                      <a:r>
+                        <a:rPr/>
+                        <a:t>Phát hiện</a:t>
+                      </a:r>
+                    </a:p>
+                  </a:txBody>
+                </a:tc>
+                <a:tc>
+                  <a:txBody>
+                    <a:bodyPr/>
+                    <a:lstStyle/>
+                    <a:p>
+                      <a:pPr lvl="0" indent="0" marL="0">
+                        <a:buNone/>
+                      </a:pPr>
+                      <a:r>
+                        <a:rPr>
+                          <a:hlinkClick r:id="rId2"/>
+                        </a:rPr>
+                        <a:t>mAP@0.5</a:t>
+                      </a:r>
+                      <a:r>
+                        <a:rPr/>
+                        <a:t> </a:t>
+                      </a:r>
+                      <a:r>
+                        <a:rPr b="1"/>
+                        <a:t>0,9829</a:t>
+                      </a:r>
+                      <a:r>
+                        <a:rPr/>
+                        <a:t> · </a:t>
+                      </a:r>
+                      <a:r>
+                        <a:rPr>
+                          <a:hlinkClick r:id="rId3"/>
+                        </a:rPr>
+                        <a:t>mAP@0.5</a:t>
+                      </a:r>
+                      <a:r>
+                        <a:rPr/>
+                        <a:t>:0.95 </a:t>
+                      </a:r>
+                      <a:r>
+                        <a:rPr b="1"/>
+                        <a:t>0,7834</a:t>
+                      </a:r>
+                      <a:r>
+                        <a:rPr/>
+                        <a:t> · P </a:t>
+                      </a:r>
+                      <a:r>
+                        <a:rPr b="1"/>
+                        <a:t>0,9837</a:t>
+                      </a:r>
+                      <a:r>
+                        <a:rPr/>
+                        <a:t> · R </a:t>
+                      </a:r>
+                      <a:r>
+                        <a:rPr b="1"/>
+                        <a:t>0,9714</a:t>
+                      </a:r>
+                    </a:p>
+                  </a:txBody>
+                </a:tc>
+                <a:tc>
+                  <a:txBody>
+                    <a:bodyPr/>
+                    <a:lstStyle/>
+                    <a:p>
+                      <a:pPr lvl="0" indent="0" marL="0" algn="ctr">
+                        <a:buNone/>
+                      </a:pPr>
+                      <a:r>
+                        <a:rPr/>
+                        <a:t>✅</a:t>
+                      </a:r>
+                    </a:p>
+                  </a:txBody>
+                </a:tc>
+              </a:tr>
+              <a:tr h="0">
+                <a:tc>
+                  <a:txBody>
+                    <a:bodyPr/>
+                    <a:lstStyle/>
+                    <a:p>
+                      <a:pPr lvl="0" indent="0" marL="0">
+                        <a:buNone/>
+                      </a:pPr>
+                      <a:r>
+                        <a:rPr/>
+                        <a:t>Đọc ký tự</a:t>
+                      </a:r>
+                    </a:p>
+                  </a:txBody>
+                </a:tc>
+                <a:tc>
+                  <a:txBody>
+                    <a:bodyPr/>
+                    <a:lstStyle/>
+                    <a:p>
+                      <a:pPr lvl="0" indent="0" marL="0">
+                        <a:buNone/>
+                      </a:pPr>
+                      <a:r>
+                        <a:rPr/>
+                        <a:t>A4 </a:t>
+                      </a:r>
+                      <a:r>
+                        <a:rPr b="1"/>
+                        <a:t>0,9454</a:t>
+                      </a:r>
+                    </a:p>
+                  </a:txBody>
+                </a:tc>
+                <a:tc>
+                  <a:txBody>
+                    <a:bodyPr/>
+                    <a:lstStyle/>
+                    <a:p>
+                      <a:pPr lvl="0" indent="0" marL="0" algn="ctr">
+                        <a:buNone/>
+                      </a:pPr>
+                      <a:r>
+                        <a:rPr/>
+                        <a:t>🟡</a:t>
+                      </a:r>
+                    </a:p>
+                  </a:txBody>
+                </a:tc>
+              </a:tr>
+              <a:tr h="0">
+                <a:tc>
+                  <a:txBody>
+                    <a:bodyPr/>
+                    <a:lstStyle/>
+                    <a:p>
+                      <a:pPr lvl="0" indent="0" marL="0">
+                        <a:buNone/>
+                      </a:pPr>
+                      <a:r>
+                        <a:rPr/>
+                        <a:t>Đọc chuỗi</a:t>
+                      </a:r>
+                    </a:p>
+                  </a:txBody>
+                </a:tc>
+                <a:tc>
+                  <a:txBody>
+                    <a:bodyPr/>
+                    <a:lstStyle/>
+                    <a:p>
+                      <a:pPr lvl="0" indent="0" marL="0">
+                        <a:buNone/>
+                      </a:pPr>
+                      <a:r>
+                        <a:rPr/>
+                        <a:t>A5 </a:t>
+                      </a:r>
+                      <a:r>
+                        <a:rPr b="1"/>
+                        <a:t>0,6373</a:t>
+                      </a:r>
+                      <a:r>
+                        <a:rPr/>
+                        <a:t> · A6 </a:t>
+                      </a:r>
+                      <a:r>
+                        <a:rPr b="1"/>
+                        <a:t>0,7512</a:t>
+                      </a:r>
+                      <a:r>
+                        <a:rPr/>
+                        <a:t> · A7 </a:t>
+                      </a:r>
+                      <a:r>
+                        <a:rPr b="1"/>
+                        <a:t>0,5552</a:t>
+                      </a:r>
+                    </a:p>
+                  </a:txBody>
+                </a:tc>
+                <a:tc>
+                  <a:txBody>
+                    <a:bodyPr/>
+                    <a:lstStyle/>
+                    <a:p>
+                      <a:pPr lvl="0" indent="0" marL="0" algn="ctr">
+                        <a:buNone/>
+                      </a:pPr>
+                      <a:r>
+                        <a:rPr/>
+                        <a:t>❌</a:t>
+                      </a:r>
+                    </a:p>
+                  </a:txBody>
+                </a:tc>
+              </a:tr>
+              <a:tr h="0">
+                <a:tc>
+                  <a:txBody>
+                    <a:bodyPr/>
+                    <a:lstStyle/>
+                    <a:p>
+                      <a:pPr lvl="0" indent="0" marL="0">
+                        <a:buNone/>
+                      </a:pPr>
+                      <a:r>
+                        <a:rPr/>
+                        <a:t>Hiệu năng</a:t>
+                      </a:r>
+                    </a:p>
+                  </a:txBody>
+                </a:tc>
+                <a:tc>
+                  <a:txBody>
+                    <a:bodyPr/>
+                    <a:lstStyle/>
+                    <a:p>
+                      <a:pPr lvl="0" indent="0" marL="0">
+                        <a:buNone/>
+                      </a:pPr>
+                      <a:r>
+                        <a:rPr/>
+                        <a:t>p95 </a:t>
+                      </a:r>
+                      <a:r>
+                        <a:rPr b="1"/>
+                        <a:t>1.143 ms</a:t>
+                      </a:r>
+                      <a:r>
+                        <a:rPr/>
+                        <a:t> </a:t>
+                      </a:r>
+                      <a:r>
+                        <a:rPr i="1"/>
+                        <a:t>(sàn 1.500)</a:t>
+                      </a:r>
+                      <a:r>
+                        <a:rPr/>
+                        <a:t> · nạp mô hình </a:t>
+                      </a:r>
+                      <a:r>
+                        <a:rPr b="1"/>
+                        <a:t>6,4 s</a:t>
+                      </a:r>
+                      <a:r>
+                        <a:rPr/>
+                        <a:t> · truy vấn </a:t>
+                      </a:r>
+                      <a:r>
+                        <a:rPr b="1"/>
+                        <a:t>18,7 ms</a:t>
+                      </a:r>
+                    </a:p>
+                  </a:txBody>
+                </a:tc>
+                <a:tc>
+                  <a:txBody>
+                    <a:bodyPr/>
+                    <a:lstStyle/>
+                    <a:p>
+                      <a:pPr lvl="0" indent="0" marL="0" algn="ctr">
+                        <a:buNone/>
+                      </a:pPr>
+                      <a:r>
+                        <a:rPr/>
+                        <a:t>🟡</a:t>
+                      </a:r>
+                    </a:p>
+                  </a:txBody>
+                </a:tc>
+              </a:tr>
+              <a:tr h="0">
+                <a:tc>
+                  <a:txBody>
+                    <a:bodyPr/>
+                    <a:lstStyle/>
+                    <a:p>
+                      <a:pPr lvl="0" indent="0" marL="0">
+                        <a:buNone/>
+                      </a:pPr>
+                      <a:r>
+                        <a:rPr/>
+                        <a:t>Phần mềm</a:t>
+                      </a:r>
+                    </a:p>
+                  </a:txBody>
+                </a:tc>
+                <a:tc>
+                  <a:txBody>
+                    <a:bodyPr/>
+                    <a:lstStyle/>
+                    <a:p>
+                      <a:pPr lvl="0" indent="0" marL="0">
+                        <a:buNone/>
+                      </a:pPr>
+                      <a:r>
+                        <a:rPr/>
+                        <a:t>999 test · bao phủ 87,7% · </a:t>
+                      </a:r>
+                      <a:r>
+                        <a:rPr>
+                          <a:latin typeface="Courier"/>
+                        </a:rPr>
+                        <a:t>docker compose up</a:t>
+                      </a:r>
+                    </a:p>
+                  </a:txBody>
+                </a:tc>
+                <a:tc>
+                  <a:txBody>
+                    <a:bodyPr/>
+                    <a:lstStyle/>
+                    <a:p>
+                      <a:pPr lvl="0" indent="0" marL="0" algn="ctr">
+                        <a:buNone/>
+                      </a:pPr>
+                      <a:r>
+                        <a:rPr/>
+                        <a:t>✅</a:t>
+                      </a:r>
+                    </a:p>
+                  </a:txBody>
+                </a:tc>
+              </a:tr>
+            </a:tbl>
+          </a:graphicData>
+        </a:graphic>
+      </p:graphicFrame>
+      <p:sp>
+        <p:nvSpPr>
+          <p:cNvPr id="449" name="Google Shape;449;p31"/>
+          <p:cNvSpPr txBox="1"/>
+          <p:nvPr>
+            <p:ph idx="12" type="sldNum"/>
+          </p:nvPr>
+        </p:nvSpPr>
+        <p:spPr>
+          <a:xfrm>
+            <a:off x="58380" y="6508358"/>
+            <a:ext cx="349642" cy="349642"/>
+          </a:xfrm>
+          <a:prstGeom prst="rect">
+            <a:avLst/>
+          </a:prstGeom>
+          <a:noFill/>
+          <a:ln>
+            <a:noFill/>
+          </a:ln>
+        </p:spPr>
+        <p:txBody>
+          <a:bodyPr anchor="ctr" anchorCtr="0" bIns="45700" lIns="91425" rIns="91425" spcFirstLastPara="1" tIns="45700" wrap="square">
+            <a:noAutofit/>
+          </a:bodyPr>
+          <a:lstStyle>
+            <a:lvl1pPr algn="ctr" indent="0" lvl="0" marL="0">
+              <a:spcBef>
+                <a:spcPts val="0"/>
+              </a:spcBef>
+              <a:buNone/>
+              <a:defRPr sz="700">
+                <a:solidFill>
+                  <a:schemeClr val="dk1"/>
+                </a:solidFill>
+                <a:latin typeface="Arial"/>
+                <a:ea typeface="Arial"/>
+                <a:cs typeface="Arial"/>
+                <a:sym typeface="Arial"/>
+              </a:defRPr>
+            </a:lvl1pPr>
+            <a:lvl2pPr algn="ctr" indent="0" lvl="1" marL="0">
+              <a:spcBef>
+                <a:spcPts val="0"/>
+              </a:spcBef>
+              <a:buNone/>
+              <a:defRPr sz="700">
+                <a:solidFill>
+                  <a:schemeClr val="dk1"/>
+                </a:solidFill>
+                <a:latin typeface="Arial"/>
+                <a:ea typeface="Arial"/>
+                <a:cs typeface="Arial"/>
+                <a:sym typeface="Arial"/>
+              </a:defRPr>
+            </a:lvl2pPr>
+            <a:lvl3pPr algn="ctr" indent="0" lvl="2" marL="0">
+              <a:spcBef>
+                <a:spcPts val="0"/>
+              </a:spcBef>
+              <a:buNone/>
+              <a:defRPr sz="700">
+                <a:solidFill>
+                  <a:schemeClr val="dk1"/>
+                </a:solidFill>
+                <a:latin typeface="Arial"/>
+                <a:ea typeface="Arial"/>
+                <a:cs typeface="Arial"/>
+                <a:sym typeface="Arial"/>
+              </a:defRPr>
+            </a:lvl3pPr>
+            <a:lvl4pPr algn="ctr" indent="0" lvl="3" marL="0">
+              <a:spcBef>
+                <a:spcPts val="0"/>
+              </a:spcBef>
+              <a:buNone/>
+              <a:defRPr sz="700">
+                <a:solidFill>
+                  <a:schemeClr val="dk1"/>
+                </a:solidFill>
+                <a:latin typeface="Arial"/>
+                <a:ea typeface="Arial"/>
+                <a:cs typeface="Arial"/>
+                <a:sym typeface="Arial"/>
+              </a:defRPr>
+            </a:lvl4pPr>
+            <a:lvl5pPr algn="ctr" indent="0" lvl="4" marL="0">
+              <a:spcBef>
+                <a:spcPts val="0"/>
+              </a:spcBef>
+              <a:buNone/>
+              <a:defRPr sz="700">
+                <a:solidFill>
+                  <a:schemeClr val="dk1"/>
+                </a:solidFill>
+                <a:latin typeface="Arial"/>
+                <a:ea typeface="Arial"/>
+                <a:cs typeface="Arial"/>
+                <a:sym typeface="Arial"/>
+              </a:defRPr>
+            </a:lvl5pPr>
+            <a:lvl6pPr algn="ctr" indent="0" lvl="5" marL="0">
+              <a:spcBef>
+                <a:spcPts val="0"/>
+              </a:spcBef>
+              <a:buNone/>
+              <a:defRPr sz="700">
+                <a:solidFill>
+                  <a:schemeClr val="dk1"/>
+                </a:solidFill>
+                <a:latin typeface="Arial"/>
+                <a:ea typeface="Arial"/>
+                <a:cs typeface="Arial"/>
+                <a:sym typeface="Arial"/>
+              </a:defRPr>
+            </a:lvl6pPr>
+            <a:lvl7pPr algn="ctr" indent="0" lvl="6" marL="0">
+              <a:spcBef>
+                <a:spcPts val="0"/>
+              </a:spcBef>
+              <a:buNone/>
+              <a:defRPr sz="700">
+                <a:solidFill>
+                  <a:schemeClr val="dk1"/>
+                </a:solidFill>
+                <a:latin typeface="Arial"/>
+                <a:ea typeface="Arial"/>
+                <a:cs typeface="Arial"/>
+                <a:sym typeface="Arial"/>
+              </a:defRPr>
+            </a:lvl7pPr>
+            <a:lvl8pPr algn="ctr" indent="0" lvl="7" marL="0">
+              <a:spcBef>
+                <a:spcPts val="0"/>
+              </a:spcBef>
+              <a:buNone/>
+              <a:defRPr sz="700">
+                <a:solidFill>
+                  <a:schemeClr val="dk1"/>
+                </a:solidFill>
+                <a:latin typeface="Arial"/>
+                <a:ea typeface="Arial"/>
+                <a:cs typeface="Arial"/>
+                <a:sym typeface="Arial"/>
+              </a:defRPr>
+            </a:lvl8pPr>
+            <a:lvl9pPr algn="ctr" indent="0" lvl="8" marL="0">
+              <a:spcBef>
+                <a:spcPts val="0"/>
+              </a:spcBef>
+              <a:buNone/>
+              <a:defRPr sz="700">
+                <a:solidFill>
+                  <a:schemeClr val="dk1"/>
+                </a:solidFill>
+                <a:latin typeface="Arial"/>
+                <a:ea typeface="Arial"/>
+                <a:cs typeface="Arial"/>
+                <a:sym typeface="Arial"/>
+              </a:defRPr>
+            </a:lvl9pPr>
+          </a:lstStyle>
+          <a:p>
+            <a:pPr algn="ctr" indent="0" lvl="0" marL="0" rtl="0">
+              <a:spcBef>
+                <a:spcPts val="0"/>
+              </a:spcBef>
+              <a:spcAft>
+                <a:spcPts val="0"/>
+              </a:spcAft>
+              <a:buNone/>
+            </a:pPr>
+            <a:fld id="{00000000-1234-1234-1234-123412341234}" type="slidenum">
+              <a:rPr lang="en-US"/>
+              <a:t>‹#›</a:t>
+            </a:fld>
+            <a:endParaRPr/>
+          </a:p>
+        </p:txBody>
+      </p:sp>
+    </p:spTree>
+  </p:cSld>
+</p:sld>
+</file>
+
+<file path=ppt/slides/slide31.xml><?xml version="1.0" encoding="utf-8"?>
 <p:sld xmlns:a="http://schemas.openxmlformats.org/drawingml/2006/main" xmlns:r="http://schemas.openxmlformats.org/officeDocument/2006/relationships" xmlns:p="http://schemas.openxmlformats.org/presentationml/2006/main">
   <p:cSld>
     <p:spTree>
@@ -50926,7 +53802,7 @@
 </p:sld>
 </file>
 
-<file path=ppt/slides/slide27.xml><?xml version="1.0" encoding="utf-8"?>
+<file path=ppt/slides/slide32.xml><?xml version="1.0" encoding="utf-8"?>
 <p:sld xmlns:a="http://schemas.openxmlformats.org/drawingml/2006/main" xmlns:r="http://schemas.openxmlformats.org/officeDocument/2006/relationships" xmlns:p="http://schemas.openxmlformats.org/presentationml/2006/main">
   <p:cSld>
     <p:spTree>
@@ -51377,7 +54253,332 @@
 </p:sld>
 </file>
 
-<file path=ppt/slides/slide28.xml><?xml version="1.0" encoding="utf-8"?>
+<file path=ppt/slides/slide33.xml><?xml version="1.0" encoding="utf-8"?>
+<p:sld xmlns:a="http://schemas.openxmlformats.org/drawingml/2006/main" xmlns:r="http://schemas.openxmlformats.org/officeDocument/2006/relationships" xmlns:p="http://schemas.openxmlformats.org/presentationml/2006/main">
+  <p:cSld>
+    <p:spTree>
+      <p:nvGrpSpPr>
+        <p:cNvPr id="134" name="Shape 134"/>
+        <p:cNvGrpSpPr/>
+        <p:nvPr/>
+      </p:nvGrpSpPr>
+      <p:grpSpPr>
+        <a:xfrm>
+          <a:off x="0" y="0"/>
+          <a:ext cx="0" cy="0"/>
+          <a:chOff x="0" y="0"/>
+          <a:chExt cx="0" cy="0"/>
+        </a:xfrm>
+      </p:grpSpPr>
+      <p:sp>
+        <p:nvSpPr>
+          <p:cNvPr id="142" name="Google Shape;142;p23"/>
+          <p:cNvSpPr txBox="1"/>
+          <p:nvPr>
+            <p:ph type="title"/>
+          </p:nvPr>
+        </p:nvSpPr>
+        <p:spPr>
+          <a:xfrm>
+            <a:off x="774145" y="223964"/>
+            <a:ext cx="10579655" cy="785896"/>
+          </a:xfrm>
+          <a:prstGeom prst="rect">
+            <a:avLst/>
+          </a:prstGeom>
+          <a:noFill/>
+          <a:ln>
+            <a:noFill/>
+          </a:ln>
+        </p:spPr>
+        <p:txBody>
+          <a:bodyPr/>
+          <a:lstStyle/>
+          <a:p>
+            <a:pPr lvl="0" indent="0" marL="0">
+              <a:buNone/>
+            </a:pPr>
+            <a:r>
+              <a:rPr/>
+              <a:t>Hướng phát triển</a:t>
+            </a:r>
+          </a:p>
+        </p:txBody>
+      </p:sp>
+      <p:sp>
+        <p:nvSpPr>
+          <p:cNvPr id="143" name="Google Shape;143;p23"/>
+          <p:cNvSpPr txBox="1"/>
+          <p:nvPr>
+            <p:ph idx="1"/>
+          </p:nvPr>
+        </p:nvSpPr>
+        <p:spPr/>
+        <p:txBody>
+          <a:bodyPr/>
+          <a:lstStyle/>
+          <a:p>
+            <a:pPr lvl="0" indent="0" marL="0">
+              <a:buNone/>
+            </a:pPr>
+            <a:r>
+              <a:rPr b="1"/>
+              <a:t>Ngắn hạn</a:t>
+            </a:r>
+            <a:r>
+              <a:rPr/>
+              <a:t> — gỡ đúng nút thắt đã định vị</a:t>
+            </a:r>
+          </a:p>
+          <a:p>
+            <a:pPr lvl="0" indent="0" marL="347663">
+              <a:buAutoNum type="arabicPeriod"/>
+            </a:pPr>
+            <a:r>
+              <a:rPr b="1"/>
+              <a:t>Fine-tune bộ nhận dạng</a:t>
+            </a:r>
+            <a:r>
+              <a:rPr/>
+              <a:t> trên vùng cắt biển Việt Nam</a:t>
+            </a:r>
+          </a:p>
+          <a:p>
+            <a:pPr lvl="0" indent="0" marL="347663">
+              <a:buAutoNum type="arabicPeriod"/>
+            </a:pPr>
+            <a:r>
+              <a:rPr b="1"/>
+              <a:t>Gán nhãn chuỗi cho ảnh hiện trường</a:t>
+            </a:r>
+            <a:r>
+              <a:rPr/>
+              <a:t> ⇒ đo được A7 đúng cách</a:t>
+            </a:r>
+          </a:p>
+          <a:p>
+            <a:pPr lvl="0" indent="0" marL="0">
+              <a:buNone/>
+            </a:pPr>
+            <a:r>
+              <a:rPr b="1"/>
+              <a:t>Trung hạn</a:t>
+            </a:r>
+          </a:p>
+          <a:p>
+            <a:pPr lvl="0" indent="0" marL="347663">
+              <a:buAutoNum startAt="3" type="arabicPeriod"/>
+            </a:pPr>
+            <a:r>
+              <a:rPr/>
+              <a:t>Tập test </a:t>
+            </a:r>
+            <a:r>
+              <a:rPr b="1"/>
+              <a:t>xuyên bộ dữ liệu</a:t>
+            </a:r>
+            <a:r>
+              <a:rPr/>
+              <a:t> — đo tổng quát hoá ngoài phân bố</a:t>
+            </a:r>
+          </a:p>
+          <a:p>
+            <a:pPr lvl="0" indent="0" marL="347663">
+              <a:buAutoNum startAt="3" type="arabicPeriod"/>
+            </a:pPr>
+            <a:r>
+              <a:rPr/>
+              <a:t>Xuất ONNX / OpenVINO để hạ độ trễ đuôi</a:t>
+            </a:r>
+          </a:p>
+        </p:txBody>
+      </p:sp>
+      <p:sp>
+        <p:nvSpPr>
+          <p:cNvPr id="155" name="Google Shape;155;p23"/>
+          <p:cNvSpPr txBox="1"/>
+          <p:nvPr>
+            <p:ph idx="12" type="sldNum"/>
+          </p:nvPr>
+        </p:nvSpPr>
+        <p:spPr>
+          <a:xfrm>
+            <a:off x="58380" y="6508358"/>
+            <a:ext cx="349642" cy="349642"/>
+          </a:xfrm>
+          <a:prstGeom prst="rect">
+            <a:avLst/>
+          </a:prstGeom>
+          <a:noFill/>
+          <a:ln>
+            <a:noFill/>
+          </a:ln>
+        </p:spPr>
+        <p:txBody>
+          <a:bodyPr anchor="ctr" anchorCtr="0" bIns="45700" lIns="91425" rIns="91425" spcFirstLastPara="1" tIns="45700" wrap="square">
+            <a:noAutofit/>
+          </a:bodyPr>
+          <a:lstStyle>
+            <a:lvl1pPr algn="ctr" indent="0" lvl="0" marL="0">
+              <a:spcBef>
+                <a:spcPts val="0"/>
+              </a:spcBef>
+              <a:buNone/>
+              <a:defRPr sz="700">
+                <a:solidFill>
+                  <a:schemeClr val="dk1"/>
+                </a:solidFill>
+                <a:latin typeface="Arial"/>
+                <a:ea typeface="Arial"/>
+                <a:cs typeface="Arial"/>
+                <a:sym typeface="Arial"/>
+              </a:defRPr>
+            </a:lvl1pPr>
+            <a:lvl2pPr algn="ctr" indent="0" lvl="1" marL="0">
+              <a:spcBef>
+                <a:spcPts val="0"/>
+              </a:spcBef>
+              <a:buNone/>
+              <a:defRPr sz="700">
+                <a:solidFill>
+                  <a:schemeClr val="dk1"/>
+                </a:solidFill>
+                <a:latin typeface="Arial"/>
+                <a:ea typeface="Arial"/>
+                <a:cs typeface="Arial"/>
+                <a:sym typeface="Arial"/>
+              </a:defRPr>
+            </a:lvl2pPr>
+            <a:lvl3pPr algn="ctr" indent="0" lvl="2" marL="0">
+              <a:spcBef>
+                <a:spcPts val="0"/>
+              </a:spcBef>
+              <a:buNone/>
+              <a:defRPr sz="700">
+                <a:solidFill>
+                  <a:schemeClr val="dk1"/>
+                </a:solidFill>
+                <a:latin typeface="Arial"/>
+                <a:ea typeface="Arial"/>
+                <a:cs typeface="Arial"/>
+                <a:sym typeface="Arial"/>
+              </a:defRPr>
+            </a:lvl3pPr>
+            <a:lvl4pPr algn="ctr" indent="0" lvl="3" marL="0">
+              <a:spcBef>
+                <a:spcPts val="0"/>
+              </a:spcBef>
+              <a:buNone/>
+              <a:defRPr sz="700">
+                <a:solidFill>
+                  <a:schemeClr val="dk1"/>
+                </a:solidFill>
+                <a:latin typeface="Arial"/>
+                <a:ea typeface="Arial"/>
+                <a:cs typeface="Arial"/>
+                <a:sym typeface="Arial"/>
+              </a:defRPr>
+            </a:lvl4pPr>
+            <a:lvl5pPr algn="ctr" indent="0" lvl="4" marL="0">
+              <a:spcBef>
+                <a:spcPts val="0"/>
+              </a:spcBef>
+              <a:buNone/>
+              <a:defRPr sz="700">
+                <a:solidFill>
+                  <a:schemeClr val="dk1"/>
+                </a:solidFill>
+                <a:latin typeface="Arial"/>
+                <a:ea typeface="Arial"/>
+                <a:cs typeface="Arial"/>
+                <a:sym typeface="Arial"/>
+              </a:defRPr>
+            </a:lvl5pPr>
+            <a:lvl6pPr algn="ctr" indent="0" lvl="5" marL="0">
+              <a:spcBef>
+                <a:spcPts val="0"/>
+              </a:spcBef>
+              <a:buNone/>
+              <a:defRPr sz="700">
+                <a:solidFill>
+                  <a:schemeClr val="dk1"/>
+                </a:solidFill>
+                <a:latin typeface="Arial"/>
+                <a:ea typeface="Arial"/>
+                <a:cs typeface="Arial"/>
+                <a:sym typeface="Arial"/>
+              </a:defRPr>
+            </a:lvl6pPr>
+            <a:lvl7pPr algn="ctr" indent="0" lvl="6" marL="0">
+              <a:spcBef>
+                <a:spcPts val="0"/>
+              </a:spcBef>
+              <a:buNone/>
+              <a:defRPr sz="700">
+                <a:solidFill>
+                  <a:schemeClr val="dk1"/>
+                </a:solidFill>
+                <a:latin typeface="Arial"/>
+                <a:ea typeface="Arial"/>
+                <a:cs typeface="Arial"/>
+                <a:sym typeface="Arial"/>
+              </a:defRPr>
+            </a:lvl7pPr>
+            <a:lvl8pPr algn="ctr" indent="0" lvl="7" marL="0">
+              <a:spcBef>
+                <a:spcPts val="0"/>
+              </a:spcBef>
+              <a:buNone/>
+              <a:defRPr sz="700">
+                <a:solidFill>
+                  <a:schemeClr val="dk1"/>
+                </a:solidFill>
+                <a:latin typeface="Arial"/>
+                <a:ea typeface="Arial"/>
+                <a:cs typeface="Arial"/>
+                <a:sym typeface="Arial"/>
+              </a:defRPr>
+            </a:lvl8pPr>
+            <a:lvl9pPr algn="ctr" indent="0" lvl="8" marL="0">
+              <a:spcBef>
+                <a:spcPts val="0"/>
+              </a:spcBef>
+              <a:buNone/>
+              <a:defRPr sz="700">
+                <a:solidFill>
+                  <a:schemeClr val="dk1"/>
+                </a:solidFill>
+                <a:latin typeface="Arial"/>
+                <a:ea typeface="Arial"/>
+                <a:cs typeface="Arial"/>
+                <a:sym typeface="Arial"/>
+              </a:defRPr>
+            </a:lvl9pPr>
+          </a:lstStyle>
+          <a:p>
+            <a:pPr algn="ctr" indent="0" lvl="0" marL="0" rtl="0">
+              <a:spcBef>
+                <a:spcPts val="0"/>
+              </a:spcBef>
+              <a:spcAft>
+                <a:spcPts val="0"/>
+              </a:spcAft>
+              <a:buNone/>
+            </a:pPr>
+            <a:fld id="{00000000-1234-1234-1234-123412341234}" type="slidenum">
+              <a:rPr lang="en-US"/>
+              <a:t>‹#›</a:t>
+            </a:fld>
+            <a:endParaRPr/>
+          </a:p>
+        </p:txBody>
+      </p:sp>
+    </p:spTree>
+  </p:cSld>
+</p:sld>
+</file>
+
+<file path=ppt/slides/slide34.xml><?xml version="1.0" encoding="utf-8"?>
 <p:sld xmlns:a="http://schemas.openxmlformats.org/drawingml/2006/main" xmlns:r="http://schemas.openxmlformats.org/officeDocument/2006/relationships" xmlns:p="http://schemas.openxmlformats.org/presentationml/2006/main">
   <p:cSld>
     <p:spTree>
@@ -51736,276 +54937,7 @@
 </p:sld>
 </file>
 
-<file path=ppt/slides/slide29.xml><?xml version="1.0" encoding="utf-8"?>
-<p:sld xmlns:a="http://schemas.openxmlformats.org/drawingml/2006/main" xmlns:r="http://schemas.openxmlformats.org/officeDocument/2006/relationships" xmlns:p="http://schemas.openxmlformats.org/presentationml/2006/main">
-  <p:cSld>
-    <p:spTree>
-      <p:nvGrpSpPr>
-        <p:cNvPr id="134" name="Shape 134"/>
-        <p:cNvGrpSpPr/>
-        <p:nvPr/>
-      </p:nvGrpSpPr>
-      <p:grpSpPr>
-        <a:xfrm>
-          <a:off x="0" y="0"/>
-          <a:ext cx="0" cy="0"/>
-          <a:chOff x="0" y="0"/>
-          <a:chExt cx="0" cy="0"/>
-        </a:xfrm>
-      </p:grpSpPr>
-      <p:sp>
-        <p:nvSpPr>
-          <p:cNvPr id="142" name="Google Shape;142;p23"/>
-          <p:cNvSpPr txBox="1"/>
-          <p:nvPr>
-            <p:ph type="title"/>
-          </p:nvPr>
-        </p:nvSpPr>
-        <p:spPr>
-          <a:xfrm>
-            <a:off x="774145" y="223964"/>
-            <a:ext cx="10579655" cy="785896"/>
-          </a:xfrm>
-          <a:prstGeom prst="rect">
-            <a:avLst/>
-          </a:prstGeom>
-          <a:noFill/>
-          <a:ln>
-            <a:noFill/>
-          </a:ln>
-        </p:spPr>
-        <p:txBody>
-          <a:bodyPr/>
-          <a:lstStyle/>
-          <a:p>
-            <a:pPr lvl="0" indent="0" marL="0">
-              <a:buNone/>
-            </a:pPr>
-            <a:r>
-              <a:rPr/>
-              <a:t>Cảm ơn</a:t>
-            </a:r>
-          </a:p>
-        </p:txBody>
-      </p:sp>
-      <p:sp>
-        <p:nvSpPr>
-          <p:cNvPr id="143" name="Google Shape;143;p23"/>
-          <p:cNvSpPr txBox="1"/>
-          <p:nvPr>
-            <p:ph idx="1"/>
-          </p:nvPr>
-        </p:nvSpPr>
-        <p:spPr/>
-        <p:txBody>
-          <a:bodyPr/>
-          <a:lstStyle/>
-          <a:p>
-            <a:pPr lvl="0" indent="0" marL="0">
-              <a:buNone/>
-            </a:pPr>
-            <a:r>
-              <a:rPr b="1"/>
-              <a:t>Em xin cảm ơn thầy cô đã lắng nghe</a:t>
-            </a:r>
-          </a:p>
-          <a:p>
-            <a:pPr lvl="0" indent="0" marL="0">
-              <a:buNone/>
-            </a:pPr>
-            <a:r>
-              <a:rPr b="1"/>
-              <a:t>Em xin sẵn sàng nhận câu hỏi từ hội đồng</a:t>
-            </a:r>
-          </a:p>
-        </p:txBody>
-      </p:sp>
-      <p:sp>
-        <p:nvSpPr>
-          <p:cNvPr id="155" name="Google Shape;155;p23"/>
-          <p:cNvSpPr txBox="1"/>
-          <p:nvPr>
-            <p:ph idx="12" type="sldNum"/>
-          </p:nvPr>
-        </p:nvSpPr>
-        <p:spPr>
-          <a:xfrm>
-            <a:off x="58380" y="6508358"/>
-            <a:ext cx="349642" cy="349642"/>
-          </a:xfrm>
-          <a:prstGeom prst="rect">
-            <a:avLst/>
-          </a:prstGeom>
-          <a:noFill/>
-          <a:ln>
-            <a:noFill/>
-          </a:ln>
-        </p:spPr>
-        <p:txBody>
-          <a:bodyPr anchor="ctr" anchorCtr="0" bIns="45700" lIns="91425" rIns="91425" spcFirstLastPara="1" tIns="45700" wrap="square">
-            <a:noAutofit/>
-          </a:bodyPr>
-          <a:lstStyle>
-            <a:lvl1pPr algn="ctr" indent="0" lvl="0" marL="0">
-              <a:spcBef>
-                <a:spcPts val="0"/>
-              </a:spcBef>
-              <a:buNone/>
-              <a:defRPr sz="700">
-                <a:solidFill>
-                  <a:schemeClr val="dk1"/>
-                </a:solidFill>
-                <a:latin typeface="Arial"/>
-                <a:ea typeface="Arial"/>
-                <a:cs typeface="Arial"/>
-                <a:sym typeface="Arial"/>
-              </a:defRPr>
-            </a:lvl1pPr>
-            <a:lvl2pPr algn="ctr" indent="0" lvl="1" marL="0">
-              <a:spcBef>
-                <a:spcPts val="0"/>
-              </a:spcBef>
-              <a:buNone/>
-              <a:defRPr sz="700">
-                <a:solidFill>
-                  <a:schemeClr val="dk1"/>
-                </a:solidFill>
-                <a:latin typeface="Arial"/>
-                <a:ea typeface="Arial"/>
-                <a:cs typeface="Arial"/>
-                <a:sym typeface="Arial"/>
-              </a:defRPr>
-            </a:lvl2pPr>
-            <a:lvl3pPr algn="ctr" indent="0" lvl="2" marL="0">
-              <a:spcBef>
-                <a:spcPts val="0"/>
-              </a:spcBef>
-              <a:buNone/>
-              <a:defRPr sz="700">
-                <a:solidFill>
-                  <a:schemeClr val="dk1"/>
-                </a:solidFill>
-                <a:latin typeface="Arial"/>
-                <a:ea typeface="Arial"/>
-                <a:cs typeface="Arial"/>
-                <a:sym typeface="Arial"/>
-              </a:defRPr>
-            </a:lvl3pPr>
-            <a:lvl4pPr algn="ctr" indent="0" lvl="3" marL="0">
-              <a:spcBef>
-                <a:spcPts val="0"/>
-              </a:spcBef>
-              <a:buNone/>
-              <a:defRPr sz="700">
-                <a:solidFill>
-                  <a:schemeClr val="dk1"/>
-                </a:solidFill>
-                <a:latin typeface="Arial"/>
-                <a:ea typeface="Arial"/>
-                <a:cs typeface="Arial"/>
-                <a:sym typeface="Arial"/>
-              </a:defRPr>
-            </a:lvl4pPr>
-            <a:lvl5pPr algn="ctr" indent="0" lvl="4" marL="0">
-              <a:spcBef>
-                <a:spcPts val="0"/>
-              </a:spcBef>
-              <a:buNone/>
-              <a:defRPr sz="700">
-                <a:solidFill>
-                  <a:schemeClr val="dk1"/>
-                </a:solidFill>
-                <a:latin typeface="Arial"/>
-                <a:ea typeface="Arial"/>
-                <a:cs typeface="Arial"/>
-                <a:sym typeface="Arial"/>
-              </a:defRPr>
-            </a:lvl5pPr>
-            <a:lvl6pPr algn="ctr" indent="0" lvl="5" marL="0">
-              <a:spcBef>
-                <a:spcPts val="0"/>
-              </a:spcBef>
-              <a:buNone/>
-              <a:defRPr sz="700">
-                <a:solidFill>
-                  <a:schemeClr val="dk1"/>
-                </a:solidFill>
-                <a:latin typeface="Arial"/>
-                <a:ea typeface="Arial"/>
-                <a:cs typeface="Arial"/>
-                <a:sym typeface="Arial"/>
-              </a:defRPr>
-            </a:lvl6pPr>
-            <a:lvl7pPr algn="ctr" indent="0" lvl="6" marL="0">
-              <a:spcBef>
-                <a:spcPts val="0"/>
-              </a:spcBef>
-              <a:buNone/>
-              <a:defRPr sz="700">
-                <a:solidFill>
-                  <a:schemeClr val="dk1"/>
-                </a:solidFill>
-                <a:latin typeface="Arial"/>
-                <a:ea typeface="Arial"/>
-                <a:cs typeface="Arial"/>
-                <a:sym typeface="Arial"/>
-              </a:defRPr>
-            </a:lvl7pPr>
-            <a:lvl8pPr algn="ctr" indent="0" lvl="7" marL="0">
-              <a:spcBef>
-                <a:spcPts val="0"/>
-              </a:spcBef>
-              <a:buNone/>
-              <a:defRPr sz="700">
-                <a:solidFill>
-                  <a:schemeClr val="dk1"/>
-                </a:solidFill>
-                <a:latin typeface="Arial"/>
-                <a:ea typeface="Arial"/>
-                <a:cs typeface="Arial"/>
-                <a:sym typeface="Arial"/>
-              </a:defRPr>
-            </a:lvl8pPr>
-            <a:lvl9pPr algn="ctr" indent="0" lvl="8" marL="0">
-              <a:spcBef>
-                <a:spcPts val="0"/>
-              </a:spcBef>
-              <a:buNone/>
-              <a:defRPr sz="700">
-                <a:solidFill>
-                  <a:schemeClr val="dk1"/>
-                </a:solidFill>
-                <a:latin typeface="Arial"/>
-                <a:ea typeface="Arial"/>
-                <a:cs typeface="Arial"/>
-                <a:sym typeface="Arial"/>
-              </a:defRPr>
-            </a:lvl9pPr>
-          </a:lstStyle>
-          <a:p>
-            <a:pPr algn="ctr" indent="0" lvl="0" marL="0" rtl="0">
-              <a:spcBef>
-                <a:spcPts val="0"/>
-              </a:spcBef>
-              <a:spcAft>
-                <a:spcPts val="0"/>
-              </a:spcAft>
-              <a:buNone/>
-            </a:pPr>
-            <a:fld id="{00000000-1234-1234-1234-123412341234}" type="slidenum">
-              <a:rPr lang="en-US"/>
-              <a:t>‹#›</a:t>
-            </a:fld>
-            <a:endParaRPr/>
-          </a:p>
-        </p:txBody>
-      </p:sp>
-    </p:spTree>
-  </p:cSld>
-</p:sld>
-</file>
-
-<file path=ppt/slides/slide3.xml><?xml version="1.0" encoding="utf-8"?>
+<file path=ppt/slides/slide35.xml><?xml version="1.0" encoding="utf-8"?>
 <p:sld xmlns:a="http://schemas.openxmlformats.org/drawingml/2006/main" xmlns:r="http://schemas.openxmlformats.org/officeDocument/2006/relationships" xmlns:p="http://schemas.openxmlformats.org/presentationml/2006/main">
   <p:cSld>
     <p:spTree>
@@ -52052,7 +54984,7 @@
             </a:pPr>
             <a:r>
               <a:rPr/>
-              <a:t>Vì sao đề tài này</a:t>
+              <a:t>Cảm ơn</a:t>
             </a:r>
           </a:p>
         </p:txBody>
@@ -52075,45 +55007,7 @@
             </a:pPr>
             <a:r>
               <a:rPr b="1"/>
-              <a:t>~77 triệu xe máy</a:t>
-            </a:r>
-            <a:r>
-              <a:rPr/>
-              <a:t> — </a:t>
-            </a:r>
-            <a:r>
-              <a:rPr b="1"/>
-              <a:t>85–90%</a:t>
-            </a:r>
-            <a:r>
-              <a:rPr/>
-              <a:t> lưu lượng đường bộ Việt Nam</a:t>
-            </a:r>
-          </a:p>
-          <a:p>
-            <a:pPr lvl="0" indent="0" marL="0">
-              <a:buNone/>
-            </a:pPr>
-            <a:r>
-              <a:rPr/>
-              <a:t>Cùng hệ thống, cùng phép đo: </a:t>
-            </a:r>
-            <a:r>
-              <a:rPr b="1"/>
-              <a:t>chênh 48,6 điểm</a:t>
-            </a:r>
-            <a:r>
-              <a:rPr/>
-              <a:t>, chỉ khác bố cục</a:t>
-            </a:r>
-          </a:p>
-          <a:p>
-            <a:pPr lvl="0" indent="0" marL="0">
-              <a:buNone/>
-            </a:pPr>
-            <a:r>
-              <a:rPr i="1"/>
-              <a:t>Số liệu Brazil, không phải Việt Nam</a:t>
+              <a:t>Em xin cảm ơn thầy cô đã lắng nghe. Em xin sẵn sàng nhận câu hỏi.</a:t>
             </a:r>
           </a:p>
         </p:txBody>
@@ -52139,9 +55033,8 @@
                 <a:tableStyleId>{45BEF19B-5B1D-4A26-B267-ECC71EF7E2D4}</a:tableStyleId>
               </a:tblPr>
               <a:tblGrid>
-                <a:gridCol w="2070100"/>
-                <a:gridCol w="2070100"/>
-                <a:gridCol w="2070100"/>
+                <a:gridCol w="3111500"/>
+                <a:gridCol w="3111500"/>
               </a:tblGrid>
               <a:tr h="0">
                 <a:tc>
@@ -52154,7 +55047,7 @@
                       </a:pPr>
                       <a:r>
                         <a:rPr/>
-                        <a:t>Loại xe</a:t>
+                        <a:t>Tra nhanh</a:t>
                       </a:r>
                     </a:p>
                   </a:txBody>
@@ -52165,29 +55058,7 @@
                     <a:bodyPr/>
                     <a:lstStyle/>
                     <a:p>
-                      <a:pPr lvl="0" indent="0" marL="0">
-                        <a:buNone/>
-                      </a:pPr>
-                      <a:r>
-                        <a:rPr/>
-                        <a:t>Bố cục</a:t>
-                      </a:r>
-                    </a:p>
-                  </a:txBody>
-                  <a:tcPr/>
-                </a:tc>
-                <a:tc>
-                  <a:txBody>
-                    <a:bodyPr/>
-                    <a:lstStyle/>
-                    <a:p>
-                      <a:pPr lvl="0" indent="0" marL="0" algn="r">
-                        <a:buNone/>
-                      </a:pPr>
-                      <a:r>
-                        <a:rPr/>
-                        <a:t>Đọc đúng</a:t>
-                      </a:r>
+                      <a:endParaRPr/>
                     </a:p>
                   </a:txBody>
                   <a:tcPr/>
@@ -52204,7 +55075,7 @@
                       </a:pPr>
                       <a:r>
                         <a:rPr/>
-                        <a:t>Ô tô</a:t>
+                        <a:t>Dữ liệu</a:t>
                       </a:r>
                     </a:p>
                   </a:txBody>
@@ -52219,22 +55090,7 @@
                       </a:pPr>
                       <a:r>
                         <a:rPr/>
-                        <a:t>1 dòng</a:t>
-                      </a:r>
-                    </a:p>
-                  </a:txBody>
-                </a:tc>
-                <a:tc>
-                  <a:txBody>
-                    <a:bodyPr/>
-                    <a:lstStyle/>
-                    <a:p>
-                      <a:pPr lvl="0" indent="0" marL="0" algn="r">
-                        <a:buNone/>
-                      </a:pPr>
-                      <a:r>
-                        <a:rPr b="1"/>
-                        <a:t>94,3%</a:t>
+                        <a:t>15.133 ảnh · 15.977 khung · 6 nguồn</a:t>
                       </a:r>
                     </a:p>
                   </a:txBody>
@@ -52251,7 +55107,135 @@
                       </a:pPr>
                       <a:r>
                         <a:rPr/>
-                        <a:t>Xe máy</a:t>
+                        <a:t>Mô hình</a:t>
+                      </a:r>
+                    </a:p>
+                  </a:txBody>
+                </a:tc>
+                <a:tc>
+                  <a:txBody>
+                    <a:bodyPr/>
+                    <a:lstStyle/>
+                    <a:p>
+                      <a:pPr lvl="0" indent="0" marL="0">
+                        <a:buNone/>
+                      </a:pPr>
+                      <a:r>
+                        <a:rPr/>
+                        <a:t>YOLO11n · imgsz 640 · 20 epoch</a:t>
+                      </a:r>
+                    </a:p>
+                  </a:txBody>
+                </a:tc>
+              </a:tr>
+              <a:tr h="0">
+                <a:tc>
+                  <a:txBody>
+                    <a:bodyPr/>
+                    <a:lstStyle/>
+                    <a:p>
+                      <a:pPr lvl="0" indent="0" marL="0">
+                        <a:buNone/>
+                      </a:pPr>
+                      <a:r>
+                        <a:rPr/>
+                        <a:t>Phát hiện</a:t>
+                      </a:r>
+                    </a:p>
+                  </a:txBody>
+                </a:tc>
+                <a:tc>
+                  <a:txBody>
+                    <a:bodyPr/>
+                    <a:lstStyle/>
+                    <a:p>
+                      <a:pPr lvl="0" indent="0" marL="0">
+                        <a:buNone/>
+                      </a:pPr>
+                      <a:r>
+                        <a:rPr/>
+                        <a:t>mAP50 </a:t>
+                      </a:r>
+                      <a:r>
+                        <a:rPr b="1"/>
+                        <a:t>0,983</a:t>
+                      </a:r>
+                      <a:r>
+                        <a:rPr/>
+                        <a:t> · mAP50-95 </a:t>
+                      </a:r>
+                      <a:r>
+                        <a:rPr b="1"/>
+                        <a:t>0,783</a:t>
+                      </a:r>
+                    </a:p>
+                  </a:txBody>
+                </a:tc>
+              </a:tr>
+              <a:tr h="0">
+                <a:tc>
+                  <a:txBody>
+                    <a:bodyPr/>
+                    <a:lstStyle/>
+                    <a:p>
+                      <a:pPr lvl="0" indent="0" marL="0">
+                        <a:buNone/>
+                      </a:pPr>
+                      <a:r>
+                        <a:rPr/>
+                        <a:t>Đọc chuỗi</a:t>
+                      </a:r>
+                    </a:p>
+                  </a:txBody>
+                </a:tc>
+                <a:tc>
+                  <a:txBody>
+                    <a:bodyPr/>
+                    <a:lstStyle/>
+                    <a:p>
+                      <a:pPr lvl="0" indent="0" marL="0">
+                        <a:buNone/>
+                      </a:pPr>
+                      <a:r>
+                        <a:rPr/>
+                        <a:t>A4 </a:t>
+                      </a:r>
+                      <a:r>
+                        <a:rPr b="1"/>
+                        <a:t>0,9454</a:t>
+                      </a:r>
+                      <a:r>
+                        <a:rPr/>
+                        <a:t> · A6 </a:t>
+                      </a:r>
+                      <a:r>
+                        <a:rPr b="1"/>
+                        <a:t>0,7512</a:t>
+                      </a:r>
+                      <a:r>
+                        <a:rPr/>
+                        <a:t> · A7 </a:t>
+                      </a:r>
+                      <a:r>
+                        <a:rPr b="1"/>
+                        <a:t>0,5552</a:t>
+                      </a:r>
+                    </a:p>
+                  </a:txBody>
+                </a:tc>
+              </a:tr>
+              <a:tr h="0">
+                <a:tc>
+                  <a:txBody>
+                    <a:bodyPr/>
+                    <a:lstStyle/>
+                    <a:p>
+                      <a:pPr lvl="0" indent="0" marL="0">
+                        <a:buNone/>
+                      </a:pPr>
+                      <a:r>
+                        <a:rPr/>
+                        <a:t>Độ trễ p95</a:t>
                       </a:r>
                     </a:p>
                   </a:txBody>
@@ -52266,22 +55250,15 @@
                       </a:pPr>
                       <a:r>
                         <a:rPr b="1"/>
-                        <a:t>2 dòng</a:t>
+                        <a:t>1.143 ms</a:t>
                       </a:r>
-                    </a:p>
-                  </a:txBody>
-                </a:tc>
-                <a:tc>
-                  <a:txBody>
-                    <a:bodyPr/>
-                    <a:lstStyle/>
-                    <a:p>
-                      <a:pPr lvl="0" indent="0" marL="0" algn="r">
-                        <a:buNone/>
-                      </a:pPr>
                       <a:r>
-                        <a:rPr b="1"/>
-                        <a:t>45,7%</a:t>
+                        <a:rPr/>
+                        <a:t> trên CPU </a:t>
+                      </a:r>
+                      <a:r>
+                        <a:rPr i="1"/>
+                        <a:t>(p50 406 ms)</a:t>
                       </a:r>
                     </a:p>
                   </a:txBody>

--- a/docs/slides/slides.pptx
+++ b/docs/slides/slides.pptx
@@ -40,23 +40,25 @@
     <p:sldId id="288" r:id="rId37"/>
     <p:sldId id="289" r:id="rId38"/>
     <p:sldId id="290" r:id="rId39"/>
+    <p:sldId id="291" r:id="rId40"/>
+    <p:sldId id="292" r:id="rId41"/>
   </p:sldIdLst>
   <p:sldSz cx="12192000" cy="6858000"/>
   <p:notesSz cx="6858000" cy="9144000"/>
   <p:embeddedFontLst>
     <p:embeddedFont>
       <p:font typeface="Roboto"/>
-      <p:regular r:id="rId40"/>
-      <p:bold r:id="rId41"/>
-      <p:italic r:id="rId42"/>
-      <p:boldItalic r:id="rId43"/>
+      <p:regular r:id="rId42"/>
+      <p:bold r:id="rId43"/>
+      <p:italic r:id="rId44"/>
+      <p:boldItalic r:id="rId45"/>
     </p:embeddedFont>
     <p:embeddedFont>
       <p:font typeface="Open Sans"/>
-      <p:regular r:id="rId44"/>
-      <p:bold r:id="rId45"/>
-      <p:italic r:id="rId46"/>
-      <p:boldItalic r:id="rId47"/>
+      <p:regular r:id="rId46"/>
+      <p:bold r:id="rId47"/>
+      <p:italic r:id="rId48"/>
+      <p:boldItalic r:id="rId49"/>
     </p:embeddedFont>
   </p:embeddedFontLst>
   <p:defaultTextStyle>
@@ -290,7 +292,7 @@
   </p:defaultTextStyle>
   <p:extLst>
     <p:ext uri="GoogleSlidesCustomDataVersion2">
-      <go:slidesCustomData xmlns:go="http://customooxmlschemas.google.com/" roundtripDataSignature="AMtx7mhu5dURU4INwSlvEO7StWDXKr50jg==" r:id="rId48"/>
+      <go:slidesCustomData xmlns:go="http://customooxmlschemas.google.com/" roundtripDataSignature="AMtx7mhu5dURU4INwSlvEO7StWDXKr50jg==" r:id="rId50"/>
     </p:ext>
   </p:extLst>
 </p:presentation>
@@ -47363,7 +47365,7 @@
   <p:cSld>
     <p:spTree>
       <p:nvGrpSpPr>
-        <p:cNvPr id="134" name="Shape 134"/>
+        <p:cNvPr id="428" name="Shape 428"/>
         <p:cNvGrpSpPr/>
         <p:nvPr/>
       </p:nvGrpSpPr>
@@ -47377,7 +47379,7 @@
       </p:grpSpPr>
       <p:sp>
         <p:nvSpPr>
-          <p:cNvPr id="142" name="Google Shape;142;p23"/>
+          <p:cNvPr id="436" name="Google Shape;436;p31"/>
           <p:cNvSpPr txBox="1"/>
           <p:nvPr>
             <p:ph type="title"/>
@@ -47385,8 +47387,8 @@
         </p:nvSpPr>
         <p:spPr>
           <a:xfrm>
-            <a:off x="774145" y="223964"/>
-            <a:ext cx="10579655" cy="785896"/>
+            <a:off x="774146" y="202009"/>
+            <a:ext cx="3932227" cy="1698043"/>
           </a:xfrm>
           <a:prstGeom prst="rect">
             <a:avLst/>
@@ -47412,10 +47414,10 @@
       </p:sp>
       <p:sp>
         <p:nvSpPr>
-          <p:cNvPr id="143" name="Google Shape;143;p23"/>
+          <p:cNvPr id="437" name="Google Shape;437;p31"/>
           <p:cNvSpPr txBox="1"/>
           <p:nvPr>
-            <p:ph idx="1"/>
+            <p:ph idx="2" sz="half" type="body"/>
           </p:nvPr>
         </p:nvSpPr>
         <p:spPr/>
@@ -47427,15 +47429,16 @@
               <a:buNone/>
             </a:pPr>
             <a:r>
+              <a:rPr/>
+              <a:t>Nguyên nhân gốc là </a:t>
+            </a:r>
+            <a:r>
               <a:rPr b="1"/>
-              <a:t>Nguyên nhân gốc là kiến trúc, không phải chất lượng mô hình</a:t>
+              <a:t>kiến trúc</a:t>
             </a:r>
-          </a:p>
-          <a:p>
-            <a:pPr lvl="0"/>
             <a:r>
               <a:rPr/>
-              <a:t>CRNN/CTC giả định căn chỉnh </a:t>
+              <a:t>: CRNN/CTC giả định căn chỉnh </a:t>
             </a:r>
             <a:r>
               <a:rPr b="1"/>
@@ -47443,68 +47446,52 @@
             </a:r>
             <a:r>
               <a:rPr/>
-              <a:t> — nằm trong </a:t>
+              <a:t> — giả định nằm trong </a:t>
             </a:r>
             <a:r>
               <a:rPr b="1"/>
               <a:t>hàm mất mát</a:t>
             </a:r>
-          </a:p>
-          <a:p>
-            <a:pPr lvl="0"/>
             <a:r>
               <a:rPr/>
-              <a:t>PaddleOCR ép cao 48 px ⇒ </a:t>
-            </a:r>
-            <a:r>
-              <a:rPr b="1"/>
-              <a:t>mỗi dòng chỉ còn ~24 px</a:t>
-            </a:r>
-          </a:p>
-          <a:p>
-            <a:pPr lvl="0" indent="0" marL="0">
-              <a:buNone/>
-            </a:pPr>
-            <a:r>
-              <a:rPr b="1"/>
-              <a:t>Giải pháp — split-then-hstack</a:t>
-            </a:r>
-          </a:p>
-          <a:p>
-            <a:pPr lvl="0"/>
-            <a:r>
-              <a:rPr/>
-              <a:t>Nắn hình → tách hai nửa chồng lấn → ghép ngang → OCR </a:t>
-            </a:r>
-            <a:r>
-              <a:rPr b="1"/>
-              <a:t>một lần</a:t>
-            </a:r>
-          </a:p>
-          <a:p>
-            <a:pPr lvl="0"/>
-            <a:r>
-              <a:rPr/>
-              <a:t>Đọc từng nửa: </a:t>
-            </a:r>
-            <a:r>
-              <a:rPr b="1"/>
-              <a:t>3,5%</a:t>
-            </a:r>
-            <a:r>
-              <a:rPr/>
-              <a:t> · ghép ngang: </a:t>
-            </a:r>
-            <a:r>
-              <a:rPr b="1"/>
-              <a:t>64,5%</a:t>
+              <a:t>, thêm dữ liệu không sửa được</a:t>
             </a:r>
           </a:p>
         </p:txBody>
       </p:sp>
+      <p:pic>
+        <p:nvPicPr>
+          <p:cNvPr descr="figures/fig-two-line.png" id="0" name="Picture 1"/>
+          <p:cNvPicPr>
+            <a:picLocks noGrp="1" noChangeAspect="1"/>
+          </p:cNvPicPr>
+          <p:nvPr/>
+        </p:nvPicPr>
+        <p:blipFill>
+          <a:blip r:embed="rId2"/>
+          <a:stretch>
+            <a:fillRect/>
+          </a:stretch>
+        </p:blipFill>
+        <p:spPr bwMode="auto">
+          <a:xfrm>
+            <a:off x="5156200" y="571500"/>
+            <a:ext cx="6235700" cy="5207000"/>
+          </a:xfrm>
+          <a:prstGeom prst="rect">
+            <a:avLst/>
+          </a:prstGeom>
+          <a:noFill/>
+          <a:ln w="9525">
+            <a:noFill/>
+            <a:headEnd/>
+            <a:tailEnd/>
+          </a:ln>
+        </p:spPr>
+      </p:pic>
       <p:sp>
         <p:nvSpPr>
-          <p:cNvPr id="155" name="Google Shape;155;p23"/>
+          <p:cNvPr id="449" name="Google Shape;449;p31"/>
           <p:cNvSpPr txBox="1"/>
           <p:nvPr>
             <p:ph idx="12" type="sldNum"/>
@@ -49184,6 +49171,296 @@
             </a:pPr>
             <a:r>
               <a:rPr/>
+              <a:t>Khoảng cách nằm trọn ở biển 2 dòng</a:t>
+            </a:r>
+          </a:p>
+        </p:txBody>
+      </p:sp>
+      <p:sp>
+        <p:nvSpPr>
+          <p:cNvPr id="437" name="Google Shape;437;p31"/>
+          <p:cNvSpPr txBox="1"/>
+          <p:nvPr>
+            <p:ph idx="2" sz="half" type="body"/>
+          </p:nvPr>
+        </p:nvSpPr>
+        <p:spPr/>
+        <p:txBody>
+          <a:bodyPr/>
+          <a:lstStyle/>
+          <a:p>
+            <a:pPr lvl="0" indent="0" marL="0">
+              <a:buNone/>
+            </a:pPr>
+            <a:r>
+              <a:rPr/>
+              <a:t>Cùng một hệ thống, cùng một phép đo — tách theo bố cục biển</a:t>
+            </a:r>
+          </a:p>
+        </p:txBody>
+      </p:sp>
+      <p:pic>
+        <p:nvPicPr>
+          <p:cNvPr descr="../reports/figures/04-ocr-accuracy-by-line-count.png" id="0" name="Picture 1"/>
+          <p:cNvPicPr>
+            <a:picLocks noGrp="1" noChangeAspect="1"/>
+          </p:cNvPicPr>
+          <p:nvPr/>
+        </p:nvPicPr>
+        <p:blipFill>
+          <a:blip r:embed="rId2"/>
+          <a:stretch>
+            <a:fillRect/>
+          </a:stretch>
+        </p:blipFill>
+        <p:spPr bwMode="auto">
+          <a:xfrm>
+            <a:off x="5156200" y="1371600"/>
+            <a:ext cx="6235700" cy="3606800"/>
+          </a:xfrm>
+          <a:prstGeom prst="rect">
+            <a:avLst/>
+          </a:prstGeom>
+          <a:noFill/>
+          <a:ln w="9525">
+            <a:noFill/>
+            <a:headEnd/>
+            <a:tailEnd/>
+          </a:ln>
+        </p:spPr>
+      </p:pic>
+      <p:sp>
+        <p:nvSpPr>
+          <p:cNvPr id="449" name="Google Shape;449;p31"/>
+          <p:cNvSpPr txBox="1"/>
+          <p:nvPr>
+            <p:ph idx="12" type="sldNum"/>
+          </p:nvPr>
+        </p:nvSpPr>
+        <p:spPr>
+          <a:xfrm>
+            <a:off x="58380" y="6508358"/>
+            <a:ext cx="349642" cy="349642"/>
+          </a:xfrm>
+          <a:prstGeom prst="rect">
+            <a:avLst/>
+          </a:prstGeom>
+          <a:noFill/>
+          <a:ln>
+            <a:noFill/>
+          </a:ln>
+        </p:spPr>
+        <p:txBody>
+          <a:bodyPr anchor="ctr" anchorCtr="0" bIns="45700" lIns="91425" rIns="91425" spcFirstLastPara="1" tIns="45700" wrap="square">
+            <a:noAutofit/>
+          </a:bodyPr>
+          <a:lstStyle>
+            <a:lvl1pPr algn="ctr" indent="0" lvl="0" marL="0">
+              <a:spcBef>
+                <a:spcPts val="0"/>
+              </a:spcBef>
+              <a:buNone/>
+              <a:defRPr sz="700">
+                <a:solidFill>
+                  <a:schemeClr val="dk1"/>
+                </a:solidFill>
+                <a:latin typeface="Arial"/>
+                <a:ea typeface="Arial"/>
+                <a:cs typeface="Arial"/>
+                <a:sym typeface="Arial"/>
+              </a:defRPr>
+            </a:lvl1pPr>
+            <a:lvl2pPr algn="ctr" indent="0" lvl="1" marL="0">
+              <a:spcBef>
+                <a:spcPts val="0"/>
+              </a:spcBef>
+              <a:buNone/>
+              <a:defRPr sz="700">
+                <a:solidFill>
+                  <a:schemeClr val="dk1"/>
+                </a:solidFill>
+                <a:latin typeface="Arial"/>
+                <a:ea typeface="Arial"/>
+                <a:cs typeface="Arial"/>
+                <a:sym typeface="Arial"/>
+              </a:defRPr>
+            </a:lvl2pPr>
+            <a:lvl3pPr algn="ctr" indent="0" lvl="2" marL="0">
+              <a:spcBef>
+                <a:spcPts val="0"/>
+              </a:spcBef>
+              <a:buNone/>
+              <a:defRPr sz="700">
+                <a:solidFill>
+                  <a:schemeClr val="dk1"/>
+                </a:solidFill>
+                <a:latin typeface="Arial"/>
+                <a:ea typeface="Arial"/>
+                <a:cs typeface="Arial"/>
+                <a:sym typeface="Arial"/>
+              </a:defRPr>
+            </a:lvl3pPr>
+            <a:lvl4pPr algn="ctr" indent="0" lvl="3" marL="0">
+              <a:spcBef>
+                <a:spcPts val="0"/>
+              </a:spcBef>
+              <a:buNone/>
+              <a:defRPr sz="700">
+                <a:solidFill>
+                  <a:schemeClr val="dk1"/>
+                </a:solidFill>
+                <a:latin typeface="Arial"/>
+                <a:ea typeface="Arial"/>
+                <a:cs typeface="Arial"/>
+                <a:sym typeface="Arial"/>
+              </a:defRPr>
+            </a:lvl4pPr>
+            <a:lvl5pPr algn="ctr" indent="0" lvl="4" marL="0">
+              <a:spcBef>
+                <a:spcPts val="0"/>
+              </a:spcBef>
+              <a:buNone/>
+              <a:defRPr sz="700">
+                <a:solidFill>
+                  <a:schemeClr val="dk1"/>
+                </a:solidFill>
+                <a:latin typeface="Arial"/>
+                <a:ea typeface="Arial"/>
+                <a:cs typeface="Arial"/>
+                <a:sym typeface="Arial"/>
+              </a:defRPr>
+            </a:lvl5pPr>
+            <a:lvl6pPr algn="ctr" indent="0" lvl="5" marL="0">
+              <a:spcBef>
+                <a:spcPts val="0"/>
+              </a:spcBef>
+              <a:buNone/>
+              <a:defRPr sz="700">
+                <a:solidFill>
+                  <a:schemeClr val="dk1"/>
+                </a:solidFill>
+                <a:latin typeface="Arial"/>
+                <a:ea typeface="Arial"/>
+                <a:cs typeface="Arial"/>
+                <a:sym typeface="Arial"/>
+              </a:defRPr>
+            </a:lvl6pPr>
+            <a:lvl7pPr algn="ctr" indent="0" lvl="6" marL="0">
+              <a:spcBef>
+                <a:spcPts val="0"/>
+              </a:spcBef>
+              <a:buNone/>
+              <a:defRPr sz="700">
+                <a:solidFill>
+                  <a:schemeClr val="dk1"/>
+                </a:solidFill>
+                <a:latin typeface="Arial"/>
+                <a:ea typeface="Arial"/>
+                <a:cs typeface="Arial"/>
+                <a:sym typeface="Arial"/>
+              </a:defRPr>
+            </a:lvl7pPr>
+            <a:lvl8pPr algn="ctr" indent="0" lvl="7" marL="0">
+              <a:spcBef>
+                <a:spcPts val="0"/>
+              </a:spcBef>
+              <a:buNone/>
+              <a:defRPr sz="700">
+                <a:solidFill>
+                  <a:schemeClr val="dk1"/>
+                </a:solidFill>
+                <a:latin typeface="Arial"/>
+                <a:ea typeface="Arial"/>
+                <a:cs typeface="Arial"/>
+                <a:sym typeface="Arial"/>
+              </a:defRPr>
+            </a:lvl8pPr>
+            <a:lvl9pPr algn="ctr" indent="0" lvl="8" marL="0">
+              <a:spcBef>
+                <a:spcPts val="0"/>
+              </a:spcBef>
+              <a:buNone/>
+              <a:defRPr sz="700">
+                <a:solidFill>
+                  <a:schemeClr val="dk1"/>
+                </a:solidFill>
+                <a:latin typeface="Arial"/>
+                <a:ea typeface="Arial"/>
+                <a:cs typeface="Arial"/>
+                <a:sym typeface="Arial"/>
+              </a:defRPr>
+            </a:lvl9pPr>
+          </a:lstStyle>
+          <a:p>
+            <a:pPr algn="ctr" indent="0" lvl="0" marL="0" rtl="0">
+              <a:spcBef>
+                <a:spcPts val="0"/>
+              </a:spcBef>
+              <a:spcAft>
+                <a:spcPts val="0"/>
+              </a:spcAft>
+              <a:buNone/>
+            </a:pPr>
+            <a:fld id="{00000000-1234-1234-1234-123412341234}" type="slidenum">
+              <a:rPr lang="en-US"/>
+              <a:t>‹#›</a:t>
+            </a:fld>
+            <a:endParaRPr/>
+          </a:p>
+        </p:txBody>
+      </p:sp>
+    </p:spTree>
+  </p:cSld>
+</p:sld>
+</file>
+
+<file path=ppt/slides/slide23.xml><?xml version="1.0" encoding="utf-8"?>
+<p:sld xmlns:a="http://schemas.openxmlformats.org/drawingml/2006/main" xmlns:r="http://schemas.openxmlformats.org/officeDocument/2006/relationships" xmlns:p="http://schemas.openxmlformats.org/presentationml/2006/main">
+  <p:cSld>
+    <p:spTree>
+      <p:nvGrpSpPr>
+        <p:cNvPr id="428" name="Shape 428"/>
+        <p:cNvGrpSpPr/>
+        <p:nvPr/>
+      </p:nvGrpSpPr>
+      <p:grpSpPr>
+        <a:xfrm>
+          <a:off x="0" y="0"/>
+          <a:ext cx="0" cy="0"/>
+          <a:chOff x="0" y="0"/>
+          <a:chExt cx="0" cy="0"/>
+        </a:xfrm>
+      </p:grpSpPr>
+      <p:sp>
+        <p:nvSpPr>
+          <p:cNvPr id="436" name="Google Shape;436;p31"/>
+          <p:cNvSpPr txBox="1"/>
+          <p:nvPr>
+            <p:ph type="title"/>
+          </p:nvPr>
+        </p:nvSpPr>
+        <p:spPr>
+          <a:xfrm>
+            <a:off x="774146" y="202009"/>
+            <a:ext cx="3932227" cy="1698043"/>
+          </a:xfrm>
+          <a:prstGeom prst="rect">
+            <a:avLst/>
+          </a:prstGeom>
+          <a:noFill/>
+          <a:ln>
+            <a:noFill/>
+          </a:ln>
+        </p:spPr>
+        <p:txBody>
+          <a:bodyPr/>
+          <a:lstStyle/>
+          <a:p>
+            <a:pPr lvl="0" indent="0" marL="0">
+              <a:buNone/>
+            </a:pPr>
+            <a:r>
+              <a:rPr/>
               <a:t>Đóng góp của hậu xử lý — đo được bằng số</a:t>
             </a:r>
           </a:p>
@@ -49632,7 +49909,7 @@
 </p:sld>
 </file>
 
-<file path=ppt/slides/slide23.xml><?xml version="1.0" encoding="utf-8"?>
+<file path=ppt/slides/slide24.xml><?xml version="1.0" encoding="utf-8"?>
 <p:sld xmlns:a="http://schemas.openxmlformats.org/drawingml/2006/main" xmlns:r="http://schemas.openxmlformats.org/officeDocument/2006/relationships" xmlns:p="http://schemas.openxmlformats.org/presentationml/2006/main">
   <p:cSld>
     <p:spTree>
@@ -50039,7 +50316,7 @@
 </p:sld>
 </file>
 
-<file path=ppt/slides/slide24.xml><?xml version="1.0" encoding="utf-8"?>
+<file path=ppt/slides/slide25.xml><?xml version="1.0" encoding="utf-8"?>
 <p:sld xmlns:a="http://schemas.openxmlformats.org/drawingml/2006/main" xmlns:r="http://schemas.openxmlformats.org/officeDocument/2006/relationships" xmlns:p="http://schemas.openxmlformats.org/presentationml/2006/main">
   <p:cSld>
     <p:spTree>
@@ -50276,7 +50553,7 @@
 </p:sld>
 </file>
 
-<file path=ppt/slides/slide25.xml><?xml version="1.0" encoding="utf-8"?>
+<file path=ppt/slides/slide26.xml><?xml version="1.0" encoding="utf-8"?>
 <p:sld xmlns:a="http://schemas.openxmlformats.org/drawingml/2006/main" xmlns:r="http://schemas.openxmlformats.org/officeDocument/2006/relationships" xmlns:p="http://schemas.openxmlformats.org/presentationml/2006/main">
   <p:cSld>
     <p:spTree>
@@ -50359,182 +50636,36 @@
           </a:p>
         </p:txBody>
       </p:sp>
-      <p:graphicFrame>
-        <p:nvGraphicFramePr>
-          <p:cNvPr id="6" name="Content Placeholder 5"/>
-          <p:cNvGraphicFramePr>
-            <a:graphicFrameLocks noGrp="1"/>
-          </p:cNvGraphicFramePr>
-          <p:nvPr>
-            <p:ph idx="1"/>
-          </p:nvPr>
-        </p:nvGraphicFramePr>
-        <p:xfrm>
-          <a:off x="5156200" y="190500"/>
-          <a:ext cx="6235700" cy="5969000"/>
-        </p:xfrm>
-        <a:graphic>
-          <a:graphicData uri="http://schemas.openxmlformats.org/drawingml/2006/table">
-            <a:tbl>
-              <a:tblPr firstRow="1" bandRow="1">
-                <a:tableStyleId>{45BEF19B-5B1D-4A26-B267-ECC71EF7E2D4}</a:tableStyleId>
-              </a:tblPr>
-              <a:tblGrid>
-                <a:gridCol w="3111500"/>
-                <a:gridCol w="3111500"/>
-              </a:tblGrid>
-              <a:tr h="0">
-                <a:tc>
-                  <a:txBody>
-                    <a:bodyPr/>
-                    <a:lstStyle/>
-                    <a:p>
-                      <a:pPr lvl="0" indent="0" marL="0">
-                        <a:buNone/>
-                      </a:pPr>
-                      <a:r>
-                        <a:rPr/>
-                        <a:t>Trang</a:t>
-                      </a:r>
-                    </a:p>
-                  </a:txBody>
-                  <a:tcPr/>
-                </a:tc>
-                <a:tc>
-                  <a:txBody>
-                    <a:bodyPr/>
-                    <a:lstStyle/>
-                    <a:p>
-                      <a:pPr lvl="0" indent="0" marL="0">
-                        <a:buNone/>
-                      </a:pPr>
-                      <a:r>
-                        <a:rPr/>
-                        <a:t>Chức năng</a:t>
-                      </a:r>
-                    </a:p>
-                  </a:txBody>
-                  <a:tcPr/>
-                </a:tc>
-              </a:tr>
-              <a:tr h="0">
-                <a:tc>
-                  <a:txBody>
-                    <a:bodyPr/>
-                    <a:lstStyle/>
-                    <a:p>
-                      <a:pPr lvl="0" indent="0" marL="0">
-                        <a:buNone/>
-                      </a:pPr>
-                      <a:r>
-                        <a:rPr/>
-                        <a:t>Nhận dạng ảnh </a:t>
-                      </a:r>
-                      <a:r>
-                        <a:rPr i="1"/>
-                        <a:t>(chủ)</a:t>
-                      </a:r>
-                    </a:p>
-                  </a:txBody>
-                </a:tc>
-                <a:tc>
-                  <a:txBody>
-                    <a:bodyPr/>
-                    <a:lstStyle/>
-                    <a:p>
-                      <a:pPr lvl="0" indent="0" marL="0">
-                        <a:buNone/>
-                      </a:pPr>
-                      <a:r>
-                        <a:rPr/>
-                        <a:t>Chọn ảnh là chạy ngay, khung bao + kết quả hiện cùng lúc</a:t>
-                      </a:r>
-                    </a:p>
-                  </a:txBody>
-                </a:tc>
-              </a:tr>
-              <a:tr h="0">
-                <a:tc>
-                  <a:txBody>
-                    <a:bodyPr/>
-                    <a:lstStyle/>
-                    <a:p>
-                      <a:pPr lvl="0" indent="0" marL="0">
-                        <a:buNone/>
-                      </a:pPr>
-                      <a:r>
-                        <a:rPr/>
-                        <a:t>Nhận dạng video</a:t>
-                      </a:r>
-                    </a:p>
-                  </a:txBody>
-                </a:tc>
-                <a:tc>
-                  <a:txBody>
-                    <a:bodyPr/>
-                    <a:lstStyle/>
-                    <a:p>
-                      <a:pPr lvl="0" indent="0" marL="0">
-                        <a:buNone/>
-                      </a:pPr>
-                      <a:r>
-                        <a:rPr/>
-                        <a:t>Bất đồng bộ — trả </a:t>
-                      </a:r>
-                      <a:r>
-                        <a:rPr>
-                          <a:latin typeface="Courier"/>
-                        </a:rPr>
-                        <a:t>job_id</a:t>
-                      </a:r>
-                      <a:r>
-                        <a:rPr/>
-                        <a:t>, hỏi tiến độ, xuất video gắn nhãn</a:t>
-                      </a:r>
-                    </a:p>
-                  </a:txBody>
-                </a:tc>
-              </a:tr>
-              <a:tr h="0">
-                <a:tc>
-                  <a:txBody>
-                    <a:bodyPr/>
-                    <a:lstStyle/>
-                    <a:p>
-                      <a:pPr lvl="0" indent="0" marL="0">
-                        <a:buNone/>
-                      </a:pPr>
-                      <a:r>
-                        <a:rPr/>
-                        <a:t>Lịch sử</a:t>
-                      </a:r>
-                    </a:p>
-                  </a:txBody>
-                </a:tc>
-                <a:tc>
-                  <a:txBody>
-                    <a:bodyPr/>
-                    <a:lstStyle/>
-                    <a:p>
-                      <a:pPr lvl="0" indent="0" marL="0">
-                        <a:buNone/>
-                      </a:pPr>
-                      <a:r>
-                        <a:rPr/>
-                        <a:t>Lọc, sắp xếp, phân trang — </a:t>
-                      </a:r>
-                      <a:r>
-                        <a:rPr b="1"/>
-                        <a:t>trạng thái nằm trên URL</a:t>
-                      </a:r>
-                    </a:p>
-                  </a:txBody>
-                </a:tc>
-              </a:tr>
-            </a:tbl>
-          </a:graphicData>
-        </a:graphic>
-      </p:graphicFrame>
+      <p:pic>
+        <p:nvPicPr>
+          <p:cNvPr descr="../screenshots/image-detection.png" id="0" name="Picture 1"/>
+          <p:cNvPicPr>
+            <a:picLocks noGrp="1" noChangeAspect="1"/>
+          </p:cNvPicPr>
+          <p:nvPr/>
+        </p:nvPicPr>
+        <p:blipFill>
+          <a:blip r:embed="rId2"/>
+          <a:stretch>
+            <a:fillRect/>
+          </a:stretch>
+        </p:blipFill>
+        <p:spPr bwMode="auto">
+          <a:xfrm>
+            <a:off x="5156200" y="1231900"/>
+            <a:ext cx="6235700" cy="3898900"/>
+          </a:xfrm>
+          <a:prstGeom prst="rect">
+            <a:avLst/>
+          </a:prstGeom>
+          <a:noFill/>
+          <a:ln w="9525">
+            <a:noFill/>
+            <a:headEnd/>
+            <a:tailEnd/>
+          </a:ln>
+        </p:spPr>
+      </p:pic>
       <p:sp>
         <p:nvSpPr>
           <p:cNvPr id="449" name="Google Shape;449;p31"/>
@@ -50720,7 +50851,7 @@
 </p:sld>
 </file>
 
-<file path=ppt/slides/slide26.xml><?xml version="1.0" encoding="utf-8"?>
+<file path=ppt/slides/slide27.xml><?xml version="1.0" encoding="utf-8"?>
 <p:sld xmlns:a="http://schemas.openxmlformats.org/drawingml/2006/main" xmlns:r="http://schemas.openxmlformats.org/officeDocument/2006/relationships" xmlns:p="http://schemas.openxmlformats.org/presentationml/2006/main">
   <p:cSld>
     <p:spTree>
@@ -51142,7 +51273,7 @@
 </p:sld>
 </file>
 
-<file path=ppt/slides/slide27.xml><?xml version="1.0" encoding="utf-8"?>
+<file path=ppt/slides/slide28.xml><?xml version="1.0" encoding="utf-8"?>
 <p:sld xmlns:a="http://schemas.openxmlformats.org/drawingml/2006/main" xmlns:r="http://schemas.openxmlformats.org/officeDocument/2006/relationships" xmlns:p="http://schemas.openxmlformats.org/presentationml/2006/main">
   <p:cSld>
     <p:spTree>
@@ -51462,7 +51593,7 @@
 </p:sld>
 </file>
 
-<file path=ppt/slides/slide28.xml><?xml version="1.0" encoding="utf-8"?>
+<file path=ppt/slides/slide29.xml><?xml version="1.0" encoding="utf-8"?>
 <p:sld xmlns:a="http://schemas.openxmlformats.org/drawingml/2006/main" xmlns:r="http://schemas.openxmlformats.org/officeDocument/2006/relationships" xmlns:p="http://schemas.openxmlformats.org/presentationml/2006/main">
   <p:cSld>
     <p:spTree>
@@ -51967,243 +52098,6 @@
 </p:sld>
 </file>
 
-<file path=ppt/slides/slide29.xml><?xml version="1.0" encoding="utf-8"?>
-<p:sld xmlns:a="http://schemas.openxmlformats.org/drawingml/2006/main" xmlns:r="http://schemas.openxmlformats.org/officeDocument/2006/relationships" xmlns:p="http://schemas.openxmlformats.org/presentationml/2006/main">
-  <p:cSld>
-    <p:spTree>
-      <p:nvGrpSpPr>
-        <p:cNvPr id="318" name="Shape 318"/>
-        <p:cNvGrpSpPr/>
-        <p:nvPr/>
-      </p:nvGrpSpPr>
-      <p:grpSpPr>
-        <a:xfrm>
-          <a:off x="0" y="0"/>
-          <a:ext cx="0" cy="0"/>
-          <a:chOff x="0" y="0"/>
-          <a:chExt cx="0" cy="0"/>
-        </a:xfrm>
-      </p:grpSpPr>
-      <p:sp>
-        <p:nvSpPr>
-          <p:cNvPr id="332" name="Google Shape;332;p28"/>
-          <p:cNvSpPr txBox="1"/>
-          <p:nvPr>
-            <p:ph type="title"/>
-          </p:nvPr>
-        </p:nvSpPr>
-        <p:spPr>
-          <a:xfrm>
-            <a:off x="1470929" y="2095027"/>
-            <a:ext cx="9941071" cy="884656"/>
-          </a:xfrm>
-          <a:prstGeom prst="rect">
-            <a:avLst/>
-          </a:prstGeom>
-          <a:noFill/>
-          <a:ln>
-            <a:noFill/>
-          </a:ln>
-        </p:spPr>
-        <p:txBody>
-          <a:bodyPr/>
-          <a:lstStyle/>
-          <a:p>
-            <a:pPr lvl="0" indent="0" marL="0">
-              <a:buNone/>
-            </a:pPr>
-            <a:r>
-              <a:rPr/>
-              <a:t>Kết luận</a:t>
-            </a:r>
-          </a:p>
-        </p:txBody>
-      </p:sp>
-      <p:sp>
-        <p:nvSpPr>
-          <p:cNvPr id="347" name="Google Shape;347;p28"/>
-          <p:cNvSpPr txBox="1"/>
-          <p:nvPr>
-            <p:ph idx="12" type="sldNum"/>
-          </p:nvPr>
-        </p:nvSpPr>
-        <p:spPr>
-          <a:xfrm>
-            <a:off x="65862" y="6542216"/>
-            <a:ext cx="292608" cy="315784"/>
-          </a:xfrm>
-          <a:prstGeom prst="rect">
-            <a:avLst/>
-          </a:prstGeom>
-          <a:noFill/>
-          <a:ln>
-            <a:noFill/>
-          </a:ln>
-        </p:spPr>
-        <p:txBody>
-          <a:bodyPr anchor="ctr" anchorCtr="0" bIns="45700" lIns="91425" rIns="91425" spcFirstLastPara="1" tIns="45700" wrap="square">
-            <a:noAutofit/>
-          </a:bodyPr>
-          <a:lstStyle>
-            <a:lvl1pPr algn="ctr" indent="0" lvl="0" marL="0">
-              <a:spcBef>
-                <a:spcPts val="0"/>
-              </a:spcBef>
-              <a:buNone/>
-              <a:defRPr sz="700">
-                <a:solidFill>
-                  <a:schemeClr val="dk1"/>
-                </a:solidFill>
-                <a:latin typeface="Arial"/>
-                <a:ea typeface="Arial"/>
-                <a:cs typeface="Arial"/>
-                <a:sym typeface="Arial"/>
-              </a:defRPr>
-            </a:lvl1pPr>
-            <a:lvl2pPr algn="ctr" indent="0" lvl="1" marL="0">
-              <a:spcBef>
-                <a:spcPts val="0"/>
-              </a:spcBef>
-              <a:buNone/>
-              <a:defRPr sz="700">
-                <a:solidFill>
-                  <a:schemeClr val="dk1"/>
-                </a:solidFill>
-                <a:latin typeface="Arial"/>
-                <a:ea typeface="Arial"/>
-                <a:cs typeface="Arial"/>
-                <a:sym typeface="Arial"/>
-              </a:defRPr>
-            </a:lvl2pPr>
-            <a:lvl3pPr algn="ctr" indent="0" lvl="2" marL="0">
-              <a:spcBef>
-                <a:spcPts val="0"/>
-              </a:spcBef>
-              <a:buNone/>
-              <a:defRPr sz="700">
-                <a:solidFill>
-                  <a:schemeClr val="dk1"/>
-                </a:solidFill>
-                <a:latin typeface="Arial"/>
-                <a:ea typeface="Arial"/>
-                <a:cs typeface="Arial"/>
-                <a:sym typeface="Arial"/>
-              </a:defRPr>
-            </a:lvl3pPr>
-            <a:lvl4pPr algn="ctr" indent="0" lvl="3" marL="0">
-              <a:spcBef>
-                <a:spcPts val="0"/>
-              </a:spcBef>
-              <a:buNone/>
-              <a:defRPr sz="700">
-                <a:solidFill>
-                  <a:schemeClr val="dk1"/>
-                </a:solidFill>
-                <a:latin typeface="Arial"/>
-                <a:ea typeface="Arial"/>
-                <a:cs typeface="Arial"/>
-                <a:sym typeface="Arial"/>
-              </a:defRPr>
-            </a:lvl4pPr>
-            <a:lvl5pPr algn="ctr" indent="0" lvl="4" marL="0">
-              <a:spcBef>
-                <a:spcPts val="0"/>
-              </a:spcBef>
-              <a:buNone/>
-              <a:defRPr sz="700">
-                <a:solidFill>
-                  <a:schemeClr val="dk1"/>
-                </a:solidFill>
-                <a:latin typeface="Arial"/>
-                <a:ea typeface="Arial"/>
-                <a:cs typeface="Arial"/>
-                <a:sym typeface="Arial"/>
-              </a:defRPr>
-            </a:lvl5pPr>
-            <a:lvl6pPr algn="ctr" indent="0" lvl="5" marL="0">
-              <a:spcBef>
-                <a:spcPts val="0"/>
-              </a:spcBef>
-              <a:buNone/>
-              <a:defRPr sz="700">
-                <a:solidFill>
-                  <a:schemeClr val="dk1"/>
-                </a:solidFill>
-                <a:latin typeface="Arial"/>
-                <a:ea typeface="Arial"/>
-                <a:cs typeface="Arial"/>
-                <a:sym typeface="Arial"/>
-              </a:defRPr>
-            </a:lvl6pPr>
-            <a:lvl7pPr algn="ctr" indent="0" lvl="6" marL="0">
-              <a:spcBef>
-                <a:spcPts val="0"/>
-              </a:spcBef>
-              <a:buNone/>
-              <a:defRPr sz="700">
-                <a:solidFill>
-                  <a:schemeClr val="dk1"/>
-                </a:solidFill>
-                <a:latin typeface="Arial"/>
-                <a:ea typeface="Arial"/>
-                <a:cs typeface="Arial"/>
-                <a:sym typeface="Arial"/>
-              </a:defRPr>
-            </a:lvl7pPr>
-            <a:lvl8pPr algn="ctr" indent="0" lvl="7" marL="0">
-              <a:spcBef>
-                <a:spcPts val="0"/>
-              </a:spcBef>
-              <a:buNone/>
-              <a:defRPr sz="700">
-                <a:solidFill>
-                  <a:schemeClr val="dk1"/>
-                </a:solidFill>
-                <a:latin typeface="Arial"/>
-                <a:ea typeface="Arial"/>
-                <a:cs typeface="Arial"/>
-                <a:sym typeface="Arial"/>
-              </a:defRPr>
-            </a:lvl8pPr>
-            <a:lvl9pPr algn="ctr" indent="0" lvl="8" marL="0">
-              <a:spcBef>
-                <a:spcPts val="0"/>
-              </a:spcBef>
-              <a:buNone/>
-              <a:defRPr sz="700">
-                <a:solidFill>
-                  <a:schemeClr val="dk1"/>
-                </a:solidFill>
-                <a:latin typeface="Arial"/>
-                <a:ea typeface="Arial"/>
-                <a:cs typeface="Arial"/>
-                <a:sym typeface="Arial"/>
-              </a:defRPr>
-            </a:lvl9pPr>
-          </a:lstStyle>
-          <a:p>
-            <a:pPr algn="ctr" indent="0" lvl="0" marL="0" rtl="0">
-              <a:spcBef>
-                <a:spcPts val="0"/>
-              </a:spcBef>
-              <a:spcAft>
-                <a:spcPts val="0"/>
-              </a:spcAft>
-              <a:buNone/>
-            </a:pPr>
-            <a:fld id="{00000000-1234-1234-1234-123412341234}" type="slidenum">
-              <a:rPr lang="en-US"/>
-              <a:t>‹#›</a:t>
-            </a:fld>
-            <a:endParaRPr/>
-          </a:p>
-        </p:txBody>
-      </p:sp>
-    </p:spTree>
-  </p:cSld>
-</p:sld>
-</file>
-
 <file path=ppt/slides/slide3.xml><?xml version="1.0" encoding="utf-8"?>
 <p:sld xmlns:a="http://schemas.openxmlformats.org/drawingml/2006/main" xmlns:r="http://schemas.openxmlformats.org/officeDocument/2006/relationships" xmlns:p="http://schemas.openxmlformats.org/presentationml/2006/main">
   <p:cSld>
@@ -52317,179 +52211,36 @@
           </a:p>
         </p:txBody>
       </p:sp>
-      <p:graphicFrame>
-        <p:nvGraphicFramePr>
-          <p:cNvPr id="6" name="Content Placeholder 5"/>
-          <p:cNvGraphicFramePr>
-            <a:graphicFrameLocks noGrp="1"/>
-          </p:cNvGraphicFramePr>
-          <p:nvPr>
-            <p:ph idx="1"/>
-          </p:nvPr>
-        </p:nvGraphicFramePr>
-        <p:xfrm>
-          <a:off x="5156200" y="190500"/>
-          <a:ext cx="6235700" cy="5969000"/>
-        </p:xfrm>
-        <a:graphic>
-          <a:graphicData uri="http://schemas.openxmlformats.org/drawingml/2006/table">
-            <a:tbl>
-              <a:tblPr firstRow="1" bandRow="1">
-                <a:tableStyleId>{45BEF19B-5B1D-4A26-B267-ECC71EF7E2D4}</a:tableStyleId>
-              </a:tblPr>
-              <a:tblGrid>
-                <a:gridCol w="2070100"/>
-                <a:gridCol w="2070100"/>
-                <a:gridCol w="2070100"/>
-              </a:tblGrid>
-              <a:tr h="0">
-                <a:tc>
-                  <a:txBody>
-                    <a:bodyPr/>
-                    <a:lstStyle/>
-                    <a:p>
-                      <a:pPr lvl="0" indent="0" marL="0">
-                        <a:buNone/>
-                      </a:pPr>
-                      <a:r>
-                        <a:rPr/>
-                        <a:t>Loại xe</a:t>
-                      </a:r>
-                    </a:p>
-                  </a:txBody>
-                  <a:tcPr/>
-                </a:tc>
-                <a:tc>
-                  <a:txBody>
-                    <a:bodyPr/>
-                    <a:lstStyle/>
-                    <a:p>
-                      <a:pPr lvl="0" indent="0" marL="0">
-                        <a:buNone/>
-                      </a:pPr>
-                      <a:r>
-                        <a:rPr/>
-                        <a:t>Bố cục</a:t>
-                      </a:r>
-                    </a:p>
-                  </a:txBody>
-                  <a:tcPr/>
-                </a:tc>
-                <a:tc>
-                  <a:txBody>
-                    <a:bodyPr/>
-                    <a:lstStyle/>
-                    <a:p>
-                      <a:pPr lvl="0" indent="0" marL="0" algn="r">
-                        <a:buNone/>
-                      </a:pPr>
-                      <a:r>
-                        <a:rPr/>
-                        <a:t>Đọc đúng</a:t>
-                      </a:r>
-                    </a:p>
-                  </a:txBody>
-                  <a:tcPr/>
-                </a:tc>
-              </a:tr>
-              <a:tr h="0">
-                <a:tc>
-                  <a:txBody>
-                    <a:bodyPr/>
-                    <a:lstStyle/>
-                    <a:p>
-                      <a:pPr lvl="0" indent="0" marL="0">
-                        <a:buNone/>
-                      </a:pPr>
-                      <a:r>
-                        <a:rPr/>
-                        <a:t>Ô tô</a:t>
-                      </a:r>
-                    </a:p>
-                  </a:txBody>
-                </a:tc>
-                <a:tc>
-                  <a:txBody>
-                    <a:bodyPr/>
-                    <a:lstStyle/>
-                    <a:p>
-                      <a:pPr lvl="0" indent="0" marL="0">
-                        <a:buNone/>
-                      </a:pPr>
-                      <a:r>
-                        <a:rPr/>
-                        <a:t>1 dòng</a:t>
-                      </a:r>
-                    </a:p>
-                  </a:txBody>
-                </a:tc>
-                <a:tc>
-                  <a:txBody>
-                    <a:bodyPr/>
-                    <a:lstStyle/>
-                    <a:p>
-                      <a:pPr lvl="0" indent="0" marL="0" algn="r">
-                        <a:buNone/>
-                      </a:pPr>
-                      <a:r>
-                        <a:rPr b="1"/>
-                        <a:t>94,3%</a:t>
-                      </a:r>
-                    </a:p>
-                  </a:txBody>
-                </a:tc>
-              </a:tr>
-              <a:tr h="0">
-                <a:tc>
-                  <a:txBody>
-                    <a:bodyPr/>
-                    <a:lstStyle/>
-                    <a:p>
-                      <a:pPr lvl="0" indent="0" marL="0">
-                        <a:buNone/>
-                      </a:pPr>
-                      <a:r>
-                        <a:rPr/>
-                        <a:t>Xe máy</a:t>
-                      </a:r>
-                    </a:p>
-                  </a:txBody>
-                </a:tc>
-                <a:tc>
-                  <a:txBody>
-                    <a:bodyPr/>
-                    <a:lstStyle/>
-                    <a:p>
-                      <a:pPr lvl="0" indent="0" marL="0">
-                        <a:buNone/>
-                      </a:pPr>
-                      <a:r>
-                        <a:rPr b="1"/>
-                        <a:t>2 dòng</a:t>
-                      </a:r>
-                    </a:p>
-                  </a:txBody>
-                </a:tc>
-                <a:tc>
-                  <a:txBody>
-                    <a:bodyPr/>
-                    <a:lstStyle/>
-                    <a:p>
-                      <a:pPr lvl="0" indent="0" marL="0" algn="r">
-                        <a:buNone/>
-                      </a:pPr>
-                      <a:r>
-                        <a:rPr b="1"/>
-                        <a:t>45,7%</a:t>
-                      </a:r>
-                    </a:p>
-                  </a:txBody>
-                </a:tc>
-              </a:tr>
-            </a:tbl>
-          </a:graphicData>
-        </a:graphic>
-      </p:graphicFrame>
+      <p:pic>
+        <p:nvPicPr>
+          <p:cNvPr descr="figures/fig-gap.png" id="0" name="Picture 1"/>
+          <p:cNvPicPr>
+            <a:picLocks noGrp="1" noChangeAspect="1"/>
+          </p:cNvPicPr>
+          <p:nvPr/>
+        </p:nvPicPr>
+        <p:blipFill>
+          <a:blip r:embed="rId2"/>
+          <a:stretch>
+            <a:fillRect/>
+          </a:stretch>
+        </p:blipFill>
+        <p:spPr bwMode="auto">
+          <a:xfrm>
+            <a:off x="5156200" y="787400"/>
+            <a:ext cx="6235700" cy="4762500"/>
+          </a:xfrm>
+          <a:prstGeom prst="rect">
+            <a:avLst/>
+          </a:prstGeom>
+          <a:noFill/>
+          <a:ln w="9525">
+            <a:noFill/>
+            <a:headEnd/>
+            <a:tailEnd/>
+          </a:ln>
+        </p:spPr>
+      </p:pic>
       <p:sp>
         <p:nvSpPr>
           <p:cNvPr id="449" name="Google Shape;449;p31"/>
@@ -52676,6 +52427,533 @@
 </file>
 
 <file path=ppt/slides/slide30.xml><?xml version="1.0" encoding="utf-8"?>
+<p:sld xmlns:a="http://schemas.openxmlformats.org/drawingml/2006/main" xmlns:r="http://schemas.openxmlformats.org/officeDocument/2006/relationships" xmlns:p="http://schemas.openxmlformats.org/presentationml/2006/main">
+  <p:cSld>
+    <p:spTree>
+      <p:nvGrpSpPr>
+        <p:cNvPr id="428" name="Shape 428"/>
+        <p:cNvGrpSpPr/>
+        <p:nvPr/>
+      </p:nvGrpSpPr>
+      <p:grpSpPr>
+        <a:xfrm>
+          <a:off x="0" y="0"/>
+          <a:ext cx="0" cy="0"/>
+          <a:chOff x="0" y="0"/>
+          <a:chExt cx="0" cy="0"/>
+        </a:xfrm>
+      </p:grpSpPr>
+      <p:sp>
+        <p:nvSpPr>
+          <p:cNvPr id="436" name="Google Shape;436;p31"/>
+          <p:cNvSpPr txBox="1"/>
+          <p:nvPr>
+            <p:ph type="title"/>
+          </p:nvPr>
+        </p:nvSpPr>
+        <p:spPr>
+          <a:xfrm>
+            <a:off x="774146" y="202009"/>
+            <a:ext cx="3932227" cy="1698043"/>
+          </a:xfrm>
+          <a:prstGeom prst="rect">
+            <a:avLst/>
+          </a:prstGeom>
+          <a:noFill/>
+          <a:ln>
+            <a:noFill/>
+          </a:ln>
+        </p:spPr>
+        <p:txBody>
+          <a:bodyPr/>
+          <a:lstStyle/>
+          <a:p>
+            <a:pPr lvl="0" indent="0" marL="0">
+              <a:buNone/>
+            </a:pPr>
+            <a:r>
+              <a:rPr/>
+              <a:t>Phân bố độ trễ — đuôi mới là chỗ tốn</a:t>
+            </a:r>
+          </a:p>
+        </p:txBody>
+      </p:sp>
+      <p:sp>
+        <p:nvSpPr>
+          <p:cNvPr id="437" name="Google Shape;437;p31"/>
+          <p:cNvSpPr txBox="1"/>
+          <p:nvPr>
+            <p:ph idx="2" sz="half" type="body"/>
+          </p:nvPr>
+        </p:nvSpPr>
+        <p:spPr/>
+        <p:txBody>
+          <a:bodyPr/>
+          <a:lstStyle/>
+          <a:p>
+            <a:pPr lvl="0" indent="0" marL="0">
+              <a:buNone/>
+            </a:pPr>
+            <a:r>
+              <a:rPr/>
+              <a:t>Phần lớn ảnh xong dưới nửa giây; đuôi phải là những ảnh phải thử lại nhiều lượt</a:t>
+            </a:r>
+          </a:p>
+        </p:txBody>
+      </p:sp>
+      <p:pic>
+        <p:nvPicPr>
+          <p:cNvPr descr="../reports/figures/07-latency-distribution.png" id="0" name="Picture 1"/>
+          <p:cNvPicPr>
+            <a:picLocks noGrp="1" noChangeAspect="1"/>
+          </p:cNvPicPr>
+          <p:nvPr/>
+        </p:nvPicPr>
+        <p:blipFill>
+          <a:blip r:embed="rId2"/>
+          <a:stretch>
+            <a:fillRect/>
+          </a:stretch>
+        </p:blipFill>
+        <p:spPr bwMode="auto">
+          <a:xfrm>
+            <a:off x="5156200" y="1612900"/>
+            <a:ext cx="6235700" cy="3124200"/>
+          </a:xfrm>
+          <a:prstGeom prst="rect">
+            <a:avLst/>
+          </a:prstGeom>
+          <a:noFill/>
+          <a:ln w="9525">
+            <a:noFill/>
+            <a:headEnd/>
+            <a:tailEnd/>
+          </a:ln>
+        </p:spPr>
+      </p:pic>
+      <p:sp>
+        <p:nvSpPr>
+          <p:cNvPr id="449" name="Google Shape;449;p31"/>
+          <p:cNvSpPr txBox="1"/>
+          <p:nvPr>
+            <p:ph idx="12" type="sldNum"/>
+          </p:nvPr>
+        </p:nvSpPr>
+        <p:spPr>
+          <a:xfrm>
+            <a:off x="58380" y="6508358"/>
+            <a:ext cx="349642" cy="349642"/>
+          </a:xfrm>
+          <a:prstGeom prst="rect">
+            <a:avLst/>
+          </a:prstGeom>
+          <a:noFill/>
+          <a:ln>
+            <a:noFill/>
+          </a:ln>
+        </p:spPr>
+        <p:txBody>
+          <a:bodyPr anchor="ctr" anchorCtr="0" bIns="45700" lIns="91425" rIns="91425" spcFirstLastPara="1" tIns="45700" wrap="square">
+            <a:noAutofit/>
+          </a:bodyPr>
+          <a:lstStyle>
+            <a:lvl1pPr algn="ctr" indent="0" lvl="0" marL="0">
+              <a:spcBef>
+                <a:spcPts val="0"/>
+              </a:spcBef>
+              <a:buNone/>
+              <a:defRPr sz="700">
+                <a:solidFill>
+                  <a:schemeClr val="dk1"/>
+                </a:solidFill>
+                <a:latin typeface="Arial"/>
+                <a:ea typeface="Arial"/>
+                <a:cs typeface="Arial"/>
+                <a:sym typeface="Arial"/>
+              </a:defRPr>
+            </a:lvl1pPr>
+            <a:lvl2pPr algn="ctr" indent="0" lvl="1" marL="0">
+              <a:spcBef>
+                <a:spcPts val="0"/>
+              </a:spcBef>
+              <a:buNone/>
+              <a:defRPr sz="700">
+                <a:solidFill>
+                  <a:schemeClr val="dk1"/>
+                </a:solidFill>
+                <a:latin typeface="Arial"/>
+                <a:ea typeface="Arial"/>
+                <a:cs typeface="Arial"/>
+                <a:sym typeface="Arial"/>
+              </a:defRPr>
+            </a:lvl2pPr>
+            <a:lvl3pPr algn="ctr" indent="0" lvl="2" marL="0">
+              <a:spcBef>
+                <a:spcPts val="0"/>
+              </a:spcBef>
+              <a:buNone/>
+              <a:defRPr sz="700">
+                <a:solidFill>
+                  <a:schemeClr val="dk1"/>
+                </a:solidFill>
+                <a:latin typeface="Arial"/>
+                <a:ea typeface="Arial"/>
+                <a:cs typeface="Arial"/>
+                <a:sym typeface="Arial"/>
+              </a:defRPr>
+            </a:lvl3pPr>
+            <a:lvl4pPr algn="ctr" indent="0" lvl="3" marL="0">
+              <a:spcBef>
+                <a:spcPts val="0"/>
+              </a:spcBef>
+              <a:buNone/>
+              <a:defRPr sz="700">
+                <a:solidFill>
+                  <a:schemeClr val="dk1"/>
+                </a:solidFill>
+                <a:latin typeface="Arial"/>
+                <a:ea typeface="Arial"/>
+                <a:cs typeface="Arial"/>
+                <a:sym typeface="Arial"/>
+              </a:defRPr>
+            </a:lvl4pPr>
+            <a:lvl5pPr algn="ctr" indent="0" lvl="4" marL="0">
+              <a:spcBef>
+                <a:spcPts val="0"/>
+              </a:spcBef>
+              <a:buNone/>
+              <a:defRPr sz="700">
+                <a:solidFill>
+                  <a:schemeClr val="dk1"/>
+                </a:solidFill>
+                <a:latin typeface="Arial"/>
+                <a:ea typeface="Arial"/>
+                <a:cs typeface="Arial"/>
+                <a:sym typeface="Arial"/>
+              </a:defRPr>
+            </a:lvl5pPr>
+            <a:lvl6pPr algn="ctr" indent="0" lvl="5" marL="0">
+              <a:spcBef>
+                <a:spcPts val="0"/>
+              </a:spcBef>
+              <a:buNone/>
+              <a:defRPr sz="700">
+                <a:solidFill>
+                  <a:schemeClr val="dk1"/>
+                </a:solidFill>
+                <a:latin typeface="Arial"/>
+                <a:ea typeface="Arial"/>
+                <a:cs typeface="Arial"/>
+                <a:sym typeface="Arial"/>
+              </a:defRPr>
+            </a:lvl6pPr>
+            <a:lvl7pPr algn="ctr" indent="0" lvl="6" marL="0">
+              <a:spcBef>
+                <a:spcPts val="0"/>
+              </a:spcBef>
+              <a:buNone/>
+              <a:defRPr sz="700">
+                <a:solidFill>
+                  <a:schemeClr val="dk1"/>
+                </a:solidFill>
+                <a:latin typeface="Arial"/>
+                <a:ea typeface="Arial"/>
+                <a:cs typeface="Arial"/>
+                <a:sym typeface="Arial"/>
+              </a:defRPr>
+            </a:lvl7pPr>
+            <a:lvl8pPr algn="ctr" indent="0" lvl="7" marL="0">
+              <a:spcBef>
+                <a:spcPts val="0"/>
+              </a:spcBef>
+              <a:buNone/>
+              <a:defRPr sz="700">
+                <a:solidFill>
+                  <a:schemeClr val="dk1"/>
+                </a:solidFill>
+                <a:latin typeface="Arial"/>
+                <a:ea typeface="Arial"/>
+                <a:cs typeface="Arial"/>
+                <a:sym typeface="Arial"/>
+              </a:defRPr>
+            </a:lvl8pPr>
+            <a:lvl9pPr algn="ctr" indent="0" lvl="8" marL="0">
+              <a:spcBef>
+                <a:spcPts val="0"/>
+              </a:spcBef>
+              <a:buNone/>
+              <a:defRPr sz="700">
+                <a:solidFill>
+                  <a:schemeClr val="dk1"/>
+                </a:solidFill>
+                <a:latin typeface="Arial"/>
+                <a:ea typeface="Arial"/>
+                <a:cs typeface="Arial"/>
+                <a:sym typeface="Arial"/>
+              </a:defRPr>
+            </a:lvl9pPr>
+          </a:lstStyle>
+          <a:p>
+            <a:pPr algn="ctr" indent="0" lvl="0" marL="0" rtl="0">
+              <a:spcBef>
+                <a:spcPts val="0"/>
+              </a:spcBef>
+              <a:spcAft>
+                <a:spcPts val="0"/>
+              </a:spcAft>
+              <a:buNone/>
+            </a:pPr>
+            <a:fld id="{00000000-1234-1234-1234-123412341234}" type="slidenum">
+              <a:rPr lang="en-US"/>
+              <a:t>‹#›</a:t>
+            </a:fld>
+            <a:endParaRPr/>
+          </a:p>
+        </p:txBody>
+      </p:sp>
+    </p:spTree>
+  </p:cSld>
+</p:sld>
+</file>
+
+<file path=ppt/slides/slide31.xml><?xml version="1.0" encoding="utf-8"?>
+<p:sld xmlns:a="http://schemas.openxmlformats.org/drawingml/2006/main" xmlns:r="http://schemas.openxmlformats.org/officeDocument/2006/relationships" xmlns:p="http://schemas.openxmlformats.org/presentationml/2006/main">
+  <p:cSld>
+    <p:spTree>
+      <p:nvGrpSpPr>
+        <p:cNvPr id="318" name="Shape 318"/>
+        <p:cNvGrpSpPr/>
+        <p:nvPr/>
+      </p:nvGrpSpPr>
+      <p:grpSpPr>
+        <a:xfrm>
+          <a:off x="0" y="0"/>
+          <a:ext cx="0" cy="0"/>
+          <a:chOff x="0" y="0"/>
+          <a:chExt cx="0" cy="0"/>
+        </a:xfrm>
+      </p:grpSpPr>
+      <p:sp>
+        <p:nvSpPr>
+          <p:cNvPr id="332" name="Google Shape;332;p28"/>
+          <p:cNvSpPr txBox="1"/>
+          <p:nvPr>
+            <p:ph type="title"/>
+          </p:nvPr>
+        </p:nvSpPr>
+        <p:spPr>
+          <a:xfrm>
+            <a:off x="1470929" y="2095027"/>
+            <a:ext cx="9941071" cy="884656"/>
+          </a:xfrm>
+          <a:prstGeom prst="rect">
+            <a:avLst/>
+          </a:prstGeom>
+          <a:noFill/>
+          <a:ln>
+            <a:noFill/>
+          </a:ln>
+        </p:spPr>
+        <p:txBody>
+          <a:bodyPr/>
+          <a:lstStyle/>
+          <a:p>
+            <a:pPr lvl="0" indent="0" marL="0">
+              <a:buNone/>
+            </a:pPr>
+            <a:r>
+              <a:rPr/>
+              <a:t>Kết luận</a:t>
+            </a:r>
+          </a:p>
+        </p:txBody>
+      </p:sp>
+      <p:sp>
+        <p:nvSpPr>
+          <p:cNvPr id="347" name="Google Shape;347;p28"/>
+          <p:cNvSpPr txBox="1"/>
+          <p:nvPr>
+            <p:ph idx="12" type="sldNum"/>
+          </p:nvPr>
+        </p:nvSpPr>
+        <p:spPr>
+          <a:xfrm>
+            <a:off x="65862" y="6542216"/>
+            <a:ext cx="292608" cy="315784"/>
+          </a:xfrm>
+          <a:prstGeom prst="rect">
+            <a:avLst/>
+          </a:prstGeom>
+          <a:noFill/>
+          <a:ln>
+            <a:noFill/>
+          </a:ln>
+        </p:spPr>
+        <p:txBody>
+          <a:bodyPr anchor="ctr" anchorCtr="0" bIns="45700" lIns="91425" rIns="91425" spcFirstLastPara="1" tIns="45700" wrap="square">
+            <a:noAutofit/>
+          </a:bodyPr>
+          <a:lstStyle>
+            <a:lvl1pPr algn="ctr" indent="0" lvl="0" marL="0">
+              <a:spcBef>
+                <a:spcPts val="0"/>
+              </a:spcBef>
+              <a:buNone/>
+              <a:defRPr sz="700">
+                <a:solidFill>
+                  <a:schemeClr val="dk1"/>
+                </a:solidFill>
+                <a:latin typeface="Arial"/>
+                <a:ea typeface="Arial"/>
+                <a:cs typeface="Arial"/>
+                <a:sym typeface="Arial"/>
+              </a:defRPr>
+            </a:lvl1pPr>
+            <a:lvl2pPr algn="ctr" indent="0" lvl="1" marL="0">
+              <a:spcBef>
+                <a:spcPts val="0"/>
+              </a:spcBef>
+              <a:buNone/>
+              <a:defRPr sz="700">
+                <a:solidFill>
+                  <a:schemeClr val="dk1"/>
+                </a:solidFill>
+                <a:latin typeface="Arial"/>
+                <a:ea typeface="Arial"/>
+                <a:cs typeface="Arial"/>
+                <a:sym typeface="Arial"/>
+              </a:defRPr>
+            </a:lvl2pPr>
+            <a:lvl3pPr algn="ctr" indent="0" lvl="2" marL="0">
+              <a:spcBef>
+                <a:spcPts val="0"/>
+              </a:spcBef>
+              <a:buNone/>
+              <a:defRPr sz="700">
+                <a:solidFill>
+                  <a:schemeClr val="dk1"/>
+                </a:solidFill>
+                <a:latin typeface="Arial"/>
+                <a:ea typeface="Arial"/>
+                <a:cs typeface="Arial"/>
+                <a:sym typeface="Arial"/>
+              </a:defRPr>
+            </a:lvl3pPr>
+            <a:lvl4pPr algn="ctr" indent="0" lvl="3" marL="0">
+              <a:spcBef>
+                <a:spcPts val="0"/>
+              </a:spcBef>
+              <a:buNone/>
+              <a:defRPr sz="700">
+                <a:solidFill>
+                  <a:schemeClr val="dk1"/>
+                </a:solidFill>
+                <a:latin typeface="Arial"/>
+                <a:ea typeface="Arial"/>
+                <a:cs typeface="Arial"/>
+                <a:sym typeface="Arial"/>
+              </a:defRPr>
+            </a:lvl4pPr>
+            <a:lvl5pPr algn="ctr" indent="0" lvl="4" marL="0">
+              <a:spcBef>
+                <a:spcPts val="0"/>
+              </a:spcBef>
+              <a:buNone/>
+              <a:defRPr sz="700">
+                <a:solidFill>
+                  <a:schemeClr val="dk1"/>
+                </a:solidFill>
+                <a:latin typeface="Arial"/>
+                <a:ea typeface="Arial"/>
+                <a:cs typeface="Arial"/>
+                <a:sym typeface="Arial"/>
+              </a:defRPr>
+            </a:lvl5pPr>
+            <a:lvl6pPr algn="ctr" indent="0" lvl="5" marL="0">
+              <a:spcBef>
+                <a:spcPts val="0"/>
+              </a:spcBef>
+              <a:buNone/>
+              <a:defRPr sz="700">
+                <a:solidFill>
+                  <a:schemeClr val="dk1"/>
+                </a:solidFill>
+                <a:latin typeface="Arial"/>
+                <a:ea typeface="Arial"/>
+                <a:cs typeface="Arial"/>
+                <a:sym typeface="Arial"/>
+              </a:defRPr>
+            </a:lvl6pPr>
+            <a:lvl7pPr algn="ctr" indent="0" lvl="6" marL="0">
+              <a:spcBef>
+                <a:spcPts val="0"/>
+              </a:spcBef>
+              <a:buNone/>
+              <a:defRPr sz="700">
+                <a:solidFill>
+                  <a:schemeClr val="dk1"/>
+                </a:solidFill>
+                <a:latin typeface="Arial"/>
+                <a:ea typeface="Arial"/>
+                <a:cs typeface="Arial"/>
+                <a:sym typeface="Arial"/>
+              </a:defRPr>
+            </a:lvl7pPr>
+            <a:lvl8pPr algn="ctr" indent="0" lvl="7" marL="0">
+              <a:spcBef>
+                <a:spcPts val="0"/>
+              </a:spcBef>
+              <a:buNone/>
+              <a:defRPr sz="700">
+                <a:solidFill>
+                  <a:schemeClr val="dk1"/>
+                </a:solidFill>
+                <a:latin typeface="Arial"/>
+                <a:ea typeface="Arial"/>
+                <a:cs typeface="Arial"/>
+                <a:sym typeface="Arial"/>
+              </a:defRPr>
+            </a:lvl8pPr>
+            <a:lvl9pPr algn="ctr" indent="0" lvl="8" marL="0">
+              <a:spcBef>
+                <a:spcPts val="0"/>
+              </a:spcBef>
+              <a:buNone/>
+              <a:defRPr sz="700">
+                <a:solidFill>
+                  <a:schemeClr val="dk1"/>
+                </a:solidFill>
+                <a:latin typeface="Arial"/>
+                <a:ea typeface="Arial"/>
+                <a:cs typeface="Arial"/>
+                <a:sym typeface="Arial"/>
+              </a:defRPr>
+            </a:lvl9pPr>
+          </a:lstStyle>
+          <a:p>
+            <a:pPr algn="ctr" indent="0" lvl="0" marL="0" rtl="0">
+              <a:spcBef>
+                <a:spcPts val="0"/>
+              </a:spcBef>
+              <a:spcAft>
+                <a:spcPts val="0"/>
+              </a:spcAft>
+              <a:buNone/>
+            </a:pPr>
+            <a:fld id="{00000000-1234-1234-1234-123412341234}" type="slidenum">
+              <a:rPr lang="en-US"/>
+              <a:t>‹#›</a:t>
+            </a:fld>
+            <a:endParaRPr/>
+          </a:p>
+        </p:txBody>
+      </p:sp>
+    </p:spTree>
+  </p:cSld>
+</p:sld>
+</file>
+
+<file path=ppt/slides/slide32.xml><?xml version="1.0" encoding="utf-8"?>
 <p:sld xmlns:a="http://schemas.openxmlformats.org/drawingml/2006/main" xmlns:r="http://schemas.openxmlformats.org/officeDocument/2006/relationships" xmlns:p="http://schemas.openxmlformats.org/presentationml/2006/main">
   <p:cSld>
     <p:spTree>
@@ -53351,7 +53629,7 @@
 </p:sld>
 </file>
 
-<file path=ppt/slides/slide31.xml><?xml version="1.0" encoding="utf-8"?>
+<file path=ppt/slides/slide33.xml><?xml version="1.0" encoding="utf-8"?>
 <p:sld xmlns:a="http://schemas.openxmlformats.org/drawingml/2006/main" xmlns:r="http://schemas.openxmlformats.org/officeDocument/2006/relationships" xmlns:p="http://schemas.openxmlformats.org/presentationml/2006/main">
   <p:cSld>
     <p:spTree>
@@ -53802,7 +54080,7 @@
 </p:sld>
 </file>
 
-<file path=ppt/slides/slide32.xml><?xml version="1.0" encoding="utf-8"?>
+<file path=ppt/slides/slide34.xml><?xml version="1.0" encoding="utf-8"?>
 <p:sld xmlns:a="http://schemas.openxmlformats.org/drawingml/2006/main" xmlns:r="http://schemas.openxmlformats.org/officeDocument/2006/relationships" xmlns:p="http://schemas.openxmlformats.org/presentationml/2006/main">
   <p:cSld>
     <p:spTree>
@@ -54253,7 +54531,7 @@
 </p:sld>
 </file>
 
-<file path=ppt/slides/slide33.xml><?xml version="1.0" encoding="utf-8"?>
+<file path=ppt/slides/slide35.xml><?xml version="1.0" encoding="utf-8"?>
 <p:sld xmlns:a="http://schemas.openxmlformats.org/drawingml/2006/main" xmlns:r="http://schemas.openxmlformats.org/officeDocument/2006/relationships" xmlns:p="http://schemas.openxmlformats.org/presentationml/2006/main">
   <p:cSld>
     <p:spTree>
@@ -54578,7 +54856,7 @@
 </p:sld>
 </file>
 
-<file path=ppt/slides/slide34.xml><?xml version="1.0" encoding="utf-8"?>
+<file path=ppt/slides/slide36.xml><?xml version="1.0" encoding="utf-8"?>
 <p:sld xmlns:a="http://schemas.openxmlformats.org/drawingml/2006/main" xmlns:r="http://schemas.openxmlformats.org/officeDocument/2006/relationships" xmlns:p="http://schemas.openxmlformats.org/presentationml/2006/main">
   <p:cSld>
     <p:spTree>
@@ -54937,7 +55215,7 @@
 </p:sld>
 </file>
 
-<file path=ppt/slides/slide35.xml><?xml version="1.0" encoding="utf-8"?>
+<file path=ppt/slides/slide37.xml><?xml version="1.0" encoding="utf-8"?>
 <p:sld xmlns:a="http://schemas.openxmlformats.org/drawingml/2006/main" xmlns:r="http://schemas.openxmlformats.org/officeDocument/2006/relationships" xmlns:p="http://schemas.openxmlformats.org/presentationml/2006/main">
   <p:cSld>
     <p:spTree>
@@ -56567,239 +56845,57 @@
             </a:pPr>
             <a:r>
               <a:rPr/>
-              <a:t>Khoảng </a:t>
+              <a:t>Tỉ lệ </a:t>
             </a:r>
             <a:r>
               <a:rPr b="1"/>
-              <a:t>(2,000 ; 4,727)</a:t>
+              <a:t>đo thật</a:t>
             </a:r>
             <a:r>
               <a:rPr/>
-              <a:t> bỏ trống ⇒ phân loại số dòng bằng hình học</a:t>
+              <a:t> lệch khỏi chuẩn nhưng vẫn đúng phía ngưỡng — nên ngưỡng đặt ở </a:t>
+            </a:r>
+            <a:r>
+              <a:rPr b="1"/>
+              <a:t>2,5</a:t>
+            </a:r>
+            <a:r>
+              <a:rPr/>
+              <a:t>, giữa vùng trống</a:t>
             </a:r>
           </a:p>
         </p:txBody>
       </p:sp>
-      <p:graphicFrame>
-        <p:nvGraphicFramePr>
-          <p:cNvPr id="6" name="Content Placeholder 5"/>
-          <p:cNvGraphicFramePr>
-            <a:graphicFrameLocks noGrp="1"/>
-          </p:cNvGraphicFramePr>
-          <p:nvPr>
-            <p:ph idx="1"/>
-          </p:nvPr>
-        </p:nvGraphicFramePr>
-        <p:xfrm>
-          <a:off x="5156200" y="190500"/>
-          <a:ext cx="6235700" cy="5969000"/>
-        </p:xfrm>
-        <a:graphic>
-          <a:graphicData uri="http://schemas.openxmlformats.org/drawingml/2006/table">
-            <a:tbl>
-              <a:tblPr firstRow="1" bandRow="1">
-                <a:tableStyleId>{45BEF19B-5B1D-4A26-B267-ECC71EF7E2D4}</a:tableStyleId>
-              </a:tblPr>
-              <a:tblGrid>
-                <a:gridCol w="2070100"/>
-                <a:gridCol w="2070100"/>
-                <a:gridCol w="2070100"/>
-              </a:tblGrid>
-              <a:tr h="0">
-                <a:tc>
-                  <a:txBody>
-                    <a:bodyPr/>
-                    <a:lstStyle/>
-                    <a:p>
-                      <a:pPr lvl="0" indent="0" marL="0">
-                        <a:buNone/>
-                      </a:pPr>
-                      <a:r>
-                        <a:rPr/>
-                        <a:t>Loại biển</a:t>
-                      </a:r>
-                    </a:p>
-                  </a:txBody>
-                  <a:tcPr/>
-                </a:tc>
-                <a:tc>
-                  <a:txBody>
-                    <a:bodyPr/>
-                    <a:lstStyle/>
-                    <a:p>
-                      <a:pPr lvl="0" indent="0" marL="0" algn="ctr">
-                        <a:buNone/>
-                      </a:pPr>
-                      <a:r>
-                        <a:rPr/>
-                        <a:t>Tỉ lệ</a:t>
-                      </a:r>
-                    </a:p>
-                  </a:txBody>
-                  <a:tcPr/>
-                </a:tc>
-                <a:tc>
-                  <a:txBody>
-                    <a:bodyPr/>
-                    <a:lstStyle/>
-                    <a:p>
-                      <a:pPr lvl="0" indent="0" marL="0" algn="ctr">
-                        <a:buNone/>
-                      </a:pPr>
-                      <a:r>
-                        <a:rPr/>
-                        <a:t>Số dòng</a:t>
-                      </a:r>
-                    </a:p>
-                  </a:txBody>
-                  <a:tcPr/>
-                </a:tc>
-              </a:tr>
-              <a:tr h="0">
-                <a:tc>
-                  <a:txBody>
-                    <a:bodyPr/>
-                    <a:lstStyle/>
-                    <a:p>
-                      <a:pPr lvl="0" indent="0" marL="0">
-                        <a:buNone/>
-                      </a:pPr>
-                      <a:r>
-                        <a:rPr/>
-                        <a:t>Ô tô biển dài</a:t>
-                      </a:r>
-                    </a:p>
-                  </a:txBody>
-                </a:tc>
-                <a:tc>
-                  <a:txBody>
-                    <a:bodyPr/>
-                    <a:lstStyle/>
-                    <a:p>
-                      <a:pPr lvl="0" indent="0" marL="0" algn="ctr">
-                        <a:buNone/>
-                      </a:pPr>
-                      <a:r>
-                        <a:rPr b="1"/>
-                        <a:t>4,727</a:t>
-                      </a:r>
-                    </a:p>
-                  </a:txBody>
-                </a:tc>
-                <a:tc>
-                  <a:txBody>
-                    <a:bodyPr/>
-                    <a:lstStyle/>
-                    <a:p>
-                      <a:pPr lvl="0" indent="0" marL="0" algn="ctr">
-                        <a:buNone/>
-                      </a:pPr>
-                      <a:r>
-                        <a:rPr/>
-                        <a:t>1</a:t>
-                      </a:r>
-                    </a:p>
-                  </a:txBody>
-                </a:tc>
-              </a:tr>
-              <a:tr h="0">
-                <a:tc>
-                  <a:txBody>
-                    <a:bodyPr/>
-                    <a:lstStyle/>
-                    <a:p>
-                      <a:pPr lvl="0" indent="0" marL="0">
-                        <a:buNone/>
-                      </a:pPr>
-                      <a:r>
-                        <a:rPr/>
-                        <a:t>Ô tô biển ngắn</a:t>
-                      </a:r>
-                    </a:p>
-                  </a:txBody>
-                </a:tc>
-                <a:tc>
-                  <a:txBody>
-                    <a:bodyPr/>
-                    <a:lstStyle/>
-                    <a:p>
-                      <a:pPr lvl="0" indent="0" marL="0" algn="ctr">
-                        <a:buNone/>
-                      </a:pPr>
-                      <a:r>
-                        <a:rPr b="1"/>
-                        <a:t>2,000</a:t>
-                      </a:r>
-                    </a:p>
-                  </a:txBody>
-                </a:tc>
-                <a:tc>
-                  <a:txBody>
-                    <a:bodyPr/>
-                    <a:lstStyle/>
-                    <a:p>
-                      <a:pPr lvl="0" indent="0" marL="0" algn="ctr">
-                        <a:buNone/>
-                      </a:pPr>
-                      <a:r>
-                        <a:rPr/>
-                        <a:t>2</a:t>
-                      </a:r>
-                    </a:p>
-                  </a:txBody>
-                </a:tc>
-              </a:tr>
-              <a:tr h="0">
-                <a:tc>
-                  <a:txBody>
-                    <a:bodyPr/>
-                    <a:lstStyle/>
-                    <a:p>
-                      <a:pPr lvl="0" indent="0" marL="0">
-                        <a:buNone/>
-                      </a:pPr>
-                      <a:r>
-                        <a:rPr/>
-                        <a:t>Xe mô tô</a:t>
-                      </a:r>
-                    </a:p>
-                  </a:txBody>
-                </a:tc>
-                <a:tc>
-                  <a:txBody>
-                    <a:bodyPr/>
-                    <a:lstStyle/>
-                    <a:p>
-                      <a:pPr lvl="0" indent="0" marL="0" algn="ctr">
-                        <a:buNone/>
-                      </a:pPr>
-                      <a:r>
-                        <a:rPr b="1"/>
-                        <a:t>1,357</a:t>
-                      </a:r>
-                    </a:p>
-                  </a:txBody>
-                </a:tc>
-                <a:tc>
-                  <a:txBody>
-                    <a:bodyPr/>
-                    <a:lstStyle/>
-                    <a:p>
-                      <a:pPr lvl="0" indent="0" marL="0" algn="ctr">
-                        <a:buNone/>
-                      </a:pPr>
-                      <a:r>
-                        <a:rPr/>
-                        <a:t>2</a:t>
-                      </a:r>
-                    </a:p>
-                  </a:txBody>
-                </a:tc>
-              </a:tr>
-            </a:tbl>
-          </a:graphicData>
-        </a:graphic>
-      </p:graphicFrame>
+      <p:pic>
+        <p:nvPicPr>
+          <p:cNvPr descr="figures/fig-layouts.png" id="0" name="Picture 1"/>
+          <p:cNvPicPr>
+            <a:picLocks noGrp="1" noChangeAspect="1"/>
+          </p:cNvPicPr>
+          <p:nvPr/>
+        </p:nvPicPr>
+        <p:blipFill>
+          <a:blip r:embed="rId2"/>
+          <a:stretch>
+            <a:fillRect/>
+          </a:stretch>
+        </p:blipFill>
+        <p:spPr bwMode="auto">
+          <a:xfrm>
+            <a:off x="5156200" y="292100"/>
+            <a:ext cx="6235700" cy="5778500"/>
+          </a:xfrm>
+          <a:prstGeom prst="rect">
+            <a:avLst/>
+          </a:prstGeom>
+          <a:noFill/>
+          <a:ln w="9525">
+            <a:noFill/>
+            <a:headEnd/>
+            <a:tailEnd/>
+          </a:ln>
+        </p:spPr>
+      </p:pic>
       <p:sp>
         <p:nvSpPr>
           <p:cNvPr id="449" name="Google Shape;449;p31"/>

--- a/docs/slides/slides.pptx
+++ b/docs/slides/slides.pptx
@@ -46146,19 +46146,23 @@
             <a:pPr lvl="0"/>
             <a:r>
               <a:rPr/>
-              <a:t>Huấn luyện trên </a:t>
+              <a:t>Huấn luyện </a:t>
             </a:r>
             <a:r>
               <a:rPr b="1"/>
-              <a:t>GPU đám mây</a:t>
+              <a:t>và</a:t>
             </a:r>
             <a:r>
               <a:rPr/>
-              <a:t>, triển khai suy luận </a:t>
+              <a:t> suy luận đều </a:t>
             </a:r>
             <a:r>
               <a:rPr b="1"/>
               <a:t>trên CPU</a:t>
+            </a:r>
+            <a:r>
+              <a:rPr/>
+              <a:t> — 10,1 giờ, không dùng GPU nào</a:t>
             </a:r>
           </a:p>
           <a:p>

--- a/docs/slides/slides.pptx
+++ b/docs/slides/slides.pptx
@@ -35,30 +35,23 @@
     <p:sldId id="283" r:id="rId32"/>
     <p:sldId id="284" r:id="rId33"/>
     <p:sldId id="285" r:id="rId34"/>
-    <p:sldId id="286" r:id="rId35"/>
-    <p:sldId id="287" r:id="rId36"/>
-    <p:sldId id="288" r:id="rId37"/>
-    <p:sldId id="289" r:id="rId38"/>
-    <p:sldId id="290" r:id="rId39"/>
-    <p:sldId id="291" r:id="rId40"/>
-    <p:sldId id="292" r:id="rId41"/>
   </p:sldIdLst>
   <p:sldSz cx="12192000" cy="6858000"/>
   <p:notesSz cx="6858000" cy="9144000"/>
   <p:embeddedFontLst>
     <p:embeddedFont>
       <p:font typeface="Roboto"/>
-      <p:regular r:id="rId42"/>
-      <p:bold r:id="rId43"/>
-      <p:italic r:id="rId44"/>
-      <p:boldItalic r:id="rId45"/>
+      <p:regular r:id="rId35"/>
+      <p:bold r:id="rId36"/>
+      <p:italic r:id="rId37"/>
+      <p:boldItalic r:id="rId38"/>
     </p:embeddedFont>
     <p:embeddedFont>
       <p:font typeface="Open Sans"/>
-      <p:regular r:id="rId46"/>
-      <p:bold r:id="rId47"/>
-      <p:italic r:id="rId48"/>
-      <p:boldItalic r:id="rId49"/>
+      <p:regular r:id="rId39"/>
+      <p:bold r:id="rId40"/>
+      <p:italic r:id="rId41"/>
+      <p:boldItalic r:id="rId42"/>
     </p:embeddedFont>
   </p:embeddedFontLst>
   <p:defaultTextStyle>
@@ -292,7 +285,7 @@
   </p:defaultTextStyle>
   <p:extLst>
     <p:ext uri="GoogleSlidesCustomDataVersion2">
-      <go:slidesCustomData xmlns:go="http://customooxmlschemas.google.com/" roundtripDataSignature="AMtx7mhu5dURU4INwSlvEO7StWDXKr50jg==" r:id="rId50"/>
+      <go:slidesCustomData xmlns:go="http://customooxmlschemas.google.com/" roundtripDataSignature="AMtx7mhu5dURU4INwSlvEO7StWDXKr50jg==" r:id="rId43"/>
     </p:ext>
   </p:extLst>
 </p:presentation>
@@ -43989,1209 +43982,6 @@
   <p:cSld>
     <p:spTree>
       <p:nvGrpSpPr>
-        <p:cNvPr id="428" name="Shape 428"/>
-        <p:cNvGrpSpPr/>
-        <p:nvPr/>
-      </p:nvGrpSpPr>
-      <p:grpSpPr>
-        <a:xfrm>
-          <a:off x="0" y="0"/>
-          <a:ext cx="0" cy="0"/>
-          <a:chOff x="0" y="0"/>
-          <a:chExt cx="0" cy="0"/>
-        </a:xfrm>
-      </p:grpSpPr>
-      <p:sp>
-        <p:nvSpPr>
-          <p:cNvPr id="436" name="Google Shape;436;p31"/>
-          <p:cNvSpPr txBox="1"/>
-          <p:nvPr>
-            <p:ph type="title"/>
-          </p:nvPr>
-        </p:nvSpPr>
-        <p:spPr>
-          <a:xfrm>
-            <a:off x="774146" y="202009"/>
-            <a:ext cx="3932227" cy="1698043"/>
-          </a:xfrm>
-          <a:prstGeom prst="rect">
-            <a:avLst/>
-          </a:prstGeom>
-          <a:noFill/>
-          <a:ln>
-            <a:noFill/>
-          </a:ln>
-        </p:spPr>
-        <p:txBody>
-          <a:bodyPr/>
-          <a:lstStyle/>
-          <a:p>
-            <a:pPr lvl="0" indent="0" marL="0">
-              <a:buNone/>
-            </a:pPr>
-            <a:r>
-              <a:rPr/>
-              <a:t>Kiến trúc 5 tầng</a:t>
-            </a:r>
-          </a:p>
-        </p:txBody>
-      </p:sp>
-      <p:sp>
-        <p:nvSpPr>
-          <p:cNvPr id="437" name="Google Shape;437;p31"/>
-          <p:cNvSpPr txBox="1"/>
-          <p:nvPr>
-            <p:ph idx="2" sz="half" type="body"/>
-          </p:nvPr>
-        </p:nvSpPr>
-        <p:spPr/>
-        <p:txBody>
-          <a:bodyPr/>
-          <a:lstStyle/>
-          <a:p>
-            <a:pPr lvl="0" indent="0" marL="0">
-              <a:buNone/>
-            </a:pPr>
-            <a:r>
-              <a:rPr/>
-              <a:t>Tầng AI là </a:t>
-            </a:r>
-            <a:r>
-              <a:rPr b="1"/>
-              <a:t>Python thuần</a:t>
-            </a:r>
-            <a:r>
-              <a:rPr/>
-              <a:t> — cấm import FastAPI hoặc Pydantic. Nó không có mũi tên nào đi lên, nên thay engine OCR </a:t>
-            </a:r>
-            <a:r>
-              <a:rPr b="1"/>
-              <a:t>không đụng một dòng mã API</a:t>
-            </a:r>
-          </a:p>
-        </p:txBody>
-      </p:sp>
-      <p:graphicFrame>
-        <p:nvGraphicFramePr>
-          <p:cNvPr id="6" name="Content Placeholder 5"/>
-          <p:cNvGraphicFramePr>
-            <a:graphicFrameLocks noGrp="1"/>
-          </p:cNvGraphicFramePr>
-          <p:nvPr>
-            <p:ph idx="1"/>
-          </p:nvPr>
-        </p:nvGraphicFramePr>
-        <p:xfrm>
-          <a:off x="5156200" y="190500"/>
-          <a:ext cx="6235700" cy="5969000"/>
-        </p:xfrm>
-        <a:graphic>
-          <a:graphicData uri="http://schemas.openxmlformats.org/drawingml/2006/table">
-            <a:tbl>
-              <a:tblPr firstRow="1" bandRow="1">
-                <a:tableStyleId>{45BEF19B-5B1D-4A26-B267-ECC71EF7E2D4}</a:tableStyleId>
-              </a:tblPr>
-              <a:tblGrid>
-                <a:gridCol w="3111500"/>
-                <a:gridCol w="3111500"/>
-              </a:tblGrid>
-              <a:tr h="0">
-                <a:tc>
-                  <a:txBody>
-                    <a:bodyPr/>
-                    <a:lstStyle/>
-                    <a:p>
-                      <a:pPr lvl="0" indent="0" marL="0">
-                        <a:buNone/>
-                      </a:pPr>
-                      <a:r>
-                        <a:rPr/>
-                        <a:t>Tầng</a:t>
-                      </a:r>
-                    </a:p>
-                  </a:txBody>
-                  <a:tcPr/>
-                </a:tc>
-                <a:tc>
-                  <a:txBody>
-                    <a:bodyPr/>
-                    <a:lstStyle/>
-                    <a:p>
-                      <a:pPr lvl="0" indent="0" marL="0">
-                        <a:buNone/>
-                      </a:pPr>
-                      <a:r>
-                        <a:rPr/>
-                        <a:t>Công nghệ</a:t>
-                      </a:r>
-                    </a:p>
-                  </a:txBody>
-                  <a:tcPr/>
-                </a:tc>
-              </a:tr>
-              <a:tr h="0">
-                <a:tc>
-                  <a:txBody>
-                    <a:bodyPr/>
-                    <a:lstStyle/>
-                    <a:p>
-                      <a:pPr lvl="0" indent="0" marL="0">
-                        <a:buNone/>
-                      </a:pPr>
-                      <a:r>
-                        <a:rPr/>
-                        <a:t>L1 — Trình bày</a:t>
-                      </a:r>
-                    </a:p>
-                  </a:txBody>
-                </a:tc>
-                <a:tc>
-                  <a:txBody>
-                    <a:bodyPr/>
-                    <a:lstStyle/>
-                    <a:p>
-                      <a:pPr lvl="0" indent="0" marL="0">
-                        <a:buNone/>
-                      </a:pPr>
-                      <a:r>
-                        <a:rPr/>
-                        <a:t>React + TypeScript + Tailwind · 3 trang</a:t>
-                      </a:r>
-                    </a:p>
-                  </a:txBody>
-                </a:tc>
-              </a:tr>
-              <a:tr h="0">
-                <a:tc>
-                  <a:txBody>
-                    <a:bodyPr/>
-                    <a:lstStyle/>
-                    <a:p>
-                      <a:pPr lvl="0" indent="0" marL="0">
-                        <a:buNone/>
-                      </a:pPr>
-                      <a:r>
-                        <a:rPr/>
-                        <a:t>L2 — API</a:t>
-                      </a:r>
-                    </a:p>
-                  </a:txBody>
-                </a:tc>
-                <a:tc>
-                  <a:txBody>
-                    <a:bodyPr/>
-                    <a:lstStyle/>
-                    <a:p>
-                      <a:pPr lvl="0" indent="0" marL="0">
-                        <a:buNone/>
-                      </a:pPr>
-                      <a:r>
-                        <a:rPr/>
-                        <a:t>FastAPI + Swagger · 10 endpoint</a:t>
-                      </a:r>
-                    </a:p>
-                  </a:txBody>
-                </a:tc>
-              </a:tr>
-              <a:tr h="0">
-                <a:tc>
-                  <a:txBody>
-                    <a:bodyPr/>
-                    <a:lstStyle/>
-                    <a:p>
-                      <a:pPr lvl="0" indent="0" marL="0">
-                        <a:buNone/>
-                      </a:pPr>
-                      <a:r>
-                        <a:rPr/>
-                        <a:t>L3 — Nghiệp vụ</a:t>
-                      </a:r>
-                    </a:p>
-                  </a:txBody>
-                </a:tc>
-                <a:tc>
-                  <a:txBody>
-                    <a:bodyPr/>
-                    <a:lstStyle/>
-                    <a:p>
-                      <a:pPr lvl="0" indent="0" marL="0">
-                        <a:buNone/>
-                      </a:pPr>
-                      <a:r>
-                        <a:rPr/>
-                        <a:t>Detection / Video / History / Storage</a:t>
-                      </a:r>
-                    </a:p>
-                  </a:txBody>
-                </a:tc>
-              </a:tr>
-              <a:tr h="0">
-                <a:tc>
-                  <a:txBody>
-                    <a:bodyPr/>
-                    <a:lstStyle/>
-                    <a:p>
-                      <a:pPr lvl="0" indent="0" marL="0">
-                        <a:buNone/>
-                      </a:pPr>
-                      <a:r>
-                        <a:rPr b="1"/>
-                        <a:t>L4 — AI</a:t>
-                      </a:r>
-                    </a:p>
-                  </a:txBody>
-                </a:tc>
-                <a:tc>
-                  <a:txBody>
-                    <a:bodyPr/>
-                    <a:lstStyle/>
-                    <a:p>
-                      <a:pPr lvl="0" indent="0" marL="0">
-                        <a:buNone/>
-                      </a:pPr>
-                      <a:r>
-                        <a:rPr b="1"/>
-                        <a:t>Python thuần</a:t>
-                      </a:r>
-                      <a:r>
-                        <a:rPr/>
-                        <a:t> — YOLO11 + PaddleOCR + Normalizer</a:t>
-                      </a:r>
-                    </a:p>
-                  </a:txBody>
-                </a:tc>
-              </a:tr>
-              <a:tr h="0">
-                <a:tc>
-                  <a:txBody>
-                    <a:bodyPr/>
-                    <a:lstStyle/>
-                    <a:p>
-                      <a:pPr lvl="0" indent="0" marL="0">
-                        <a:buNone/>
-                      </a:pPr>
-                      <a:r>
-                        <a:rPr/>
-                        <a:t>L5 — Dữ liệu</a:t>
-                      </a:r>
-                    </a:p>
-                  </a:txBody>
-                </a:tc>
-                <a:tc>
-                  <a:txBody>
-                    <a:bodyPr/>
-                    <a:lstStyle/>
-                    <a:p>
-                      <a:pPr lvl="0" indent="0" marL="0">
-                        <a:buNone/>
-                      </a:pPr>
-                      <a:r>
-                        <a:rPr/>
-                        <a:t>SQLite + SQLAlchemy + Alembic</a:t>
-                      </a:r>
-                    </a:p>
-                  </a:txBody>
-                </a:tc>
-              </a:tr>
-            </a:tbl>
-          </a:graphicData>
-        </a:graphic>
-      </p:graphicFrame>
-      <p:sp>
-        <p:nvSpPr>
-          <p:cNvPr id="449" name="Google Shape;449;p31"/>
-          <p:cNvSpPr txBox="1"/>
-          <p:nvPr>
-            <p:ph idx="12" type="sldNum"/>
-          </p:nvPr>
-        </p:nvSpPr>
-        <p:spPr>
-          <a:xfrm>
-            <a:off x="58380" y="6508358"/>
-            <a:ext cx="349642" cy="349642"/>
-          </a:xfrm>
-          <a:prstGeom prst="rect">
-            <a:avLst/>
-          </a:prstGeom>
-          <a:noFill/>
-          <a:ln>
-            <a:noFill/>
-          </a:ln>
-        </p:spPr>
-        <p:txBody>
-          <a:bodyPr anchor="ctr" anchorCtr="0" bIns="45700" lIns="91425" rIns="91425" spcFirstLastPara="1" tIns="45700" wrap="square">
-            <a:noAutofit/>
-          </a:bodyPr>
-          <a:lstStyle>
-            <a:lvl1pPr algn="ctr" indent="0" lvl="0" marL="0">
-              <a:spcBef>
-                <a:spcPts val="0"/>
-              </a:spcBef>
-              <a:buNone/>
-              <a:defRPr sz="700">
-                <a:solidFill>
-                  <a:schemeClr val="dk1"/>
-                </a:solidFill>
-                <a:latin typeface="Arial"/>
-                <a:ea typeface="Arial"/>
-                <a:cs typeface="Arial"/>
-                <a:sym typeface="Arial"/>
-              </a:defRPr>
-            </a:lvl1pPr>
-            <a:lvl2pPr algn="ctr" indent="0" lvl="1" marL="0">
-              <a:spcBef>
-                <a:spcPts val="0"/>
-              </a:spcBef>
-              <a:buNone/>
-              <a:defRPr sz="700">
-                <a:solidFill>
-                  <a:schemeClr val="dk1"/>
-                </a:solidFill>
-                <a:latin typeface="Arial"/>
-                <a:ea typeface="Arial"/>
-                <a:cs typeface="Arial"/>
-                <a:sym typeface="Arial"/>
-              </a:defRPr>
-            </a:lvl2pPr>
-            <a:lvl3pPr algn="ctr" indent="0" lvl="2" marL="0">
-              <a:spcBef>
-                <a:spcPts val="0"/>
-              </a:spcBef>
-              <a:buNone/>
-              <a:defRPr sz="700">
-                <a:solidFill>
-                  <a:schemeClr val="dk1"/>
-                </a:solidFill>
-                <a:latin typeface="Arial"/>
-                <a:ea typeface="Arial"/>
-                <a:cs typeface="Arial"/>
-                <a:sym typeface="Arial"/>
-              </a:defRPr>
-            </a:lvl3pPr>
-            <a:lvl4pPr algn="ctr" indent="0" lvl="3" marL="0">
-              <a:spcBef>
-                <a:spcPts val="0"/>
-              </a:spcBef>
-              <a:buNone/>
-              <a:defRPr sz="700">
-                <a:solidFill>
-                  <a:schemeClr val="dk1"/>
-                </a:solidFill>
-                <a:latin typeface="Arial"/>
-                <a:ea typeface="Arial"/>
-                <a:cs typeface="Arial"/>
-                <a:sym typeface="Arial"/>
-              </a:defRPr>
-            </a:lvl4pPr>
-            <a:lvl5pPr algn="ctr" indent="0" lvl="4" marL="0">
-              <a:spcBef>
-                <a:spcPts val="0"/>
-              </a:spcBef>
-              <a:buNone/>
-              <a:defRPr sz="700">
-                <a:solidFill>
-                  <a:schemeClr val="dk1"/>
-                </a:solidFill>
-                <a:latin typeface="Arial"/>
-                <a:ea typeface="Arial"/>
-                <a:cs typeface="Arial"/>
-                <a:sym typeface="Arial"/>
-              </a:defRPr>
-            </a:lvl5pPr>
-            <a:lvl6pPr algn="ctr" indent="0" lvl="5" marL="0">
-              <a:spcBef>
-                <a:spcPts val="0"/>
-              </a:spcBef>
-              <a:buNone/>
-              <a:defRPr sz="700">
-                <a:solidFill>
-                  <a:schemeClr val="dk1"/>
-                </a:solidFill>
-                <a:latin typeface="Arial"/>
-                <a:ea typeface="Arial"/>
-                <a:cs typeface="Arial"/>
-                <a:sym typeface="Arial"/>
-              </a:defRPr>
-            </a:lvl6pPr>
-            <a:lvl7pPr algn="ctr" indent="0" lvl="6" marL="0">
-              <a:spcBef>
-                <a:spcPts val="0"/>
-              </a:spcBef>
-              <a:buNone/>
-              <a:defRPr sz="700">
-                <a:solidFill>
-                  <a:schemeClr val="dk1"/>
-                </a:solidFill>
-                <a:latin typeface="Arial"/>
-                <a:ea typeface="Arial"/>
-                <a:cs typeface="Arial"/>
-                <a:sym typeface="Arial"/>
-              </a:defRPr>
-            </a:lvl7pPr>
-            <a:lvl8pPr algn="ctr" indent="0" lvl="7" marL="0">
-              <a:spcBef>
-                <a:spcPts val="0"/>
-              </a:spcBef>
-              <a:buNone/>
-              <a:defRPr sz="700">
-                <a:solidFill>
-                  <a:schemeClr val="dk1"/>
-                </a:solidFill>
-                <a:latin typeface="Arial"/>
-                <a:ea typeface="Arial"/>
-                <a:cs typeface="Arial"/>
-                <a:sym typeface="Arial"/>
-              </a:defRPr>
-            </a:lvl8pPr>
-            <a:lvl9pPr algn="ctr" indent="0" lvl="8" marL="0">
-              <a:spcBef>
-                <a:spcPts val="0"/>
-              </a:spcBef>
-              <a:buNone/>
-              <a:defRPr sz="700">
-                <a:solidFill>
-                  <a:schemeClr val="dk1"/>
-                </a:solidFill>
-                <a:latin typeface="Arial"/>
-                <a:ea typeface="Arial"/>
-                <a:cs typeface="Arial"/>
-                <a:sym typeface="Arial"/>
-              </a:defRPr>
-            </a:lvl9pPr>
-          </a:lstStyle>
-          <a:p>
-            <a:pPr algn="ctr" indent="0" lvl="0" marL="0" rtl="0">
-              <a:spcBef>
-                <a:spcPts val="0"/>
-              </a:spcBef>
-              <a:spcAft>
-                <a:spcPts val="0"/>
-              </a:spcAft>
-              <a:buNone/>
-            </a:pPr>
-            <a:fld id="{00000000-1234-1234-1234-123412341234}" type="slidenum">
-              <a:rPr lang="en-US"/>
-              <a:t>‹#›</a:t>
-            </a:fld>
-            <a:endParaRPr/>
-          </a:p>
-        </p:txBody>
-      </p:sp>
-    </p:spTree>
-  </p:cSld>
-</p:sld>
-</file>
-
-<file path=ppt/slides/slide11.xml><?xml version="1.0" encoding="utf-8"?>
-<p:sld xmlns:a="http://schemas.openxmlformats.org/drawingml/2006/main" xmlns:r="http://schemas.openxmlformats.org/officeDocument/2006/relationships" xmlns:p="http://schemas.openxmlformats.org/presentationml/2006/main">
-  <p:cSld>
-    <p:spTree>
-      <p:nvGrpSpPr>
-        <p:cNvPr id="428" name="Shape 428"/>
-        <p:cNvGrpSpPr/>
-        <p:nvPr/>
-      </p:nvGrpSpPr>
-      <p:grpSpPr>
-        <a:xfrm>
-          <a:off x="0" y="0"/>
-          <a:ext cx="0" cy="0"/>
-          <a:chOff x="0" y="0"/>
-          <a:chExt cx="0" cy="0"/>
-        </a:xfrm>
-      </p:grpSpPr>
-      <p:sp>
-        <p:nvSpPr>
-          <p:cNvPr id="436" name="Google Shape;436;p31"/>
-          <p:cNvSpPr txBox="1"/>
-          <p:nvPr>
-            <p:ph type="title"/>
-          </p:nvPr>
-        </p:nvSpPr>
-        <p:spPr>
-          <a:xfrm>
-            <a:off x="774146" y="202009"/>
-            <a:ext cx="3932227" cy="1698043"/>
-          </a:xfrm>
-          <a:prstGeom prst="rect">
-            <a:avLst/>
-          </a:prstGeom>
-          <a:noFill/>
-          <a:ln>
-            <a:noFill/>
-          </a:ln>
-        </p:spPr>
-        <p:txBody>
-          <a:bodyPr/>
-          <a:lstStyle/>
-          <a:p>
-            <a:pPr lvl="0" indent="0" marL="0">
-              <a:buNone/>
-            </a:pPr>
-            <a:r>
-              <a:rPr/>
-              <a:t>Cơ sở dữ liệu — một cột làm nên đóng góp</a:t>
-            </a:r>
-          </a:p>
-        </p:txBody>
-      </p:sp>
-      <p:sp>
-        <p:nvSpPr>
-          <p:cNvPr id="437" name="Google Shape;437;p31"/>
-          <p:cNvSpPr txBox="1"/>
-          <p:nvPr>
-            <p:ph idx="2" sz="half" type="body"/>
-          </p:nvPr>
-        </p:nvSpPr>
-        <p:spPr/>
-        <p:txBody>
-          <a:bodyPr/>
-          <a:lstStyle/>
-          <a:p>
-            <a:pPr lvl="0" indent="0" marL="0">
-              <a:buNone/>
-            </a:pPr>
-            <a:r>
-              <a:rPr/>
-              <a:t>Bảng </a:t>
-            </a:r>
-            <a:r>
-              <a:rPr>
-                <a:latin typeface="Courier"/>
-              </a:rPr>
-              <a:t>detection_history</a:t>
-            </a:r>
-            <a:r>
-              <a:rPr/>
-              <a:t> lưu </a:t>
-            </a:r>
-            <a:r>
-              <a:rPr b="1"/>
-              <a:t>cả hai</a:t>
-            </a:r>
-            <a:r>
-              <a:rPr/>
-              <a:t> chuỗi trên </a:t>
-            </a:r>
-            <a:r>
-              <a:rPr b="1"/>
-              <a:t>cùng một bản ghi</a:t>
-            </a:r>
-          </a:p>
-        </p:txBody>
-      </p:sp>
-      <p:graphicFrame>
-        <p:nvGraphicFramePr>
-          <p:cNvPr id="6" name="Content Placeholder 5"/>
-          <p:cNvGraphicFramePr>
-            <a:graphicFrameLocks noGrp="1"/>
-          </p:cNvGraphicFramePr>
-          <p:nvPr>
-            <p:ph idx="1"/>
-          </p:nvPr>
-        </p:nvGraphicFramePr>
-        <p:xfrm>
-          <a:off x="5156200" y="190500"/>
-          <a:ext cx="6235700" cy="5969000"/>
-        </p:xfrm>
-        <a:graphic>
-          <a:graphicData uri="http://schemas.openxmlformats.org/drawingml/2006/table">
-            <a:tbl>
-              <a:tblPr firstRow="1" bandRow="1">
-                <a:tableStyleId>{45BEF19B-5B1D-4A26-B267-ECC71EF7E2D4}</a:tableStyleId>
-              </a:tblPr>
-              <a:tblGrid>
-                <a:gridCol w="3111500"/>
-                <a:gridCol w="3111500"/>
-              </a:tblGrid>
-              <a:tr h="0">
-                <a:tc>
-                  <a:txBody>
-                    <a:bodyPr/>
-                    <a:lstStyle/>
-                    <a:p>
-                      <a:pPr lvl="0" indent="0" marL="0">
-                        <a:buNone/>
-                      </a:pPr>
-                      <a:r>
-                        <a:rPr/>
-                        <a:t>Cột</a:t>
-                      </a:r>
-                    </a:p>
-                  </a:txBody>
-                  <a:tcPr/>
-                </a:tc>
-                <a:tc>
-                  <a:txBody>
-                    <a:bodyPr/>
-                    <a:lstStyle/>
-                    <a:p>
-                      <a:pPr lvl="0" indent="0" marL="0">
-                        <a:buNone/>
-                      </a:pPr>
-                      <a:r>
-                        <a:rPr/>
-                        <a:t>Nội dung</a:t>
-                      </a:r>
-                    </a:p>
-                  </a:txBody>
-                  <a:tcPr/>
-                </a:tc>
-              </a:tr>
-              <a:tr h="0">
-                <a:tc>
-                  <a:txBody>
-                    <a:bodyPr/>
-                    <a:lstStyle/>
-                    <a:p>
-                      <a:pPr lvl="0" indent="0" marL="0">
-                        <a:buNone/>
-                      </a:pPr>
-                      <a:r>
-                        <a:rPr>
-                          <a:latin typeface="Courier"/>
-                        </a:rPr>
-                        <a:t>raw_ocr_text</a:t>
-                      </a:r>
-                    </a:p>
-                  </a:txBody>
-                </a:tc>
-                <a:tc>
-                  <a:txBody>
-                    <a:bodyPr/>
-                    <a:lstStyle/>
-                    <a:p>
-                      <a:pPr lvl="0" indent="0" marL="0">
-                        <a:buNone/>
-                      </a:pPr>
-                      <a:r>
-                        <a:rPr/>
-                        <a:t>Chuỗi </a:t>
-                      </a:r>
-                      <a:r>
-                        <a:rPr b="1"/>
-                        <a:t>thô</a:t>
-                      </a:r>
-                      <a:r>
-                        <a:rPr/>
-                        <a:t> do PaddleOCR trả về</a:t>
-                      </a:r>
-                    </a:p>
-                  </a:txBody>
-                </a:tc>
-              </a:tr>
-              <a:tr h="0">
-                <a:tc>
-                  <a:txBody>
-                    <a:bodyPr/>
-                    <a:lstStyle/>
-                    <a:p>
-                      <a:pPr lvl="0" indent="0" marL="0">
-                        <a:buNone/>
-                      </a:pPr>
-                      <a:r>
-                        <a:rPr>
-                          <a:latin typeface="Courier"/>
-                        </a:rPr>
-                        <a:t>plate_number</a:t>
-                      </a:r>
-                    </a:p>
-                  </a:txBody>
-                </a:tc>
-                <a:tc>
-                  <a:txBody>
-                    <a:bodyPr/>
-                    <a:lstStyle/>
-                    <a:p>
-                      <a:pPr lvl="0" indent="0" marL="0">
-                        <a:buNone/>
-                      </a:pPr>
-                      <a:r>
-                        <a:rPr/>
-                        <a:t>Chuỗi </a:t>
-                      </a:r>
-                      <a:r>
-                        <a:rPr b="1"/>
-                        <a:t>sau</a:t>
-                      </a:r>
-                      <a:r>
-                        <a:rPr/>
-                        <a:t> bộ luật hậu xử lý</a:t>
-                      </a:r>
-                    </a:p>
-                  </a:txBody>
-                </a:tc>
-              </a:tr>
-              <a:tr h="0">
-                <a:tc>
-                  <a:txBody>
-                    <a:bodyPr/>
-                    <a:lstStyle/>
-                    <a:p>
-                      <a:pPr lvl="0" indent="0" marL="0">
-                        <a:buNone/>
-                      </a:pPr>
-                      <a:r>
-                        <a:rPr>
-                          <a:latin typeface="Courier"/>
-                        </a:rPr>
-                        <a:t>is_valid_format</a:t>
-                      </a:r>
-                    </a:p>
-                  </a:txBody>
-                </a:tc>
-                <a:tc>
-                  <a:txBody>
-                    <a:bodyPr/>
-                    <a:lstStyle/>
-                    <a:p>
-                      <a:pPr lvl="0" indent="0" marL="0">
-                        <a:buNone/>
-                      </a:pPr>
-                      <a:r>
-                        <a:rPr/>
-                        <a:t>Hợp quy cách Việt Nam hay không</a:t>
-                      </a:r>
-                    </a:p>
-                  </a:txBody>
-                </a:tc>
-              </a:tr>
-            </a:tbl>
-          </a:graphicData>
-        </a:graphic>
-      </p:graphicFrame>
-      <p:sp>
-        <p:nvSpPr>
-          <p:cNvPr id="449" name="Google Shape;449;p31"/>
-          <p:cNvSpPr txBox="1"/>
-          <p:nvPr>
-            <p:ph idx="12" type="sldNum"/>
-          </p:nvPr>
-        </p:nvSpPr>
-        <p:spPr>
-          <a:xfrm>
-            <a:off x="58380" y="6508358"/>
-            <a:ext cx="349642" cy="349642"/>
-          </a:xfrm>
-          <a:prstGeom prst="rect">
-            <a:avLst/>
-          </a:prstGeom>
-          <a:noFill/>
-          <a:ln>
-            <a:noFill/>
-          </a:ln>
-        </p:spPr>
-        <p:txBody>
-          <a:bodyPr anchor="ctr" anchorCtr="0" bIns="45700" lIns="91425" rIns="91425" spcFirstLastPara="1" tIns="45700" wrap="square">
-            <a:noAutofit/>
-          </a:bodyPr>
-          <a:lstStyle>
-            <a:lvl1pPr algn="ctr" indent="0" lvl="0" marL="0">
-              <a:spcBef>
-                <a:spcPts val="0"/>
-              </a:spcBef>
-              <a:buNone/>
-              <a:defRPr sz="700">
-                <a:solidFill>
-                  <a:schemeClr val="dk1"/>
-                </a:solidFill>
-                <a:latin typeface="Arial"/>
-                <a:ea typeface="Arial"/>
-                <a:cs typeface="Arial"/>
-                <a:sym typeface="Arial"/>
-              </a:defRPr>
-            </a:lvl1pPr>
-            <a:lvl2pPr algn="ctr" indent="0" lvl="1" marL="0">
-              <a:spcBef>
-                <a:spcPts val="0"/>
-              </a:spcBef>
-              <a:buNone/>
-              <a:defRPr sz="700">
-                <a:solidFill>
-                  <a:schemeClr val="dk1"/>
-                </a:solidFill>
-                <a:latin typeface="Arial"/>
-                <a:ea typeface="Arial"/>
-                <a:cs typeface="Arial"/>
-                <a:sym typeface="Arial"/>
-              </a:defRPr>
-            </a:lvl2pPr>
-            <a:lvl3pPr algn="ctr" indent="0" lvl="2" marL="0">
-              <a:spcBef>
-                <a:spcPts val="0"/>
-              </a:spcBef>
-              <a:buNone/>
-              <a:defRPr sz="700">
-                <a:solidFill>
-                  <a:schemeClr val="dk1"/>
-                </a:solidFill>
-                <a:latin typeface="Arial"/>
-                <a:ea typeface="Arial"/>
-                <a:cs typeface="Arial"/>
-                <a:sym typeface="Arial"/>
-              </a:defRPr>
-            </a:lvl3pPr>
-            <a:lvl4pPr algn="ctr" indent="0" lvl="3" marL="0">
-              <a:spcBef>
-                <a:spcPts val="0"/>
-              </a:spcBef>
-              <a:buNone/>
-              <a:defRPr sz="700">
-                <a:solidFill>
-                  <a:schemeClr val="dk1"/>
-                </a:solidFill>
-                <a:latin typeface="Arial"/>
-                <a:ea typeface="Arial"/>
-                <a:cs typeface="Arial"/>
-                <a:sym typeface="Arial"/>
-              </a:defRPr>
-            </a:lvl4pPr>
-            <a:lvl5pPr algn="ctr" indent="0" lvl="4" marL="0">
-              <a:spcBef>
-                <a:spcPts val="0"/>
-              </a:spcBef>
-              <a:buNone/>
-              <a:defRPr sz="700">
-                <a:solidFill>
-                  <a:schemeClr val="dk1"/>
-                </a:solidFill>
-                <a:latin typeface="Arial"/>
-                <a:ea typeface="Arial"/>
-                <a:cs typeface="Arial"/>
-                <a:sym typeface="Arial"/>
-              </a:defRPr>
-            </a:lvl5pPr>
-            <a:lvl6pPr algn="ctr" indent="0" lvl="5" marL="0">
-              <a:spcBef>
-                <a:spcPts val="0"/>
-              </a:spcBef>
-              <a:buNone/>
-              <a:defRPr sz="700">
-                <a:solidFill>
-                  <a:schemeClr val="dk1"/>
-                </a:solidFill>
-                <a:latin typeface="Arial"/>
-                <a:ea typeface="Arial"/>
-                <a:cs typeface="Arial"/>
-                <a:sym typeface="Arial"/>
-              </a:defRPr>
-            </a:lvl6pPr>
-            <a:lvl7pPr algn="ctr" indent="0" lvl="6" marL="0">
-              <a:spcBef>
-                <a:spcPts val="0"/>
-              </a:spcBef>
-              <a:buNone/>
-              <a:defRPr sz="700">
-                <a:solidFill>
-                  <a:schemeClr val="dk1"/>
-                </a:solidFill>
-                <a:latin typeface="Arial"/>
-                <a:ea typeface="Arial"/>
-                <a:cs typeface="Arial"/>
-                <a:sym typeface="Arial"/>
-              </a:defRPr>
-            </a:lvl7pPr>
-            <a:lvl8pPr algn="ctr" indent="0" lvl="7" marL="0">
-              <a:spcBef>
-                <a:spcPts val="0"/>
-              </a:spcBef>
-              <a:buNone/>
-              <a:defRPr sz="700">
-                <a:solidFill>
-                  <a:schemeClr val="dk1"/>
-                </a:solidFill>
-                <a:latin typeface="Arial"/>
-                <a:ea typeface="Arial"/>
-                <a:cs typeface="Arial"/>
-                <a:sym typeface="Arial"/>
-              </a:defRPr>
-            </a:lvl8pPr>
-            <a:lvl9pPr algn="ctr" indent="0" lvl="8" marL="0">
-              <a:spcBef>
-                <a:spcPts val="0"/>
-              </a:spcBef>
-              <a:buNone/>
-              <a:defRPr sz="700">
-                <a:solidFill>
-                  <a:schemeClr val="dk1"/>
-                </a:solidFill>
-                <a:latin typeface="Arial"/>
-                <a:ea typeface="Arial"/>
-                <a:cs typeface="Arial"/>
-                <a:sym typeface="Arial"/>
-              </a:defRPr>
-            </a:lvl9pPr>
-          </a:lstStyle>
-          <a:p>
-            <a:pPr algn="ctr" indent="0" lvl="0" marL="0" rtl="0">
-              <a:spcBef>
-                <a:spcPts val="0"/>
-              </a:spcBef>
-              <a:spcAft>
-                <a:spcPts val="0"/>
-              </a:spcAft>
-              <a:buNone/>
-            </a:pPr>
-            <a:fld id="{00000000-1234-1234-1234-123412341234}" type="slidenum">
-              <a:rPr lang="en-US"/>
-              <a:t>‹#›</a:t>
-            </a:fld>
-            <a:endParaRPr/>
-          </a:p>
-        </p:txBody>
-      </p:sp>
-    </p:spTree>
-  </p:cSld>
-</p:sld>
-</file>
-
-<file path=ppt/slides/slide12.xml><?xml version="1.0" encoding="utf-8"?>
-<p:sld xmlns:a="http://schemas.openxmlformats.org/drawingml/2006/main" xmlns:r="http://schemas.openxmlformats.org/officeDocument/2006/relationships" xmlns:p="http://schemas.openxmlformats.org/presentationml/2006/main">
-  <p:cSld>
-    <p:spTree>
-      <p:nvGrpSpPr>
-        <p:cNvPr id="134" name="Shape 134"/>
-        <p:cNvGrpSpPr/>
-        <p:nvPr/>
-      </p:nvGrpSpPr>
-      <p:grpSpPr>
-        <a:xfrm>
-          <a:off x="0" y="0"/>
-          <a:ext cx="0" cy="0"/>
-          <a:chOff x="0" y="0"/>
-          <a:chExt cx="0" cy="0"/>
-        </a:xfrm>
-      </p:grpSpPr>
-      <p:sp>
-        <p:nvSpPr>
-          <p:cNvPr id="143" name="Google Shape;143;p23"/>
-          <p:cNvSpPr txBox="1"/>
-          <p:nvPr>
-            <p:ph idx="1"/>
-          </p:nvPr>
-        </p:nvSpPr>
-        <p:spPr/>
-        <p:txBody>
-          <a:bodyPr/>
-          <a:lstStyle/>
-          <a:p>
-            <a:pPr lvl="0" indent="0" marL="0">
-              <a:buNone/>
-            </a:pPr>
-            <a:r>
-              <a:rPr/>
-              <a:t>⇒ Không có cột </a:t>
-            </a:r>
-            <a:r>
-              <a:rPr>
-                <a:latin typeface="Courier"/>
-              </a:rPr>
-              <a:t>raw_ocr_text</a:t>
-            </a:r>
-            <a:r>
-              <a:rPr/>
-              <a:t> thì </a:t>
-            </a:r>
-            <a:r>
-              <a:rPr b="1"/>
-              <a:t>không đo được</a:t>
-            </a:r>
-            <a:r>
-              <a:rPr/>
-              <a:t> đóng góp của hậu xử lý. Đây là quyết định thiết kế từ Phase 0, không phải cột gỡ lỗi thừa</a:t>
-            </a:r>
-          </a:p>
-        </p:txBody>
-      </p:sp>
-      <p:sp>
-        <p:nvSpPr>
-          <p:cNvPr id="155" name="Google Shape;155;p23"/>
-          <p:cNvSpPr txBox="1"/>
-          <p:nvPr>
-            <p:ph idx="12" type="sldNum"/>
-          </p:nvPr>
-        </p:nvSpPr>
-        <p:spPr>
-          <a:xfrm>
-            <a:off x="58380" y="6508358"/>
-            <a:ext cx="349642" cy="349642"/>
-          </a:xfrm>
-          <a:prstGeom prst="rect">
-            <a:avLst/>
-          </a:prstGeom>
-          <a:noFill/>
-          <a:ln>
-            <a:noFill/>
-          </a:ln>
-        </p:spPr>
-        <p:txBody>
-          <a:bodyPr anchor="ctr" anchorCtr="0" bIns="45700" lIns="91425" rIns="91425" spcFirstLastPara="1" tIns="45700" wrap="square">
-            <a:noAutofit/>
-          </a:bodyPr>
-          <a:lstStyle>
-            <a:lvl1pPr algn="ctr" indent="0" lvl="0" marL="0">
-              <a:spcBef>
-                <a:spcPts val="0"/>
-              </a:spcBef>
-              <a:buNone/>
-              <a:defRPr sz="700">
-                <a:solidFill>
-                  <a:schemeClr val="dk1"/>
-                </a:solidFill>
-                <a:latin typeface="Arial"/>
-                <a:ea typeface="Arial"/>
-                <a:cs typeface="Arial"/>
-                <a:sym typeface="Arial"/>
-              </a:defRPr>
-            </a:lvl1pPr>
-            <a:lvl2pPr algn="ctr" indent="0" lvl="1" marL="0">
-              <a:spcBef>
-                <a:spcPts val="0"/>
-              </a:spcBef>
-              <a:buNone/>
-              <a:defRPr sz="700">
-                <a:solidFill>
-                  <a:schemeClr val="dk1"/>
-                </a:solidFill>
-                <a:latin typeface="Arial"/>
-                <a:ea typeface="Arial"/>
-                <a:cs typeface="Arial"/>
-                <a:sym typeface="Arial"/>
-              </a:defRPr>
-            </a:lvl2pPr>
-            <a:lvl3pPr algn="ctr" indent="0" lvl="2" marL="0">
-              <a:spcBef>
-                <a:spcPts val="0"/>
-              </a:spcBef>
-              <a:buNone/>
-              <a:defRPr sz="700">
-                <a:solidFill>
-                  <a:schemeClr val="dk1"/>
-                </a:solidFill>
-                <a:latin typeface="Arial"/>
-                <a:ea typeface="Arial"/>
-                <a:cs typeface="Arial"/>
-                <a:sym typeface="Arial"/>
-              </a:defRPr>
-            </a:lvl3pPr>
-            <a:lvl4pPr algn="ctr" indent="0" lvl="3" marL="0">
-              <a:spcBef>
-                <a:spcPts val="0"/>
-              </a:spcBef>
-              <a:buNone/>
-              <a:defRPr sz="700">
-                <a:solidFill>
-                  <a:schemeClr val="dk1"/>
-                </a:solidFill>
-                <a:latin typeface="Arial"/>
-                <a:ea typeface="Arial"/>
-                <a:cs typeface="Arial"/>
-                <a:sym typeface="Arial"/>
-              </a:defRPr>
-            </a:lvl4pPr>
-            <a:lvl5pPr algn="ctr" indent="0" lvl="4" marL="0">
-              <a:spcBef>
-                <a:spcPts val="0"/>
-              </a:spcBef>
-              <a:buNone/>
-              <a:defRPr sz="700">
-                <a:solidFill>
-                  <a:schemeClr val="dk1"/>
-                </a:solidFill>
-                <a:latin typeface="Arial"/>
-                <a:ea typeface="Arial"/>
-                <a:cs typeface="Arial"/>
-                <a:sym typeface="Arial"/>
-              </a:defRPr>
-            </a:lvl5pPr>
-            <a:lvl6pPr algn="ctr" indent="0" lvl="5" marL="0">
-              <a:spcBef>
-                <a:spcPts val="0"/>
-              </a:spcBef>
-              <a:buNone/>
-              <a:defRPr sz="700">
-                <a:solidFill>
-                  <a:schemeClr val="dk1"/>
-                </a:solidFill>
-                <a:latin typeface="Arial"/>
-                <a:ea typeface="Arial"/>
-                <a:cs typeface="Arial"/>
-                <a:sym typeface="Arial"/>
-              </a:defRPr>
-            </a:lvl6pPr>
-            <a:lvl7pPr algn="ctr" indent="0" lvl="6" marL="0">
-              <a:spcBef>
-                <a:spcPts val="0"/>
-              </a:spcBef>
-              <a:buNone/>
-              <a:defRPr sz="700">
-                <a:solidFill>
-                  <a:schemeClr val="dk1"/>
-                </a:solidFill>
-                <a:latin typeface="Arial"/>
-                <a:ea typeface="Arial"/>
-                <a:cs typeface="Arial"/>
-                <a:sym typeface="Arial"/>
-              </a:defRPr>
-            </a:lvl7pPr>
-            <a:lvl8pPr algn="ctr" indent="0" lvl="7" marL="0">
-              <a:spcBef>
-                <a:spcPts val="0"/>
-              </a:spcBef>
-              <a:buNone/>
-              <a:defRPr sz="700">
-                <a:solidFill>
-                  <a:schemeClr val="dk1"/>
-                </a:solidFill>
-                <a:latin typeface="Arial"/>
-                <a:ea typeface="Arial"/>
-                <a:cs typeface="Arial"/>
-                <a:sym typeface="Arial"/>
-              </a:defRPr>
-            </a:lvl8pPr>
-            <a:lvl9pPr algn="ctr" indent="0" lvl="8" marL="0">
-              <a:spcBef>
-                <a:spcPts val="0"/>
-              </a:spcBef>
-              <a:buNone/>
-              <a:defRPr sz="700">
-                <a:solidFill>
-                  <a:schemeClr val="dk1"/>
-                </a:solidFill>
-                <a:latin typeface="Arial"/>
-                <a:ea typeface="Arial"/>
-                <a:cs typeface="Arial"/>
-                <a:sym typeface="Arial"/>
-              </a:defRPr>
-            </a:lvl9pPr>
-          </a:lstStyle>
-          <a:p>
-            <a:pPr algn="ctr" indent="0" lvl="0" marL="0" rtl="0">
-              <a:spcBef>
-                <a:spcPts val="0"/>
-              </a:spcBef>
-              <a:spcAft>
-                <a:spcPts val="0"/>
-              </a:spcAft>
-              <a:buNone/>
-            </a:pPr>
-            <a:fld id="{00000000-1234-1234-1234-123412341234}" type="slidenum">
-              <a:rPr lang="en-US"/>
-              <a:t>‹#›</a:t>
-            </a:fld>
-            <a:endParaRPr/>
-          </a:p>
-        </p:txBody>
-      </p:sp>
-    </p:spTree>
-  </p:cSld>
-</p:sld>
-</file>
-
-<file path=ppt/slides/slide13.xml><?xml version="1.0" encoding="utf-8"?>
-<p:sld xmlns:a="http://schemas.openxmlformats.org/drawingml/2006/main" xmlns:r="http://schemas.openxmlformats.org/officeDocument/2006/relationships" xmlns:p="http://schemas.openxmlformats.org/presentationml/2006/main">
-  <p:cSld>
-    <p:spTree>
-      <p:nvGrpSpPr>
         <p:cNvPr id="134" name="Shape 134"/>
         <p:cNvGrpSpPr/>
         <p:nvPr/>
@@ -45471,244 +44261,7 @@
 </p:sld>
 </file>
 
-<file path=ppt/slides/slide14.xml><?xml version="1.0" encoding="utf-8"?>
-<p:sld xmlns:a="http://schemas.openxmlformats.org/drawingml/2006/main" xmlns:r="http://schemas.openxmlformats.org/officeDocument/2006/relationships" xmlns:p="http://schemas.openxmlformats.org/presentationml/2006/main">
-  <p:cSld>
-    <p:spTree>
-      <p:nvGrpSpPr>
-        <p:cNvPr id="318" name="Shape 318"/>
-        <p:cNvGrpSpPr/>
-        <p:nvPr/>
-      </p:nvGrpSpPr>
-      <p:grpSpPr>
-        <a:xfrm>
-          <a:off x="0" y="0"/>
-          <a:ext cx="0" cy="0"/>
-          <a:chOff x="0" y="0"/>
-          <a:chExt cx="0" cy="0"/>
-        </a:xfrm>
-      </p:grpSpPr>
-      <p:sp>
-        <p:nvSpPr>
-          <p:cNvPr id="332" name="Google Shape;332;p28"/>
-          <p:cNvSpPr txBox="1"/>
-          <p:nvPr>
-            <p:ph type="title"/>
-          </p:nvPr>
-        </p:nvSpPr>
-        <p:spPr>
-          <a:xfrm>
-            <a:off x="1470929" y="2095027"/>
-            <a:ext cx="9941071" cy="884656"/>
-          </a:xfrm>
-          <a:prstGeom prst="rect">
-            <a:avLst/>
-          </a:prstGeom>
-          <a:noFill/>
-          <a:ln>
-            <a:noFill/>
-          </a:ln>
-        </p:spPr>
-        <p:txBody>
-          <a:bodyPr/>
-          <a:lstStyle/>
-          <a:p>
-            <a:pPr lvl="0" indent="0" marL="0">
-              <a:buNone/>
-            </a:pPr>
-            <a:r>
-              <a:rPr/>
-              <a:t>Dữ liệu và huấn luyện</a:t>
-            </a:r>
-          </a:p>
-        </p:txBody>
-      </p:sp>
-      <p:sp>
-        <p:nvSpPr>
-          <p:cNvPr id="347" name="Google Shape;347;p28"/>
-          <p:cNvSpPr txBox="1"/>
-          <p:nvPr>
-            <p:ph idx="12" type="sldNum"/>
-          </p:nvPr>
-        </p:nvSpPr>
-        <p:spPr>
-          <a:xfrm>
-            <a:off x="65862" y="6542216"/>
-            <a:ext cx="292608" cy="315784"/>
-          </a:xfrm>
-          <a:prstGeom prst="rect">
-            <a:avLst/>
-          </a:prstGeom>
-          <a:noFill/>
-          <a:ln>
-            <a:noFill/>
-          </a:ln>
-        </p:spPr>
-        <p:txBody>
-          <a:bodyPr anchor="ctr" anchorCtr="0" bIns="45700" lIns="91425" rIns="91425" spcFirstLastPara="1" tIns="45700" wrap="square">
-            <a:noAutofit/>
-          </a:bodyPr>
-          <a:lstStyle>
-            <a:lvl1pPr algn="ctr" indent="0" lvl="0" marL="0">
-              <a:spcBef>
-                <a:spcPts val="0"/>
-              </a:spcBef>
-              <a:buNone/>
-              <a:defRPr sz="700">
-                <a:solidFill>
-                  <a:schemeClr val="dk1"/>
-                </a:solidFill>
-                <a:latin typeface="Arial"/>
-                <a:ea typeface="Arial"/>
-                <a:cs typeface="Arial"/>
-                <a:sym typeface="Arial"/>
-              </a:defRPr>
-            </a:lvl1pPr>
-            <a:lvl2pPr algn="ctr" indent="0" lvl="1" marL="0">
-              <a:spcBef>
-                <a:spcPts val="0"/>
-              </a:spcBef>
-              <a:buNone/>
-              <a:defRPr sz="700">
-                <a:solidFill>
-                  <a:schemeClr val="dk1"/>
-                </a:solidFill>
-                <a:latin typeface="Arial"/>
-                <a:ea typeface="Arial"/>
-                <a:cs typeface="Arial"/>
-                <a:sym typeface="Arial"/>
-              </a:defRPr>
-            </a:lvl2pPr>
-            <a:lvl3pPr algn="ctr" indent="0" lvl="2" marL="0">
-              <a:spcBef>
-                <a:spcPts val="0"/>
-              </a:spcBef>
-              <a:buNone/>
-              <a:defRPr sz="700">
-                <a:solidFill>
-                  <a:schemeClr val="dk1"/>
-                </a:solidFill>
-                <a:latin typeface="Arial"/>
-                <a:ea typeface="Arial"/>
-                <a:cs typeface="Arial"/>
-                <a:sym typeface="Arial"/>
-              </a:defRPr>
-            </a:lvl3pPr>
-            <a:lvl4pPr algn="ctr" indent="0" lvl="3" marL="0">
-              <a:spcBef>
-                <a:spcPts val="0"/>
-              </a:spcBef>
-              <a:buNone/>
-              <a:defRPr sz="700">
-                <a:solidFill>
-                  <a:schemeClr val="dk1"/>
-                </a:solidFill>
-                <a:latin typeface="Arial"/>
-                <a:ea typeface="Arial"/>
-                <a:cs typeface="Arial"/>
-                <a:sym typeface="Arial"/>
-              </a:defRPr>
-            </a:lvl4pPr>
-            <a:lvl5pPr algn="ctr" indent="0" lvl="4" marL="0">
-              <a:spcBef>
-                <a:spcPts val="0"/>
-              </a:spcBef>
-              <a:buNone/>
-              <a:defRPr sz="700">
-                <a:solidFill>
-                  <a:schemeClr val="dk1"/>
-                </a:solidFill>
-                <a:latin typeface="Arial"/>
-                <a:ea typeface="Arial"/>
-                <a:cs typeface="Arial"/>
-                <a:sym typeface="Arial"/>
-              </a:defRPr>
-            </a:lvl5pPr>
-            <a:lvl6pPr algn="ctr" indent="0" lvl="5" marL="0">
-              <a:spcBef>
-                <a:spcPts val="0"/>
-              </a:spcBef>
-              <a:buNone/>
-              <a:defRPr sz="700">
-                <a:solidFill>
-                  <a:schemeClr val="dk1"/>
-                </a:solidFill>
-                <a:latin typeface="Arial"/>
-                <a:ea typeface="Arial"/>
-                <a:cs typeface="Arial"/>
-                <a:sym typeface="Arial"/>
-              </a:defRPr>
-            </a:lvl6pPr>
-            <a:lvl7pPr algn="ctr" indent="0" lvl="6" marL="0">
-              <a:spcBef>
-                <a:spcPts val="0"/>
-              </a:spcBef>
-              <a:buNone/>
-              <a:defRPr sz="700">
-                <a:solidFill>
-                  <a:schemeClr val="dk1"/>
-                </a:solidFill>
-                <a:latin typeface="Arial"/>
-                <a:ea typeface="Arial"/>
-                <a:cs typeface="Arial"/>
-                <a:sym typeface="Arial"/>
-              </a:defRPr>
-            </a:lvl7pPr>
-            <a:lvl8pPr algn="ctr" indent="0" lvl="7" marL="0">
-              <a:spcBef>
-                <a:spcPts val="0"/>
-              </a:spcBef>
-              <a:buNone/>
-              <a:defRPr sz="700">
-                <a:solidFill>
-                  <a:schemeClr val="dk1"/>
-                </a:solidFill>
-                <a:latin typeface="Arial"/>
-                <a:ea typeface="Arial"/>
-                <a:cs typeface="Arial"/>
-                <a:sym typeface="Arial"/>
-              </a:defRPr>
-            </a:lvl8pPr>
-            <a:lvl9pPr algn="ctr" indent="0" lvl="8" marL="0">
-              <a:spcBef>
-                <a:spcPts val="0"/>
-              </a:spcBef>
-              <a:buNone/>
-              <a:defRPr sz="700">
-                <a:solidFill>
-                  <a:schemeClr val="dk1"/>
-                </a:solidFill>
-                <a:latin typeface="Arial"/>
-                <a:ea typeface="Arial"/>
-                <a:cs typeface="Arial"/>
-                <a:sym typeface="Arial"/>
-              </a:defRPr>
-            </a:lvl9pPr>
-          </a:lstStyle>
-          <a:p>
-            <a:pPr algn="ctr" indent="0" lvl="0" marL="0" rtl="0">
-              <a:spcBef>
-                <a:spcPts val="0"/>
-              </a:spcBef>
-              <a:spcAft>
-                <a:spcPts val="0"/>
-              </a:spcAft>
-              <a:buNone/>
-            </a:pPr>
-            <a:fld id="{00000000-1234-1234-1234-123412341234}" type="slidenum">
-              <a:rPr lang="en-US"/>
-              <a:t>‹#›</a:t>
-            </a:fld>
-            <a:endParaRPr/>
-          </a:p>
-        </p:txBody>
-      </p:sp>
-    </p:spTree>
-  </p:cSld>
-</p:sld>
-</file>
-
-<file path=ppt/slides/slide15.xml><?xml version="1.0" encoding="utf-8"?>
+<file path=ppt/slides/slide11.xml><?xml version="1.0" encoding="utf-8"?>
 <p:sld xmlns:a="http://schemas.openxmlformats.org/drawingml/2006/main" xmlns:r="http://schemas.openxmlformats.org/officeDocument/2006/relationships" xmlns:p="http://schemas.openxmlformats.org/presentationml/2006/main">
   <p:cSld>
     <p:spTree>
@@ -46039,7 +44592,7 @@
 </p:sld>
 </file>
 
-<file path=ppt/slides/slide16.xml><?xml version="1.0" encoding="utf-8"?>
+<file path=ppt/slides/slide12.xml><?xml version="1.0" encoding="utf-8"?>
 <p:sld xmlns:a="http://schemas.openxmlformats.org/drawingml/2006/main" xmlns:r="http://schemas.openxmlformats.org/officeDocument/2006/relationships" xmlns:p="http://schemas.openxmlformats.org/presentationml/2006/main">
   <p:cSld>
     <p:spTree>
@@ -46371,7 +44924,7 @@
 </p:sld>
 </file>
 
-<file path=ppt/slides/slide17.xml><?xml version="1.0" encoding="utf-8"?>
+<file path=ppt/slides/slide13.xml><?xml version="1.0" encoding="utf-8"?>
 <p:sld xmlns:a="http://schemas.openxmlformats.org/drawingml/2006/main" xmlns:r="http://schemas.openxmlformats.org/officeDocument/2006/relationships" xmlns:p="http://schemas.openxmlformats.org/presentationml/2006/main">
   <p:cSld>
     <p:spTree>
@@ -47127,244 +45680,7 @@
 </p:sld>
 </file>
 
-<file path=ppt/slides/slide18.xml><?xml version="1.0" encoding="utf-8"?>
-<p:sld xmlns:a="http://schemas.openxmlformats.org/drawingml/2006/main" xmlns:r="http://schemas.openxmlformats.org/officeDocument/2006/relationships" xmlns:p="http://schemas.openxmlformats.org/presentationml/2006/main">
-  <p:cSld>
-    <p:spTree>
-      <p:nvGrpSpPr>
-        <p:cNvPr id="318" name="Shape 318"/>
-        <p:cNvGrpSpPr/>
-        <p:nvPr/>
-      </p:nvGrpSpPr>
-      <p:grpSpPr>
-        <a:xfrm>
-          <a:off x="0" y="0"/>
-          <a:ext cx="0" cy="0"/>
-          <a:chOff x="0" y="0"/>
-          <a:chExt cx="0" cy="0"/>
-        </a:xfrm>
-      </p:grpSpPr>
-      <p:sp>
-        <p:nvSpPr>
-          <p:cNvPr id="332" name="Google Shape;332;p28"/>
-          <p:cNvSpPr txBox="1"/>
-          <p:nvPr>
-            <p:ph type="title"/>
-          </p:nvPr>
-        </p:nvSpPr>
-        <p:spPr>
-          <a:xfrm>
-            <a:off x="1470929" y="2095027"/>
-            <a:ext cx="9941071" cy="884656"/>
-          </a:xfrm>
-          <a:prstGeom prst="rect">
-            <a:avLst/>
-          </a:prstGeom>
-          <a:noFill/>
-          <a:ln>
-            <a:noFill/>
-          </a:ln>
-        </p:spPr>
-        <p:txBody>
-          <a:bodyPr/>
-          <a:lstStyle/>
-          <a:p>
-            <a:pPr lvl="0" indent="0" marL="0">
-              <a:buNone/>
-            </a:pPr>
-            <a:r>
-              <a:rPr/>
-              <a:t>Đóng góp kỹ thuật</a:t>
-            </a:r>
-          </a:p>
-        </p:txBody>
-      </p:sp>
-      <p:sp>
-        <p:nvSpPr>
-          <p:cNvPr id="347" name="Google Shape;347;p28"/>
-          <p:cNvSpPr txBox="1"/>
-          <p:nvPr>
-            <p:ph idx="12" type="sldNum"/>
-          </p:nvPr>
-        </p:nvSpPr>
-        <p:spPr>
-          <a:xfrm>
-            <a:off x="65862" y="6542216"/>
-            <a:ext cx="292608" cy="315784"/>
-          </a:xfrm>
-          <a:prstGeom prst="rect">
-            <a:avLst/>
-          </a:prstGeom>
-          <a:noFill/>
-          <a:ln>
-            <a:noFill/>
-          </a:ln>
-        </p:spPr>
-        <p:txBody>
-          <a:bodyPr anchor="ctr" anchorCtr="0" bIns="45700" lIns="91425" rIns="91425" spcFirstLastPara="1" tIns="45700" wrap="square">
-            <a:noAutofit/>
-          </a:bodyPr>
-          <a:lstStyle>
-            <a:lvl1pPr algn="ctr" indent="0" lvl="0" marL="0">
-              <a:spcBef>
-                <a:spcPts val="0"/>
-              </a:spcBef>
-              <a:buNone/>
-              <a:defRPr sz="700">
-                <a:solidFill>
-                  <a:schemeClr val="dk1"/>
-                </a:solidFill>
-                <a:latin typeface="Arial"/>
-                <a:ea typeface="Arial"/>
-                <a:cs typeface="Arial"/>
-                <a:sym typeface="Arial"/>
-              </a:defRPr>
-            </a:lvl1pPr>
-            <a:lvl2pPr algn="ctr" indent="0" lvl="1" marL="0">
-              <a:spcBef>
-                <a:spcPts val="0"/>
-              </a:spcBef>
-              <a:buNone/>
-              <a:defRPr sz="700">
-                <a:solidFill>
-                  <a:schemeClr val="dk1"/>
-                </a:solidFill>
-                <a:latin typeface="Arial"/>
-                <a:ea typeface="Arial"/>
-                <a:cs typeface="Arial"/>
-                <a:sym typeface="Arial"/>
-              </a:defRPr>
-            </a:lvl2pPr>
-            <a:lvl3pPr algn="ctr" indent="0" lvl="2" marL="0">
-              <a:spcBef>
-                <a:spcPts val="0"/>
-              </a:spcBef>
-              <a:buNone/>
-              <a:defRPr sz="700">
-                <a:solidFill>
-                  <a:schemeClr val="dk1"/>
-                </a:solidFill>
-                <a:latin typeface="Arial"/>
-                <a:ea typeface="Arial"/>
-                <a:cs typeface="Arial"/>
-                <a:sym typeface="Arial"/>
-              </a:defRPr>
-            </a:lvl3pPr>
-            <a:lvl4pPr algn="ctr" indent="0" lvl="3" marL="0">
-              <a:spcBef>
-                <a:spcPts val="0"/>
-              </a:spcBef>
-              <a:buNone/>
-              <a:defRPr sz="700">
-                <a:solidFill>
-                  <a:schemeClr val="dk1"/>
-                </a:solidFill>
-                <a:latin typeface="Arial"/>
-                <a:ea typeface="Arial"/>
-                <a:cs typeface="Arial"/>
-                <a:sym typeface="Arial"/>
-              </a:defRPr>
-            </a:lvl4pPr>
-            <a:lvl5pPr algn="ctr" indent="0" lvl="4" marL="0">
-              <a:spcBef>
-                <a:spcPts val="0"/>
-              </a:spcBef>
-              <a:buNone/>
-              <a:defRPr sz="700">
-                <a:solidFill>
-                  <a:schemeClr val="dk1"/>
-                </a:solidFill>
-                <a:latin typeface="Arial"/>
-                <a:ea typeface="Arial"/>
-                <a:cs typeface="Arial"/>
-                <a:sym typeface="Arial"/>
-              </a:defRPr>
-            </a:lvl5pPr>
-            <a:lvl6pPr algn="ctr" indent="0" lvl="5" marL="0">
-              <a:spcBef>
-                <a:spcPts val="0"/>
-              </a:spcBef>
-              <a:buNone/>
-              <a:defRPr sz="700">
-                <a:solidFill>
-                  <a:schemeClr val="dk1"/>
-                </a:solidFill>
-                <a:latin typeface="Arial"/>
-                <a:ea typeface="Arial"/>
-                <a:cs typeface="Arial"/>
-                <a:sym typeface="Arial"/>
-              </a:defRPr>
-            </a:lvl6pPr>
-            <a:lvl7pPr algn="ctr" indent="0" lvl="6" marL="0">
-              <a:spcBef>
-                <a:spcPts val="0"/>
-              </a:spcBef>
-              <a:buNone/>
-              <a:defRPr sz="700">
-                <a:solidFill>
-                  <a:schemeClr val="dk1"/>
-                </a:solidFill>
-                <a:latin typeface="Arial"/>
-                <a:ea typeface="Arial"/>
-                <a:cs typeface="Arial"/>
-                <a:sym typeface="Arial"/>
-              </a:defRPr>
-            </a:lvl7pPr>
-            <a:lvl8pPr algn="ctr" indent="0" lvl="7" marL="0">
-              <a:spcBef>
-                <a:spcPts val="0"/>
-              </a:spcBef>
-              <a:buNone/>
-              <a:defRPr sz="700">
-                <a:solidFill>
-                  <a:schemeClr val="dk1"/>
-                </a:solidFill>
-                <a:latin typeface="Arial"/>
-                <a:ea typeface="Arial"/>
-                <a:cs typeface="Arial"/>
-                <a:sym typeface="Arial"/>
-              </a:defRPr>
-            </a:lvl8pPr>
-            <a:lvl9pPr algn="ctr" indent="0" lvl="8" marL="0">
-              <a:spcBef>
-                <a:spcPts val="0"/>
-              </a:spcBef>
-              <a:buNone/>
-              <a:defRPr sz="700">
-                <a:solidFill>
-                  <a:schemeClr val="dk1"/>
-                </a:solidFill>
-                <a:latin typeface="Arial"/>
-                <a:ea typeface="Arial"/>
-                <a:cs typeface="Arial"/>
-                <a:sym typeface="Arial"/>
-              </a:defRPr>
-            </a:lvl9pPr>
-          </a:lstStyle>
-          <a:p>
-            <a:pPr algn="ctr" indent="0" lvl="0" marL="0" rtl="0">
-              <a:spcBef>
-                <a:spcPts val="0"/>
-              </a:spcBef>
-              <a:spcAft>
-                <a:spcPts val="0"/>
-              </a:spcAft>
-              <a:buNone/>
-            </a:pPr>
-            <a:fld id="{00000000-1234-1234-1234-123412341234}" type="slidenum">
-              <a:rPr lang="en-US"/>
-              <a:t>‹#›</a:t>
-            </a:fld>
-            <a:endParaRPr/>
-          </a:p>
-        </p:txBody>
-      </p:sp>
-    </p:spTree>
-  </p:cSld>
-</p:sld>
-</file>
-
-<file path=ppt/slides/slide19.xml><?xml version="1.0" encoding="utf-8"?>
+<file path=ppt/slides/slide14.xml><?xml version="1.0" encoding="utf-8"?>
 <p:sld xmlns:a="http://schemas.openxmlformats.org/drawingml/2006/main" xmlns:r="http://schemas.openxmlformats.org/officeDocument/2006/relationships" xmlns:p="http://schemas.openxmlformats.org/presentationml/2006/main">
   <p:cSld>
     <p:spTree>
@@ -47678,244 +45994,7 @@
 </p:sld>
 </file>
 
-<file path=ppt/slides/slide2.xml><?xml version="1.0" encoding="utf-8"?>
-<p:sld xmlns:a="http://schemas.openxmlformats.org/drawingml/2006/main" xmlns:r="http://schemas.openxmlformats.org/officeDocument/2006/relationships" xmlns:p="http://schemas.openxmlformats.org/presentationml/2006/main">
-  <p:cSld>
-    <p:spTree>
-      <p:nvGrpSpPr>
-        <p:cNvPr id="318" name="Shape 318"/>
-        <p:cNvGrpSpPr/>
-        <p:nvPr/>
-      </p:nvGrpSpPr>
-      <p:grpSpPr>
-        <a:xfrm>
-          <a:off x="0" y="0"/>
-          <a:ext cx="0" cy="0"/>
-          <a:chOff x="0" y="0"/>
-          <a:chExt cx="0" cy="0"/>
-        </a:xfrm>
-      </p:grpSpPr>
-      <p:sp>
-        <p:nvSpPr>
-          <p:cNvPr id="332" name="Google Shape;332;p28"/>
-          <p:cNvSpPr txBox="1"/>
-          <p:nvPr>
-            <p:ph type="title"/>
-          </p:nvPr>
-        </p:nvSpPr>
-        <p:spPr>
-          <a:xfrm>
-            <a:off x="1470929" y="2095027"/>
-            <a:ext cx="9941071" cy="884656"/>
-          </a:xfrm>
-          <a:prstGeom prst="rect">
-            <a:avLst/>
-          </a:prstGeom>
-          <a:noFill/>
-          <a:ln>
-            <a:noFill/>
-          </a:ln>
-        </p:spPr>
-        <p:txBody>
-          <a:bodyPr/>
-          <a:lstStyle/>
-          <a:p>
-            <a:pPr lvl="0" indent="0" marL="0">
-              <a:buNone/>
-            </a:pPr>
-            <a:r>
-              <a:rPr/>
-              <a:t>Mở đầu</a:t>
-            </a:r>
-          </a:p>
-        </p:txBody>
-      </p:sp>
-      <p:sp>
-        <p:nvSpPr>
-          <p:cNvPr id="347" name="Google Shape;347;p28"/>
-          <p:cNvSpPr txBox="1"/>
-          <p:nvPr>
-            <p:ph idx="12" type="sldNum"/>
-          </p:nvPr>
-        </p:nvSpPr>
-        <p:spPr>
-          <a:xfrm>
-            <a:off x="65862" y="6542216"/>
-            <a:ext cx="292608" cy="315784"/>
-          </a:xfrm>
-          <a:prstGeom prst="rect">
-            <a:avLst/>
-          </a:prstGeom>
-          <a:noFill/>
-          <a:ln>
-            <a:noFill/>
-          </a:ln>
-        </p:spPr>
-        <p:txBody>
-          <a:bodyPr anchor="ctr" anchorCtr="0" bIns="45700" lIns="91425" rIns="91425" spcFirstLastPara="1" tIns="45700" wrap="square">
-            <a:noAutofit/>
-          </a:bodyPr>
-          <a:lstStyle>
-            <a:lvl1pPr algn="ctr" indent="0" lvl="0" marL="0">
-              <a:spcBef>
-                <a:spcPts val="0"/>
-              </a:spcBef>
-              <a:buNone/>
-              <a:defRPr sz="700">
-                <a:solidFill>
-                  <a:schemeClr val="dk1"/>
-                </a:solidFill>
-                <a:latin typeface="Arial"/>
-                <a:ea typeface="Arial"/>
-                <a:cs typeface="Arial"/>
-                <a:sym typeface="Arial"/>
-              </a:defRPr>
-            </a:lvl1pPr>
-            <a:lvl2pPr algn="ctr" indent="0" lvl="1" marL="0">
-              <a:spcBef>
-                <a:spcPts val="0"/>
-              </a:spcBef>
-              <a:buNone/>
-              <a:defRPr sz="700">
-                <a:solidFill>
-                  <a:schemeClr val="dk1"/>
-                </a:solidFill>
-                <a:latin typeface="Arial"/>
-                <a:ea typeface="Arial"/>
-                <a:cs typeface="Arial"/>
-                <a:sym typeface="Arial"/>
-              </a:defRPr>
-            </a:lvl2pPr>
-            <a:lvl3pPr algn="ctr" indent="0" lvl="2" marL="0">
-              <a:spcBef>
-                <a:spcPts val="0"/>
-              </a:spcBef>
-              <a:buNone/>
-              <a:defRPr sz="700">
-                <a:solidFill>
-                  <a:schemeClr val="dk1"/>
-                </a:solidFill>
-                <a:latin typeface="Arial"/>
-                <a:ea typeface="Arial"/>
-                <a:cs typeface="Arial"/>
-                <a:sym typeface="Arial"/>
-              </a:defRPr>
-            </a:lvl3pPr>
-            <a:lvl4pPr algn="ctr" indent="0" lvl="3" marL="0">
-              <a:spcBef>
-                <a:spcPts val="0"/>
-              </a:spcBef>
-              <a:buNone/>
-              <a:defRPr sz="700">
-                <a:solidFill>
-                  <a:schemeClr val="dk1"/>
-                </a:solidFill>
-                <a:latin typeface="Arial"/>
-                <a:ea typeface="Arial"/>
-                <a:cs typeface="Arial"/>
-                <a:sym typeface="Arial"/>
-              </a:defRPr>
-            </a:lvl4pPr>
-            <a:lvl5pPr algn="ctr" indent="0" lvl="4" marL="0">
-              <a:spcBef>
-                <a:spcPts val="0"/>
-              </a:spcBef>
-              <a:buNone/>
-              <a:defRPr sz="700">
-                <a:solidFill>
-                  <a:schemeClr val="dk1"/>
-                </a:solidFill>
-                <a:latin typeface="Arial"/>
-                <a:ea typeface="Arial"/>
-                <a:cs typeface="Arial"/>
-                <a:sym typeface="Arial"/>
-              </a:defRPr>
-            </a:lvl5pPr>
-            <a:lvl6pPr algn="ctr" indent="0" lvl="5" marL="0">
-              <a:spcBef>
-                <a:spcPts val="0"/>
-              </a:spcBef>
-              <a:buNone/>
-              <a:defRPr sz="700">
-                <a:solidFill>
-                  <a:schemeClr val="dk1"/>
-                </a:solidFill>
-                <a:latin typeface="Arial"/>
-                <a:ea typeface="Arial"/>
-                <a:cs typeface="Arial"/>
-                <a:sym typeface="Arial"/>
-              </a:defRPr>
-            </a:lvl6pPr>
-            <a:lvl7pPr algn="ctr" indent="0" lvl="6" marL="0">
-              <a:spcBef>
-                <a:spcPts val="0"/>
-              </a:spcBef>
-              <a:buNone/>
-              <a:defRPr sz="700">
-                <a:solidFill>
-                  <a:schemeClr val="dk1"/>
-                </a:solidFill>
-                <a:latin typeface="Arial"/>
-                <a:ea typeface="Arial"/>
-                <a:cs typeface="Arial"/>
-                <a:sym typeface="Arial"/>
-              </a:defRPr>
-            </a:lvl7pPr>
-            <a:lvl8pPr algn="ctr" indent="0" lvl="7" marL="0">
-              <a:spcBef>
-                <a:spcPts val="0"/>
-              </a:spcBef>
-              <a:buNone/>
-              <a:defRPr sz="700">
-                <a:solidFill>
-                  <a:schemeClr val="dk1"/>
-                </a:solidFill>
-                <a:latin typeface="Arial"/>
-                <a:ea typeface="Arial"/>
-                <a:cs typeface="Arial"/>
-                <a:sym typeface="Arial"/>
-              </a:defRPr>
-            </a:lvl8pPr>
-            <a:lvl9pPr algn="ctr" indent="0" lvl="8" marL="0">
-              <a:spcBef>
-                <a:spcPts val="0"/>
-              </a:spcBef>
-              <a:buNone/>
-              <a:defRPr sz="700">
-                <a:solidFill>
-                  <a:schemeClr val="dk1"/>
-                </a:solidFill>
-                <a:latin typeface="Arial"/>
-                <a:ea typeface="Arial"/>
-                <a:cs typeface="Arial"/>
-                <a:sym typeface="Arial"/>
-              </a:defRPr>
-            </a:lvl9pPr>
-          </a:lstStyle>
-          <a:p>
-            <a:pPr algn="ctr" indent="0" lvl="0" marL="0" rtl="0">
-              <a:spcBef>
-                <a:spcPts val="0"/>
-              </a:spcBef>
-              <a:spcAft>
-                <a:spcPts val="0"/>
-              </a:spcAft>
-              <a:buNone/>
-            </a:pPr>
-            <a:fld id="{00000000-1234-1234-1234-123412341234}" type="slidenum">
-              <a:rPr lang="en-US"/>
-              <a:t>‹#›</a:t>
-            </a:fld>
-            <a:endParaRPr/>
-          </a:p>
-        </p:txBody>
-      </p:sp>
-    </p:spTree>
-  </p:cSld>
-</p:sld>
-</file>
-
-<file path=ppt/slides/slide20.xml><?xml version="1.0" encoding="utf-8"?>
+<file path=ppt/slides/slide15.xml><?xml version="1.0" encoding="utf-8"?>
 <p:sld xmlns:a="http://schemas.openxmlformats.org/drawingml/2006/main" xmlns:r="http://schemas.openxmlformats.org/officeDocument/2006/relationships" xmlns:p="http://schemas.openxmlformats.org/presentationml/2006/main">
   <p:cSld>
     <p:spTree>
@@ -48514,7 +46593,7 @@
 </p:sld>
 </file>
 
-<file path=ppt/slides/slide21.xml><?xml version="1.0" encoding="utf-8"?>
+<file path=ppt/slides/slide16.xml><?xml version="1.0" encoding="utf-8"?>
 <p:sld xmlns:a="http://schemas.openxmlformats.org/drawingml/2006/main" xmlns:r="http://schemas.openxmlformats.org/officeDocument/2006/relationships" xmlns:p="http://schemas.openxmlformats.org/presentationml/2006/main">
   <p:cSld>
     <p:spTree>
@@ -49128,7 +47207,7 @@
 </p:sld>
 </file>
 
-<file path=ppt/slides/slide22.xml><?xml version="1.0" encoding="utf-8"?>
+<file path=ppt/slides/slide17.xml><?xml version="1.0" encoding="utf-8"?>
 <p:sld xmlns:a="http://schemas.openxmlformats.org/drawingml/2006/main" xmlns:r="http://schemas.openxmlformats.org/officeDocument/2006/relationships" xmlns:p="http://schemas.openxmlformats.org/presentationml/2006/main">
   <p:cSld>
     <p:spTree>
@@ -49418,7 +47497,7 @@
 </p:sld>
 </file>
 
-<file path=ppt/slides/slide23.xml><?xml version="1.0" encoding="utf-8"?>
+<file path=ppt/slides/slide18.xml><?xml version="1.0" encoding="utf-8"?>
 <p:sld xmlns:a="http://schemas.openxmlformats.org/drawingml/2006/main" xmlns:r="http://schemas.openxmlformats.org/officeDocument/2006/relationships" xmlns:p="http://schemas.openxmlformats.org/presentationml/2006/main">
   <p:cSld>
     <p:spTree>
@@ -49913,7 +47992,7 @@
 </p:sld>
 </file>
 
-<file path=ppt/slides/slide24.xml><?xml version="1.0" encoding="utf-8"?>
+<file path=ppt/slides/slide19.xml><?xml version="1.0" encoding="utf-8"?>
 <p:sld xmlns:a="http://schemas.openxmlformats.org/drawingml/2006/main" xmlns:r="http://schemas.openxmlformats.org/officeDocument/2006/relationships" xmlns:p="http://schemas.openxmlformats.org/presentationml/2006/main">
   <p:cSld>
     <p:spTree>
@@ -50320,12 +48399,12 @@
 </p:sld>
 </file>
 
-<file path=ppt/slides/slide25.xml><?xml version="1.0" encoding="utf-8"?>
+<file path=ppt/slides/slide2.xml><?xml version="1.0" encoding="utf-8"?>
 <p:sld xmlns:a="http://schemas.openxmlformats.org/drawingml/2006/main" xmlns:r="http://schemas.openxmlformats.org/officeDocument/2006/relationships" xmlns:p="http://schemas.openxmlformats.org/presentationml/2006/main">
   <p:cSld>
     <p:spTree>
       <p:nvGrpSpPr>
-        <p:cNvPr id="318" name="Shape 318"/>
+        <p:cNvPr id="134" name="Shape 134"/>
         <p:cNvGrpSpPr/>
         <p:nvPr/>
       </p:nvGrpSpPr>
@@ -50339,7 +48418,7 @@
       </p:grpSpPr>
       <p:sp>
         <p:nvSpPr>
-          <p:cNvPr id="332" name="Google Shape;332;p28"/>
+          <p:cNvPr id="142" name="Google Shape;142;p23"/>
           <p:cNvSpPr txBox="1"/>
           <p:nvPr>
             <p:ph type="title"/>
@@ -50347,8 +48426,8 @@
         </p:nvSpPr>
         <p:spPr>
           <a:xfrm>
-            <a:off x="1470929" y="2095027"/>
-            <a:ext cx="9941071" cy="884656"/>
+            <a:off x="774145" y="223964"/>
+            <a:ext cx="10579655" cy="785896"/>
           </a:xfrm>
           <a:prstGeom prst="rect">
             <a:avLst/>
@@ -50367,14 +48446,73 @@
             </a:pPr>
             <a:r>
               <a:rPr/>
-              <a:t>Kết quả và hệ thống</a:t>
+              <a:t>NỘI DUNG</a:t>
             </a:r>
           </a:p>
         </p:txBody>
       </p:sp>
       <p:sp>
         <p:nvSpPr>
-          <p:cNvPr id="347" name="Google Shape;347;p28"/>
+          <p:cNvPr id="143" name="Google Shape;143;p23"/>
+          <p:cNvSpPr txBox="1"/>
+          <p:nvPr>
+            <p:ph idx="1"/>
+          </p:nvPr>
+        </p:nvSpPr>
+        <p:spPr/>
+        <p:txBody>
+          <a:bodyPr/>
+          <a:lstStyle/>
+          <a:p>
+            <a:pPr lvl="0" indent="0" marL="347663">
+              <a:buAutoNum type="arabicPeriod"/>
+            </a:pPr>
+            <a:r>
+              <a:rPr b="1"/>
+              <a:t>Tổng quan đề tài</a:t>
+            </a:r>
+          </a:p>
+          <a:p>
+            <a:pPr lvl="0" indent="0" marL="347663">
+              <a:buAutoNum type="arabicPeriod"/>
+            </a:pPr>
+            <a:r>
+              <a:rPr b="1"/>
+              <a:t>Cơ sở lý thuyết</a:t>
+            </a:r>
+          </a:p>
+          <a:p>
+            <a:pPr lvl="0" indent="0" marL="347663">
+              <a:buAutoNum type="arabicPeriod"/>
+            </a:pPr>
+            <a:r>
+              <a:rPr b="1"/>
+              <a:t>Phân tích và thiết kế hệ thống</a:t>
+            </a:r>
+          </a:p>
+          <a:p>
+            <a:pPr lvl="0" indent="0" marL="347663">
+              <a:buAutoNum type="arabicPeriod"/>
+            </a:pPr>
+            <a:r>
+              <a:rPr b="1"/>
+              <a:t>Kết quả thực nghiệm</a:t>
+            </a:r>
+          </a:p>
+          <a:p>
+            <a:pPr lvl="0" indent="0" marL="347663">
+              <a:buAutoNum type="arabicPeriod"/>
+            </a:pPr>
+            <a:r>
+              <a:rPr b="1"/>
+              <a:t>Kết luận và hướng phát triển</a:t>
+            </a:r>
+          </a:p>
+        </p:txBody>
+      </p:sp>
+      <p:sp>
+        <p:nvSpPr>
+          <p:cNvPr id="155" name="Google Shape;155;p23"/>
           <p:cNvSpPr txBox="1"/>
           <p:nvPr>
             <p:ph idx="12" type="sldNum"/>
@@ -50382,8 +48520,8 @@
         </p:nvSpPr>
         <p:spPr>
           <a:xfrm>
-            <a:off x="65862" y="6542216"/>
-            <a:ext cx="292608" cy="315784"/>
+            <a:off x="58380" y="6508358"/>
+            <a:ext cx="349642" cy="349642"/>
           </a:xfrm>
           <a:prstGeom prst="rect">
             <a:avLst/>
@@ -50557,7 +48695,7 @@
 </p:sld>
 </file>
 
-<file path=ppt/slides/slide26.xml><?xml version="1.0" encoding="utf-8"?>
+<file path=ppt/slides/slide20.xml><?xml version="1.0" encoding="utf-8"?>
 <p:sld xmlns:a="http://schemas.openxmlformats.org/drawingml/2006/main" xmlns:r="http://schemas.openxmlformats.org/officeDocument/2006/relationships" xmlns:p="http://schemas.openxmlformats.org/presentationml/2006/main">
   <p:cSld>
     <p:spTree>
@@ -50855,7 +48993,7 @@
 </p:sld>
 </file>
 
-<file path=ppt/slides/slide27.xml><?xml version="1.0" encoding="utf-8"?>
+<file path=ppt/slides/slide21.xml><?xml version="1.0" encoding="utf-8"?>
 <p:sld xmlns:a="http://schemas.openxmlformats.org/drawingml/2006/main" xmlns:r="http://schemas.openxmlformats.org/officeDocument/2006/relationships" xmlns:p="http://schemas.openxmlformats.org/presentationml/2006/main">
   <p:cSld>
     <p:spTree>
@@ -51277,7 +49415,7 @@
 </p:sld>
 </file>
 
-<file path=ppt/slides/slide28.xml><?xml version="1.0" encoding="utf-8"?>
+<file path=ppt/slides/slide22.xml><?xml version="1.0" encoding="utf-8"?>
 <p:sld xmlns:a="http://schemas.openxmlformats.org/drawingml/2006/main" xmlns:r="http://schemas.openxmlformats.org/officeDocument/2006/relationships" xmlns:p="http://schemas.openxmlformats.org/presentationml/2006/main">
   <p:cSld>
     <p:spTree>
@@ -51597,7 +49735,7 @@
 </p:sld>
 </file>
 
-<file path=ppt/slides/slide29.xml><?xml version="1.0" encoding="utf-8"?>
+<file path=ppt/slides/slide23.xml><?xml version="1.0" encoding="utf-8"?>
 <p:sld xmlns:a="http://schemas.openxmlformats.org/drawingml/2006/main" xmlns:r="http://schemas.openxmlformats.org/officeDocument/2006/relationships" xmlns:p="http://schemas.openxmlformats.org/presentationml/2006/main">
   <p:cSld>
     <p:spTree>
@@ -52102,335 +50240,7 @@
 </p:sld>
 </file>
 
-<file path=ppt/slides/slide3.xml><?xml version="1.0" encoding="utf-8"?>
-<p:sld xmlns:a="http://schemas.openxmlformats.org/drawingml/2006/main" xmlns:r="http://schemas.openxmlformats.org/officeDocument/2006/relationships" xmlns:p="http://schemas.openxmlformats.org/presentationml/2006/main">
-  <p:cSld>
-    <p:spTree>
-      <p:nvGrpSpPr>
-        <p:cNvPr id="428" name="Shape 428"/>
-        <p:cNvGrpSpPr/>
-        <p:nvPr/>
-      </p:nvGrpSpPr>
-      <p:grpSpPr>
-        <a:xfrm>
-          <a:off x="0" y="0"/>
-          <a:ext cx="0" cy="0"/>
-          <a:chOff x="0" y="0"/>
-          <a:chExt cx="0" cy="0"/>
-        </a:xfrm>
-      </p:grpSpPr>
-      <p:sp>
-        <p:nvSpPr>
-          <p:cNvPr id="436" name="Google Shape;436;p31"/>
-          <p:cNvSpPr txBox="1"/>
-          <p:nvPr>
-            <p:ph type="title"/>
-          </p:nvPr>
-        </p:nvSpPr>
-        <p:spPr>
-          <a:xfrm>
-            <a:off x="774146" y="202009"/>
-            <a:ext cx="3932227" cy="1698043"/>
-          </a:xfrm>
-          <a:prstGeom prst="rect">
-            <a:avLst/>
-          </a:prstGeom>
-          <a:noFill/>
-          <a:ln>
-            <a:noFill/>
-          </a:ln>
-        </p:spPr>
-        <p:txBody>
-          <a:bodyPr/>
-          <a:lstStyle/>
-          <a:p>
-            <a:pPr lvl="0" indent="0" marL="0">
-              <a:buNone/>
-            </a:pPr>
-            <a:r>
-              <a:rPr/>
-              <a:t>Vì sao đề tài này</a:t>
-            </a:r>
-          </a:p>
-        </p:txBody>
-      </p:sp>
-      <p:sp>
-        <p:nvSpPr>
-          <p:cNvPr id="437" name="Google Shape;437;p31"/>
-          <p:cNvSpPr txBox="1"/>
-          <p:nvPr>
-            <p:ph idx="2" sz="half" type="body"/>
-          </p:nvPr>
-        </p:nvSpPr>
-        <p:spPr/>
-        <p:txBody>
-          <a:bodyPr/>
-          <a:lstStyle/>
-          <a:p>
-            <a:pPr lvl="0" indent="0" marL="0">
-              <a:buNone/>
-            </a:pPr>
-            <a:r>
-              <a:rPr b="1"/>
-              <a:t>~77 triệu xe máy</a:t>
-            </a:r>
-            <a:r>
-              <a:rPr/>
-              <a:t> — </a:t>
-            </a:r>
-            <a:r>
-              <a:rPr b="1"/>
-              <a:t>85–90%</a:t>
-            </a:r>
-            <a:r>
-              <a:rPr/>
-              <a:t> lưu lượng đường bộ Việt Nam</a:t>
-            </a:r>
-          </a:p>
-          <a:p>
-            <a:pPr lvl="0" indent="0" marL="0">
-              <a:buNone/>
-            </a:pPr>
-            <a:r>
-              <a:rPr/>
-              <a:t>Cùng hệ thống, cùng phép đo: </a:t>
-            </a:r>
-            <a:r>
-              <a:rPr b="1"/>
-              <a:t>chênh 48,6 điểm</a:t>
-            </a:r>
-            <a:r>
-              <a:rPr/>
-              <a:t>, chỉ khác bố cục</a:t>
-            </a:r>
-          </a:p>
-          <a:p>
-            <a:pPr lvl="0" indent="0" marL="0">
-              <a:buNone/>
-            </a:pPr>
-            <a:r>
-              <a:rPr i="1"/>
-              <a:t>Số liệu Brazil, không phải Việt Nam</a:t>
-            </a:r>
-          </a:p>
-        </p:txBody>
-      </p:sp>
-      <p:pic>
-        <p:nvPicPr>
-          <p:cNvPr descr="figures/fig-gap.png" id="0" name="Picture 1"/>
-          <p:cNvPicPr>
-            <a:picLocks noGrp="1" noChangeAspect="1"/>
-          </p:cNvPicPr>
-          <p:nvPr/>
-        </p:nvPicPr>
-        <p:blipFill>
-          <a:blip r:embed="rId2"/>
-          <a:stretch>
-            <a:fillRect/>
-          </a:stretch>
-        </p:blipFill>
-        <p:spPr bwMode="auto">
-          <a:xfrm>
-            <a:off x="5156200" y="787400"/>
-            <a:ext cx="6235700" cy="4762500"/>
-          </a:xfrm>
-          <a:prstGeom prst="rect">
-            <a:avLst/>
-          </a:prstGeom>
-          <a:noFill/>
-          <a:ln w="9525">
-            <a:noFill/>
-            <a:headEnd/>
-            <a:tailEnd/>
-          </a:ln>
-        </p:spPr>
-      </p:pic>
-      <p:sp>
-        <p:nvSpPr>
-          <p:cNvPr id="449" name="Google Shape;449;p31"/>
-          <p:cNvSpPr txBox="1"/>
-          <p:nvPr>
-            <p:ph idx="12" type="sldNum"/>
-          </p:nvPr>
-        </p:nvSpPr>
-        <p:spPr>
-          <a:xfrm>
-            <a:off x="58380" y="6508358"/>
-            <a:ext cx="349642" cy="349642"/>
-          </a:xfrm>
-          <a:prstGeom prst="rect">
-            <a:avLst/>
-          </a:prstGeom>
-          <a:noFill/>
-          <a:ln>
-            <a:noFill/>
-          </a:ln>
-        </p:spPr>
-        <p:txBody>
-          <a:bodyPr anchor="ctr" anchorCtr="0" bIns="45700" lIns="91425" rIns="91425" spcFirstLastPara="1" tIns="45700" wrap="square">
-            <a:noAutofit/>
-          </a:bodyPr>
-          <a:lstStyle>
-            <a:lvl1pPr algn="ctr" indent="0" lvl="0" marL="0">
-              <a:spcBef>
-                <a:spcPts val="0"/>
-              </a:spcBef>
-              <a:buNone/>
-              <a:defRPr sz="700">
-                <a:solidFill>
-                  <a:schemeClr val="dk1"/>
-                </a:solidFill>
-                <a:latin typeface="Arial"/>
-                <a:ea typeface="Arial"/>
-                <a:cs typeface="Arial"/>
-                <a:sym typeface="Arial"/>
-              </a:defRPr>
-            </a:lvl1pPr>
-            <a:lvl2pPr algn="ctr" indent="0" lvl="1" marL="0">
-              <a:spcBef>
-                <a:spcPts val="0"/>
-              </a:spcBef>
-              <a:buNone/>
-              <a:defRPr sz="700">
-                <a:solidFill>
-                  <a:schemeClr val="dk1"/>
-                </a:solidFill>
-                <a:latin typeface="Arial"/>
-                <a:ea typeface="Arial"/>
-                <a:cs typeface="Arial"/>
-                <a:sym typeface="Arial"/>
-              </a:defRPr>
-            </a:lvl2pPr>
-            <a:lvl3pPr algn="ctr" indent="0" lvl="2" marL="0">
-              <a:spcBef>
-                <a:spcPts val="0"/>
-              </a:spcBef>
-              <a:buNone/>
-              <a:defRPr sz="700">
-                <a:solidFill>
-                  <a:schemeClr val="dk1"/>
-                </a:solidFill>
-                <a:latin typeface="Arial"/>
-                <a:ea typeface="Arial"/>
-                <a:cs typeface="Arial"/>
-                <a:sym typeface="Arial"/>
-              </a:defRPr>
-            </a:lvl3pPr>
-            <a:lvl4pPr algn="ctr" indent="0" lvl="3" marL="0">
-              <a:spcBef>
-                <a:spcPts val="0"/>
-              </a:spcBef>
-              <a:buNone/>
-              <a:defRPr sz="700">
-                <a:solidFill>
-                  <a:schemeClr val="dk1"/>
-                </a:solidFill>
-                <a:latin typeface="Arial"/>
-                <a:ea typeface="Arial"/>
-                <a:cs typeface="Arial"/>
-                <a:sym typeface="Arial"/>
-              </a:defRPr>
-            </a:lvl4pPr>
-            <a:lvl5pPr algn="ctr" indent="0" lvl="4" marL="0">
-              <a:spcBef>
-                <a:spcPts val="0"/>
-              </a:spcBef>
-              <a:buNone/>
-              <a:defRPr sz="700">
-                <a:solidFill>
-                  <a:schemeClr val="dk1"/>
-                </a:solidFill>
-                <a:latin typeface="Arial"/>
-                <a:ea typeface="Arial"/>
-                <a:cs typeface="Arial"/>
-                <a:sym typeface="Arial"/>
-              </a:defRPr>
-            </a:lvl5pPr>
-            <a:lvl6pPr algn="ctr" indent="0" lvl="5" marL="0">
-              <a:spcBef>
-                <a:spcPts val="0"/>
-              </a:spcBef>
-              <a:buNone/>
-              <a:defRPr sz="700">
-                <a:solidFill>
-                  <a:schemeClr val="dk1"/>
-                </a:solidFill>
-                <a:latin typeface="Arial"/>
-                <a:ea typeface="Arial"/>
-                <a:cs typeface="Arial"/>
-                <a:sym typeface="Arial"/>
-              </a:defRPr>
-            </a:lvl6pPr>
-            <a:lvl7pPr algn="ctr" indent="0" lvl="6" marL="0">
-              <a:spcBef>
-                <a:spcPts val="0"/>
-              </a:spcBef>
-              <a:buNone/>
-              <a:defRPr sz="700">
-                <a:solidFill>
-                  <a:schemeClr val="dk1"/>
-                </a:solidFill>
-                <a:latin typeface="Arial"/>
-                <a:ea typeface="Arial"/>
-                <a:cs typeface="Arial"/>
-                <a:sym typeface="Arial"/>
-              </a:defRPr>
-            </a:lvl7pPr>
-            <a:lvl8pPr algn="ctr" indent="0" lvl="7" marL="0">
-              <a:spcBef>
-                <a:spcPts val="0"/>
-              </a:spcBef>
-              <a:buNone/>
-              <a:defRPr sz="700">
-                <a:solidFill>
-                  <a:schemeClr val="dk1"/>
-                </a:solidFill>
-                <a:latin typeface="Arial"/>
-                <a:ea typeface="Arial"/>
-                <a:cs typeface="Arial"/>
-                <a:sym typeface="Arial"/>
-              </a:defRPr>
-            </a:lvl8pPr>
-            <a:lvl9pPr algn="ctr" indent="0" lvl="8" marL="0">
-              <a:spcBef>
-                <a:spcPts val="0"/>
-              </a:spcBef>
-              <a:buNone/>
-              <a:defRPr sz="700">
-                <a:solidFill>
-                  <a:schemeClr val="dk1"/>
-                </a:solidFill>
-                <a:latin typeface="Arial"/>
-                <a:ea typeface="Arial"/>
-                <a:cs typeface="Arial"/>
-                <a:sym typeface="Arial"/>
-              </a:defRPr>
-            </a:lvl9pPr>
-          </a:lstStyle>
-          <a:p>
-            <a:pPr algn="ctr" indent="0" lvl="0" marL="0" rtl="0">
-              <a:spcBef>
-                <a:spcPts val="0"/>
-              </a:spcBef>
-              <a:spcAft>
-                <a:spcPts val="0"/>
-              </a:spcAft>
-              <a:buNone/>
-            </a:pPr>
-            <a:fld id="{00000000-1234-1234-1234-123412341234}" type="slidenum">
-              <a:rPr lang="en-US"/>
-              <a:t>‹#›</a:t>
-            </a:fld>
-            <a:endParaRPr/>
-          </a:p>
-        </p:txBody>
-      </p:sp>
-    </p:spTree>
-  </p:cSld>
-</p:sld>
-</file>
-
-<file path=ppt/slides/slide30.xml><?xml version="1.0" encoding="utf-8"?>
+<file path=ppt/slides/slide24.xml><?xml version="1.0" encoding="utf-8"?>
 <p:sld xmlns:a="http://schemas.openxmlformats.org/drawingml/2006/main" xmlns:r="http://schemas.openxmlformats.org/officeDocument/2006/relationships" xmlns:p="http://schemas.openxmlformats.org/presentationml/2006/main">
   <p:cSld>
     <p:spTree>
@@ -52720,244 +50530,7 @@
 </p:sld>
 </file>
 
-<file path=ppt/slides/slide31.xml><?xml version="1.0" encoding="utf-8"?>
-<p:sld xmlns:a="http://schemas.openxmlformats.org/drawingml/2006/main" xmlns:r="http://schemas.openxmlformats.org/officeDocument/2006/relationships" xmlns:p="http://schemas.openxmlformats.org/presentationml/2006/main">
-  <p:cSld>
-    <p:spTree>
-      <p:nvGrpSpPr>
-        <p:cNvPr id="318" name="Shape 318"/>
-        <p:cNvGrpSpPr/>
-        <p:nvPr/>
-      </p:nvGrpSpPr>
-      <p:grpSpPr>
-        <a:xfrm>
-          <a:off x="0" y="0"/>
-          <a:ext cx="0" cy="0"/>
-          <a:chOff x="0" y="0"/>
-          <a:chExt cx="0" cy="0"/>
-        </a:xfrm>
-      </p:grpSpPr>
-      <p:sp>
-        <p:nvSpPr>
-          <p:cNvPr id="332" name="Google Shape;332;p28"/>
-          <p:cNvSpPr txBox="1"/>
-          <p:nvPr>
-            <p:ph type="title"/>
-          </p:nvPr>
-        </p:nvSpPr>
-        <p:spPr>
-          <a:xfrm>
-            <a:off x="1470929" y="2095027"/>
-            <a:ext cx="9941071" cy="884656"/>
-          </a:xfrm>
-          <a:prstGeom prst="rect">
-            <a:avLst/>
-          </a:prstGeom>
-          <a:noFill/>
-          <a:ln>
-            <a:noFill/>
-          </a:ln>
-        </p:spPr>
-        <p:txBody>
-          <a:bodyPr/>
-          <a:lstStyle/>
-          <a:p>
-            <a:pPr lvl="0" indent="0" marL="0">
-              <a:buNone/>
-            </a:pPr>
-            <a:r>
-              <a:rPr/>
-              <a:t>Kết luận</a:t>
-            </a:r>
-          </a:p>
-        </p:txBody>
-      </p:sp>
-      <p:sp>
-        <p:nvSpPr>
-          <p:cNvPr id="347" name="Google Shape;347;p28"/>
-          <p:cNvSpPr txBox="1"/>
-          <p:nvPr>
-            <p:ph idx="12" type="sldNum"/>
-          </p:nvPr>
-        </p:nvSpPr>
-        <p:spPr>
-          <a:xfrm>
-            <a:off x="65862" y="6542216"/>
-            <a:ext cx="292608" cy="315784"/>
-          </a:xfrm>
-          <a:prstGeom prst="rect">
-            <a:avLst/>
-          </a:prstGeom>
-          <a:noFill/>
-          <a:ln>
-            <a:noFill/>
-          </a:ln>
-        </p:spPr>
-        <p:txBody>
-          <a:bodyPr anchor="ctr" anchorCtr="0" bIns="45700" lIns="91425" rIns="91425" spcFirstLastPara="1" tIns="45700" wrap="square">
-            <a:noAutofit/>
-          </a:bodyPr>
-          <a:lstStyle>
-            <a:lvl1pPr algn="ctr" indent="0" lvl="0" marL="0">
-              <a:spcBef>
-                <a:spcPts val="0"/>
-              </a:spcBef>
-              <a:buNone/>
-              <a:defRPr sz="700">
-                <a:solidFill>
-                  <a:schemeClr val="dk1"/>
-                </a:solidFill>
-                <a:latin typeface="Arial"/>
-                <a:ea typeface="Arial"/>
-                <a:cs typeface="Arial"/>
-                <a:sym typeface="Arial"/>
-              </a:defRPr>
-            </a:lvl1pPr>
-            <a:lvl2pPr algn="ctr" indent="0" lvl="1" marL="0">
-              <a:spcBef>
-                <a:spcPts val="0"/>
-              </a:spcBef>
-              <a:buNone/>
-              <a:defRPr sz="700">
-                <a:solidFill>
-                  <a:schemeClr val="dk1"/>
-                </a:solidFill>
-                <a:latin typeface="Arial"/>
-                <a:ea typeface="Arial"/>
-                <a:cs typeface="Arial"/>
-                <a:sym typeface="Arial"/>
-              </a:defRPr>
-            </a:lvl2pPr>
-            <a:lvl3pPr algn="ctr" indent="0" lvl="2" marL="0">
-              <a:spcBef>
-                <a:spcPts val="0"/>
-              </a:spcBef>
-              <a:buNone/>
-              <a:defRPr sz="700">
-                <a:solidFill>
-                  <a:schemeClr val="dk1"/>
-                </a:solidFill>
-                <a:latin typeface="Arial"/>
-                <a:ea typeface="Arial"/>
-                <a:cs typeface="Arial"/>
-                <a:sym typeface="Arial"/>
-              </a:defRPr>
-            </a:lvl3pPr>
-            <a:lvl4pPr algn="ctr" indent="0" lvl="3" marL="0">
-              <a:spcBef>
-                <a:spcPts val="0"/>
-              </a:spcBef>
-              <a:buNone/>
-              <a:defRPr sz="700">
-                <a:solidFill>
-                  <a:schemeClr val="dk1"/>
-                </a:solidFill>
-                <a:latin typeface="Arial"/>
-                <a:ea typeface="Arial"/>
-                <a:cs typeface="Arial"/>
-                <a:sym typeface="Arial"/>
-              </a:defRPr>
-            </a:lvl4pPr>
-            <a:lvl5pPr algn="ctr" indent="0" lvl="4" marL="0">
-              <a:spcBef>
-                <a:spcPts val="0"/>
-              </a:spcBef>
-              <a:buNone/>
-              <a:defRPr sz="700">
-                <a:solidFill>
-                  <a:schemeClr val="dk1"/>
-                </a:solidFill>
-                <a:latin typeface="Arial"/>
-                <a:ea typeface="Arial"/>
-                <a:cs typeface="Arial"/>
-                <a:sym typeface="Arial"/>
-              </a:defRPr>
-            </a:lvl5pPr>
-            <a:lvl6pPr algn="ctr" indent="0" lvl="5" marL="0">
-              <a:spcBef>
-                <a:spcPts val="0"/>
-              </a:spcBef>
-              <a:buNone/>
-              <a:defRPr sz="700">
-                <a:solidFill>
-                  <a:schemeClr val="dk1"/>
-                </a:solidFill>
-                <a:latin typeface="Arial"/>
-                <a:ea typeface="Arial"/>
-                <a:cs typeface="Arial"/>
-                <a:sym typeface="Arial"/>
-              </a:defRPr>
-            </a:lvl6pPr>
-            <a:lvl7pPr algn="ctr" indent="0" lvl="6" marL="0">
-              <a:spcBef>
-                <a:spcPts val="0"/>
-              </a:spcBef>
-              <a:buNone/>
-              <a:defRPr sz="700">
-                <a:solidFill>
-                  <a:schemeClr val="dk1"/>
-                </a:solidFill>
-                <a:latin typeface="Arial"/>
-                <a:ea typeface="Arial"/>
-                <a:cs typeface="Arial"/>
-                <a:sym typeface="Arial"/>
-              </a:defRPr>
-            </a:lvl7pPr>
-            <a:lvl8pPr algn="ctr" indent="0" lvl="7" marL="0">
-              <a:spcBef>
-                <a:spcPts val="0"/>
-              </a:spcBef>
-              <a:buNone/>
-              <a:defRPr sz="700">
-                <a:solidFill>
-                  <a:schemeClr val="dk1"/>
-                </a:solidFill>
-                <a:latin typeface="Arial"/>
-                <a:ea typeface="Arial"/>
-                <a:cs typeface="Arial"/>
-                <a:sym typeface="Arial"/>
-              </a:defRPr>
-            </a:lvl8pPr>
-            <a:lvl9pPr algn="ctr" indent="0" lvl="8" marL="0">
-              <a:spcBef>
-                <a:spcPts val="0"/>
-              </a:spcBef>
-              <a:buNone/>
-              <a:defRPr sz="700">
-                <a:solidFill>
-                  <a:schemeClr val="dk1"/>
-                </a:solidFill>
-                <a:latin typeface="Arial"/>
-                <a:ea typeface="Arial"/>
-                <a:cs typeface="Arial"/>
-                <a:sym typeface="Arial"/>
-              </a:defRPr>
-            </a:lvl9pPr>
-          </a:lstStyle>
-          <a:p>
-            <a:pPr algn="ctr" indent="0" lvl="0" marL="0" rtl="0">
-              <a:spcBef>
-                <a:spcPts val="0"/>
-              </a:spcBef>
-              <a:spcAft>
-                <a:spcPts val="0"/>
-              </a:spcAft>
-              <a:buNone/>
-            </a:pPr>
-            <a:fld id="{00000000-1234-1234-1234-123412341234}" type="slidenum">
-              <a:rPr lang="en-US"/>
-              <a:t>‹#›</a:t>
-            </a:fld>
-            <a:endParaRPr/>
-          </a:p>
-        </p:txBody>
-      </p:sp>
-    </p:spTree>
-  </p:cSld>
-</p:sld>
-</file>
-
-<file path=ppt/slides/slide32.xml><?xml version="1.0" encoding="utf-8"?>
+<file path=ppt/slides/slide25.xml><?xml version="1.0" encoding="utf-8"?>
 <p:sld xmlns:a="http://schemas.openxmlformats.org/drawingml/2006/main" xmlns:r="http://schemas.openxmlformats.org/officeDocument/2006/relationships" xmlns:p="http://schemas.openxmlformats.org/presentationml/2006/main">
   <p:cSld>
     <p:spTree>
@@ -53633,7 +51206,7 @@
 </p:sld>
 </file>
 
-<file path=ppt/slides/slide33.xml><?xml version="1.0" encoding="utf-8"?>
+<file path=ppt/slides/slide26.xml><?xml version="1.0" encoding="utf-8"?>
 <p:sld xmlns:a="http://schemas.openxmlformats.org/drawingml/2006/main" xmlns:r="http://schemas.openxmlformats.org/officeDocument/2006/relationships" xmlns:p="http://schemas.openxmlformats.org/presentationml/2006/main">
   <p:cSld>
     <p:spTree>
@@ -54084,7 +51657,7 @@
 </p:sld>
 </file>
 
-<file path=ppt/slides/slide34.xml><?xml version="1.0" encoding="utf-8"?>
+<file path=ppt/slides/slide27.xml><?xml version="1.0" encoding="utf-8"?>
 <p:sld xmlns:a="http://schemas.openxmlformats.org/drawingml/2006/main" xmlns:r="http://schemas.openxmlformats.org/officeDocument/2006/relationships" xmlns:p="http://schemas.openxmlformats.org/presentationml/2006/main">
   <p:cSld>
     <p:spTree>
@@ -54535,7 +52108,7 @@
 </p:sld>
 </file>
 
-<file path=ppt/slides/slide35.xml><?xml version="1.0" encoding="utf-8"?>
+<file path=ppt/slides/slide28.xml><?xml version="1.0" encoding="utf-8"?>
 <p:sld xmlns:a="http://schemas.openxmlformats.org/drawingml/2006/main" xmlns:r="http://schemas.openxmlformats.org/officeDocument/2006/relationships" xmlns:p="http://schemas.openxmlformats.org/presentationml/2006/main">
   <p:cSld>
     <p:spTree>
@@ -54860,7 +52433,7 @@
 </p:sld>
 </file>
 
-<file path=ppt/slides/slide36.xml><?xml version="1.0" encoding="utf-8"?>
+<file path=ppt/slides/slide29.xml><?xml version="1.0" encoding="utf-8"?>
 <p:sld xmlns:a="http://schemas.openxmlformats.org/drawingml/2006/main" xmlns:r="http://schemas.openxmlformats.org/officeDocument/2006/relationships" xmlns:p="http://schemas.openxmlformats.org/presentationml/2006/main">
   <p:cSld>
     <p:spTree>
@@ -55219,7 +52792,335 @@
 </p:sld>
 </file>
 
-<file path=ppt/slides/slide37.xml><?xml version="1.0" encoding="utf-8"?>
+<file path=ppt/slides/slide3.xml><?xml version="1.0" encoding="utf-8"?>
+<p:sld xmlns:a="http://schemas.openxmlformats.org/drawingml/2006/main" xmlns:r="http://schemas.openxmlformats.org/officeDocument/2006/relationships" xmlns:p="http://schemas.openxmlformats.org/presentationml/2006/main">
+  <p:cSld>
+    <p:spTree>
+      <p:nvGrpSpPr>
+        <p:cNvPr id="428" name="Shape 428"/>
+        <p:cNvGrpSpPr/>
+        <p:nvPr/>
+      </p:nvGrpSpPr>
+      <p:grpSpPr>
+        <a:xfrm>
+          <a:off x="0" y="0"/>
+          <a:ext cx="0" cy="0"/>
+          <a:chOff x="0" y="0"/>
+          <a:chExt cx="0" cy="0"/>
+        </a:xfrm>
+      </p:grpSpPr>
+      <p:sp>
+        <p:nvSpPr>
+          <p:cNvPr id="436" name="Google Shape;436;p31"/>
+          <p:cNvSpPr txBox="1"/>
+          <p:nvPr>
+            <p:ph type="title"/>
+          </p:nvPr>
+        </p:nvSpPr>
+        <p:spPr>
+          <a:xfrm>
+            <a:off x="774146" y="202009"/>
+            <a:ext cx="3932227" cy="1698043"/>
+          </a:xfrm>
+          <a:prstGeom prst="rect">
+            <a:avLst/>
+          </a:prstGeom>
+          <a:noFill/>
+          <a:ln>
+            <a:noFill/>
+          </a:ln>
+        </p:spPr>
+        <p:txBody>
+          <a:bodyPr/>
+          <a:lstStyle/>
+          <a:p>
+            <a:pPr lvl="0" indent="0" marL="0">
+              <a:buNone/>
+            </a:pPr>
+            <a:r>
+              <a:rPr/>
+              <a:t>Vì sao đề tài này</a:t>
+            </a:r>
+          </a:p>
+        </p:txBody>
+      </p:sp>
+      <p:sp>
+        <p:nvSpPr>
+          <p:cNvPr id="437" name="Google Shape;437;p31"/>
+          <p:cNvSpPr txBox="1"/>
+          <p:nvPr>
+            <p:ph idx="2" sz="half" type="body"/>
+          </p:nvPr>
+        </p:nvSpPr>
+        <p:spPr/>
+        <p:txBody>
+          <a:bodyPr/>
+          <a:lstStyle/>
+          <a:p>
+            <a:pPr lvl="0" indent="0" marL="0">
+              <a:buNone/>
+            </a:pPr>
+            <a:r>
+              <a:rPr b="1"/>
+              <a:t>~77 triệu xe máy</a:t>
+            </a:r>
+            <a:r>
+              <a:rPr/>
+              <a:t> — </a:t>
+            </a:r>
+            <a:r>
+              <a:rPr b="1"/>
+              <a:t>85–90%</a:t>
+            </a:r>
+            <a:r>
+              <a:rPr/>
+              <a:t> lưu lượng đường bộ Việt Nam</a:t>
+            </a:r>
+          </a:p>
+          <a:p>
+            <a:pPr lvl="0" indent="0" marL="0">
+              <a:buNone/>
+            </a:pPr>
+            <a:r>
+              <a:rPr/>
+              <a:t>Cùng hệ thống, cùng phép đo: </a:t>
+            </a:r>
+            <a:r>
+              <a:rPr b="1"/>
+              <a:t>chênh 48,6 điểm</a:t>
+            </a:r>
+            <a:r>
+              <a:rPr/>
+              <a:t>, chỉ khác bố cục</a:t>
+            </a:r>
+          </a:p>
+          <a:p>
+            <a:pPr lvl="0" indent="0" marL="0">
+              <a:buNone/>
+            </a:pPr>
+            <a:r>
+              <a:rPr i="1"/>
+              <a:t>Số liệu Brazil, không phải Việt Nam</a:t>
+            </a:r>
+          </a:p>
+        </p:txBody>
+      </p:sp>
+      <p:pic>
+        <p:nvPicPr>
+          <p:cNvPr descr="figures/fig-gap.png" id="0" name="Picture 1"/>
+          <p:cNvPicPr>
+            <a:picLocks noGrp="1" noChangeAspect="1"/>
+          </p:cNvPicPr>
+          <p:nvPr/>
+        </p:nvPicPr>
+        <p:blipFill>
+          <a:blip r:embed="rId2"/>
+          <a:stretch>
+            <a:fillRect/>
+          </a:stretch>
+        </p:blipFill>
+        <p:spPr bwMode="auto">
+          <a:xfrm>
+            <a:off x="5156200" y="787400"/>
+            <a:ext cx="6235700" cy="4762500"/>
+          </a:xfrm>
+          <a:prstGeom prst="rect">
+            <a:avLst/>
+          </a:prstGeom>
+          <a:noFill/>
+          <a:ln w="9525">
+            <a:noFill/>
+            <a:headEnd/>
+            <a:tailEnd/>
+          </a:ln>
+        </p:spPr>
+      </p:pic>
+      <p:sp>
+        <p:nvSpPr>
+          <p:cNvPr id="449" name="Google Shape;449;p31"/>
+          <p:cNvSpPr txBox="1"/>
+          <p:nvPr>
+            <p:ph idx="12" type="sldNum"/>
+          </p:nvPr>
+        </p:nvSpPr>
+        <p:spPr>
+          <a:xfrm>
+            <a:off x="58380" y="6508358"/>
+            <a:ext cx="349642" cy="349642"/>
+          </a:xfrm>
+          <a:prstGeom prst="rect">
+            <a:avLst/>
+          </a:prstGeom>
+          <a:noFill/>
+          <a:ln>
+            <a:noFill/>
+          </a:ln>
+        </p:spPr>
+        <p:txBody>
+          <a:bodyPr anchor="ctr" anchorCtr="0" bIns="45700" lIns="91425" rIns="91425" spcFirstLastPara="1" tIns="45700" wrap="square">
+            <a:noAutofit/>
+          </a:bodyPr>
+          <a:lstStyle>
+            <a:lvl1pPr algn="ctr" indent="0" lvl="0" marL="0">
+              <a:spcBef>
+                <a:spcPts val="0"/>
+              </a:spcBef>
+              <a:buNone/>
+              <a:defRPr sz="700">
+                <a:solidFill>
+                  <a:schemeClr val="dk1"/>
+                </a:solidFill>
+                <a:latin typeface="Arial"/>
+                <a:ea typeface="Arial"/>
+                <a:cs typeface="Arial"/>
+                <a:sym typeface="Arial"/>
+              </a:defRPr>
+            </a:lvl1pPr>
+            <a:lvl2pPr algn="ctr" indent="0" lvl="1" marL="0">
+              <a:spcBef>
+                <a:spcPts val="0"/>
+              </a:spcBef>
+              <a:buNone/>
+              <a:defRPr sz="700">
+                <a:solidFill>
+                  <a:schemeClr val="dk1"/>
+                </a:solidFill>
+                <a:latin typeface="Arial"/>
+                <a:ea typeface="Arial"/>
+                <a:cs typeface="Arial"/>
+                <a:sym typeface="Arial"/>
+              </a:defRPr>
+            </a:lvl2pPr>
+            <a:lvl3pPr algn="ctr" indent="0" lvl="2" marL="0">
+              <a:spcBef>
+                <a:spcPts val="0"/>
+              </a:spcBef>
+              <a:buNone/>
+              <a:defRPr sz="700">
+                <a:solidFill>
+                  <a:schemeClr val="dk1"/>
+                </a:solidFill>
+                <a:latin typeface="Arial"/>
+                <a:ea typeface="Arial"/>
+                <a:cs typeface="Arial"/>
+                <a:sym typeface="Arial"/>
+              </a:defRPr>
+            </a:lvl3pPr>
+            <a:lvl4pPr algn="ctr" indent="0" lvl="3" marL="0">
+              <a:spcBef>
+                <a:spcPts val="0"/>
+              </a:spcBef>
+              <a:buNone/>
+              <a:defRPr sz="700">
+                <a:solidFill>
+                  <a:schemeClr val="dk1"/>
+                </a:solidFill>
+                <a:latin typeface="Arial"/>
+                <a:ea typeface="Arial"/>
+                <a:cs typeface="Arial"/>
+                <a:sym typeface="Arial"/>
+              </a:defRPr>
+            </a:lvl4pPr>
+            <a:lvl5pPr algn="ctr" indent="0" lvl="4" marL="0">
+              <a:spcBef>
+                <a:spcPts val="0"/>
+              </a:spcBef>
+              <a:buNone/>
+              <a:defRPr sz="700">
+                <a:solidFill>
+                  <a:schemeClr val="dk1"/>
+                </a:solidFill>
+                <a:latin typeface="Arial"/>
+                <a:ea typeface="Arial"/>
+                <a:cs typeface="Arial"/>
+                <a:sym typeface="Arial"/>
+              </a:defRPr>
+            </a:lvl5pPr>
+            <a:lvl6pPr algn="ctr" indent="0" lvl="5" marL="0">
+              <a:spcBef>
+                <a:spcPts val="0"/>
+              </a:spcBef>
+              <a:buNone/>
+              <a:defRPr sz="700">
+                <a:solidFill>
+                  <a:schemeClr val="dk1"/>
+                </a:solidFill>
+                <a:latin typeface="Arial"/>
+                <a:ea typeface="Arial"/>
+                <a:cs typeface="Arial"/>
+                <a:sym typeface="Arial"/>
+              </a:defRPr>
+            </a:lvl6pPr>
+            <a:lvl7pPr algn="ctr" indent="0" lvl="6" marL="0">
+              <a:spcBef>
+                <a:spcPts val="0"/>
+              </a:spcBef>
+              <a:buNone/>
+              <a:defRPr sz="700">
+                <a:solidFill>
+                  <a:schemeClr val="dk1"/>
+                </a:solidFill>
+                <a:latin typeface="Arial"/>
+                <a:ea typeface="Arial"/>
+                <a:cs typeface="Arial"/>
+                <a:sym typeface="Arial"/>
+              </a:defRPr>
+            </a:lvl7pPr>
+            <a:lvl8pPr algn="ctr" indent="0" lvl="7" marL="0">
+              <a:spcBef>
+                <a:spcPts val="0"/>
+              </a:spcBef>
+              <a:buNone/>
+              <a:defRPr sz="700">
+                <a:solidFill>
+                  <a:schemeClr val="dk1"/>
+                </a:solidFill>
+                <a:latin typeface="Arial"/>
+                <a:ea typeface="Arial"/>
+                <a:cs typeface="Arial"/>
+                <a:sym typeface="Arial"/>
+              </a:defRPr>
+            </a:lvl8pPr>
+            <a:lvl9pPr algn="ctr" indent="0" lvl="8" marL="0">
+              <a:spcBef>
+                <a:spcPts val="0"/>
+              </a:spcBef>
+              <a:buNone/>
+              <a:defRPr sz="700">
+                <a:solidFill>
+                  <a:schemeClr val="dk1"/>
+                </a:solidFill>
+                <a:latin typeface="Arial"/>
+                <a:ea typeface="Arial"/>
+                <a:cs typeface="Arial"/>
+                <a:sym typeface="Arial"/>
+              </a:defRPr>
+            </a:lvl9pPr>
+          </a:lstStyle>
+          <a:p>
+            <a:pPr algn="ctr" indent="0" lvl="0" marL="0" rtl="0">
+              <a:spcBef>
+                <a:spcPts val="0"/>
+              </a:spcBef>
+              <a:spcAft>
+                <a:spcPts val="0"/>
+              </a:spcAft>
+              <a:buNone/>
+            </a:pPr>
+            <a:fld id="{00000000-1234-1234-1234-123412341234}" type="slidenum">
+              <a:rPr lang="en-US"/>
+              <a:t>‹#›</a:t>
+            </a:fld>
+            <a:endParaRPr/>
+          </a:p>
+        </p:txBody>
+      </p:sp>
+    </p:spTree>
+  </p:cSld>
+</p:sld>
+</file>
+
+<file path=ppt/slides/slide30.xml><?xml version="1.0" encoding="utf-8"?>
 <p:sld xmlns:a="http://schemas.openxmlformats.org/drawingml/2006/main" xmlns:r="http://schemas.openxmlformats.org/officeDocument/2006/relationships" xmlns:p="http://schemas.openxmlformats.org/presentationml/2006/main">
   <p:cSld>
     <p:spTree>
@@ -56060,243 +53961,6 @@
   <p:cSld>
     <p:spTree>
       <p:nvGrpSpPr>
-        <p:cNvPr id="318" name="Shape 318"/>
-        <p:cNvGrpSpPr/>
-        <p:nvPr/>
-      </p:nvGrpSpPr>
-      <p:grpSpPr>
-        <a:xfrm>
-          <a:off x="0" y="0"/>
-          <a:ext cx="0" cy="0"/>
-          <a:chOff x="0" y="0"/>
-          <a:chExt cx="0" cy="0"/>
-        </a:xfrm>
-      </p:grpSpPr>
-      <p:sp>
-        <p:nvSpPr>
-          <p:cNvPr id="332" name="Google Shape;332;p28"/>
-          <p:cNvSpPr txBox="1"/>
-          <p:nvPr>
-            <p:ph type="title"/>
-          </p:nvPr>
-        </p:nvSpPr>
-        <p:spPr>
-          <a:xfrm>
-            <a:off x="1470929" y="2095027"/>
-            <a:ext cx="9941071" cy="884656"/>
-          </a:xfrm>
-          <a:prstGeom prst="rect">
-            <a:avLst/>
-          </a:prstGeom>
-          <a:noFill/>
-          <a:ln>
-            <a:noFill/>
-          </a:ln>
-        </p:spPr>
-        <p:txBody>
-          <a:bodyPr/>
-          <a:lstStyle/>
-          <a:p>
-            <a:pPr lvl="0" indent="0" marL="0">
-              <a:buNone/>
-            </a:pPr>
-            <a:r>
-              <a:rPr/>
-              <a:t>Nền tảng</a:t>
-            </a:r>
-          </a:p>
-        </p:txBody>
-      </p:sp>
-      <p:sp>
-        <p:nvSpPr>
-          <p:cNvPr id="347" name="Google Shape;347;p28"/>
-          <p:cNvSpPr txBox="1"/>
-          <p:nvPr>
-            <p:ph idx="12" type="sldNum"/>
-          </p:nvPr>
-        </p:nvSpPr>
-        <p:spPr>
-          <a:xfrm>
-            <a:off x="65862" y="6542216"/>
-            <a:ext cx="292608" cy="315784"/>
-          </a:xfrm>
-          <a:prstGeom prst="rect">
-            <a:avLst/>
-          </a:prstGeom>
-          <a:noFill/>
-          <a:ln>
-            <a:noFill/>
-          </a:ln>
-        </p:spPr>
-        <p:txBody>
-          <a:bodyPr anchor="ctr" anchorCtr="0" bIns="45700" lIns="91425" rIns="91425" spcFirstLastPara="1" tIns="45700" wrap="square">
-            <a:noAutofit/>
-          </a:bodyPr>
-          <a:lstStyle>
-            <a:lvl1pPr algn="ctr" indent="0" lvl="0" marL="0">
-              <a:spcBef>
-                <a:spcPts val="0"/>
-              </a:spcBef>
-              <a:buNone/>
-              <a:defRPr sz="700">
-                <a:solidFill>
-                  <a:schemeClr val="dk1"/>
-                </a:solidFill>
-                <a:latin typeface="Arial"/>
-                <a:ea typeface="Arial"/>
-                <a:cs typeface="Arial"/>
-                <a:sym typeface="Arial"/>
-              </a:defRPr>
-            </a:lvl1pPr>
-            <a:lvl2pPr algn="ctr" indent="0" lvl="1" marL="0">
-              <a:spcBef>
-                <a:spcPts val="0"/>
-              </a:spcBef>
-              <a:buNone/>
-              <a:defRPr sz="700">
-                <a:solidFill>
-                  <a:schemeClr val="dk1"/>
-                </a:solidFill>
-                <a:latin typeface="Arial"/>
-                <a:ea typeface="Arial"/>
-                <a:cs typeface="Arial"/>
-                <a:sym typeface="Arial"/>
-              </a:defRPr>
-            </a:lvl2pPr>
-            <a:lvl3pPr algn="ctr" indent="0" lvl="2" marL="0">
-              <a:spcBef>
-                <a:spcPts val="0"/>
-              </a:spcBef>
-              <a:buNone/>
-              <a:defRPr sz="700">
-                <a:solidFill>
-                  <a:schemeClr val="dk1"/>
-                </a:solidFill>
-                <a:latin typeface="Arial"/>
-                <a:ea typeface="Arial"/>
-                <a:cs typeface="Arial"/>
-                <a:sym typeface="Arial"/>
-              </a:defRPr>
-            </a:lvl3pPr>
-            <a:lvl4pPr algn="ctr" indent="0" lvl="3" marL="0">
-              <a:spcBef>
-                <a:spcPts val="0"/>
-              </a:spcBef>
-              <a:buNone/>
-              <a:defRPr sz="700">
-                <a:solidFill>
-                  <a:schemeClr val="dk1"/>
-                </a:solidFill>
-                <a:latin typeface="Arial"/>
-                <a:ea typeface="Arial"/>
-                <a:cs typeface="Arial"/>
-                <a:sym typeface="Arial"/>
-              </a:defRPr>
-            </a:lvl4pPr>
-            <a:lvl5pPr algn="ctr" indent="0" lvl="4" marL="0">
-              <a:spcBef>
-                <a:spcPts val="0"/>
-              </a:spcBef>
-              <a:buNone/>
-              <a:defRPr sz="700">
-                <a:solidFill>
-                  <a:schemeClr val="dk1"/>
-                </a:solidFill>
-                <a:latin typeface="Arial"/>
-                <a:ea typeface="Arial"/>
-                <a:cs typeface="Arial"/>
-                <a:sym typeface="Arial"/>
-              </a:defRPr>
-            </a:lvl5pPr>
-            <a:lvl6pPr algn="ctr" indent="0" lvl="5" marL="0">
-              <a:spcBef>
-                <a:spcPts val="0"/>
-              </a:spcBef>
-              <a:buNone/>
-              <a:defRPr sz="700">
-                <a:solidFill>
-                  <a:schemeClr val="dk1"/>
-                </a:solidFill>
-                <a:latin typeface="Arial"/>
-                <a:ea typeface="Arial"/>
-                <a:cs typeface="Arial"/>
-                <a:sym typeface="Arial"/>
-              </a:defRPr>
-            </a:lvl6pPr>
-            <a:lvl7pPr algn="ctr" indent="0" lvl="6" marL="0">
-              <a:spcBef>
-                <a:spcPts val="0"/>
-              </a:spcBef>
-              <a:buNone/>
-              <a:defRPr sz="700">
-                <a:solidFill>
-                  <a:schemeClr val="dk1"/>
-                </a:solidFill>
-                <a:latin typeface="Arial"/>
-                <a:ea typeface="Arial"/>
-                <a:cs typeface="Arial"/>
-                <a:sym typeface="Arial"/>
-              </a:defRPr>
-            </a:lvl7pPr>
-            <a:lvl8pPr algn="ctr" indent="0" lvl="7" marL="0">
-              <a:spcBef>
-                <a:spcPts val="0"/>
-              </a:spcBef>
-              <a:buNone/>
-              <a:defRPr sz="700">
-                <a:solidFill>
-                  <a:schemeClr val="dk1"/>
-                </a:solidFill>
-                <a:latin typeface="Arial"/>
-                <a:ea typeface="Arial"/>
-                <a:cs typeface="Arial"/>
-                <a:sym typeface="Arial"/>
-              </a:defRPr>
-            </a:lvl8pPr>
-            <a:lvl9pPr algn="ctr" indent="0" lvl="8" marL="0">
-              <a:spcBef>
-                <a:spcPts val="0"/>
-              </a:spcBef>
-              <a:buNone/>
-              <a:defRPr sz="700">
-                <a:solidFill>
-                  <a:schemeClr val="dk1"/>
-                </a:solidFill>
-                <a:latin typeface="Arial"/>
-                <a:ea typeface="Arial"/>
-                <a:cs typeface="Arial"/>
-                <a:sym typeface="Arial"/>
-              </a:defRPr>
-            </a:lvl9pPr>
-          </a:lstStyle>
-          <a:p>
-            <a:pPr algn="ctr" indent="0" lvl="0" marL="0" rtl="0">
-              <a:spcBef>
-                <a:spcPts val="0"/>
-              </a:spcBef>
-              <a:spcAft>
-                <a:spcPts val="0"/>
-              </a:spcAft>
-              <a:buNone/>
-            </a:pPr>
-            <a:fld id="{00000000-1234-1234-1234-123412341234}" type="slidenum">
-              <a:rPr lang="en-US"/>
-              <a:t>‹#›</a:t>
-            </a:fld>
-            <a:endParaRPr/>
-          </a:p>
-        </p:txBody>
-      </p:sp>
-    </p:spTree>
-  </p:cSld>
-</p:sld>
-</file>
-
-<file path=ppt/slides/slide6.xml><?xml version="1.0" encoding="utf-8"?>
-<p:sld xmlns:a="http://schemas.openxmlformats.org/drawingml/2006/main" xmlns:r="http://schemas.openxmlformats.org/officeDocument/2006/relationships" xmlns:p="http://schemas.openxmlformats.org/presentationml/2006/main">
-  <p:cSld>
-    <p:spTree>
-      <p:nvGrpSpPr>
         <p:cNvPr id="428" name="Shape 428"/>
         <p:cNvGrpSpPr/>
         <p:nvPr/>
@@ -56758,7 +54422,7 @@
 </p:sld>
 </file>
 
-<file path=ppt/slides/slide7.xml><?xml version="1.0" encoding="utf-8"?>
+<file path=ppt/slides/slide6.xml><?xml version="1.0" encoding="utf-8"?>
 <p:sld xmlns:a="http://schemas.openxmlformats.org/drawingml/2006/main" xmlns:r="http://schemas.openxmlformats.org/officeDocument/2006/relationships" xmlns:p="http://schemas.openxmlformats.org/presentationml/2006/main">
   <p:cSld>
     <p:spTree>
@@ -57085,7 +54749,7 @@
 </p:sld>
 </file>
 
-<file path=ppt/slides/slide8.xml><?xml version="1.0" encoding="utf-8"?>
+<file path=ppt/slides/slide7.xml><?xml version="1.0" encoding="utf-8"?>
 <p:sld xmlns:a="http://schemas.openxmlformats.org/drawingml/2006/main" xmlns:r="http://schemas.openxmlformats.org/officeDocument/2006/relationships" xmlns:p="http://schemas.openxmlformats.org/presentationml/2006/main">
   <p:cSld>
     <p:spTree>
@@ -57407,12 +55071,12 @@
 </p:sld>
 </file>
 
-<file path=ppt/slides/slide9.xml><?xml version="1.0" encoding="utf-8"?>
+<file path=ppt/slides/slide8.xml><?xml version="1.0" encoding="utf-8"?>
 <p:sld xmlns:a="http://schemas.openxmlformats.org/drawingml/2006/main" xmlns:r="http://schemas.openxmlformats.org/officeDocument/2006/relationships" xmlns:p="http://schemas.openxmlformats.org/presentationml/2006/main">
   <p:cSld>
     <p:spTree>
       <p:nvGrpSpPr>
-        <p:cNvPr id="318" name="Shape 318"/>
+        <p:cNvPr id="428" name="Shape 428"/>
         <p:cNvGrpSpPr/>
         <p:nvPr/>
       </p:nvGrpSpPr>
@@ -57426,7 +55090,7 @@
       </p:grpSpPr>
       <p:sp>
         <p:nvSpPr>
-          <p:cNvPr id="332" name="Google Shape;332;p28"/>
+          <p:cNvPr id="436" name="Google Shape;436;p31"/>
           <p:cNvSpPr txBox="1"/>
           <p:nvPr>
             <p:ph type="title"/>
@@ -57434,8 +55098,8 @@
         </p:nvSpPr>
         <p:spPr>
           <a:xfrm>
-            <a:off x="1470929" y="2095027"/>
-            <a:ext cx="9941071" cy="884656"/>
+            <a:off x="774146" y="202009"/>
+            <a:ext cx="3932227" cy="1698043"/>
           </a:xfrm>
           <a:prstGeom prst="rect">
             <a:avLst/>
@@ -57454,14 +55118,275 @@
             </a:pPr>
             <a:r>
               <a:rPr/>
-              <a:t>Thiết kế</a:t>
+              <a:t>Kiến trúc 5 tầng</a:t>
             </a:r>
           </a:p>
         </p:txBody>
       </p:sp>
       <p:sp>
         <p:nvSpPr>
-          <p:cNvPr id="347" name="Google Shape;347;p28"/>
+          <p:cNvPr id="437" name="Google Shape;437;p31"/>
+          <p:cNvSpPr txBox="1"/>
+          <p:nvPr>
+            <p:ph idx="2" sz="half" type="body"/>
+          </p:nvPr>
+        </p:nvSpPr>
+        <p:spPr/>
+        <p:txBody>
+          <a:bodyPr/>
+          <a:lstStyle/>
+          <a:p>
+            <a:pPr lvl="0" indent="0" marL="0">
+              <a:buNone/>
+            </a:pPr>
+            <a:r>
+              <a:rPr/>
+              <a:t>Tầng AI là </a:t>
+            </a:r>
+            <a:r>
+              <a:rPr b="1"/>
+              <a:t>Python thuần</a:t>
+            </a:r>
+            <a:r>
+              <a:rPr/>
+              <a:t> — cấm import FastAPI hoặc Pydantic. Nó không có mũi tên nào đi lên, nên thay engine OCR </a:t>
+            </a:r>
+            <a:r>
+              <a:rPr b="1"/>
+              <a:t>không đụng một dòng mã API</a:t>
+            </a:r>
+          </a:p>
+        </p:txBody>
+      </p:sp>
+      <p:graphicFrame>
+        <p:nvGraphicFramePr>
+          <p:cNvPr id="6" name="Content Placeholder 5"/>
+          <p:cNvGraphicFramePr>
+            <a:graphicFrameLocks noGrp="1"/>
+          </p:cNvGraphicFramePr>
+          <p:nvPr>
+            <p:ph idx="1"/>
+          </p:nvPr>
+        </p:nvGraphicFramePr>
+        <p:xfrm>
+          <a:off x="5156200" y="190500"/>
+          <a:ext cx="6235700" cy="5969000"/>
+        </p:xfrm>
+        <a:graphic>
+          <a:graphicData uri="http://schemas.openxmlformats.org/drawingml/2006/table">
+            <a:tbl>
+              <a:tblPr firstRow="1" bandRow="1">
+                <a:tableStyleId>{45BEF19B-5B1D-4A26-B267-ECC71EF7E2D4}</a:tableStyleId>
+              </a:tblPr>
+              <a:tblGrid>
+                <a:gridCol w="3111500"/>
+                <a:gridCol w="3111500"/>
+              </a:tblGrid>
+              <a:tr h="0">
+                <a:tc>
+                  <a:txBody>
+                    <a:bodyPr/>
+                    <a:lstStyle/>
+                    <a:p>
+                      <a:pPr lvl="0" indent="0" marL="0">
+                        <a:buNone/>
+                      </a:pPr>
+                      <a:r>
+                        <a:rPr/>
+                        <a:t>Tầng</a:t>
+                      </a:r>
+                    </a:p>
+                  </a:txBody>
+                  <a:tcPr/>
+                </a:tc>
+                <a:tc>
+                  <a:txBody>
+                    <a:bodyPr/>
+                    <a:lstStyle/>
+                    <a:p>
+                      <a:pPr lvl="0" indent="0" marL="0">
+                        <a:buNone/>
+                      </a:pPr>
+                      <a:r>
+                        <a:rPr/>
+                        <a:t>Công nghệ</a:t>
+                      </a:r>
+                    </a:p>
+                  </a:txBody>
+                  <a:tcPr/>
+                </a:tc>
+              </a:tr>
+              <a:tr h="0">
+                <a:tc>
+                  <a:txBody>
+                    <a:bodyPr/>
+                    <a:lstStyle/>
+                    <a:p>
+                      <a:pPr lvl="0" indent="0" marL="0">
+                        <a:buNone/>
+                      </a:pPr>
+                      <a:r>
+                        <a:rPr/>
+                        <a:t>L1 — Trình bày</a:t>
+                      </a:r>
+                    </a:p>
+                  </a:txBody>
+                </a:tc>
+                <a:tc>
+                  <a:txBody>
+                    <a:bodyPr/>
+                    <a:lstStyle/>
+                    <a:p>
+                      <a:pPr lvl="0" indent="0" marL="0">
+                        <a:buNone/>
+                      </a:pPr>
+                      <a:r>
+                        <a:rPr/>
+                        <a:t>React + TypeScript + Tailwind · 3 trang</a:t>
+                      </a:r>
+                    </a:p>
+                  </a:txBody>
+                </a:tc>
+              </a:tr>
+              <a:tr h="0">
+                <a:tc>
+                  <a:txBody>
+                    <a:bodyPr/>
+                    <a:lstStyle/>
+                    <a:p>
+                      <a:pPr lvl="0" indent="0" marL="0">
+                        <a:buNone/>
+                      </a:pPr>
+                      <a:r>
+                        <a:rPr/>
+                        <a:t>L2 — API</a:t>
+                      </a:r>
+                    </a:p>
+                  </a:txBody>
+                </a:tc>
+                <a:tc>
+                  <a:txBody>
+                    <a:bodyPr/>
+                    <a:lstStyle/>
+                    <a:p>
+                      <a:pPr lvl="0" indent="0" marL="0">
+                        <a:buNone/>
+                      </a:pPr>
+                      <a:r>
+                        <a:rPr/>
+                        <a:t>FastAPI + Swagger · 10 endpoint</a:t>
+                      </a:r>
+                    </a:p>
+                  </a:txBody>
+                </a:tc>
+              </a:tr>
+              <a:tr h="0">
+                <a:tc>
+                  <a:txBody>
+                    <a:bodyPr/>
+                    <a:lstStyle/>
+                    <a:p>
+                      <a:pPr lvl="0" indent="0" marL="0">
+                        <a:buNone/>
+                      </a:pPr>
+                      <a:r>
+                        <a:rPr/>
+                        <a:t>L3 — Nghiệp vụ</a:t>
+                      </a:r>
+                    </a:p>
+                  </a:txBody>
+                </a:tc>
+                <a:tc>
+                  <a:txBody>
+                    <a:bodyPr/>
+                    <a:lstStyle/>
+                    <a:p>
+                      <a:pPr lvl="0" indent="0" marL="0">
+                        <a:buNone/>
+                      </a:pPr>
+                      <a:r>
+                        <a:rPr/>
+                        <a:t>Detection / Video / History / Storage</a:t>
+                      </a:r>
+                    </a:p>
+                  </a:txBody>
+                </a:tc>
+              </a:tr>
+              <a:tr h="0">
+                <a:tc>
+                  <a:txBody>
+                    <a:bodyPr/>
+                    <a:lstStyle/>
+                    <a:p>
+                      <a:pPr lvl="0" indent="0" marL="0">
+                        <a:buNone/>
+                      </a:pPr>
+                      <a:r>
+                        <a:rPr b="1"/>
+                        <a:t>L4 — AI</a:t>
+                      </a:r>
+                    </a:p>
+                  </a:txBody>
+                </a:tc>
+                <a:tc>
+                  <a:txBody>
+                    <a:bodyPr/>
+                    <a:lstStyle/>
+                    <a:p>
+                      <a:pPr lvl="0" indent="0" marL="0">
+                        <a:buNone/>
+                      </a:pPr>
+                      <a:r>
+                        <a:rPr b="1"/>
+                        <a:t>Python thuần</a:t>
+                      </a:r>
+                      <a:r>
+                        <a:rPr/>
+                        <a:t> — YOLO11 + PaddleOCR + Normalizer</a:t>
+                      </a:r>
+                    </a:p>
+                  </a:txBody>
+                </a:tc>
+              </a:tr>
+              <a:tr h="0">
+                <a:tc>
+                  <a:txBody>
+                    <a:bodyPr/>
+                    <a:lstStyle/>
+                    <a:p>
+                      <a:pPr lvl="0" indent="0" marL="0">
+                        <a:buNone/>
+                      </a:pPr>
+                      <a:r>
+                        <a:rPr/>
+                        <a:t>L5 — Dữ liệu</a:t>
+                      </a:r>
+                    </a:p>
+                  </a:txBody>
+                </a:tc>
+                <a:tc>
+                  <a:txBody>
+                    <a:bodyPr/>
+                    <a:lstStyle/>
+                    <a:p>
+                      <a:pPr lvl="0" indent="0" marL="0">
+                        <a:buNone/>
+                      </a:pPr>
+                      <a:r>
+                        <a:rPr/>
+                        <a:t>SQLite + SQLAlchemy + Alembic</a:t>
+                      </a:r>
+                    </a:p>
+                  </a:txBody>
+                </a:tc>
+              </a:tr>
+            </a:tbl>
+          </a:graphicData>
+        </a:graphic>
+      </p:graphicFrame>
+      <p:sp>
+        <p:nvSpPr>
+          <p:cNvPr id="449" name="Google Shape;449;p31"/>
           <p:cNvSpPr txBox="1"/>
           <p:nvPr>
             <p:ph idx="12" type="sldNum"/>
@@ -57469,8 +55394,482 @@
         </p:nvSpPr>
         <p:spPr>
           <a:xfrm>
-            <a:off x="65862" y="6542216"/>
-            <a:ext cx="292608" cy="315784"/>
+            <a:off x="58380" y="6508358"/>
+            <a:ext cx="349642" cy="349642"/>
+          </a:xfrm>
+          <a:prstGeom prst="rect">
+            <a:avLst/>
+          </a:prstGeom>
+          <a:noFill/>
+          <a:ln>
+            <a:noFill/>
+          </a:ln>
+        </p:spPr>
+        <p:txBody>
+          <a:bodyPr anchor="ctr" anchorCtr="0" bIns="45700" lIns="91425" rIns="91425" spcFirstLastPara="1" tIns="45700" wrap="square">
+            <a:noAutofit/>
+          </a:bodyPr>
+          <a:lstStyle>
+            <a:lvl1pPr algn="ctr" indent="0" lvl="0" marL="0">
+              <a:spcBef>
+                <a:spcPts val="0"/>
+              </a:spcBef>
+              <a:buNone/>
+              <a:defRPr sz="700">
+                <a:solidFill>
+                  <a:schemeClr val="dk1"/>
+                </a:solidFill>
+                <a:latin typeface="Arial"/>
+                <a:ea typeface="Arial"/>
+                <a:cs typeface="Arial"/>
+                <a:sym typeface="Arial"/>
+              </a:defRPr>
+            </a:lvl1pPr>
+            <a:lvl2pPr algn="ctr" indent="0" lvl="1" marL="0">
+              <a:spcBef>
+                <a:spcPts val="0"/>
+              </a:spcBef>
+              <a:buNone/>
+              <a:defRPr sz="700">
+                <a:solidFill>
+                  <a:schemeClr val="dk1"/>
+                </a:solidFill>
+                <a:latin typeface="Arial"/>
+                <a:ea typeface="Arial"/>
+                <a:cs typeface="Arial"/>
+                <a:sym typeface="Arial"/>
+              </a:defRPr>
+            </a:lvl2pPr>
+            <a:lvl3pPr algn="ctr" indent="0" lvl="2" marL="0">
+              <a:spcBef>
+                <a:spcPts val="0"/>
+              </a:spcBef>
+              <a:buNone/>
+              <a:defRPr sz="700">
+                <a:solidFill>
+                  <a:schemeClr val="dk1"/>
+                </a:solidFill>
+                <a:latin typeface="Arial"/>
+                <a:ea typeface="Arial"/>
+                <a:cs typeface="Arial"/>
+                <a:sym typeface="Arial"/>
+              </a:defRPr>
+            </a:lvl3pPr>
+            <a:lvl4pPr algn="ctr" indent="0" lvl="3" marL="0">
+              <a:spcBef>
+                <a:spcPts val="0"/>
+              </a:spcBef>
+              <a:buNone/>
+              <a:defRPr sz="700">
+                <a:solidFill>
+                  <a:schemeClr val="dk1"/>
+                </a:solidFill>
+                <a:latin typeface="Arial"/>
+                <a:ea typeface="Arial"/>
+                <a:cs typeface="Arial"/>
+                <a:sym typeface="Arial"/>
+              </a:defRPr>
+            </a:lvl4pPr>
+            <a:lvl5pPr algn="ctr" indent="0" lvl="4" marL="0">
+              <a:spcBef>
+                <a:spcPts val="0"/>
+              </a:spcBef>
+              <a:buNone/>
+              <a:defRPr sz="700">
+                <a:solidFill>
+                  <a:schemeClr val="dk1"/>
+                </a:solidFill>
+                <a:latin typeface="Arial"/>
+                <a:ea typeface="Arial"/>
+                <a:cs typeface="Arial"/>
+                <a:sym typeface="Arial"/>
+              </a:defRPr>
+            </a:lvl5pPr>
+            <a:lvl6pPr algn="ctr" indent="0" lvl="5" marL="0">
+              <a:spcBef>
+                <a:spcPts val="0"/>
+              </a:spcBef>
+              <a:buNone/>
+              <a:defRPr sz="700">
+                <a:solidFill>
+                  <a:schemeClr val="dk1"/>
+                </a:solidFill>
+                <a:latin typeface="Arial"/>
+                <a:ea typeface="Arial"/>
+                <a:cs typeface="Arial"/>
+                <a:sym typeface="Arial"/>
+              </a:defRPr>
+            </a:lvl6pPr>
+            <a:lvl7pPr algn="ctr" indent="0" lvl="6" marL="0">
+              <a:spcBef>
+                <a:spcPts val="0"/>
+              </a:spcBef>
+              <a:buNone/>
+              <a:defRPr sz="700">
+                <a:solidFill>
+                  <a:schemeClr val="dk1"/>
+                </a:solidFill>
+                <a:latin typeface="Arial"/>
+                <a:ea typeface="Arial"/>
+                <a:cs typeface="Arial"/>
+                <a:sym typeface="Arial"/>
+              </a:defRPr>
+            </a:lvl7pPr>
+            <a:lvl8pPr algn="ctr" indent="0" lvl="7" marL="0">
+              <a:spcBef>
+                <a:spcPts val="0"/>
+              </a:spcBef>
+              <a:buNone/>
+              <a:defRPr sz="700">
+                <a:solidFill>
+                  <a:schemeClr val="dk1"/>
+                </a:solidFill>
+                <a:latin typeface="Arial"/>
+                <a:ea typeface="Arial"/>
+                <a:cs typeface="Arial"/>
+                <a:sym typeface="Arial"/>
+              </a:defRPr>
+            </a:lvl8pPr>
+            <a:lvl9pPr algn="ctr" indent="0" lvl="8" marL="0">
+              <a:spcBef>
+                <a:spcPts val="0"/>
+              </a:spcBef>
+              <a:buNone/>
+              <a:defRPr sz="700">
+                <a:solidFill>
+                  <a:schemeClr val="dk1"/>
+                </a:solidFill>
+                <a:latin typeface="Arial"/>
+                <a:ea typeface="Arial"/>
+                <a:cs typeface="Arial"/>
+                <a:sym typeface="Arial"/>
+              </a:defRPr>
+            </a:lvl9pPr>
+          </a:lstStyle>
+          <a:p>
+            <a:pPr algn="ctr" indent="0" lvl="0" marL="0" rtl="0">
+              <a:spcBef>
+                <a:spcPts val="0"/>
+              </a:spcBef>
+              <a:spcAft>
+                <a:spcPts val="0"/>
+              </a:spcAft>
+              <a:buNone/>
+            </a:pPr>
+            <a:fld id="{00000000-1234-1234-1234-123412341234}" type="slidenum">
+              <a:rPr lang="en-US"/>
+              <a:t>‹#›</a:t>
+            </a:fld>
+            <a:endParaRPr/>
+          </a:p>
+        </p:txBody>
+      </p:sp>
+    </p:spTree>
+  </p:cSld>
+</p:sld>
+</file>
+
+<file path=ppt/slides/slide9.xml><?xml version="1.0" encoding="utf-8"?>
+<p:sld xmlns:a="http://schemas.openxmlformats.org/drawingml/2006/main" xmlns:r="http://schemas.openxmlformats.org/officeDocument/2006/relationships" xmlns:p="http://schemas.openxmlformats.org/presentationml/2006/main">
+  <p:cSld>
+    <p:spTree>
+      <p:nvGrpSpPr>
+        <p:cNvPr id="428" name="Shape 428"/>
+        <p:cNvGrpSpPr/>
+        <p:nvPr/>
+      </p:nvGrpSpPr>
+      <p:grpSpPr>
+        <a:xfrm>
+          <a:off x="0" y="0"/>
+          <a:ext cx="0" cy="0"/>
+          <a:chOff x="0" y="0"/>
+          <a:chExt cx="0" cy="0"/>
+        </a:xfrm>
+      </p:grpSpPr>
+      <p:sp>
+        <p:nvSpPr>
+          <p:cNvPr id="436" name="Google Shape;436;p31"/>
+          <p:cNvSpPr txBox="1"/>
+          <p:nvPr>
+            <p:ph type="title"/>
+          </p:nvPr>
+        </p:nvSpPr>
+        <p:spPr>
+          <a:xfrm>
+            <a:off x="774146" y="202009"/>
+            <a:ext cx="3932227" cy="1698043"/>
+          </a:xfrm>
+          <a:prstGeom prst="rect">
+            <a:avLst/>
+          </a:prstGeom>
+          <a:noFill/>
+          <a:ln>
+            <a:noFill/>
+          </a:ln>
+        </p:spPr>
+        <p:txBody>
+          <a:bodyPr/>
+          <a:lstStyle/>
+          <a:p>
+            <a:pPr lvl="0" indent="0" marL="0">
+              <a:buNone/>
+            </a:pPr>
+            <a:r>
+              <a:rPr/>
+              <a:t>Cơ sở dữ liệu — một cột làm nên đóng góp</a:t>
+            </a:r>
+          </a:p>
+        </p:txBody>
+      </p:sp>
+      <p:sp>
+        <p:nvSpPr>
+          <p:cNvPr id="437" name="Google Shape;437;p31"/>
+          <p:cNvSpPr txBox="1"/>
+          <p:nvPr>
+            <p:ph idx="2" sz="half" type="body"/>
+          </p:nvPr>
+        </p:nvSpPr>
+        <p:spPr/>
+        <p:txBody>
+          <a:bodyPr/>
+          <a:lstStyle/>
+          <a:p>
+            <a:pPr lvl="0" indent="0" marL="0">
+              <a:buNone/>
+            </a:pPr>
+            <a:r>
+              <a:rPr/>
+              <a:t>Lưu </a:t>
+            </a:r>
+            <a:r>
+              <a:rPr b="1"/>
+              <a:t>cả hai</a:t>
+            </a:r>
+            <a:r>
+              <a:rPr/>
+              <a:t> chuỗi trên </a:t>
+            </a:r>
+            <a:r>
+              <a:rPr b="1"/>
+              <a:t>cùng một bản ghi</a:t>
+            </a:r>
+            <a:r>
+              <a:rPr/>
+              <a:t> — không có </a:t>
+            </a:r>
+            <a:r>
+              <a:rPr>
+                <a:latin typeface="Courier"/>
+              </a:rPr>
+              <a:t>raw_ocr_text</a:t>
+            </a:r>
+            <a:r>
+              <a:rPr/>
+              <a:t> thì </a:t>
+            </a:r>
+            <a:r>
+              <a:rPr b="1"/>
+              <a:t>không đo được</a:t>
+            </a:r>
+            <a:r>
+              <a:rPr/>
+              <a:t> đóng góp của hậu xử lý</a:t>
+            </a:r>
+          </a:p>
+        </p:txBody>
+      </p:sp>
+      <p:graphicFrame>
+        <p:nvGraphicFramePr>
+          <p:cNvPr id="6" name="Content Placeholder 5"/>
+          <p:cNvGraphicFramePr>
+            <a:graphicFrameLocks noGrp="1"/>
+          </p:cNvGraphicFramePr>
+          <p:nvPr>
+            <p:ph idx="1"/>
+          </p:nvPr>
+        </p:nvGraphicFramePr>
+        <p:xfrm>
+          <a:off x="5156200" y="190500"/>
+          <a:ext cx="6235700" cy="5969000"/>
+        </p:xfrm>
+        <a:graphic>
+          <a:graphicData uri="http://schemas.openxmlformats.org/drawingml/2006/table">
+            <a:tbl>
+              <a:tblPr firstRow="1" bandRow="1">
+                <a:tableStyleId>{45BEF19B-5B1D-4A26-B267-ECC71EF7E2D4}</a:tableStyleId>
+              </a:tblPr>
+              <a:tblGrid>
+                <a:gridCol w="3111500"/>
+                <a:gridCol w="3111500"/>
+              </a:tblGrid>
+              <a:tr h="0">
+                <a:tc>
+                  <a:txBody>
+                    <a:bodyPr/>
+                    <a:lstStyle/>
+                    <a:p>
+                      <a:pPr lvl="0" indent="0" marL="0">
+                        <a:buNone/>
+                      </a:pPr>
+                      <a:r>
+                        <a:rPr/>
+                        <a:t>Cột</a:t>
+                      </a:r>
+                    </a:p>
+                  </a:txBody>
+                  <a:tcPr/>
+                </a:tc>
+                <a:tc>
+                  <a:txBody>
+                    <a:bodyPr/>
+                    <a:lstStyle/>
+                    <a:p>
+                      <a:pPr lvl="0" indent="0" marL="0">
+                        <a:buNone/>
+                      </a:pPr>
+                      <a:r>
+                        <a:rPr/>
+                        <a:t>Nội dung</a:t>
+                      </a:r>
+                    </a:p>
+                  </a:txBody>
+                  <a:tcPr/>
+                </a:tc>
+              </a:tr>
+              <a:tr h="0">
+                <a:tc>
+                  <a:txBody>
+                    <a:bodyPr/>
+                    <a:lstStyle/>
+                    <a:p>
+                      <a:pPr lvl="0" indent="0" marL="0">
+                        <a:buNone/>
+                      </a:pPr>
+                      <a:r>
+                        <a:rPr>
+                          <a:latin typeface="Courier"/>
+                        </a:rPr>
+                        <a:t>raw_ocr_text</a:t>
+                      </a:r>
+                    </a:p>
+                  </a:txBody>
+                </a:tc>
+                <a:tc>
+                  <a:txBody>
+                    <a:bodyPr/>
+                    <a:lstStyle/>
+                    <a:p>
+                      <a:pPr lvl="0" indent="0" marL="0">
+                        <a:buNone/>
+                      </a:pPr>
+                      <a:r>
+                        <a:rPr/>
+                        <a:t>Chuỗi </a:t>
+                      </a:r>
+                      <a:r>
+                        <a:rPr b="1"/>
+                        <a:t>thô</a:t>
+                      </a:r>
+                      <a:r>
+                        <a:rPr/>
+                        <a:t> do PaddleOCR trả về</a:t>
+                      </a:r>
+                    </a:p>
+                  </a:txBody>
+                </a:tc>
+              </a:tr>
+              <a:tr h="0">
+                <a:tc>
+                  <a:txBody>
+                    <a:bodyPr/>
+                    <a:lstStyle/>
+                    <a:p>
+                      <a:pPr lvl="0" indent="0" marL="0">
+                        <a:buNone/>
+                      </a:pPr>
+                      <a:r>
+                        <a:rPr>
+                          <a:latin typeface="Courier"/>
+                        </a:rPr>
+                        <a:t>plate_number</a:t>
+                      </a:r>
+                    </a:p>
+                  </a:txBody>
+                </a:tc>
+                <a:tc>
+                  <a:txBody>
+                    <a:bodyPr/>
+                    <a:lstStyle/>
+                    <a:p>
+                      <a:pPr lvl="0" indent="0" marL="0">
+                        <a:buNone/>
+                      </a:pPr>
+                      <a:r>
+                        <a:rPr/>
+                        <a:t>Chuỗi </a:t>
+                      </a:r>
+                      <a:r>
+                        <a:rPr b="1"/>
+                        <a:t>sau</a:t>
+                      </a:r>
+                      <a:r>
+                        <a:rPr/>
+                        <a:t> bộ luật hậu xử lý</a:t>
+                      </a:r>
+                    </a:p>
+                  </a:txBody>
+                </a:tc>
+              </a:tr>
+              <a:tr h="0">
+                <a:tc>
+                  <a:txBody>
+                    <a:bodyPr/>
+                    <a:lstStyle/>
+                    <a:p>
+                      <a:pPr lvl="0" indent="0" marL="0">
+                        <a:buNone/>
+                      </a:pPr>
+                      <a:r>
+                        <a:rPr>
+                          <a:latin typeface="Courier"/>
+                        </a:rPr>
+                        <a:t>is_valid_format</a:t>
+                      </a:r>
+                    </a:p>
+                  </a:txBody>
+                </a:tc>
+                <a:tc>
+                  <a:txBody>
+                    <a:bodyPr/>
+                    <a:lstStyle/>
+                    <a:p>
+                      <a:pPr lvl="0" indent="0" marL="0">
+                        <a:buNone/>
+                      </a:pPr>
+                      <a:r>
+                        <a:rPr/>
+                        <a:t>Hợp quy cách Việt Nam hay không</a:t>
+                      </a:r>
+                    </a:p>
+                  </a:txBody>
+                </a:tc>
+              </a:tr>
+            </a:tbl>
+          </a:graphicData>
+        </a:graphic>
+      </p:graphicFrame>
+      <p:sp>
+        <p:nvSpPr>
+          <p:cNvPr id="449" name="Google Shape;449;p31"/>
+          <p:cNvSpPr txBox="1"/>
+          <p:nvPr>
+            <p:ph idx="12" type="sldNum"/>
+          </p:nvPr>
+        </p:nvSpPr>
+        <p:spPr>
+          <a:xfrm>
+            <a:off x="58380" y="6508358"/>
+            <a:ext cx="349642" cy="349642"/>
           </a:xfrm>
           <a:prstGeom prst="rect">
             <a:avLst/>

--- a/docs/slides/slides.pptx
+++ b/docs/slides/slides.pptx
@@ -43982,7 +43982,7 @@
   <p:cSld>
     <p:spTree>
       <p:nvGrpSpPr>
-        <p:cNvPr id="134" name="Shape 134"/>
+        <p:cNvPr id="428" name="Shape 428"/>
         <p:cNvGrpSpPr/>
         <p:nvPr/>
       </p:nvGrpSpPr>
@@ -43996,7 +43996,7 @@
       </p:grpSpPr>
       <p:sp>
         <p:nvSpPr>
-          <p:cNvPr id="142" name="Google Shape;142;p23"/>
+          <p:cNvPr id="436" name="Google Shape;436;p31"/>
           <p:cNvSpPr txBox="1"/>
           <p:nvPr>
             <p:ph type="title"/>
@@ -44004,8 +44004,8 @@
         </p:nvSpPr>
         <p:spPr>
           <a:xfrm>
-            <a:off x="774145" y="223964"/>
-            <a:ext cx="10579655" cy="785896"/>
+            <a:off x="774146" y="202009"/>
+            <a:ext cx="3932227" cy="1698043"/>
           </a:xfrm>
           <a:prstGeom prst="rect">
             <a:avLst/>
@@ -44031,16 +44031,33 @@
       </p:sp>
       <p:sp>
         <p:nvSpPr>
-          <p:cNvPr id="143" name="Google Shape;143;p23"/>
+          <p:cNvPr id="437" name="Google Shape;437;p31"/>
           <p:cNvSpPr txBox="1"/>
           <p:nvPr>
-            <p:ph idx="1"/>
+            <p:ph idx="2" sz="half" type="body"/>
           </p:nvPr>
         </p:nvSpPr>
         <p:spPr/>
         <p:txBody>
           <a:bodyPr/>
           <a:lstStyle/>
+          <a:p>
+            <a:pPr lvl="0" indent="0" marL="0">
+              <a:buNone/>
+            </a:pPr>
+            <a:r>
+              <a:rPr/>
+              <a:t>Nhánh </a:t>
+            </a:r>
+            <a:r>
+              <a:rPr b="1"/>
+              <a:t>đỏ</a:t>
+            </a:r>
+            <a:r>
+              <a:rPr/>
+              <a:t> là đóng góp kỹ thuật lõi</a:t>
+            </a:r>
+          </a:p>
           <a:p>
             <a:pPr lvl="0" indent="0" marL="0">
               <a:buNone/>
@@ -44058,27 +44075,41 @@
               <a:t> — không phải lỗi</a:t>
             </a:r>
           </a:p>
-          <a:p>
-            <a:pPr lvl="0" indent="0">
-              <a:buNone/>
-            </a:pPr>
-            <a:r>
-              <a:rPr>
-                <a:latin typeface="Courier"/>
-              </a:rPr>
-              <a:t>Ảnh → YOLO11n phát hiện → cắt vùng biển
-    → phân loại số dòng (ngưỡng tỉ lệ 2,5)
-        ├─ 1 dòng → PaddleOCR
-        └─ 2 dòng → nắn hình → tách → ghép ngang → PaddleOCR
-    → chuẩn hoá + sửa lỗi theo VỊ TRÍ → kiểm tra hợp lệ
-    → lưu CẢ chuỗi thô LẪN chuỗi đã sửa</a:t>
-            </a:r>
-          </a:p>
         </p:txBody>
       </p:sp>
+      <p:pic>
+        <p:nvPicPr>
+          <p:cNvPr descr="figures/fig-pipeline.png" id="0" name="Picture 1"/>
+          <p:cNvPicPr>
+            <a:picLocks noGrp="1" noChangeAspect="1"/>
+          </p:cNvPicPr>
+          <p:nvPr/>
+        </p:nvPicPr>
+        <p:blipFill>
+          <a:blip r:embed="rId2"/>
+          <a:stretch>
+            <a:fillRect/>
+          </a:stretch>
+        </p:blipFill>
+        <p:spPr bwMode="auto">
+          <a:xfrm>
+            <a:off x="5156200" y="228600"/>
+            <a:ext cx="6235700" cy="5880100"/>
+          </a:xfrm>
+          <a:prstGeom prst="rect">
+            <a:avLst/>
+          </a:prstGeom>
+          <a:noFill/>
+          <a:ln w="9525">
+            <a:noFill/>
+            <a:headEnd/>
+            <a:tailEnd/>
+          </a:ln>
+        </p:spPr>
+      </p:pic>
       <p:sp>
         <p:nvSpPr>
-          <p:cNvPr id="155" name="Google Shape;155;p23"/>
+          <p:cNvPr id="449" name="Google Shape;449;p31"/>
           <p:cNvSpPr txBox="1"/>
           <p:nvPr>
             <p:ph idx="12" type="sldNum"/>

--- a/docs/slides/slides.pptx
+++ b/docs/slides/slides.pptx
@@ -44628,7 +44628,7 @@
   <p:cSld>
     <p:spTree>
       <p:nvGrpSpPr>
-        <p:cNvPr id="134" name="Shape 134"/>
+        <p:cNvPr id="428" name="Shape 428"/>
         <p:cNvGrpSpPr/>
         <p:nvPr/>
       </p:nvGrpSpPr>
@@ -44642,7 +44642,7 @@
       </p:grpSpPr>
       <p:sp>
         <p:nvSpPr>
-          <p:cNvPr id="142" name="Google Shape;142;p23"/>
+          <p:cNvPr id="436" name="Google Shape;436;p31"/>
           <p:cNvSpPr txBox="1"/>
           <p:nvPr>
             <p:ph type="title"/>
@@ -44650,8 +44650,8 @@
         </p:nvSpPr>
         <p:spPr>
           <a:xfrm>
-            <a:off x="774145" y="223964"/>
-            <a:ext cx="10579655" cy="785896"/>
+            <a:off x="774146" y="202009"/>
+            <a:ext cx="3932227" cy="1698043"/>
           </a:xfrm>
           <a:prstGeom prst="rect">
             <a:avLst/>
@@ -44677,10 +44677,10 @@
       </p:sp>
       <p:sp>
         <p:nvSpPr>
-          <p:cNvPr id="143" name="Google Shape;143;p23"/>
+          <p:cNvPr id="437" name="Google Shape;437;p31"/>
           <p:cNvSpPr txBox="1"/>
           <p:nvPr>
-            <p:ph idx="1"/>
+            <p:ph idx="2" sz="half" type="body"/>
           </p:nvPr>
         </p:nvSpPr>
         <p:spPr/>
@@ -44693,64 +44693,12 @@
             </a:pPr>
             <a:r>
               <a:rPr b="1"/>
-              <a:t>Chọn YOLO11n — loại bằng hai bước</a:t>
-            </a:r>
-          </a:p>
-          <a:p>
-            <a:pPr lvl="0" indent="0" marL="347663">
-              <a:buAutoNum type="arabicPeriod"/>
-            </a:pPr>
-            <a:r>
-              <a:rPr/>
-              <a:t>Máy triển khai không GPU ⇒ bắt buộc có </a:t>
-            </a:r>
-            <a:r>
-              <a:rPr b="1"/>
-              <a:t>số liệu tốc độ CPU chính thức</a:t>
-            </a:r>
-          </a:p>
-          <a:p>
-            <a:pPr lvl="0" indent="0" marL="347663">
-              <a:buAutoNum type="arabicPeriod"/>
-            </a:pPr>
-            <a:r>
-              <a:rPr/>
-              <a:t>YOLO11n vượt YOLOv8n </a:t>
-            </a:r>
-            <a:r>
-              <a:rPr b="1"/>
-              <a:t>đồng thời cả hai chiều</a:t>
+              <a:t>YOLO11n</a:t>
             </a:r>
             <a:r>
               <a:rPr/>
-              <a:t>: mAP 39,5 vs 37,3 · CPU 56,1 ms vs 80,4 ms</a:t>
+              <a:t>, </a:t>
             </a:r>
-          </a:p>
-          <a:p>
-            <a:pPr lvl="0"/>
-            <a:r>
-              <a:rPr/>
-              <a:t>Huấn luyện </a:t>
-            </a:r>
-            <a:r>
-              <a:rPr b="1"/>
-              <a:t>và</a:t>
-            </a:r>
-            <a:r>
-              <a:rPr/>
-              <a:t> suy luận đều </a:t>
-            </a:r>
-            <a:r>
-              <a:rPr b="1"/>
-              <a:t>trên CPU</a:t>
-            </a:r>
-            <a:r>
-              <a:rPr/>
-              <a:t> — 10,1 giờ, không dùng GPU nào</a:t>
-            </a:r>
-          </a:p>
-          <a:p>
-            <a:pPr lvl="0"/>
             <a:r>
               <a:rPr>
                 <a:latin typeface="Courier"/>
@@ -44759,20 +44707,52 @@
             </a:r>
             <a:r>
               <a:rPr/>
-              <a:t> · 20 epoch · seed cố định · </a:t>
+              <a:t>, 20 epoch, seed cố định — huấn luyện </a:t>
             </a:r>
             <a:r>
-              <a:rPr>
-                <a:latin typeface="Courier"/>
-              </a:rPr>
-              <a:t>deterministic</a:t>
+              <a:rPr b="1"/>
+              <a:t>và</a:t>
+            </a:r>
+            <a:r>
+              <a:rPr/>
+              <a:t> suy luận đều trên CPU, hết 10,1 giờ, không dùng GPU nào</a:t>
             </a:r>
           </a:p>
         </p:txBody>
       </p:sp>
+      <p:pic>
+        <p:nvPicPr>
+          <p:cNvPr descr="figures/fig-training-curve.png" id="0" name="Picture 1"/>
+          <p:cNvPicPr>
+            <a:picLocks noGrp="1" noChangeAspect="1"/>
+          </p:cNvPicPr>
+          <p:nvPr/>
+        </p:nvPicPr>
+        <p:blipFill>
+          <a:blip r:embed="rId2"/>
+          <a:stretch>
+            <a:fillRect/>
+          </a:stretch>
+        </p:blipFill>
+        <p:spPr bwMode="auto">
+          <a:xfrm>
+            <a:off x="5156200" y="774700"/>
+            <a:ext cx="6235700" cy="4787900"/>
+          </a:xfrm>
+          <a:prstGeom prst="rect">
+            <a:avLst/>
+          </a:prstGeom>
+          <a:noFill/>
+          <a:ln w="9525">
+            <a:noFill/>
+            <a:headEnd/>
+            <a:tailEnd/>
+          </a:ln>
+        </p:spPr>
+      </p:pic>
       <p:sp>
         <p:nvSpPr>
-          <p:cNvPr id="155" name="Google Shape;155;p23"/>
+          <p:cNvPr id="449" name="Google Shape;449;p31"/>
           <p:cNvSpPr txBox="1"/>
           <p:nvPr>
             <p:ph idx="12" type="sldNum"/>
@@ -46103,342 +46083,41 @@
             </a:r>
             <a:r>
               <a:rPr/>
-              <a:t>, không sửa toàn cục — cùng ký tự </a:t>
-            </a:r>
-            <a:r>
-              <a:rPr>
-                <a:latin typeface="Courier"/>
-              </a:rPr>
-              <a:t>O</a:t>
-            </a:r>
-            <a:r>
-              <a:rPr/>
-              <a:t>/</a:t>
-            </a:r>
-            <a:r>
-              <a:rPr>
-                <a:latin typeface="Courier"/>
-              </a:rPr>
-              <a:t>0</a:t>
-            </a:r>
-            <a:r>
-              <a:rPr/>
-              <a:t> nhưng hai vị trí cần hai luật ngược nhau</a:t>
+              <a:t>, không sửa toàn cục — đóng góp kỹ thuật riêng của đồ án</a:t>
             </a:r>
           </a:p>
         </p:txBody>
       </p:sp>
-      <p:graphicFrame>
-        <p:nvGraphicFramePr>
-          <p:cNvPr id="6" name="Content Placeholder 5"/>
-          <p:cNvGraphicFramePr>
-            <a:graphicFrameLocks noGrp="1"/>
-          </p:cNvGraphicFramePr>
-          <p:nvPr>
-            <p:ph idx="1"/>
-          </p:nvPr>
-        </p:nvGraphicFramePr>
-        <p:xfrm>
-          <a:off x="5156200" y="190500"/>
-          <a:ext cx="6235700" cy="5969000"/>
-        </p:xfrm>
-        <a:graphic>
-          <a:graphicData uri="http://schemas.openxmlformats.org/drawingml/2006/table">
-            <a:tbl>
-              <a:tblPr firstRow="1" bandRow="1">
-                <a:tableStyleId>{45BEF19B-5B1D-4A26-B267-ECC71EF7E2D4}</a:tableStyleId>
-              </a:tblPr>
-              <a:tblGrid>
-                <a:gridCol w="2070100"/>
-                <a:gridCol w="2070100"/>
-                <a:gridCol w="2070100"/>
-              </a:tblGrid>
-              <a:tr h="0">
-                <a:tc>
-                  <a:txBody>
-                    <a:bodyPr/>
-                    <a:lstStyle/>
-                    <a:p>
-                      <a:pPr lvl="0" indent="0" marL="0">
-                        <a:buNone/>
-                      </a:pPr>
-                      <a:r>
-                        <a:rPr/>
-                        <a:t>Vị trí</a:t>
-                      </a:r>
-                    </a:p>
-                  </a:txBody>
-                  <a:tcPr/>
-                </a:tc>
-                <a:tc>
-                  <a:txBody>
-                    <a:bodyPr/>
-                    <a:lstStyle/>
-                    <a:p>
-                      <a:pPr lvl="0" indent="0" marL="0">
-                        <a:buNone/>
-                      </a:pPr>
-                      <a:r>
-                        <a:rPr/>
-                        <a:t>Ràng buộc</a:t>
-                      </a:r>
-                    </a:p>
-                  </a:txBody>
-                  <a:tcPr/>
-                </a:tc>
-                <a:tc>
-                  <a:txBody>
-                    <a:bodyPr/>
-                    <a:lstStyle/>
-                    <a:p>
-                      <a:pPr lvl="0" indent="0" marL="0">
-                        <a:buNone/>
-                      </a:pPr>
-                      <a:r>
-                        <a:rPr/>
-                        <a:t>Luật sửa</a:t>
-                      </a:r>
-                    </a:p>
-                  </a:txBody>
-                  <a:tcPr/>
-                </a:tc>
-              </a:tr>
-              <a:tr h="0">
-                <a:tc>
-                  <a:txBody>
-                    <a:bodyPr/>
-                    <a:lstStyle/>
-                    <a:p>
-                      <a:pPr lvl="0" indent="0" marL="0">
-                        <a:buNone/>
-                      </a:pPr>
-                      <a:r>
-                        <a:rPr/>
-                        <a:t>2 ký tự đầu — mã tỉnh</a:t>
-                      </a:r>
-                    </a:p>
-                  </a:txBody>
-                </a:tc>
-                <a:tc>
-                  <a:txBody>
-                    <a:bodyPr/>
-                    <a:lstStyle/>
-                    <a:p>
-                      <a:pPr lvl="0" indent="0" marL="0">
-                        <a:buNone/>
-                      </a:pPr>
-                      <a:r>
-                        <a:rPr/>
-                        <a:t>Chữ số, thuộc 81 mã hợp lệ</a:t>
-                      </a:r>
-                    </a:p>
-                  </a:txBody>
-                </a:tc>
-                <a:tc>
-                  <a:txBody>
-                    <a:bodyPr/>
-                    <a:lstStyle/>
-                    <a:p>
-                      <a:pPr lvl="0" indent="0" marL="0">
-                        <a:buNone/>
-                      </a:pPr>
-                      <a:r>
-                        <a:rPr>
-                          <a:latin typeface="Courier"/>
-                        </a:rPr>
-                        <a:t>O→0</a:t>
-                      </a:r>
-                      <a:r>
-                        <a:rPr/>
-                        <a:t> </a:t>
-                      </a:r>
-                      <a:r>
-                        <a:rPr>
-                          <a:latin typeface="Courier"/>
-                        </a:rPr>
-                        <a:t>I→1</a:t>
-                      </a:r>
-                      <a:r>
-                        <a:rPr/>
-                        <a:t> </a:t>
-                      </a:r>
-                      <a:r>
-                        <a:rPr>
-                          <a:latin typeface="Courier"/>
-                        </a:rPr>
-                        <a:t>S→5</a:t>
-                      </a:r>
-                    </a:p>
-                  </a:txBody>
-                </a:tc>
-              </a:tr>
-              <a:tr h="0">
-                <a:tc>
-                  <a:txBody>
-                    <a:bodyPr/>
-                    <a:lstStyle/>
-                    <a:p>
-                      <a:pPr lvl="0" indent="0" marL="0">
-                        <a:buNone/>
-                      </a:pPr>
-                      <a:r>
-                        <a:rPr/>
-                        <a:t>Vị trí seri</a:t>
-                      </a:r>
-                    </a:p>
-                  </a:txBody>
-                </a:tc>
-                <a:tc>
-                  <a:txBody>
-                    <a:bodyPr/>
-                    <a:lstStyle/>
-                    <a:p>
-                      <a:pPr lvl="0" indent="0" marL="0">
-                        <a:buNone/>
-                      </a:pPr>
-                      <a:r>
-                        <a:rPr/>
-                        <a:t>Chữ cái</a:t>
-                      </a:r>
-                    </a:p>
-                  </a:txBody>
-                </a:tc>
-                <a:tc>
-                  <a:txBody>
-                    <a:bodyPr/>
-                    <a:lstStyle/>
-                    <a:p>
-                      <a:pPr lvl="0" indent="0" marL="0">
-                        <a:buNone/>
-                      </a:pPr>
-                      <a:r>
-                        <a:rPr>
-                          <a:latin typeface="Courier"/>
-                        </a:rPr>
-                        <a:t>0→O</a:t>
-                      </a:r>
-                      <a:r>
-                        <a:rPr/>
-                        <a:t> </a:t>
-                      </a:r>
-                      <a:r>
-                        <a:rPr>
-                          <a:latin typeface="Courier"/>
-                        </a:rPr>
-                        <a:t>1→I</a:t>
-                      </a:r>
-                      <a:r>
-                        <a:rPr/>
-                        <a:t> </a:t>
-                      </a:r>
-                      <a:r>
-                        <a:rPr>
-                          <a:latin typeface="Courier"/>
-                        </a:rPr>
-                        <a:t>5→S</a:t>
-                      </a:r>
-                    </a:p>
-                  </a:txBody>
-                </a:tc>
-              </a:tr>
-              <a:tr h="0">
-                <a:tc>
-                  <a:txBody>
-                    <a:bodyPr/>
-                    <a:lstStyle/>
-                    <a:p>
-                      <a:pPr lvl="0" indent="0" marL="0">
-                        <a:buNone/>
-                      </a:pPr>
-                      <a:r>
-                        <a:rPr/>
-                        <a:t>Số đăng ký</a:t>
-                      </a:r>
-                    </a:p>
-                  </a:txBody>
-                </a:tc>
-                <a:tc>
-                  <a:txBody>
-                    <a:bodyPr/>
-                    <a:lstStyle/>
-                    <a:p>
-                      <a:pPr lvl="0" indent="0" marL="0">
-                        <a:buNone/>
-                      </a:pPr>
-                      <a:r>
-                        <a:rPr/>
-                        <a:t>Chữ số</a:t>
-                      </a:r>
-                    </a:p>
-                  </a:txBody>
-                </a:tc>
-                <a:tc>
-                  <a:txBody>
-                    <a:bodyPr/>
-                    <a:lstStyle/>
-                    <a:p>
-                      <a:pPr lvl="0" indent="0" marL="0">
-                        <a:buNone/>
-                      </a:pPr>
-                      <a:r>
-                        <a:rPr/>
-                        <a:t>ép về chữ số</a:t>
-                      </a:r>
-                    </a:p>
-                  </a:txBody>
-                </a:tc>
-              </a:tr>
-              <a:tr h="0">
-                <a:tc>
-                  <a:txBody>
-                    <a:bodyPr/>
-                    <a:lstStyle/>
-                    <a:p>
-                      <a:pPr lvl="0" indent="0" marL="0">
-                        <a:buNone/>
-                      </a:pPr>
-                      <a:r>
-                        <a:rPr b="1"/>
-                        <a:t>Vùng cấm sửa</a:t>
-                      </a:r>
-                    </a:p>
-                  </a:txBody>
-                </a:tc>
-                <a:tc>
-                  <a:txBody>
-                    <a:bodyPr/>
-                    <a:lstStyle/>
-                    <a:p>
-                      <a:pPr lvl="0" indent="0" marL="0">
-                        <a:buNone/>
-                      </a:pPr>
-                      <a:r>
-                        <a:rPr/>
-                        <a:t>Cả chữ và số đều hợp lệ</a:t>
-                      </a:r>
-                    </a:p>
-                  </a:txBody>
-                </a:tc>
-                <a:tc>
-                  <a:txBody>
-                    <a:bodyPr/>
-                    <a:lstStyle/>
-                    <a:p>
-                      <a:pPr lvl="0" indent="0" marL="0">
-                        <a:buNone/>
-                      </a:pPr>
-                      <a:r>
-                        <a:rPr b="1"/>
-                        <a:t>không đụng vào</a:t>
-                      </a:r>
-                    </a:p>
-                  </a:txBody>
-                </a:tc>
-              </a:tr>
-            </a:tbl>
-          </a:graphicData>
-        </a:graphic>
-      </p:graphicFrame>
+      <p:pic>
+        <p:nvPicPr>
+          <p:cNvPr descr="figures/fig-position-rules.png" id="0" name="Picture 1"/>
+          <p:cNvPicPr>
+            <a:picLocks noGrp="1" noChangeAspect="1"/>
+          </p:cNvPicPr>
+          <p:nvPr/>
+        </p:nvPicPr>
+        <p:blipFill>
+          <a:blip r:embed="rId2"/>
+          <a:stretch>
+            <a:fillRect/>
+          </a:stretch>
+        </p:blipFill>
+        <p:spPr bwMode="auto">
+          <a:xfrm>
+            <a:off x="5156200" y="977900"/>
+            <a:ext cx="6235700" cy="4406900"/>
+          </a:xfrm>
+          <a:prstGeom prst="rect">
+            <a:avLst/>
+          </a:prstGeom>
+          <a:noFill/>
+          <a:ln w="9525">
+            <a:noFill/>
+            <a:headEnd/>
+            <a:tailEnd/>
+          </a:ln>
+        </p:spPr>
+      </p:pic>
       <p:sp>
         <p:nvSpPr>
           <p:cNvPr id="449" name="Google Shape;449;p31"/>
@@ -47598,246 +47277,57 @@
             </a:pPr>
             <a:r>
               <a:rPr/>
-              <a:t>CSDL lưu </a:t>
+              <a:t>Sửa đúng </a:t>
             </a:r>
             <a:r>
               <a:rPr b="1"/>
-              <a:t>cả hai</a:t>
+              <a:t>319 biển</a:t>
             </a:r>
             <a:r>
               <a:rPr/>
-              <a:t> chuỗi trên cùng một bản ghi ⇒ đo được hiệu số</a:t>
-            </a:r>
-          </a:p>
-          <a:p>
-            <a:pPr lvl="0" indent="0" marL="0">
-              <a:buNone/>
-            </a:pPr>
-            <a:r>
-              <a:rPr/>
-              <a:t>Dồn gần trọn vào biển 2 dòng: </a:t>
+              <a:t>, làm hỏng </a:t>
             </a:r>
             <a:r>
               <a:rPr b="1"/>
-              <a:t>+13,97 điểm</a:t>
+              <a:t>0</a:t>
             </a:r>
             <a:r>
               <a:rPr/>
-              <a:t> </a:t>
-            </a:r>
-            <a:r>
-              <a:rPr i="1"/>
-              <a:t>(1 dòng chỉ +1,23)</a:t>
+              <a:t> — dồn gần trọn vào biển 2 dòng</a:t>
             </a:r>
           </a:p>
         </p:txBody>
       </p:sp>
-      <p:graphicFrame>
-        <p:nvGraphicFramePr>
-          <p:cNvPr id="6" name="Content Placeholder 5"/>
-          <p:cNvGraphicFramePr>
-            <a:graphicFrameLocks noGrp="1"/>
-          </p:cNvGraphicFramePr>
-          <p:nvPr>
-            <p:ph idx="1"/>
-          </p:nvPr>
-        </p:nvGraphicFramePr>
-        <p:xfrm>
-          <a:off x="5156200" y="190500"/>
-          <a:ext cx="6235700" cy="5969000"/>
-        </p:xfrm>
-        <a:graphic>
-          <a:graphicData uri="http://schemas.openxmlformats.org/drawingml/2006/table">
-            <a:tbl>
-              <a:tblPr firstRow="1" bandRow="1">
-                <a:tableStyleId>{45BEF19B-5B1D-4A26-B267-ECC71EF7E2D4}</a:tableStyleId>
-              </a:tblPr>
-              <a:tblGrid>
-                <a:gridCol w="3111500"/>
-                <a:gridCol w="3111500"/>
-              </a:tblGrid>
-              <a:tr h="0">
-                <a:tc>
-                  <a:txBody>
-                    <a:bodyPr/>
-                    <a:lstStyle/>
-                    <a:p>
-                      <a:pPr lvl="0" indent="0" marL="0">
-                        <a:buNone/>
-                      </a:pPr>
-                      <a:r>
-                        <a:rPr/>
-                        <a:t>Chỉ số</a:t>
-                      </a:r>
-                    </a:p>
-                  </a:txBody>
-                  <a:tcPr/>
-                </a:tc>
-                <a:tc>
-                  <a:txBody>
-                    <a:bodyPr/>
-                    <a:lstStyle/>
-                    <a:p>
-                      <a:pPr lvl="0" indent="0" marL="0" algn="r">
-                        <a:buNone/>
-                      </a:pPr>
-                      <a:r>
-                        <a:rPr/>
-                        <a:t>Đo được</a:t>
-                      </a:r>
-                    </a:p>
-                  </a:txBody>
-                  <a:tcPr/>
-                </a:tc>
-              </a:tr>
-              <a:tr h="0">
-                <a:tc>
-                  <a:txBody>
-                    <a:bodyPr/>
-                    <a:lstStyle/>
-                    <a:p>
-                      <a:pPr lvl="0" indent="0" marL="0">
-                        <a:buNone/>
-                      </a:pPr>
-                      <a:r>
-                        <a:rPr/>
-                        <a:t>A5 — chuỗi đúng </a:t>
-                      </a:r>
-                      <a:r>
-                        <a:rPr b="1"/>
-                        <a:t>trước</a:t>
-                      </a:r>
-                      <a:r>
-                        <a:rPr/>
-                        <a:t> hậu xử lý</a:t>
-                      </a:r>
-                    </a:p>
-                  </a:txBody>
-                </a:tc>
-                <a:tc>
-                  <a:txBody>
-                    <a:bodyPr/>
-                    <a:lstStyle/>
-                    <a:p>
-                      <a:pPr lvl="0" indent="0" marL="0" algn="r">
-                        <a:buNone/>
-                      </a:pPr>
-                      <a:r>
-                        <a:rPr/>
-                        <a:t>0,6373</a:t>
-                      </a:r>
-                    </a:p>
-                  </a:txBody>
-                </a:tc>
-              </a:tr>
-              <a:tr h="0">
-                <a:tc>
-                  <a:txBody>
-                    <a:bodyPr/>
-                    <a:lstStyle/>
-                    <a:p>
-                      <a:pPr lvl="0" indent="0" marL="0">
-                        <a:buNone/>
-                      </a:pPr>
-                      <a:r>
-                        <a:rPr/>
-                        <a:t>A6 — chuỗi đúng </a:t>
-                      </a:r>
-                      <a:r>
-                        <a:rPr b="1"/>
-                        <a:t>sau</a:t>
-                      </a:r>
-                      <a:r>
-                        <a:rPr/>
-                        <a:t> hậu xử lý</a:t>
-                      </a:r>
-                    </a:p>
-                  </a:txBody>
-                </a:tc>
-                <a:tc>
-                  <a:txBody>
-                    <a:bodyPr/>
-                    <a:lstStyle/>
-                    <a:p>
-                      <a:pPr lvl="0" indent="0" marL="0" algn="r">
-                        <a:buNone/>
-                      </a:pPr>
-                      <a:r>
-                        <a:rPr b="1"/>
-                        <a:t>0,7512</a:t>
-                      </a:r>
-                    </a:p>
-                  </a:txBody>
-                </a:tc>
-              </a:tr>
-              <a:tr h="0">
-                <a:tc>
-                  <a:txBody>
-                    <a:bodyPr/>
-                    <a:lstStyle/>
-                    <a:p>
-                      <a:pPr lvl="0" indent="0" marL="0">
-                        <a:buNone/>
-                      </a:pPr>
-                      <a:r>
-                        <a:rPr b="1"/>
-                        <a:t>Đóng góp</a:t>
-                      </a:r>
-                    </a:p>
-                  </a:txBody>
-                </a:tc>
-                <a:tc>
-                  <a:txBody>
-                    <a:bodyPr/>
-                    <a:lstStyle/>
-                    <a:p>
-                      <a:pPr lvl="0" indent="0" marL="0" algn="r">
-                        <a:buNone/>
-                      </a:pPr>
-                      <a:r>
-                        <a:rPr b="1"/>
-                        <a:t>+11,39 điểm</a:t>
-                      </a:r>
-                    </a:p>
-                  </a:txBody>
-                </a:tc>
-              </a:tr>
-              <a:tr h="0">
-                <a:tc>
-                  <a:txBody>
-                    <a:bodyPr/>
-                    <a:lstStyle/>
-                    <a:p>
-                      <a:pPr lvl="0" indent="0" marL="0">
-                        <a:buNone/>
-                      </a:pPr>
-                      <a:r>
-                        <a:rPr/>
-                        <a:t>Số biển sửa đúng / làm hỏng</a:t>
-                      </a:r>
-                    </a:p>
-                  </a:txBody>
-                </a:tc>
-                <a:tc>
-                  <a:txBody>
-                    <a:bodyPr/>
-                    <a:lstStyle/>
-                    <a:p>
-                      <a:pPr lvl="0" indent="0" marL="0" algn="r">
-                        <a:buNone/>
-                      </a:pPr>
-                      <a:r>
-                        <a:rPr b="1"/>
-                        <a:t>319 / 0</a:t>
-                      </a:r>
-                    </a:p>
-                  </a:txBody>
-                </a:tc>
-              </a:tr>
-            </a:tbl>
-          </a:graphicData>
-        </a:graphic>
-      </p:graphicFrame>
+      <p:pic>
+        <p:nvPicPr>
+          <p:cNvPr descr="figures/fig-postprocess-gain.png" id="0" name="Picture 1"/>
+          <p:cNvPicPr>
+            <a:picLocks noGrp="1" noChangeAspect="1"/>
+          </p:cNvPicPr>
+          <p:nvPr/>
+        </p:nvPicPr>
+        <p:blipFill>
+          <a:blip r:embed="rId2"/>
+          <a:stretch>
+            <a:fillRect/>
+          </a:stretch>
+        </p:blipFill>
+        <p:spPr bwMode="auto">
+          <a:xfrm>
+            <a:off x="5156200" y="622300"/>
+            <a:ext cx="6235700" cy="5105400"/>
+          </a:xfrm>
+          <a:prstGeom prst="rect">
+            <a:avLst/>
+          </a:prstGeom>
+          <a:noFill/>
+          <a:ln w="9525">
+            <a:noFill/>
+            <a:headEnd/>
+            <a:tailEnd/>
+          </a:ln>
+        </p:spPr>
+      </p:pic>
       <p:sp>
         <p:nvSpPr>
           <p:cNvPr id="449" name="Google Shape;449;p31"/>
@@ -55180,241 +54670,41 @@
             </a:r>
             <a:r>
               <a:rPr/>
-              <a:t> — cấm import FastAPI hoặc Pydantic. Nó không có mũi tên nào đi lên, nên thay engine OCR </a:t>
-            </a:r>
-            <a:r>
-              <a:rPr b="1"/>
-              <a:t>không đụng một dòng mã API</a:t>
+              <a:t> — cấm import FastAPI hoặc Pydantic</a:t>
             </a:r>
           </a:p>
         </p:txBody>
       </p:sp>
-      <p:graphicFrame>
-        <p:nvGraphicFramePr>
-          <p:cNvPr id="6" name="Content Placeholder 5"/>
-          <p:cNvGraphicFramePr>
-            <a:graphicFrameLocks noGrp="1"/>
-          </p:cNvGraphicFramePr>
-          <p:nvPr>
-            <p:ph idx="1"/>
-          </p:nvPr>
-        </p:nvGraphicFramePr>
-        <p:xfrm>
-          <a:off x="5156200" y="190500"/>
-          <a:ext cx="6235700" cy="5969000"/>
-        </p:xfrm>
-        <a:graphic>
-          <a:graphicData uri="http://schemas.openxmlformats.org/drawingml/2006/table">
-            <a:tbl>
-              <a:tblPr firstRow="1" bandRow="1">
-                <a:tableStyleId>{45BEF19B-5B1D-4A26-B267-ECC71EF7E2D4}</a:tableStyleId>
-              </a:tblPr>
-              <a:tblGrid>
-                <a:gridCol w="3111500"/>
-                <a:gridCol w="3111500"/>
-              </a:tblGrid>
-              <a:tr h="0">
-                <a:tc>
-                  <a:txBody>
-                    <a:bodyPr/>
-                    <a:lstStyle/>
-                    <a:p>
-                      <a:pPr lvl="0" indent="0" marL="0">
-                        <a:buNone/>
-                      </a:pPr>
-                      <a:r>
-                        <a:rPr/>
-                        <a:t>Tầng</a:t>
-                      </a:r>
-                    </a:p>
-                  </a:txBody>
-                  <a:tcPr/>
-                </a:tc>
-                <a:tc>
-                  <a:txBody>
-                    <a:bodyPr/>
-                    <a:lstStyle/>
-                    <a:p>
-                      <a:pPr lvl="0" indent="0" marL="0">
-                        <a:buNone/>
-                      </a:pPr>
-                      <a:r>
-                        <a:rPr/>
-                        <a:t>Công nghệ</a:t>
-                      </a:r>
-                    </a:p>
-                  </a:txBody>
-                  <a:tcPr/>
-                </a:tc>
-              </a:tr>
-              <a:tr h="0">
-                <a:tc>
-                  <a:txBody>
-                    <a:bodyPr/>
-                    <a:lstStyle/>
-                    <a:p>
-                      <a:pPr lvl="0" indent="0" marL="0">
-                        <a:buNone/>
-                      </a:pPr>
-                      <a:r>
-                        <a:rPr/>
-                        <a:t>L1 — Trình bày</a:t>
-                      </a:r>
-                    </a:p>
-                  </a:txBody>
-                </a:tc>
-                <a:tc>
-                  <a:txBody>
-                    <a:bodyPr/>
-                    <a:lstStyle/>
-                    <a:p>
-                      <a:pPr lvl="0" indent="0" marL="0">
-                        <a:buNone/>
-                      </a:pPr>
-                      <a:r>
-                        <a:rPr/>
-                        <a:t>React + TypeScript + Tailwind · 3 trang</a:t>
-                      </a:r>
-                    </a:p>
-                  </a:txBody>
-                </a:tc>
-              </a:tr>
-              <a:tr h="0">
-                <a:tc>
-                  <a:txBody>
-                    <a:bodyPr/>
-                    <a:lstStyle/>
-                    <a:p>
-                      <a:pPr lvl="0" indent="0" marL="0">
-                        <a:buNone/>
-                      </a:pPr>
-                      <a:r>
-                        <a:rPr/>
-                        <a:t>L2 — API</a:t>
-                      </a:r>
-                    </a:p>
-                  </a:txBody>
-                </a:tc>
-                <a:tc>
-                  <a:txBody>
-                    <a:bodyPr/>
-                    <a:lstStyle/>
-                    <a:p>
-                      <a:pPr lvl="0" indent="0" marL="0">
-                        <a:buNone/>
-                      </a:pPr>
-                      <a:r>
-                        <a:rPr/>
-                        <a:t>FastAPI + Swagger · 10 endpoint</a:t>
-                      </a:r>
-                    </a:p>
-                  </a:txBody>
-                </a:tc>
-              </a:tr>
-              <a:tr h="0">
-                <a:tc>
-                  <a:txBody>
-                    <a:bodyPr/>
-                    <a:lstStyle/>
-                    <a:p>
-                      <a:pPr lvl="0" indent="0" marL="0">
-                        <a:buNone/>
-                      </a:pPr>
-                      <a:r>
-                        <a:rPr/>
-                        <a:t>L3 — Nghiệp vụ</a:t>
-                      </a:r>
-                    </a:p>
-                  </a:txBody>
-                </a:tc>
-                <a:tc>
-                  <a:txBody>
-                    <a:bodyPr/>
-                    <a:lstStyle/>
-                    <a:p>
-                      <a:pPr lvl="0" indent="0" marL="0">
-                        <a:buNone/>
-                      </a:pPr>
-                      <a:r>
-                        <a:rPr/>
-                        <a:t>Detection / Video / History / Storage</a:t>
-                      </a:r>
-                    </a:p>
-                  </a:txBody>
-                </a:tc>
-              </a:tr>
-              <a:tr h="0">
-                <a:tc>
-                  <a:txBody>
-                    <a:bodyPr/>
-                    <a:lstStyle/>
-                    <a:p>
-                      <a:pPr lvl="0" indent="0" marL="0">
-                        <a:buNone/>
-                      </a:pPr>
-                      <a:r>
-                        <a:rPr b="1"/>
-                        <a:t>L4 — AI</a:t>
-                      </a:r>
-                    </a:p>
-                  </a:txBody>
-                </a:tc>
-                <a:tc>
-                  <a:txBody>
-                    <a:bodyPr/>
-                    <a:lstStyle/>
-                    <a:p>
-                      <a:pPr lvl="0" indent="0" marL="0">
-                        <a:buNone/>
-                      </a:pPr>
-                      <a:r>
-                        <a:rPr b="1"/>
-                        <a:t>Python thuần</a:t>
-                      </a:r>
-                      <a:r>
-                        <a:rPr/>
-                        <a:t> — YOLO11 + PaddleOCR + Normalizer</a:t>
-                      </a:r>
-                    </a:p>
-                  </a:txBody>
-                </a:tc>
-              </a:tr>
-              <a:tr h="0">
-                <a:tc>
-                  <a:txBody>
-                    <a:bodyPr/>
-                    <a:lstStyle/>
-                    <a:p>
-                      <a:pPr lvl="0" indent="0" marL="0">
-                        <a:buNone/>
-                      </a:pPr>
-                      <a:r>
-                        <a:rPr/>
-                        <a:t>L5 — Dữ liệu</a:t>
-                      </a:r>
-                    </a:p>
-                  </a:txBody>
-                </a:tc>
-                <a:tc>
-                  <a:txBody>
-                    <a:bodyPr/>
-                    <a:lstStyle/>
-                    <a:p>
-                      <a:pPr lvl="0" indent="0" marL="0">
-                        <a:buNone/>
-                      </a:pPr>
-                      <a:r>
-                        <a:rPr/>
-                        <a:t>SQLite + SQLAlchemy + Alembic</a:t>
-                      </a:r>
-                    </a:p>
-                  </a:txBody>
-                </a:tc>
-              </a:tr>
-            </a:tbl>
-          </a:graphicData>
-        </a:graphic>
-      </p:graphicFrame>
+      <p:pic>
+        <p:nvPicPr>
+          <p:cNvPr descr="figures/fig-architecture.png" id="0" name="Picture 1"/>
+          <p:cNvPicPr>
+            <a:picLocks noGrp="1" noChangeAspect="1"/>
+          </p:cNvPicPr>
+          <p:nvPr/>
+        </p:nvPicPr>
+        <p:blipFill>
+          <a:blip r:embed="rId2"/>
+          <a:stretch>
+            <a:fillRect/>
+          </a:stretch>
+        </p:blipFill>
+        <p:spPr bwMode="auto">
+          <a:xfrm>
+            <a:off x="5156200" y="850900"/>
+            <a:ext cx="6235700" cy="4635500"/>
+          </a:xfrm>
+          <a:prstGeom prst="rect">
+            <a:avLst/>
+          </a:prstGeom>
+          <a:noFill/>
+          <a:ln w="9525">
+            <a:noFill/>
+            <a:headEnd/>
+            <a:tailEnd/>
+          </a:ln>
+        </p:spPr>
+      </p:pic>
       <p:sp>
         <p:nvSpPr>
           <p:cNvPr id="449" name="Google Shape;449;p31"/>

--- a/docs/slides/slides.pptx
+++ b/docs/slides/slides.pptx
@@ -35,23 +35,25 @@
     <p:sldId id="283" r:id="rId32"/>
     <p:sldId id="284" r:id="rId33"/>
     <p:sldId id="285" r:id="rId34"/>
+    <p:sldId id="286" r:id="rId35"/>
+    <p:sldId id="287" r:id="rId36"/>
   </p:sldIdLst>
   <p:sldSz cx="12192000" cy="6858000"/>
   <p:notesSz cx="6858000" cy="9144000"/>
   <p:embeddedFontLst>
     <p:embeddedFont>
       <p:font typeface="Roboto"/>
-      <p:regular r:id="rId35"/>
-      <p:bold r:id="rId36"/>
-      <p:italic r:id="rId37"/>
-      <p:boldItalic r:id="rId38"/>
+      <p:regular r:id="rId37"/>
+      <p:bold r:id="rId38"/>
+      <p:italic r:id="rId39"/>
+      <p:boldItalic r:id="rId40"/>
     </p:embeddedFont>
     <p:embeddedFont>
       <p:font typeface="Open Sans"/>
-      <p:regular r:id="rId39"/>
-      <p:bold r:id="rId40"/>
-      <p:italic r:id="rId41"/>
-      <p:boldItalic r:id="rId42"/>
+      <p:regular r:id="rId41"/>
+      <p:bold r:id="rId42"/>
+      <p:italic r:id="rId43"/>
+      <p:boldItalic r:id="rId44"/>
     </p:embeddedFont>
   </p:embeddedFontLst>
   <p:defaultTextStyle>
@@ -285,7 +287,7 @@
   </p:defaultTextStyle>
   <p:extLst>
     <p:ext uri="GoogleSlidesCustomDataVersion2">
-      <go:slidesCustomData xmlns:go="http://customooxmlschemas.google.com/" roundtripDataSignature="AMtx7mhu5dURU4INwSlvEO7StWDXKr50jg==" r:id="rId43"/>
+      <go:slidesCustomData xmlns:go="http://customooxmlschemas.google.com/" roundtripDataSignature="AMtx7mhu5dURU4INwSlvEO7StWDXKr50jg==" r:id="rId45"/>
     </p:ext>
   </p:extLst>
 </p:presentation>
@@ -6905,8 +6907,8 @@
         </p:nvSpPr>
         <p:spPr>
           <a:xfrm>
-            <a:off x="774146" y="202009"/>
-            <a:ext cx="3932227" cy="1698043"/>
+            <a:off x="771525" y="200025"/>
+            <a:ext cx="10582275" cy="790575"/>
           </a:xfrm>
           <a:prstGeom prst="rect">
             <a:avLst/>
@@ -7041,8 +7043,8 @@
         </p:nvSpPr>
         <p:spPr>
           <a:xfrm>
-            <a:off x="774144" y="2113808"/>
-            <a:ext cx="3932227" cy="4063156"/>
+            <a:off x="771525" y="1066800"/>
+            <a:ext cx="10582275" cy="1066800"/>
           </a:xfrm>
           <a:prstGeom prst="rect">
             <a:avLst/>
@@ -9610,8 +9612,8 @@
         </p:nvSpPr>
         <p:spPr>
           <a:xfrm>
-            <a:off x="5160373" y="202009"/>
-            <a:ext cx="6237261" cy="5976999"/>
+            <a:off x="771525" y="2209800"/>
+            <a:ext cx="10582275" cy="3962400"/>
           </a:xfrm>
           <a:prstGeom prst="roundRect">
             <a:avLst>
@@ -44004,8 +44006,8 @@
         </p:nvSpPr>
         <p:spPr>
           <a:xfrm>
-            <a:off x="774146" y="202009"/>
-            <a:ext cx="3932227" cy="1698043"/>
+            <a:off x="771525" y="200025"/>
+            <a:ext cx="10582275" cy="790575"/>
           </a:xfrm>
           <a:prstGeom prst="rect">
             <a:avLst/>
@@ -44024,7 +44026,7 @@
             </a:pPr>
             <a:r>
               <a:rPr/>
-              <a:t>Pipeline AI</a:t>
+              <a:t>Xử lý biển 2 dòng</a:t>
             </a:r>
           </a:p>
         </p:txBody>
@@ -44047,39 +44049,30 @@
             </a:pPr>
             <a:r>
               <a:rPr/>
-              <a:t>Nhánh </a:t>
+              <a:t>Giả định </a:t>
             </a:r>
             <a:r>
               <a:rPr b="1"/>
-              <a:t>đỏ</a:t>
+              <a:t>một dòng</a:t>
             </a:r>
             <a:r>
               <a:rPr/>
-              <a:t> là đóng góp kỹ thuật lõi</a:t>
-            </a:r>
-          </a:p>
-          <a:p>
-            <a:pPr lvl="0" indent="0" marL="0">
-              <a:buNone/>
-            </a:pPr>
-            <a:r>
-              <a:rPr/>
-              <a:t>Không thấy biển ⇒ trả rỗng, </a:t>
+              <a:t> nằm trong </a:t>
             </a:r>
             <a:r>
               <a:rPr b="1"/>
-              <a:t>HTTP 200</a:t>
+              <a:t>hàm mất mát</a:t>
             </a:r>
             <a:r>
               <a:rPr/>
-              <a:t> — không phải lỗi</a:t>
+              <a:t> của CRNN/CTC — thêm dữ liệu không sửa được</a:t>
             </a:r>
           </a:p>
         </p:txBody>
       </p:sp>
       <p:pic>
         <p:nvPicPr>
-          <p:cNvPr descr="figures/fig-pipeline.png" id="0" name="Picture 1"/>
+          <p:cNvPr descr="figures/fig-two-line.png" id="0" name="Picture 1"/>
           <p:cNvPicPr>
             <a:picLocks noGrp="1" noChangeAspect="1"/>
           </p:cNvPicPr>
@@ -44093,8 +44086,8 @@
         </p:blipFill>
         <p:spPr bwMode="auto">
           <a:xfrm>
-            <a:off x="5156200" y="228600"/>
-            <a:ext cx="6235700" cy="5880100"/>
+            <a:off x="3683000" y="2209800"/>
+            <a:ext cx="4737100" cy="3962400"/>
           </a:xfrm>
           <a:prstGeom prst="rect">
             <a:avLst/>
@@ -44293,6 +44286,1483 @@
 </file>
 
 <file path=ppt/slides/slide11.xml><?xml version="1.0" encoding="utf-8"?>
+<p:sld xmlns:a="http://schemas.openxmlformats.org/drawingml/2006/main" xmlns:r="http://schemas.openxmlformats.org/officeDocument/2006/relationships" xmlns:p="http://schemas.openxmlformats.org/presentationml/2006/main">
+  <p:cSld>
+    <p:spTree>
+      <p:nvGrpSpPr>
+        <p:cNvPr id="428" name="Shape 428"/>
+        <p:cNvGrpSpPr/>
+        <p:nvPr/>
+      </p:nvGrpSpPr>
+      <p:grpSpPr>
+        <a:xfrm>
+          <a:off x="0" y="0"/>
+          <a:ext cx="0" cy="0"/>
+          <a:chOff x="0" y="0"/>
+          <a:chExt cx="0" cy="0"/>
+        </a:xfrm>
+      </p:grpSpPr>
+      <p:sp>
+        <p:nvSpPr>
+          <p:cNvPr id="436" name="Google Shape;436;p31"/>
+          <p:cNvSpPr txBox="1"/>
+          <p:nvPr>
+            <p:ph type="title"/>
+          </p:nvPr>
+        </p:nvSpPr>
+        <p:spPr>
+          <a:xfrm>
+            <a:off x="771525" y="200025"/>
+            <a:ext cx="10582275" cy="790575"/>
+          </a:xfrm>
+          <a:prstGeom prst="rect">
+            <a:avLst/>
+          </a:prstGeom>
+          <a:noFill/>
+          <a:ln>
+            <a:noFill/>
+          </a:ln>
+        </p:spPr>
+        <p:txBody>
+          <a:bodyPr/>
+          <a:lstStyle/>
+          <a:p>
+            <a:pPr lvl="0" indent="0" marL="0">
+              <a:buNone/>
+            </a:pPr>
+            <a:r>
+              <a:rPr/>
+              <a:t>Bộ luật hậu xử lý theo vị trí</a:t>
+            </a:r>
+          </a:p>
+        </p:txBody>
+      </p:sp>
+      <p:sp>
+        <p:nvSpPr>
+          <p:cNvPr id="437" name="Google Shape;437;p31"/>
+          <p:cNvSpPr txBox="1"/>
+          <p:nvPr>
+            <p:ph idx="2" sz="half" type="body"/>
+          </p:nvPr>
+        </p:nvSpPr>
+        <p:spPr/>
+        <p:txBody>
+          <a:bodyPr/>
+          <a:lstStyle/>
+          <a:p>
+            <a:pPr lvl="0" indent="0" marL="0">
+              <a:buNone/>
+            </a:pPr>
+            <a:r>
+              <a:rPr/>
+              <a:t>Sửa theo </a:t>
+            </a:r>
+            <a:r>
+              <a:rPr b="1"/>
+              <a:t>VỊ TRÍ</a:t>
+            </a:r>
+            <a:r>
+              <a:rPr/>
+              <a:t>, không sửa toàn cục — đóng góp kỹ thuật riêng của đồ án</a:t>
+            </a:r>
+          </a:p>
+        </p:txBody>
+      </p:sp>
+      <p:pic>
+        <p:nvPicPr>
+          <p:cNvPr descr="figures/fig-position-rules.png" id="0" name="Picture 1"/>
+          <p:cNvPicPr>
+            <a:picLocks noGrp="1" noChangeAspect="1"/>
+          </p:cNvPicPr>
+          <p:nvPr/>
+        </p:nvPicPr>
+        <p:blipFill>
+          <a:blip r:embed="rId2"/>
+          <a:stretch>
+            <a:fillRect/>
+          </a:stretch>
+        </p:blipFill>
+        <p:spPr bwMode="auto">
+          <a:xfrm>
+            <a:off x="3251200" y="2209800"/>
+            <a:ext cx="5613400" cy="3962400"/>
+          </a:xfrm>
+          <a:prstGeom prst="rect">
+            <a:avLst/>
+          </a:prstGeom>
+          <a:noFill/>
+          <a:ln w="9525">
+            <a:noFill/>
+            <a:headEnd/>
+            <a:tailEnd/>
+          </a:ln>
+        </p:spPr>
+      </p:pic>
+      <p:sp>
+        <p:nvSpPr>
+          <p:cNvPr id="449" name="Google Shape;449;p31"/>
+          <p:cNvSpPr txBox="1"/>
+          <p:nvPr>
+            <p:ph idx="12" type="sldNum"/>
+          </p:nvPr>
+        </p:nvSpPr>
+        <p:spPr>
+          <a:xfrm>
+            <a:off x="58380" y="6508358"/>
+            <a:ext cx="349642" cy="349642"/>
+          </a:xfrm>
+          <a:prstGeom prst="rect">
+            <a:avLst/>
+          </a:prstGeom>
+          <a:noFill/>
+          <a:ln>
+            <a:noFill/>
+          </a:ln>
+        </p:spPr>
+        <p:txBody>
+          <a:bodyPr anchor="ctr" anchorCtr="0" bIns="45700" lIns="91425" rIns="91425" spcFirstLastPara="1" tIns="45700" wrap="square">
+            <a:noAutofit/>
+          </a:bodyPr>
+          <a:lstStyle>
+            <a:lvl1pPr algn="ctr" indent="0" lvl="0" marL="0">
+              <a:spcBef>
+                <a:spcPts val="0"/>
+              </a:spcBef>
+              <a:buNone/>
+              <a:defRPr sz="700">
+                <a:solidFill>
+                  <a:schemeClr val="dk1"/>
+                </a:solidFill>
+                <a:latin typeface="Arial"/>
+                <a:ea typeface="Arial"/>
+                <a:cs typeface="Arial"/>
+                <a:sym typeface="Arial"/>
+              </a:defRPr>
+            </a:lvl1pPr>
+            <a:lvl2pPr algn="ctr" indent="0" lvl="1" marL="0">
+              <a:spcBef>
+                <a:spcPts val="0"/>
+              </a:spcBef>
+              <a:buNone/>
+              <a:defRPr sz="700">
+                <a:solidFill>
+                  <a:schemeClr val="dk1"/>
+                </a:solidFill>
+                <a:latin typeface="Arial"/>
+                <a:ea typeface="Arial"/>
+                <a:cs typeface="Arial"/>
+                <a:sym typeface="Arial"/>
+              </a:defRPr>
+            </a:lvl2pPr>
+            <a:lvl3pPr algn="ctr" indent="0" lvl="2" marL="0">
+              <a:spcBef>
+                <a:spcPts val="0"/>
+              </a:spcBef>
+              <a:buNone/>
+              <a:defRPr sz="700">
+                <a:solidFill>
+                  <a:schemeClr val="dk1"/>
+                </a:solidFill>
+                <a:latin typeface="Arial"/>
+                <a:ea typeface="Arial"/>
+                <a:cs typeface="Arial"/>
+                <a:sym typeface="Arial"/>
+              </a:defRPr>
+            </a:lvl3pPr>
+            <a:lvl4pPr algn="ctr" indent="0" lvl="3" marL="0">
+              <a:spcBef>
+                <a:spcPts val="0"/>
+              </a:spcBef>
+              <a:buNone/>
+              <a:defRPr sz="700">
+                <a:solidFill>
+                  <a:schemeClr val="dk1"/>
+                </a:solidFill>
+                <a:latin typeface="Arial"/>
+                <a:ea typeface="Arial"/>
+                <a:cs typeface="Arial"/>
+                <a:sym typeface="Arial"/>
+              </a:defRPr>
+            </a:lvl4pPr>
+            <a:lvl5pPr algn="ctr" indent="0" lvl="4" marL="0">
+              <a:spcBef>
+                <a:spcPts val="0"/>
+              </a:spcBef>
+              <a:buNone/>
+              <a:defRPr sz="700">
+                <a:solidFill>
+                  <a:schemeClr val="dk1"/>
+                </a:solidFill>
+                <a:latin typeface="Arial"/>
+                <a:ea typeface="Arial"/>
+                <a:cs typeface="Arial"/>
+                <a:sym typeface="Arial"/>
+              </a:defRPr>
+            </a:lvl5pPr>
+            <a:lvl6pPr algn="ctr" indent="0" lvl="5" marL="0">
+              <a:spcBef>
+                <a:spcPts val="0"/>
+              </a:spcBef>
+              <a:buNone/>
+              <a:defRPr sz="700">
+                <a:solidFill>
+                  <a:schemeClr val="dk1"/>
+                </a:solidFill>
+                <a:latin typeface="Arial"/>
+                <a:ea typeface="Arial"/>
+                <a:cs typeface="Arial"/>
+                <a:sym typeface="Arial"/>
+              </a:defRPr>
+            </a:lvl6pPr>
+            <a:lvl7pPr algn="ctr" indent="0" lvl="6" marL="0">
+              <a:spcBef>
+                <a:spcPts val="0"/>
+              </a:spcBef>
+              <a:buNone/>
+              <a:defRPr sz="700">
+                <a:solidFill>
+                  <a:schemeClr val="dk1"/>
+                </a:solidFill>
+                <a:latin typeface="Arial"/>
+                <a:ea typeface="Arial"/>
+                <a:cs typeface="Arial"/>
+                <a:sym typeface="Arial"/>
+              </a:defRPr>
+            </a:lvl7pPr>
+            <a:lvl8pPr algn="ctr" indent="0" lvl="7" marL="0">
+              <a:spcBef>
+                <a:spcPts val="0"/>
+              </a:spcBef>
+              <a:buNone/>
+              <a:defRPr sz="700">
+                <a:solidFill>
+                  <a:schemeClr val="dk1"/>
+                </a:solidFill>
+                <a:latin typeface="Arial"/>
+                <a:ea typeface="Arial"/>
+                <a:cs typeface="Arial"/>
+                <a:sym typeface="Arial"/>
+              </a:defRPr>
+            </a:lvl8pPr>
+            <a:lvl9pPr algn="ctr" indent="0" lvl="8" marL="0">
+              <a:spcBef>
+                <a:spcPts val="0"/>
+              </a:spcBef>
+              <a:buNone/>
+              <a:defRPr sz="700">
+                <a:solidFill>
+                  <a:schemeClr val="dk1"/>
+                </a:solidFill>
+                <a:latin typeface="Arial"/>
+                <a:ea typeface="Arial"/>
+                <a:cs typeface="Arial"/>
+                <a:sym typeface="Arial"/>
+              </a:defRPr>
+            </a:lvl9pPr>
+          </a:lstStyle>
+          <a:p>
+            <a:pPr algn="ctr" indent="0" lvl="0" marL="0" rtl="0">
+              <a:spcBef>
+                <a:spcPts val="0"/>
+              </a:spcBef>
+              <a:spcAft>
+                <a:spcPts val="0"/>
+              </a:spcAft>
+              <a:buNone/>
+            </a:pPr>
+            <a:fld id="{00000000-1234-1234-1234-123412341234}" type="slidenum">
+              <a:rPr lang="en-US"/>
+              <a:t>‹#›</a:t>
+            </a:fld>
+            <a:endParaRPr/>
+          </a:p>
+        </p:txBody>
+      </p:sp>
+    </p:spTree>
+  </p:cSld>
+</p:sld>
+</file>
+
+<file path=ppt/slides/slide12.xml><?xml version="1.0" encoding="utf-8"?>
+<p:sld xmlns:a="http://schemas.openxmlformats.org/drawingml/2006/main" xmlns:r="http://schemas.openxmlformats.org/officeDocument/2006/relationships" xmlns:p="http://schemas.openxmlformats.org/presentationml/2006/main">
+  <p:cSld>
+    <p:spTree>
+      <p:nvGrpSpPr>
+        <p:cNvPr id="428" name="Shape 428"/>
+        <p:cNvGrpSpPr/>
+        <p:nvPr/>
+      </p:nvGrpSpPr>
+      <p:grpSpPr>
+        <a:xfrm>
+          <a:off x="0" y="0"/>
+          <a:ext cx="0" cy="0"/>
+          <a:chOff x="0" y="0"/>
+          <a:chExt cx="0" cy="0"/>
+        </a:xfrm>
+      </p:grpSpPr>
+      <p:sp>
+        <p:nvSpPr>
+          <p:cNvPr id="436" name="Google Shape;436;p31"/>
+          <p:cNvSpPr txBox="1"/>
+          <p:nvPr>
+            <p:ph type="title"/>
+          </p:nvPr>
+        </p:nvSpPr>
+        <p:spPr>
+          <a:xfrm>
+            <a:off x="771525" y="200025"/>
+            <a:ext cx="10582275" cy="790575"/>
+          </a:xfrm>
+          <a:prstGeom prst="rect">
+            <a:avLst/>
+          </a:prstGeom>
+          <a:noFill/>
+          <a:ln>
+            <a:noFill/>
+          </a:ln>
+        </p:spPr>
+        <p:txBody>
+          <a:bodyPr/>
+          <a:lstStyle/>
+          <a:p>
+            <a:pPr lvl="0" indent="0" marL="0">
+              <a:buNone/>
+            </a:pPr>
+            <a:r>
+              <a:rPr/>
+              <a:t>Bậc thang cứu chữa khi đọc hỏng</a:t>
+            </a:r>
+          </a:p>
+        </p:txBody>
+      </p:sp>
+      <p:sp>
+        <p:nvSpPr>
+          <p:cNvPr id="437" name="Google Shape;437;p31"/>
+          <p:cNvSpPr txBox="1"/>
+          <p:nvPr>
+            <p:ph idx="2" sz="half" type="body"/>
+          </p:nvPr>
+        </p:nvSpPr>
+        <p:spPr/>
+        <p:txBody>
+          <a:bodyPr/>
+          <a:lstStyle/>
+          <a:p>
+            <a:pPr lvl="0" indent="0" marL="0">
+              <a:buNone/>
+            </a:pPr>
+            <a:r>
+              <a:rPr/>
+              <a:t>Chỉ chạy </a:t>
+            </a:r>
+            <a:r>
+              <a:rPr b="1"/>
+              <a:t>sau khi đọc hỏng</a:t>
+            </a:r>
+            <a:r>
+              <a:rPr/>
+              <a:t>, chỉ nhận chuỗi </a:t>
+            </a:r>
+            <a:r>
+              <a:rPr b="1"/>
+              <a:t>hợp lệ</a:t>
+            </a:r>
+          </a:p>
+          <a:p>
+            <a:pPr lvl="0" indent="0" marL="0">
+              <a:buNone/>
+            </a:pPr>
+            <a:r>
+              <a:rPr/>
+              <a:t>⇒ không thể làm hỏng kết quả đang đúng</a:t>
+            </a:r>
+          </a:p>
+        </p:txBody>
+      </p:sp>
+      <p:graphicFrame>
+        <p:nvGraphicFramePr>
+          <p:cNvPr id="6" name="Content Placeholder 5"/>
+          <p:cNvGraphicFramePr>
+            <a:graphicFrameLocks noGrp="1"/>
+          </p:cNvGraphicFramePr>
+          <p:nvPr>
+            <p:ph idx="1"/>
+          </p:nvPr>
+        </p:nvGraphicFramePr>
+        <p:xfrm>
+          <a:off x="762000" y="2209800"/>
+          <a:ext cx="10579100" cy="3962400"/>
+        </p:xfrm>
+        <a:graphic>
+          <a:graphicData uri="http://schemas.openxmlformats.org/drawingml/2006/table">
+            <a:tbl>
+              <a:tblPr firstRow="1" bandRow="1">
+                <a:tableStyleId>{45BEF19B-5B1D-4A26-B267-ECC71EF7E2D4}</a:tableStyleId>
+              </a:tblPr>
+              <a:tblGrid>
+                <a:gridCol w="5283200"/>
+                <a:gridCol w="5283200"/>
+              </a:tblGrid>
+              <a:tr h="0">
+                <a:tc>
+                  <a:txBody>
+                    <a:bodyPr/>
+                    <a:lstStyle/>
+                    <a:p>
+                      <a:pPr lvl="0" indent="0" marL="0">
+                        <a:buNone/>
+                      </a:pPr>
+                      <a:r>
+                        <a:rPr/>
+                        <a:t>Bậc</a:t>
+                      </a:r>
+                    </a:p>
+                  </a:txBody>
+                  <a:tcPr/>
+                </a:tc>
+                <a:tc>
+                  <a:txBody>
+                    <a:bodyPr/>
+                    <a:lstStyle/>
+                    <a:p>
+                      <a:pPr lvl="0" indent="0" marL="0" algn="r">
+                        <a:buNone/>
+                      </a:pPr>
+                      <a:r>
+                        <a:rPr/>
+                        <a:t>Cứu được</a:t>
+                      </a:r>
+                    </a:p>
+                  </a:txBody>
+                  <a:tcPr/>
+                </a:tc>
+              </a:tr>
+              <a:tr h="0">
+                <a:tc>
+                  <a:txBody>
+                    <a:bodyPr/>
+                    <a:lstStyle/>
+                    <a:p>
+                      <a:pPr lvl="0" indent="0" marL="0">
+                        <a:buNone/>
+                      </a:pPr>
+                      <a:r>
+                        <a:rPr/>
+                        <a:t>Cứu dòng trên của biển 2 dòng</a:t>
+                      </a:r>
+                    </a:p>
+                  </a:txBody>
+                </a:tc>
+                <a:tc>
+                  <a:txBody>
+                    <a:bodyPr/>
+                    <a:lstStyle/>
+                    <a:p>
+                      <a:pPr lvl="0" indent="0" marL="0" algn="r">
+                        <a:buNone/>
+                      </a:pPr>
+                      <a:r>
+                        <a:rPr b="1"/>
+                        <a:t>209 biển</a:t>
+                      </a:r>
+                    </a:p>
+                  </a:txBody>
+                </a:tc>
+              </a:tr>
+              <a:tr h="0">
+                <a:tc>
+                  <a:txBody>
+                    <a:bodyPr/>
+                    <a:lstStyle/>
+                    <a:p>
+                      <a:pPr lvl="0" indent="0" marL="0">
+                        <a:buNone/>
+                      </a:pPr>
+                      <a:r>
+                        <a:rPr/>
+                        <a:t>Nắn hình / giãn dọc chống méo</a:t>
+                      </a:r>
+                    </a:p>
+                  </a:txBody>
+                </a:tc>
+                <a:tc>
+                  <a:txBody>
+                    <a:bodyPr/>
+                    <a:lstStyle/>
+                    <a:p>
+                      <a:pPr lvl="0" indent="0" marL="0" algn="r">
+                        <a:buNone/>
+                      </a:pPr>
+                      <a:r>
+                        <a:rPr b="1"/>
+                        <a:t>34 biển</a:t>
+                      </a:r>
+                    </a:p>
+                  </a:txBody>
+                </a:tc>
+              </a:tr>
+            </a:tbl>
+          </a:graphicData>
+        </a:graphic>
+      </p:graphicFrame>
+      <p:sp>
+        <p:nvSpPr>
+          <p:cNvPr id="449" name="Google Shape;449;p31"/>
+          <p:cNvSpPr txBox="1"/>
+          <p:nvPr>
+            <p:ph idx="12" type="sldNum"/>
+          </p:nvPr>
+        </p:nvSpPr>
+        <p:spPr>
+          <a:xfrm>
+            <a:off x="58380" y="6508358"/>
+            <a:ext cx="349642" cy="349642"/>
+          </a:xfrm>
+          <a:prstGeom prst="rect">
+            <a:avLst/>
+          </a:prstGeom>
+          <a:noFill/>
+          <a:ln>
+            <a:noFill/>
+          </a:ln>
+        </p:spPr>
+        <p:txBody>
+          <a:bodyPr anchor="ctr" anchorCtr="0" bIns="45700" lIns="91425" rIns="91425" spcFirstLastPara="1" tIns="45700" wrap="square">
+            <a:noAutofit/>
+          </a:bodyPr>
+          <a:lstStyle>
+            <a:lvl1pPr algn="ctr" indent="0" lvl="0" marL="0">
+              <a:spcBef>
+                <a:spcPts val="0"/>
+              </a:spcBef>
+              <a:buNone/>
+              <a:defRPr sz="700">
+                <a:solidFill>
+                  <a:schemeClr val="dk1"/>
+                </a:solidFill>
+                <a:latin typeface="Arial"/>
+                <a:ea typeface="Arial"/>
+                <a:cs typeface="Arial"/>
+                <a:sym typeface="Arial"/>
+              </a:defRPr>
+            </a:lvl1pPr>
+            <a:lvl2pPr algn="ctr" indent="0" lvl="1" marL="0">
+              <a:spcBef>
+                <a:spcPts val="0"/>
+              </a:spcBef>
+              <a:buNone/>
+              <a:defRPr sz="700">
+                <a:solidFill>
+                  <a:schemeClr val="dk1"/>
+                </a:solidFill>
+                <a:latin typeface="Arial"/>
+                <a:ea typeface="Arial"/>
+                <a:cs typeface="Arial"/>
+                <a:sym typeface="Arial"/>
+              </a:defRPr>
+            </a:lvl2pPr>
+            <a:lvl3pPr algn="ctr" indent="0" lvl="2" marL="0">
+              <a:spcBef>
+                <a:spcPts val="0"/>
+              </a:spcBef>
+              <a:buNone/>
+              <a:defRPr sz="700">
+                <a:solidFill>
+                  <a:schemeClr val="dk1"/>
+                </a:solidFill>
+                <a:latin typeface="Arial"/>
+                <a:ea typeface="Arial"/>
+                <a:cs typeface="Arial"/>
+                <a:sym typeface="Arial"/>
+              </a:defRPr>
+            </a:lvl3pPr>
+            <a:lvl4pPr algn="ctr" indent="0" lvl="3" marL="0">
+              <a:spcBef>
+                <a:spcPts val="0"/>
+              </a:spcBef>
+              <a:buNone/>
+              <a:defRPr sz="700">
+                <a:solidFill>
+                  <a:schemeClr val="dk1"/>
+                </a:solidFill>
+                <a:latin typeface="Arial"/>
+                <a:ea typeface="Arial"/>
+                <a:cs typeface="Arial"/>
+                <a:sym typeface="Arial"/>
+              </a:defRPr>
+            </a:lvl4pPr>
+            <a:lvl5pPr algn="ctr" indent="0" lvl="4" marL="0">
+              <a:spcBef>
+                <a:spcPts val="0"/>
+              </a:spcBef>
+              <a:buNone/>
+              <a:defRPr sz="700">
+                <a:solidFill>
+                  <a:schemeClr val="dk1"/>
+                </a:solidFill>
+                <a:latin typeface="Arial"/>
+                <a:ea typeface="Arial"/>
+                <a:cs typeface="Arial"/>
+                <a:sym typeface="Arial"/>
+              </a:defRPr>
+            </a:lvl5pPr>
+            <a:lvl6pPr algn="ctr" indent="0" lvl="5" marL="0">
+              <a:spcBef>
+                <a:spcPts val="0"/>
+              </a:spcBef>
+              <a:buNone/>
+              <a:defRPr sz="700">
+                <a:solidFill>
+                  <a:schemeClr val="dk1"/>
+                </a:solidFill>
+                <a:latin typeface="Arial"/>
+                <a:ea typeface="Arial"/>
+                <a:cs typeface="Arial"/>
+                <a:sym typeface="Arial"/>
+              </a:defRPr>
+            </a:lvl6pPr>
+            <a:lvl7pPr algn="ctr" indent="0" lvl="6" marL="0">
+              <a:spcBef>
+                <a:spcPts val="0"/>
+              </a:spcBef>
+              <a:buNone/>
+              <a:defRPr sz="700">
+                <a:solidFill>
+                  <a:schemeClr val="dk1"/>
+                </a:solidFill>
+                <a:latin typeface="Arial"/>
+                <a:ea typeface="Arial"/>
+                <a:cs typeface="Arial"/>
+                <a:sym typeface="Arial"/>
+              </a:defRPr>
+            </a:lvl7pPr>
+            <a:lvl8pPr algn="ctr" indent="0" lvl="7" marL="0">
+              <a:spcBef>
+                <a:spcPts val="0"/>
+              </a:spcBef>
+              <a:buNone/>
+              <a:defRPr sz="700">
+                <a:solidFill>
+                  <a:schemeClr val="dk1"/>
+                </a:solidFill>
+                <a:latin typeface="Arial"/>
+                <a:ea typeface="Arial"/>
+                <a:cs typeface="Arial"/>
+                <a:sym typeface="Arial"/>
+              </a:defRPr>
+            </a:lvl8pPr>
+            <a:lvl9pPr algn="ctr" indent="0" lvl="8" marL="0">
+              <a:spcBef>
+                <a:spcPts val="0"/>
+              </a:spcBef>
+              <a:buNone/>
+              <a:defRPr sz="700">
+                <a:solidFill>
+                  <a:schemeClr val="dk1"/>
+                </a:solidFill>
+                <a:latin typeface="Arial"/>
+                <a:ea typeface="Arial"/>
+                <a:cs typeface="Arial"/>
+                <a:sym typeface="Arial"/>
+              </a:defRPr>
+            </a:lvl9pPr>
+          </a:lstStyle>
+          <a:p>
+            <a:pPr algn="ctr" indent="0" lvl="0" marL="0" rtl="0">
+              <a:spcBef>
+                <a:spcPts val="0"/>
+              </a:spcBef>
+              <a:spcAft>
+                <a:spcPts val="0"/>
+              </a:spcAft>
+              <a:buNone/>
+            </a:pPr>
+            <a:fld id="{00000000-1234-1234-1234-123412341234}" type="slidenum">
+              <a:rPr lang="en-US"/>
+              <a:t>‹#›</a:t>
+            </a:fld>
+            <a:endParaRPr/>
+          </a:p>
+        </p:txBody>
+      </p:sp>
+    </p:spTree>
+  </p:cSld>
+</p:sld>
+</file>
+
+<file path=ppt/slides/slide13.xml><?xml version="1.0" encoding="utf-8"?>
+<p:sld xmlns:a="http://schemas.openxmlformats.org/drawingml/2006/main" xmlns:r="http://schemas.openxmlformats.org/officeDocument/2006/relationships" xmlns:p="http://schemas.openxmlformats.org/presentationml/2006/main">
+  <p:cSld>
+    <p:spTree>
+      <p:nvGrpSpPr>
+        <p:cNvPr id="428" name="Shape 428"/>
+        <p:cNvGrpSpPr/>
+        <p:nvPr/>
+      </p:nvGrpSpPr>
+      <p:grpSpPr>
+        <a:xfrm>
+          <a:off x="0" y="0"/>
+          <a:ext cx="0" cy="0"/>
+          <a:chOff x="0" y="0"/>
+          <a:chExt cx="0" cy="0"/>
+        </a:xfrm>
+      </p:grpSpPr>
+      <p:sp>
+        <p:nvSpPr>
+          <p:cNvPr id="436" name="Google Shape;436;p31"/>
+          <p:cNvSpPr txBox="1"/>
+          <p:nvPr>
+            <p:ph type="title"/>
+          </p:nvPr>
+        </p:nvSpPr>
+        <p:spPr>
+          <a:xfrm>
+            <a:off x="771525" y="200025"/>
+            <a:ext cx="10582275" cy="790575"/>
+          </a:xfrm>
+          <a:prstGeom prst="rect">
+            <a:avLst/>
+          </a:prstGeom>
+          <a:noFill/>
+          <a:ln>
+            <a:noFill/>
+          </a:ln>
+        </p:spPr>
+        <p:txBody>
+          <a:bodyPr/>
+          <a:lstStyle/>
+          <a:p>
+            <a:pPr lvl="0" indent="0" marL="0">
+              <a:buNone/>
+            </a:pPr>
+            <a:r>
+              <a:rPr/>
+              <a:t>Cơ sở dữ liệu — một cột làm nên đóng góp</a:t>
+            </a:r>
+          </a:p>
+        </p:txBody>
+      </p:sp>
+      <p:sp>
+        <p:nvSpPr>
+          <p:cNvPr id="437" name="Google Shape;437;p31"/>
+          <p:cNvSpPr txBox="1"/>
+          <p:nvPr>
+            <p:ph idx="2" sz="half" type="body"/>
+          </p:nvPr>
+        </p:nvSpPr>
+        <p:spPr/>
+        <p:txBody>
+          <a:bodyPr/>
+          <a:lstStyle/>
+          <a:p>
+            <a:pPr lvl="0" indent="0" marL="0">
+              <a:buNone/>
+            </a:pPr>
+            <a:r>
+              <a:rPr/>
+              <a:t>Lưu </a:t>
+            </a:r>
+            <a:r>
+              <a:rPr b="1"/>
+              <a:t>cả hai</a:t>
+            </a:r>
+            <a:r>
+              <a:rPr/>
+              <a:t> chuỗi trên </a:t>
+            </a:r>
+            <a:r>
+              <a:rPr b="1"/>
+              <a:t>cùng một bản ghi</a:t>
+            </a:r>
+            <a:r>
+              <a:rPr/>
+              <a:t> — không có </a:t>
+            </a:r>
+            <a:r>
+              <a:rPr>
+                <a:latin typeface="Courier"/>
+              </a:rPr>
+              <a:t>raw_ocr_text</a:t>
+            </a:r>
+            <a:r>
+              <a:rPr/>
+              <a:t> thì </a:t>
+            </a:r>
+            <a:r>
+              <a:rPr b="1"/>
+              <a:t>không đo được</a:t>
+            </a:r>
+            <a:r>
+              <a:rPr/>
+              <a:t> đóng góp của hậu xử lý</a:t>
+            </a:r>
+          </a:p>
+        </p:txBody>
+      </p:sp>
+      <p:graphicFrame>
+        <p:nvGraphicFramePr>
+          <p:cNvPr id="6" name="Content Placeholder 5"/>
+          <p:cNvGraphicFramePr>
+            <a:graphicFrameLocks noGrp="1"/>
+          </p:cNvGraphicFramePr>
+          <p:nvPr>
+            <p:ph idx="1"/>
+          </p:nvPr>
+        </p:nvGraphicFramePr>
+        <p:xfrm>
+          <a:off x="762000" y="2209800"/>
+          <a:ext cx="10579100" cy="3962400"/>
+        </p:xfrm>
+        <a:graphic>
+          <a:graphicData uri="http://schemas.openxmlformats.org/drawingml/2006/table">
+            <a:tbl>
+              <a:tblPr firstRow="1" bandRow="1">
+                <a:tableStyleId>{45BEF19B-5B1D-4A26-B267-ECC71EF7E2D4}</a:tableStyleId>
+              </a:tblPr>
+              <a:tblGrid>
+                <a:gridCol w="5283200"/>
+                <a:gridCol w="5283200"/>
+              </a:tblGrid>
+              <a:tr h="0">
+                <a:tc>
+                  <a:txBody>
+                    <a:bodyPr/>
+                    <a:lstStyle/>
+                    <a:p>
+                      <a:pPr lvl="0" indent="0" marL="0">
+                        <a:buNone/>
+                      </a:pPr>
+                      <a:r>
+                        <a:rPr/>
+                        <a:t>Cột</a:t>
+                      </a:r>
+                    </a:p>
+                  </a:txBody>
+                  <a:tcPr/>
+                </a:tc>
+                <a:tc>
+                  <a:txBody>
+                    <a:bodyPr/>
+                    <a:lstStyle/>
+                    <a:p>
+                      <a:pPr lvl="0" indent="0" marL="0">
+                        <a:buNone/>
+                      </a:pPr>
+                      <a:r>
+                        <a:rPr/>
+                        <a:t>Nội dung</a:t>
+                      </a:r>
+                    </a:p>
+                  </a:txBody>
+                  <a:tcPr/>
+                </a:tc>
+              </a:tr>
+              <a:tr h="0">
+                <a:tc>
+                  <a:txBody>
+                    <a:bodyPr/>
+                    <a:lstStyle/>
+                    <a:p>
+                      <a:pPr lvl="0" indent="0" marL="0">
+                        <a:buNone/>
+                      </a:pPr>
+                      <a:r>
+                        <a:rPr>
+                          <a:latin typeface="Courier"/>
+                        </a:rPr>
+                        <a:t>raw_ocr_text</a:t>
+                      </a:r>
+                    </a:p>
+                  </a:txBody>
+                </a:tc>
+                <a:tc>
+                  <a:txBody>
+                    <a:bodyPr/>
+                    <a:lstStyle/>
+                    <a:p>
+                      <a:pPr lvl="0" indent="0" marL="0">
+                        <a:buNone/>
+                      </a:pPr>
+                      <a:r>
+                        <a:rPr/>
+                        <a:t>Chuỗi </a:t>
+                      </a:r>
+                      <a:r>
+                        <a:rPr b="1"/>
+                        <a:t>thô</a:t>
+                      </a:r>
+                      <a:r>
+                        <a:rPr/>
+                        <a:t> do PaddleOCR trả về</a:t>
+                      </a:r>
+                    </a:p>
+                  </a:txBody>
+                </a:tc>
+              </a:tr>
+              <a:tr h="0">
+                <a:tc>
+                  <a:txBody>
+                    <a:bodyPr/>
+                    <a:lstStyle/>
+                    <a:p>
+                      <a:pPr lvl="0" indent="0" marL="0">
+                        <a:buNone/>
+                      </a:pPr>
+                      <a:r>
+                        <a:rPr>
+                          <a:latin typeface="Courier"/>
+                        </a:rPr>
+                        <a:t>plate_number</a:t>
+                      </a:r>
+                    </a:p>
+                  </a:txBody>
+                </a:tc>
+                <a:tc>
+                  <a:txBody>
+                    <a:bodyPr/>
+                    <a:lstStyle/>
+                    <a:p>
+                      <a:pPr lvl="0" indent="0" marL="0">
+                        <a:buNone/>
+                      </a:pPr>
+                      <a:r>
+                        <a:rPr/>
+                        <a:t>Chuỗi </a:t>
+                      </a:r>
+                      <a:r>
+                        <a:rPr b="1"/>
+                        <a:t>sau</a:t>
+                      </a:r>
+                      <a:r>
+                        <a:rPr/>
+                        <a:t> bộ luật hậu xử lý</a:t>
+                      </a:r>
+                    </a:p>
+                  </a:txBody>
+                </a:tc>
+              </a:tr>
+              <a:tr h="0">
+                <a:tc>
+                  <a:txBody>
+                    <a:bodyPr/>
+                    <a:lstStyle/>
+                    <a:p>
+                      <a:pPr lvl="0" indent="0" marL="0">
+                        <a:buNone/>
+                      </a:pPr>
+                      <a:r>
+                        <a:rPr>
+                          <a:latin typeface="Courier"/>
+                        </a:rPr>
+                        <a:t>is_valid_format</a:t>
+                      </a:r>
+                    </a:p>
+                  </a:txBody>
+                </a:tc>
+                <a:tc>
+                  <a:txBody>
+                    <a:bodyPr/>
+                    <a:lstStyle/>
+                    <a:p>
+                      <a:pPr lvl="0" indent="0" marL="0">
+                        <a:buNone/>
+                      </a:pPr>
+                      <a:r>
+                        <a:rPr/>
+                        <a:t>Hợp quy cách Việt Nam hay không</a:t>
+                      </a:r>
+                    </a:p>
+                  </a:txBody>
+                </a:tc>
+              </a:tr>
+            </a:tbl>
+          </a:graphicData>
+        </a:graphic>
+      </p:graphicFrame>
+      <p:sp>
+        <p:nvSpPr>
+          <p:cNvPr id="449" name="Google Shape;449;p31"/>
+          <p:cNvSpPr txBox="1"/>
+          <p:nvPr>
+            <p:ph idx="12" type="sldNum"/>
+          </p:nvPr>
+        </p:nvSpPr>
+        <p:spPr>
+          <a:xfrm>
+            <a:off x="58380" y="6508358"/>
+            <a:ext cx="349642" cy="349642"/>
+          </a:xfrm>
+          <a:prstGeom prst="rect">
+            <a:avLst/>
+          </a:prstGeom>
+          <a:noFill/>
+          <a:ln>
+            <a:noFill/>
+          </a:ln>
+        </p:spPr>
+        <p:txBody>
+          <a:bodyPr anchor="ctr" anchorCtr="0" bIns="45700" lIns="91425" rIns="91425" spcFirstLastPara="1" tIns="45700" wrap="square">
+            <a:noAutofit/>
+          </a:bodyPr>
+          <a:lstStyle>
+            <a:lvl1pPr algn="ctr" indent="0" lvl="0" marL="0">
+              <a:spcBef>
+                <a:spcPts val="0"/>
+              </a:spcBef>
+              <a:buNone/>
+              <a:defRPr sz="700">
+                <a:solidFill>
+                  <a:schemeClr val="dk1"/>
+                </a:solidFill>
+                <a:latin typeface="Arial"/>
+                <a:ea typeface="Arial"/>
+                <a:cs typeface="Arial"/>
+                <a:sym typeface="Arial"/>
+              </a:defRPr>
+            </a:lvl1pPr>
+            <a:lvl2pPr algn="ctr" indent="0" lvl="1" marL="0">
+              <a:spcBef>
+                <a:spcPts val="0"/>
+              </a:spcBef>
+              <a:buNone/>
+              <a:defRPr sz="700">
+                <a:solidFill>
+                  <a:schemeClr val="dk1"/>
+                </a:solidFill>
+                <a:latin typeface="Arial"/>
+                <a:ea typeface="Arial"/>
+                <a:cs typeface="Arial"/>
+                <a:sym typeface="Arial"/>
+              </a:defRPr>
+            </a:lvl2pPr>
+            <a:lvl3pPr algn="ctr" indent="0" lvl="2" marL="0">
+              <a:spcBef>
+                <a:spcPts val="0"/>
+              </a:spcBef>
+              <a:buNone/>
+              <a:defRPr sz="700">
+                <a:solidFill>
+                  <a:schemeClr val="dk1"/>
+                </a:solidFill>
+                <a:latin typeface="Arial"/>
+                <a:ea typeface="Arial"/>
+                <a:cs typeface="Arial"/>
+                <a:sym typeface="Arial"/>
+              </a:defRPr>
+            </a:lvl3pPr>
+            <a:lvl4pPr algn="ctr" indent="0" lvl="3" marL="0">
+              <a:spcBef>
+                <a:spcPts val="0"/>
+              </a:spcBef>
+              <a:buNone/>
+              <a:defRPr sz="700">
+                <a:solidFill>
+                  <a:schemeClr val="dk1"/>
+                </a:solidFill>
+                <a:latin typeface="Arial"/>
+                <a:ea typeface="Arial"/>
+                <a:cs typeface="Arial"/>
+                <a:sym typeface="Arial"/>
+              </a:defRPr>
+            </a:lvl4pPr>
+            <a:lvl5pPr algn="ctr" indent="0" lvl="4" marL="0">
+              <a:spcBef>
+                <a:spcPts val="0"/>
+              </a:spcBef>
+              <a:buNone/>
+              <a:defRPr sz="700">
+                <a:solidFill>
+                  <a:schemeClr val="dk1"/>
+                </a:solidFill>
+                <a:latin typeface="Arial"/>
+                <a:ea typeface="Arial"/>
+                <a:cs typeface="Arial"/>
+                <a:sym typeface="Arial"/>
+              </a:defRPr>
+            </a:lvl5pPr>
+            <a:lvl6pPr algn="ctr" indent="0" lvl="5" marL="0">
+              <a:spcBef>
+                <a:spcPts val="0"/>
+              </a:spcBef>
+              <a:buNone/>
+              <a:defRPr sz="700">
+                <a:solidFill>
+                  <a:schemeClr val="dk1"/>
+                </a:solidFill>
+                <a:latin typeface="Arial"/>
+                <a:ea typeface="Arial"/>
+                <a:cs typeface="Arial"/>
+                <a:sym typeface="Arial"/>
+              </a:defRPr>
+            </a:lvl6pPr>
+            <a:lvl7pPr algn="ctr" indent="0" lvl="6" marL="0">
+              <a:spcBef>
+                <a:spcPts val="0"/>
+              </a:spcBef>
+              <a:buNone/>
+              <a:defRPr sz="700">
+                <a:solidFill>
+                  <a:schemeClr val="dk1"/>
+                </a:solidFill>
+                <a:latin typeface="Arial"/>
+                <a:ea typeface="Arial"/>
+                <a:cs typeface="Arial"/>
+                <a:sym typeface="Arial"/>
+              </a:defRPr>
+            </a:lvl7pPr>
+            <a:lvl8pPr algn="ctr" indent="0" lvl="7" marL="0">
+              <a:spcBef>
+                <a:spcPts val="0"/>
+              </a:spcBef>
+              <a:buNone/>
+              <a:defRPr sz="700">
+                <a:solidFill>
+                  <a:schemeClr val="dk1"/>
+                </a:solidFill>
+                <a:latin typeface="Arial"/>
+                <a:ea typeface="Arial"/>
+                <a:cs typeface="Arial"/>
+                <a:sym typeface="Arial"/>
+              </a:defRPr>
+            </a:lvl8pPr>
+            <a:lvl9pPr algn="ctr" indent="0" lvl="8" marL="0">
+              <a:spcBef>
+                <a:spcPts val="0"/>
+              </a:spcBef>
+              <a:buNone/>
+              <a:defRPr sz="700">
+                <a:solidFill>
+                  <a:schemeClr val="dk1"/>
+                </a:solidFill>
+                <a:latin typeface="Arial"/>
+                <a:ea typeface="Arial"/>
+                <a:cs typeface="Arial"/>
+                <a:sym typeface="Arial"/>
+              </a:defRPr>
+            </a:lvl9pPr>
+          </a:lstStyle>
+          <a:p>
+            <a:pPr algn="ctr" indent="0" lvl="0" marL="0" rtl="0">
+              <a:spcBef>
+                <a:spcPts val="0"/>
+              </a:spcBef>
+              <a:spcAft>
+                <a:spcPts val="0"/>
+              </a:spcAft>
+              <a:buNone/>
+            </a:pPr>
+            <a:fld id="{00000000-1234-1234-1234-123412341234}" type="slidenum">
+              <a:rPr lang="en-US"/>
+              <a:t>‹#›</a:t>
+            </a:fld>
+            <a:endParaRPr/>
+          </a:p>
+        </p:txBody>
+      </p:sp>
+    </p:spTree>
+  </p:cSld>
+</p:sld>
+</file>
+
+<file path=ppt/slides/slide14.xml><?xml version="1.0" encoding="utf-8"?>
+<p:sld xmlns:a="http://schemas.openxmlformats.org/drawingml/2006/main" xmlns:r="http://schemas.openxmlformats.org/officeDocument/2006/relationships" xmlns:p="http://schemas.openxmlformats.org/presentationml/2006/main">
+  <p:cSld>
+    <p:spTree>
+      <p:nvGrpSpPr>
+        <p:cNvPr id="428" name="Shape 428"/>
+        <p:cNvGrpSpPr/>
+        <p:nvPr/>
+      </p:nvGrpSpPr>
+      <p:grpSpPr>
+        <a:xfrm>
+          <a:off x="0" y="0"/>
+          <a:ext cx="0" cy="0"/>
+          <a:chOff x="0" y="0"/>
+          <a:chExt cx="0" cy="0"/>
+        </a:xfrm>
+      </p:grpSpPr>
+      <p:sp>
+        <p:nvSpPr>
+          <p:cNvPr id="436" name="Google Shape;436;p31"/>
+          <p:cNvSpPr txBox="1"/>
+          <p:nvPr>
+            <p:ph type="title"/>
+          </p:nvPr>
+        </p:nvSpPr>
+        <p:spPr>
+          <a:xfrm>
+            <a:off x="771525" y="200025"/>
+            <a:ext cx="10582275" cy="790575"/>
+          </a:xfrm>
+          <a:prstGeom prst="rect">
+            <a:avLst/>
+          </a:prstGeom>
+          <a:noFill/>
+          <a:ln>
+            <a:noFill/>
+          </a:ln>
+        </p:spPr>
+        <p:txBody>
+          <a:bodyPr/>
+          <a:lstStyle/>
+          <a:p>
+            <a:pPr lvl="0" indent="0" marL="0">
+              <a:buNone/>
+            </a:pPr>
+            <a:r>
+              <a:rPr/>
+              <a:t>Giao diện</a:t>
+            </a:r>
+          </a:p>
+        </p:txBody>
+      </p:sp>
+      <p:sp>
+        <p:nvSpPr>
+          <p:cNvPr id="437" name="Google Shape;437;p31"/>
+          <p:cNvSpPr txBox="1"/>
+          <p:nvPr>
+            <p:ph idx="2" sz="half" type="body"/>
+          </p:nvPr>
+        </p:nvSpPr>
+        <p:spPr/>
+        <p:txBody>
+          <a:bodyPr/>
+          <a:lstStyle/>
+          <a:p>
+            <a:pPr lvl="0" indent="0" marL="0">
+              <a:buNone/>
+            </a:pPr>
+            <a:r>
+              <a:rPr/>
+              <a:t>Mọi vùng dữ liệu xử lý đủ </a:t>
+            </a:r>
+            <a:r>
+              <a:rPr b="1"/>
+              <a:t>4 trạng thái</a:t>
+            </a:r>
+            <a:r>
+              <a:rPr/>
+              <a:t>: chờ · rỗng · lỗi · thành công</a:t>
+            </a:r>
+          </a:p>
+        </p:txBody>
+      </p:sp>
+      <p:pic>
+        <p:nvPicPr>
+          <p:cNvPr descr="../screenshots/image-detection.png" id="0" name="Picture 1"/>
+          <p:cNvPicPr>
+            <a:picLocks noGrp="1" noChangeAspect="1"/>
+          </p:cNvPicPr>
+          <p:nvPr/>
+        </p:nvPicPr>
+        <p:blipFill>
+          <a:blip r:embed="rId2"/>
+          <a:stretch>
+            <a:fillRect/>
+          </a:stretch>
+        </p:blipFill>
+        <p:spPr bwMode="auto">
+          <a:xfrm>
+            <a:off x="2882900" y="2209800"/>
+            <a:ext cx="6337300" cy="3962400"/>
+          </a:xfrm>
+          <a:prstGeom prst="rect">
+            <a:avLst/>
+          </a:prstGeom>
+          <a:noFill/>
+          <a:ln w="9525">
+            <a:noFill/>
+            <a:headEnd/>
+            <a:tailEnd/>
+          </a:ln>
+        </p:spPr>
+      </p:pic>
+      <p:sp>
+        <p:nvSpPr>
+          <p:cNvPr id="449" name="Google Shape;449;p31"/>
+          <p:cNvSpPr txBox="1"/>
+          <p:nvPr>
+            <p:ph idx="12" type="sldNum"/>
+          </p:nvPr>
+        </p:nvSpPr>
+        <p:spPr>
+          <a:xfrm>
+            <a:off x="58380" y="6508358"/>
+            <a:ext cx="349642" cy="349642"/>
+          </a:xfrm>
+          <a:prstGeom prst="rect">
+            <a:avLst/>
+          </a:prstGeom>
+          <a:noFill/>
+          <a:ln>
+            <a:noFill/>
+          </a:ln>
+        </p:spPr>
+        <p:txBody>
+          <a:bodyPr anchor="ctr" anchorCtr="0" bIns="45700" lIns="91425" rIns="91425" spcFirstLastPara="1" tIns="45700" wrap="square">
+            <a:noAutofit/>
+          </a:bodyPr>
+          <a:lstStyle>
+            <a:lvl1pPr algn="ctr" indent="0" lvl="0" marL="0">
+              <a:spcBef>
+                <a:spcPts val="0"/>
+              </a:spcBef>
+              <a:buNone/>
+              <a:defRPr sz="700">
+                <a:solidFill>
+                  <a:schemeClr val="dk1"/>
+                </a:solidFill>
+                <a:latin typeface="Arial"/>
+                <a:ea typeface="Arial"/>
+                <a:cs typeface="Arial"/>
+                <a:sym typeface="Arial"/>
+              </a:defRPr>
+            </a:lvl1pPr>
+            <a:lvl2pPr algn="ctr" indent="0" lvl="1" marL="0">
+              <a:spcBef>
+                <a:spcPts val="0"/>
+              </a:spcBef>
+              <a:buNone/>
+              <a:defRPr sz="700">
+                <a:solidFill>
+                  <a:schemeClr val="dk1"/>
+                </a:solidFill>
+                <a:latin typeface="Arial"/>
+                <a:ea typeface="Arial"/>
+                <a:cs typeface="Arial"/>
+                <a:sym typeface="Arial"/>
+              </a:defRPr>
+            </a:lvl2pPr>
+            <a:lvl3pPr algn="ctr" indent="0" lvl="2" marL="0">
+              <a:spcBef>
+                <a:spcPts val="0"/>
+              </a:spcBef>
+              <a:buNone/>
+              <a:defRPr sz="700">
+                <a:solidFill>
+                  <a:schemeClr val="dk1"/>
+                </a:solidFill>
+                <a:latin typeface="Arial"/>
+                <a:ea typeface="Arial"/>
+                <a:cs typeface="Arial"/>
+                <a:sym typeface="Arial"/>
+              </a:defRPr>
+            </a:lvl3pPr>
+            <a:lvl4pPr algn="ctr" indent="0" lvl="3" marL="0">
+              <a:spcBef>
+                <a:spcPts val="0"/>
+              </a:spcBef>
+              <a:buNone/>
+              <a:defRPr sz="700">
+                <a:solidFill>
+                  <a:schemeClr val="dk1"/>
+                </a:solidFill>
+                <a:latin typeface="Arial"/>
+                <a:ea typeface="Arial"/>
+                <a:cs typeface="Arial"/>
+                <a:sym typeface="Arial"/>
+              </a:defRPr>
+            </a:lvl4pPr>
+            <a:lvl5pPr algn="ctr" indent="0" lvl="4" marL="0">
+              <a:spcBef>
+                <a:spcPts val="0"/>
+              </a:spcBef>
+              <a:buNone/>
+              <a:defRPr sz="700">
+                <a:solidFill>
+                  <a:schemeClr val="dk1"/>
+                </a:solidFill>
+                <a:latin typeface="Arial"/>
+                <a:ea typeface="Arial"/>
+                <a:cs typeface="Arial"/>
+                <a:sym typeface="Arial"/>
+              </a:defRPr>
+            </a:lvl5pPr>
+            <a:lvl6pPr algn="ctr" indent="0" lvl="5" marL="0">
+              <a:spcBef>
+                <a:spcPts val="0"/>
+              </a:spcBef>
+              <a:buNone/>
+              <a:defRPr sz="700">
+                <a:solidFill>
+                  <a:schemeClr val="dk1"/>
+                </a:solidFill>
+                <a:latin typeface="Arial"/>
+                <a:ea typeface="Arial"/>
+                <a:cs typeface="Arial"/>
+                <a:sym typeface="Arial"/>
+              </a:defRPr>
+            </a:lvl6pPr>
+            <a:lvl7pPr algn="ctr" indent="0" lvl="6" marL="0">
+              <a:spcBef>
+                <a:spcPts val="0"/>
+              </a:spcBef>
+              <a:buNone/>
+              <a:defRPr sz="700">
+                <a:solidFill>
+                  <a:schemeClr val="dk1"/>
+                </a:solidFill>
+                <a:latin typeface="Arial"/>
+                <a:ea typeface="Arial"/>
+                <a:cs typeface="Arial"/>
+                <a:sym typeface="Arial"/>
+              </a:defRPr>
+            </a:lvl7pPr>
+            <a:lvl8pPr algn="ctr" indent="0" lvl="7" marL="0">
+              <a:spcBef>
+                <a:spcPts val="0"/>
+              </a:spcBef>
+              <a:buNone/>
+              <a:defRPr sz="700">
+                <a:solidFill>
+                  <a:schemeClr val="dk1"/>
+                </a:solidFill>
+                <a:latin typeface="Arial"/>
+                <a:ea typeface="Arial"/>
+                <a:cs typeface="Arial"/>
+                <a:sym typeface="Arial"/>
+              </a:defRPr>
+            </a:lvl8pPr>
+            <a:lvl9pPr algn="ctr" indent="0" lvl="8" marL="0">
+              <a:spcBef>
+                <a:spcPts val="0"/>
+              </a:spcBef>
+              <a:buNone/>
+              <a:defRPr sz="700">
+                <a:solidFill>
+                  <a:schemeClr val="dk1"/>
+                </a:solidFill>
+                <a:latin typeface="Arial"/>
+                <a:ea typeface="Arial"/>
+                <a:cs typeface="Arial"/>
+                <a:sym typeface="Arial"/>
+              </a:defRPr>
+            </a:lvl9pPr>
+          </a:lstStyle>
+          <a:p>
+            <a:pPr algn="ctr" indent="0" lvl="0" marL="0" rtl="0">
+              <a:spcBef>
+                <a:spcPts val="0"/>
+              </a:spcBef>
+              <a:spcAft>
+                <a:spcPts val="0"/>
+              </a:spcAft>
+              <a:buNone/>
+            </a:pPr>
+            <a:fld id="{00000000-1234-1234-1234-123412341234}" type="slidenum">
+              <a:rPr lang="en-US"/>
+              <a:t>‹#›</a:t>
+            </a:fld>
+            <a:endParaRPr/>
+          </a:p>
+        </p:txBody>
+      </p:sp>
+    </p:spTree>
+  </p:cSld>
+</p:sld>
+</file>
+
+<file path=ppt/slides/slide15.xml><?xml version="1.0" encoding="utf-8"?>
 <p:sld xmlns:a="http://schemas.openxmlformats.org/drawingml/2006/main" xmlns:r="http://schemas.openxmlformats.org/officeDocument/2006/relationships" xmlns:p="http://schemas.openxmlformats.org/presentationml/2006/main">
   <p:cSld>
     <p:spTree>
@@ -44360,46 +45830,57 @@
             <a:pPr lvl="0"/>
             <a:r>
               <a:rPr b="1"/>
-              <a:t>15.133 ảnh · 15.977 khung biển</a:t>
+              <a:t>15.133 ảnh · 15.977 khung</a:t>
             </a:r>
             <a:r>
               <a:rPr/>
-              <a:t> · 6 nguồn · 1 lớp</a:t>
+              <a:t> · chia </a:t>
+            </a:r>
+            <a:r>
+              <a:rPr b="1"/>
+              <a:t>10.592 / 3.027 / 1.514</a:t>
             </a:r>
           </a:p>
           <a:p>
             <a:pPr lvl="0"/>
             <a:r>
               <a:rPr/>
-              <a:t>Chia </a:t>
+              <a:t>Hợp nhất </a:t>
             </a:r>
             <a:r>
               <a:rPr b="1"/>
-              <a:t>10.592 / 3.027 / 1.514</a:t>
+              <a:t>7 bộ công khai</a:t>
             </a:r>
             <a:r>
               <a:rPr/>
-              <a:t> </a:t>
+              <a:t>, loại </a:t>
             </a:r>
             <a:r>
-              <a:rPr i="1"/>
-              <a:t>(phân tầng theo bố cục biển)</a:t>
+              <a:rPr b="1"/>
+              <a:t>44,2%</a:t>
             </a:r>
-          </a:p>
-          <a:p>
-            <a:pPr lvl="0" indent="0" marL="0">
-              <a:buNone/>
-            </a:pPr>
+            <a:r>
+              <a:rPr/>
+              <a:t> là bản sao — hai bộ mất </a:t>
+            </a:r>
             <a:r>
               <a:rPr b="1"/>
-              <a:t>Chống rò rỉ giữa các tập</a:t>
+              <a:t>98%</a:t>
+            </a:r>
+            <a:r>
+              <a:rPr/>
+              <a:t> và </a:t>
+            </a:r>
+            <a:r>
+              <a:rPr b="1"/>
+              <a:t>100%</a:t>
             </a:r>
           </a:p>
           <a:p>
             <a:pPr lvl="0"/>
             <a:r>
               <a:rPr/>
-              <a:t>Băm tri giác, chia theo </a:t>
+              <a:t>Chống rò rỉ: băm tri giác, chia theo </a:t>
             </a:r>
             <a:r>
               <a:rPr b="1"/>
@@ -44407,14 +45888,7 @@
             </a:r>
             <a:r>
               <a:rPr/>
-              <a:t> chứ không theo ảnh</a:t>
-            </a:r>
-          </a:p>
-          <a:p>
-            <a:pPr lvl="0"/>
-            <a:r>
-              <a:rPr/>
-              <a:t>Rò rỉ vắt qua các tập: </a:t>
+              <a:t> — </a:t>
             </a:r>
             <a:r>
               <a:rPr b="1"/>
@@ -44422,18 +45896,41 @@
             </a:r>
           </a:p>
           <a:p>
-            <a:pPr lvl="0"/>
+            <a:pPr lvl="0" indent="0" marL="0">
+              <a:buNone/>
+            </a:pPr>
             <a:r>
               <a:rPr/>
-              <a:t>Phần tồn dư </a:t>
+              <a:t>⇒ Các bộ công khai </a:t>
             </a:r>
             <a:r>
               <a:rPr b="1"/>
-              <a:t>được công bố</a:t>
+              <a:t>không độc lập với nhau</a:t>
+            </a:r>
+          </a:p>
+          <a:p>
+            <a:pPr lvl="0" indent="0" marL="0">
+              <a:buNone/>
+            </a:pPr>
+            <a:r>
+              <a:rPr/>
+              <a:t>⚠️ Hai bộ chiếm </a:t>
+            </a:r>
+            <a:r>
+              <a:rPr b="1"/>
+              <a:t>74,3%</a:t>
             </a:r>
             <a:r>
               <a:rPr/>
-              <a:t>, không giấu</a:t>
+              <a:t> — đa dạng giấy phép, </a:t>
+            </a:r>
+            <a:r>
+              <a:rPr b="1"/>
+              <a:t>chưa</a:t>
+            </a:r>
+            <a:r>
+              <a:rPr/>
+              <a:t> đa dạng nội dung</a:t>
             </a:r>
           </a:p>
         </p:txBody>
@@ -44623,7 +46120,7 @@
 </p:sld>
 </file>
 
-<file path=ppt/slides/slide12.xml><?xml version="1.0" encoding="utf-8"?>
+<file path=ppt/slides/slide16.xml><?xml version="1.0" encoding="utf-8"?>
 <p:sld xmlns:a="http://schemas.openxmlformats.org/drawingml/2006/main" xmlns:r="http://schemas.openxmlformats.org/officeDocument/2006/relationships" xmlns:p="http://schemas.openxmlformats.org/presentationml/2006/main">
   <p:cSld>
     <p:spTree>
@@ -44650,8 +46147,8 @@
         </p:nvSpPr>
         <p:spPr>
           <a:xfrm>
-            <a:off x="774146" y="202009"/>
-            <a:ext cx="3932227" cy="1698043"/>
+            <a:off x="771525" y="200025"/>
+            <a:ext cx="10582275" cy="790575"/>
           </a:xfrm>
           <a:prstGeom prst="rect">
             <a:avLst/>
@@ -44736,8 +46233,8 @@
         </p:blipFill>
         <p:spPr bwMode="auto">
           <a:xfrm>
-            <a:off x="5156200" y="774700"/>
-            <a:ext cx="6235700" cy="4787900"/>
+            <a:off x="3479800" y="2209800"/>
+            <a:ext cx="5156200" cy="3962400"/>
           </a:xfrm>
           <a:prstGeom prst="rect">
             <a:avLst/>
@@ -44935,7 +46432,7 @@
 </p:sld>
 </file>
 
-<file path=ppt/slides/slide13.xml><?xml version="1.0" encoding="utf-8"?>
+<file path=ppt/slides/slide17.xml><?xml version="1.0" encoding="utf-8"?>
 <p:sld xmlns:a="http://schemas.openxmlformats.org/drawingml/2006/main" xmlns:r="http://schemas.openxmlformats.org/officeDocument/2006/relationships" xmlns:p="http://schemas.openxmlformats.org/presentationml/2006/main">
   <p:cSld>
     <p:spTree>
@@ -44962,8 +46459,8 @@
         </p:nvSpPr>
         <p:spPr>
           <a:xfrm>
-            <a:off x="774146" y="202009"/>
-            <a:ext cx="3932227" cy="1698043"/>
+            <a:off x="771525" y="200025"/>
+            <a:ext cx="10582275" cy="790575"/>
           </a:xfrm>
           <a:prstGeom prst="rect">
             <a:avLst/>
@@ -45025,8 +46522,8 @@
           </p:nvPr>
         </p:nvGraphicFramePr>
         <p:xfrm>
-          <a:off x="5156200" y="190500"/>
-          <a:ext cx="6235700" cy="5969000"/>
+          <a:off x="762000" y="2209800"/>
+          <a:ext cx="10579100" cy="3962400"/>
         </p:xfrm>
         <a:graphic>
           <a:graphicData uri="http://schemas.openxmlformats.org/drawingml/2006/table">
@@ -45035,12 +46532,12 @@
                 <a:tableStyleId>{45BEF19B-5B1D-4A26-B267-ECC71EF7E2D4}</a:tableStyleId>
               </a:tblPr>
               <a:tblGrid>
-                <a:gridCol w="1028700"/>
-                <a:gridCol w="1028700"/>
-                <a:gridCol w="1028700"/>
-                <a:gridCol w="1028700"/>
-                <a:gridCol w="1028700"/>
-                <a:gridCol w="1028700"/>
+                <a:gridCol w="1752600"/>
+                <a:gridCol w="1752600"/>
+                <a:gridCol w="1752600"/>
+                <a:gridCol w="1752600"/>
+                <a:gridCol w="1752600"/>
+                <a:gridCol w="1752600"/>
               </a:tblGrid>
               <a:tr h="0">
                 <a:tc>
@@ -45691,7 +47188,7 @@
 </p:sld>
 </file>
 
-<file path=ppt/slides/slide14.xml><?xml version="1.0" encoding="utf-8"?>
+<file path=ppt/slides/slide18.xml><?xml version="1.0" encoding="utf-8"?>
 <p:sld xmlns:a="http://schemas.openxmlformats.org/drawingml/2006/main" xmlns:r="http://schemas.openxmlformats.org/officeDocument/2006/relationships" xmlns:p="http://schemas.openxmlformats.org/presentationml/2006/main">
   <p:cSld>
     <p:spTree>
@@ -45718,620 +47215,8 @@
         </p:nvSpPr>
         <p:spPr>
           <a:xfrm>
-            <a:off x="774146" y="202009"/>
-            <a:ext cx="3932227" cy="1698043"/>
-          </a:xfrm>
-          <a:prstGeom prst="rect">
-            <a:avLst/>
-          </a:prstGeom>
-          <a:noFill/>
-          <a:ln>
-            <a:noFill/>
-          </a:ln>
-        </p:spPr>
-        <p:txBody>
-          <a:bodyPr/>
-          <a:lstStyle/>
-          <a:p>
-            <a:pPr lvl="0" indent="0" marL="0">
-              <a:buNone/>
-            </a:pPr>
-            <a:r>
-              <a:rPr/>
-              <a:t>Xử lý biển 2 dòng</a:t>
-            </a:r>
-          </a:p>
-        </p:txBody>
-      </p:sp>
-      <p:sp>
-        <p:nvSpPr>
-          <p:cNvPr id="437" name="Google Shape;437;p31"/>
-          <p:cNvSpPr txBox="1"/>
-          <p:nvPr>
-            <p:ph idx="2" sz="half" type="body"/>
-          </p:nvPr>
-        </p:nvSpPr>
-        <p:spPr/>
-        <p:txBody>
-          <a:bodyPr/>
-          <a:lstStyle/>
-          <a:p>
-            <a:pPr lvl="0" indent="0" marL="0">
-              <a:buNone/>
-            </a:pPr>
-            <a:r>
-              <a:rPr/>
-              <a:t>Nguyên nhân gốc là </a:t>
-            </a:r>
-            <a:r>
-              <a:rPr b="1"/>
-              <a:t>kiến trúc</a:t>
-            </a:r>
-            <a:r>
-              <a:rPr/>
-              <a:t>: CRNN/CTC giả định căn chỉnh </a:t>
-            </a:r>
-            <a:r>
-              <a:rPr b="1"/>
-              <a:t>trên một dòng</a:t>
-            </a:r>
-            <a:r>
-              <a:rPr/>
-              <a:t> — giả định nằm trong </a:t>
-            </a:r>
-            <a:r>
-              <a:rPr b="1"/>
-              <a:t>hàm mất mát</a:t>
-            </a:r>
-            <a:r>
-              <a:rPr/>
-              <a:t>, thêm dữ liệu không sửa được</a:t>
-            </a:r>
-          </a:p>
-        </p:txBody>
-      </p:sp>
-      <p:pic>
-        <p:nvPicPr>
-          <p:cNvPr descr="figures/fig-two-line.png" id="0" name="Picture 1"/>
-          <p:cNvPicPr>
-            <a:picLocks noGrp="1" noChangeAspect="1"/>
-          </p:cNvPicPr>
-          <p:nvPr/>
-        </p:nvPicPr>
-        <p:blipFill>
-          <a:blip r:embed="rId2"/>
-          <a:stretch>
-            <a:fillRect/>
-          </a:stretch>
-        </p:blipFill>
-        <p:spPr bwMode="auto">
-          <a:xfrm>
-            <a:off x="5156200" y="571500"/>
-            <a:ext cx="6235700" cy="5207000"/>
-          </a:xfrm>
-          <a:prstGeom prst="rect">
-            <a:avLst/>
-          </a:prstGeom>
-          <a:noFill/>
-          <a:ln w="9525">
-            <a:noFill/>
-            <a:headEnd/>
-            <a:tailEnd/>
-          </a:ln>
-        </p:spPr>
-      </p:pic>
-      <p:sp>
-        <p:nvSpPr>
-          <p:cNvPr id="449" name="Google Shape;449;p31"/>
-          <p:cNvSpPr txBox="1"/>
-          <p:nvPr>
-            <p:ph idx="12" type="sldNum"/>
-          </p:nvPr>
-        </p:nvSpPr>
-        <p:spPr>
-          <a:xfrm>
-            <a:off x="58380" y="6508358"/>
-            <a:ext cx="349642" cy="349642"/>
-          </a:xfrm>
-          <a:prstGeom prst="rect">
-            <a:avLst/>
-          </a:prstGeom>
-          <a:noFill/>
-          <a:ln>
-            <a:noFill/>
-          </a:ln>
-        </p:spPr>
-        <p:txBody>
-          <a:bodyPr anchor="ctr" anchorCtr="0" bIns="45700" lIns="91425" rIns="91425" spcFirstLastPara="1" tIns="45700" wrap="square">
-            <a:noAutofit/>
-          </a:bodyPr>
-          <a:lstStyle>
-            <a:lvl1pPr algn="ctr" indent="0" lvl="0" marL="0">
-              <a:spcBef>
-                <a:spcPts val="0"/>
-              </a:spcBef>
-              <a:buNone/>
-              <a:defRPr sz="700">
-                <a:solidFill>
-                  <a:schemeClr val="dk1"/>
-                </a:solidFill>
-                <a:latin typeface="Arial"/>
-                <a:ea typeface="Arial"/>
-                <a:cs typeface="Arial"/>
-                <a:sym typeface="Arial"/>
-              </a:defRPr>
-            </a:lvl1pPr>
-            <a:lvl2pPr algn="ctr" indent="0" lvl="1" marL="0">
-              <a:spcBef>
-                <a:spcPts val="0"/>
-              </a:spcBef>
-              <a:buNone/>
-              <a:defRPr sz="700">
-                <a:solidFill>
-                  <a:schemeClr val="dk1"/>
-                </a:solidFill>
-                <a:latin typeface="Arial"/>
-                <a:ea typeface="Arial"/>
-                <a:cs typeface="Arial"/>
-                <a:sym typeface="Arial"/>
-              </a:defRPr>
-            </a:lvl2pPr>
-            <a:lvl3pPr algn="ctr" indent="0" lvl="2" marL="0">
-              <a:spcBef>
-                <a:spcPts val="0"/>
-              </a:spcBef>
-              <a:buNone/>
-              <a:defRPr sz="700">
-                <a:solidFill>
-                  <a:schemeClr val="dk1"/>
-                </a:solidFill>
-                <a:latin typeface="Arial"/>
-                <a:ea typeface="Arial"/>
-                <a:cs typeface="Arial"/>
-                <a:sym typeface="Arial"/>
-              </a:defRPr>
-            </a:lvl3pPr>
-            <a:lvl4pPr algn="ctr" indent="0" lvl="3" marL="0">
-              <a:spcBef>
-                <a:spcPts val="0"/>
-              </a:spcBef>
-              <a:buNone/>
-              <a:defRPr sz="700">
-                <a:solidFill>
-                  <a:schemeClr val="dk1"/>
-                </a:solidFill>
-                <a:latin typeface="Arial"/>
-                <a:ea typeface="Arial"/>
-                <a:cs typeface="Arial"/>
-                <a:sym typeface="Arial"/>
-              </a:defRPr>
-            </a:lvl4pPr>
-            <a:lvl5pPr algn="ctr" indent="0" lvl="4" marL="0">
-              <a:spcBef>
-                <a:spcPts val="0"/>
-              </a:spcBef>
-              <a:buNone/>
-              <a:defRPr sz="700">
-                <a:solidFill>
-                  <a:schemeClr val="dk1"/>
-                </a:solidFill>
-                <a:latin typeface="Arial"/>
-                <a:ea typeface="Arial"/>
-                <a:cs typeface="Arial"/>
-                <a:sym typeface="Arial"/>
-              </a:defRPr>
-            </a:lvl5pPr>
-            <a:lvl6pPr algn="ctr" indent="0" lvl="5" marL="0">
-              <a:spcBef>
-                <a:spcPts val="0"/>
-              </a:spcBef>
-              <a:buNone/>
-              <a:defRPr sz="700">
-                <a:solidFill>
-                  <a:schemeClr val="dk1"/>
-                </a:solidFill>
-                <a:latin typeface="Arial"/>
-                <a:ea typeface="Arial"/>
-                <a:cs typeface="Arial"/>
-                <a:sym typeface="Arial"/>
-              </a:defRPr>
-            </a:lvl6pPr>
-            <a:lvl7pPr algn="ctr" indent="0" lvl="6" marL="0">
-              <a:spcBef>
-                <a:spcPts val="0"/>
-              </a:spcBef>
-              <a:buNone/>
-              <a:defRPr sz="700">
-                <a:solidFill>
-                  <a:schemeClr val="dk1"/>
-                </a:solidFill>
-                <a:latin typeface="Arial"/>
-                <a:ea typeface="Arial"/>
-                <a:cs typeface="Arial"/>
-                <a:sym typeface="Arial"/>
-              </a:defRPr>
-            </a:lvl7pPr>
-            <a:lvl8pPr algn="ctr" indent="0" lvl="7" marL="0">
-              <a:spcBef>
-                <a:spcPts val="0"/>
-              </a:spcBef>
-              <a:buNone/>
-              <a:defRPr sz="700">
-                <a:solidFill>
-                  <a:schemeClr val="dk1"/>
-                </a:solidFill>
-                <a:latin typeface="Arial"/>
-                <a:ea typeface="Arial"/>
-                <a:cs typeface="Arial"/>
-                <a:sym typeface="Arial"/>
-              </a:defRPr>
-            </a:lvl8pPr>
-            <a:lvl9pPr algn="ctr" indent="0" lvl="8" marL="0">
-              <a:spcBef>
-                <a:spcPts val="0"/>
-              </a:spcBef>
-              <a:buNone/>
-              <a:defRPr sz="700">
-                <a:solidFill>
-                  <a:schemeClr val="dk1"/>
-                </a:solidFill>
-                <a:latin typeface="Arial"/>
-                <a:ea typeface="Arial"/>
-                <a:cs typeface="Arial"/>
-                <a:sym typeface="Arial"/>
-              </a:defRPr>
-            </a:lvl9pPr>
-          </a:lstStyle>
-          <a:p>
-            <a:pPr algn="ctr" indent="0" lvl="0" marL="0" rtl="0">
-              <a:spcBef>
-                <a:spcPts val="0"/>
-              </a:spcBef>
-              <a:spcAft>
-                <a:spcPts val="0"/>
-              </a:spcAft>
-              <a:buNone/>
-            </a:pPr>
-            <a:fld id="{00000000-1234-1234-1234-123412341234}" type="slidenum">
-              <a:rPr lang="en-US"/>
-              <a:t>‹#›</a:t>
-            </a:fld>
-            <a:endParaRPr/>
-          </a:p>
-        </p:txBody>
-      </p:sp>
-    </p:spTree>
-  </p:cSld>
-</p:sld>
-</file>
-
-<file path=ppt/slides/slide15.xml><?xml version="1.0" encoding="utf-8"?>
-<p:sld xmlns:a="http://schemas.openxmlformats.org/drawingml/2006/main" xmlns:r="http://schemas.openxmlformats.org/officeDocument/2006/relationships" xmlns:p="http://schemas.openxmlformats.org/presentationml/2006/main">
-  <p:cSld>
-    <p:spTree>
-      <p:nvGrpSpPr>
-        <p:cNvPr id="428" name="Shape 428"/>
-        <p:cNvGrpSpPr/>
-        <p:nvPr/>
-      </p:nvGrpSpPr>
-      <p:grpSpPr>
-        <a:xfrm>
-          <a:off x="0" y="0"/>
-          <a:ext cx="0" cy="0"/>
-          <a:chOff x="0" y="0"/>
-          <a:chExt cx="0" cy="0"/>
-        </a:xfrm>
-      </p:grpSpPr>
-      <p:sp>
-        <p:nvSpPr>
-          <p:cNvPr id="436" name="Google Shape;436;p31"/>
-          <p:cNvSpPr txBox="1"/>
-          <p:nvPr>
-            <p:ph type="title"/>
-          </p:nvPr>
-        </p:nvSpPr>
-        <p:spPr>
-          <a:xfrm>
-            <a:off x="774146" y="202009"/>
-            <a:ext cx="3932227" cy="1698043"/>
-          </a:xfrm>
-          <a:prstGeom prst="rect">
-            <a:avLst/>
-          </a:prstGeom>
-          <a:noFill/>
-          <a:ln>
-            <a:noFill/>
-          </a:ln>
-        </p:spPr>
-        <p:txBody>
-          <a:bodyPr/>
-          <a:lstStyle/>
-          <a:p>
-            <a:pPr lvl="0" indent="0" marL="0">
-              <a:buNone/>
-            </a:pPr>
-            <a:r>
-              <a:rPr/>
-              <a:t>Bộ luật hậu xử lý theo vị trí</a:t>
-            </a:r>
-          </a:p>
-        </p:txBody>
-      </p:sp>
-      <p:sp>
-        <p:nvSpPr>
-          <p:cNvPr id="437" name="Google Shape;437;p31"/>
-          <p:cNvSpPr txBox="1"/>
-          <p:nvPr>
-            <p:ph idx="2" sz="half" type="body"/>
-          </p:nvPr>
-        </p:nvSpPr>
-        <p:spPr/>
-        <p:txBody>
-          <a:bodyPr/>
-          <a:lstStyle/>
-          <a:p>
-            <a:pPr lvl="0" indent="0" marL="0">
-              <a:buNone/>
-            </a:pPr>
-            <a:r>
-              <a:rPr/>
-              <a:t>Sửa theo </a:t>
-            </a:r>
-            <a:r>
-              <a:rPr b="1"/>
-              <a:t>VỊ TRÍ</a:t>
-            </a:r>
-            <a:r>
-              <a:rPr/>
-              <a:t>, không sửa toàn cục — đóng góp kỹ thuật riêng của đồ án</a:t>
-            </a:r>
-          </a:p>
-        </p:txBody>
-      </p:sp>
-      <p:pic>
-        <p:nvPicPr>
-          <p:cNvPr descr="figures/fig-position-rules.png" id="0" name="Picture 1"/>
-          <p:cNvPicPr>
-            <a:picLocks noGrp="1" noChangeAspect="1"/>
-          </p:cNvPicPr>
-          <p:nvPr/>
-        </p:nvPicPr>
-        <p:blipFill>
-          <a:blip r:embed="rId2"/>
-          <a:stretch>
-            <a:fillRect/>
-          </a:stretch>
-        </p:blipFill>
-        <p:spPr bwMode="auto">
-          <a:xfrm>
-            <a:off x="5156200" y="977900"/>
-            <a:ext cx="6235700" cy="4406900"/>
-          </a:xfrm>
-          <a:prstGeom prst="rect">
-            <a:avLst/>
-          </a:prstGeom>
-          <a:noFill/>
-          <a:ln w="9525">
-            <a:noFill/>
-            <a:headEnd/>
-            <a:tailEnd/>
-          </a:ln>
-        </p:spPr>
-      </p:pic>
-      <p:sp>
-        <p:nvSpPr>
-          <p:cNvPr id="449" name="Google Shape;449;p31"/>
-          <p:cNvSpPr txBox="1"/>
-          <p:nvPr>
-            <p:ph idx="12" type="sldNum"/>
-          </p:nvPr>
-        </p:nvSpPr>
-        <p:spPr>
-          <a:xfrm>
-            <a:off x="58380" y="6508358"/>
-            <a:ext cx="349642" cy="349642"/>
-          </a:xfrm>
-          <a:prstGeom prst="rect">
-            <a:avLst/>
-          </a:prstGeom>
-          <a:noFill/>
-          <a:ln>
-            <a:noFill/>
-          </a:ln>
-        </p:spPr>
-        <p:txBody>
-          <a:bodyPr anchor="ctr" anchorCtr="0" bIns="45700" lIns="91425" rIns="91425" spcFirstLastPara="1" tIns="45700" wrap="square">
-            <a:noAutofit/>
-          </a:bodyPr>
-          <a:lstStyle>
-            <a:lvl1pPr algn="ctr" indent="0" lvl="0" marL="0">
-              <a:spcBef>
-                <a:spcPts val="0"/>
-              </a:spcBef>
-              <a:buNone/>
-              <a:defRPr sz="700">
-                <a:solidFill>
-                  <a:schemeClr val="dk1"/>
-                </a:solidFill>
-                <a:latin typeface="Arial"/>
-                <a:ea typeface="Arial"/>
-                <a:cs typeface="Arial"/>
-                <a:sym typeface="Arial"/>
-              </a:defRPr>
-            </a:lvl1pPr>
-            <a:lvl2pPr algn="ctr" indent="0" lvl="1" marL="0">
-              <a:spcBef>
-                <a:spcPts val="0"/>
-              </a:spcBef>
-              <a:buNone/>
-              <a:defRPr sz="700">
-                <a:solidFill>
-                  <a:schemeClr val="dk1"/>
-                </a:solidFill>
-                <a:latin typeface="Arial"/>
-                <a:ea typeface="Arial"/>
-                <a:cs typeface="Arial"/>
-                <a:sym typeface="Arial"/>
-              </a:defRPr>
-            </a:lvl2pPr>
-            <a:lvl3pPr algn="ctr" indent="0" lvl="2" marL="0">
-              <a:spcBef>
-                <a:spcPts val="0"/>
-              </a:spcBef>
-              <a:buNone/>
-              <a:defRPr sz="700">
-                <a:solidFill>
-                  <a:schemeClr val="dk1"/>
-                </a:solidFill>
-                <a:latin typeface="Arial"/>
-                <a:ea typeface="Arial"/>
-                <a:cs typeface="Arial"/>
-                <a:sym typeface="Arial"/>
-              </a:defRPr>
-            </a:lvl3pPr>
-            <a:lvl4pPr algn="ctr" indent="0" lvl="3" marL="0">
-              <a:spcBef>
-                <a:spcPts val="0"/>
-              </a:spcBef>
-              <a:buNone/>
-              <a:defRPr sz="700">
-                <a:solidFill>
-                  <a:schemeClr val="dk1"/>
-                </a:solidFill>
-                <a:latin typeface="Arial"/>
-                <a:ea typeface="Arial"/>
-                <a:cs typeface="Arial"/>
-                <a:sym typeface="Arial"/>
-              </a:defRPr>
-            </a:lvl4pPr>
-            <a:lvl5pPr algn="ctr" indent="0" lvl="4" marL="0">
-              <a:spcBef>
-                <a:spcPts val="0"/>
-              </a:spcBef>
-              <a:buNone/>
-              <a:defRPr sz="700">
-                <a:solidFill>
-                  <a:schemeClr val="dk1"/>
-                </a:solidFill>
-                <a:latin typeface="Arial"/>
-                <a:ea typeface="Arial"/>
-                <a:cs typeface="Arial"/>
-                <a:sym typeface="Arial"/>
-              </a:defRPr>
-            </a:lvl5pPr>
-            <a:lvl6pPr algn="ctr" indent="0" lvl="5" marL="0">
-              <a:spcBef>
-                <a:spcPts val="0"/>
-              </a:spcBef>
-              <a:buNone/>
-              <a:defRPr sz="700">
-                <a:solidFill>
-                  <a:schemeClr val="dk1"/>
-                </a:solidFill>
-                <a:latin typeface="Arial"/>
-                <a:ea typeface="Arial"/>
-                <a:cs typeface="Arial"/>
-                <a:sym typeface="Arial"/>
-              </a:defRPr>
-            </a:lvl6pPr>
-            <a:lvl7pPr algn="ctr" indent="0" lvl="6" marL="0">
-              <a:spcBef>
-                <a:spcPts val="0"/>
-              </a:spcBef>
-              <a:buNone/>
-              <a:defRPr sz="700">
-                <a:solidFill>
-                  <a:schemeClr val="dk1"/>
-                </a:solidFill>
-                <a:latin typeface="Arial"/>
-                <a:ea typeface="Arial"/>
-                <a:cs typeface="Arial"/>
-                <a:sym typeface="Arial"/>
-              </a:defRPr>
-            </a:lvl7pPr>
-            <a:lvl8pPr algn="ctr" indent="0" lvl="7" marL="0">
-              <a:spcBef>
-                <a:spcPts val="0"/>
-              </a:spcBef>
-              <a:buNone/>
-              <a:defRPr sz="700">
-                <a:solidFill>
-                  <a:schemeClr val="dk1"/>
-                </a:solidFill>
-                <a:latin typeface="Arial"/>
-                <a:ea typeface="Arial"/>
-                <a:cs typeface="Arial"/>
-                <a:sym typeface="Arial"/>
-              </a:defRPr>
-            </a:lvl8pPr>
-            <a:lvl9pPr algn="ctr" indent="0" lvl="8" marL="0">
-              <a:spcBef>
-                <a:spcPts val="0"/>
-              </a:spcBef>
-              <a:buNone/>
-              <a:defRPr sz="700">
-                <a:solidFill>
-                  <a:schemeClr val="dk1"/>
-                </a:solidFill>
-                <a:latin typeface="Arial"/>
-                <a:ea typeface="Arial"/>
-                <a:cs typeface="Arial"/>
-                <a:sym typeface="Arial"/>
-              </a:defRPr>
-            </a:lvl9pPr>
-          </a:lstStyle>
-          <a:p>
-            <a:pPr algn="ctr" indent="0" lvl="0" marL="0" rtl="0">
-              <a:spcBef>
-                <a:spcPts val="0"/>
-              </a:spcBef>
-              <a:spcAft>
-                <a:spcPts val="0"/>
-              </a:spcAft>
-              <a:buNone/>
-            </a:pPr>
-            <a:fld id="{00000000-1234-1234-1234-123412341234}" type="slidenum">
-              <a:rPr lang="en-US"/>
-              <a:t>‹#›</a:t>
-            </a:fld>
-            <a:endParaRPr/>
-          </a:p>
-        </p:txBody>
-      </p:sp>
-    </p:spTree>
-  </p:cSld>
-</p:sld>
-</file>
-
-<file path=ppt/slides/slide16.xml><?xml version="1.0" encoding="utf-8"?>
-<p:sld xmlns:a="http://schemas.openxmlformats.org/drawingml/2006/main" xmlns:r="http://schemas.openxmlformats.org/officeDocument/2006/relationships" xmlns:p="http://schemas.openxmlformats.org/presentationml/2006/main">
-  <p:cSld>
-    <p:spTree>
-      <p:nvGrpSpPr>
-        <p:cNvPr id="428" name="Shape 428"/>
-        <p:cNvGrpSpPr/>
-        <p:nvPr/>
-      </p:nvGrpSpPr>
-      <p:grpSpPr>
-        <a:xfrm>
-          <a:off x="0" y="0"/>
-          <a:ext cx="0" cy="0"/>
-          <a:chOff x="0" y="0"/>
-          <a:chExt cx="0" cy="0"/>
-        </a:xfrm>
-      </p:grpSpPr>
-      <p:sp>
-        <p:nvSpPr>
-          <p:cNvPr id="436" name="Google Shape;436;p31"/>
-          <p:cNvSpPr txBox="1"/>
-          <p:nvPr>
-            <p:ph type="title"/>
-          </p:nvPr>
-        </p:nvSpPr>
-        <p:spPr>
-          <a:xfrm>
-            <a:off x="774146" y="202009"/>
-            <a:ext cx="3932227" cy="1698043"/>
+            <a:off x="771525" y="200025"/>
+            <a:ext cx="10582275" cy="790575"/>
           </a:xfrm>
           <a:prstGeom prst="rect">
             <a:avLst/>
@@ -46405,8 +47290,8 @@
           </p:nvPr>
         </p:nvGraphicFramePr>
         <p:xfrm>
-          <a:off x="5156200" y="190500"/>
-          <a:ext cx="6235700" cy="5969000"/>
+          <a:off x="762000" y="2209800"/>
+          <a:ext cx="10579100" cy="3962400"/>
         </p:xfrm>
         <a:graphic>
           <a:graphicData uri="http://schemas.openxmlformats.org/drawingml/2006/table">
@@ -46415,10 +47300,10 @@
                 <a:tableStyleId>{45BEF19B-5B1D-4A26-B267-ECC71EF7E2D4}</a:tableStyleId>
               </a:tblPr>
               <a:tblGrid>
-                <a:gridCol w="1549400"/>
-                <a:gridCol w="1549400"/>
-                <a:gridCol w="1549400"/>
-                <a:gridCol w="1549400"/>
+                <a:gridCol w="2641600"/>
+                <a:gridCol w="2641600"/>
+                <a:gridCol w="2641600"/>
+                <a:gridCol w="2641600"/>
               </a:tblGrid>
               <a:tr h="0">
                 <a:tc>
@@ -46431,7 +47316,7 @@
                       </a:pPr>
                       <a:r>
                         <a:rPr/>
-                        <a:t>Chỉ tiêu</a:t>
+                        <a:t>Đo cái gì</a:t>
                       </a:r>
                     </a:p>
                   </a:txBody>
@@ -46491,7 +47376,11 @@
                       </a:pPr>
                       <a:r>
                         <a:rPr/>
-                        <a:t>A4 — chính xác ký tự</a:t>
+                        <a:t>Đúng từng </a:t>
+                      </a:r>
+                      <a:r>
+                        <a:rPr b="1"/>
+                        <a:t>ký tự</a:t>
                       </a:r>
                     </a:p>
                   </a:txBody>
@@ -46553,7 +47442,15 @@
                       </a:pPr>
                       <a:r>
                         <a:rPr/>
-                        <a:t>A5 — chuỗi trước hậu xử lý</a:t>
+                        <a:t>Đúng </a:t>
+                      </a:r>
+                      <a:r>
+                        <a:rPr b="1"/>
+                        <a:t>cả chuỗi</a:t>
+                      </a:r>
+                      <a:r>
+                        <a:rPr/>
+                        <a:t> — chưa hậu xử lý</a:t>
                       </a:r>
                     </a:p>
                   </a:txBody>
@@ -46615,7 +47512,15 @@
                       </a:pPr>
                       <a:r>
                         <a:rPr/>
-                        <a:t>A6 — chuỗi sau hậu xử lý</a:t>
+                        <a:t>Đúng </a:t>
+                      </a:r>
+                      <a:r>
+                        <a:rPr b="1"/>
+                        <a:t>cả chuỗi</a:t>
+                      </a:r>
+                      <a:r>
+                        <a:rPr/>
+                        <a:t> — sau hậu xử lý</a:t>
                       </a:r>
                     </a:p>
                   </a:txBody>
@@ -46677,7 +47582,15 @@
                       </a:pPr>
                       <a:r>
                         <a:rPr/>
-                        <a:t>A7 — đầu-cuối</a:t>
+                        <a:t>Đúng </a:t>
+                      </a:r>
+                      <a:r>
+                        <a:rPr b="1"/>
+                        <a:t>đầu-cuối</a:t>
+                      </a:r>
+                      <a:r>
+                        <a:rPr/>
+                        <a:t> — ảnh vào, chuỗi ra</a:t>
                       </a:r>
                     </a:p>
                   </a:txBody>
@@ -46917,602 +47830,6 @@
 </p:sld>
 </file>
 
-<file path=ppt/slides/slide17.xml><?xml version="1.0" encoding="utf-8"?>
-<p:sld xmlns:a="http://schemas.openxmlformats.org/drawingml/2006/main" xmlns:r="http://schemas.openxmlformats.org/officeDocument/2006/relationships" xmlns:p="http://schemas.openxmlformats.org/presentationml/2006/main">
-  <p:cSld>
-    <p:spTree>
-      <p:nvGrpSpPr>
-        <p:cNvPr id="428" name="Shape 428"/>
-        <p:cNvGrpSpPr/>
-        <p:nvPr/>
-      </p:nvGrpSpPr>
-      <p:grpSpPr>
-        <a:xfrm>
-          <a:off x="0" y="0"/>
-          <a:ext cx="0" cy="0"/>
-          <a:chOff x="0" y="0"/>
-          <a:chExt cx="0" cy="0"/>
-        </a:xfrm>
-      </p:grpSpPr>
-      <p:sp>
-        <p:nvSpPr>
-          <p:cNvPr id="436" name="Google Shape;436;p31"/>
-          <p:cNvSpPr txBox="1"/>
-          <p:nvPr>
-            <p:ph type="title"/>
-          </p:nvPr>
-        </p:nvSpPr>
-        <p:spPr>
-          <a:xfrm>
-            <a:off x="774146" y="202009"/>
-            <a:ext cx="3932227" cy="1698043"/>
-          </a:xfrm>
-          <a:prstGeom prst="rect">
-            <a:avLst/>
-          </a:prstGeom>
-          <a:noFill/>
-          <a:ln>
-            <a:noFill/>
-          </a:ln>
-        </p:spPr>
-        <p:txBody>
-          <a:bodyPr/>
-          <a:lstStyle/>
-          <a:p>
-            <a:pPr lvl="0" indent="0" marL="0">
-              <a:buNone/>
-            </a:pPr>
-            <a:r>
-              <a:rPr/>
-              <a:t>Khoảng cách nằm trọn ở biển 2 dòng</a:t>
-            </a:r>
-          </a:p>
-        </p:txBody>
-      </p:sp>
-      <p:sp>
-        <p:nvSpPr>
-          <p:cNvPr id="437" name="Google Shape;437;p31"/>
-          <p:cNvSpPr txBox="1"/>
-          <p:nvPr>
-            <p:ph idx="2" sz="half" type="body"/>
-          </p:nvPr>
-        </p:nvSpPr>
-        <p:spPr/>
-        <p:txBody>
-          <a:bodyPr/>
-          <a:lstStyle/>
-          <a:p>
-            <a:pPr lvl="0" indent="0" marL="0">
-              <a:buNone/>
-            </a:pPr>
-            <a:r>
-              <a:rPr/>
-              <a:t>Cùng một hệ thống, cùng một phép đo — tách theo bố cục biển</a:t>
-            </a:r>
-          </a:p>
-        </p:txBody>
-      </p:sp>
-      <p:pic>
-        <p:nvPicPr>
-          <p:cNvPr descr="../reports/figures/04-ocr-accuracy-by-line-count.png" id="0" name="Picture 1"/>
-          <p:cNvPicPr>
-            <a:picLocks noGrp="1" noChangeAspect="1"/>
-          </p:cNvPicPr>
-          <p:nvPr/>
-        </p:nvPicPr>
-        <p:blipFill>
-          <a:blip r:embed="rId2"/>
-          <a:stretch>
-            <a:fillRect/>
-          </a:stretch>
-        </p:blipFill>
-        <p:spPr bwMode="auto">
-          <a:xfrm>
-            <a:off x="5156200" y="1371600"/>
-            <a:ext cx="6235700" cy="3606800"/>
-          </a:xfrm>
-          <a:prstGeom prst="rect">
-            <a:avLst/>
-          </a:prstGeom>
-          <a:noFill/>
-          <a:ln w="9525">
-            <a:noFill/>
-            <a:headEnd/>
-            <a:tailEnd/>
-          </a:ln>
-        </p:spPr>
-      </p:pic>
-      <p:sp>
-        <p:nvSpPr>
-          <p:cNvPr id="449" name="Google Shape;449;p31"/>
-          <p:cNvSpPr txBox="1"/>
-          <p:nvPr>
-            <p:ph idx="12" type="sldNum"/>
-          </p:nvPr>
-        </p:nvSpPr>
-        <p:spPr>
-          <a:xfrm>
-            <a:off x="58380" y="6508358"/>
-            <a:ext cx="349642" cy="349642"/>
-          </a:xfrm>
-          <a:prstGeom prst="rect">
-            <a:avLst/>
-          </a:prstGeom>
-          <a:noFill/>
-          <a:ln>
-            <a:noFill/>
-          </a:ln>
-        </p:spPr>
-        <p:txBody>
-          <a:bodyPr anchor="ctr" anchorCtr="0" bIns="45700" lIns="91425" rIns="91425" spcFirstLastPara="1" tIns="45700" wrap="square">
-            <a:noAutofit/>
-          </a:bodyPr>
-          <a:lstStyle>
-            <a:lvl1pPr algn="ctr" indent="0" lvl="0" marL="0">
-              <a:spcBef>
-                <a:spcPts val="0"/>
-              </a:spcBef>
-              <a:buNone/>
-              <a:defRPr sz="700">
-                <a:solidFill>
-                  <a:schemeClr val="dk1"/>
-                </a:solidFill>
-                <a:latin typeface="Arial"/>
-                <a:ea typeface="Arial"/>
-                <a:cs typeface="Arial"/>
-                <a:sym typeface="Arial"/>
-              </a:defRPr>
-            </a:lvl1pPr>
-            <a:lvl2pPr algn="ctr" indent="0" lvl="1" marL="0">
-              <a:spcBef>
-                <a:spcPts val="0"/>
-              </a:spcBef>
-              <a:buNone/>
-              <a:defRPr sz="700">
-                <a:solidFill>
-                  <a:schemeClr val="dk1"/>
-                </a:solidFill>
-                <a:latin typeface="Arial"/>
-                <a:ea typeface="Arial"/>
-                <a:cs typeface="Arial"/>
-                <a:sym typeface="Arial"/>
-              </a:defRPr>
-            </a:lvl2pPr>
-            <a:lvl3pPr algn="ctr" indent="0" lvl="2" marL="0">
-              <a:spcBef>
-                <a:spcPts val="0"/>
-              </a:spcBef>
-              <a:buNone/>
-              <a:defRPr sz="700">
-                <a:solidFill>
-                  <a:schemeClr val="dk1"/>
-                </a:solidFill>
-                <a:latin typeface="Arial"/>
-                <a:ea typeface="Arial"/>
-                <a:cs typeface="Arial"/>
-                <a:sym typeface="Arial"/>
-              </a:defRPr>
-            </a:lvl3pPr>
-            <a:lvl4pPr algn="ctr" indent="0" lvl="3" marL="0">
-              <a:spcBef>
-                <a:spcPts val="0"/>
-              </a:spcBef>
-              <a:buNone/>
-              <a:defRPr sz="700">
-                <a:solidFill>
-                  <a:schemeClr val="dk1"/>
-                </a:solidFill>
-                <a:latin typeface="Arial"/>
-                <a:ea typeface="Arial"/>
-                <a:cs typeface="Arial"/>
-                <a:sym typeface="Arial"/>
-              </a:defRPr>
-            </a:lvl4pPr>
-            <a:lvl5pPr algn="ctr" indent="0" lvl="4" marL="0">
-              <a:spcBef>
-                <a:spcPts val="0"/>
-              </a:spcBef>
-              <a:buNone/>
-              <a:defRPr sz="700">
-                <a:solidFill>
-                  <a:schemeClr val="dk1"/>
-                </a:solidFill>
-                <a:latin typeface="Arial"/>
-                <a:ea typeface="Arial"/>
-                <a:cs typeface="Arial"/>
-                <a:sym typeface="Arial"/>
-              </a:defRPr>
-            </a:lvl5pPr>
-            <a:lvl6pPr algn="ctr" indent="0" lvl="5" marL="0">
-              <a:spcBef>
-                <a:spcPts val="0"/>
-              </a:spcBef>
-              <a:buNone/>
-              <a:defRPr sz="700">
-                <a:solidFill>
-                  <a:schemeClr val="dk1"/>
-                </a:solidFill>
-                <a:latin typeface="Arial"/>
-                <a:ea typeface="Arial"/>
-                <a:cs typeface="Arial"/>
-                <a:sym typeface="Arial"/>
-              </a:defRPr>
-            </a:lvl6pPr>
-            <a:lvl7pPr algn="ctr" indent="0" lvl="6" marL="0">
-              <a:spcBef>
-                <a:spcPts val="0"/>
-              </a:spcBef>
-              <a:buNone/>
-              <a:defRPr sz="700">
-                <a:solidFill>
-                  <a:schemeClr val="dk1"/>
-                </a:solidFill>
-                <a:latin typeface="Arial"/>
-                <a:ea typeface="Arial"/>
-                <a:cs typeface="Arial"/>
-                <a:sym typeface="Arial"/>
-              </a:defRPr>
-            </a:lvl7pPr>
-            <a:lvl8pPr algn="ctr" indent="0" lvl="7" marL="0">
-              <a:spcBef>
-                <a:spcPts val="0"/>
-              </a:spcBef>
-              <a:buNone/>
-              <a:defRPr sz="700">
-                <a:solidFill>
-                  <a:schemeClr val="dk1"/>
-                </a:solidFill>
-                <a:latin typeface="Arial"/>
-                <a:ea typeface="Arial"/>
-                <a:cs typeface="Arial"/>
-                <a:sym typeface="Arial"/>
-              </a:defRPr>
-            </a:lvl8pPr>
-            <a:lvl9pPr algn="ctr" indent="0" lvl="8" marL="0">
-              <a:spcBef>
-                <a:spcPts val="0"/>
-              </a:spcBef>
-              <a:buNone/>
-              <a:defRPr sz="700">
-                <a:solidFill>
-                  <a:schemeClr val="dk1"/>
-                </a:solidFill>
-                <a:latin typeface="Arial"/>
-                <a:ea typeface="Arial"/>
-                <a:cs typeface="Arial"/>
-                <a:sym typeface="Arial"/>
-              </a:defRPr>
-            </a:lvl9pPr>
-          </a:lstStyle>
-          <a:p>
-            <a:pPr algn="ctr" indent="0" lvl="0" marL="0" rtl="0">
-              <a:spcBef>
-                <a:spcPts val="0"/>
-              </a:spcBef>
-              <a:spcAft>
-                <a:spcPts val="0"/>
-              </a:spcAft>
-              <a:buNone/>
-            </a:pPr>
-            <a:fld id="{00000000-1234-1234-1234-123412341234}" type="slidenum">
-              <a:rPr lang="en-US"/>
-              <a:t>‹#›</a:t>
-            </a:fld>
-            <a:endParaRPr/>
-          </a:p>
-        </p:txBody>
-      </p:sp>
-    </p:spTree>
-  </p:cSld>
-</p:sld>
-</file>
-
-<file path=ppt/slides/slide18.xml><?xml version="1.0" encoding="utf-8"?>
-<p:sld xmlns:a="http://schemas.openxmlformats.org/drawingml/2006/main" xmlns:r="http://schemas.openxmlformats.org/officeDocument/2006/relationships" xmlns:p="http://schemas.openxmlformats.org/presentationml/2006/main">
-  <p:cSld>
-    <p:spTree>
-      <p:nvGrpSpPr>
-        <p:cNvPr id="428" name="Shape 428"/>
-        <p:cNvGrpSpPr/>
-        <p:nvPr/>
-      </p:nvGrpSpPr>
-      <p:grpSpPr>
-        <a:xfrm>
-          <a:off x="0" y="0"/>
-          <a:ext cx="0" cy="0"/>
-          <a:chOff x="0" y="0"/>
-          <a:chExt cx="0" cy="0"/>
-        </a:xfrm>
-      </p:grpSpPr>
-      <p:sp>
-        <p:nvSpPr>
-          <p:cNvPr id="436" name="Google Shape;436;p31"/>
-          <p:cNvSpPr txBox="1"/>
-          <p:nvPr>
-            <p:ph type="title"/>
-          </p:nvPr>
-        </p:nvSpPr>
-        <p:spPr>
-          <a:xfrm>
-            <a:off x="774146" y="202009"/>
-            <a:ext cx="3932227" cy="1698043"/>
-          </a:xfrm>
-          <a:prstGeom prst="rect">
-            <a:avLst/>
-          </a:prstGeom>
-          <a:noFill/>
-          <a:ln>
-            <a:noFill/>
-          </a:ln>
-        </p:spPr>
-        <p:txBody>
-          <a:bodyPr/>
-          <a:lstStyle/>
-          <a:p>
-            <a:pPr lvl="0" indent="0" marL="0">
-              <a:buNone/>
-            </a:pPr>
-            <a:r>
-              <a:rPr/>
-              <a:t>Đóng góp của hậu xử lý — đo được bằng số</a:t>
-            </a:r>
-          </a:p>
-        </p:txBody>
-      </p:sp>
-      <p:sp>
-        <p:nvSpPr>
-          <p:cNvPr id="437" name="Google Shape;437;p31"/>
-          <p:cNvSpPr txBox="1"/>
-          <p:nvPr>
-            <p:ph idx="2" sz="half" type="body"/>
-          </p:nvPr>
-        </p:nvSpPr>
-        <p:spPr/>
-        <p:txBody>
-          <a:bodyPr/>
-          <a:lstStyle/>
-          <a:p>
-            <a:pPr lvl="0" indent="0" marL="0">
-              <a:buNone/>
-            </a:pPr>
-            <a:r>
-              <a:rPr/>
-              <a:t>Sửa đúng </a:t>
-            </a:r>
-            <a:r>
-              <a:rPr b="1"/>
-              <a:t>319 biển</a:t>
-            </a:r>
-            <a:r>
-              <a:rPr/>
-              <a:t>, làm hỏng </a:t>
-            </a:r>
-            <a:r>
-              <a:rPr b="1"/>
-              <a:t>0</a:t>
-            </a:r>
-            <a:r>
-              <a:rPr/>
-              <a:t> — dồn gần trọn vào biển 2 dòng</a:t>
-            </a:r>
-          </a:p>
-        </p:txBody>
-      </p:sp>
-      <p:pic>
-        <p:nvPicPr>
-          <p:cNvPr descr="figures/fig-postprocess-gain.png" id="0" name="Picture 1"/>
-          <p:cNvPicPr>
-            <a:picLocks noGrp="1" noChangeAspect="1"/>
-          </p:cNvPicPr>
-          <p:nvPr/>
-        </p:nvPicPr>
-        <p:blipFill>
-          <a:blip r:embed="rId2"/>
-          <a:stretch>
-            <a:fillRect/>
-          </a:stretch>
-        </p:blipFill>
-        <p:spPr bwMode="auto">
-          <a:xfrm>
-            <a:off x="5156200" y="622300"/>
-            <a:ext cx="6235700" cy="5105400"/>
-          </a:xfrm>
-          <a:prstGeom prst="rect">
-            <a:avLst/>
-          </a:prstGeom>
-          <a:noFill/>
-          <a:ln w="9525">
-            <a:noFill/>
-            <a:headEnd/>
-            <a:tailEnd/>
-          </a:ln>
-        </p:spPr>
-      </p:pic>
-      <p:sp>
-        <p:nvSpPr>
-          <p:cNvPr id="449" name="Google Shape;449;p31"/>
-          <p:cNvSpPr txBox="1"/>
-          <p:nvPr>
-            <p:ph idx="12" type="sldNum"/>
-          </p:nvPr>
-        </p:nvSpPr>
-        <p:spPr>
-          <a:xfrm>
-            <a:off x="58380" y="6508358"/>
-            <a:ext cx="349642" cy="349642"/>
-          </a:xfrm>
-          <a:prstGeom prst="rect">
-            <a:avLst/>
-          </a:prstGeom>
-          <a:noFill/>
-          <a:ln>
-            <a:noFill/>
-          </a:ln>
-        </p:spPr>
-        <p:txBody>
-          <a:bodyPr anchor="ctr" anchorCtr="0" bIns="45700" lIns="91425" rIns="91425" spcFirstLastPara="1" tIns="45700" wrap="square">
-            <a:noAutofit/>
-          </a:bodyPr>
-          <a:lstStyle>
-            <a:lvl1pPr algn="ctr" indent="0" lvl="0" marL="0">
-              <a:spcBef>
-                <a:spcPts val="0"/>
-              </a:spcBef>
-              <a:buNone/>
-              <a:defRPr sz="700">
-                <a:solidFill>
-                  <a:schemeClr val="dk1"/>
-                </a:solidFill>
-                <a:latin typeface="Arial"/>
-                <a:ea typeface="Arial"/>
-                <a:cs typeface="Arial"/>
-                <a:sym typeface="Arial"/>
-              </a:defRPr>
-            </a:lvl1pPr>
-            <a:lvl2pPr algn="ctr" indent="0" lvl="1" marL="0">
-              <a:spcBef>
-                <a:spcPts val="0"/>
-              </a:spcBef>
-              <a:buNone/>
-              <a:defRPr sz="700">
-                <a:solidFill>
-                  <a:schemeClr val="dk1"/>
-                </a:solidFill>
-                <a:latin typeface="Arial"/>
-                <a:ea typeface="Arial"/>
-                <a:cs typeface="Arial"/>
-                <a:sym typeface="Arial"/>
-              </a:defRPr>
-            </a:lvl2pPr>
-            <a:lvl3pPr algn="ctr" indent="0" lvl="2" marL="0">
-              <a:spcBef>
-                <a:spcPts val="0"/>
-              </a:spcBef>
-              <a:buNone/>
-              <a:defRPr sz="700">
-                <a:solidFill>
-                  <a:schemeClr val="dk1"/>
-                </a:solidFill>
-                <a:latin typeface="Arial"/>
-                <a:ea typeface="Arial"/>
-                <a:cs typeface="Arial"/>
-                <a:sym typeface="Arial"/>
-              </a:defRPr>
-            </a:lvl3pPr>
-            <a:lvl4pPr algn="ctr" indent="0" lvl="3" marL="0">
-              <a:spcBef>
-                <a:spcPts val="0"/>
-              </a:spcBef>
-              <a:buNone/>
-              <a:defRPr sz="700">
-                <a:solidFill>
-                  <a:schemeClr val="dk1"/>
-                </a:solidFill>
-                <a:latin typeface="Arial"/>
-                <a:ea typeface="Arial"/>
-                <a:cs typeface="Arial"/>
-                <a:sym typeface="Arial"/>
-              </a:defRPr>
-            </a:lvl4pPr>
-            <a:lvl5pPr algn="ctr" indent="0" lvl="4" marL="0">
-              <a:spcBef>
-                <a:spcPts val="0"/>
-              </a:spcBef>
-              <a:buNone/>
-              <a:defRPr sz="700">
-                <a:solidFill>
-                  <a:schemeClr val="dk1"/>
-                </a:solidFill>
-                <a:latin typeface="Arial"/>
-                <a:ea typeface="Arial"/>
-                <a:cs typeface="Arial"/>
-                <a:sym typeface="Arial"/>
-              </a:defRPr>
-            </a:lvl5pPr>
-            <a:lvl6pPr algn="ctr" indent="0" lvl="5" marL="0">
-              <a:spcBef>
-                <a:spcPts val="0"/>
-              </a:spcBef>
-              <a:buNone/>
-              <a:defRPr sz="700">
-                <a:solidFill>
-                  <a:schemeClr val="dk1"/>
-                </a:solidFill>
-                <a:latin typeface="Arial"/>
-                <a:ea typeface="Arial"/>
-                <a:cs typeface="Arial"/>
-                <a:sym typeface="Arial"/>
-              </a:defRPr>
-            </a:lvl6pPr>
-            <a:lvl7pPr algn="ctr" indent="0" lvl="6" marL="0">
-              <a:spcBef>
-                <a:spcPts val="0"/>
-              </a:spcBef>
-              <a:buNone/>
-              <a:defRPr sz="700">
-                <a:solidFill>
-                  <a:schemeClr val="dk1"/>
-                </a:solidFill>
-                <a:latin typeface="Arial"/>
-                <a:ea typeface="Arial"/>
-                <a:cs typeface="Arial"/>
-                <a:sym typeface="Arial"/>
-              </a:defRPr>
-            </a:lvl7pPr>
-            <a:lvl8pPr algn="ctr" indent="0" lvl="7" marL="0">
-              <a:spcBef>
-                <a:spcPts val="0"/>
-              </a:spcBef>
-              <a:buNone/>
-              <a:defRPr sz="700">
-                <a:solidFill>
-                  <a:schemeClr val="dk1"/>
-                </a:solidFill>
-                <a:latin typeface="Arial"/>
-                <a:ea typeface="Arial"/>
-                <a:cs typeface="Arial"/>
-                <a:sym typeface="Arial"/>
-              </a:defRPr>
-            </a:lvl8pPr>
-            <a:lvl9pPr algn="ctr" indent="0" lvl="8" marL="0">
-              <a:spcBef>
-                <a:spcPts val="0"/>
-              </a:spcBef>
-              <a:buNone/>
-              <a:defRPr sz="700">
-                <a:solidFill>
-                  <a:schemeClr val="dk1"/>
-                </a:solidFill>
-                <a:latin typeface="Arial"/>
-                <a:ea typeface="Arial"/>
-                <a:cs typeface="Arial"/>
-                <a:sym typeface="Arial"/>
-              </a:defRPr>
-            </a:lvl9pPr>
-          </a:lstStyle>
-          <a:p>
-            <a:pPr algn="ctr" indent="0" lvl="0" marL="0" rtl="0">
-              <a:spcBef>
-                <a:spcPts val="0"/>
-              </a:spcBef>
-              <a:spcAft>
-                <a:spcPts val="0"/>
-              </a:spcAft>
-              <a:buNone/>
-            </a:pPr>
-            <a:fld id="{00000000-1234-1234-1234-123412341234}" type="slidenum">
-              <a:rPr lang="en-US"/>
-              <a:t>‹#›</a:t>
-            </a:fld>
-            <a:endParaRPr/>
-          </a:p>
-        </p:txBody>
-      </p:sp>
-    </p:spTree>
-  </p:cSld>
-</p:sld>
-</file>
-
 <file path=ppt/slides/slide19.xml><?xml version="1.0" encoding="utf-8"?>
 <p:sld xmlns:a="http://schemas.openxmlformats.org/drawingml/2006/main" xmlns:r="http://schemas.openxmlformats.org/officeDocument/2006/relationships" xmlns:p="http://schemas.openxmlformats.org/presentationml/2006/main">
   <p:cSld>
@@ -47540,8 +47857,8 @@
         </p:nvSpPr>
         <p:spPr>
           <a:xfrm>
-            <a:off x="774146" y="202009"/>
-            <a:ext cx="3932227" cy="1698043"/>
+            <a:off x="771525" y="200025"/>
+            <a:ext cx="10582275" cy="790575"/>
           </a:xfrm>
           <a:prstGeom prst="rect">
             <a:avLst/>
@@ -47560,7 +47877,7 @@
             </a:pPr>
             <a:r>
               <a:rPr/>
-              <a:t>Bậc thang cứu chữa khi đọc hỏng</a:t>
+              <a:t>Khoảng cách nằm trọn ở biển 2 dòng</a:t>
             </a:r>
           </a:p>
         </p:txBody>
@@ -47583,158 +47900,41 @@
             </a:pPr>
             <a:r>
               <a:rPr/>
-              <a:t>Chỉ chạy </a:t>
-            </a:r>
-            <a:r>
-              <a:rPr b="1"/>
-              <a:t>sau khi đọc hỏng</a:t>
-            </a:r>
-            <a:r>
-              <a:rPr/>
-              <a:t>, chỉ nhận chuỗi </a:t>
-            </a:r>
-            <a:r>
-              <a:rPr b="1"/>
-              <a:t>hợp lệ</a:t>
-            </a:r>
-          </a:p>
-          <a:p>
-            <a:pPr lvl="0" indent="0" marL="0">
-              <a:buNone/>
-            </a:pPr>
-            <a:r>
-              <a:rPr/>
-              <a:t>⇒ không thể làm hỏng kết quả đang đúng</a:t>
+              <a:t>Cùng một hệ thống, cùng một phép đo — tách theo bố cục biển</a:t>
             </a:r>
           </a:p>
         </p:txBody>
       </p:sp>
-      <p:graphicFrame>
-        <p:nvGraphicFramePr>
-          <p:cNvPr id="6" name="Content Placeholder 5"/>
-          <p:cNvGraphicFramePr>
-            <a:graphicFrameLocks noGrp="1"/>
-          </p:cNvGraphicFramePr>
-          <p:nvPr>
-            <p:ph idx="1"/>
-          </p:nvPr>
-        </p:nvGraphicFramePr>
-        <p:xfrm>
-          <a:off x="5156200" y="190500"/>
-          <a:ext cx="6235700" cy="5969000"/>
-        </p:xfrm>
-        <a:graphic>
-          <a:graphicData uri="http://schemas.openxmlformats.org/drawingml/2006/table">
-            <a:tbl>
-              <a:tblPr firstRow="1" bandRow="1">
-                <a:tableStyleId>{45BEF19B-5B1D-4A26-B267-ECC71EF7E2D4}</a:tableStyleId>
-              </a:tblPr>
-              <a:tblGrid>
-                <a:gridCol w="3111500"/>
-                <a:gridCol w="3111500"/>
-              </a:tblGrid>
-              <a:tr h="0">
-                <a:tc>
-                  <a:txBody>
-                    <a:bodyPr/>
-                    <a:lstStyle/>
-                    <a:p>
-                      <a:pPr lvl="0" indent="0" marL="0">
-                        <a:buNone/>
-                      </a:pPr>
-                      <a:r>
-                        <a:rPr/>
-                        <a:t>Bậc</a:t>
-                      </a:r>
-                    </a:p>
-                  </a:txBody>
-                  <a:tcPr/>
-                </a:tc>
-                <a:tc>
-                  <a:txBody>
-                    <a:bodyPr/>
-                    <a:lstStyle/>
-                    <a:p>
-                      <a:pPr lvl="0" indent="0" marL="0" algn="r">
-                        <a:buNone/>
-                      </a:pPr>
-                      <a:r>
-                        <a:rPr/>
-                        <a:t>Cứu được</a:t>
-                      </a:r>
-                    </a:p>
-                  </a:txBody>
-                  <a:tcPr/>
-                </a:tc>
-              </a:tr>
-              <a:tr h="0">
-                <a:tc>
-                  <a:txBody>
-                    <a:bodyPr/>
-                    <a:lstStyle/>
-                    <a:p>
-                      <a:pPr lvl="0" indent="0" marL="0">
-                        <a:buNone/>
-                      </a:pPr>
-                      <a:r>
-                        <a:rPr/>
-                        <a:t>Cứu dòng trên của biển 2 dòng</a:t>
-                      </a:r>
-                    </a:p>
-                  </a:txBody>
-                </a:tc>
-                <a:tc>
-                  <a:txBody>
-                    <a:bodyPr/>
-                    <a:lstStyle/>
-                    <a:p>
-                      <a:pPr lvl="0" indent="0" marL="0" algn="r">
-                        <a:buNone/>
-                      </a:pPr>
-                      <a:r>
-                        <a:rPr b="1"/>
-                        <a:t>209 biển</a:t>
-                      </a:r>
-                    </a:p>
-                  </a:txBody>
-                </a:tc>
-              </a:tr>
-              <a:tr h="0">
-                <a:tc>
-                  <a:txBody>
-                    <a:bodyPr/>
-                    <a:lstStyle/>
-                    <a:p>
-                      <a:pPr lvl="0" indent="0" marL="0">
-                        <a:buNone/>
-                      </a:pPr>
-                      <a:r>
-                        <a:rPr/>
-                        <a:t>Nắn hình / giãn dọc chống méo</a:t>
-                      </a:r>
-                    </a:p>
-                  </a:txBody>
-                </a:tc>
-                <a:tc>
-                  <a:txBody>
-                    <a:bodyPr/>
-                    <a:lstStyle/>
-                    <a:p>
-                      <a:pPr lvl="0" indent="0" marL="0" algn="r">
-                        <a:buNone/>
-                      </a:pPr>
-                      <a:r>
-                        <a:rPr b="1"/>
-                        <a:t>34 biển</a:t>
-                      </a:r>
-                    </a:p>
-                  </a:txBody>
-                </a:tc>
-              </a:tr>
-            </a:tbl>
-          </a:graphicData>
-        </a:graphic>
-      </p:graphicFrame>
+      <p:pic>
+        <p:nvPicPr>
+          <p:cNvPr descr="../reports/figures/04-ocr-accuracy-by-line-count.png" id="0" name="Picture 1"/>
+          <p:cNvPicPr>
+            <a:picLocks noGrp="1" noChangeAspect="1"/>
+          </p:cNvPicPr>
+          <p:nvPr/>
+        </p:nvPicPr>
+        <p:blipFill>
+          <a:blip r:embed="rId2"/>
+          <a:stretch>
+            <a:fillRect/>
+          </a:stretch>
+        </p:blipFill>
+        <p:spPr bwMode="auto">
+          <a:xfrm>
+            <a:off x="2616200" y="2209800"/>
+            <a:ext cx="6858000" cy="3962400"/>
+          </a:xfrm>
+          <a:prstGeom prst="rect">
+            <a:avLst/>
+          </a:prstGeom>
+          <a:noFill/>
+          <a:ln w="9525">
+            <a:noFill/>
+            <a:headEnd/>
+            <a:tailEnd/>
+          </a:ln>
+        </p:spPr>
+      </p:pic>
       <p:sp>
         <p:nvSpPr>
           <p:cNvPr id="449" name="Google Shape;449;p31"/>
@@ -48243,8 +48443,8 @@
         </p:nvSpPr>
         <p:spPr>
           <a:xfrm>
-            <a:off x="774146" y="202009"/>
-            <a:ext cx="3932227" cy="1698043"/>
+            <a:off x="771525" y="200025"/>
+            <a:ext cx="10582275" cy="790575"/>
           </a:xfrm>
           <a:prstGeom prst="rect">
             <a:avLst/>
@@ -48263,7 +48463,7 @@
             </a:pPr>
             <a:r>
               <a:rPr/>
-              <a:t>Giao diện</a:t>
+              <a:t>Đóng góp của hậu xử lý — đo được bằng số</a:t>
             </a:r>
           </a:p>
         </p:txBody>
@@ -48286,22 +48486,30 @@
             </a:pPr>
             <a:r>
               <a:rPr/>
-              <a:t>Mọi vùng dữ liệu xử lý đủ </a:t>
+              <a:t>Sửa đúng </a:t>
             </a:r>
             <a:r>
               <a:rPr b="1"/>
-              <a:t>4 trạng thái</a:t>
+              <a:t>319 biển</a:t>
             </a:r>
             <a:r>
               <a:rPr/>
-              <a:t>: chờ · rỗng · lỗi · thành công</a:t>
+              <a:t>, làm hỏng </a:t>
+            </a:r>
+            <a:r>
+              <a:rPr b="1"/>
+              <a:t>0</a:t>
+            </a:r>
+            <a:r>
+              <a:rPr/>
+              <a:t> — dồn gần trọn vào biển 2 dòng</a:t>
             </a:r>
           </a:p>
         </p:txBody>
       </p:sp>
       <p:pic>
         <p:nvPicPr>
-          <p:cNvPr descr="../screenshots/image-detection.png" id="0" name="Picture 1"/>
+          <p:cNvPr descr="figures/fig-postprocess-gain.png" id="0" name="Picture 1"/>
           <p:cNvPicPr>
             <a:picLocks noGrp="1" noChangeAspect="1"/>
           </p:cNvPicPr>
@@ -48315,8 +48523,8 @@
         </p:blipFill>
         <p:spPr bwMode="auto">
           <a:xfrm>
-            <a:off x="5156200" y="1231900"/>
-            <a:ext cx="6235700" cy="3898900"/>
+            <a:off x="3632200" y="2209800"/>
+            <a:ext cx="4838700" cy="3962400"/>
           </a:xfrm>
           <a:prstGeom prst="rect">
             <a:avLst/>
@@ -48541,8 +48749,8 @@
         </p:nvSpPr>
         <p:spPr>
           <a:xfrm>
-            <a:off x="774146" y="202009"/>
-            <a:ext cx="3932227" cy="1698043"/>
+            <a:off x="771525" y="200025"/>
+            <a:ext cx="10582275" cy="790575"/>
           </a:xfrm>
           <a:prstGeom prst="rect">
             <a:avLst/>
@@ -48561,7 +48769,7 @@
             </a:pPr>
             <a:r>
               <a:rPr/>
-              <a:t>Demo trực tiếp</a:t>
+              <a:t>Ba can thiệp, một kết luận</a:t>
             </a:r>
           </a:p>
         </p:txBody>
@@ -48584,11 +48792,35 @@
             </a:pPr>
             <a:r>
               <a:rPr/>
-              <a:t>Ba tình huống, chạy trên máy thật — </a:t>
+              <a:t>Cả ba </a:t>
             </a:r>
             <a:r>
               <a:rPr b="1"/>
-              <a:t>không phải video quay sẵn</a:t>
+              <a:t>ngoài</a:t>
+            </a:r>
+            <a:r>
+              <a:rPr/>
+              <a:t> mô hình nhận dạng: </a:t>
+            </a:r>
+            <a:r>
+              <a:rPr b="1"/>
+              <a:t>0,6098 → 0,7512</a:t>
+            </a:r>
+            <a:r>
+              <a:rPr/>
+              <a:t>. </a:t>
+            </a:r>
+            <a:r>
+              <a:rPr b="1"/>
+              <a:t>Dư địa đã cạn</a:t>
+            </a:r>
+            <a:r>
+              <a:rPr/>
+              <a:t> — lỗi còn lại là ký tự </a:t>
+            </a:r>
+            <a:r>
+              <a:rPr i="1"/>
+              <a:t>chưa từng đọc ra</a:t>
             </a:r>
           </a:p>
         </p:txBody>
@@ -48604,8 +48836,8 @@
           </p:nvPr>
         </p:nvGraphicFramePr>
         <p:xfrm>
-          <a:off x="5156200" y="190500"/>
-          <a:ext cx="6235700" cy="5969000"/>
+          <a:off x="762000" y="2209800"/>
+          <a:ext cx="10579100" cy="3962400"/>
         </p:xfrm>
         <a:graphic>
           <a:graphicData uri="http://schemas.openxmlformats.org/drawingml/2006/table">
@@ -48614,8 +48846,8 @@
                 <a:tableStyleId>{45BEF19B-5B1D-4A26-B267-ECC71EF7E2D4}</a:tableStyleId>
               </a:tblPr>
               <a:tblGrid>
-                <a:gridCol w="3111500"/>
-                <a:gridCol w="3111500"/>
+                <a:gridCol w="5283200"/>
+                <a:gridCol w="5283200"/>
               </a:tblGrid>
               <a:tr h="0">
                 <a:tc>
@@ -48628,7 +48860,7 @@
                       </a:pPr>
                       <a:r>
                         <a:rPr/>
-                        <a:t>Bước</a:t>
+                        <a:t>Can thiệp</a:t>
                       </a:r>
                     </a:p>
                   </a:txBody>
@@ -48639,12 +48871,12 @@
                     <a:bodyPr/>
                     <a:lstStyle/>
                     <a:p>
-                      <a:pPr lvl="0" indent="0" marL="0">
+                      <a:pPr lvl="0" indent="0" marL="0" algn="r">
                         <a:buNone/>
                       </a:pPr>
                       <a:r>
                         <a:rPr/>
-                        <a:t>Cho thấy điều gì</a:t>
+                        <a:t>Thu được</a:t>
                       </a:r>
                     </a:p>
                   </a:txBody>
@@ -48662,7 +48894,7 @@
                       </a:pPr>
                       <a:r>
                         <a:rPr/>
-                        <a:t>Ảnh ô tô — biển 1 dòng</a:t>
+                        <a:t>Bộ luật hậu xử lý theo vị trí</a:t>
                       </a:r>
                     </a:p>
                   </a:txBody>
@@ -48672,12 +48904,12 @@
                     <a:bodyPr/>
                     <a:lstStyle/>
                     <a:p>
-                      <a:pPr lvl="0" indent="0" marL="0">
+                      <a:pPr lvl="0" indent="0" marL="0" algn="r">
                         <a:buNone/>
                       </a:pPr>
                       <a:r>
-                        <a:rPr/>
-                        <a:t>Đường đi cơ bản, đọc đúng, dưới 1 giây</a:t>
+                        <a:rPr b="1"/>
+                        <a:t>+11,39 điểm</a:t>
                       </a:r>
                     </a:p>
                   </a:txBody>
@@ -48694,7 +48926,7 @@
                       </a:pPr>
                       <a:r>
                         <a:rPr/>
-                        <a:t>Ảnh xe máy — biển 2 dòng</a:t>
+                        <a:t>Cứu dòng trên</a:t>
                       </a:r>
                     </a:p>
                   </a:txBody>
@@ -48704,12 +48936,12 @@
                     <a:bodyPr/>
                     <a:lstStyle/>
                     <a:p>
-                      <a:pPr lvl="0" indent="0" marL="0">
+                      <a:pPr lvl="0" indent="0" marL="0" algn="r">
                         <a:buNone/>
                       </a:pPr>
                       <a:r>
                         <a:rPr/>
-                        <a:t>Chính chỗ khó nhất, split-then-hstack chạy thật</a:t>
+                        <a:t>209 biển</a:t>
                       </a:r>
                     </a:p>
                   </a:txBody>
@@ -48726,7 +48958,7 @@
                       </a:pPr>
                       <a:r>
                         <a:rPr/>
-                        <a:t>Video + Lịch sử</a:t>
+                        <a:t>Nắn hình chống méo</a:t>
                       </a:r>
                     </a:p>
                   </a:txBody>
@@ -48736,12 +48968,12 @@
                     <a:bodyPr/>
                     <a:lstStyle/>
                     <a:p>
-                      <a:pPr lvl="0" indent="0" marL="0">
+                      <a:pPr lvl="0" indent="0" marL="0" algn="r">
                         <a:buNone/>
                       </a:pPr>
                       <a:r>
                         <a:rPr/>
-                        <a:t>Xử lý bất đồng bộ, tra cứu lại kết quả</a:t>
+                        <a:t>34 biển</a:t>
                       </a:r>
                     </a:p>
                   </a:txBody>
@@ -48941,326 +49173,6 @@
   <p:cSld>
     <p:spTree>
       <p:nvGrpSpPr>
-        <p:cNvPr id="134" name="Shape 134"/>
-        <p:cNvGrpSpPr/>
-        <p:nvPr/>
-      </p:nvGrpSpPr>
-      <p:grpSpPr>
-        <a:xfrm>
-          <a:off x="0" y="0"/>
-          <a:ext cx="0" cy="0"/>
-          <a:chOff x="0" y="0"/>
-          <a:chExt cx="0" cy="0"/>
-        </a:xfrm>
-      </p:grpSpPr>
-      <p:sp>
-        <p:nvSpPr>
-          <p:cNvPr id="142" name="Google Shape;142;p23"/>
-          <p:cNvSpPr txBox="1"/>
-          <p:nvPr>
-            <p:ph type="title"/>
-          </p:nvPr>
-        </p:nvSpPr>
-        <p:spPr>
-          <a:xfrm>
-            <a:off x="774145" y="223964"/>
-            <a:ext cx="10579655" cy="785896"/>
-          </a:xfrm>
-          <a:prstGeom prst="rect">
-            <a:avLst/>
-          </a:prstGeom>
-          <a:noFill/>
-          <a:ln>
-            <a:noFill/>
-          </a:ln>
-        </p:spPr>
-        <p:txBody>
-          <a:bodyPr/>
-          <a:lstStyle/>
-          <a:p>
-            <a:pPr lvl="0" indent="0" marL="0">
-              <a:buNone/>
-            </a:pPr>
-            <a:r>
-              <a:rPr/>
-              <a:t>Kiểm thử và triển khai</a:t>
-            </a:r>
-          </a:p>
-        </p:txBody>
-      </p:sp>
-      <p:sp>
-        <p:nvSpPr>
-          <p:cNvPr id="143" name="Google Shape;143;p23"/>
-          <p:cNvSpPr txBox="1"/>
-          <p:nvPr>
-            <p:ph idx="1"/>
-          </p:nvPr>
-        </p:nvSpPr>
-        <p:spPr/>
-        <p:txBody>
-          <a:bodyPr/>
-          <a:lstStyle/>
-          <a:p>
-            <a:pPr lvl="0"/>
-            <a:r>
-              <a:rPr b="1"/>
-              <a:t>999 kiểm thử tự động</a:t>
-            </a:r>
-            <a:r>
-              <a:rPr/>
-              <a:t> đạt · bao phủ tầng nghiệp vụ </a:t>
-            </a:r>
-            <a:r>
-              <a:rPr b="1"/>
-              <a:t>87,7%</a:t>
-            </a:r>
-          </a:p>
-          <a:p>
-            <a:pPr lvl="0"/>
-            <a:r>
-              <a:rPr/>
-              <a:t>Kiểm thử </a:t>
-            </a:r>
-            <a:r>
-              <a:rPr b="1"/>
-              <a:t>đơn vị · tích hợp · độ chính xác AI · hiệu năng · chịu tải</a:t>
-            </a:r>
-          </a:p>
-          <a:p>
-            <a:pPr lvl="0"/>
-            <a:r>
-              <a:rPr/>
-              <a:t>Tầng AI có bộ test </a:t>
-            </a:r>
-            <a:r>
-              <a:rPr b="1"/>
-              <a:t>chạy không cần dựng server</a:t>
-            </a:r>
-          </a:p>
-          <a:p>
-            <a:pPr lvl="0"/>
-            <a:r>
-              <a:rPr>
-                <a:latin typeface="Courier"/>
-              </a:rPr>
-              <a:t>docker compose up</a:t>
-            </a:r>
-            <a:r>
-              <a:rPr/>
-              <a:t> — </a:t>
-            </a:r>
-            <a:r>
-              <a:rPr b="1"/>
-              <a:t>một lệnh</a:t>
-            </a:r>
-            <a:r>
-              <a:rPr/>
-              <a:t>, đã dựng và xác minh chạy được</a:t>
-            </a:r>
-          </a:p>
-          <a:p>
-            <a:pPr lvl="0"/>
-            <a:r>
-              <a:rPr/>
-              <a:t>Soak 300 giây: </a:t>
-            </a:r>
-            <a:r>
-              <a:rPr b="1"/>
-              <a:t>1.684 yêu cầu, không rò rỉ bộ nhớ</a:t>
-            </a:r>
-          </a:p>
-        </p:txBody>
-      </p:sp>
-      <p:sp>
-        <p:nvSpPr>
-          <p:cNvPr id="155" name="Google Shape;155;p23"/>
-          <p:cNvSpPr txBox="1"/>
-          <p:nvPr>
-            <p:ph idx="12" type="sldNum"/>
-          </p:nvPr>
-        </p:nvSpPr>
-        <p:spPr>
-          <a:xfrm>
-            <a:off x="58380" y="6508358"/>
-            <a:ext cx="349642" cy="349642"/>
-          </a:xfrm>
-          <a:prstGeom prst="rect">
-            <a:avLst/>
-          </a:prstGeom>
-          <a:noFill/>
-          <a:ln>
-            <a:noFill/>
-          </a:ln>
-        </p:spPr>
-        <p:txBody>
-          <a:bodyPr anchor="ctr" anchorCtr="0" bIns="45700" lIns="91425" rIns="91425" spcFirstLastPara="1" tIns="45700" wrap="square">
-            <a:noAutofit/>
-          </a:bodyPr>
-          <a:lstStyle>
-            <a:lvl1pPr algn="ctr" indent="0" lvl="0" marL="0">
-              <a:spcBef>
-                <a:spcPts val="0"/>
-              </a:spcBef>
-              <a:buNone/>
-              <a:defRPr sz="700">
-                <a:solidFill>
-                  <a:schemeClr val="dk1"/>
-                </a:solidFill>
-                <a:latin typeface="Arial"/>
-                <a:ea typeface="Arial"/>
-                <a:cs typeface="Arial"/>
-                <a:sym typeface="Arial"/>
-              </a:defRPr>
-            </a:lvl1pPr>
-            <a:lvl2pPr algn="ctr" indent="0" lvl="1" marL="0">
-              <a:spcBef>
-                <a:spcPts val="0"/>
-              </a:spcBef>
-              <a:buNone/>
-              <a:defRPr sz="700">
-                <a:solidFill>
-                  <a:schemeClr val="dk1"/>
-                </a:solidFill>
-                <a:latin typeface="Arial"/>
-                <a:ea typeface="Arial"/>
-                <a:cs typeface="Arial"/>
-                <a:sym typeface="Arial"/>
-              </a:defRPr>
-            </a:lvl2pPr>
-            <a:lvl3pPr algn="ctr" indent="0" lvl="2" marL="0">
-              <a:spcBef>
-                <a:spcPts val="0"/>
-              </a:spcBef>
-              <a:buNone/>
-              <a:defRPr sz="700">
-                <a:solidFill>
-                  <a:schemeClr val="dk1"/>
-                </a:solidFill>
-                <a:latin typeface="Arial"/>
-                <a:ea typeface="Arial"/>
-                <a:cs typeface="Arial"/>
-                <a:sym typeface="Arial"/>
-              </a:defRPr>
-            </a:lvl3pPr>
-            <a:lvl4pPr algn="ctr" indent="0" lvl="3" marL="0">
-              <a:spcBef>
-                <a:spcPts val="0"/>
-              </a:spcBef>
-              <a:buNone/>
-              <a:defRPr sz="700">
-                <a:solidFill>
-                  <a:schemeClr val="dk1"/>
-                </a:solidFill>
-                <a:latin typeface="Arial"/>
-                <a:ea typeface="Arial"/>
-                <a:cs typeface="Arial"/>
-                <a:sym typeface="Arial"/>
-              </a:defRPr>
-            </a:lvl4pPr>
-            <a:lvl5pPr algn="ctr" indent="0" lvl="4" marL="0">
-              <a:spcBef>
-                <a:spcPts val="0"/>
-              </a:spcBef>
-              <a:buNone/>
-              <a:defRPr sz="700">
-                <a:solidFill>
-                  <a:schemeClr val="dk1"/>
-                </a:solidFill>
-                <a:latin typeface="Arial"/>
-                <a:ea typeface="Arial"/>
-                <a:cs typeface="Arial"/>
-                <a:sym typeface="Arial"/>
-              </a:defRPr>
-            </a:lvl5pPr>
-            <a:lvl6pPr algn="ctr" indent="0" lvl="5" marL="0">
-              <a:spcBef>
-                <a:spcPts val="0"/>
-              </a:spcBef>
-              <a:buNone/>
-              <a:defRPr sz="700">
-                <a:solidFill>
-                  <a:schemeClr val="dk1"/>
-                </a:solidFill>
-                <a:latin typeface="Arial"/>
-                <a:ea typeface="Arial"/>
-                <a:cs typeface="Arial"/>
-                <a:sym typeface="Arial"/>
-              </a:defRPr>
-            </a:lvl6pPr>
-            <a:lvl7pPr algn="ctr" indent="0" lvl="6" marL="0">
-              <a:spcBef>
-                <a:spcPts val="0"/>
-              </a:spcBef>
-              <a:buNone/>
-              <a:defRPr sz="700">
-                <a:solidFill>
-                  <a:schemeClr val="dk1"/>
-                </a:solidFill>
-                <a:latin typeface="Arial"/>
-                <a:ea typeface="Arial"/>
-                <a:cs typeface="Arial"/>
-                <a:sym typeface="Arial"/>
-              </a:defRPr>
-            </a:lvl7pPr>
-            <a:lvl8pPr algn="ctr" indent="0" lvl="7" marL="0">
-              <a:spcBef>
-                <a:spcPts val="0"/>
-              </a:spcBef>
-              <a:buNone/>
-              <a:defRPr sz="700">
-                <a:solidFill>
-                  <a:schemeClr val="dk1"/>
-                </a:solidFill>
-                <a:latin typeface="Arial"/>
-                <a:ea typeface="Arial"/>
-                <a:cs typeface="Arial"/>
-                <a:sym typeface="Arial"/>
-              </a:defRPr>
-            </a:lvl8pPr>
-            <a:lvl9pPr algn="ctr" indent="0" lvl="8" marL="0">
-              <a:spcBef>
-                <a:spcPts val="0"/>
-              </a:spcBef>
-              <a:buNone/>
-              <a:defRPr sz="700">
-                <a:solidFill>
-                  <a:schemeClr val="dk1"/>
-                </a:solidFill>
-                <a:latin typeface="Arial"/>
-                <a:ea typeface="Arial"/>
-                <a:cs typeface="Arial"/>
-                <a:sym typeface="Arial"/>
-              </a:defRPr>
-            </a:lvl9pPr>
-          </a:lstStyle>
-          <a:p>
-            <a:pPr algn="ctr" indent="0" lvl="0" marL="0" rtl="0">
-              <a:spcBef>
-                <a:spcPts val="0"/>
-              </a:spcBef>
-              <a:spcAft>
-                <a:spcPts val="0"/>
-              </a:spcAft>
-              <a:buNone/>
-            </a:pPr>
-            <a:fld id="{00000000-1234-1234-1234-123412341234}" type="slidenum">
-              <a:rPr lang="en-US"/>
-              <a:t>‹#›</a:t>
-            </a:fld>
-            <a:endParaRPr/>
-          </a:p>
-        </p:txBody>
-      </p:sp>
-    </p:spTree>
-  </p:cSld>
-</p:sld>
-</file>
-
-<file path=ppt/slides/slide23.xml><?xml version="1.0" encoding="utf-8"?>
-<p:sld xmlns:a="http://schemas.openxmlformats.org/drawingml/2006/main" xmlns:r="http://schemas.openxmlformats.org/officeDocument/2006/relationships" xmlns:p="http://schemas.openxmlformats.org/presentationml/2006/main">
-  <p:cSld>
-    <p:spTree>
-      <p:nvGrpSpPr>
         <p:cNvPr id="428" name="Shape 428"/>
         <p:cNvGrpSpPr/>
         <p:nvPr/>
@@ -49283,8 +49195,8 @@
         </p:nvSpPr>
         <p:spPr>
           <a:xfrm>
-            <a:off x="774146" y="202009"/>
-            <a:ext cx="3932227" cy="1698043"/>
+            <a:off x="771525" y="200025"/>
+            <a:ext cx="10582275" cy="790575"/>
           </a:xfrm>
           <a:prstGeom prst="rect">
             <a:avLst/>
@@ -49328,30 +49240,13 @@
               <a:rPr b="1"/>
               <a:t>i5-14600K · 20 luồng · KHÔNG có GPU CUDA</a:t>
             </a:r>
-          </a:p>
-          <a:p>
-            <a:pPr lvl="0" indent="0" marL="0">
-              <a:buNone/>
-            </a:pPr>
             <a:r>
               <a:rPr/>
-              <a:t>Vượt mục tiêu p95 là </a:t>
+              <a:t> — vượt p95 là </a:t>
             </a:r>
             <a:r>
               <a:rPr b="1"/>
               <a:t>đánh đổi có chủ ý</a:t>
-            </a:r>
-            <a:r>
-              <a:rPr/>
-              <a:t>: tắt bậc thang thì p95 về </a:t>
-            </a:r>
-            <a:r>
-              <a:rPr b="1"/>
-              <a:t>866 ms</a:t>
-            </a:r>
-            <a:r>
-              <a:rPr/>
-              <a:t>, mất 34 biển</a:t>
             </a:r>
           </a:p>
         </p:txBody>
@@ -49367,8 +49262,8 @@
           </p:nvPr>
         </p:nvGraphicFramePr>
         <p:xfrm>
-          <a:off x="5156200" y="190500"/>
-          <a:ext cx="6235700" cy="5969000"/>
+          <a:off x="762000" y="2209800"/>
+          <a:ext cx="10579100" cy="3962400"/>
         </p:xfrm>
         <a:graphic>
           <a:graphicData uri="http://schemas.openxmlformats.org/drawingml/2006/table">
@@ -49377,9 +49272,9 @@
                 <a:tableStyleId>{45BEF19B-5B1D-4A26-B267-ECC71EF7E2D4}</a:tableStyleId>
               </a:tblPr>
               <a:tblGrid>
-                <a:gridCol w="2070100"/>
-                <a:gridCol w="2070100"/>
-                <a:gridCol w="2070100"/>
+                <a:gridCol w="3517900"/>
+                <a:gridCol w="3517900"/>
+                <a:gridCol w="3517900"/>
               </a:tblGrid>
               <a:tr h="0">
                 <a:tc>
@@ -49761,7 +49656,7 @@
 </p:sld>
 </file>
 
-<file path=ppt/slides/slide24.xml><?xml version="1.0" encoding="utf-8"?>
+<file path=ppt/slides/slide23.xml><?xml version="1.0" encoding="utf-8"?>
 <p:sld xmlns:a="http://schemas.openxmlformats.org/drawingml/2006/main" xmlns:r="http://schemas.openxmlformats.org/officeDocument/2006/relationships" xmlns:p="http://schemas.openxmlformats.org/presentationml/2006/main">
   <p:cSld>
     <p:spTree>
@@ -49788,8 +49683,8 @@
         </p:nvSpPr>
         <p:spPr>
           <a:xfrm>
-            <a:off x="774146" y="202009"/>
-            <a:ext cx="3932227" cy="1698043"/>
+            <a:off x="771525" y="200025"/>
+            <a:ext cx="10582275" cy="790575"/>
           </a:xfrm>
           <a:prstGeom prst="rect">
             <a:avLst/>
@@ -49852,8 +49747,8 @@
         </p:blipFill>
         <p:spPr bwMode="auto">
           <a:xfrm>
-            <a:off x="5156200" y="1612900"/>
-            <a:ext cx="6235700" cy="3124200"/>
+            <a:off x="2082800" y="2209800"/>
+            <a:ext cx="7924800" cy="3962400"/>
           </a:xfrm>
           <a:prstGeom prst="rect">
             <a:avLst/>
@@ -49869,6 +49764,353 @@
       <p:sp>
         <p:nvSpPr>
           <p:cNvPr id="449" name="Google Shape;449;p31"/>
+          <p:cNvSpPr txBox="1"/>
+          <p:nvPr>
+            <p:ph idx="12" type="sldNum"/>
+          </p:nvPr>
+        </p:nvSpPr>
+        <p:spPr>
+          <a:xfrm>
+            <a:off x="58380" y="6508358"/>
+            <a:ext cx="349642" cy="349642"/>
+          </a:xfrm>
+          <a:prstGeom prst="rect">
+            <a:avLst/>
+          </a:prstGeom>
+          <a:noFill/>
+          <a:ln>
+            <a:noFill/>
+          </a:ln>
+        </p:spPr>
+        <p:txBody>
+          <a:bodyPr anchor="ctr" anchorCtr="0" bIns="45700" lIns="91425" rIns="91425" spcFirstLastPara="1" tIns="45700" wrap="square">
+            <a:noAutofit/>
+          </a:bodyPr>
+          <a:lstStyle>
+            <a:lvl1pPr algn="ctr" indent="0" lvl="0" marL="0">
+              <a:spcBef>
+                <a:spcPts val="0"/>
+              </a:spcBef>
+              <a:buNone/>
+              <a:defRPr sz="700">
+                <a:solidFill>
+                  <a:schemeClr val="dk1"/>
+                </a:solidFill>
+                <a:latin typeface="Arial"/>
+                <a:ea typeface="Arial"/>
+                <a:cs typeface="Arial"/>
+                <a:sym typeface="Arial"/>
+              </a:defRPr>
+            </a:lvl1pPr>
+            <a:lvl2pPr algn="ctr" indent="0" lvl="1" marL="0">
+              <a:spcBef>
+                <a:spcPts val="0"/>
+              </a:spcBef>
+              <a:buNone/>
+              <a:defRPr sz="700">
+                <a:solidFill>
+                  <a:schemeClr val="dk1"/>
+                </a:solidFill>
+                <a:latin typeface="Arial"/>
+                <a:ea typeface="Arial"/>
+                <a:cs typeface="Arial"/>
+                <a:sym typeface="Arial"/>
+              </a:defRPr>
+            </a:lvl2pPr>
+            <a:lvl3pPr algn="ctr" indent="0" lvl="2" marL="0">
+              <a:spcBef>
+                <a:spcPts val="0"/>
+              </a:spcBef>
+              <a:buNone/>
+              <a:defRPr sz="700">
+                <a:solidFill>
+                  <a:schemeClr val="dk1"/>
+                </a:solidFill>
+                <a:latin typeface="Arial"/>
+                <a:ea typeface="Arial"/>
+                <a:cs typeface="Arial"/>
+                <a:sym typeface="Arial"/>
+              </a:defRPr>
+            </a:lvl3pPr>
+            <a:lvl4pPr algn="ctr" indent="0" lvl="3" marL="0">
+              <a:spcBef>
+                <a:spcPts val="0"/>
+              </a:spcBef>
+              <a:buNone/>
+              <a:defRPr sz="700">
+                <a:solidFill>
+                  <a:schemeClr val="dk1"/>
+                </a:solidFill>
+                <a:latin typeface="Arial"/>
+                <a:ea typeface="Arial"/>
+                <a:cs typeface="Arial"/>
+                <a:sym typeface="Arial"/>
+              </a:defRPr>
+            </a:lvl4pPr>
+            <a:lvl5pPr algn="ctr" indent="0" lvl="4" marL="0">
+              <a:spcBef>
+                <a:spcPts val="0"/>
+              </a:spcBef>
+              <a:buNone/>
+              <a:defRPr sz="700">
+                <a:solidFill>
+                  <a:schemeClr val="dk1"/>
+                </a:solidFill>
+                <a:latin typeface="Arial"/>
+                <a:ea typeface="Arial"/>
+                <a:cs typeface="Arial"/>
+                <a:sym typeface="Arial"/>
+              </a:defRPr>
+            </a:lvl5pPr>
+            <a:lvl6pPr algn="ctr" indent="0" lvl="5" marL="0">
+              <a:spcBef>
+                <a:spcPts val="0"/>
+              </a:spcBef>
+              <a:buNone/>
+              <a:defRPr sz="700">
+                <a:solidFill>
+                  <a:schemeClr val="dk1"/>
+                </a:solidFill>
+                <a:latin typeface="Arial"/>
+                <a:ea typeface="Arial"/>
+                <a:cs typeface="Arial"/>
+                <a:sym typeface="Arial"/>
+              </a:defRPr>
+            </a:lvl6pPr>
+            <a:lvl7pPr algn="ctr" indent="0" lvl="6" marL="0">
+              <a:spcBef>
+                <a:spcPts val="0"/>
+              </a:spcBef>
+              <a:buNone/>
+              <a:defRPr sz="700">
+                <a:solidFill>
+                  <a:schemeClr val="dk1"/>
+                </a:solidFill>
+                <a:latin typeface="Arial"/>
+                <a:ea typeface="Arial"/>
+                <a:cs typeface="Arial"/>
+                <a:sym typeface="Arial"/>
+              </a:defRPr>
+            </a:lvl7pPr>
+            <a:lvl8pPr algn="ctr" indent="0" lvl="7" marL="0">
+              <a:spcBef>
+                <a:spcPts val="0"/>
+              </a:spcBef>
+              <a:buNone/>
+              <a:defRPr sz="700">
+                <a:solidFill>
+                  <a:schemeClr val="dk1"/>
+                </a:solidFill>
+                <a:latin typeface="Arial"/>
+                <a:ea typeface="Arial"/>
+                <a:cs typeface="Arial"/>
+                <a:sym typeface="Arial"/>
+              </a:defRPr>
+            </a:lvl8pPr>
+            <a:lvl9pPr algn="ctr" indent="0" lvl="8" marL="0">
+              <a:spcBef>
+                <a:spcPts val="0"/>
+              </a:spcBef>
+              <a:buNone/>
+              <a:defRPr sz="700">
+                <a:solidFill>
+                  <a:schemeClr val="dk1"/>
+                </a:solidFill>
+                <a:latin typeface="Arial"/>
+                <a:ea typeface="Arial"/>
+                <a:cs typeface="Arial"/>
+                <a:sym typeface="Arial"/>
+              </a:defRPr>
+            </a:lvl9pPr>
+          </a:lstStyle>
+          <a:p>
+            <a:pPr algn="ctr" indent="0" lvl="0" marL="0" rtl="0">
+              <a:spcBef>
+                <a:spcPts val="0"/>
+              </a:spcBef>
+              <a:spcAft>
+                <a:spcPts val="0"/>
+              </a:spcAft>
+              <a:buNone/>
+            </a:pPr>
+            <a:fld id="{00000000-1234-1234-1234-123412341234}" type="slidenum">
+              <a:rPr lang="en-US"/>
+              <a:t>‹#›</a:t>
+            </a:fld>
+            <a:endParaRPr/>
+          </a:p>
+        </p:txBody>
+      </p:sp>
+    </p:spTree>
+  </p:cSld>
+</p:sld>
+</file>
+
+<file path=ppt/slides/slide24.xml><?xml version="1.0" encoding="utf-8"?>
+<p:sld xmlns:a="http://schemas.openxmlformats.org/drawingml/2006/main" xmlns:r="http://schemas.openxmlformats.org/officeDocument/2006/relationships" xmlns:p="http://schemas.openxmlformats.org/presentationml/2006/main">
+  <p:cSld>
+    <p:spTree>
+      <p:nvGrpSpPr>
+        <p:cNvPr id="134" name="Shape 134"/>
+        <p:cNvGrpSpPr/>
+        <p:nvPr/>
+      </p:nvGrpSpPr>
+      <p:grpSpPr>
+        <a:xfrm>
+          <a:off x="0" y="0"/>
+          <a:ext cx="0" cy="0"/>
+          <a:chOff x="0" y="0"/>
+          <a:chExt cx="0" cy="0"/>
+        </a:xfrm>
+      </p:grpSpPr>
+      <p:sp>
+        <p:nvSpPr>
+          <p:cNvPr id="142" name="Google Shape;142;p23"/>
+          <p:cNvSpPr txBox="1"/>
+          <p:nvPr>
+            <p:ph type="title"/>
+          </p:nvPr>
+        </p:nvSpPr>
+        <p:spPr>
+          <a:xfrm>
+            <a:off x="774145" y="223964"/>
+            <a:ext cx="10579655" cy="785896"/>
+          </a:xfrm>
+          <a:prstGeom prst="rect">
+            <a:avLst/>
+          </a:prstGeom>
+          <a:noFill/>
+          <a:ln>
+            <a:noFill/>
+          </a:ln>
+        </p:spPr>
+        <p:txBody>
+          <a:bodyPr/>
+          <a:lstStyle/>
+          <a:p>
+            <a:pPr lvl="0" indent="0" marL="0">
+              <a:buNone/>
+            </a:pPr>
+            <a:r>
+              <a:rPr/>
+              <a:t>Kiểm thử và triển khai</a:t>
+            </a:r>
+          </a:p>
+        </p:txBody>
+      </p:sp>
+      <p:sp>
+        <p:nvSpPr>
+          <p:cNvPr id="143" name="Google Shape;143;p23"/>
+          <p:cNvSpPr txBox="1"/>
+          <p:nvPr>
+            <p:ph idx="1"/>
+          </p:nvPr>
+        </p:nvSpPr>
+        <p:spPr/>
+        <p:txBody>
+          <a:bodyPr/>
+          <a:lstStyle/>
+          <a:p>
+            <a:pPr lvl="0"/>
+            <a:r>
+              <a:rPr b="1"/>
+              <a:t>1.000 kiểm thử tự động</a:t>
+            </a:r>
+            <a:r>
+              <a:rPr/>
+              <a:t> đạt · bao phủ tầng nghiệp vụ </a:t>
+            </a:r>
+            <a:r>
+              <a:rPr b="1"/>
+              <a:t>87,7%</a:t>
+            </a:r>
+          </a:p>
+          <a:p>
+            <a:pPr lvl="0"/>
+            <a:r>
+              <a:rPr/>
+              <a:t>Đơn vị · tích hợp · độ chính xác AI · hiệu năng · chịu tải</a:t>
+            </a:r>
+          </a:p>
+          <a:p>
+            <a:pPr lvl="0"/>
+            <a:r>
+              <a:rPr/>
+              <a:t>Tầng AI có bộ test </a:t>
+            </a:r>
+            <a:r>
+              <a:rPr b="1"/>
+              <a:t>chạy không cần dựng server</a:t>
+            </a:r>
+          </a:p>
+          <a:p>
+            <a:pPr lvl="0"/>
+            <a:r>
+              <a:rPr/>
+              <a:t>Chạy liên tục </a:t>
+            </a:r>
+            <a:r>
+              <a:rPr b="1"/>
+              <a:t>15 phút</a:t>
+            </a:r>
+            <a:r>
+              <a:rPr/>
+              <a:t>: 2.028 yêu cầu, </a:t>
+            </a:r>
+            <a:r>
+              <a:rPr b="1"/>
+              <a:t>0 lỗi</a:t>
+            </a:r>
+            <a:r>
+              <a:rPr/>
+              <a:t>, không rò rỉ bộ nhớ</a:t>
+            </a:r>
+          </a:p>
+          <a:p>
+            <a:pPr lvl="0"/>
+            <a:r>
+              <a:rPr/>
+              <a:t>Cơ sở dữ liệu </a:t>
+            </a:r>
+            <a:r>
+              <a:rPr b="1"/>
+              <a:t>sống sót qua khởi động lại</a:t>
+            </a:r>
+            <a:r>
+              <a:rPr/>
+              <a:t>: 9.031 bản ghi, </a:t>
+            </a:r>
+            <a:r>
+              <a:rPr b="1"/>
+              <a:t>0 mất</a:t>
+            </a:r>
+          </a:p>
+          <a:p>
+            <a:pPr lvl="0"/>
+            <a:r>
+              <a:rPr>
+                <a:latin typeface="Courier"/>
+              </a:rPr>
+              <a:t>docker compose up</a:t>
+            </a:r>
+            <a:r>
+              <a:rPr/>
+              <a:t> — </a:t>
+            </a:r>
+            <a:r>
+              <a:rPr b="1"/>
+              <a:t>một lệnh</a:t>
+            </a:r>
+            <a:r>
+              <a:rPr/>
+              <a:t>, đã dựng và xác minh chạy được</a:t>
+            </a:r>
+          </a:p>
+        </p:txBody>
+      </p:sp>
+      <p:sp>
+        <p:nvSpPr>
+          <p:cNvPr id="155" name="Google Shape;155;p23"/>
           <p:cNvSpPr txBox="1"/>
           <p:nvPr>
             <p:ph idx="12" type="sldNum"/>
@@ -50078,8 +50320,8 @@
         </p:nvSpPr>
         <p:spPr>
           <a:xfrm>
-            <a:off x="774146" y="202009"/>
-            <a:ext cx="3932227" cy="1698043"/>
+            <a:off x="771525" y="200025"/>
+            <a:ext cx="10582275" cy="790575"/>
           </a:xfrm>
           <a:prstGeom prst="rect">
             <a:avLst/>
@@ -50137,8 +50379,8 @@
           </p:nvPr>
         </p:nvGraphicFramePr>
         <p:xfrm>
-          <a:off x="5156200" y="190500"/>
-          <a:ext cx="6235700" cy="5969000"/>
+          <a:off x="762000" y="2209800"/>
+          <a:ext cx="10579100" cy="3962400"/>
         </p:xfrm>
         <a:graphic>
           <a:graphicData uri="http://schemas.openxmlformats.org/drawingml/2006/table">
@@ -50147,9 +50389,9 @@
                 <a:tableStyleId>{45BEF19B-5B1D-4A26-B267-ECC71EF7E2D4}</a:tableStyleId>
               </a:tblPr>
               <a:tblGrid>
-                <a:gridCol w="2070100"/>
-                <a:gridCol w="2070100"/>
-                <a:gridCol w="2070100"/>
+                <a:gridCol w="3517900"/>
+                <a:gridCol w="3517900"/>
+                <a:gridCol w="3517900"/>
               </a:tblGrid>
               <a:tr h="0">
                 <a:tc>
@@ -50226,14 +50468,8 @@
                         <a:buNone/>
                       </a:pPr>
                       <a:r>
-                        <a:rPr>
-                          <a:hlinkClick r:id="rId2"/>
-                        </a:rPr>
-                        <a:t>mAP@0.5</a:t>
-                      </a:r>
-                      <a:r>
                         <a:rPr/>
-                        <a:t> </a:t>
+                        <a:t>mAP50 </a:t>
                       </a:r>
                       <a:r>
                         <a:rPr b="1"/>
@@ -50241,17 +50477,7 @@
                       </a:r>
                       <a:r>
                         <a:rPr/>
-                        <a:t> · </a:t>
-                      </a:r>
-                      <a:r>
-                        <a:rPr>
-                          <a:hlinkClick r:id="rId3"/>
-                        </a:rPr>
-                        <a:t>mAP@0.5</a:t>
-                      </a:r>
-                      <a:r>
-                        <a:rPr/>
-                        <a:t>:0.95 </a:t>
+                        <a:t> · mAP50-95 </a:t>
                       </a:r>
                       <a:r>
                         <a:rPr b="1"/>
@@ -50318,7 +50544,7 @@
                       </a:pPr>
                       <a:r>
                         <a:rPr/>
-                        <a:t>A4 </a:t>
+                        <a:t>Đúng từng ký tự </a:t>
                       </a:r>
                       <a:r>
                         <a:rPr b="1"/>
@@ -50369,15 +50595,7 @@
                       </a:pPr>
                       <a:r>
                         <a:rPr/>
-                        <a:t>A5 </a:t>
-                      </a:r>
-                      <a:r>
-                        <a:rPr b="1"/>
-                        <a:t>0,6373</a:t>
-                      </a:r>
-                      <a:r>
-                        <a:rPr/>
-                        <a:t> · A6 </a:t>
+                        <a:t>Đúng cả chuỗi </a:t>
                       </a:r>
                       <a:r>
                         <a:rPr b="1"/>
@@ -50385,7 +50603,7 @@
                       </a:r>
                       <a:r>
                         <a:rPr/>
-                        <a:t> · A7 </a:t>
+                        <a:t> · đầu-cuối </a:t>
                       </a:r>
                       <a:r>
                         <a:rPr b="1"/>
@@ -50452,11 +50670,11 @@
                       </a:r>
                       <a:r>
                         <a:rPr/>
-                        <a:t> · nạp mô hình </a:t>
+                        <a:t> · video </a:t>
                       </a:r>
                       <a:r>
                         <a:rPr b="1"/>
-                        <a:t>6,4 s</a:t>
+                        <a:t>0,746×</a:t>
                       </a:r>
                       <a:r>
                         <a:rPr/>
@@ -50496,6 +50714,124 @@
                       </a:pPr>
                       <a:r>
                         <a:rPr/>
+                        <a:t>Thời gian thực</a:t>
+                      </a:r>
+                    </a:p>
+                  </a:txBody>
+                </a:tc>
+                <a:tc>
+                  <a:txBody>
+                    <a:bodyPr/>
+                    <a:lstStyle/>
+                    <a:p>
+                      <a:pPr lvl="0" indent="0" marL="0">
+                        <a:buNone/>
+                      </a:pPr>
+                      <a:r>
+                        <a:rPr/>
+                        <a:t>Webcam </a:t>
+                      </a:r>
+                      <a:r>
+                        <a:rPr b="1"/>
+                        <a:t>2,379 FPS</a:t>
+                      </a:r>
+                      <a:r>
+                        <a:rPr/>
+                        <a:t> </a:t>
+                      </a:r>
+                      <a:r>
+                        <a:rPr i="1"/>
+                        <a:t>(sàn 3)</a:t>
+                      </a:r>
+                    </a:p>
+                  </a:txBody>
+                </a:tc>
+                <a:tc>
+                  <a:txBody>
+                    <a:bodyPr/>
+                    <a:lstStyle/>
+                    <a:p>
+                      <a:pPr lvl="0" indent="0" marL="0" algn="ctr">
+                        <a:buNone/>
+                      </a:pPr>
+                      <a:r>
+                        <a:rPr/>
+                        <a:t>❌</a:t>
+                      </a:r>
+                    </a:p>
+                  </a:txBody>
+                </a:tc>
+              </a:tr>
+              <a:tr h="0">
+                <a:tc>
+                  <a:txBody>
+                    <a:bodyPr/>
+                    <a:lstStyle/>
+                    <a:p>
+                      <a:pPr lvl="0" indent="0" marL="0">
+                        <a:buNone/>
+                      </a:pPr>
+                      <a:r>
+                        <a:rPr/>
+                        <a:t>Độ tin cậy</a:t>
+                      </a:r>
+                    </a:p>
+                  </a:txBody>
+                </a:tc>
+                <a:tc>
+                  <a:txBody>
+                    <a:bodyPr/>
+                    <a:lstStyle/>
+                    <a:p>
+                      <a:pPr lvl="0" indent="0" marL="0">
+                        <a:buNone/>
+                      </a:pPr>
+                      <a:r>
+                        <a:rPr/>
+                        <a:t>Chạy liên tục </a:t>
+                      </a:r>
+                      <a:r>
+                        <a:rPr b="1"/>
+                        <a:t>100%</a:t>
+                      </a:r>
+                      <a:r>
+                        <a:rPr/>
+                        <a:t> · CSDL sống sót khởi động lại </a:t>
+                      </a:r>
+                      <a:r>
+                        <a:rPr b="1"/>
+                        <a:t>0 mất</a:t>
+                      </a:r>
+                    </a:p>
+                  </a:txBody>
+                </a:tc>
+                <a:tc>
+                  <a:txBody>
+                    <a:bodyPr/>
+                    <a:lstStyle/>
+                    <a:p>
+                      <a:pPr lvl="0" indent="0" marL="0" algn="ctr">
+                        <a:buNone/>
+                      </a:pPr>
+                      <a:r>
+                        <a:rPr/>
+                        <a:t>✅</a:t>
+                      </a:r>
+                    </a:p>
+                  </a:txBody>
+                </a:tc>
+              </a:tr>
+              <a:tr h="0">
+                <a:tc>
+                  <a:txBody>
+                    <a:bodyPr/>
+                    <a:lstStyle/>
+                    <a:p>
+                      <a:pPr lvl="0" indent="0" marL="0">
+                        <a:buNone/>
+                      </a:pPr>
+                      <a:r>
+                        <a:rPr/>
                         <a:t>Phần mềm</a:t>
                       </a:r>
                     </a:p>
@@ -50510,8 +50846,12 @@
                         <a:buNone/>
                       </a:pPr>
                       <a:r>
+                        <a:rPr b="1"/>
+                        <a:t>1.000 test</a:t>
+                      </a:r>
+                      <a:r>
                         <a:rPr/>
-                        <a:t>999 test · bao phủ 87,7% · </a:t>
+                        <a:t> · bao phủ 87,7% · </a:t>
                       </a:r>
                       <a:r>
                         <a:rPr>
@@ -50728,6 +51068,428 @@
 </file>
 
 <file path=ppt/slides/slide26.xml><?xml version="1.0" encoding="utf-8"?>
+<p:sld xmlns:a="http://schemas.openxmlformats.org/drawingml/2006/main" xmlns:r="http://schemas.openxmlformats.org/officeDocument/2006/relationships" xmlns:p="http://schemas.openxmlformats.org/presentationml/2006/main">
+  <p:cSld>
+    <p:spTree>
+      <p:nvGrpSpPr>
+        <p:cNvPr id="428" name="Shape 428"/>
+        <p:cNvGrpSpPr/>
+        <p:nvPr/>
+      </p:nvGrpSpPr>
+      <p:grpSpPr>
+        <a:xfrm>
+          <a:off x="0" y="0"/>
+          <a:ext cx="0" cy="0"/>
+          <a:chOff x="0" y="0"/>
+          <a:chExt cx="0" cy="0"/>
+        </a:xfrm>
+      </p:grpSpPr>
+      <p:sp>
+        <p:nvSpPr>
+          <p:cNvPr id="436" name="Google Shape;436;p31"/>
+          <p:cNvSpPr txBox="1"/>
+          <p:nvPr>
+            <p:ph type="title"/>
+          </p:nvPr>
+        </p:nvSpPr>
+        <p:spPr>
+          <a:xfrm>
+            <a:off x="771525" y="200025"/>
+            <a:ext cx="10582275" cy="790575"/>
+          </a:xfrm>
+          <a:prstGeom prst="rect">
+            <a:avLst/>
+          </a:prstGeom>
+          <a:noFill/>
+          <a:ln>
+            <a:noFill/>
+          </a:ln>
+        </p:spPr>
+        <p:txBody>
+          <a:bodyPr/>
+          <a:lstStyle/>
+          <a:p>
+            <a:pPr lvl="0" indent="0" marL="0">
+              <a:buNone/>
+            </a:pPr>
+            <a:r>
+              <a:rPr/>
+              <a:t>Demo trực tiếp</a:t>
+            </a:r>
+          </a:p>
+        </p:txBody>
+      </p:sp>
+      <p:sp>
+        <p:nvSpPr>
+          <p:cNvPr id="437" name="Google Shape;437;p31"/>
+          <p:cNvSpPr txBox="1"/>
+          <p:nvPr>
+            <p:ph idx="2" sz="half" type="body"/>
+          </p:nvPr>
+        </p:nvSpPr>
+        <p:spPr/>
+        <p:txBody>
+          <a:bodyPr/>
+          <a:lstStyle/>
+          <a:p>
+            <a:pPr lvl="0" indent="0" marL="0">
+              <a:buNone/>
+            </a:pPr>
+            <a:r>
+              <a:rPr/>
+              <a:t>Ba tình huống, chạy trên máy thật — </a:t>
+            </a:r>
+            <a:r>
+              <a:rPr b="1"/>
+              <a:t>không phải video quay sẵn</a:t>
+            </a:r>
+          </a:p>
+        </p:txBody>
+      </p:sp>
+      <p:graphicFrame>
+        <p:nvGraphicFramePr>
+          <p:cNvPr id="6" name="Content Placeholder 5"/>
+          <p:cNvGraphicFramePr>
+            <a:graphicFrameLocks noGrp="1"/>
+          </p:cNvGraphicFramePr>
+          <p:nvPr>
+            <p:ph idx="1"/>
+          </p:nvPr>
+        </p:nvGraphicFramePr>
+        <p:xfrm>
+          <a:off x="762000" y="2209800"/>
+          <a:ext cx="10579100" cy="3962400"/>
+        </p:xfrm>
+        <a:graphic>
+          <a:graphicData uri="http://schemas.openxmlformats.org/drawingml/2006/table">
+            <a:tbl>
+              <a:tblPr firstRow="1" bandRow="1">
+                <a:tableStyleId>{45BEF19B-5B1D-4A26-B267-ECC71EF7E2D4}</a:tableStyleId>
+              </a:tblPr>
+              <a:tblGrid>
+                <a:gridCol w="5283200"/>
+                <a:gridCol w="5283200"/>
+              </a:tblGrid>
+              <a:tr h="0">
+                <a:tc>
+                  <a:txBody>
+                    <a:bodyPr/>
+                    <a:lstStyle/>
+                    <a:p>
+                      <a:pPr lvl="0" indent="0" marL="0">
+                        <a:buNone/>
+                      </a:pPr>
+                      <a:r>
+                        <a:rPr/>
+                        <a:t>Bước</a:t>
+                      </a:r>
+                    </a:p>
+                  </a:txBody>
+                  <a:tcPr/>
+                </a:tc>
+                <a:tc>
+                  <a:txBody>
+                    <a:bodyPr/>
+                    <a:lstStyle/>
+                    <a:p>
+                      <a:pPr lvl="0" indent="0" marL="0">
+                        <a:buNone/>
+                      </a:pPr>
+                      <a:r>
+                        <a:rPr/>
+                        <a:t>Cho thấy điều gì</a:t>
+                      </a:r>
+                    </a:p>
+                  </a:txBody>
+                  <a:tcPr/>
+                </a:tc>
+              </a:tr>
+              <a:tr h="0">
+                <a:tc>
+                  <a:txBody>
+                    <a:bodyPr/>
+                    <a:lstStyle/>
+                    <a:p>
+                      <a:pPr lvl="0" indent="0" marL="0">
+                        <a:buNone/>
+                      </a:pPr>
+                      <a:r>
+                        <a:rPr/>
+                        <a:t>Ảnh ô tô — biển 1 dòng</a:t>
+                      </a:r>
+                    </a:p>
+                  </a:txBody>
+                </a:tc>
+                <a:tc>
+                  <a:txBody>
+                    <a:bodyPr/>
+                    <a:lstStyle/>
+                    <a:p>
+                      <a:pPr lvl="0" indent="0" marL="0">
+                        <a:buNone/>
+                      </a:pPr>
+                      <a:r>
+                        <a:rPr/>
+                        <a:t>Đường đi cơ bản, đọc đúng, dưới 1 giây</a:t>
+                      </a:r>
+                    </a:p>
+                  </a:txBody>
+                </a:tc>
+              </a:tr>
+              <a:tr h="0">
+                <a:tc>
+                  <a:txBody>
+                    <a:bodyPr/>
+                    <a:lstStyle/>
+                    <a:p>
+                      <a:pPr lvl="0" indent="0" marL="0">
+                        <a:buNone/>
+                      </a:pPr>
+                      <a:r>
+                        <a:rPr/>
+                        <a:t>Ảnh xe máy — biển 2 dòng</a:t>
+                      </a:r>
+                    </a:p>
+                  </a:txBody>
+                </a:tc>
+                <a:tc>
+                  <a:txBody>
+                    <a:bodyPr/>
+                    <a:lstStyle/>
+                    <a:p>
+                      <a:pPr lvl="0" indent="0" marL="0">
+                        <a:buNone/>
+                      </a:pPr>
+                      <a:r>
+                        <a:rPr/>
+                        <a:t>Chính chỗ khó nhất, split-then-hstack chạy thật</a:t>
+                      </a:r>
+                    </a:p>
+                  </a:txBody>
+                </a:tc>
+              </a:tr>
+              <a:tr h="0">
+                <a:tc>
+                  <a:txBody>
+                    <a:bodyPr/>
+                    <a:lstStyle/>
+                    <a:p>
+                      <a:pPr lvl="0" indent="0" marL="0">
+                        <a:buNone/>
+                      </a:pPr>
+                      <a:r>
+                        <a:rPr/>
+                        <a:t>Video + Lịch sử</a:t>
+                      </a:r>
+                    </a:p>
+                  </a:txBody>
+                </a:tc>
+                <a:tc>
+                  <a:txBody>
+                    <a:bodyPr/>
+                    <a:lstStyle/>
+                    <a:p>
+                      <a:pPr lvl="0" indent="0" marL="0">
+                        <a:buNone/>
+                      </a:pPr>
+                      <a:r>
+                        <a:rPr/>
+                        <a:t>Xử lý bất đồng bộ, tra cứu lại kết quả</a:t>
+                      </a:r>
+                    </a:p>
+                  </a:txBody>
+                </a:tc>
+              </a:tr>
+            </a:tbl>
+          </a:graphicData>
+        </a:graphic>
+      </p:graphicFrame>
+      <p:sp>
+        <p:nvSpPr>
+          <p:cNvPr id="449" name="Google Shape;449;p31"/>
+          <p:cNvSpPr txBox="1"/>
+          <p:nvPr>
+            <p:ph idx="12" type="sldNum"/>
+          </p:nvPr>
+        </p:nvSpPr>
+        <p:spPr>
+          <a:xfrm>
+            <a:off x="58380" y="6508358"/>
+            <a:ext cx="349642" cy="349642"/>
+          </a:xfrm>
+          <a:prstGeom prst="rect">
+            <a:avLst/>
+          </a:prstGeom>
+          <a:noFill/>
+          <a:ln>
+            <a:noFill/>
+          </a:ln>
+        </p:spPr>
+        <p:txBody>
+          <a:bodyPr anchor="ctr" anchorCtr="0" bIns="45700" lIns="91425" rIns="91425" spcFirstLastPara="1" tIns="45700" wrap="square">
+            <a:noAutofit/>
+          </a:bodyPr>
+          <a:lstStyle>
+            <a:lvl1pPr algn="ctr" indent="0" lvl="0" marL="0">
+              <a:spcBef>
+                <a:spcPts val="0"/>
+              </a:spcBef>
+              <a:buNone/>
+              <a:defRPr sz="700">
+                <a:solidFill>
+                  <a:schemeClr val="dk1"/>
+                </a:solidFill>
+                <a:latin typeface="Arial"/>
+                <a:ea typeface="Arial"/>
+                <a:cs typeface="Arial"/>
+                <a:sym typeface="Arial"/>
+              </a:defRPr>
+            </a:lvl1pPr>
+            <a:lvl2pPr algn="ctr" indent="0" lvl="1" marL="0">
+              <a:spcBef>
+                <a:spcPts val="0"/>
+              </a:spcBef>
+              <a:buNone/>
+              <a:defRPr sz="700">
+                <a:solidFill>
+                  <a:schemeClr val="dk1"/>
+                </a:solidFill>
+                <a:latin typeface="Arial"/>
+                <a:ea typeface="Arial"/>
+                <a:cs typeface="Arial"/>
+                <a:sym typeface="Arial"/>
+              </a:defRPr>
+            </a:lvl2pPr>
+            <a:lvl3pPr algn="ctr" indent="0" lvl="2" marL="0">
+              <a:spcBef>
+                <a:spcPts val="0"/>
+              </a:spcBef>
+              <a:buNone/>
+              <a:defRPr sz="700">
+                <a:solidFill>
+                  <a:schemeClr val="dk1"/>
+                </a:solidFill>
+                <a:latin typeface="Arial"/>
+                <a:ea typeface="Arial"/>
+                <a:cs typeface="Arial"/>
+                <a:sym typeface="Arial"/>
+              </a:defRPr>
+            </a:lvl3pPr>
+            <a:lvl4pPr algn="ctr" indent="0" lvl="3" marL="0">
+              <a:spcBef>
+                <a:spcPts val="0"/>
+              </a:spcBef>
+              <a:buNone/>
+              <a:defRPr sz="700">
+                <a:solidFill>
+                  <a:schemeClr val="dk1"/>
+                </a:solidFill>
+                <a:latin typeface="Arial"/>
+                <a:ea typeface="Arial"/>
+                <a:cs typeface="Arial"/>
+                <a:sym typeface="Arial"/>
+              </a:defRPr>
+            </a:lvl4pPr>
+            <a:lvl5pPr algn="ctr" indent="0" lvl="4" marL="0">
+              <a:spcBef>
+                <a:spcPts val="0"/>
+              </a:spcBef>
+              <a:buNone/>
+              <a:defRPr sz="700">
+                <a:solidFill>
+                  <a:schemeClr val="dk1"/>
+                </a:solidFill>
+                <a:latin typeface="Arial"/>
+                <a:ea typeface="Arial"/>
+                <a:cs typeface="Arial"/>
+                <a:sym typeface="Arial"/>
+              </a:defRPr>
+            </a:lvl5pPr>
+            <a:lvl6pPr algn="ctr" indent="0" lvl="5" marL="0">
+              <a:spcBef>
+                <a:spcPts val="0"/>
+              </a:spcBef>
+              <a:buNone/>
+              <a:defRPr sz="700">
+                <a:solidFill>
+                  <a:schemeClr val="dk1"/>
+                </a:solidFill>
+                <a:latin typeface="Arial"/>
+                <a:ea typeface="Arial"/>
+                <a:cs typeface="Arial"/>
+                <a:sym typeface="Arial"/>
+              </a:defRPr>
+            </a:lvl6pPr>
+            <a:lvl7pPr algn="ctr" indent="0" lvl="6" marL="0">
+              <a:spcBef>
+                <a:spcPts val="0"/>
+              </a:spcBef>
+              <a:buNone/>
+              <a:defRPr sz="700">
+                <a:solidFill>
+                  <a:schemeClr val="dk1"/>
+                </a:solidFill>
+                <a:latin typeface="Arial"/>
+                <a:ea typeface="Arial"/>
+                <a:cs typeface="Arial"/>
+                <a:sym typeface="Arial"/>
+              </a:defRPr>
+            </a:lvl7pPr>
+            <a:lvl8pPr algn="ctr" indent="0" lvl="7" marL="0">
+              <a:spcBef>
+                <a:spcPts val="0"/>
+              </a:spcBef>
+              <a:buNone/>
+              <a:defRPr sz="700">
+                <a:solidFill>
+                  <a:schemeClr val="dk1"/>
+                </a:solidFill>
+                <a:latin typeface="Arial"/>
+                <a:ea typeface="Arial"/>
+                <a:cs typeface="Arial"/>
+                <a:sym typeface="Arial"/>
+              </a:defRPr>
+            </a:lvl8pPr>
+            <a:lvl9pPr algn="ctr" indent="0" lvl="8" marL="0">
+              <a:spcBef>
+                <a:spcPts val="0"/>
+              </a:spcBef>
+              <a:buNone/>
+              <a:defRPr sz="700">
+                <a:solidFill>
+                  <a:schemeClr val="dk1"/>
+                </a:solidFill>
+                <a:latin typeface="Arial"/>
+                <a:ea typeface="Arial"/>
+                <a:cs typeface="Arial"/>
+                <a:sym typeface="Arial"/>
+              </a:defRPr>
+            </a:lvl9pPr>
+          </a:lstStyle>
+          <a:p>
+            <a:pPr algn="ctr" indent="0" lvl="0" marL="0" rtl="0">
+              <a:spcBef>
+                <a:spcPts val="0"/>
+              </a:spcBef>
+              <a:spcAft>
+                <a:spcPts val="0"/>
+              </a:spcAft>
+              <a:buNone/>
+            </a:pPr>
+            <a:fld id="{00000000-1234-1234-1234-123412341234}" type="slidenum">
+              <a:rPr lang="en-US"/>
+              <a:t>‹#›</a:t>
+            </a:fld>
+            <a:endParaRPr/>
+          </a:p>
+        </p:txBody>
+      </p:sp>
+    </p:spTree>
+  </p:cSld>
+</p:sld>
+</file>
+
+<file path=ppt/slides/slide27.xml><?xml version="1.0" encoding="utf-8"?>
 <p:sld xmlns:a="http://schemas.openxmlformats.org/drawingml/2006/main" xmlns:r="http://schemas.openxmlformats.org/officeDocument/2006/relationships" xmlns:p="http://schemas.openxmlformats.org/presentationml/2006/main">
   <p:cSld>
     <p:spTree>
@@ -50848,11 +51610,11 @@
                       </a:pPr>
                       <a:r>
                         <a:rPr b="1"/>
-                        <a:t>OCR biển 2 dòng chưa đạt</a:t>
+                        <a:t>Biển 2 dòng chưa đạt</a:t>
                       </a:r>
                       <a:r>
                         <a:rPr/>
-                        <a:t> — A6 0,6996 so với 0,9541 của biển 1 dòng</a:t>
+                        <a:t> — đọc đúng cả chuỗi 0,6996 so với 0,9541 của biển 1 dòng</a:t>
                       </a:r>
                     </a:p>
                   </a:txBody>
@@ -50884,7 +51646,7 @@
                       </a:pPr>
                       <a:r>
                         <a:rPr b="1"/>
-                        <a:t>A7 = 0,5552 không đại diện</a:t>
+                        <a:t>Số đầu-cuối 0,5552 không đại diện</a:t>
                       </a:r>
                     </a:p>
                   </a:txBody>
@@ -50900,6 +51662,50 @@
                       <a:r>
                         <a:rPr/>
                         <a:t>Không bộ dữ liệu nào vừa có ảnh toàn cảnh vừa có chuỗi biển ⇒ đo trên ảnh cắt sẵn, ngoài phân bố bộ phát hiện</a:t>
+                      </a:r>
+                    </a:p>
+                  </a:txBody>
+                </a:tc>
+              </a:tr>
+              <a:tr h="0">
+                <a:tc>
+                  <a:txBody>
+                    <a:bodyPr/>
+                    <a:lstStyle/>
+                    <a:p>
+                      <a:pPr lvl="0" indent="0" marL="0">
+                        <a:buNone/>
+                      </a:pPr>
+                      <a:r>
+                        <a:rPr b="1"/>
+                        <a:t>Số OCR là số trên biển TRẮNG</a:t>
+                      </a:r>
+                      <a:r>
+                        <a:rPr/>
+                        <a:t> — tập nhãn có 97,7% biển trắng, 20 vàng, 4 xanh, </a:t>
+                      </a:r>
+                      <a:r>
+                        <a:rPr b="1"/>
+                        <a:t>0 đỏ, 0 ngoại giao</a:t>
+                      </a:r>
+                    </a:p>
+                  </a:txBody>
+                </a:tc>
+                <a:tc>
+                  <a:txBody>
+                    <a:bodyPr/>
+                    <a:lstStyle/>
+                    <a:p>
+                      <a:pPr lvl="0" indent="0" marL="0">
+                        <a:buNone/>
+                      </a:pPr>
+                      <a:r>
+                        <a:rPr/>
+                        <a:t>Không nguồn công khai nào đủ biển hiếm; nói "0,9454 trên biển số Việt Nam" là </a:t>
+                      </a:r>
+                      <a:r>
+                        <a:rPr b="1"/>
+                        <a:t>nói quá</a:t>
                       </a:r>
                     </a:p>
                   </a:txBody>
@@ -51178,457 +51984,6 @@
 </p:sld>
 </file>
 
-<file path=ppt/slides/slide27.xml><?xml version="1.0" encoding="utf-8"?>
-<p:sld xmlns:a="http://schemas.openxmlformats.org/drawingml/2006/main" xmlns:r="http://schemas.openxmlformats.org/officeDocument/2006/relationships" xmlns:p="http://schemas.openxmlformats.org/presentationml/2006/main">
-  <p:cSld>
-    <p:spTree>
-      <p:nvGrpSpPr>
-        <p:cNvPr id="428" name="Shape 428"/>
-        <p:cNvGrpSpPr/>
-        <p:nvPr/>
-      </p:nvGrpSpPr>
-      <p:grpSpPr>
-        <a:xfrm>
-          <a:off x="0" y="0"/>
-          <a:ext cx="0" cy="0"/>
-          <a:chOff x="0" y="0"/>
-          <a:chExt cx="0" cy="0"/>
-        </a:xfrm>
-      </p:grpSpPr>
-      <p:sp>
-        <p:nvSpPr>
-          <p:cNvPr id="436" name="Google Shape;436;p31"/>
-          <p:cNvSpPr txBox="1"/>
-          <p:nvPr>
-            <p:ph type="title"/>
-          </p:nvPr>
-        </p:nvSpPr>
-        <p:spPr>
-          <a:xfrm>
-            <a:off x="774146" y="202009"/>
-            <a:ext cx="3932227" cy="1698043"/>
-          </a:xfrm>
-          <a:prstGeom prst="rect">
-            <a:avLst/>
-          </a:prstGeom>
-          <a:noFill/>
-          <a:ln>
-            <a:noFill/>
-          </a:ln>
-        </p:spPr>
-        <p:txBody>
-          <a:bodyPr/>
-          <a:lstStyle/>
-          <a:p>
-            <a:pPr lvl="0" indent="0" marL="0">
-              <a:buNone/>
-            </a:pPr>
-            <a:r>
-              <a:rPr/>
-              <a:t>Ba can thiệp, một kết luận</a:t>
-            </a:r>
-          </a:p>
-        </p:txBody>
-      </p:sp>
-      <p:sp>
-        <p:nvSpPr>
-          <p:cNvPr id="437" name="Google Shape;437;p31"/>
-          <p:cNvSpPr txBox="1"/>
-          <p:nvPr>
-            <p:ph idx="2" sz="half" type="body"/>
-          </p:nvPr>
-        </p:nvSpPr>
-        <p:spPr/>
-        <p:txBody>
-          <a:bodyPr/>
-          <a:lstStyle/>
-          <a:p>
-            <a:pPr lvl="0" indent="0" marL="0">
-              <a:buNone/>
-            </a:pPr>
-            <a:r>
-              <a:rPr/>
-              <a:t>Cả ba </a:t>
-            </a:r>
-            <a:r>
-              <a:rPr b="1"/>
-              <a:t>ngoài</a:t>
-            </a:r>
-            <a:r>
-              <a:rPr/>
-              <a:t> mô hình nhận dạng: A6 </a:t>
-            </a:r>
-            <a:r>
-              <a:rPr b="1"/>
-              <a:t>0,6098 → 0,7512</a:t>
-            </a:r>
-          </a:p>
-          <a:p>
-            <a:pPr lvl="0" indent="0" marL="0">
-              <a:buNone/>
-            </a:pPr>
-            <a:r>
-              <a:rPr b="1"/>
-              <a:t>Dư địa đã cạn</a:t>
-            </a:r>
-            <a:r>
-              <a:rPr/>
-              <a:t> — lỗi còn lại là ký tự </a:t>
-            </a:r>
-            <a:r>
-              <a:rPr i="1"/>
-              <a:t>chưa từng đọc ra</a:t>
-            </a:r>
-          </a:p>
-        </p:txBody>
-      </p:sp>
-      <p:graphicFrame>
-        <p:nvGraphicFramePr>
-          <p:cNvPr id="6" name="Content Placeholder 5"/>
-          <p:cNvGraphicFramePr>
-            <a:graphicFrameLocks noGrp="1"/>
-          </p:cNvGraphicFramePr>
-          <p:nvPr>
-            <p:ph idx="1"/>
-          </p:nvPr>
-        </p:nvGraphicFramePr>
-        <p:xfrm>
-          <a:off x="5156200" y="190500"/>
-          <a:ext cx="6235700" cy="5969000"/>
-        </p:xfrm>
-        <a:graphic>
-          <a:graphicData uri="http://schemas.openxmlformats.org/drawingml/2006/table">
-            <a:tbl>
-              <a:tblPr firstRow="1" bandRow="1">
-                <a:tableStyleId>{45BEF19B-5B1D-4A26-B267-ECC71EF7E2D4}</a:tableStyleId>
-              </a:tblPr>
-              <a:tblGrid>
-                <a:gridCol w="3111500"/>
-                <a:gridCol w="3111500"/>
-              </a:tblGrid>
-              <a:tr h="0">
-                <a:tc>
-                  <a:txBody>
-                    <a:bodyPr/>
-                    <a:lstStyle/>
-                    <a:p>
-                      <a:pPr lvl="0" indent="0" marL="0">
-                        <a:buNone/>
-                      </a:pPr>
-                      <a:r>
-                        <a:rPr/>
-                        <a:t>Can thiệp</a:t>
-                      </a:r>
-                    </a:p>
-                  </a:txBody>
-                  <a:tcPr/>
-                </a:tc>
-                <a:tc>
-                  <a:txBody>
-                    <a:bodyPr/>
-                    <a:lstStyle/>
-                    <a:p>
-                      <a:pPr lvl="0" indent="0" marL="0" algn="r">
-                        <a:buNone/>
-                      </a:pPr>
-                      <a:r>
-                        <a:rPr/>
-                        <a:t>Thu được</a:t>
-                      </a:r>
-                    </a:p>
-                  </a:txBody>
-                  <a:tcPr/>
-                </a:tc>
-              </a:tr>
-              <a:tr h="0">
-                <a:tc>
-                  <a:txBody>
-                    <a:bodyPr/>
-                    <a:lstStyle/>
-                    <a:p>
-                      <a:pPr lvl="0" indent="0" marL="0">
-                        <a:buNone/>
-                      </a:pPr>
-                      <a:r>
-                        <a:rPr/>
-                        <a:t>Bộ luật hậu xử lý theo vị trí</a:t>
-                      </a:r>
-                    </a:p>
-                  </a:txBody>
-                </a:tc>
-                <a:tc>
-                  <a:txBody>
-                    <a:bodyPr/>
-                    <a:lstStyle/>
-                    <a:p>
-                      <a:pPr lvl="0" indent="0" marL="0" algn="r">
-                        <a:buNone/>
-                      </a:pPr>
-                      <a:r>
-                        <a:rPr b="1"/>
-                        <a:t>+11,39 điểm</a:t>
-                      </a:r>
-                      <a:r>
-                        <a:rPr/>
-                        <a:t> A6</a:t>
-                      </a:r>
-                    </a:p>
-                  </a:txBody>
-                </a:tc>
-              </a:tr>
-              <a:tr h="0">
-                <a:tc>
-                  <a:txBody>
-                    <a:bodyPr/>
-                    <a:lstStyle/>
-                    <a:p>
-                      <a:pPr lvl="0" indent="0" marL="0">
-                        <a:buNone/>
-                      </a:pPr>
-                      <a:r>
-                        <a:rPr/>
-                        <a:t>Cứu dòng trên</a:t>
-                      </a:r>
-                    </a:p>
-                  </a:txBody>
-                </a:tc>
-                <a:tc>
-                  <a:txBody>
-                    <a:bodyPr/>
-                    <a:lstStyle/>
-                    <a:p>
-                      <a:pPr lvl="0" indent="0" marL="0" algn="r">
-                        <a:buNone/>
-                      </a:pPr>
-                      <a:r>
-                        <a:rPr/>
-                        <a:t>209 biển</a:t>
-                      </a:r>
-                    </a:p>
-                  </a:txBody>
-                </a:tc>
-              </a:tr>
-              <a:tr h="0">
-                <a:tc>
-                  <a:txBody>
-                    <a:bodyPr/>
-                    <a:lstStyle/>
-                    <a:p>
-                      <a:pPr lvl="0" indent="0" marL="0">
-                        <a:buNone/>
-                      </a:pPr>
-                      <a:r>
-                        <a:rPr/>
-                        <a:t>Nắn hình chống méo</a:t>
-                      </a:r>
-                    </a:p>
-                  </a:txBody>
-                </a:tc>
-                <a:tc>
-                  <a:txBody>
-                    <a:bodyPr/>
-                    <a:lstStyle/>
-                    <a:p>
-                      <a:pPr lvl="0" indent="0" marL="0" algn="r">
-                        <a:buNone/>
-                      </a:pPr>
-                      <a:r>
-                        <a:rPr/>
-                        <a:t>34 biển</a:t>
-                      </a:r>
-                    </a:p>
-                  </a:txBody>
-                </a:tc>
-              </a:tr>
-            </a:tbl>
-          </a:graphicData>
-        </a:graphic>
-      </p:graphicFrame>
-      <p:sp>
-        <p:nvSpPr>
-          <p:cNvPr id="449" name="Google Shape;449;p31"/>
-          <p:cNvSpPr txBox="1"/>
-          <p:nvPr>
-            <p:ph idx="12" type="sldNum"/>
-          </p:nvPr>
-        </p:nvSpPr>
-        <p:spPr>
-          <a:xfrm>
-            <a:off x="58380" y="6508358"/>
-            <a:ext cx="349642" cy="349642"/>
-          </a:xfrm>
-          <a:prstGeom prst="rect">
-            <a:avLst/>
-          </a:prstGeom>
-          <a:noFill/>
-          <a:ln>
-            <a:noFill/>
-          </a:ln>
-        </p:spPr>
-        <p:txBody>
-          <a:bodyPr anchor="ctr" anchorCtr="0" bIns="45700" lIns="91425" rIns="91425" spcFirstLastPara="1" tIns="45700" wrap="square">
-            <a:noAutofit/>
-          </a:bodyPr>
-          <a:lstStyle>
-            <a:lvl1pPr algn="ctr" indent="0" lvl="0" marL="0">
-              <a:spcBef>
-                <a:spcPts val="0"/>
-              </a:spcBef>
-              <a:buNone/>
-              <a:defRPr sz="700">
-                <a:solidFill>
-                  <a:schemeClr val="dk1"/>
-                </a:solidFill>
-                <a:latin typeface="Arial"/>
-                <a:ea typeface="Arial"/>
-                <a:cs typeface="Arial"/>
-                <a:sym typeface="Arial"/>
-              </a:defRPr>
-            </a:lvl1pPr>
-            <a:lvl2pPr algn="ctr" indent="0" lvl="1" marL="0">
-              <a:spcBef>
-                <a:spcPts val="0"/>
-              </a:spcBef>
-              <a:buNone/>
-              <a:defRPr sz="700">
-                <a:solidFill>
-                  <a:schemeClr val="dk1"/>
-                </a:solidFill>
-                <a:latin typeface="Arial"/>
-                <a:ea typeface="Arial"/>
-                <a:cs typeface="Arial"/>
-                <a:sym typeface="Arial"/>
-              </a:defRPr>
-            </a:lvl2pPr>
-            <a:lvl3pPr algn="ctr" indent="0" lvl="2" marL="0">
-              <a:spcBef>
-                <a:spcPts val="0"/>
-              </a:spcBef>
-              <a:buNone/>
-              <a:defRPr sz="700">
-                <a:solidFill>
-                  <a:schemeClr val="dk1"/>
-                </a:solidFill>
-                <a:latin typeface="Arial"/>
-                <a:ea typeface="Arial"/>
-                <a:cs typeface="Arial"/>
-                <a:sym typeface="Arial"/>
-              </a:defRPr>
-            </a:lvl3pPr>
-            <a:lvl4pPr algn="ctr" indent="0" lvl="3" marL="0">
-              <a:spcBef>
-                <a:spcPts val="0"/>
-              </a:spcBef>
-              <a:buNone/>
-              <a:defRPr sz="700">
-                <a:solidFill>
-                  <a:schemeClr val="dk1"/>
-                </a:solidFill>
-                <a:latin typeface="Arial"/>
-                <a:ea typeface="Arial"/>
-                <a:cs typeface="Arial"/>
-                <a:sym typeface="Arial"/>
-              </a:defRPr>
-            </a:lvl4pPr>
-            <a:lvl5pPr algn="ctr" indent="0" lvl="4" marL="0">
-              <a:spcBef>
-                <a:spcPts val="0"/>
-              </a:spcBef>
-              <a:buNone/>
-              <a:defRPr sz="700">
-                <a:solidFill>
-                  <a:schemeClr val="dk1"/>
-                </a:solidFill>
-                <a:latin typeface="Arial"/>
-                <a:ea typeface="Arial"/>
-                <a:cs typeface="Arial"/>
-                <a:sym typeface="Arial"/>
-              </a:defRPr>
-            </a:lvl5pPr>
-            <a:lvl6pPr algn="ctr" indent="0" lvl="5" marL="0">
-              <a:spcBef>
-                <a:spcPts val="0"/>
-              </a:spcBef>
-              <a:buNone/>
-              <a:defRPr sz="700">
-                <a:solidFill>
-                  <a:schemeClr val="dk1"/>
-                </a:solidFill>
-                <a:latin typeface="Arial"/>
-                <a:ea typeface="Arial"/>
-                <a:cs typeface="Arial"/>
-                <a:sym typeface="Arial"/>
-              </a:defRPr>
-            </a:lvl6pPr>
-            <a:lvl7pPr algn="ctr" indent="0" lvl="6" marL="0">
-              <a:spcBef>
-                <a:spcPts val="0"/>
-              </a:spcBef>
-              <a:buNone/>
-              <a:defRPr sz="700">
-                <a:solidFill>
-                  <a:schemeClr val="dk1"/>
-                </a:solidFill>
-                <a:latin typeface="Arial"/>
-                <a:ea typeface="Arial"/>
-                <a:cs typeface="Arial"/>
-                <a:sym typeface="Arial"/>
-              </a:defRPr>
-            </a:lvl7pPr>
-            <a:lvl8pPr algn="ctr" indent="0" lvl="7" marL="0">
-              <a:spcBef>
-                <a:spcPts val="0"/>
-              </a:spcBef>
-              <a:buNone/>
-              <a:defRPr sz="700">
-                <a:solidFill>
-                  <a:schemeClr val="dk1"/>
-                </a:solidFill>
-                <a:latin typeface="Arial"/>
-                <a:ea typeface="Arial"/>
-                <a:cs typeface="Arial"/>
-                <a:sym typeface="Arial"/>
-              </a:defRPr>
-            </a:lvl8pPr>
-            <a:lvl9pPr algn="ctr" indent="0" lvl="8" marL="0">
-              <a:spcBef>
-                <a:spcPts val="0"/>
-              </a:spcBef>
-              <a:buNone/>
-              <a:defRPr sz="700">
-                <a:solidFill>
-                  <a:schemeClr val="dk1"/>
-                </a:solidFill>
-                <a:latin typeface="Arial"/>
-                <a:ea typeface="Arial"/>
-                <a:cs typeface="Arial"/>
-                <a:sym typeface="Arial"/>
-              </a:defRPr>
-            </a:lvl9pPr>
-          </a:lstStyle>
-          <a:p>
-            <a:pPr algn="ctr" indent="0" lvl="0" marL="0" rtl="0">
-              <a:spcBef>
-                <a:spcPts val="0"/>
-              </a:spcBef>
-              <a:spcAft>
-                <a:spcPts val="0"/>
-              </a:spcAft>
-              <a:buNone/>
-            </a:pPr>
-            <a:fld id="{00000000-1234-1234-1234-123412341234}" type="slidenum">
-              <a:rPr lang="en-US"/>
-              <a:t>‹#›</a:t>
-            </a:fld>
-            <a:endParaRPr/>
-          </a:p>
-        </p:txBody>
-      </p:sp>
-    </p:spTree>
-  </p:cSld>
-</p:sld>
-</file>
-
 <file path=ppt/slides/slide28.xml><?xml version="1.0" encoding="utf-8"?>
 <p:sld xmlns:a="http://schemas.openxmlformats.org/drawingml/2006/main" xmlns:r="http://schemas.openxmlformats.org/officeDocument/2006/relationships" xmlns:p="http://schemas.openxmlformats.org/presentationml/2006/main">
   <p:cSld>
@@ -51729,7 +52084,7 @@
             </a:r>
             <a:r>
               <a:rPr/>
-              <a:t> ⇒ đo được A7 đúng cách</a:t>
+              <a:t> ⇒ đo được số đầu-cuối đúng cách</a:t>
             </a:r>
           </a:p>
           <a:p>
@@ -52088,7 +52443,7 @@
             <a:pPr lvl="0"/>
             <a:r>
               <a:rPr b="1"/>
-              <a:t>999 kiểm thử</a:t>
+              <a:t>1.000 kiểm thử</a:t>
             </a:r>
             <a:r>
               <a:rPr/>
@@ -52340,8 +52695,8 @@
         </p:nvSpPr>
         <p:spPr>
           <a:xfrm>
-            <a:off x="774146" y="202009"/>
-            <a:ext cx="3932227" cy="1698043"/>
+            <a:off x="771525" y="200025"/>
+            <a:ext cx="10582275" cy="790575"/>
           </a:xfrm>
           <a:prstGeom prst="rect">
             <a:avLst/>
@@ -52412,16 +52767,11 @@
             </a:r>
             <a:r>
               <a:rPr/>
-              <a:t>, chỉ khác bố cục</a:t>
+              <a:t> </a:t>
             </a:r>
-          </a:p>
-          <a:p>
-            <a:pPr lvl="0" indent="0" marL="0">
-              <a:buNone/>
-            </a:pPr>
             <a:r>
               <a:rPr i="1"/>
-              <a:t>Số liệu Brazil, không phải Việt Nam</a:t>
+              <a:t>(số liệu Brazil)</a:t>
             </a:r>
           </a:p>
         </p:txBody>
@@ -52442,8 +52792,8 @@
         </p:blipFill>
         <p:spPr bwMode="auto">
           <a:xfrm>
-            <a:off x="5156200" y="787400"/>
-            <a:ext cx="6235700" cy="4762500"/>
+            <a:off x="3454400" y="2209800"/>
+            <a:ext cx="5181600" cy="3962400"/>
           </a:xfrm>
           <a:prstGeom prst="rect">
             <a:avLst/>
@@ -52646,7 +52996,7 @@
   <p:cSld>
     <p:spTree>
       <p:nvGrpSpPr>
-        <p:cNvPr id="428" name="Shape 428"/>
+        <p:cNvPr id="134" name="Shape 134"/>
         <p:cNvGrpSpPr/>
         <p:nvPr/>
       </p:nvGrpSpPr>
@@ -52660,7 +53010,7 @@
       </p:grpSpPr>
       <p:sp>
         <p:nvSpPr>
-          <p:cNvPr id="436" name="Google Shape;436;p31"/>
+          <p:cNvPr id="142" name="Google Shape;142;p23"/>
           <p:cNvSpPr txBox="1"/>
           <p:nvPr>
             <p:ph type="title"/>
@@ -52668,8 +53018,8 @@
         </p:nvSpPr>
         <p:spPr>
           <a:xfrm>
-            <a:off x="774146" y="202009"/>
-            <a:ext cx="3932227" cy="1698043"/>
+            <a:off x="774145" y="223964"/>
+            <a:ext cx="10579655" cy="785896"/>
           </a:xfrm>
           <a:prstGeom prst="rect">
             <a:avLst/>
@@ -52695,10 +53045,10 @@
       </p:sp>
       <p:sp>
         <p:nvSpPr>
-          <p:cNvPr id="437" name="Google Shape;437;p31"/>
+          <p:cNvPr id="143" name="Google Shape;143;p23"/>
           <p:cNvSpPr txBox="1"/>
           <p:nvPr>
-            <p:ph idx="2" sz="half" type="body"/>
+            <p:ph idx="1"/>
           </p:nvPr>
         </p:nvSpPr>
         <p:spPr/>
@@ -52711,7 +53061,253 @@
             </a:pPr>
             <a:r>
               <a:rPr b="1"/>
-              <a:t>Em xin cảm ơn thầy cô đã lắng nghe. Em xin sẵn sàng nhận câu hỏi.</a:t>
+              <a:t>Em xin cảm ơn thầy cô đã lắng nghe.</a:t>
+            </a:r>
+          </a:p>
+          <a:p>
+            <a:pPr lvl="0" indent="0" marL="0">
+              <a:buNone/>
+            </a:pPr>
+            <a:r>
+              <a:rPr b="1"/>
+              <a:t>Em xin sẵn sàng nhận câu hỏi.</a:t>
+            </a:r>
+          </a:p>
+        </p:txBody>
+      </p:sp>
+      <p:sp>
+        <p:nvSpPr>
+          <p:cNvPr id="155" name="Google Shape;155;p23"/>
+          <p:cNvSpPr txBox="1"/>
+          <p:nvPr>
+            <p:ph idx="12" type="sldNum"/>
+          </p:nvPr>
+        </p:nvSpPr>
+        <p:spPr>
+          <a:xfrm>
+            <a:off x="58380" y="6508358"/>
+            <a:ext cx="349642" cy="349642"/>
+          </a:xfrm>
+          <a:prstGeom prst="rect">
+            <a:avLst/>
+          </a:prstGeom>
+          <a:noFill/>
+          <a:ln>
+            <a:noFill/>
+          </a:ln>
+        </p:spPr>
+        <p:txBody>
+          <a:bodyPr anchor="ctr" anchorCtr="0" bIns="45700" lIns="91425" rIns="91425" spcFirstLastPara="1" tIns="45700" wrap="square">
+            <a:noAutofit/>
+          </a:bodyPr>
+          <a:lstStyle>
+            <a:lvl1pPr algn="ctr" indent="0" lvl="0" marL="0">
+              <a:spcBef>
+                <a:spcPts val="0"/>
+              </a:spcBef>
+              <a:buNone/>
+              <a:defRPr sz="700">
+                <a:solidFill>
+                  <a:schemeClr val="dk1"/>
+                </a:solidFill>
+                <a:latin typeface="Arial"/>
+                <a:ea typeface="Arial"/>
+                <a:cs typeface="Arial"/>
+                <a:sym typeface="Arial"/>
+              </a:defRPr>
+            </a:lvl1pPr>
+            <a:lvl2pPr algn="ctr" indent="0" lvl="1" marL="0">
+              <a:spcBef>
+                <a:spcPts val="0"/>
+              </a:spcBef>
+              <a:buNone/>
+              <a:defRPr sz="700">
+                <a:solidFill>
+                  <a:schemeClr val="dk1"/>
+                </a:solidFill>
+                <a:latin typeface="Arial"/>
+                <a:ea typeface="Arial"/>
+                <a:cs typeface="Arial"/>
+                <a:sym typeface="Arial"/>
+              </a:defRPr>
+            </a:lvl2pPr>
+            <a:lvl3pPr algn="ctr" indent="0" lvl="2" marL="0">
+              <a:spcBef>
+                <a:spcPts val="0"/>
+              </a:spcBef>
+              <a:buNone/>
+              <a:defRPr sz="700">
+                <a:solidFill>
+                  <a:schemeClr val="dk1"/>
+                </a:solidFill>
+                <a:latin typeface="Arial"/>
+                <a:ea typeface="Arial"/>
+                <a:cs typeface="Arial"/>
+                <a:sym typeface="Arial"/>
+              </a:defRPr>
+            </a:lvl3pPr>
+            <a:lvl4pPr algn="ctr" indent="0" lvl="3" marL="0">
+              <a:spcBef>
+                <a:spcPts val="0"/>
+              </a:spcBef>
+              <a:buNone/>
+              <a:defRPr sz="700">
+                <a:solidFill>
+                  <a:schemeClr val="dk1"/>
+                </a:solidFill>
+                <a:latin typeface="Arial"/>
+                <a:ea typeface="Arial"/>
+                <a:cs typeface="Arial"/>
+                <a:sym typeface="Arial"/>
+              </a:defRPr>
+            </a:lvl4pPr>
+            <a:lvl5pPr algn="ctr" indent="0" lvl="4" marL="0">
+              <a:spcBef>
+                <a:spcPts val="0"/>
+              </a:spcBef>
+              <a:buNone/>
+              <a:defRPr sz="700">
+                <a:solidFill>
+                  <a:schemeClr val="dk1"/>
+                </a:solidFill>
+                <a:latin typeface="Arial"/>
+                <a:ea typeface="Arial"/>
+                <a:cs typeface="Arial"/>
+                <a:sym typeface="Arial"/>
+              </a:defRPr>
+            </a:lvl5pPr>
+            <a:lvl6pPr algn="ctr" indent="0" lvl="5" marL="0">
+              <a:spcBef>
+                <a:spcPts val="0"/>
+              </a:spcBef>
+              <a:buNone/>
+              <a:defRPr sz="700">
+                <a:solidFill>
+                  <a:schemeClr val="dk1"/>
+                </a:solidFill>
+                <a:latin typeface="Arial"/>
+                <a:ea typeface="Arial"/>
+                <a:cs typeface="Arial"/>
+                <a:sym typeface="Arial"/>
+              </a:defRPr>
+            </a:lvl6pPr>
+            <a:lvl7pPr algn="ctr" indent="0" lvl="6" marL="0">
+              <a:spcBef>
+                <a:spcPts val="0"/>
+              </a:spcBef>
+              <a:buNone/>
+              <a:defRPr sz="700">
+                <a:solidFill>
+                  <a:schemeClr val="dk1"/>
+                </a:solidFill>
+                <a:latin typeface="Arial"/>
+                <a:ea typeface="Arial"/>
+                <a:cs typeface="Arial"/>
+                <a:sym typeface="Arial"/>
+              </a:defRPr>
+            </a:lvl7pPr>
+            <a:lvl8pPr algn="ctr" indent="0" lvl="7" marL="0">
+              <a:spcBef>
+                <a:spcPts val="0"/>
+              </a:spcBef>
+              <a:buNone/>
+              <a:defRPr sz="700">
+                <a:solidFill>
+                  <a:schemeClr val="dk1"/>
+                </a:solidFill>
+                <a:latin typeface="Arial"/>
+                <a:ea typeface="Arial"/>
+                <a:cs typeface="Arial"/>
+                <a:sym typeface="Arial"/>
+              </a:defRPr>
+            </a:lvl8pPr>
+            <a:lvl9pPr algn="ctr" indent="0" lvl="8" marL="0">
+              <a:spcBef>
+                <a:spcPts val="0"/>
+              </a:spcBef>
+              <a:buNone/>
+              <a:defRPr sz="700">
+                <a:solidFill>
+                  <a:schemeClr val="dk1"/>
+                </a:solidFill>
+                <a:latin typeface="Arial"/>
+                <a:ea typeface="Arial"/>
+                <a:cs typeface="Arial"/>
+                <a:sym typeface="Arial"/>
+              </a:defRPr>
+            </a:lvl9pPr>
+          </a:lstStyle>
+          <a:p>
+            <a:pPr algn="ctr" indent="0" lvl="0" marL="0" rtl="0">
+              <a:spcBef>
+                <a:spcPts val="0"/>
+              </a:spcBef>
+              <a:spcAft>
+                <a:spcPts val="0"/>
+              </a:spcAft>
+              <a:buNone/>
+            </a:pPr>
+            <a:fld id="{00000000-1234-1234-1234-123412341234}" type="slidenum">
+              <a:rPr lang="en-US"/>
+              <a:t>‹#›</a:t>
+            </a:fld>
+            <a:endParaRPr/>
+          </a:p>
+        </p:txBody>
+      </p:sp>
+    </p:spTree>
+  </p:cSld>
+</p:sld>
+</file>
+
+<file path=ppt/slides/slide31.xml><?xml version="1.0" encoding="utf-8"?>
+<p:sld xmlns:a="http://schemas.openxmlformats.org/drawingml/2006/main" xmlns:r="http://schemas.openxmlformats.org/officeDocument/2006/relationships" xmlns:p="http://schemas.openxmlformats.org/presentationml/2006/main">
+  <p:cSld>
+    <p:spTree>
+      <p:nvGrpSpPr>
+        <p:cNvPr id="134" name="Shape 134"/>
+        <p:cNvGrpSpPr/>
+        <p:nvPr/>
+      </p:nvGrpSpPr>
+      <p:grpSpPr>
+        <a:xfrm>
+          <a:off x="0" y="0"/>
+          <a:ext cx="0" cy="0"/>
+          <a:chOff x="0" y="0"/>
+          <a:chExt cx="0" cy="0"/>
+        </a:xfrm>
+      </p:grpSpPr>
+      <p:sp>
+        <p:nvSpPr>
+          <p:cNvPr id="142" name="Google Shape;142;p23"/>
+          <p:cNvSpPr txBox="1"/>
+          <p:nvPr>
+            <p:ph type="title"/>
+          </p:nvPr>
+        </p:nvSpPr>
+        <p:spPr>
+          <a:xfrm>
+            <a:off x="774145" y="223964"/>
+            <a:ext cx="10579655" cy="785896"/>
+          </a:xfrm>
+          <a:prstGeom prst="rect">
+            <a:avLst/>
+          </a:prstGeom>
+          <a:noFill/>
+          <a:ln>
+            <a:noFill/>
+          </a:ln>
+        </p:spPr>
+        <p:txBody>
+          <a:bodyPr/>
+          <a:lstStyle/>
+          <a:p>
+            <a:pPr lvl="0" indent="0" marL="0">
+              <a:buNone/>
+            </a:pPr>
+            <a:r>
+              <a:rPr/>
+              <a:t>Tra nhanh số liệu</a:t>
             </a:r>
           </a:p>
         </p:txBody>
@@ -52727,8 +53323,8 @@
           </p:nvPr>
         </p:nvGraphicFramePr>
         <p:xfrm>
-          <a:off x="5156200" y="190500"/>
-          <a:ext cx="6235700" cy="5969000"/>
+          <a:off x="762000" y="1231900"/>
+          <a:ext cx="10579100" cy="4940300"/>
         </p:xfrm>
         <a:graphic>
           <a:graphicData uri="http://schemas.openxmlformats.org/drawingml/2006/table">
@@ -52737,37 +53333,9 @@
                 <a:tableStyleId>{45BEF19B-5B1D-4A26-B267-ECC71EF7E2D4}</a:tableStyleId>
               </a:tblPr>
               <a:tblGrid>
-                <a:gridCol w="3111500"/>
-                <a:gridCol w="3111500"/>
+                <a:gridCol w="5283200"/>
+                <a:gridCol w="5283200"/>
               </a:tblGrid>
-              <a:tr h="0">
-                <a:tc>
-                  <a:txBody>
-                    <a:bodyPr/>
-                    <a:lstStyle/>
-                    <a:p>
-                      <a:pPr lvl="0" indent="0" marL="0">
-                        <a:buNone/>
-                      </a:pPr>
-                      <a:r>
-                        <a:rPr/>
-                        <a:t>Tra nhanh</a:t>
-                      </a:r>
-                    </a:p>
-                  </a:txBody>
-                  <a:tcPr/>
-                </a:tc>
-                <a:tc>
-                  <a:txBody>
-                    <a:bodyPr/>
-                    <a:lstStyle/>
-                    <a:p>
-                      <a:endParaRPr/>
-                    </a:p>
-                  </a:txBody>
-                  <a:tcPr/>
-                </a:tc>
-              </a:tr>
               <a:tr h="0">
                 <a:tc>
                   <a:txBody>
@@ -52793,8 +53361,20 @@
                         <a:buNone/>
                       </a:pPr>
                       <a:r>
+                        <a:rPr b="1"/>
+                        <a:t>15.133</a:t>
+                      </a:r>
+                      <a:r>
                         <a:rPr/>
-                        <a:t>15.133 ảnh · 15.977 khung · 6 nguồn</a:t>
+                        <a:t> ảnh · </a:t>
+                      </a:r>
+                      <a:r>
+                        <a:rPr b="1"/>
+                        <a:t>15.977</a:t>
+                      </a:r>
+                      <a:r>
+                        <a:rPr/>
+                        <a:t> khung · 6 nguồn</a:t>
                       </a:r>
                     </a:p>
                   </a:txBody>
@@ -52826,7 +53406,17 @@
                       </a:pPr>
                       <a:r>
                         <a:rPr/>
-                        <a:t>YOLO11n · imgsz 640 · 20 epoch</a:t>
+                        <a:t>YOLO11n · </a:t>
+                      </a:r>
+                      <a:r>
+                        <a:rPr>
+                          <a:latin typeface="Courier"/>
+                        </a:rPr>
+                        <a:t>imgsz 640</a:t>
+                      </a:r>
+                      <a:r>
+                        <a:rPr/>
+                        <a:t> · 20 epoch · CPU</a:t>
                       </a:r>
                     </a:p>
                   </a:txBody>
@@ -52887,7 +53477,7 @@
                       </a:pPr>
                       <a:r>
                         <a:rPr/>
-                        <a:t>Đọc chuỗi</a:t>
+                        <a:t>Đúng từng ký tự</a:t>
                       </a:r>
                     </a:p>
                   </a:txBody>
@@ -52901,28 +53491,8 @@
                         <a:buNone/>
                       </a:pPr>
                       <a:r>
-                        <a:rPr/>
-                        <a:t>A4 </a:t>
-                      </a:r>
-                      <a:r>
                         <a:rPr b="1"/>
                         <a:t>0,9454</a:t>
-                      </a:r>
-                      <a:r>
-                        <a:rPr/>
-                        <a:t> · A6 </a:t>
-                      </a:r>
-                      <a:r>
-                        <a:rPr b="1"/>
-                        <a:t>0,7512</a:t>
-                      </a:r>
-                      <a:r>
-                        <a:rPr/>
-                        <a:t> · A7 </a:t>
-                      </a:r>
-                      <a:r>
-                        <a:rPr b="1"/>
-                        <a:t>0,5552</a:t>
                       </a:r>
                     </a:p>
                   </a:txBody>
@@ -52939,7 +53509,7 @@
                       </a:pPr>
                       <a:r>
                         <a:rPr/>
-                        <a:t>Độ trễ p95</a:t>
+                        <a:t>Đúng cả chuỗi</a:t>
                       </a:r>
                     </a:p>
                   </a:txBody>
@@ -52954,15 +53524,615 @@
                       </a:pPr>
                       <a:r>
                         <a:rPr b="1"/>
-                        <a:t>1.143 ms</a:t>
+                        <a:t>0,7512</a:t>
                       </a:r>
                       <a:r>
                         <a:rPr/>
-                        <a:t> trên CPU </a:t>
+                        <a:t> </a:t>
                       </a:r>
                       <a:r>
                         <a:rPr i="1"/>
-                        <a:t>(p50 406 ms)</a:t>
+                        <a:t>(1 dòng 0,954 · 2 dòng 0,700)</a:t>
+                      </a:r>
+                    </a:p>
+                  </a:txBody>
+                </a:tc>
+              </a:tr>
+              <a:tr h="0">
+                <a:tc>
+                  <a:txBody>
+                    <a:bodyPr/>
+                    <a:lstStyle/>
+                    <a:p>
+                      <a:pPr lvl="0" indent="0" marL="0">
+                        <a:buNone/>
+                      </a:pPr>
+                      <a:r>
+                        <a:rPr/>
+                        <a:t>Độ trễ</a:t>
+                      </a:r>
+                    </a:p>
+                  </a:txBody>
+                </a:tc>
+                <a:tc>
+                  <a:txBody>
+                    <a:bodyPr/>
+                    <a:lstStyle/>
+                    <a:p>
+                      <a:pPr lvl="0" indent="0" marL="0">
+                        <a:buNone/>
+                      </a:pPr>
+                      <a:r>
+                        <a:rPr/>
+                        <a:t>p50 </a:t>
+                      </a:r>
+                      <a:r>
+                        <a:rPr b="1"/>
+                        <a:t>406 ms</a:t>
+                      </a:r>
+                      <a:r>
+                        <a:rPr/>
+                        <a:t> · p95 </a:t>
+                      </a:r>
+                      <a:r>
+                        <a:rPr b="1"/>
+                        <a:t>1.143 ms</a:t>
+                      </a:r>
+                    </a:p>
+                  </a:txBody>
+                </a:tc>
+              </a:tr>
+              <a:tr h="0">
+                <a:tc>
+                  <a:txBody>
+                    <a:bodyPr/>
+                    <a:lstStyle/>
+                    <a:p>
+                      <a:pPr lvl="0" indent="0" marL="0">
+                        <a:buNone/>
+                      </a:pPr>
+                      <a:r>
+                        <a:rPr/>
+                        <a:t>Kiểm thử</a:t>
+                      </a:r>
+                    </a:p>
+                  </a:txBody>
+                </a:tc>
+                <a:tc>
+                  <a:txBody>
+                    <a:bodyPr/>
+                    <a:lstStyle/>
+                    <a:p>
+                      <a:pPr lvl="0" indent="0" marL="0">
+                        <a:buNone/>
+                      </a:pPr>
+                      <a:r>
+                        <a:rPr b="1"/>
+                        <a:t>1.000</a:t>
+                      </a:r>
+                      <a:r>
+                        <a:rPr/>
+                        <a:t> đạt · bao phủ </a:t>
+                      </a:r>
+                      <a:r>
+                        <a:rPr b="1"/>
+                        <a:t>87,7%</a:t>
+                      </a:r>
+                    </a:p>
+                  </a:txBody>
+                </a:tc>
+              </a:tr>
+            </a:tbl>
+          </a:graphicData>
+        </a:graphic>
+      </p:graphicFrame>
+      <p:sp>
+        <p:nvSpPr>
+          <p:cNvPr id="155" name="Google Shape;155;p23"/>
+          <p:cNvSpPr txBox="1"/>
+          <p:nvPr>
+            <p:ph idx="12" type="sldNum"/>
+          </p:nvPr>
+        </p:nvSpPr>
+        <p:spPr>
+          <a:xfrm>
+            <a:off x="58380" y="6508358"/>
+            <a:ext cx="349642" cy="349642"/>
+          </a:xfrm>
+          <a:prstGeom prst="rect">
+            <a:avLst/>
+          </a:prstGeom>
+          <a:noFill/>
+          <a:ln>
+            <a:noFill/>
+          </a:ln>
+        </p:spPr>
+        <p:txBody>
+          <a:bodyPr anchor="ctr" anchorCtr="0" bIns="45700" lIns="91425" rIns="91425" spcFirstLastPara="1" tIns="45700" wrap="square">
+            <a:noAutofit/>
+          </a:bodyPr>
+          <a:lstStyle>
+            <a:lvl1pPr algn="ctr" indent="0" lvl="0" marL="0">
+              <a:spcBef>
+                <a:spcPts val="0"/>
+              </a:spcBef>
+              <a:buNone/>
+              <a:defRPr sz="700">
+                <a:solidFill>
+                  <a:schemeClr val="dk1"/>
+                </a:solidFill>
+                <a:latin typeface="Arial"/>
+                <a:ea typeface="Arial"/>
+                <a:cs typeface="Arial"/>
+                <a:sym typeface="Arial"/>
+              </a:defRPr>
+            </a:lvl1pPr>
+            <a:lvl2pPr algn="ctr" indent="0" lvl="1" marL="0">
+              <a:spcBef>
+                <a:spcPts val="0"/>
+              </a:spcBef>
+              <a:buNone/>
+              <a:defRPr sz="700">
+                <a:solidFill>
+                  <a:schemeClr val="dk1"/>
+                </a:solidFill>
+                <a:latin typeface="Arial"/>
+                <a:ea typeface="Arial"/>
+                <a:cs typeface="Arial"/>
+                <a:sym typeface="Arial"/>
+              </a:defRPr>
+            </a:lvl2pPr>
+            <a:lvl3pPr algn="ctr" indent="0" lvl="2" marL="0">
+              <a:spcBef>
+                <a:spcPts val="0"/>
+              </a:spcBef>
+              <a:buNone/>
+              <a:defRPr sz="700">
+                <a:solidFill>
+                  <a:schemeClr val="dk1"/>
+                </a:solidFill>
+                <a:latin typeface="Arial"/>
+                <a:ea typeface="Arial"/>
+                <a:cs typeface="Arial"/>
+                <a:sym typeface="Arial"/>
+              </a:defRPr>
+            </a:lvl3pPr>
+            <a:lvl4pPr algn="ctr" indent="0" lvl="3" marL="0">
+              <a:spcBef>
+                <a:spcPts val="0"/>
+              </a:spcBef>
+              <a:buNone/>
+              <a:defRPr sz="700">
+                <a:solidFill>
+                  <a:schemeClr val="dk1"/>
+                </a:solidFill>
+                <a:latin typeface="Arial"/>
+                <a:ea typeface="Arial"/>
+                <a:cs typeface="Arial"/>
+                <a:sym typeface="Arial"/>
+              </a:defRPr>
+            </a:lvl4pPr>
+            <a:lvl5pPr algn="ctr" indent="0" lvl="4" marL="0">
+              <a:spcBef>
+                <a:spcPts val="0"/>
+              </a:spcBef>
+              <a:buNone/>
+              <a:defRPr sz="700">
+                <a:solidFill>
+                  <a:schemeClr val="dk1"/>
+                </a:solidFill>
+                <a:latin typeface="Arial"/>
+                <a:ea typeface="Arial"/>
+                <a:cs typeface="Arial"/>
+                <a:sym typeface="Arial"/>
+              </a:defRPr>
+            </a:lvl5pPr>
+            <a:lvl6pPr algn="ctr" indent="0" lvl="5" marL="0">
+              <a:spcBef>
+                <a:spcPts val="0"/>
+              </a:spcBef>
+              <a:buNone/>
+              <a:defRPr sz="700">
+                <a:solidFill>
+                  <a:schemeClr val="dk1"/>
+                </a:solidFill>
+                <a:latin typeface="Arial"/>
+                <a:ea typeface="Arial"/>
+                <a:cs typeface="Arial"/>
+                <a:sym typeface="Arial"/>
+              </a:defRPr>
+            </a:lvl6pPr>
+            <a:lvl7pPr algn="ctr" indent="0" lvl="6" marL="0">
+              <a:spcBef>
+                <a:spcPts val="0"/>
+              </a:spcBef>
+              <a:buNone/>
+              <a:defRPr sz="700">
+                <a:solidFill>
+                  <a:schemeClr val="dk1"/>
+                </a:solidFill>
+                <a:latin typeface="Arial"/>
+                <a:ea typeface="Arial"/>
+                <a:cs typeface="Arial"/>
+                <a:sym typeface="Arial"/>
+              </a:defRPr>
+            </a:lvl7pPr>
+            <a:lvl8pPr algn="ctr" indent="0" lvl="7" marL="0">
+              <a:spcBef>
+                <a:spcPts val="0"/>
+              </a:spcBef>
+              <a:buNone/>
+              <a:defRPr sz="700">
+                <a:solidFill>
+                  <a:schemeClr val="dk1"/>
+                </a:solidFill>
+                <a:latin typeface="Arial"/>
+                <a:ea typeface="Arial"/>
+                <a:cs typeface="Arial"/>
+                <a:sym typeface="Arial"/>
+              </a:defRPr>
+            </a:lvl8pPr>
+            <a:lvl9pPr algn="ctr" indent="0" lvl="8" marL="0">
+              <a:spcBef>
+                <a:spcPts val="0"/>
+              </a:spcBef>
+              <a:buNone/>
+              <a:defRPr sz="700">
+                <a:solidFill>
+                  <a:schemeClr val="dk1"/>
+                </a:solidFill>
+                <a:latin typeface="Arial"/>
+                <a:ea typeface="Arial"/>
+                <a:cs typeface="Arial"/>
+                <a:sym typeface="Arial"/>
+              </a:defRPr>
+            </a:lvl9pPr>
+          </a:lstStyle>
+          <a:p>
+            <a:pPr algn="ctr" indent="0" lvl="0" marL="0" rtl="0">
+              <a:spcBef>
+                <a:spcPts val="0"/>
+              </a:spcBef>
+              <a:spcAft>
+                <a:spcPts val="0"/>
+              </a:spcAft>
+              <a:buNone/>
+            </a:pPr>
+            <a:fld id="{00000000-1234-1234-1234-123412341234}" type="slidenum">
+              <a:rPr lang="en-US"/>
+              <a:t>‹#›</a:t>
+            </a:fld>
+            <a:endParaRPr/>
+          </a:p>
+        </p:txBody>
+      </p:sp>
+    </p:spTree>
+  </p:cSld>
+</p:sld>
+</file>
+
+<file path=ppt/slides/slide32.xml><?xml version="1.0" encoding="utf-8"?>
+<p:sld xmlns:a="http://schemas.openxmlformats.org/drawingml/2006/main" xmlns:r="http://schemas.openxmlformats.org/officeDocument/2006/relationships" xmlns:p="http://schemas.openxmlformats.org/presentationml/2006/main">
+  <p:cSld>
+    <p:spTree>
+      <p:nvGrpSpPr>
+        <p:cNvPr id="428" name="Shape 428"/>
+        <p:cNvGrpSpPr/>
+        <p:nvPr/>
+      </p:nvGrpSpPr>
+      <p:grpSpPr>
+        <a:xfrm>
+          <a:off x="0" y="0"/>
+          <a:ext cx="0" cy="0"/>
+          <a:chOff x="0" y="0"/>
+          <a:chExt cx="0" cy="0"/>
+        </a:xfrm>
+      </p:grpSpPr>
+      <p:sp>
+        <p:nvSpPr>
+          <p:cNvPr id="436" name="Google Shape;436;p31"/>
+          <p:cNvSpPr txBox="1"/>
+          <p:nvPr>
+            <p:ph type="title"/>
+          </p:nvPr>
+        </p:nvSpPr>
+        <p:spPr>
+          <a:xfrm>
+            <a:off x="771525" y="200025"/>
+            <a:ext cx="10582275" cy="790575"/>
+          </a:xfrm>
+          <a:prstGeom prst="rect">
+            <a:avLst/>
+          </a:prstGeom>
+          <a:noFill/>
+          <a:ln>
+            <a:noFill/>
+          </a:ln>
+        </p:spPr>
+        <p:txBody>
+          <a:bodyPr/>
+          <a:lstStyle/>
+          <a:p>
+            <a:pPr lvl="0" indent="0" marL="0">
+              <a:buNone/>
+            </a:pPr>
+            <a:r>
+              <a:rPr/>
+              <a:t>Fine-tune bộ nhận dạng: có và không</a:t>
+            </a:r>
+          </a:p>
+        </p:txBody>
+      </p:sp>
+      <p:sp>
+        <p:nvSpPr>
+          <p:cNvPr id="437" name="Google Shape;437;p31"/>
+          <p:cNvSpPr txBox="1"/>
+          <p:nvPr>
+            <p:ph idx="2" sz="half" type="body"/>
+          </p:nvPr>
+        </p:nvSpPr>
+        <p:spPr/>
+        <p:txBody>
+          <a:bodyPr/>
+          <a:lstStyle/>
+          <a:p>
+            <a:pPr lvl="0" indent="0" marL="0">
+              <a:buNone/>
+            </a:pPr>
+            <a:r>
+              <a:rPr/>
+              <a:t>Val acc </a:t>
+            </a:r>
+            <a:r>
+              <a:rPr b="1"/>
+              <a:t>0,8809</a:t>
+            </a:r>
+            <a:r>
+              <a:rPr/>
+              <a:t> nhưng chạy thật lại </a:t>
+            </a:r>
+            <a:r>
+              <a:rPr b="1"/>
+              <a:t>kém hơn</a:t>
+            </a:r>
+            <a:r>
+              <a:rPr/>
+              <a:t>: PaddleOCR </a:t>
+            </a:r>
+            <a:r>
+              <a:rPr b="1"/>
+              <a:t>đánh giá</a:t>
+            </a:r>
+            <a:r>
+              <a:rPr/>
+              <a:t> bằng nguyên ảnh, hệ thống </a:t>
+            </a:r>
+            <a:r>
+              <a:rPr b="1"/>
+              <a:t>chạy</a:t>
+            </a:r>
+            <a:r>
+              <a:rPr/>
+              <a:t> bằng cắt mảnh</a:t>
+            </a:r>
+          </a:p>
+        </p:txBody>
+      </p:sp>
+      <p:graphicFrame>
+        <p:nvGraphicFramePr>
+          <p:cNvPr id="6" name="Content Placeholder 5"/>
+          <p:cNvGraphicFramePr>
+            <a:graphicFrameLocks noGrp="1"/>
+          </p:cNvGraphicFramePr>
+          <p:nvPr>
+            <p:ph idx="1"/>
+          </p:nvPr>
+        </p:nvGraphicFramePr>
+        <p:xfrm>
+          <a:off x="762000" y="2209800"/>
+          <a:ext cx="10579100" cy="3962400"/>
+        </p:xfrm>
+        <a:graphic>
+          <a:graphicData uri="http://schemas.openxmlformats.org/drawingml/2006/table">
+            <a:tbl>
+              <a:tblPr firstRow="1" bandRow="1">
+                <a:tableStyleId>{45BEF19B-5B1D-4A26-B267-ECC71EF7E2D4}</a:tableStyleId>
+              </a:tblPr>
+              <a:tblGrid>
+                <a:gridCol w="3517900"/>
+                <a:gridCol w="3517900"/>
+                <a:gridCol w="3517900"/>
+              </a:tblGrid>
+              <a:tr h="0">
+                <a:tc>
+                  <a:txBody>
+                    <a:bodyPr/>
+                    <a:lstStyle/>
+                    <a:p>
+                      <a:pPr lvl="0" indent="0" marL="0">
+                        <a:buNone/>
+                      </a:pPr>
+                      <a:r>
+                        <a:rPr/>
+                        <a:t>Cấu hình</a:t>
+                      </a:r>
+                    </a:p>
+                  </a:txBody>
+                  <a:tcPr/>
+                </a:tc>
+                <a:tc>
+                  <a:txBody>
+                    <a:bodyPr/>
+                    <a:lstStyle/>
+                    <a:p>
+                      <a:pPr lvl="0" indent="0" marL="0" algn="r">
+                        <a:buNone/>
+                      </a:pPr>
+                      <a:r>
+                        <a:rPr/>
+                        <a:t>Đúng cả chuỗi</a:t>
+                      </a:r>
+                    </a:p>
+                  </a:txBody>
+                  <a:tcPr/>
+                </a:tc>
+                <a:tc>
+                  <a:txBody>
+                    <a:bodyPr/>
+                    <a:lstStyle/>
+                    <a:p>
+                      <a:pPr lvl="0" indent="0" marL="0" algn="r">
+                        <a:buNone/>
+                      </a:pPr>
+                      <a:r>
+                        <a:rPr/>
+                        <a:t>Bộ demo</a:t>
+                      </a:r>
+                    </a:p>
+                  </a:txBody>
+                  <a:tcPr/>
+                </a:tc>
+              </a:tr>
+              <a:tr h="0">
+                <a:tc>
+                  <a:txBody>
+                    <a:bodyPr/>
+                    <a:lstStyle/>
+                    <a:p>
+                      <a:pPr lvl="0" indent="0" marL="0">
+                        <a:buNone/>
+                      </a:pPr>
+                      <a:r>
+                        <a:rPr b="1"/>
+                        <a:t>Model gốc</a:t>
+                      </a:r>
+                      <a:r>
+                        <a:rPr/>
+                        <a:t> — bản giao hàng</a:t>
+                      </a:r>
+                    </a:p>
+                  </a:txBody>
+                </a:tc>
+                <a:tc>
+                  <a:txBody>
+                    <a:bodyPr/>
+                    <a:lstStyle/>
+                    <a:p>
+                      <a:pPr lvl="0" indent="0" marL="0" algn="r">
+                        <a:buNone/>
+                      </a:pPr>
+                      <a:r>
+                        <a:rPr b="1"/>
+                        <a:t>0,7512</a:t>
+                      </a:r>
+                    </a:p>
+                  </a:txBody>
+                </a:tc>
+                <a:tc>
+                  <a:txBody>
+                    <a:bodyPr/>
+                    <a:lstStyle/>
+                    <a:p>
+                      <a:pPr lvl="0" indent="0" marL="0" algn="r">
+                        <a:buNone/>
+                      </a:pPr>
+                      <a:r>
+                        <a:rPr b="1"/>
+                        <a:t>17/22</a:t>
+                      </a:r>
+                    </a:p>
+                  </a:txBody>
+                </a:tc>
+              </a:tr>
+              <a:tr h="0">
+                <a:tc>
+                  <a:txBody>
+                    <a:bodyPr/>
+                    <a:lstStyle/>
+                    <a:p>
+                      <a:pPr lvl="0" indent="0" marL="0">
+                        <a:buNone/>
+                      </a:pPr>
+                      <a:r>
+                        <a:rPr/>
+                        <a:t>Fine-tune, giữ bước dò chữ</a:t>
+                      </a:r>
+                    </a:p>
+                  </a:txBody>
+                </a:tc>
+                <a:tc>
+                  <a:txBody>
+                    <a:bodyPr/>
+                    <a:lstStyle/>
+                    <a:p>
+                      <a:pPr lvl="0" indent="0" marL="0" algn="r">
+                        <a:buNone/>
+                      </a:pPr>
+                      <a:r>
+                        <a:rPr/>
+                        <a:t>0,6762</a:t>
+                      </a:r>
+                    </a:p>
+                  </a:txBody>
+                </a:tc>
+                <a:tc>
+                  <a:txBody>
+                    <a:bodyPr/>
+                    <a:lstStyle/>
+                    <a:p>
+                      <a:pPr lvl="0" indent="0" marL="0" algn="r">
+                        <a:buNone/>
+                      </a:pPr>
+                      <a:r>
+                        <a:rPr/>
+                        <a:t>14/22</a:t>
+                      </a:r>
+                    </a:p>
+                  </a:txBody>
+                </a:tc>
+              </a:tr>
+              <a:tr h="0">
+                <a:tc>
+                  <a:txBody>
+                    <a:bodyPr/>
+                    <a:lstStyle/>
+                    <a:p>
+                      <a:pPr lvl="0" indent="0" marL="0">
+                        <a:buNone/>
+                      </a:pPr>
+                      <a:r>
+                        <a:rPr/>
+                        <a:t>Fine-tune, bỏ bước dò chữ</a:t>
+                      </a:r>
+                    </a:p>
+                  </a:txBody>
+                </a:tc>
+                <a:tc>
+                  <a:txBody>
+                    <a:bodyPr/>
+                    <a:lstStyle/>
+                    <a:p>
+                      <a:pPr lvl="0" indent="0" marL="0" algn="r">
+                        <a:buNone/>
+                      </a:pPr>
+                      <a:r>
+                        <a:rPr b="1"/>
+                        <a:t>0,8758</a:t>
+                      </a:r>
+                    </a:p>
+                  </a:txBody>
+                </a:tc>
+                <a:tc>
+                  <a:txBody>
+                    <a:bodyPr/>
+                    <a:lstStyle/>
+                    <a:p>
+                      <a:pPr lvl="0" indent="0" marL="0" algn="r">
+                        <a:buNone/>
+                      </a:pPr>
+                      <a:r>
+                        <a:rPr/>
+                        <a:t>15/22</a:t>
                       </a:r>
                     </a:p>
                   </a:txBody>
@@ -53504,8 +54674,8 @@
         </p:nvSpPr>
         <p:spPr>
           <a:xfrm>
-            <a:off x="774146" y="202009"/>
-            <a:ext cx="3932227" cy="1698043"/>
+            <a:off x="771525" y="200025"/>
+            <a:ext cx="10582275" cy="790575"/>
           </a:xfrm>
           <a:prstGeom prst="rect">
             <a:avLst/>
@@ -53567,8 +54737,8 @@
           </p:nvPr>
         </p:nvGraphicFramePr>
         <p:xfrm>
-          <a:off x="5156200" y="190500"/>
-          <a:ext cx="6235700" cy="5969000"/>
+          <a:off x="762000" y="2209800"/>
+          <a:ext cx="10579100" cy="3962400"/>
         </p:xfrm>
         <a:graphic>
           <a:graphicData uri="http://schemas.openxmlformats.org/drawingml/2006/table">
@@ -53577,8 +54747,8 @@
                 <a:tableStyleId>{45BEF19B-5B1D-4A26-B267-ECC71EF7E2D4}</a:tableStyleId>
               </a:tblPr>
               <a:tblGrid>
-                <a:gridCol w="3111500"/>
-                <a:gridCol w="3111500"/>
+                <a:gridCol w="5283200"/>
+                <a:gridCol w="5283200"/>
               </a:tblGrid>
               <a:tr h="0">
                 <a:tc>
@@ -53970,8 +55140,8 @@
         </p:nvSpPr>
         <p:spPr>
           <a:xfrm>
-            <a:off x="774146" y="202009"/>
-            <a:ext cx="3932227" cy="1698043"/>
+            <a:off x="771525" y="200025"/>
+            <a:ext cx="10582275" cy="790575"/>
           </a:xfrm>
           <a:prstGeom prst="rect">
             <a:avLst/>
@@ -54034,23 +55204,11 @@
             </a:pPr>
             <a:r>
               <a:rPr/>
-              <a:t>Tỉ lệ </a:t>
-            </a:r>
-            <a:r>
-              <a:rPr b="1"/>
-              <a:t>đo thật</a:t>
-            </a:r>
-            <a:r>
-              <a:rPr/>
-              <a:t> lệch khỏi chuẩn nhưng vẫn đúng phía ngưỡng — nên ngưỡng đặt ở </a:t>
+              <a:t>Tỉ lệ đo thật lệch khỏi chuẩn nhưng vẫn đúng phía ngưỡng </a:t>
             </a:r>
             <a:r>
               <a:rPr b="1"/>
               <a:t>2,5</a:t>
-            </a:r>
-            <a:r>
-              <a:rPr/>
-              <a:t>, giữa vùng trống</a:t>
             </a:r>
           </a:p>
         </p:txBody>
@@ -54071,8 +55229,8 @@
         </p:blipFill>
         <p:spPr bwMode="auto">
           <a:xfrm>
-            <a:off x="5156200" y="292100"/>
-            <a:ext cx="6235700" cy="5778500"/>
+            <a:off x="3911600" y="2209800"/>
+            <a:ext cx="4279900" cy="3962400"/>
           </a:xfrm>
           <a:prstGeom prst="rect">
             <a:avLst/>
@@ -54619,8 +55777,8 @@
         </p:nvSpPr>
         <p:spPr>
           <a:xfrm>
-            <a:off x="774146" y="202009"/>
-            <a:ext cx="3932227" cy="1698043"/>
+            <a:off x="771525" y="200025"/>
+            <a:ext cx="10582275" cy="790575"/>
           </a:xfrm>
           <a:prstGeom prst="rect">
             <a:avLst/>
@@ -54691,8 +55849,8 @@
         </p:blipFill>
         <p:spPr bwMode="auto">
           <a:xfrm>
-            <a:off x="5156200" y="850900"/>
-            <a:ext cx="6235700" cy="4635500"/>
+            <a:off x="3390900" y="2209800"/>
+            <a:ext cx="5334000" cy="3962400"/>
           </a:xfrm>
           <a:prstGeom prst="rect">
             <a:avLst/>
@@ -54917,8 +56075,8 @@
         </p:nvSpPr>
         <p:spPr>
           <a:xfrm>
-            <a:off x="774146" y="202009"/>
-            <a:ext cx="3932227" cy="1698043"/>
+            <a:off x="771525" y="200025"/>
+            <a:ext cx="10582275" cy="790575"/>
           </a:xfrm>
           <a:prstGeom prst="rect">
             <a:avLst/>
@@ -54937,7 +56095,7 @@
             </a:pPr>
             <a:r>
               <a:rPr/>
-              <a:t>Cơ sở dữ liệu — một cột làm nên đóng góp</a:t>
+              <a:t>Pipeline AI</a:t>
             </a:r>
           </a:p>
         </p:txBody>
@@ -54960,225 +56118,66 @@
             </a:pPr>
             <a:r>
               <a:rPr/>
-              <a:t>Lưu </a:t>
+              <a:t>Nhánh </a:t>
             </a:r>
             <a:r>
               <a:rPr b="1"/>
-              <a:t>cả hai</a:t>
+              <a:t>đỏ</a:t>
             </a:r>
             <a:r>
               <a:rPr/>
-              <a:t> chuỗi trên </a:t>
+              <a:t> là đóng góp kỹ thuật lõi</a:t>
+            </a:r>
+          </a:p>
+          <a:p>
+            <a:pPr lvl="0" indent="0" marL="0">
+              <a:buNone/>
+            </a:pPr>
+            <a:r>
+              <a:rPr/>
+              <a:t>Không thấy biển ⇒ trả rỗng, </a:t>
             </a:r>
             <a:r>
               <a:rPr b="1"/>
-              <a:t>cùng một bản ghi</a:t>
+              <a:t>HTTP 200</a:t>
             </a:r>
             <a:r>
               <a:rPr/>
-              <a:t> — không có </a:t>
-            </a:r>
-            <a:r>
-              <a:rPr>
-                <a:latin typeface="Courier"/>
-              </a:rPr>
-              <a:t>raw_ocr_text</a:t>
-            </a:r>
-            <a:r>
-              <a:rPr/>
-              <a:t> thì </a:t>
-            </a:r>
-            <a:r>
-              <a:rPr b="1"/>
-              <a:t>không đo được</a:t>
-            </a:r>
-            <a:r>
-              <a:rPr/>
-              <a:t> đóng góp của hậu xử lý</a:t>
+              <a:t> — không phải lỗi</a:t>
             </a:r>
           </a:p>
         </p:txBody>
       </p:sp>
-      <p:graphicFrame>
-        <p:nvGraphicFramePr>
-          <p:cNvPr id="6" name="Content Placeholder 5"/>
-          <p:cNvGraphicFramePr>
-            <a:graphicFrameLocks noGrp="1"/>
-          </p:cNvGraphicFramePr>
-          <p:nvPr>
-            <p:ph idx="1"/>
-          </p:nvPr>
-        </p:nvGraphicFramePr>
-        <p:xfrm>
-          <a:off x="5156200" y="190500"/>
-          <a:ext cx="6235700" cy="5969000"/>
-        </p:xfrm>
-        <a:graphic>
-          <a:graphicData uri="http://schemas.openxmlformats.org/drawingml/2006/table">
-            <a:tbl>
-              <a:tblPr firstRow="1" bandRow="1">
-                <a:tableStyleId>{45BEF19B-5B1D-4A26-B267-ECC71EF7E2D4}</a:tableStyleId>
-              </a:tblPr>
-              <a:tblGrid>
-                <a:gridCol w="3111500"/>
-                <a:gridCol w="3111500"/>
-              </a:tblGrid>
-              <a:tr h="0">
-                <a:tc>
-                  <a:txBody>
-                    <a:bodyPr/>
-                    <a:lstStyle/>
-                    <a:p>
-                      <a:pPr lvl="0" indent="0" marL="0">
-                        <a:buNone/>
-                      </a:pPr>
-                      <a:r>
-                        <a:rPr/>
-                        <a:t>Cột</a:t>
-                      </a:r>
-                    </a:p>
-                  </a:txBody>
-                  <a:tcPr/>
-                </a:tc>
-                <a:tc>
-                  <a:txBody>
-                    <a:bodyPr/>
-                    <a:lstStyle/>
-                    <a:p>
-                      <a:pPr lvl="0" indent="0" marL="0">
-                        <a:buNone/>
-                      </a:pPr>
-                      <a:r>
-                        <a:rPr/>
-                        <a:t>Nội dung</a:t>
-                      </a:r>
-                    </a:p>
-                  </a:txBody>
-                  <a:tcPr/>
-                </a:tc>
-              </a:tr>
-              <a:tr h="0">
-                <a:tc>
-                  <a:txBody>
-                    <a:bodyPr/>
-                    <a:lstStyle/>
-                    <a:p>
-                      <a:pPr lvl="0" indent="0" marL="0">
-                        <a:buNone/>
-                      </a:pPr>
-                      <a:r>
-                        <a:rPr>
-                          <a:latin typeface="Courier"/>
-                        </a:rPr>
-                        <a:t>raw_ocr_text</a:t>
-                      </a:r>
-                    </a:p>
-                  </a:txBody>
-                </a:tc>
-                <a:tc>
-                  <a:txBody>
-                    <a:bodyPr/>
-                    <a:lstStyle/>
-                    <a:p>
-                      <a:pPr lvl="0" indent="0" marL="0">
-                        <a:buNone/>
-                      </a:pPr>
-                      <a:r>
-                        <a:rPr/>
-                        <a:t>Chuỗi </a:t>
-                      </a:r>
-                      <a:r>
-                        <a:rPr b="1"/>
-                        <a:t>thô</a:t>
-                      </a:r>
-                      <a:r>
-                        <a:rPr/>
-                        <a:t> do PaddleOCR trả về</a:t>
-                      </a:r>
-                    </a:p>
-                  </a:txBody>
-                </a:tc>
-              </a:tr>
-              <a:tr h="0">
-                <a:tc>
-                  <a:txBody>
-                    <a:bodyPr/>
-                    <a:lstStyle/>
-                    <a:p>
-                      <a:pPr lvl="0" indent="0" marL="0">
-                        <a:buNone/>
-                      </a:pPr>
-                      <a:r>
-                        <a:rPr>
-                          <a:latin typeface="Courier"/>
-                        </a:rPr>
-                        <a:t>plate_number</a:t>
-                      </a:r>
-                    </a:p>
-                  </a:txBody>
-                </a:tc>
-                <a:tc>
-                  <a:txBody>
-                    <a:bodyPr/>
-                    <a:lstStyle/>
-                    <a:p>
-                      <a:pPr lvl="0" indent="0" marL="0">
-                        <a:buNone/>
-                      </a:pPr>
-                      <a:r>
-                        <a:rPr/>
-                        <a:t>Chuỗi </a:t>
-                      </a:r>
-                      <a:r>
-                        <a:rPr b="1"/>
-                        <a:t>sau</a:t>
-                      </a:r>
-                      <a:r>
-                        <a:rPr/>
-                        <a:t> bộ luật hậu xử lý</a:t>
-                      </a:r>
-                    </a:p>
-                  </a:txBody>
-                </a:tc>
-              </a:tr>
-              <a:tr h="0">
-                <a:tc>
-                  <a:txBody>
-                    <a:bodyPr/>
-                    <a:lstStyle/>
-                    <a:p>
-                      <a:pPr lvl="0" indent="0" marL="0">
-                        <a:buNone/>
-                      </a:pPr>
-                      <a:r>
-                        <a:rPr>
-                          <a:latin typeface="Courier"/>
-                        </a:rPr>
-                        <a:t>is_valid_format</a:t>
-                      </a:r>
-                    </a:p>
-                  </a:txBody>
-                </a:tc>
-                <a:tc>
-                  <a:txBody>
-                    <a:bodyPr/>
-                    <a:lstStyle/>
-                    <a:p>
-                      <a:pPr lvl="0" indent="0" marL="0">
-                        <a:buNone/>
-                      </a:pPr>
-                      <a:r>
-                        <a:rPr/>
-                        <a:t>Hợp quy cách Việt Nam hay không</a:t>
-                      </a:r>
-                    </a:p>
-                  </a:txBody>
-                </a:tc>
-              </a:tr>
-            </a:tbl>
-          </a:graphicData>
-        </a:graphic>
-      </p:graphicFrame>
+      <p:pic>
+        <p:nvPicPr>
+          <p:cNvPr descr="figures/fig-pipeline.png" id="0" name="Picture 1"/>
+          <p:cNvPicPr>
+            <a:picLocks noGrp="1" noChangeAspect="1"/>
+          </p:cNvPicPr>
+          <p:nvPr/>
+        </p:nvPicPr>
+        <p:blipFill>
+          <a:blip r:embed="rId2"/>
+          <a:stretch>
+            <a:fillRect/>
+          </a:stretch>
+        </p:blipFill>
+        <p:spPr bwMode="auto">
+          <a:xfrm>
+            <a:off x="3949700" y="2209800"/>
+            <a:ext cx="4203700" cy="3962400"/>
+          </a:xfrm>
+          <a:prstGeom prst="rect">
+            <a:avLst/>
+          </a:prstGeom>
+          <a:noFill/>
+          <a:ln w="9525">
+            <a:noFill/>
+            <a:headEnd/>
+            <a:tailEnd/>
+          </a:ln>
+        </p:spPr>
+      </p:pic>
       <p:sp>
         <p:nvSpPr>
           <p:cNvPr id="449" name="Google Shape;449;p31"/>

--- a/docs/slides/slides.pptx
+++ b/docs/slides/slides.pptx
@@ -46212,7 +46212,7 @@
             </a:r>
             <a:r>
               <a:rPr/>
-              <a:t> suy luận đều trên CPU, hết 10,1 giờ, không dùng GPU nào</a:t>
+              <a:t> suy luận đều trên CPU, hết 10,1 giờ</a:t>
             </a:r>
           </a:p>
         </p:txBody>
@@ -49726,7 +49726,7 @@
             </a:pPr>
             <a:r>
               <a:rPr/>
-              <a:t>Phần lớn ảnh xong dưới nửa giây; đuôi phải là những ảnh phải thử lại nhiều lượt</a:t>
+              <a:t>Phần lớn ảnh xong dưới nửa giây; đuôi phải là những ảnh thử lại nhiều lượt</a:t>
             </a:r>
           </a:p>
         </p:txBody>
@@ -53070,7 +53070,7 @@
             </a:pPr>
             <a:r>
               <a:rPr b="1"/>
-              <a:t>Em xin sẵn sàng nhận câu hỏi.</a:t>
+              <a:t>Em sẵn sàng nhận câu hỏi.</a:t>
             </a:r>
           </a:p>
         </p:txBody>
@@ -54425,7 +54425,7 @@
             </a:r>
             <a:r>
               <a:rPr b="1"/>
-              <a:t>hoàn toàn trên CPU</a:t>
+              <a:t>trên CPU</a:t>
             </a:r>
             <a:r>
               <a:rPr/>
@@ -55506,7 +55506,7 @@
             </a:r>
             <a:r>
               <a:rPr sz="2000"/>
-              <a:t> — văn bản này </a:t>
+              <a:t> — </a:t>
             </a:r>
             <a:r>
               <a:rPr sz="2000" b="1"/>

--- a/docs/slides/slides.pptx
+++ b/docs/slides/slides.pptx
@@ -37,23 +37,24 @@
     <p:sldId id="285" r:id="rId34"/>
     <p:sldId id="286" r:id="rId35"/>
     <p:sldId id="287" r:id="rId36"/>
+    <p:sldId id="288" r:id="rId37"/>
   </p:sldIdLst>
   <p:sldSz cx="12192000" cy="6858000"/>
   <p:notesSz cx="6858000" cy="9144000"/>
   <p:embeddedFontLst>
     <p:embeddedFont>
       <p:font typeface="Roboto"/>
-      <p:regular r:id="rId37"/>
-      <p:bold r:id="rId38"/>
-      <p:italic r:id="rId39"/>
-      <p:boldItalic r:id="rId40"/>
+      <p:regular r:id="rId38"/>
+      <p:bold r:id="rId39"/>
+      <p:italic r:id="rId40"/>
+      <p:boldItalic r:id="rId41"/>
     </p:embeddedFont>
     <p:embeddedFont>
       <p:font typeface="Open Sans"/>
-      <p:regular r:id="rId41"/>
-      <p:bold r:id="rId42"/>
-      <p:italic r:id="rId43"/>
-      <p:boldItalic r:id="rId44"/>
+      <p:regular r:id="rId42"/>
+      <p:bold r:id="rId43"/>
+      <p:italic r:id="rId44"/>
+      <p:boldItalic r:id="rId45"/>
     </p:embeddedFont>
   </p:embeddedFontLst>
   <p:defaultTextStyle>
@@ -287,7 +288,7 @@
   </p:defaultTextStyle>
   <p:extLst>
     <p:ext uri="GoogleSlidesCustomDataVersion2">
-      <go:slidesCustomData xmlns:go="http://customooxmlschemas.google.com/" roundtripDataSignature="AMtx7mhu5dURU4INwSlvEO7StWDXKr50jg==" r:id="rId45"/>
+      <go:slidesCustomData xmlns:go="http://customooxmlschemas.google.com/" roundtripDataSignature="AMtx7mhu5dURU4INwSlvEO7StWDXKr50jg==" r:id="rId46"/>
     </p:ext>
   </p:extLst>
 </p:presentation>
@@ -53265,6 +53266,596 @@
   <p:cSld>
     <p:spTree>
       <p:nvGrpSpPr>
+        <p:cNvPr id="428" name="Shape 428"/>
+        <p:cNvGrpSpPr/>
+        <p:nvPr/>
+      </p:nvGrpSpPr>
+      <p:grpSpPr>
+        <a:xfrm>
+          <a:off x="0" y="0"/>
+          <a:ext cx="0" cy="0"/>
+          <a:chOff x="0" y="0"/>
+          <a:chExt cx="0" cy="0"/>
+        </a:xfrm>
+      </p:grpSpPr>
+      <p:sp>
+        <p:nvSpPr>
+          <p:cNvPr id="436" name="Google Shape;436;p31"/>
+          <p:cNvSpPr txBox="1"/>
+          <p:nvPr>
+            <p:ph type="title"/>
+          </p:nvPr>
+        </p:nvSpPr>
+        <p:spPr>
+          <a:xfrm>
+            <a:off x="771525" y="200025"/>
+            <a:ext cx="10582275" cy="790575"/>
+          </a:xfrm>
+          <a:prstGeom prst="rect">
+            <a:avLst/>
+          </a:prstGeom>
+          <a:noFill/>
+          <a:ln>
+            <a:noFill/>
+          </a:ln>
+        </p:spPr>
+        <p:txBody>
+          <a:bodyPr/>
+          <a:lstStyle/>
+          <a:p>
+            <a:pPr lvl="0" indent="0" marL="0">
+              <a:buNone/>
+            </a:pPr>
+            <a:r>
+              <a:rPr/>
+              <a:t>Tài liệu tham khảo chính</a:t>
+            </a:r>
+          </a:p>
+        </p:txBody>
+      </p:sp>
+      <p:sp>
+        <p:nvSpPr>
+          <p:cNvPr id="437" name="Google Shape;437;p31"/>
+          <p:cNvSpPr txBox="1"/>
+          <p:nvPr>
+            <p:ph idx="2" sz="half" type="body"/>
+          </p:nvPr>
+        </p:nvSpPr>
+        <p:spPr/>
+        <p:txBody>
+          <a:bodyPr/>
+          <a:lstStyle/>
+          <a:p>
+            <a:pPr lvl="0" indent="0" marL="0">
+              <a:buNone/>
+            </a:pPr>
+            <a:r>
+              <a:rPr/>
+              <a:t>Đầy đủ </a:t>
+            </a:r>
+            <a:r>
+              <a:rPr b="1"/>
+              <a:t>232 mục</a:t>
+            </a:r>
+            <a:r>
+              <a:rPr/>
+              <a:t> trong </a:t>
+            </a:r>
+            <a:r>
+              <a:rPr>
+                <a:latin typeface="Courier"/>
+              </a:rPr>
+              <a:t>docs/references.bib</a:t>
+            </a:r>
+            <a:r>
+              <a:rPr/>
+              <a:t> — dưới đây là các nguồn chống đỡ những khẳng định chính của bài</a:t>
+            </a:r>
+          </a:p>
+        </p:txBody>
+      </p:sp>
+      <p:graphicFrame>
+        <p:nvGraphicFramePr>
+          <p:cNvPr id="6" name="Content Placeholder 5"/>
+          <p:cNvGraphicFramePr>
+            <a:graphicFrameLocks noGrp="1"/>
+          </p:cNvGraphicFramePr>
+          <p:nvPr>
+            <p:ph idx="1"/>
+          </p:nvPr>
+        </p:nvGraphicFramePr>
+        <p:xfrm>
+          <a:off x="762000" y="2209800"/>
+          <a:ext cx="10579100" cy="3962400"/>
+        </p:xfrm>
+        <a:graphic>
+          <a:graphicData uri="http://schemas.openxmlformats.org/drawingml/2006/table">
+            <a:tbl>
+              <a:tblPr firstRow="1" bandRow="1">
+                <a:tableStyleId>{45BEF19B-5B1D-4A26-B267-ECC71EF7E2D4}</a:tableStyleId>
+              </a:tblPr>
+              <a:tblGrid>
+                <a:gridCol w="5283200"/>
+                <a:gridCol w="5283200"/>
+              </a:tblGrid>
+              <a:tr h="0">
+                <a:tc>
+                  <a:txBody>
+                    <a:bodyPr/>
+                    <a:lstStyle/>
+                    <a:p>
+                      <a:pPr lvl="0" indent="0" marL="0">
+                        <a:buNone/>
+                      </a:pPr>
+                      <a:r>
+                        <a:rPr b="1"/>
+                        <a:t>Laroca</a:t>
+                      </a:r>
+                      <a:r>
+                        <a:rPr/>
+                        <a:t> và cộng sự, VISAPP </a:t>
+                      </a:r>
+                      <a:r>
+                        <a:rPr b="1"/>
+                        <a:t>2022</a:t>
+                      </a:r>
+                    </a:p>
+                  </a:txBody>
+                </a:tc>
+                <a:tc>
+                  <a:txBody>
+                    <a:bodyPr/>
+                    <a:lstStyle/>
+                    <a:p>
+                      <a:pPr lvl="0" indent="0" marL="0">
+                        <a:buNone/>
+                      </a:pPr>
+                      <a:r>
+                        <a:rPr i="1"/>
+                        <a:t>On the Cross-Dataset Generalization in License Plate Recognition</a:t>
+                      </a:r>
+                      <a:r>
+                        <a:rPr/>
+                        <a:t> — </a:t>
+                      </a:r>
+                      <a:r>
+                        <a:rPr b="1"/>
+                        <a:t>nguồn của cặp số 94,3% / 45,7%</a:t>
+                      </a:r>
+                      <a:r>
+                        <a:rPr/>
+                        <a:t>, đo trên RodoSol-ALPR của </a:t>
+                      </a:r>
+                      <a:r>
+                        <a:rPr b="1"/>
+                        <a:t>Brazil</a:t>
+                      </a:r>
+                    </a:p>
+                  </a:txBody>
+                </a:tc>
+              </a:tr>
+              <a:tr h="0">
+                <a:tc>
+                  <a:txBody>
+                    <a:bodyPr/>
+                    <a:lstStyle/>
+                    <a:p>
+                      <a:pPr lvl="0" indent="0" marL="0">
+                        <a:buNone/>
+                      </a:pPr>
+                      <a:r>
+                        <a:rPr b="1"/>
+                        <a:t>Laroca</a:t>
+                      </a:r>
+                      <a:r>
+                        <a:rPr/>
+                        <a:t> và cộng sự, IET ITS </a:t>
+                      </a:r>
+                      <a:r>
+                        <a:rPr b="1"/>
+                        <a:t>2021</a:t>
+                      </a:r>
+                    </a:p>
+                  </a:txBody>
+                </a:tc>
+                <a:tc>
+                  <a:txBody>
+                    <a:bodyPr/>
+                    <a:lstStyle/>
+                    <a:p>
+                      <a:pPr lvl="0" indent="0" marL="0">
+                        <a:buNone/>
+                      </a:pPr>
+                      <a:r>
+                        <a:rPr i="1"/>
+                        <a:t>An efficient and layout-independent ALPR system based on the YOLO detector</a:t>
+                      </a:r>
+                    </a:p>
+                  </a:txBody>
+                </a:tc>
+              </a:tr>
+              <a:tr h="0">
+                <a:tc>
+                  <a:txBody>
+                    <a:bodyPr/>
+                    <a:lstStyle/>
+                    <a:p>
+                      <a:pPr lvl="0" indent="0" marL="0">
+                        <a:buNone/>
+                      </a:pPr>
+                      <a:r>
+                        <a:rPr b="1"/>
+                        <a:t>Du</a:t>
+                      </a:r>
+                      <a:r>
+                        <a:rPr/>
+                        <a:t> và cộng sự, arXiv </a:t>
+                      </a:r>
+                      <a:r>
+                        <a:rPr b="1"/>
+                        <a:t>2020</a:t>
+                      </a:r>
+                    </a:p>
+                  </a:txBody>
+                </a:tc>
+                <a:tc>
+                  <a:txBody>
+                    <a:bodyPr/>
+                    <a:lstStyle/>
+                    <a:p>
+                      <a:pPr lvl="0" indent="0" marL="0">
+                        <a:buNone/>
+                      </a:pPr>
+                      <a:r>
+                        <a:rPr i="1"/>
+                        <a:t>PP-OCR: A Practical Ultra Lightweight OCR System</a:t>
+                      </a:r>
+                    </a:p>
+                  </a:txBody>
+                </a:tc>
+              </a:tr>
+              <a:tr h="0">
+                <a:tc>
+                  <a:txBody>
+                    <a:bodyPr/>
+                    <a:lstStyle/>
+                    <a:p>
+                      <a:pPr lvl="0" indent="0" marL="0">
+                        <a:buNone/>
+                      </a:pPr>
+                      <a:r>
+                        <a:rPr/>
+                        <a:t>PaddlePaddle Team, arXiv </a:t>
+                      </a:r>
+                      <a:r>
+                        <a:rPr b="1"/>
+                        <a:t>2025</a:t>
+                      </a:r>
+                    </a:p>
+                  </a:txBody>
+                </a:tc>
+                <a:tc>
+                  <a:txBody>
+                    <a:bodyPr/>
+                    <a:lstStyle/>
+                    <a:p>
+                      <a:pPr lvl="0" indent="0" marL="0">
+                        <a:buNone/>
+                      </a:pPr>
+                      <a:r>
+                        <a:rPr i="1"/>
+                        <a:t>PaddleOCR 3.0 Technical Report</a:t>
+                      </a:r>
+                    </a:p>
+                  </a:txBody>
+                </a:tc>
+              </a:tr>
+              <a:tr h="0">
+                <a:tc>
+                  <a:txBody>
+                    <a:bodyPr/>
+                    <a:lstStyle/>
+                    <a:p>
+                      <a:pPr lvl="0" indent="0" marL="0">
+                        <a:buNone/>
+                      </a:pPr>
+                      <a:r>
+                        <a:rPr b="1"/>
+                        <a:t>Jocher &amp; Qiu</a:t>
+                      </a:r>
+                      <a:r>
+                        <a:rPr/>
+                        <a:t>, Ultralytics </a:t>
+                      </a:r>
+                      <a:r>
+                        <a:rPr b="1"/>
+                        <a:t>2024</a:t>
+                      </a:r>
+                    </a:p>
+                  </a:txBody>
+                </a:tc>
+                <a:tc>
+                  <a:txBody>
+                    <a:bodyPr/>
+                    <a:lstStyle/>
+                    <a:p>
+                      <a:pPr lvl="0" indent="0" marL="0">
+                        <a:buNone/>
+                      </a:pPr>
+                      <a:r>
+                        <a:rPr i="1"/>
+                        <a:t>Ultralytics YOLO11</a:t>
+                      </a:r>
+                    </a:p>
+                  </a:txBody>
+                </a:tc>
+              </a:tr>
+              <a:tr h="0">
+                <a:tc>
+                  <a:txBody>
+                    <a:bodyPr/>
+                    <a:lstStyle/>
+                    <a:p>
+                      <a:pPr lvl="0" indent="0" marL="0">
+                        <a:buNone/>
+                      </a:pPr>
+                      <a:r>
+                        <a:rPr b="1"/>
+                        <a:t>TT 79/2024/TT-BCA</a:t>
+                      </a:r>
+                      <a:r>
+                        <a:rPr/>
+                        <a:t> · </a:t>
+                      </a:r>
+                      <a:r>
+                        <a:rPr b="1"/>
+                        <a:t>TT 51/2025/TT-BCA</a:t>
+                      </a:r>
+                    </a:p>
+                  </a:txBody>
+                </a:tc>
+                <a:tc>
+                  <a:txBody>
+                    <a:bodyPr/>
+                    <a:lstStyle/>
+                    <a:p>
+                      <a:pPr lvl="0" indent="0" marL="0">
+                        <a:buNone/>
+                      </a:pPr>
+                      <a:r>
+                        <a:rPr/>
+                        <a:t>Cấu trúc biển, seri, màu nền · phụ lục mã tỉnh (34 tỉnh/thành)</a:t>
+                      </a:r>
+                    </a:p>
+                  </a:txBody>
+                </a:tc>
+              </a:tr>
+              <a:tr h="0">
+                <a:tc>
+                  <a:txBody>
+                    <a:bodyPr/>
+                    <a:lstStyle/>
+                    <a:p>
+                      <a:pPr lvl="0" indent="0" marL="0">
+                        <a:buNone/>
+                      </a:pPr>
+                      <a:r>
+                        <a:rPr b="1"/>
+                        <a:t>QCVN 08:2024/BCA</a:t>
+                      </a:r>
+                    </a:p>
+                  </a:txBody>
+                </a:tc>
+                <a:tc>
+                  <a:txBody>
+                    <a:bodyPr/>
+                    <a:lstStyle/>
+                    <a:p>
+                      <a:pPr lvl="0" indent="0" marL="0">
+                        <a:buNone/>
+                      </a:pPr>
+                      <a:r>
+                        <a:rPr/>
+                        <a:t>Kích thước và tỉ lệ khung hình biển số</a:t>
+                      </a:r>
+                    </a:p>
+                  </a:txBody>
+                </a:tc>
+              </a:tr>
+            </a:tbl>
+          </a:graphicData>
+        </a:graphic>
+      </p:graphicFrame>
+      <p:sp>
+        <p:nvSpPr>
+          <p:cNvPr id="449" name="Google Shape;449;p31"/>
+          <p:cNvSpPr txBox="1"/>
+          <p:nvPr>
+            <p:ph idx="12" type="sldNum"/>
+          </p:nvPr>
+        </p:nvSpPr>
+        <p:spPr>
+          <a:xfrm>
+            <a:off x="58380" y="6508358"/>
+            <a:ext cx="349642" cy="349642"/>
+          </a:xfrm>
+          <a:prstGeom prst="rect">
+            <a:avLst/>
+          </a:prstGeom>
+          <a:noFill/>
+          <a:ln>
+            <a:noFill/>
+          </a:ln>
+        </p:spPr>
+        <p:txBody>
+          <a:bodyPr anchor="ctr" anchorCtr="0" bIns="45700" lIns="91425" rIns="91425" spcFirstLastPara="1" tIns="45700" wrap="square">
+            <a:noAutofit/>
+          </a:bodyPr>
+          <a:lstStyle>
+            <a:lvl1pPr algn="ctr" indent="0" lvl="0" marL="0">
+              <a:spcBef>
+                <a:spcPts val="0"/>
+              </a:spcBef>
+              <a:buNone/>
+              <a:defRPr sz="700">
+                <a:solidFill>
+                  <a:schemeClr val="dk1"/>
+                </a:solidFill>
+                <a:latin typeface="Arial"/>
+                <a:ea typeface="Arial"/>
+                <a:cs typeface="Arial"/>
+                <a:sym typeface="Arial"/>
+              </a:defRPr>
+            </a:lvl1pPr>
+            <a:lvl2pPr algn="ctr" indent="0" lvl="1" marL="0">
+              <a:spcBef>
+                <a:spcPts val="0"/>
+              </a:spcBef>
+              <a:buNone/>
+              <a:defRPr sz="700">
+                <a:solidFill>
+                  <a:schemeClr val="dk1"/>
+                </a:solidFill>
+                <a:latin typeface="Arial"/>
+                <a:ea typeface="Arial"/>
+                <a:cs typeface="Arial"/>
+                <a:sym typeface="Arial"/>
+              </a:defRPr>
+            </a:lvl2pPr>
+            <a:lvl3pPr algn="ctr" indent="0" lvl="2" marL="0">
+              <a:spcBef>
+                <a:spcPts val="0"/>
+              </a:spcBef>
+              <a:buNone/>
+              <a:defRPr sz="700">
+                <a:solidFill>
+                  <a:schemeClr val="dk1"/>
+                </a:solidFill>
+                <a:latin typeface="Arial"/>
+                <a:ea typeface="Arial"/>
+                <a:cs typeface="Arial"/>
+                <a:sym typeface="Arial"/>
+              </a:defRPr>
+            </a:lvl3pPr>
+            <a:lvl4pPr algn="ctr" indent="0" lvl="3" marL="0">
+              <a:spcBef>
+                <a:spcPts val="0"/>
+              </a:spcBef>
+              <a:buNone/>
+              <a:defRPr sz="700">
+                <a:solidFill>
+                  <a:schemeClr val="dk1"/>
+                </a:solidFill>
+                <a:latin typeface="Arial"/>
+                <a:ea typeface="Arial"/>
+                <a:cs typeface="Arial"/>
+                <a:sym typeface="Arial"/>
+              </a:defRPr>
+            </a:lvl4pPr>
+            <a:lvl5pPr algn="ctr" indent="0" lvl="4" marL="0">
+              <a:spcBef>
+                <a:spcPts val="0"/>
+              </a:spcBef>
+              <a:buNone/>
+              <a:defRPr sz="700">
+                <a:solidFill>
+                  <a:schemeClr val="dk1"/>
+                </a:solidFill>
+                <a:latin typeface="Arial"/>
+                <a:ea typeface="Arial"/>
+                <a:cs typeface="Arial"/>
+                <a:sym typeface="Arial"/>
+              </a:defRPr>
+            </a:lvl5pPr>
+            <a:lvl6pPr algn="ctr" indent="0" lvl="5" marL="0">
+              <a:spcBef>
+                <a:spcPts val="0"/>
+              </a:spcBef>
+              <a:buNone/>
+              <a:defRPr sz="700">
+                <a:solidFill>
+                  <a:schemeClr val="dk1"/>
+                </a:solidFill>
+                <a:latin typeface="Arial"/>
+                <a:ea typeface="Arial"/>
+                <a:cs typeface="Arial"/>
+                <a:sym typeface="Arial"/>
+              </a:defRPr>
+            </a:lvl6pPr>
+            <a:lvl7pPr algn="ctr" indent="0" lvl="6" marL="0">
+              <a:spcBef>
+                <a:spcPts val="0"/>
+              </a:spcBef>
+              <a:buNone/>
+              <a:defRPr sz="700">
+                <a:solidFill>
+                  <a:schemeClr val="dk1"/>
+                </a:solidFill>
+                <a:latin typeface="Arial"/>
+                <a:ea typeface="Arial"/>
+                <a:cs typeface="Arial"/>
+                <a:sym typeface="Arial"/>
+              </a:defRPr>
+            </a:lvl7pPr>
+            <a:lvl8pPr algn="ctr" indent="0" lvl="7" marL="0">
+              <a:spcBef>
+                <a:spcPts val="0"/>
+              </a:spcBef>
+              <a:buNone/>
+              <a:defRPr sz="700">
+                <a:solidFill>
+                  <a:schemeClr val="dk1"/>
+                </a:solidFill>
+                <a:latin typeface="Arial"/>
+                <a:ea typeface="Arial"/>
+                <a:cs typeface="Arial"/>
+                <a:sym typeface="Arial"/>
+              </a:defRPr>
+            </a:lvl8pPr>
+            <a:lvl9pPr algn="ctr" indent="0" lvl="8" marL="0">
+              <a:spcBef>
+                <a:spcPts val="0"/>
+              </a:spcBef>
+              <a:buNone/>
+              <a:defRPr sz="700">
+                <a:solidFill>
+                  <a:schemeClr val="dk1"/>
+                </a:solidFill>
+                <a:latin typeface="Arial"/>
+                <a:ea typeface="Arial"/>
+                <a:cs typeface="Arial"/>
+                <a:sym typeface="Arial"/>
+              </a:defRPr>
+            </a:lvl9pPr>
+          </a:lstStyle>
+          <a:p>
+            <a:pPr algn="ctr" indent="0" lvl="0" marL="0" rtl="0">
+              <a:spcBef>
+                <a:spcPts val="0"/>
+              </a:spcBef>
+              <a:spcAft>
+                <a:spcPts val="0"/>
+              </a:spcAft>
+              <a:buNone/>
+            </a:pPr>
+            <a:fld id="{00000000-1234-1234-1234-123412341234}" type="slidenum">
+              <a:rPr lang="en-US"/>
+              <a:t>‹#›</a:t>
+            </a:fld>
+            <a:endParaRPr/>
+          </a:p>
+        </p:txBody>
+      </p:sp>
+    </p:spTree>
+  </p:cSld>
+</p:sld>
+</file>
+
+<file path=ppt/slides/slide32.xml><?xml version="1.0" encoding="utf-8"?>
+<p:sld xmlns:a="http://schemas.openxmlformats.org/drawingml/2006/main" xmlns:r="http://schemas.openxmlformats.org/officeDocument/2006/relationships" xmlns:p="http://schemas.openxmlformats.org/presentationml/2006/main">
+  <p:cSld>
+    <p:spTree>
+      <p:nvGrpSpPr>
         <p:cNvPr id="134" name="Shape 134"/>
         <p:cNvGrpSpPr/>
         <p:nvPr/>
@@ -53811,7 +54402,7 @@
 </p:sld>
 </file>
 
-<file path=ppt/slides/slide32.xml><?xml version="1.0" encoding="utf-8"?>
+<file path=ppt/slides/slide33.xml><?xml version="1.0" encoding="utf-8"?>
 <p:sld xmlns:a="http://schemas.openxmlformats.org/drawingml/2006/main" xmlns:r="http://schemas.openxmlformats.org/officeDocument/2006/relationships" xmlns:p="http://schemas.openxmlformats.org/presentationml/2006/main">
   <p:cSld>
     <p:spTree>

--- a/docs/slides/slides.pptx
+++ b/docs/slides/slides.pptx
@@ -38,23 +38,25 @@
     <p:sldId id="286" r:id="rId35"/>
     <p:sldId id="287" r:id="rId36"/>
     <p:sldId id="288" r:id="rId37"/>
+    <p:sldId id="289" r:id="rId38"/>
+    <p:sldId id="290" r:id="rId39"/>
   </p:sldIdLst>
   <p:sldSz cx="12192000" cy="6858000"/>
   <p:notesSz cx="6858000" cy="9144000"/>
   <p:embeddedFontLst>
     <p:embeddedFont>
       <p:font typeface="Roboto"/>
-      <p:regular r:id="rId38"/>
-      <p:bold r:id="rId39"/>
-      <p:italic r:id="rId40"/>
-      <p:boldItalic r:id="rId41"/>
+      <p:regular r:id="rId40"/>
+      <p:bold r:id="rId41"/>
+      <p:italic r:id="rId42"/>
+      <p:boldItalic r:id="rId43"/>
     </p:embeddedFont>
     <p:embeddedFont>
       <p:font typeface="Open Sans"/>
-      <p:regular r:id="rId42"/>
-      <p:bold r:id="rId43"/>
-      <p:italic r:id="rId44"/>
-      <p:boldItalic r:id="rId45"/>
+      <p:regular r:id="rId44"/>
+      <p:bold r:id="rId45"/>
+      <p:italic r:id="rId46"/>
+      <p:boldItalic r:id="rId47"/>
     </p:embeddedFont>
   </p:embeddedFontLst>
   <p:defaultTextStyle>
@@ -288,7 +290,7 @@
   </p:defaultTextStyle>
   <p:extLst>
     <p:ext uri="GoogleSlidesCustomDataVersion2">
-      <go:slidesCustomData xmlns:go="http://customooxmlschemas.google.com/" roundtripDataSignature="AMtx7mhu5dURU4INwSlvEO7StWDXKr50jg==" r:id="rId46"/>
+      <go:slidesCustomData xmlns:go="http://customooxmlschemas.google.com/" roundtripDataSignature="AMtx7mhu5dURU4INwSlvEO7StWDXKr50jg==" r:id="rId48"/>
     </p:ext>
   </p:extLst>
 </p:presentation>
@@ -54918,6 +54920,902 @@
 </p:sld>
 </file>
 
+<file path=ppt/slides/slide34.xml><?xml version="1.0" encoding="utf-8"?>
+<p:sld xmlns:a="http://schemas.openxmlformats.org/drawingml/2006/main" xmlns:r="http://schemas.openxmlformats.org/officeDocument/2006/relationships" xmlns:p="http://schemas.openxmlformats.org/presentationml/2006/main">
+  <p:cSld>
+    <p:spTree>
+      <p:nvGrpSpPr>
+        <p:cNvPr id="428" name="Shape 428"/>
+        <p:cNvGrpSpPr/>
+        <p:nvPr/>
+      </p:nvGrpSpPr>
+      <p:grpSpPr>
+        <a:xfrm>
+          <a:off x="0" y="0"/>
+          <a:ext cx="0" cy="0"/>
+          <a:chOff x="0" y="0"/>
+          <a:chExt cx="0" cy="0"/>
+        </a:xfrm>
+      </p:grpSpPr>
+      <p:sp>
+        <p:nvSpPr>
+          <p:cNvPr id="436" name="Google Shape;436;p31"/>
+          <p:cNvSpPr txBox="1"/>
+          <p:nvPr>
+            <p:ph type="title"/>
+          </p:nvPr>
+        </p:nvSpPr>
+        <p:spPr>
+          <a:xfrm>
+            <a:off x="771525" y="200025"/>
+            <a:ext cx="10582275" cy="790575"/>
+          </a:xfrm>
+          <a:prstGeom prst="rect">
+            <a:avLst/>
+          </a:prstGeom>
+          <a:noFill/>
+          <a:ln>
+            <a:noFill/>
+          </a:ln>
+        </p:spPr>
+        <p:txBody>
+          <a:bodyPr/>
+          <a:lstStyle/>
+          <a:p>
+            <a:pPr lvl="0" indent="0" marL="0">
+              <a:buNone/>
+            </a:pPr>
+            <a:r>
+              <a:rPr/>
+              <a:t>Vì sao PaddleOCR — và vì sao bản v5 mobile</a:t>
+            </a:r>
+          </a:p>
+        </p:txBody>
+      </p:sp>
+      <p:sp>
+        <p:nvSpPr>
+          <p:cNvPr id="437" name="Google Shape;437;p31"/>
+          <p:cNvSpPr txBox="1"/>
+          <p:nvPr>
+            <p:ph idx="2" sz="half" type="body"/>
+          </p:nvPr>
+        </p:nvSpPr>
+        <p:spPr/>
+        <p:txBody>
+          <a:bodyPr/>
+          <a:lstStyle/>
+          <a:p>
+            <a:pPr lvl="0" indent="0" marL="0">
+              <a:buNone/>
+            </a:pPr>
+            <a:r>
+              <a:rPr/>
+              <a:t>Lý do </a:t>
+            </a:r>
+            <a:r>
+              <a:rPr b="1"/>
+              <a:t>kỹ thuật</a:t>
+            </a:r>
+            <a:r>
+              <a:rPr/>
+              <a:t>, không phải độ chính xác — nhẹ hơn EasyOCR ~10 lần</a:t>
+            </a:r>
+          </a:p>
+        </p:txBody>
+      </p:sp>
+      <p:graphicFrame>
+        <p:nvGraphicFramePr>
+          <p:cNvPr id="6" name="Content Placeholder 5"/>
+          <p:cNvGraphicFramePr>
+            <a:graphicFrameLocks noGrp="1"/>
+          </p:cNvGraphicFramePr>
+          <p:nvPr>
+            <p:ph idx="1"/>
+          </p:nvPr>
+        </p:nvGraphicFramePr>
+        <p:xfrm>
+          <a:off x="762000" y="2209800"/>
+          <a:ext cx="10579100" cy="3962400"/>
+        </p:xfrm>
+        <a:graphic>
+          <a:graphicData uri="http://schemas.openxmlformats.org/drawingml/2006/table">
+            <a:tbl>
+              <a:tblPr firstRow="1" bandRow="1">
+                <a:tableStyleId>{45BEF19B-5B1D-4A26-B267-ECC71EF7E2D4}</a:tableStyleId>
+              </a:tblPr>
+              <a:tblGrid>
+                <a:gridCol w="3517900"/>
+                <a:gridCol w="3517900"/>
+                <a:gridCol w="3517900"/>
+              </a:tblGrid>
+              <a:tr h="0">
+                <a:tc>
+                  <a:txBody>
+                    <a:bodyPr/>
+                    <a:lstStyle/>
+                    <a:p>
+                      <a:endParaRPr/>
+                    </a:p>
+                  </a:txBody>
+                  <a:tcPr/>
+                </a:tc>
+                <a:tc>
+                  <a:txBody>
+                    <a:bodyPr/>
+                    <a:lstStyle/>
+                    <a:p>
+                      <a:pPr lvl="0" indent="0" marL="0" algn="r">
+                        <a:buNone/>
+                      </a:pPr>
+                      <a:r>
+                        <a:rPr/>
+                        <a:t>Chuỗi đúng</a:t>
+                      </a:r>
+                    </a:p>
+                  </a:txBody>
+                  <a:tcPr/>
+                </a:tc>
+                <a:tc>
+                  <a:txBody>
+                    <a:bodyPr/>
+                    <a:lstStyle/>
+                    <a:p>
+                      <a:pPr lvl="0" indent="0" marL="0" algn="r">
+                        <a:buNone/>
+                      </a:pPr>
+                      <a:r>
+                        <a:rPr/>
+                        <a:t>Trung vị</a:t>
+                      </a:r>
+                    </a:p>
+                  </a:txBody>
+                  <a:tcPr/>
+                </a:tc>
+              </a:tr>
+              <a:tr h="0">
+                <a:tc>
+                  <a:txBody>
+                    <a:bodyPr/>
+                    <a:lstStyle/>
+                    <a:p>
+                      <a:pPr lvl="0" indent="0" marL="0">
+                        <a:buNone/>
+                      </a:pPr>
+                      <a:r>
+                        <a:rPr b="1"/>
+                        <a:t>PP-OCRv5_mobile</a:t>
+                      </a:r>
+                      <a:r>
+                        <a:rPr/>
+                        <a:t> — đang dùng</a:t>
+                      </a:r>
+                    </a:p>
+                  </a:txBody>
+                </a:tc>
+                <a:tc>
+                  <a:txBody>
+                    <a:bodyPr/>
+                    <a:lstStyle/>
+                    <a:p>
+                      <a:pPr lvl="0" indent="0" marL="0" algn="r">
+                        <a:buNone/>
+                      </a:pPr>
+                      <a:r>
+                        <a:rPr/>
+                        <a:t>67,0%</a:t>
+                      </a:r>
+                    </a:p>
+                  </a:txBody>
+                </a:tc>
+                <a:tc>
+                  <a:txBody>
+                    <a:bodyPr/>
+                    <a:lstStyle/>
+                    <a:p>
+                      <a:pPr lvl="0" indent="0" marL="0" algn="r">
+                        <a:buNone/>
+                      </a:pPr>
+                      <a:r>
+                        <a:rPr b="1"/>
+                        <a:t>23,0 ms</a:t>
+                      </a:r>
+                    </a:p>
+                  </a:txBody>
+                </a:tc>
+              </a:tr>
+              <a:tr h="0">
+                <a:tc>
+                  <a:txBody>
+                    <a:bodyPr/>
+                    <a:lstStyle/>
+                    <a:p>
+                      <a:pPr lvl="0" indent="0" marL="0">
+                        <a:buNone/>
+                      </a:pPr>
+                      <a:r>
+                        <a:rPr/>
+                        <a:t>PP-OCRv6_medium</a:t>
+                      </a:r>
+                    </a:p>
+                  </a:txBody>
+                </a:tc>
+                <a:tc>
+                  <a:txBody>
+                    <a:bodyPr/>
+                    <a:lstStyle/>
+                    <a:p>
+                      <a:pPr lvl="0" indent="0" marL="0" algn="r">
+                        <a:buNone/>
+                      </a:pPr>
+                      <a:r>
+                        <a:rPr b="1"/>
+                        <a:t>72,5%</a:t>
+                      </a:r>
+                    </a:p>
+                  </a:txBody>
+                </a:tc>
+                <a:tc>
+                  <a:txBody>
+                    <a:bodyPr/>
+                    <a:lstStyle/>
+                    <a:p>
+                      <a:pPr lvl="0" indent="0" marL="0" algn="r">
+                        <a:buNone/>
+                      </a:pPr>
+                      <a:r>
+                        <a:rPr/>
+                        <a:t>386,9 ms</a:t>
+                      </a:r>
+                    </a:p>
+                  </a:txBody>
+                </a:tc>
+              </a:tr>
+            </a:tbl>
+          </a:graphicData>
+        </a:graphic>
+      </p:graphicFrame>
+      <p:sp>
+        <p:nvSpPr>
+          <p:cNvPr id="449" name="Google Shape;449;p31"/>
+          <p:cNvSpPr txBox="1"/>
+          <p:nvPr>
+            <p:ph idx="12" type="sldNum"/>
+          </p:nvPr>
+        </p:nvSpPr>
+        <p:spPr>
+          <a:xfrm>
+            <a:off x="58380" y="6508358"/>
+            <a:ext cx="349642" cy="349642"/>
+          </a:xfrm>
+          <a:prstGeom prst="rect">
+            <a:avLst/>
+          </a:prstGeom>
+          <a:noFill/>
+          <a:ln>
+            <a:noFill/>
+          </a:ln>
+        </p:spPr>
+        <p:txBody>
+          <a:bodyPr anchor="ctr" anchorCtr="0" bIns="45700" lIns="91425" rIns="91425" spcFirstLastPara="1" tIns="45700" wrap="square">
+            <a:noAutofit/>
+          </a:bodyPr>
+          <a:lstStyle>
+            <a:lvl1pPr algn="ctr" indent="0" lvl="0" marL="0">
+              <a:spcBef>
+                <a:spcPts val="0"/>
+              </a:spcBef>
+              <a:buNone/>
+              <a:defRPr sz="700">
+                <a:solidFill>
+                  <a:schemeClr val="dk1"/>
+                </a:solidFill>
+                <a:latin typeface="Arial"/>
+                <a:ea typeface="Arial"/>
+                <a:cs typeface="Arial"/>
+                <a:sym typeface="Arial"/>
+              </a:defRPr>
+            </a:lvl1pPr>
+            <a:lvl2pPr algn="ctr" indent="0" lvl="1" marL="0">
+              <a:spcBef>
+                <a:spcPts val="0"/>
+              </a:spcBef>
+              <a:buNone/>
+              <a:defRPr sz="700">
+                <a:solidFill>
+                  <a:schemeClr val="dk1"/>
+                </a:solidFill>
+                <a:latin typeface="Arial"/>
+                <a:ea typeface="Arial"/>
+                <a:cs typeface="Arial"/>
+                <a:sym typeface="Arial"/>
+              </a:defRPr>
+            </a:lvl2pPr>
+            <a:lvl3pPr algn="ctr" indent="0" lvl="2" marL="0">
+              <a:spcBef>
+                <a:spcPts val="0"/>
+              </a:spcBef>
+              <a:buNone/>
+              <a:defRPr sz="700">
+                <a:solidFill>
+                  <a:schemeClr val="dk1"/>
+                </a:solidFill>
+                <a:latin typeface="Arial"/>
+                <a:ea typeface="Arial"/>
+                <a:cs typeface="Arial"/>
+                <a:sym typeface="Arial"/>
+              </a:defRPr>
+            </a:lvl3pPr>
+            <a:lvl4pPr algn="ctr" indent="0" lvl="3" marL="0">
+              <a:spcBef>
+                <a:spcPts val="0"/>
+              </a:spcBef>
+              <a:buNone/>
+              <a:defRPr sz="700">
+                <a:solidFill>
+                  <a:schemeClr val="dk1"/>
+                </a:solidFill>
+                <a:latin typeface="Arial"/>
+                <a:ea typeface="Arial"/>
+                <a:cs typeface="Arial"/>
+                <a:sym typeface="Arial"/>
+              </a:defRPr>
+            </a:lvl4pPr>
+            <a:lvl5pPr algn="ctr" indent="0" lvl="4" marL="0">
+              <a:spcBef>
+                <a:spcPts val="0"/>
+              </a:spcBef>
+              <a:buNone/>
+              <a:defRPr sz="700">
+                <a:solidFill>
+                  <a:schemeClr val="dk1"/>
+                </a:solidFill>
+                <a:latin typeface="Arial"/>
+                <a:ea typeface="Arial"/>
+                <a:cs typeface="Arial"/>
+                <a:sym typeface="Arial"/>
+              </a:defRPr>
+            </a:lvl5pPr>
+            <a:lvl6pPr algn="ctr" indent="0" lvl="5" marL="0">
+              <a:spcBef>
+                <a:spcPts val="0"/>
+              </a:spcBef>
+              <a:buNone/>
+              <a:defRPr sz="700">
+                <a:solidFill>
+                  <a:schemeClr val="dk1"/>
+                </a:solidFill>
+                <a:latin typeface="Arial"/>
+                <a:ea typeface="Arial"/>
+                <a:cs typeface="Arial"/>
+                <a:sym typeface="Arial"/>
+              </a:defRPr>
+            </a:lvl6pPr>
+            <a:lvl7pPr algn="ctr" indent="0" lvl="6" marL="0">
+              <a:spcBef>
+                <a:spcPts val="0"/>
+              </a:spcBef>
+              <a:buNone/>
+              <a:defRPr sz="700">
+                <a:solidFill>
+                  <a:schemeClr val="dk1"/>
+                </a:solidFill>
+                <a:latin typeface="Arial"/>
+                <a:ea typeface="Arial"/>
+                <a:cs typeface="Arial"/>
+                <a:sym typeface="Arial"/>
+              </a:defRPr>
+            </a:lvl7pPr>
+            <a:lvl8pPr algn="ctr" indent="0" lvl="7" marL="0">
+              <a:spcBef>
+                <a:spcPts val="0"/>
+              </a:spcBef>
+              <a:buNone/>
+              <a:defRPr sz="700">
+                <a:solidFill>
+                  <a:schemeClr val="dk1"/>
+                </a:solidFill>
+                <a:latin typeface="Arial"/>
+                <a:ea typeface="Arial"/>
+                <a:cs typeface="Arial"/>
+                <a:sym typeface="Arial"/>
+              </a:defRPr>
+            </a:lvl8pPr>
+            <a:lvl9pPr algn="ctr" indent="0" lvl="8" marL="0">
+              <a:spcBef>
+                <a:spcPts val="0"/>
+              </a:spcBef>
+              <a:buNone/>
+              <a:defRPr sz="700">
+                <a:solidFill>
+                  <a:schemeClr val="dk1"/>
+                </a:solidFill>
+                <a:latin typeface="Arial"/>
+                <a:ea typeface="Arial"/>
+                <a:cs typeface="Arial"/>
+                <a:sym typeface="Arial"/>
+              </a:defRPr>
+            </a:lvl9pPr>
+          </a:lstStyle>
+          <a:p>
+            <a:pPr algn="ctr" indent="0" lvl="0" marL="0" rtl="0">
+              <a:spcBef>
+                <a:spcPts val="0"/>
+              </a:spcBef>
+              <a:spcAft>
+                <a:spcPts val="0"/>
+              </a:spcAft>
+              <a:buNone/>
+            </a:pPr>
+            <a:fld id="{00000000-1234-1234-1234-123412341234}" type="slidenum">
+              <a:rPr lang="en-US"/>
+              <a:t>‹#›</a:t>
+            </a:fld>
+            <a:endParaRPr/>
+          </a:p>
+        </p:txBody>
+      </p:sp>
+    </p:spTree>
+  </p:cSld>
+</p:sld>
+</file>
+
+<file path=ppt/slides/slide35.xml><?xml version="1.0" encoding="utf-8"?>
+<p:sld xmlns:a="http://schemas.openxmlformats.org/drawingml/2006/main" xmlns:r="http://schemas.openxmlformats.org/officeDocument/2006/relationships" xmlns:p="http://schemas.openxmlformats.org/presentationml/2006/main">
+  <p:cSld>
+    <p:spTree>
+      <p:nvGrpSpPr>
+        <p:cNvPr id="428" name="Shape 428"/>
+        <p:cNvGrpSpPr/>
+        <p:nvPr/>
+      </p:nvGrpSpPr>
+      <p:grpSpPr>
+        <a:xfrm>
+          <a:off x="0" y="0"/>
+          <a:ext cx="0" cy="0"/>
+          <a:chOff x="0" y="0"/>
+          <a:chExt cx="0" cy="0"/>
+        </a:xfrm>
+      </p:grpSpPr>
+      <p:sp>
+        <p:nvSpPr>
+          <p:cNvPr id="436" name="Google Shape;436;p31"/>
+          <p:cNvSpPr txBox="1"/>
+          <p:nvPr>
+            <p:ph type="title"/>
+          </p:nvPr>
+        </p:nvSpPr>
+        <p:spPr>
+          <a:xfrm>
+            <a:off x="771525" y="200025"/>
+            <a:ext cx="10582275" cy="790575"/>
+          </a:xfrm>
+          <a:prstGeom prst="rect">
+            <a:avLst/>
+          </a:prstGeom>
+          <a:noFill/>
+          <a:ln>
+            <a:noFill/>
+          </a:ln>
+        </p:spPr>
+        <p:txBody>
+          <a:bodyPr/>
+          <a:lstStyle/>
+          <a:p>
+            <a:pPr lvl="0" indent="0" marL="0">
+              <a:buNone/>
+            </a:pPr>
+            <a:r>
+              <a:rPr/>
+              <a:t>v6 chính xác hơn — vì sao vẫn không đổi</a:t>
+            </a:r>
+          </a:p>
+        </p:txBody>
+      </p:sp>
+      <p:sp>
+        <p:nvSpPr>
+          <p:cNvPr id="437" name="Google Shape;437;p31"/>
+          <p:cNvSpPr txBox="1"/>
+          <p:nvPr>
+            <p:ph idx="2" sz="half" type="body"/>
+          </p:nvPr>
+        </p:nvSpPr>
+        <p:spPr/>
+        <p:txBody>
+          <a:bodyPr/>
+          <a:lstStyle/>
+          <a:p>
+            <a:pPr lvl="0" indent="0" marL="0">
+              <a:buNone/>
+            </a:pPr>
+            <a:r>
+              <a:rPr/>
+              <a:t>Gói không có bản </a:t>
+            </a:r>
+            <a:r>
+              <a:rPr b="1"/>
+              <a:t>Tiny</a:t>
+            </a:r>
+            <a:r>
+              <a:rPr/>
+              <a:t> — chỉ Medium, chậm </a:t>
+            </a:r>
+            <a:r>
+              <a:rPr b="1"/>
+              <a:t>16,8 lần</a:t>
+            </a:r>
+            <a:r>
+              <a:rPr/>
+              <a:t>. Ràng buộc </a:t>
+            </a:r>
+            <a:r>
+              <a:rPr b="1"/>
+              <a:t>phần cứng</a:t>
+            </a:r>
+          </a:p>
+        </p:txBody>
+      </p:sp>
+      <p:graphicFrame>
+        <p:nvGraphicFramePr>
+          <p:cNvPr id="6" name="Content Placeholder 5"/>
+          <p:cNvGraphicFramePr>
+            <a:graphicFrameLocks noGrp="1"/>
+          </p:cNvGraphicFramePr>
+          <p:nvPr>
+            <p:ph idx="1"/>
+          </p:nvPr>
+        </p:nvGraphicFramePr>
+        <p:xfrm>
+          <a:off x="762000" y="2209800"/>
+          <a:ext cx="10579100" cy="3962400"/>
+        </p:xfrm>
+        <a:graphic>
+          <a:graphicData uri="http://schemas.openxmlformats.org/drawingml/2006/table">
+            <a:tbl>
+              <a:tblPr firstRow="1" bandRow="1">
+                <a:tableStyleId>{45BEF19B-5B1D-4A26-B267-ECC71EF7E2D4}</a:tableStyleId>
+              </a:tblPr>
+              <a:tblGrid>
+                <a:gridCol w="3517900"/>
+                <a:gridCol w="3517900"/>
+                <a:gridCol w="3517900"/>
+              </a:tblGrid>
+              <a:tr h="0">
+                <a:tc>
+                  <a:txBody>
+                    <a:bodyPr/>
+                    <a:lstStyle/>
+                    <a:p>
+                      <a:pPr lvl="0" indent="0" marL="0">
+                        <a:buNone/>
+                      </a:pPr>
+                      <a:r>
+                        <a:rPr/>
+                        <a:t>Chỉ tiêu</a:t>
+                      </a:r>
+                    </a:p>
+                  </a:txBody>
+                  <a:tcPr/>
+                </a:tc>
+                <a:tc>
+                  <a:txBody>
+                    <a:bodyPr/>
+                    <a:lstStyle/>
+                    <a:p>
+                      <a:pPr lvl="0" indent="0" marL="0" algn="r">
+                        <a:buNone/>
+                      </a:pPr>
+                      <a:r>
+                        <a:rPr/>
+                        <a:t>Hiện tại</a:t>
+                      </a:r>
+                    </a:p>
+                  </a:txBody>
+                  <a:tcPr/>
+                </a:tc>
+                <a:tc>
+                  <a:txBody>
+                    <a:bodyPr/>
+                    <a:lstStyle/>
+                    <a:p>
+                      <a:pPr lvl="0" indent="0" marL="0">
+                        <a:buNone/>
+                      </a:pPr>
+                      <a:r>
+                        <a:rPr/>
+                        <a:t>Nếu đổi sang v6</a:t>
+                      </a:r>
+                    </a:p>
+                  </a:txBody>
+                  <a:tcPr/>
+                </a:tc>
+              </a:tr>
+              <a:tr h="0">
+                <a:tc>
+                  <a:txBody>
+                    <a:bodyPr/>
+                    <a:lstStyle/>
+                    <a:p>
+                      <a:pPr lvl="0" indent="0" marL="0">
+                        <a:buNone/>
+                      </a:pPr>
+                      <a:r>
+                        <a:rPr/>
+                        <a:t>NFR-P1 p95</a:t>
+                      </a:r>
+                    </a:p>
+                  </a:txBody>
+                </a:tc>
+                <a:tc>
+                  <a:txBody>
+                    <a:bodyPr/>
+                    <a:lstStyle/>
+                    <a:p>
+                      <a:pPr lvl="0" indent="0" marL="0" algn="r">
+                        <a:buNone/>
+                      </a:pPr>
+                      <a:r>
+                        <a:rPr/>
+                        <a:t>1.143 ms 🟡</a:t>
+                      </a:r>
+                    </a:p>
+                  </a:txBody>
+                </a:tc>
+                <a:tc>
+                  <a:txBody>
+                    <a:bodyPr/>
+                    <a:lstStyle/>
+                    <a:p>
+                      <a:pPr lvl="0" indent="0" marL="0">
+                        <a:buNone/>
+                      </a:pPr>
+                      <a:r>
+                        <a:rPr b="1"/>
+                        <a:t>vượt sàn</a:t>
+                      </a:r>
+                      <a:r>
+                        <a:rPr/>
+                        <a:t> ❌</a:t>
+                      </a:r>
+                    </a:p>
+                  </a:txBody>
+                </a:tc>
+              </a:tr>
+              <a:tr h="0">
+                <a:tc>
+                  <a:txBody>
+                    <a:bodyPr/>
+                    <a:lstStyle/>
+                    <a:p>
+                      <a:pPr lvl="0" indent="0" marL="0">
+                        <a:buNone/>
+                      </a:pPr>
+                      <a:r>
+                        <a:rPr/>
+                        <a:t>NFR-P2 FPS</a:t>
+                      </a:r>
+                    </a:p>
+                  </a:txBody>
+                </a:tc>
+                <a:tc>
+                  <a:txBody>
+                    <a:bodyPr/>
+                    <a:lstStyle/>
+                    <a:p>
+                      <a:pPr lvl="0" indent="0" marL="0" algn="r">
+                        <a:buNone/>
+                      </a:pPr>
+                      <a:r>
+                        <a:rPr/>
+                        <a:t>2,379 ❌</a:t>
+                      </a:r>
+                    </a:p>
+                  </a:txBody>
+                </a:tc>
+                <a:tc>
+                  <a:txBody>
+                    <a:bodyPr/>
+                    <a:lstStyle/>
+                    <a:p>
+                      <a:pPr lvl="0" indent="0" marL="0">
+                        <a:buNone/>
+                      </a:pPr>
+                      <a:r>
+                        <a:rPr/>
+                        <a:t>tệ hơn</a:t>
+                      </a:r>
+                    </a:p>
+                  </a:txBody>
+                </a:tc>
+              </a:tr>
+            </a:tbl>
+          </a:graphicData>
+        </a:graphic>
+      </p:graphicFrame>
+      <p:sp>
+        <p:nvSpPr>
+          <p:cNvPr id="449" name="Google Shape;449;p31"/>
+          <p:cNvSpPr txBox="1"/>
+          <p:nvPr>
+            <p:ph idx="12" type="sldNum"/>
+          </p:nvPr>
+        </p:nvSpPr>
+        <p:spPr>
+          <a:xfrm>
+            <a:off x="58380" y="6508358"/>
+            <a:ext cx="349642" cy="349642"/>
+          </a:xfrm>
+          <a:prstGeom prst="rect">
+            <a:avLst/>
+          </a:prstGeom>
+          <a:noFill/>
+          <a:ln>
+            <a:noFill/>
+          </a:ln>
+        </p:spPr>
+        <p:txBody>
+          <a:bodyPr anchor="ctr" anchorCtr="0" bIns="45700" lIns="91425" rIns="91425" spcFirstLastPara="1" tIns="45700" wrap="square">
+            <a:noAutofit/>
+          </a:bodyPr>
+          <a:lstStyle>
+            <a:lvl1pPr algn="ctr" indent="0" lvl="0" marL="0">
+              <a:spcBef>
+                <a:spcPts val="0"/>
+              </a:spcBef>
+              <a:buNone/>
+              <a:defRPr sz="700">
+                <a:solidFill>
+                  <a:schemeClr val="dk1"/>
+                </a:solidFill>
+                <a:latin typeface="Arial"/>
+                <a:ea typeface="Arial"/>
+                <a:cs typeface="Arial"/>
+                <a:sym typeface="Arial"/>
+              </a:defRPr>
+            </a:lvl1pPr>
+            <a:lvl2pPr algn="ctr" indent="0" lvl="1" marL="0">
+              <a:spcBef>
+                <a:spcPts val="0"/>
+              </a:spcBef>
+              <a:buNone/>
+              <a:defRPr sz="700">
+                <a:solidFill>
+                  <a:schemeClr val="dk1"/>
+                </a:solidFill>
+                <a:latin typeface="Arial"/>
+                <a:ea typeface="Arial"/>
+                <a:cs typeface="Arial"/>
+                <a:sym typeface="Arial"/>
+              </a:defRPr>
+            </a:lvl2pPr>
+            <a:lvl3pPr algn="ctr" indent="0" lvl="2" marL="0">
+              <a:spcBef>
+                <a:spcPts val="0"/>
+              </a:spcBef>
+              <a:buNone/>
+              <a:defRPr sz="700">
+                <a:solidFill>
+                  <a:schemeClr val="dk1"/>
+                </a:solidFill>
+                <a:latin typeface="Arial"/>
+                <a:ea typeface="Arial"/>
+                <a:cs typeface="Arial"/>
+                <a:sym typeface="Arial"/>
+              </a:defRPr>
+            </a:lvl3pPr>
+            <a:lvl4pPr algn="ctr" indent="0" lvl="3" marL="0">
+              <a:spcBef>
+                <a:spcPts val="0"/>
+              </a:spcBef>
+              <a:buNone/>
+              <a:defRPr sz="700">
+                <a:solidFill>
+                  <a:schemeClr val="dk1"/>
+                </a:solidFill>
+                <a:latin typeface="Arial"/>
+                <a:ea typeface="Arial"/>
+                <a:cs typeface="Arial"/>
+                <a:sym typeface="Arial"/>
+              </a:defRPr>
+            </a:lvl4pPr>
+            <a:lvl5pPr algn="ctr" indent="0" lvl="4" marL="0">
+              <a:spcBef>
+                <a:spcPts val="0"/>
+              </a:spcBef>
+              <a:buNone/>
+              <a:defRPr sz="700">
+                <a:solidFill>
+                  <a:schemeClr val="dk1"/>
+                </a:solidFill>
+                <a:latin typeface="Arial"/>
+                <a:ea typeface="Arial"/>
+                <a:cs typeface="Arial"/>
+                <a:sym typeface="Arial"/>
+              </a:defRPr>
+            </a:lvl5pPr>
+            <a:lvl6pPr algn="ctr" indent="0" lvl="5" marL="0">
+              <a:spcBef>
+                <a:spcPts val="0"/>
+              </a:spcBef>
+              <a:buNone/>
+              <a:defRPr sz="700">
+                <a:solidFill>
+                  <a:schemeClr val="dk1"/>
+                </a:solidFill>
+                <a:latin typeface="Arial"/>
+                <a:ea typeface="Arial"/>
+                <a:cs typeface="Arial"/>
+                <a:sym typeface="Arial"/>
+              </a:defRPr>
+            </a:lvl6pPr>
+            <a:lvl7pPr algn="ctr" indent="0" lvl="6" marL="0">
+              <a:spcBef>
+                <a:spcPts val="0"/>
+              </a:spcBef>
+              <a:buNone/>
+              <a:defRPr sz="700">
+                <a:solidFill>
+                  <a:schemeClr val="dk1"/>
+                </a:solidFill>
+                <a:latin typeface="Arial"/>
+                <a:ea typeface="Arial"/>
+                <a:cs typeface="Arial"/>
+                <a:sym typeface="Arial"/>
+              </a:defRPr>
+            </a:lvl7pPr>
+            <a:lvl8pPr algn="ctr" indent="0" lvl="7" marL="0">
+              <a:spcBef>
+                <a:spcPts val="0"/>
+              </a:spcBef>
+              <a:buNone/>
+              <a:defRPr sz="700">
+                <a:solidFill>
+                  <a:schemeClr val="dk1"/>
+                </a:solidFill>
+                <a:latin typeface="Arial"/>
+                <a:ea typeface="Arial"/>
+                <a:cs typeface="Arial"/>
+                <a:sym typeface="Arial"/>
+              </a:defRPr>
+            </a:lvl8pPr>
+            <a:lvl9pPr algn="ctr" indent="0" lvl="8" marL="0">
+              <a:spcBef>
+                <a:spcPts val="0"/>
+              </a:spcBef>
+              <a:buNone/>
+              <a:defRPr sz="700">
+                <a:solidFill>
+                  <a:schemeClr val="dk1"/>
+                </a:solidFill>
+                <a:latin typeface="Arial"/>
+                <a:ea typeface="Arial"/>
+                <a:cs typeface="Arial"/>
+                <a:sym typeface="Arial"/>
+              </a:defRPr>
+            </a:lvl9pPr>
+          </a:lstStyle>
+          <a:p>
+            <a:pPr algn="ctr" indent="0" lvl="0" marL="0" rtl="0">
+              <a:spcBef>
+                <a:spcPts val="0"/>
+              </a:spcBef>
+              <a:spcAft>
+                <a:spcPts val="0"/>
+              </a:spcAft>
+              <a:buNone/>
+            </a:pPr>
+            <a:fld id="{00000000-1234-1234-1234-123412341234}" type="slidenum">
+              <a:rPr lang="en-US"/>
+              <a:t>‹#›</a:t>
+            </a:fld>
+            <a:endParaRPr/>
+          </a:p>
+        </p:txBody>
+      </p:sp>
+    </p:spTree>
+  </p:cSld>
+</p:sld>
+</file>
+
 <file path=ppt/slides/slide4.xml><?xml version="1.0" encoding="utf-8"?>
 <p:sld xmlns:a="http://schemas.openxmlformats.org/drawingml/2006/main" xmlns:r="http://schemas.openxmlformats.org/officeDocument/2006/relationships" xmlns:p="http://schemas.openxmlformats.org/presentationml/2006/main">
   <p:cSld>

--- a/docs/slides/slides.pptx
+++ b/docs/slides/slides.pptx
@@ -33,27 +33,23 @@
     <p:sldId id="281" r:id="rId30"/>
     <p:sldId id="282" r:id="rId31"/>
     <p:sldId id="283" r:id="rId32"/>
-    <p:sldId id="284" r:id="rId33"/>
-    <p:sldId id="285" r:id="rId34"/>
-    <p:sldId id="286" r:id="rId35"/>
-    <p:sldId id="287" r:id="rId36"/>
   </p:sldIdLst>
   <p:sldSz cx="12192000" cy="6858000"/>
   <p:notesSz cx="6858000" cy="9144000"/>
   <p:embeddedFontLst>
     <p:embeddedFont>
       <p:font typeface="Roboto"/>
+      <p:regular r:id="rId33"/>
+      <p:bold r:id="rId34"/>
+      <p:italic r:id="rId35"/>
+      <p:boldItalic r:id="rId36"/>
+    </p:embeddedFont>
+    <p:embeddedFont>
+      <p:font typeface="Open Sans"/>
       <p:regular r:id="rId37"/>
       <p:bold r:id="rId38"/>
       <p:italic r:id="rId39"/>
       <p:boldItalic r:id="rId40"/>
-    </p:embeddedFont>
-    <p:embeddedFont>
-      <p:font typeface="Open Sans"/>
-      <p:regular r:id="rId41"/>
-      <p:bold r:id="rId42"/>
-      <p:italic r:id="rId43"/>
-      <p:boldItalic r:id="rId44"/>
     </p:embeddedFont>
   </p:embeddedFontLst>
   <p:defaultTextStyle>
@@ -287,7 +283,7 @@
   </p:defaultTextStyle>
   <p:extLst>
     <p:ext uri="GoogleSlidesCustomDataVersion2">
-      <go:slidesCustomData xmlns:go="http://customooxmlschemas.google.com/" roundtripDataSignature="AMtx7mhu5dURU4INwSlvEO7StWDXKr50jg==" r:id="rId45"/>
+      <go:slidesCustomData xmlns:go="http://customooxmlschemas.google.com/" roundtripDataSignature="AMtx7mhu5dURU4INwSlvEO7StWDXKr50jg==" r:id="rId41"/>
     </p:ext>
   </p:extLst>
 </p:presentation>
@@ -50959,1171 +50955,7 @@
             </a:pPr>
             <a:r>
               <a:rPr/>
-              <a:t>Backup 1 — Kiến trúc mô hình YOLO11</a:t>
-            </a:r>
-          </a:p>
-        </p:txBody>
-      </p:sp>
-      <p:sp>
-        <p:nvSpPr>
-          <p:cNvPr id="437" name="Google Shape;437;p31"/>
-          <p:cNvSpPr txBox="1"/>
-          <p:nvPr>
-            <p:ph idx="2" sz="half" type="body"/>
-          </p:nvPr>
-        </p:nvSpPr>
-        <p:spPr/>
-        <p:txBody>
-          <a:bodyPr/>
-          <a:lstStyle/>
-          <a:p>
-            <a:pPr lvl="0" indent="0" marL="0">
-              <a:buNone/>
-            </a:pPr>
-            <a:r>
-              <a:rPr/>
-              <a:t>Cải tiến mạng trích xuất đặc trưng &amp; head phát hiện đa tỉ lệ </a:t>
-            </a:r>
-            <a:r>
-              <a:rPr i="1"/>
-              <a:t>(Ultralytics 2024)</a:t>
-            </a:r>
-          </a:p>
-        </p:txBody>
-      </p:sp>
-      <p:graphicFrame>
-        <p:nvGraphicFramePr>
-          <p:cNvPr id="6" name="Content Placeholder 5"/>
-          <p:cNvGraphicFramePr>
-            <a:graphicFrameLocks noGrp="1"/>
-          </p:cNvGraphicFramePr>
-          <p:nvPr>
-            <p:ph idx="1"/>
-          </p:nvPr>
-        </p:nvGraphicFramePr>
-        <p:xfrm>
-          <a:off x="762000" y="2324100"/>
-          <a:ext cx="10579100" cy="3848100"/>
-        </p:xfrm>
-        <a:graphic>
-          <a:graphicData uri="http://schemas.openxmlformats.org/drawingml/2006/table">
-            <a:tbl>
-              <a:tblPr firstRow="1" bandRow="1">
-                <a:tableStyleId>{45BEF19B-5B1D-4A26-B267-ECC71EF7E2D4}</a:tableStyleId>
-              </a:tblPr>
-              <a:tblGrid>
-                <a:gridCol w="3517900"/>
-                <a:gridCol w="3517900"/>
-                <a:gridCol w="3517900"/>
-              </a:tblGrid>
-              <a:tr h="0">
-                <a:tc>
-                  <a:txBody>
-                    <a:bodyPr/>
-                    <a:lstStyle/>
-                    <a:p>
-                      <a:pPr lvl="0" indent="0" marL="0">
-                        <a:buNone/>
-                      </a:pPr>
-                      <a:r>
-                        <a:rPr/>
-                        <a:t>Thành phần</a:t>
-                      </a:r>
-                    </a:p>
-                  </a:txBody>
-                  <a:tcPr/>
-                </a:tc>
-                <a:tc>
-                  <a:txBody>
-                    <a:bodyPr/>
-                    <a:lstStyle/>
-                    <a:p>
-                      <a:pPr lvl="0" indent="0" marL="0">
-                        <a:buNone/>
-                      </a:pPr>
-                      <a:r>
-                        <a:rPr/>
-                        <a:t>Chi tiết kỹ thuật</a:t>
-                      </a:r>
-                    </a:p>
-                  </a:txBody>
-                  <a:tcPr/>
-                </a:tc>
-                <a:tc>
-                  <a:txBody>
-                    <a:bodyPr/>
-                    <a:lstStyle/>
-                    <a:p>
-                      <a:pPr lvl="0" indent="0" marL="0">
-                        <a:buNone/>
-                      </a:pPr>
-                      <a:r>
-                        <a:rPr/>
-                        <a:t>Vai trò trong hệ thống ALPR</a:t>
-                      </a:r>
-                    </a:p>
-                  </a:txBody>
-                  <a:tcPr/>
-                </a:tc>
-              </a:tr>
-              <a:tr h="0">
-                <a:tc>
-                  <a:txBody>
-                    <a:bodyPr/>
-                    <a:lstStyle/>
-                    <a:p>
-                      <a:pPr lvl="0" indent="0" marL="0">
-                        <a:buNone/>
-                      </a:pPr>
-                      <a:r>
-                        <a:rPr b="1"/>
-                        <a:t>Backbone</a:t>
-                      </a:r>
-                    </a:p>
-                  </a:txBody>
-                </a:tc>
-                <a:tc>
-                  <a:txBody>
-                    <a:bodyPr/>
-                    <a:lstStyle/>
-                    <a:p>
-                      <a:pPr lvl="0" indent="0" marL="0">
-                        <a:buNone/>
-                      </a:pPr>
-                      <a:r>
-                        <a:rPr/>
-                        <a:t>Block </a:t>
-                      </a:r>
-                      <a:r>
-                        <a:rPr b="1"/>
-                        <a:t>C3k2</a:t>
-                      </a:r>
-                      <a:r>
-                        <a:rPr/>
-                        <a:t> &amp; </a:t>
-                      </a:r>
-                      <a:r>
-                        <a:rPr b="1"/>
-                        <a:t>C2PSA</a:t>
-                      </a:r>
-                      <a:r>
-                        <a:rPr/>
-                        <a:t> </a:t>
-                      </a:r>
-                      <a:r>
-                        <a:rPr i="1"/>
-                        <a:t>(Attention)</a:t>
-                      </a:r>
-                    </a:p>
-                  </a:txBody>
-                </a:tc>
-                <a:tc>
-                  <a:txBody>
-                    <a:bodyPr/>
-                    <a:lstStyle/>
-                    <a:p>
-                      <a:pPr lvl="0" indent="0" marL="0">
-                        <a:buNone/>
-                      </a:pPr>
-                      <a:r>
-                        <a:rPr/>
-                        <a:t>Trích xuất đặc trưng vùng biển số sắc nét ở nhiều góc nghiêng</a:t>
-                      </a:r>
-                    </a:p>
-                  </a:txBody>
-                </a:tc>
-              </a:tr>
-              <a:tr h="0">
-                <a:tc>
-                  <a:txBody>
-                    <a:bodyPr/>
-                    <a:lstStyle/>
-                    <a:p>
-                      <a:pPr lvl="0" indent="0" marL="0">
-                        <a:buNone/>
-                      </a:pPr>
-                      <a:r>
-                        <a:rPr b="1"/>
-                        <a:t>Neck</a:t>
-                      </a:r>
-                    </a:p>
-                  </a:txBody>
-                </a:tc>
-                <a:tc>
-                  <a:txBody>
-                    <a:bodyPr/>
-                    <a:lstStyle/>
-                    <a:p>
-                      <a:pPr lvl="0" indent="0" marL="0">
-                        <a:buNone/>
-                      </a:pPr>
-                      <a:r>
-                        <a:rPr b="1"/>
-                        <a:t>SPPF</a:t>
-                      </a:r>
-                      <a:r>
-                        <a:rPr/>
-                        <a:t> </a:t>
-                      </a:r>
-                      <a:r>
-                        <a:rPr i="1"/>
-                        <a:t>(Spatial Pyramid Pooling - Fast)</a:t>
-                      </a:r>
-                    </a:p>
-                  </a:txBody>
-                </a:tc>
-                <a:tc>
-                  <a:txBody>
-                    <a:bodyPr/>
-                    <a:lstStyle/>
-                    <a:p>
-                      <a:pPr lvl="0" indent="0" marL="0">
-                        <a:buNone/>
-                      </a:pPr>
-                      <a:r>
-                        <a:rPr/>
-                        <a:t>Tăng cường thông tin ngữ cảnh đa tỉ lệ mà không tăng độ trễ</a:t>
-                      </a:r>
-                    </a:p>
-                  </a:txBody>
-                </a:tc>
-              </a:tr>
-              <a:tr h="0">
-                <a:tc>
-                  <a:txBody>
-                    <a:bodyPr/>
-                    <a:lstStyle/>
-                    <a:p>
-                      <a:pPr lvl="0" indent="0" marL="0">
-                        <a:buNone/>
-                      </a:pPr>
-                      <a:r>
-                        <a:rPr b="1"/>
-                        <a:t>Head</a:t>
-                      </a:r>
-                    </a:p>
-                  </a:txBody>
-                </a:tc>
-                <a:tc>
-                  <a:txBody>
-                    <a:bodyPr/>
-                    <a:lstStyle/>
-                    <a:p>
-                      <a:pPr lvl="0" indent="0" marL="0">
-                        <a:buNone/>
-                      </a:pPr>
-                      <a:r>
-                        <a:rPr/>
-                        <a:t>Anchor-free Decoupled Head</a:t>
-                      </a:r>
-                    </a:p>
-                  </a:txBody>
-                </a:tc>
-                <a:tc>
-                  <a:txBody>
-                    <a:bodyPr/>
-                    <a:lstStyle/>
-                    <a:p>
-                      <a:pPr lvl="0" indent="0" marL="0">
-                        <a:buNone/>
-                      </a:pPr>
-                      <a:r>
-                        <a:rPr/>
-                        <a:t>Dự đoán bounding box của lớp </a:t>
-                      </a:r>
-                      <a:r>
-                        <a:rPr>
-                          <a:latin typeface="Courier"/>
-                        </a:rPr>
-                        <a:t>license_plate</a:t>
-                      </a:r>
-                      <a:r>
-                        <a:rPr/>
-                        <a:t>; bố cục một/hai dòng được suy ra ở bước hậu xử lý theo tỷ lệ khung hình</a:t>
-                      </a:r>
-                    </a:p>
-                  </a:txBody>
-                </a:tc>
-              </a:tr>
-              <a:tr h="0">
-                <a:tc>
-                  <a:txBody>
-                    <a:bodyPr/>
-                    <a:lstStyle/>
-                    <a:p>
-                      <a:pPr lvl="0" indent="0" marL="0">
-                        <a:buNone/>
-                      </a:pPr>
-                      <a:r>
-                        <a:rPr b="1"/>
-                        <a:t>Quy mô</a:t>
-                      </a:r>
-                    </a:p>
-                  </a:txBody>
-                </a:tc>
-                <a:tc>
-                  <a:txBody>
-                    <a:bodyPr/>
-                    <a:lstStyle/>
-                    <a:p>
-                      <a:pPr lvl="0" indent="0" marL="0">
-                        <a:buNone/>
-                      </a:pPr>
-                      <a:r>
-                        <a:rPr b="1"/>
-                        <a:t>YOLO11n</a:t>
-                      </a:r>
-                      <a:r>
-                        <a:rPr/>
-                        <a:t> · </a:t>
-                      </a:r>
-                      <a:r>
-                        <a:rPr b="1"/>
-                        <a:t>2,6M params</a:t>
-                      </a:r>
-                      <a:r>
-                        <a:rPr/>
-                        <a:t> · </a:t>
-                      </a:r>
-                      <a:r>
-                        <a:rPr b="1"/>
-                        <a:t>6,5 GFLOPs</a:t>
-                      </a:r>
-                    </a:p>
-                  </a:txBody>
-                </a:tc>
-                <a:tc>
-                  <a:txBody>
-                    <a:bodyPr/>
-                    <a:lstStyle/>
-                    <a:p>
-                      <a:pPr lvl="0" indent="0" marL="0">
-                        <a:buNone/>
-                      </a:pPr>
-                      <a:r>
-                        <a:rPr/>
-                        <a:t>Đạt </a:t>
-                      </a:r>
-                      <a:r>
-                        <a:rPr b="1"/>
-                        <a:t>mAP50 0,983</a:t>
-                      </a:r>
-                      <a:r>
-                        <a:rPr/>
-                        <a:t> trên CPU với tốc độ ~35 ms/khung hình</a:t>
-                      </a:r>
-                    </a:p>
-                  </a:txBody>
-                </a:tc>
-              </a:tr>
-            </a:tbl>
-          </a:graphicData>
-        </a:graphic>
-      </p:graphicFrame>
-      <p:sp>
-        <p:nvSpPr>
-          <p:cNvPr id="449" name="Google Shape;449;p31"/>
-          <p:cNvSpPr txBox="1"/>
-          <p:nvPr>
-            <p:ph idx="12" type="sldNum"/>
-          </p:nvPr>
-        </p:nvSpPr>
-        <p:spPr>
-          <a:xfrm>
-            <a:off x="58380" y="6508358"/>
-            <a:ext cx="349642" cy="349642"/>
-          </a:xfrm>
-          <a:prstGeom prst="rect">
-            <a:avLst/>
-          </a:prstGeom>
-          <a:noFill/>
-          <a:ln>
-            <a:noFill/>
-          </a:ln>
-        </p:spPr>
-        <p:txBody>
-          <a:bodyPr anchor="ctr" anchorCtr="0" bIns="45700" lIns="91425" rIns="91425" spcFirstLastPara="1" tIns="45700" wrap="square">
-            <a:noAutofit/>
-          </a:bodyPr>
-          <a:lstStyle>
-            <a:lvl1pPr algn="ctr" indent="0" lvl="0" marL="0">
-              <a:spcBef>
-                <a:spcPts val="0"/>
-              </a:spcBef>
-              <a:buNone/>
-              <a:defRPr sz="700">
-                <a:solidFill>
-                  <a:schemeClr val="dk1"/>
-                </a:solidFill>
-                <a:latin typeface="Arial"/>
-                <a:ea typeface="Arial"/>
-                <a:cs typeface="Arial"/>
-                <a:sym typeface="Arial"/>
-              </a:defRPr>
-            </a:lvl1pPr>
-            <a:lvl2pPr algn="ctr" indent="0" lvl="1" marL="0">
-              <a:spcBef>
-                <a:spcPts val="0"/>
-              </a:spcBef>
-              <a:buNone/>
-              <a:defRPr sz="700">
-                <a:solidFill>
-                  <a:schemeClr val="dk1"/>
-                </a:solidFill>
-                <a:latin typeface="Arial"/>
-                <a:ea typeface="Arial"/>
-                <a:cs typeface="Arial"/>
-                <a:sym typeface="Arial"/>
-              </a:defRPr>
-            </a:lvl2pPr>
-            <a:lvl3pPr algn="ctr" indent="0" lvl="2" marL="0">
-              <a:spcBef>
-                <a:spcPts val="0"/>
-              </a:spcBef>
-              <a:buNone/>
-              <a:defRPr sz="700">
-                <a:solidFill>
-                  <a:schemeClr val="dk1"/>
-                </a:solidFill>
-                <a:latin typeface="Arial"/>
-                <a:ea typeface="Arial"/>
-                <a:cs typeface="Arial"/>
-                <a:sym typeface="Arial"/>
-              </a:defRPr>
-            </a:lvl3pPr>
-            <a:lvl4pPr algn="ctr" indent="0" lvl="3" marL="0">
-              <a:spcBef>
-                <a:spcPts val="0"/>
-              </a:spcBef>
-              <a:buNone/>
-              <a:defRPr sz="700">
-                <a:solidFill>
-                  <a:schemeClr val="dk1"/>
-                </a:solidFill>
-                <a:latin typeface="Arial"/>
-                <a:ea typeface="Arial"/>
-                <a:cs typeface="Arial"/>
-                <a:sym typeface="Arial"/>
-              </a:defRPr>
-            </a:lvl4pPr>
-            <a:lvl5pPr algn="ctr" indent="0" lvl="4" marL="0">
-              <a:spcBef>
-                <a:spcPts val="0"/>
-              </a:spcBef>
-              <a:buNone/>
-              <a:defRPr sz="700">
-                <a:solidFill>
-                  <a:schemeClr val="dk1"/>
-                </a:solidFill>
-                <a:latin typeface="Arial"/>
-                <a:ea typeface="Arial"/>
-                <a:cs typeface="Arial"/>
-                <a:sym typeface="Arial"/>
-              </a:defRPr>
-            </a:lvl5pPr>
-            <a:lvl6pPr algn="ctr" indent="0" lvl="5" marL="0">
-              <a:spcBef>
-                <a:spcPts val="0"/>
-              </a:spcBef>
-              <a:buNone/>
-              <a:defRPr sz="700">
-                <a:solidFill>
-                  <a:schemeClr val="dk1"/>
-                </a:solidFill>
-                <a:latin typeface="Arial"/>
-                <a:ea typeface="Arial"/>
-                <a:cs typeface="Arial"/>
-                <a:sym typeface="Arial"/>
-              </a:defRPr>
-            </a:lvl6pPr>
-            <a:lvl7pPr algn="ctr" indent="0" lvl="6" marL="0">
-              <a:spcBef>
-                <a:spcPts val="0"/>
-              </a:spcBef>
-              <a:buNone/>
-              <a:defRPr sz="700">
-                <a:solidFill>
-                  <a:schemeClr val="dk1"/>
-                </a:solidFill>
-                <a:latin typeface="Arial"/>
-                <a:ea typeface="Arial"/>
-                <a:cs typeface="Arial"/>
-                <a:sym typeface="Arial"/>
-              </a:defRPr>
-            </a:lvl7pPr>
-            <a:lvl8pPr algn="ctr" indent="0" lvl="7" marL="0">
-              <a:spcBef>
-                <a:spcPts val="0"/>
-              </a:spcBef>
-              <a:buNone/>
-              <a:defRPr sz="700">
-                <a:solidFill>
-                  <a:schemeClr val="dk1"/>
-                </a:solidFill>
-                <a:latin typeface="Arial"/>
-                <a:ea typeface="Arial"/>
-                <a:cs typeface="Arial"/>
-                <a:sym typeface="Arial"/>
-              </a:defRPr>
-            </a:lvl8pPr>
-            <a:lvl9pPr algn="ctr" indent="0" lvl="8" marL="0">
-              <a:spcBef>
-                <a:spcPts val="0"/>
-              </a:spcBef>
-              <a:buNone/>
-              <a:defRPr sz="700">
-                <a:solidFill>
-                  <a:schemeClr val="dk1"/>
-                </a:solidFill>
-                <a:latin typeface="Arial"/>
-                <a:ea typeface="Arial"/>
-                <a:cs typeface="Arial"/>
-                <a:sym typeface="Arial"/>
-              </a:defRPr>
-            </a:lvl9pPr>
-          </a:lstStyle>
-          <a:p>
-            <a:pPr algn="ctr" indent="0" lvl="0" marL="0" rtl="0">
-              <a:spcBef>
-                <a:spcPts val="0"/>
-              </a:spcBef>
-              <a:spcAft>
-                <a:spcPts val="0"/>
-              </a:spcAft>
-              <a:buNone/>
-            </a:pPr>
-            <a:fld id="{00000000-1234-1234-1234-123412341234}" type="slidenum">
-              <a:rPr lang="en-US"/>
-              <a:t>‹#›</a:t>
-            </a:fld>
-            <a:endParaRPr/>
-          </a:p>
-        </p:txBody>
-      </p:sp>
-    </p:spTree>
-  </p:cSld>
-</p:sld>
-</file>
-
-<file path=ppt/slides/slide26.xml><?xml version="1.0" encoding="utf-8"?>
-<p:sld xmlns:a="http://schemas.openxmlformats.org/drawingml/2006/main" xmlns:r="http://schemas.openxmlformats.org/officeDocument/2006/relationships" xmlns:p="http://schemas.openxmlformats.org/presentationml/2006/main">
-  <p:cSld>
-    <p:spTree>
-      <p:nvGrpSpPr>
-        <p:cNvPr id="428" name="Shape 428"/>
-        <p:cNvGrpSpPr/>
-        <p:nvPr/>
-      </p:nvGrpSpPr>
-      <p:grpSpPr>
-        <a:xfrm>
-          <a:off x="0" y="0"/>
-          <a:ext cx="0" cy="0"/>
-          <a:chOff x="0" y="0"/>
-          <a:chExt cx="0" cy="0"/>
-        </a:xfrm>
-      </p:grpSpPr>
-      <p:sp>
-        <p:nvSpPr>
-          <p:cNvPr id="436" name="Google Shape;436;p31"/>
-          <p:cNvSpPr txBox="1"/>
-          <p:nvPr>
-            <p:ph type="title"/>
-          </p:nvPr>
-        </p:nvSpPr>
-        <p:spPr>
-          <a:xfrm>
-            <a:off x="771525" y="200025"/>
-            <a:ext cx="10582275" cy="790575"/>
-          </a:xfrm>
-          <a:prstGeom prst="rect">
-            <a:avLst/>
-          </a:prstGeom>
-          <a:noFill/>
-          <a:ln>
-            <a:noFill/>
-          </a:ln>
-        </p:spPr>
-        <p:txBody>
-          <a:bodyPr/>
-          <a:lstStyle/>
-          <a:p>
-            <a:pPr lvl="0" indent="0" marL="0">
-              <a:buNone/>
-            </a:pPr>
-            <a:r>
-              <a:rPr/>
-              <a:t>Backup 2 — Kiến trúc mô hình PP-OCRv5</a:t>
-            </a:r>
-          </a:p>
-        </p:txBody>
-      </p:sp>
-      <p:sp>
-        <p:nvSpPr>
-          <p:cNvPr id="437" name="Google Shape;437;p31"/>
-          <p:cNvSpPr txBox="1"/>
-          <p:nvPr>
-            <p:ph idx="2" sz="half" type="body"/>
-          </p:nvPr>
-        </p:nvSpPr>
-        <p:spPr/>
-        <p:txBody>
-          <a:bodyPr/>
-          <a:lstStyle/>
-          <a:p>
-            <a:pPr lvl="0" indent="0" marL="0">
-              <a:buNone/>
-            </a:pPr>
-            <a:r>
-              <a:rPr/>
-              <a:t>Mô hình nhận dạng ký tự siêu nhẹ chuyên biệt cho văn bản </a:t>
-            </a:r>
-            <a:r>
-              <a:rPr i="1"/>
-              <a:t>(PaddlePaddle 2025)</a:t>
-            </a:r>
-          </a:p>
-        </p:txBody>
-      </p:sp>
-      <p:graphicFrame>
-        <p:nvGraphicFramePr>
-          <p:cNvPr id="6" name="Content Placeholder 5"/>
-          <p:cNvGraphicFramePr>
-            <a:graphicFrameLocks noGrp="1"/>
-          </p:cNvGraphicFramePr>
-          <p:nvPr>
-            <p:ph idx="1"/>
-          </p:nvPr>
-        </p:nvGraphicFramePr>
-        <p:xfrm>
-          <a:off x="762000" y="2324100"/>
-          <a:ext cx="10579100" cy="3848100"/>
-        </p:xfrm>
-        <a:graphic>
-          <a:graphicData uri="http://schemas.openxmlformats.org/drawingml/2006/table">
-            <a:tbl>
-              <a:tblPr firstRow="1" bandRow="1">
-                <a:tableStyleId>{45BEF19B-5B1D-4A26-B267-ECC71EF7E2D4}</a:tableStyleId>
-              </a:tblPr>
-              <a:tblGrid>
-                <a:gridCol w="3517900"/>
-                <a:gridCol w="3517900"/>
-                <a:gridCol w="3517900"/>
-              </a:tblGrid>
-              <a:tr h="0">
-                <a:tc>
-                  <a:txBody>
-                    <a:bodyPr/>
-                    <a:lstStyle/>
-                    <a:p>
-                      <a:pPr lvl="0" indent="0" marL="0">
-                        <a:buNone/>
-                      </a:pPr>
-                      <a:r>
-                        <a:rPr/>
-                        <a:t>Thành phần</a:t>
-                      </a:r>
-                    </a:p>
-                  </a:txBody>
-                  <a:tcPr/>
-                </a:tc>
-                <a:tc>
-                  <a:txBody>
-                    <a:bodyPr/>
-                    <a:lstStyle/>
-                    <a:p>
-                      <a:pPr lvl="0" indent="0" marL="0">
-                        <a:buNone/>
-                      </a:pPr>
-                      <a:r>
-                        <a:rPr/>
-                        <a:t>Chi tiết kỹ thuật</a:t>
-                      </a:r>
-                    </a:p>
-                  </a:txBody>
-                  <a:tcPr/>
-                </a:tc>
-                <a:tc>
-                  <a:txBody>
-                    <a:bodyPr/>
-                    <a:lstStyle/>
-                    <a:p>
-                      <a:pPr lvl="0" indent="0" marL="0">
-                        <a:buNone/>
-                      </a:pPr>
-                      <a:r>
-                        <a:rPr/>
-                        <a:t>Vai trò trong hệ thống ALPR</a:t>
-                      </a:r>
-                    </a:p>
-                  </a:txBody>
-                  <a:tcPr/>
-                </a:tc>
-              </a:tr>
-              <a:tr h="0">
-                <a:tc>
-                  <a:txBody>
-                    <a:bodyPr/>
-                    <a:lstStyle/>
-                    <a:p>
-                      <a:pPr lvl="0" indent="0" marL="0">
-                        <a:buNone/>
-                      </a:pPr>
-                      <a:r>
-                        <a:rPr b="1"/>
-                        <a:t>Backbone</a:t>
-                      </a:r>
-                    </a:p>
-                  </a:txBody>
-                </a:tc>
-                <a:tc>
-                  <a:txBody>
-                    <a:bodyPr/>
-                    <a:lstStyle/>
-                    <a:p>
-                      <a:pPr lvl="0" indent="0" marL="0">
-                        <a:buNone/>
-                      </a:pPr>
-                      <a:r>
-                        <a:rPr b="1"/>
-                        <a:t>PP-LCNetV3</a:t>
-                      </a:r>
-                      <a:r>
-                        <a:rPr/>
-                        <a:t> </a:t>
-                      </a:r>
-                      <a:r>
-                        <a:rPr i="1"/>
-                        <a:t>(Lightweight CPU Net)</a:t>
-                      </a:r>
-                    </a:p>
-                  </a:txBody>
-                </a:tc>
-                <a:tc>
-                  <a:txBody>
-                    <a:bodyPr/>
-                    <a:lstStyle/>
-                    <a:p>
-                      <a:pPr lvl="0" indent="0" marL="0">
-                        <a:buNone/>
-                      </a:pPr>
-                      <a:r>
-                        <a:rPr/>
-                        <a:t>Trích xuất chuỗi đặc trưng ký tự cực nhanh trên CPU</a:t>
-                      </a:r>
-                    </a:p>
-                  </a:txBody>
-                </a:tc>
-              </a:tr>
-              <a:tr h="0">
-                <a:tc>
-                  <a:txBody>
-                    <a:bodyPr/>
-                    <a:lstStyle/>
-                    <a:p>
-                      <a:pPr lvl="0" indent="0" marL="0">
-                        <a:buNone/>
-                      </a:pPr>
-                      <a:r>
-                        <a:rPr b="1"/>
-                        <a:t>Neck</a:t>
-                      </a:r>
-                    </a:p>
-                  </a:txBody>
-                </a:tc>
-                <a:tc>
-                  <a:txBody>
-                    <a:bodyPr/>
-                    <a:lstStyle/>
-                    <a:p>
-                      <a:pPr lvl="0" indent="0" marL="0">
-                        <a:buNone/>
-                      </a:pPr>
-                      <a:r>
-                        <a:rPr b="1"/>
-                        <a:t>SVTR-HG</a:t>
-                      </a:r>
-                      <a:r>
-                        <a:rPr/>
-                        <a:t> </a:t>
-                      </a:r>
-                      <a:r>
-                        <a:rPr i="1"/>
-                        <a:t>(Gated-Attention Transformer)</a:t>
-                      </a:r>
-                    </a:p>
-                  </a:txBody>
-                </a:tc>
-                <a:tc>
-                  <a:txBody>
-                    <a:bodyPr/>
-                    <a:lstStyle/>
-                    <a:p>
-                      <a:pPr lvl="0" indent="0" marL="0">
-                        <a:buNone/>
-                      </a:pPr>
-                      <a:r>
-                        <a:rPr/>
-                        <a:t>Trích xuất thông tin ngữ cảnh chuỗi ký tự trên ảnh crop cao 64px</a:t>
-                      </a:r>
-                    </a:p>
-                  </a:txBody>
-                </a:tc>
-              </a:tr>
-              <a:tr h="0">
-                <a:tc>
-                  <a:txBody>
-                    <a:bodyPr/>
-                    <a:lstStyle/>
-                    <a:p>
-                      <a:pPr lvl="0" indent="0" marL="0">
-                        <a:buNone/>
-                      </a:pPr>
-                      <a:r>
-                        <a:rPr b="1"/>
-                        <a:t>Head &amp; Loss</a:t>
-                      </a:r>
-                    </a:p>
-                  </a:txBody>
-                </a:tc>
-                <a:tc>
-                  <a:txBody>
-                    <a:bodyPr/>
-                    <a:lstStyle/>
-                    <a:p>
-                      <a:pPr lvl="0" indent="0" marL="0">
-                        <a:buNone/>
-                      </a:pPr>
-                      <a:r>
-                        <a:rPr b="1"/>
-                        <a:t>CTC Head</a:t>
-                      </a:r>
-                      <a:r>
-                        <a:rPr/>
-                        <a:t> </a:t>
-                      </a:r>
-                      <a:r>
-                        <a:rPr i="1"/>
-                        <a:t>(Connectionist Temporal Classification)</a:t>
-                      </a:r>
-                    </a:p>
-                  </a:txBody>
-                </a:tc>
-                <a:tc>
-                  <a:txBody>
-                    <a:bodyPr/>
-                    <a:lstStyle/>
-                    <a:p>
-                      <a:pPr lvl="0" indent="0" marL="0">
-                        <a:buNone/>
-                      </a:pPr>
-                      <a:r>
-                        <a:rPr/>
-                        <a:t>Giải mã chuỗi ký tự không cần gán nhãn từng vạch đứng</a:t>
-                      </a:r>
-                    </a:p>
-                  </a:txBody>
-                </a:tc>
-              </a:tr>
-              <a:tr h="0">
-                <a:tc>
-                  <a:txBody>
-                    <a:bodyPr/>
-                    <a:lstStyle/>
-                    <a:p>
-                      <a:pPr lvl="0" indent="0" marL="0">
-                        <a:buNone/>
-                      </a:pPr>
-                      <a:r>
-                        <a:rPr b="1"/>
-                        <a:t>Quy mô</a:t>
-                      </a:r>
-                    </a:p>
-                  </a:txBody>
-                </a:tc>
-                <a:tc>
-                  <a:txBody>
-                    <a:bodyPr/>
-                    <a:lstStyle/>
-                    <a:p>
-                      <a:pPr lvl="0" indent="0" marL="0">
-                        <a:buNone/>
-                      </a:pPr>
-                      <a:r>
-                        <a:rPr b="1"/>
-                        <a:t>PP-OCRv5 Mobile</a:t>
-                      </a:r>
-                      <a:r>
-                        <a:rPr/>
-                        <a:t> · </a:t>
-                      </a:r>
-                      <a:r>
-                        <a:rPr b="1"/>
-                        <a:t>4,5 MB</a:t>
-                      </a:r>
-                    </a:p>
-                  </a:txBody>
-                </a:tc>
-                <a:tc>
-                  <a:txBody>
-                    <a:bodyPr/>
-                    <a:lstStyle/>
-                    <a:p>
-                      <a:pPr lvl="0" indent="0" marL="0">
-                        <a:buNone/>
-                      </a:pPr>
-                      <a:r>
-                        <a:rPr/>
-                        <a:t>Đạt </a:t>
-                      </a:r>
-                      <a:r>
-                        <a:rPr b="1"/>
-                        <a:t>94,83% accuracy từng ký tự</a:t>
-                      </a:r>
-                      <a:r>
-                        <a:rPr/>
-                        <a:t> trên vùng cắt biển số</a:t>
-                      </a:r>
-                    </a:p>
-                  </a:txBody>
-                </a:tc>
-              </a:tr>
-            </a:tbl>
-          </a:graphicData>
-        </a:graphic>
-      </p:graphicFrame>
-      <p:sp>
-        <p:nvSpPr>
-          <p:cNvPr id="449" name="Google Shape;449;p31"/>
-          <p:cNvSpPr txBox="1"/>
-          <p:nvPr>
-            <p:ph idx="12" type="sldNum"/>
-          </p:nvPr>
-        </p:nvSpPr>
-        <p:spPr>
-          <a:xfrm>
-            <a:off x="58380" y="6508358"/>
-            <a:ext cx="349642" cy="349642"/>
-          </a:xfrm>
-          <a:prstGeom prst="rect">
-            <a:avLst/>
-          </a:prstGeom>
-          <a:noFill/>
-          <a:ln>
-            <a:noFill/>
-          </a:ln>
-        </p:spPr>
-        <p:txBody>
-          <a:bodyPr anchor="ctr" anchorCtr="0" bIns="45700" lIns="91425" rIns="91425" spcFirstLastPara="1" tIns="45700" wrap="square">
-            <a:noAutofit/>
-          </a:bodyPr>
-          <a:lstStyle>
-            <a:lvl1pPr algn="ctr" indent="0" lvl="0" marL="0">
-              <a:spcBef>
-                <a:spcPts val="0"/>
-              </a:spcBef>
-              <a:buNone/>
-              <a:defRPr sz="700">
-                <a:solidFill>
-                  <a:schemeClr val="dk1"/>
-                </a:solidFill>
-                <a:latin typeface="Arial"/>
-                <a:ea typeface="Arial"/>
-                <a:cs typeface="Arial"/>
-                <a:sym typeface="Arial"/>
-              </a:defRPr>
-            </a:lvl1pPr>
-            <a:lvl2pPr algn="ctr" indent="0" lvl="1" marL="0">
-              <a:spcBef>
-                <a:spcPts val="0"/>
-              </a:spcBef>
-              <a:buNone/>
-              <a:defRPr sz="700">
-                <a:solidFill>
-                  <a:schemeClr val="dk1"/>
-                </a:solidFill>
-                <a:latin typeface="Arial"/>
-                <a:ea typeface="Arial"/>
-                <a:cs typeface="Arial"/>
-                <a:sym typeface="Arial"/>
-              </a:defRPr>
-            </a:lvl2pPr>
-            <a:lvl3pPr algn="ctr" indent="0" lvl="2" marL="0">
-              <a:spcBef>
-                <a:spcPts val="0"/>
-              </a:spcBef>
-              <a:buNone/>
-              <a:defRPr sz="700">
-                <a:solidFill>
-                  <a:schemeClr val="dk1"/>
-                </a:solidFill>
-                <a:latin typeface="Arial"/>
-                <a:ea typeface="Arial"/>
-                <a:cs typeface="Arial"/>
-                <a:sym typeface="Arial"/>
-              </a:defRPr>
-            </a:lvl3pPr>
-            <a:lvl4pPr algn="ctr" indent="0" lvl="3" marL="0">
-              <a:spcBef>
-                <a:spcPts val="0"/>
-              </a:spcBef>
-              <a:buNone/>
-              <a:defRPr sz="700">
-                <a:solidFill>
-                  <a:schemeClr val="dk1"/>
-                </a:solidFill>
-                <a:latin typeface="Arial"/>
-                <a:ea typeface="Arial"/>
-                <a:cs typeface="Arial"/>
-                <a:sym typeface="Arial"/>
-              </a:defRPr>
-            </a:lvl4pPr>
-            <a:lvl5pPr algn="ctr" indent="0" lvl="4" marL="0">
-              <a:spcBef>
-                <a:spcPts val="0"/>
-              </a:spcBef>
-              <a:buNone/>
-              <a:defRPr sz="700">
-                <a:solidFill>
-                  <a:schemeClr val="dk1"/>
-                </a:solidFill>
-                <a:latin typeface="Arial"/>
-                <a:ea typeface="Arial"/>
-                <a:cs typeface="Arial"/>
-                <a:sym typeface="Arial"/>
-              </a:defRPr>
-            </a:lvl5pPr>
-            <a:lvl6pPr algn="ctr" indent="0" lvl="5" marL="0">
-              <a:spcBef>
-                <a:spcPts val="0"/>
-              </a:spcBef>
-              <a:buNone/>
-              <a:defRPr sz="700">
-                <a:solidFill>
-                  <a:schemeClr val="dk1"/>
-                </a:solidFill>
-                <a:latin typeface="Arial"/>
-                <a:ea typeface="Arial"/>
-                <a:cs typeface="Arial"/>
-                <a:sym typeface="Arial"/>
-              </a:defRPr>
-            </a:lvl6pPr>
-            <a:lvl7pPr algn="ctr" indent="0" lvl="6" marL="0">
-              <a:spcBef>
-                <a:spcPts val="0"/>
-              </a:spcBef>
-              <a:buNone/>
-              <a:defRPr sz="700">
-                <a:solidFill>
-                  <a:schemeClr val="dk1"/>
-                </a:solidFill>
-                <a:latin typeface="Arial"/>
-                <a:ea typeface="Arial"/>
-                <a:cs typeface="Arial"/>
-                <a:sym typeface="Arial"/>
-              </a:defRPr>
-            </a:lvl7pPr>
-            <a:lvl8pPr algn="ctr" indent="0" lvl="7" marL="0">
-              <a:spcBef>
-                <a:spcPts val="0"/>
-              </a:spcBef>
-              <a:buNone/>
-              <a:defRPr sz="700">
-                <a:solidFill>
-                  <a:schemeClr val="dk1"/>
-                </a:solidFill>
-                <a:latin typeface="Arial"/>
-                <a:ea typeface="Arial"/>
-                <a:cs typeface="Arial"/>
-                <a:sym typeface="Arial"/>
-              </a:defRPr>
-            </a:lvl8pPr>
-            <a:lvl9pPr algn="ctr" indent="0" lvl="8" marL="0">
-              <a:spcBef>
-                <a:spcPts val="0"/>
-              </a:spcBef>
-              <a:buNone/>
-              <a:defRPr sz="700">
-                <a:solidFill>
-                  <a:schemeClr val="dk1"/>
-                </a:solidFill>
-                <a:latin typeface="Arial"/>
-                <a:ea typeface="Arial"/>
-                <a:cs typeface="Arial"/>
-                <a:sym typeface="Arial"/>
-              </a:defRPr>
-            </a:lvl9pPr>
-          </a:lstStyle>
-          <a:p>
-            <a:pPr algn="ctr" indent="0" lvl="0" marL="0" rtl="0">
-              <a:spcBef>
-                <a:spcPts val="0"/>
-              </a:spcBef>
-              <a:spcAft>
-                <a:spcPts val="0"/>
-              </a:spcAft>
-              <a:buNone/>
-            </a:pPr>
-            <a:fld id="{00000000-1234-1234-1234-123412341234}" type="slidenum">
-              <a:rPr lang="en-US"/>
-              <a:t>‹#›</a:t>
-            </a:fld>
-            <a:endParaRPr/>
-          </a:p>
-        </p:txBody>
-      </p:sp>
-    </p:spTree>
-  </p:cSld>
-</p:sld>
-</file>
-
-<file path=ppt/slides/slide27.xml><?xml version="1.0" encoding="utf-8"?>
-<p:sld xmlns:a="http://schemas.openxmlformats.org/drawingml/2006/main" xmlns:r="http://schemas.openxmlformats.org/officeDocument/2006/relationships" xmlns:p="http://schemas.openxmlformats.org/presentationml/2006/main">
-  <p:cSld>
-    <p:spTree>
-      <p:nvGrpSpPr>
-        <p:cNvPr id="428" name="Shape 428"/>
-        <p:cNvGrpSpPr/>
-        <p:nvPr/>
-      </p:nvGrpSpPr>
-      <p:grpSpPr>
-        <a:xfrm>
-          <a:off x="0" y="0"/>
-          <a:ext cx="0" cy="0"/>
-          <a:chOff x="0" y="0"/>
-          <a:chExt cx="0" cy="0"/>
-        </a:xfrm>
-      </p:grpSpPr>
-      <p:sp>
-        <p:nvSpPr>
-          <p:cNvPr id="436" name="Google Shape;436;p31"/>
-          <p:cNvSpPr txBox="1"/>
-          <p:nvPr>
-            <p:ph type="title"/>
-          </p:nvPr>
-        </p:nvSpPr>
-        <p:spPr>
-          <a:xfrm>
-            <a:off x="771525" y="200025"/>
-            <a:ext cx="10582275" cy="790575"/>
-          </a:xfrm>
-          <a:prstGeom prst="rect">
-            <a:avLst/>
-          </a:prstGeom>
-          <a:noFill/>
-          <a:ln>
-            <a:noFill/>
-          </a:ln>
-        </p:spPr>
-        <p:txBody>
-          <a:bodyPr/>
-          <a:lstStyle/>
-          <a:p>
-            <a:pPr lvl="0" indent="0" marL="0">
-              <a:buNone/>
-            </a:pPr>
-            <a:r>
-              <a:rPr/>
-              <a:t>Backup 3 — Phân tích lỗi (Error Analysis)</a:t>
+              <a:t>Backup 1 — Phân tích lỗi (Error Analysis)</a:t>
             </a:r>
           </a:p>
         </p:txBody>
@@ -53128,7 +51960,7 @@
 </p:sld>
 </file>
 
-<file path=ppt/slides/slide28.xml><?xml version="1.0" encoding="utf-8"?>
+<file path=ppt/slides/slide26.xml><?xml version="1.0" encoding="utf-8"?>
 <p:sld xmlns:a="http://schemas.openxmlformats.org/drawingml/2006/main" xmlns:r="http://schemas.openxmlformats.org/officeDocument/2006/relationships" xmlns:p="http://schemas.openxmlformats.org/presentationml/2006/main">
   <p:cSld>
     <p:spTree>
@@ -53175,7 +52007,7 @@
             </a:pPr>
             <a:r>
               <a:rPr/>
-              <a:t>Backup 4 — Bóc tách đóng góp (Ablation)</a:t>
+              <a:t>Backup 2 — Bóc tách đóng góp (Ablation)</a:t>
             </a:r>
           </a:p>
         </p:txBody>
@@ -53726,1692 +52558,7 @@
 </p:sld>
 </file>
 
-<file path=ppt/slides/slide29.xml><?xml version="1.0" encoding="utf-8"?>
-<p:sld xmlns:a="http://schemas.openxmlformats.org/drawingml/2006/main" xmlns:r="http://schemas.openxmlformats.org/officeDocument/2006/relationships" xmlns:p="http://schemas.openxmlformats.org/presentationml/2006/main">
-  <p:cSld>
-    <p:spTree>
-      <p:nvGrpSpPr>
-        <p:cNvPr id="428" name="Shape 428"/>
-        <p:cNvGrpSpPr/>
-        <p:nvPr/>
-      </p:nvGrpSpPr>
-      <p:grpSpPr>
-        <a:xfrm>
-          <a:off x="0" y="0"/>
-          <a:ext cx="0" cy="0"/>
-          <a:chOff x="0" y="0"/>
-          <a:chExt cx="0" cy="0"/>
-        </a:xfrm>
-      </p:grpSpPr>
-      <p:sp>
-        <p:nvSpPr>
-          <p:cNvPr id="436" name="Google Shape;436;p31"/>
-          <p:cNvSpPr txBox="1"/>
-          <p:nvPr>
-            <p:ph type="title"/>
-          </p:nvPr>
-        </p:nvSpPr>
-        <p:spPr>
-          <a:xfrm>
-            <a:off x="771525" y="200025"/>
-            <a:ext cx="10582275" cy="790575"/>
-          </a:xfrm>
-          <a:prstGeom prst="rect">
-            <a:avLst/>
-          </a:prstGeom>
-          <a:noFill/>
-          <a:ln>
-            <a:noFill/>
-          </a:ln>
-        </p:spPr>
-        <p:txBody>
-          <a:bodyPr/>
-          <a:lstStyle/>
-          <a:p>
-            <a:pPr lvl="0" indent="0" marL="0">
-              <a:buNone/>
-            </a:pPr>
-            <a:r>
-              <a:rPr/>
-              <a:t>Backup 5 — Siêu tham số và huấn luyện</a:t>
-            </a:r>
-          </a:p>
-        </p:txBody>
-      </p:sp>
-      <p:sp>
-        <p:nvSpPr>
-          <p:cNvPr id="437" name="Google Shape;437;p31"/>
-          <p:cNvSpPr txBox="1"/>
-          <p:nvPr>
-            <p:ph idx="2" sz="half" type="body"/>
-          </p:nvPr>
-        </p:nvSpPr>
-        <p:spPr/>
-        <p:txBody>
-          <a:bodyPr/>
-          <a:lstStyle/>
-          <a:p>
-            <a:pPr lvl="0" indent="0" marL="0">
-              <a:buNone/>
-            </a:pPr>
-            <a:r>
-              <a:rPr/>
-              <a:t>Trích </a:t>
-            </a:r>
-            <a:r>
-              <a:rPr>
-                <a:latin typeface="Courier"/>
-              </a:rPr>
-              <a:t>runs/final-640-v3/args.yaml</a:t>
-            </a:r>
-            <a:r>
-              <a:rPr/>
-              <a:t> và </a:t>
-            </a:r>
-            <a:r>
-              <a:rPr>
-                <a:latin typeface="Courier"/>
-              </a:rPr>
-              <a:t>results.csv</a:t>
-            </a:r>
-            <a:r>
-              <a:rPr/>
-              <a:t> — bản ghi </a:t>
-            </a:r>
-            <a:r>
-              <a:rPr i="1"/>
-              <a:t>đã thực thi</a:t>
-            </a:r>
-            <a:r>
-              <a:rPr/>
-              <a:t>, không phải dự định.</a:t>
-            </a:r>
-          </a:p>
-        </p:txBody>
-      </p:sp>
-      <p:graphicFrame>
-        <p:nvGraphicFramePr>
-          <p:cNvPr id="6" name="Content Placeholder 5"/>
-          <p:cNvGraphicFramePr>
-            <a:graphicFrameLocks noGrp="1"/>
-          </p:cNvGraphicFramePr>
-          <p:nvPr>
-            <p:ph idx="1"/>
-          </p:nvPr>
-        </p:nvGraphicFramePr>
-        <p:xfrm>
-          <a:off x="762000" y="2324100"/>
-          <a:ext cx="10579100" cy="3848100"/>
-        </p:xfrm>
-        <a:graphic>
-          <a:graphicData uri="http://schemas.openxmlformats.org/drawingml/2006/table">
-            <a:tbl>
-              <a:tblPr firstRow="1" bandRow="1">
-                <a:tableStyleId>{45BEF19B-5B1D-4A26-B267-ECC71EF7E2D4}</a:tableStyleId>
-              </a:tblPr>
-              <a:tblGrid>
-                <a:gridCol w="2641600"/>
-                <a:gridCol w="2641600"/>
-                <a:gridCol w="2641600"/>
-                <a:gridCol w="2641600"/>
-              </a:tblGrid>
-              <a:tr h="0">
-                <a:tc>
-                  <a:txBody>
-                    <a:bodyPr/>
-                    <a:lstStyle/>
-                    <a:p>
-                      <a:pPr lvl="0" indent="0" marL="0">
-                        <a:buNone/>
-                      </a:pPr>
-                      <a:r>
-                        <a:rPr/>
-                        <a:t>Siêu tham số</a:t>
-                      </a:r>
-                    </a:p>
-                  </a:txBody>
-                  <a:tcPr/>
-                </a:tc>
-                <a:tc>
-                  <a:txBody>
-                    <a:bodyPr/>
-                    <a:lstStyle/>
-                    <a:p>
-                      <a:pPr lvl="0" indent="0" marL="0" algn="r">
-                        <a:buNone/>
-                      </a:pPr>
-                      <a:r>
-                        <a:rPr/>
-                        <a:t>Giá trị</a:t>
-                      </a:r>
-                    </a:p>
-                  </a:txBody>
-                  <a:tcPr/>
-                </a:tc>
-                <a:tc>
-                  <a:txBody>
-                    <a:bodyPr/>
-                    <a:lstStyle/>
-                    <a:p>
-                      <a:pPr lvl="0" indent="0" marL="0">
-                        <a:buNone/>
-                      </a:pPr>
-                      <a:r>
-                        <a:rPr/>
-                        <a:t>Hàm mất mát</a:t>
-                      </a:r>
-                    </a:p>
-                  </a:txBody>
-                  <a:tcPr/>
-                </a:tc>
-                <a:tc>
-                  <a:txBody>
-                    <a:bodyPr/>
-                    <a:lstStyle/>
-                    <a:p>
-                      <a:pPr lvl="0" indent="0" marL="0" algn="r">
-                        <a:buNone/>
-                      </a:pPr>
-                      <a:r>
-                        <a:rPr/>
-                        <a:t>Epoch 1 → 20</a:t>
-                      </a:r>
-                    </a:p>
-                  </a:txBody>
-                  <a:tcPr/>
-                </a:tc>
-              </a:tr>
-              <a:tr h="0">
-                <a:tc>
-                  <a:txBody>
-                    <a:bodyPr/>
-                    <a:lstStyle/>
-                    <a:p>
-                      <a:pPr lvl="0" indent="0" marL="0">
-                        <a:buNone/>
-                      </a:pPr>
-                      <a:r>
-                        <a:rPr b="1">
-                          <a:latin typeface="Courier"/>
-                        </a:rPr>
-                        <a:t>imgsz</a:t>
-                      </a:r>
-                      <a:r>
-                        <a:rPr b="1"/>
-                        <a:t> / </a:t>
-                      </a:r>
-                      <a:r>
-                        <a:rPr b="1">
-                          <a:latin typeface="Courier"/>
-                        </a:rPr>
-                        <a:t>epochs</a:t>
-                      </a:r>
-                    </a:p>
-                  </a:txBody>
-                </a:tc>
-                <a:tc>
-                  <a:txBody>
-                    <a:bodyPr/>
-                    <a:lstStyle/>
-                    <a:p>
-                      <a:pPr lvl="0" indent="0" marL="0" algn="r">
-                        <a:buNone/>
-                      </a:pPr>
-                      <a:r>
-                        <a:rPr b="1"/>
-                        <a:t>640 px</a:t>
-                      </a:r>
-                      <a:r>
-                        <a:rPr/>
-                        <a:t> / </a:t>
-                      </a:r>
-                      <a:r>
-                        <a:rPr b="1"/>
-                        <a:t>20</a:t>
-                      </a:r>
-                    </a:p>
-                  </a:txBody>
-                </a:tc>
-                <a:tc>
-                  <a:txBody>
-                    <a:bodyPr/>
-                    <a:lstStyle/>
-                    <a:p>
-                      <a:pPr lvl="0" indent="0" marL="0">
-                        <a:buNone/>
-                      </a:pPr>
-                      <a:r>
-                        <a:rPr>
-                          <a:latin typeface="Courier"/>
-                        </a:rPr>
-                        <a:t>box_loss</a:t>
-                      </a:r>
-                    </a:p>
-                  </a:txBody>
-                </a:tc>
-                <a:tc>
-                  <a:txBody>
-                    <a:bodyPr/>
-                    <a:lstStyle/>
-                    <a:p>
-                      <a:pPr lvl="0" indent="0" marL="0" algn="r">
-                        <a:buNone/>
-                      </a:pPr>
-                      <a:r>
-                        <a:rPr b="1"/>
-                        <a:t>1,252 → 0,809</a:t>
-                      </a:r>
-                    </a:p>
-                  </a:txBody>
-                </a:tc>
-              </a:tr>
-              <a:tr h="0">
-                <a:tc>
-                  <a:txBody>
-                    <a:bodyPr/>
-                    <a:lstStyle/>
-                    <a:p>
-                      <a:pPr lvl="0" indent="0" marL="0">
-                        <a:buNone/>
-                      </a:pPr>
-                      <a:r>
-                        <a:rPr b="1">
-                          <a:latin typeface="Courier"/>
-                        </a:rPr>
-                        <a:t>batch</a:t>
-                      </a:r>
-                      <a:r>
-                        <a:rPr b="1"/>
-                        <a:t> / </a:t>
-                      </a:r>
-                      <a:r>
-                        <a:rPr b="1">
-                          <a:latin typeface="Courier"/>
-                        </a:rPr>
-                        <a:t>seed</a:t>
-                      </a:r>
-                    </a:p>
-                  </a:txBody>
-                </a:tc>
-                <a:tc>
-                  <a:txBody>
-                    <a:bodyPr/>
-                    <a:lstStyle/>
-                    <a:p>
-                      <a:pPr lvl="0" indent="0" marL="0" algn="r">
-                        <a:buNone/>
-                      </a:pPr>
-                      <a:r>
-                        <a:rPr b="1"/>
-                        <a:t>8</a:t>
-                      </a:r>
-                      <a:r>
-                        <a:rPr/>
-                        <a:t> / </a:t>
-                      </a:r>
-                      <a:r>
-                        <a:rPr b="1"/>
-                        <a:t>42</a:t>
-                      </a:r>
-                    </a:p>
-                  </a:txBody>
-                </a:tc>
-                <a:tc>
-                  <a:txBody>
-                    <a:bodyPr/>
-                    <a:lstStyle/>
-                    <a:p>
-                      <a:pPr lvl="0" indent="0" marL="0">
-                        <a:buNone/>
-                      </a:pPr>
-                      <a:r>
-                        <a:rPr>
-                          <a:latin typeface="Courier"/>
-                        </a:rPr>
-                        <a:t>cls_loss</a:t>
-                      </a:r>
-                    </a:p>
-                  </a:txBody>
-                </a:tc>
-                <a:tc>
-                  <a:txBody>
-                    <a:bodyPr/>
-                    <a:lstStyle/>
-                    <a:p>
-                      <a:pPr lvl="0" indent="0" marL="0" algn="r">
-                        <a:buNone/>
-                      </a:pPr>
-                      <a:r>
-                        <a:rPr b="1"/>
-                        <a:t>0,833 → 0,313</a:t>
-                      </a:r>
-                    </a:p>
-                  </a:txBody>
-                </a:tc>
-              </a:tr>
-              <a:tr h="0">
-                <a:tc>
-                  <a:txBody>
-                    <a:bodyPr/>
-                    <a:lstStyle/>
-                    <a:p>
-                      <a:pPr lvl="0" indent="0" marL="0">
-                        <a:buNone/>
-                      </a:pPr>
-                      <a:r>
-                        <a:rPr b="1">
-                          <a:latin typeface="Courier"/>
-                        </a:rPr>
-                        <a:t>optimizer</a:t>
-                      </a:r>
-                      <a:r>
-                        <a:rPr b="1"/>
-                        <a:t> / </a:t>
-                      </a:r>
-                      <a:r>
-                        <a:rPr b="1">
-                          <a:latin typeface="Courier"/>
-                        </a:rPr>
-                        <a:t>lr0</a:t>
-                      </a:r>
-                    </a:p>
-                  </a:txBody>
-                </a:tc>
-                <a:tc>
-                  <a:txBody>
-                    <a:bodyPr/>
-                    <a:lstStyle/>
-                    <a:p>
-                      <a:pPr lvl="0" indent="0" marL="0" algn="r">
-                        <a:buNone/>
-                      </a:pPr>
-                      <a:r>
-                        <a:rPr b="1"/>
-                        <a:t>AdamW</a:t>
-                      </a:r>
-                      <a:r>
-                        <a:rPr/>
-                        <a:t> / </a:t>
-                      </a:r>
-                      <a:r>
-                        <a:rPr b="1"/>
-                        <a:t>0,001</a:t>
-                      </a:r>
-                    </a:p>
-                  </a:txBody>
-                </a:tc>
-                <a:tc>
-                  <a:txBody>
-                    <a:bodyPr/>
-                    <a:lstStyle/>
-                    <a:p>
-                      <a:pPr lvl="0" indent="0" marL="0">
-                        <a:buNone/>
-                      </a:pPr>
-                      <a:r>
-                        <a:rPr>
-                          <a:latin typeface="Courier"/>
-                        </a:rPr>
-                        <a:t>dfl_loss</a:t>
-                      </a:r>
-                    </a:p>
-                  </a:txBody>
-                </a:tc>
-                <a:tc>
-                  <a:txBody>
-                    <a:bodyPr/>
-                    <a:lstStyle/>
-                    <a:p>
-                      <a:pPr lvl="0" indent="0" marL="0" algn="r">
-                        <a:buNone/>
-                      </a:pPr>
-                      <a:r>
-                        <a:rPr b="1"/>
-                        <a:t>1,154 → 0,987</a:t>
-                      </a:r>
-                    </a:p>
-                  </a:txBody>
-                </a:tc>
-              </a:tr>
-              <a:tr h="0">
-                <a:tc>
-                  <a:txBody>
-                    <a:bodyPr/>
-                    <a:lstStyle/>
-                    <a:p>
-                      <a:pPr lvl="0" indent="0" marL="0">
-                        <a:buNone/>
-                      </a:pPr>
-                      <a:r>
-                        <a:rPr b="1">
-                          <a:latin typeface="Courier"/>
-                        </a:rPr>
-                        <a:t>device</a:t>
-                      </a:r>
-                      <a:r>
-                        <a:rPr b="1"/>
-                        <a:t> / tham số mô hình</a:t>
-                      </a:r>
-                    </a:p>
-                  </a:txBody>
-                </a:tc>
-                <a:tc>
-                  <a:txBody>
-                    <a:bodyPr/>
-                    <a:lstStyle/>
-                    <a:p>
-                      <a:pPr lvl="0" indent="0" marL="0" algn="r">
-                        <a:buNone/>
-                      </a:pPr>
-                      <a:r>
-                        <a:rPr b="1"/>
-                        <a:t>cpu</a:t>
-                      </a:r>
-                      <a:r>
-                        <a:rPr/>
-                        <a:t> / </a:t>
-                      </a:r>
-                      <a:r>
-                        <a:rPr b="1"/>
-                        <a:t>2.590.035</a:t>
-                      </a:r>
-                    </a:p>
-                  </a:txBody>
-                </a:tc>
-                <a:tc>
-                  <a:txBody>
-                    <a:bodyPr/>
-                    <a:lstStyle/>
-                    <a:p>
-                      <a:pPr lvl="0" indent="0" marL="0">
-                        <a:buNone/>
-                      </a:pPr>
-                      <a:r>
-                        <a:rPr b="1">
-                          <a:hlinkClick r:id="rId2"/>
-                        </a:rPr>
-                        <a:t>mAP@0.5</a:t>
-                      </a:r>
-                    </a:p>
-                  </a:txBody>
-                </a:tc>
-                <a:tc>
-                  <a:txBody>
-                    <a:bodyPr/>
-                    <a:lstStyle/>
-                    <a:p>
-                      <a:pPr lvl="0" indent="0" marL="0" algn="r">
-                        <a:buNone/>
-                      </a:pPr>
-                      <a:r>
-                        <a:rPr b="1"/>
-                        <a:t>0,9684 → 0,9830</a:t>
-                      </a:r>
-                    </a:p>
-                  </a:txBody>
-                </a:tc>
-              </a:tr>
-              <a:tr h="0">
-                <a:tc>
-                  <a:txBody>
-                    <a:bodyPr/>
-                    <a:lstStyle/>
-                    <a:p>
-                      <a:pPr lvl="0" indent="0" marL="0">
-                        <a:buNone/>
-                      </a:pPr>
-                      <a:r>
-                        <a:rPr b="1"/>
-                        <a:t>Thời gian huấn luyện</a:t>
-                      </a:r>
-                    </a:p>
-                  </a:txBody>
-                </a:tc>
-                <a:tc>
-                  <a:txBody>
-                    <a:bodyPr/>
-                    <a:lstStyle/>
-                    <a:p>
-                      <a:pPr lvl="0" indent="0" marL="0" algn="r">
-                        <a:buNone/>
-                      </a:pPr>
-                      <a:r>
-                        <a:rPr b="1"/>
-                        <a:t>10,05 giờ</a:t>
-                      </a:r>
-                      <a:r>
-                        <a:rPr/>
-                        <a:t> </a:t>
-                      </a:r>
-                      <a:r>
-                        <a:rPr i="1"/>
-                        <a:t>(30,2 phút/epoch)</a:t>
-                      </a:r>
-                    </a:p>
-                  </a:txBody>
-                </a:tc>
-                <a:tc>
-                  <a:txBody>
-                    <a:bodyPr/>
-                    <a:lstStyle/>
-                    <a:p>
-                      <a:endParaRPr/>
-                    </a:p>
-                  </a:txBody>
-                </a:tc>
-                <a:tc>
-                  <a:txBody>
-                    <a:bodyPr/>
-                    <a:lstStyle/>
-                    <a:p>
-                      <a:endParaRPr/>
-                    </a:p>
-                  </a:txBody>
-                </a:tc>
-              </a:tr>
-            </a:tbl>
-          </a:graphicData>
-        </a:graphic>
-      </p:graphicFrame>
-      <p:sp>
-        <p:nvSpPr>
-          <p:cNvPr id="449" name="Google Shape;449;p31"/>
-          <p:cNvSpPr txBox="1"/>
-          <p:nvPr>
-            <p:ph idx="12" type="sldNum"/>
-          </p:nvPr>
-        </p:nvSpPr>
-        <p:spPr>
-          <a:xfrm>
-            <a:off x="58380" y="6508358"/>
-            <a:ext cx="349642" cy="349642"/>
-          </a:xfrm>
-          <a:prstGeom prst="rect">
-            <a:avLst/>
-          </a:prstGeom>
-          <a:noFill/>
-          <a:ln>
-            <a:noFill/>
-          </a:ln>
-        </p:spPr>
-        <p:txBody>
-          <a:bodyPr anchor="ctr" anchorCtr="0" bIns="45700" lIns="91425" rIns="91425" spcFirstLastPara="1" tIns="45700" wrap="square">
-            <a:noAutofit/>
-          </a:bodyPr>
-          <a:lstStyle>
-            <a:lvl1pPr algn="ctr" indent="0" lvl="0" marL="0">
-              <a:spcBef>
-                <a:spcPts val="0"/>
-              </a:spcBef>
-              <a:buNone/>
-              <a:defRPr sz="700">
-                <a:solidFill>
-                  <a:schemeClr val="dk1"/>
-                </a:solidFill>
-                <a:latin typeface="Arial"/>
-                <a:ea typeface="Arial"/>
-                <a:cs typeface="Arial"/>
-                <a:sym typeface="Arial"/>
-              </a:defRPr>
-            </a:lvl1pPr>
-            <a:lvl2pPr algn="ctr" indent="0" lvl="1" marL="0">
-              <a:spcBef>
-                <a:spcPts val="0"/>
-              </a:spcBef>
-              <a:buNone/>
-              <a:defRPr sz="700">
-                <a:solidFill>
-                  <a:schemeClr val="dk1"/>
-                </a:solidFill>
-                <a:latin typeface="Arial"/>
-                <a:ea typeface="Arial"/>
-                <a:cs typeface="Arial"/>
-                <a:sym typeface="Arial"/>
-              </a:defRPr>
-            </a:lvl2pPr>
-            <a:lvl3pPr algn="ctr" indent="0" lvl="2" marL="0">
-              <a:spcBef>
-                <a:spcPts val="0"/>
-              </a:spcBef>
-              <a:buNone/>
-              <a:defRPr sz="700">
-                <a:solidFill>
-                  <a:schemeClr val="dk1"/>
-                </a:solidFill>
-                <a:latin typeface="Arial"/>
-                <a:ea typeface="Arial"/>
-                <a:cs typeface="Arial"/>
-                <a:sym typeface="Arial"/>
-              </a:defRPr>
-            </a:lvl3pPr>
-            <a:lvl4pPr algn="ctr" indent="0" lvl="3" marL="0">
-              <a:spcBef>
-                <a:spcPts val="0"/>
-              </a:spcBef>
-              <a:buNone/>
-              <a:defRPr sz="700">
-                <a:solidFill>
-                  <a:schemeClr val="dk1"/>
-                </a:solidFill>
-                <a:latin typeface="Arial"/>
-                <a:ea typeface="Arial"/>
-                <a:cs typeface="Arial"/>
-                <a:sym typeface="Arial"/>
-              </a:defRPr>
-            </a:lvl4pPr>
-            <a:lvl5pPr algn="ctr" indent="0" lvl="4" marL="0">
-              <a:spcBef>
-                <a:spcPts val="0"/>
-              </a:spcBef>
-              <a:buNone/>
-              <a:defRPr sz="700">
-                <a:solidFill>
-                  <a:schemeClr val="dk1"/>
-                </a:solidFill>
-                <a:latin typeface="Arial"/>
-                <a:ea typeface="Arial"/>
-                <a:cs typeface="Arial"/>
-                <a:sym typeface="Arial"/>
-              </a:defRPr>
-            </a:lvl5pPr>
-            <a:lvl6pPr algn="ctr" indent="0" lvl="5" marL="0">
-              <a:spcBef>
-                <a:spcPts val="0"/>
-              </a:spcBef>
-              <a:buNone/>
-              <a:defRPr sz="700">
-                <a:solidFill>
-                  <a:schemeClr val="dk1"/>
-                </a:solidFill>
-                <a:latin typeface="Arial"/>
-                <a:ea typeface="Arial"/>
-                <a:cs typeface="Arial"/>
-                <a:sym typeface="Arial"/>
-              </a:defRPr>
-            </a:lvl6pPr>
-            <a:lvl7pPr algn="ctr" indent="0" lvl="6" marL="0">
-              <a:spcBef>
-                <a:spcPts val="0"/>
-              </a:spcBef>
-              <a:buNone/>
-              <a:defRPr sz="700">
-                <a:solidFill>
-                  <a:schemeClr val="dk1"/>
-                </a:solidFill>
-                <a:latin typeface="Arial"/>
-                <a:ea typeface="Arial"/>
-                <a:cs typeface="Arial"/>
-                <a:sym typeface="Arial"/>
-              </a:defRPr>
-            </a:lvl7pPr>
-            <a:lvl8pPr algn="ctr" indent="0" lvl="7" marL="0">
-              <a:spcBef>
-                <a:spcPts val="0"/>
-              </a:spcBef>
-              <a:buNone/>
-              <a:defRPr sz="700">
-                <a:solidFill>
-                  <a:schemeClr val="dk1"/>
-                </a:solidFill>
-                <a:latin typeface="Arial"/>
-                <a:ea typeface="Arial"/>
-                <a:cs typeface="Arial"/>
-                <a:sym typeface="Arial"/>
-              </a:defRPr>
-            </a:lvl8pPr>
-            <a:lvl9pPr algn="ctr" indent="0" lvl="8" marL="0">
-              <a:spcBef>
-                <a:spcPts val="0"/>
-              </a:spcBef>
-              <a:buNone/>
-              <a:defRPr sz="700">
-                <a:solidFill>
-                  <a:schemeClr val="dk1"/>
-                </a:solidFill>
-                <a:latin typeface="Arial"/>
-                <a:ea typeface="Arial"/>
-                <a:cs typeface="Arial"/>
-                <a:sym typeface="Arial"/>
-              </a:defRPr>
-            </a:lvl9pPr>
-          </a:lstStyle>
-          <a:p>
-            <a:pPr algn="ctr" indent="0" lvl="0" marL="0" rtl="0">
-              <a:spcBef>
-                <a:spcPts val="0"/>
-              </a:spcBef>
-              <a:spcAft>
-                <a:spcPts val="0"/>
-              </a:spcAft>
-              <a:buNone/>
-            </a:pPr>
-            <a:fld id="{00000000-1234-1234-1234-123412341234}" type="slidenum">
-              <a:rPr lang="en-US"/>
-              <a:t>‹#›</a:t>
-            </a:fld>
-            <a:endParaRPr/>
-          </a:p>
-        </p:txBody>
-      </p:sp>
-    </p:spTree>
-  </p:cSld>
-</p:sld>
-</file>
-
-<file path=ppt/slides/slide3.xml><?xml version="1.0" encoding="utf-8"?>
-<p:sld xmlns:a="http://schemas.openxmlformats.org/drawingml/2006/main" xmlns:r="http://schemas.openxmlformats.org/officeDocument/2006/relationships" xmlns:p="http://schemas.openxmlformats.org/presentationml/2006/main">
-  <p:cSld>
-    <p:spTree>
-      <p:nvGrpSpPr>
-        <p:cNvPr id="428" name="Shape 428"/>
-        <p:cNvGrpSpPr/>
-        <p:nvPr/>
-      </p:nvGrpSpPr>
-      <p:grpSpPr>
-        <a:xfrm>
-          <a:off x="0" y="0"/>
-          <a:ext cx="0" cy="0"/>
-          <a:chOff x="0" y="0"/>
-          <a:chExt cx="0" cy="0"/>
-        </a:xfrm>
-      </p:grpSpPr>
-      <p:sp>
-        <p:nvSpPr>
-          <p:cNvPr id="436" name="Google Shape;436;p31"/>
-          <p:cNvSpPr txBox="1"/>
-          <p:nvPr>
-            <p:ph type="title"/>
-          </p:nvPr>
-        </p:nvSpPr>
-        <p:spPr>
-          <a:xfrm>
-            <a:off x="771525" y="200025"/>
-            <a:ext cx="10582275" cy="790575"/>
-          </a:xfrm>
-          <a:prstGeom prst="rect">
-            <a:avLst/>
-          </a:prstGeom>
-          <a:noFill/>
-          <a:ln>
-            <a:noFill/>
-          </a:ln>
-        </p:spPr>
-        <p:txBody>
-          <a:bodyPr/>
-          <a:lstStyle/>
-          <a:p>
-            <a:pPr lvl="0" indent="0" marL="0">
-              <a:buNone/>
-            </a:pPr>
-            <a:r>
-              <a:rPr/>
-              <a:t>Vì sao đề tài này</a:t>
-            </a:r>
-          </a:p>
-        </p:txBody>
-      </p:sp>
-      <p:sp>
-        <p:nvSpPr>
-          <p:cNvPr id="437" name="Google Shape;437;p31"/>
-          <p:cNvSpPr txBox="1"/>
-          <p:nvPr>
-            <p:ph idx="2" sz="half" type="body"/>
-          </p:nvPr>
-        </p:nvSpPr>
-        <p:spPr/>
-        <p:txBody>
-          <a:bodyPr/>
-          <a:lstStyle/>
-          <a:p>
-            <a:pPr lvl="0" indent="0" marL="0">
-              <a:buNone/>
-            </a:pPr>
-            <a:r>
-              <a:rPr b="1"/>
-              <a:t>~77 triệu xe máy</a:t>
-            </a:r>
-            <a:r>
-              <a:rPr/>
-              <a:t> — </a:t>
-            </a:r>
-            <a:r>
-              <a:rPr b="1"/>
-              <a:t>85–90%</a:t>
-            </a:r>
-            <a:r>
-              <a:rPr/>
-              <a:t> lưu lượng đường bộ Việt Nam</a:t>
-            </a:r>
-          </a:p>
-          <a:p>
-            <a:pPr lvl="0" indent="0" marL="0">
-              <a:buNone/>
-            </a:pPr>
-            <a:r>
-              <a:rPr/>
-              <a:t>Cùng hệ thống, cùng phép đo: </a:t>
-            </a:r>
-            <a:r>
-              <a:rPr b="1"/>
-              <a:t>chênh 48,6 điểm</a:t>
-            </a:r>
-            <a:r>
-              <a:rPr/>
-              <a:t> </a:t>
-            </a:r>
-            <a:r>
-              <a:rPr i="1"/>
-              <a:t>(số liệu Brazil)</a:t>
-            </a:r>
-          </a:p>
-        </p:txBody>
-      </p:sp>
-      <p:pic>
-        <p:nvPicPr>
-          <p:cNvPr descr="figures/fig-gap.png" id="0" name="Picture 1"/>
-          <p:cNvPicPr>
-            <a:picLocks noGrp="1" noChangeAspect="1"/>
-          </p:cNvPicPr>
-          <p:nvPr/>
-        </p:nvPicPr>
-        <p:blipFill>
-          <a:blip r:embed="rId2"/>
-          <a:stretch>
-            <a:fillRect/>
-          </a:stretch>
-        </p:blipFill>
-        <p:spPr bwMode="auto">
-          <a:xfrm>
-            <a:off x="3530600" y="2324100"/>
-            <a:ext cx="5029200" cy="3848100"/>
-          </a:xfrm>
-          <a:prstGeom prst="rect">
-            <a:avLst/>
-          </a:prstGeom>
-          <a:noFill/>
-          <a:ln w="9525">
-            <a:noFill/>
-            <a:headEnd/>
-            <a:tailEnd/>
-          </a:ln>
-        </p:spPr>
-      </p:pic>
-      <p:sp>
-        <p:nvSpPr>
-          <p:cNvPr id="449" name="Google Shape;449;p31"/>
-          <p:cNvSpPr txBox="1"/>
-          <p:nvPr>
-            <p:ph idx="12" type="sldNum"/>
-          </p:nvPr>
-        </p:nvSpPr>
-        <p:spPr>
-          <a:xfrm>
-            <a:off x="58380" y="6508358"/>
-            <a:ext cx="349642" cy="349642"/>
-          </a:xfrm>
-          <a:prstGeom prst="rect">
-            <a:avLst/>
-          </a:prstGeom>
-          <a:noFill/>
-          <a:ln>
-            <a:noFill/>
-          </a:ln>
-        </p:spPr>
-        <p:txBody>
-          <a:bodyPr anchor="ctr" anchorCtr="0" bIns="45700" lIns="91425" rIns="91425" spcFirstLastPara="1" tIns="45700" wrap="square">
-            <a:noAutofit/>
-          </a:bodyPr>
-          <a:lstStyle>
-            <a:lvl1pPr algn="ctr" indent="0" lvl="0" marL="0">
-              <a:spcBef>
-                <a:spcPts val="0"/>
-              </a:spcBef>
-              <a:buNone/>
-              <a:defRPr sz="700">
-                <a:solidFill>
-                  <a:schemeClr val="dk1"/>
-                </a:solidFill>
-                <a:latin typeface="Arial"/>
-                <a:ea typeface="Arial"/>
-                <a:cs typeface="Arial"/>
-                <a:sym typeface="Arial"/>
-              </a:defRPr>
-            </a:lvl1pPr>
-            <a:lvl2pPr algn="ctr" indent="0" lvl="1" marL="0">
-              <a:spcBef>
-                <a:spcPts val="0"/>
-              </a:spcBef>
-              <a:buNone/>
-              <a:defRPr sz="700">
-                <a:solidFill>
-                  <a:schemeClr val="dk1"/>
-                </a:solidFill>
-                <a:latin typeface="Arial"/>
-                <a:ea typeface="Arial"/>
-                <a:cs typeface="Arial"/>
-                <a:sym typeface="Arial"/>
-              </a:defRPr>
-            </a:lvl2pPr>
-            <a:lvl3pPr algn="ctr" indent="0" lvl="2" marL="0">
-              <a:spcBef>
-                <a:spcPts val="0"/>
-              </a:spcBef>
-              <a:buNone/>
-              <a:defRPr sz="700">
-                <a:solidFill>
-                  <a:schemeClr val="dk1"/>
-                </a:solidFill>
-                <a:latin typeface="Arial"/>
-                <a:ea typeface="Arial"/>
-                <a:cs typeface="Arial"/>
-                <a:sym typeface="Arial"/>
-              </a:defRPr>
-            </a:lvl3pPr>
-            <a:lvl4pPr algn="ctr" indent="0" lvl="3" marL="0">
-              <a:spcBef>
-                <a:spcPts val="0"/>
-              </a:spcBef>
-              <a:buNone/>
-              <a:defRPr sz="700">
-                <a:solidFill>
-                  <a:schemeClr val="dk1"/>
-                </a:solidFill>
-                <a:latin typeface="Arial"/>
-                <a:ea typeface="Arial"/>
-                <a:cs typeface="Arial"/>
-                <a:sym typeface="Arial"/>
-              </a:defRPr>
-            </a:lvl4pPr>
-            <a:lvl5pPr algn="ctr" indent="0" lvl="4" marL="0">
-              <a:spcBef>
-                <a:spcPts val="0"/>
-              </a:spcBef>
-              <a:buNone/>
-              <a:defRPr sz="700">
-                <a:solidFill>
-                  <a:schemeClr val="dk1"/>
-                </a:solidFill>
-                <a:latin typeface="Arial"/>
-                <a:ea typeface="Arial"/>
-                <a:cs typeface="Arial"/>
-                <a:sym typeface="Arial"/>
-              </a:defRPr>
-            </a:lvl5pPr>
-            <a:lvl6pPr algn="ctr" indent="0" lvl="5" marL="0">
-              <a:spcBef>
-                <a:spcPts val="0"/>
-              </a:spcBef>
-              <a:buNone/>
-              <a:defRPr sz="700">
-                <a:solidFill>
-                  <a:schemeClr val="dk1"/>
-                </a:solidFill>
-                <a:latin typeface="Arial"/>
-                <a:ea typeface="Arial"/>
-                <a:cs typeface="Arial"/>
-                <a:sym typeface="Arial"/>
-              </a:defRPr>
-            </a:lvl6pPr>
-            <a:lvl7pPr algn="ctr" indent="0" lvl="6" marL="0">
-              <a:spcBef>
-                <a:spcPts val="0"/>
-              </a:spcBef>
-              <a:buNone/>
-              <a:defRPr sz="700">
-                <a:solidFill>
-                  <a:schemeClr val="dk1"/>
-                </a:solidFill>
-                <a:latin typeface="Arial"/>
-                <a:ea typeface="Arial"/>
-                <a:cs typeface="Arial"/>
-                <a:sym typeface="Arial"/>
-              </a:defRPr>
-            </a:lvl7pPr>
-            <a:lvl8pPr algn="ctr" indent="0" lvl="7" marL="0">
-              <a:spcBef>
-                <a:spcPts val="0"/>
-              </a:spcBef>
-              <a:buNone/>
-              <a:defRPr sz="700">
-                <a:solidFill>
-                  <a:schemeClr val="dk1"/>
-                </a:solidFill>
-                <a:latin typeface="Arial"/>
-                <a:ea typeface="Arial"/>
-                <a:cs typeface="Arial"/>
-                <a:sym typeface="Arial"/>
-              </a:defRPr>
-            </a:lvl8pPr>
-            <a:lvl9pPr algn="ctr" indent="0" lvl="8" marL="0">
-              <a:spcBef>
-                <a:spcPts val="0"/>
-              </a:spcBef>
-              <a:buNone/>
-              <a:defRPr sz="700">
-                <a:solidFill>
-                  <a:schemeClr val="dk1"/>
-                </a:solidFill>
-                <a:latin typeface="Arial"/>
-                <a:ea typeface="Arial"/>
-                <a:cs typeface="Arial"/>
-                <a:sym typeface="Arial"/>
-              </a:defRPr>
-            </a:lvl9pPr>
-          </a:lstStyle>
-          <a:p>
-            <a:pPr algn="ctr" indent="0" lvl="0" marL="0" rtl="0">
-              <a:spcBef>
-                <a:spcPts val="0"/>
-              </a:spcBef>
-              <a:spcAft>
-                <a:spcPts val="0"/>
-              </a:spcAft>
-              <a:buNone/>
-            </a:pPr>
-            <a:fld id="{00000000-1234-1234-1234-123412341234}" type="slidenum">
-              <a:rPr lang="en-US"/>
-              <a:t>‹#›</a:t>
-            </a:fld>
-            <a:endParaRPr/>
-          </a:p>
-        </p:txBody>
-      </p:sp>
-    </p:spTree>
-  </p:cSld>
-</p:sld>
-</file>
-
-<file path=ppt/slides/slide30.xml><?xml version="1.0" encoding="utf-8"?>
-<p:sld xmlns:a="http://schemas.openxmlformats.org/drawingml/2006/main" xmlns:r="http://schemas.openxmlformats.org/officeDocument/2006/relationships" xmlns:p="http://schemas.openxmlformats.org/presentationml/2006/main">
-  <p:cSld>
-    <p:spTree>
-      <p:nvGrpSpPr>
-        <p:cNvPr id="428" name="Shape 428"/>
-        <p:cNvGrpSpPr/>
-        <p:nvPr/>
-      </p:nvGrpSpPr>
-      <p:grpSpPr>
-        <a:xfrm>
-          <a:off x="0" y="0"/>
-          <a:ext cx="0" cy="0"/>
-          <a:chOff x="0" y="0"/>
-          <a:chExt cx="0" cy="0"/>
-        </a:xfrm>
-      </p:grpSpPr>
-      <p:sp>
-        <p:nvSpPr>
-          <p:cNvPr id="436" name="Google Shape;436;p31"/>
-          <p:cNvSpPr txBox="1"/>
-          <p:nvPr>
-            <p:ph type="title"/>
-          </p:nvPr>
-        </p:nvSpPr>
-        <p:spPr>
-          <a:xfrm>
-            <a:off x="771525" y="200025"/>
-            <a:ext cx="10582275" cy="790575"/>
-          </a:xfrm>
-          <a:prstGeom prst="rect">
-            <a:avLst/>
-          </a:prstGeom>
-          <a:noFill/>
-          <a:ln>
-            <a:noFill/>
-          </a:ln>
-        </p:spPr>
-        <p:txBody>
-          <a:bodyPr/>
-          <a:lstStyle/>
-          <a:p>
-            <a:pPr lvl="0" indent="0" marL="0">
-              <a:buNone/>
-            </a:pPr>
-            <a:r>
-              <a:rPr/>
-              <a:t>Backup 6 — Tài liệu tham khảo chính</a:t>
-            </a:r>
-          </a:p>
-        </p:txBody>
-      </p:sp>
-      <p:sp>
-        <p:nvSpPr>
-          <p:cNvPr id="437" name="Google Shape;437;p31"/>
-          <p:cNvSpPr txBox="1"/>
-          <p:nvPr>
-            <p:ph idx="2" sz="half" type="body"/>
-          </p:nvPr>
-        </p:nvSpPr>
-        <p:spPr/>
-        <p:txBody>
-          <a:bodyPr/>
-          <a:lstStyle/>
-          <a:p>
-            <a:pPr lvl="0" indent="0" marL="0">
-              <a:buNone/>
-            </a:pPr>
-            <a:r>
-              <a:rPr/>
-              <a:t>Đầy đủ </a:t>
-            </a:r>
-            <a:r>
-              <a:rPr b="1"/>
-              <a:t>232 mục</a:t>
-            </a:r>
-            <a:r>
-              <a:rPr/>
-              <a:t> trong </a:t>
-            </a:r>
-            <a:r>
-              <a:rPr>
-                <a:latin typeface="Courier"/>
-              </a:rPr>
-              <a:t>docs/references.bib</a:t>
-            </a:r>
-            <a:r>
-              <a:rPr/>
-              <a:t> — dưới đây là các nguồn chống đỡ những khẳng định chính của bài</a:t>
-            </a:r>
-          </a:p>
-        </p:txBody>
-      </p:sp>
-      <p:graphicFrame>
-        <p:nvGraphicFramePr>
-          <p:cNvPr id="6" name="Content Placeholder 5"/>
-          <p:cNvGraphicFramePr>
-            <a:graphicFrameLocks noGrp="1"/>
-          </p:cNvGraphicFramePr>
-          <p:nvPr>
-            <p:ph idx="1"/>
-          </p:nvPr>
-        </p:nvGraphicFramePr>
-        <p:xfrm>
-          <a:off x="762000" y="2324100"/>
-          <a:ext cx="10579100" cy="3848100"/>
-        </p:xfrm>
-        <a:graphic>
-          <a:graphicData uri="http://schemas.openxmlformats.org/drawingml/2006/table">
-            <a:tbl>
-              <a:tblPr firstRow="1" bandRow="1">
-                <a:tableStyleId>{45BEF19B-5B1D-4A26-B267-ECC71EF7E2D4}</a:tableStyleId>
-              </a:tblPr>
-              <a:tblGrid>
-                <a:gridCol w="5283200"/>
-                <a:gridCol w="5283200"/>
-              </a:tblGrid>
-              <a:tr h="0">
-                <a:tc>
-                  <a:txBody>
-                    <a:bodyPr/>
-                    <a:lstStyle/>
-                    <a:p>
-                      <a:pPr lvl="0" indent="0" marL="0">
-                        <a:buNone/>
-                      </a:pPr>
-                      <a:r>
-                        <a:rPr b="1"/>
-                        <a:t>Laroca</a:t>
-                      </a:r>
-                      <a:r>
-                        <a:rPr/>
-                        <a:t> và cộng sự, VISAPP </a:t>
-                      </a:r>
-                      <a:r>
-                        <a:rPr b="1"/>
-                        <a:t>2022</a:t>
-                      </a:r>
-                    </a:p>
-                  </a:txBody>
-                </a:tc>
-                <a:tc>
-                  <a:txBody>
-                    <a:bodyPr/>
-                    <a:lstStyle/>
-                    <a:p>
-                      <a:pPr lvl="0" indent="0" marL="0">
-                        <a:buNone/>
-                      </a:pPr>
-                      <a:r>
-                        <a:rPr i="1"/>
-                        <a:t>On the Cross-Dataset Generalization in License Plate Recognition</a:t>
-                      </a:r>
-                      <a:r>
-                        <a:rPr/>
-                        <a:t> — </a:t>
-                      </a:r>
-                      <a:r>
-                        <a:rPr b="1"/>
-                        <a:t>nguồn của cặp số 94,3% / 45,7%</a:t>
-                      </a:r>
-                      <a:r>
-                        <a:rPr/>
-                        <a:t>, đo trên RodoSol-ALPR của </a:t>
-                      </a:r>
-                      <a:r>
-                        <a:rPr b="1"/>
-                        <a:t>Brazil</a:t>
-                      </a:r>
-                    </a:p>
-                  </a:txBody>
-                </a:tc>
-              </a:tr>
-              <a:tr h="0">
-                <a:tc>
-                  <a:txBody>
-                    <a:bodyPr/>
-                    <a:lstStyle/>
-                    <a:p>
-                      <a:pPr lvl="0" indent="0" marL="0">
-                        <a:buNone/>
-                      </a:pPr>
-                      <a:r>
-                        <a:rPr b="1"/>
-                        <a:t>Laroca</a:t>
-                      </a:r>
-                      <a:r>
-                        <a:rPr/>
-                        <a:t> và cộng sự, IET ITS </a:t>
-                      </a:r>
-                      <a:r>
-                        <a:rPr b="1"/>
-                        <a:t>2021</a:t>
-                      </a:r>
-                    </a:p>
-                  </a:txBody>
-                </a:tc>
-                <a:tc>
-                  <a:txBody>
-                    <a:bodyPr/>
-                    <a:lstStyle/>
-                    <a:p>
-                      <a:pPr lvl="0" indent="0" marL="0">
-                        <a:buNone/>
-                      </a:pPr>
-                      <a:r>
-                        <a:rPr i="1"/>
-                        <a:t>An efficient and layout-independent ALPR system based on the YOLO detector</a:t>
-                      </a:r>
-                    </a:p>
-                  </a:txBody>
-                </a:tc>
-              </a:tr>
-              <a:tr h="0">
-                <a:tc>
-                  <a:txBody>
-                    <a:bodyPr/>
-                    <a:lstStyle/>
-                    <a:p>
-                      <a:pPr lvl="0" indent="0" marL="0">
-                        <a:buNone/>
-                      </a:pPr>
-                      <a:r>
-                        <a:rPr b="1"/>
-                        <a:t>Du</a:t>
-                      </a:r>
-                      <a:r>
-                        <a:rPr/>
-                        <a:t> và cộng sự, arXiv </a:t>
-                      </a:r>
-                      <a:r>
-                        <a:rPr b="1"/>
-                        <a:t>2020</a:t>
-                      </a:r>
-                    </a:p>
-                  </a:txBody>
-                </a:tc>
-                <a:tc>
-                  <a:txBody>
-                    <a:bodyPr/>
-                    <a:lstStyle/>
-                    <a:p>
-                      <a:pPr lvl="0" indent="0" marL="0">
-                        <a:buNone/>
-                      </a:pPr>
-                      <a:r>
-                        <a:rPr i="1"/>
-                        <a:t>PP-OCR: A Practical Ultra Lightweight OCR System</a:t>
-                      </a:r>
-                    </a:p>
-                  </a:txBody>
-                </a:tc>
-              </a:tr>
-              <a:tr h="0">
-                <a:tc>
-                  <a:txBody>
-                    <a:bodyPr/>
-                    <a:lstStyle/>
-                    <a:p>
-                      <a:pPr lvl="0" indent="0" marL="0">
-                        <a:buNone/>
-                      </a:pPr>
-                      <a:r>
-                        <a:rPr/>
-                        <a:t>PaddlePaddle Team, arXiv </a:t>
-                      </a:r>
-                      <a:r>
-                        <a:rPr b="1"/>
-                        <a:t>2025</a:t>
-                      </a:r>
-                    </a:p>
-                  </a:txBody>
-                </a:tc>
-                <a:tc>
-                  <a:txBody>
-                    <a:bodyPr/>
-                    <a:lstStyle/>
-                    <a:p>
-                      <a:pPr lvl="0" indent="0" marL="0">
-                        <a:buNone/>
-                      </a:pPr>
-                      <a:r>
-                        <a:rPr i="1"/>
-                        <a:t>PaddleOCR 3.0 Technical Report</a:t>
-                      </a:r>
-                    </a:p>
-                  </a:txBody>
-                </a:tc>
-              </a:tr>
-              <a:tr h="0">
-                <a:tc>
-                  <a:txBody>
-                    <a:bodyPr/>
-                    <a:lstStyle/>
-                    <a:p>
-                      <a:pPr lvl="0" indent="0" marL="0">
-                        <a:buNone/>
-                      </a:pPr>
-                      <a:r>
-                        <a:rPr b="1"/>
-                        <a:t>Jocher &amp; Qiu</a:t>
-                      </a:r>
-                      <a:r>
-                        <a:rPr/>
-                        <a:t>, Ultralytics </a:t>
-                      </a:r>
-                      <a:r>
-                        <a:rPr b="1"/>
-                        <a:t>2024</a:t>
-                      </a:r>
-                    </a:p>
-                  </a:txBody>
-                </a:tc>
-                <a:tc>
-                  <a:txBody>
-                    <a:bodyPr/>
-                    <a:lstStyle/>
-                    <a:p>
-                      <a:pPr lvl="0" indent="0" marL="0">
-                        <a:buNone/>
-                      </a:pPr>
-                      <a:r>
-                        <a:rPr i="1"/>
-                        <a:t>Ultralytics YOLO11</a:t>
-                      </a:r>
-                    </a:p>
-                  </a:txBody>
-                </a:tc>
-              </a:tr>
-              <a:tr h="0">
-                <a:tc>
-                  <a:txBody>
-                    <a:bodyPr/>
-                    <a:lstStyle/>
-                    <a:p>
-                      <a:pPr lvl="0" indent="0" marL="0">
-                        <a:buNone/>
-                      </a:pPr>
-                      <a:r>
-                        <a:rPr b="1"/>
-                        <a:t>TT 79/2024/TT-BCA</a:t>
-                      </a:r>
-                      <a:r>
-                        <a:rPr/>
-                        <a:t> · </a:t>
-                      </a:r>
-                      <a:r>
-                        <a:rPr b="1"/>
-                        <a:t>TT 51/2025/TT-BCA</a:t>
-                      </a:r>
-                    </a:p>
-                  </a:txBody>
-                </a:tc>
-                <a:tc>
-                  <a:txBody>
-                    <a:bodyPr/>
-                    <a:lstStyle/>
-                    <a:p>
-                      <a:pPr lvl="0" indent="0" marL="0">
-                        <a:buNone/>
-                      </a:pPr>
-                      <a:r>
-                        <a:rPr/>
-                        <a:t>Cấu trúc biển, seri, màu nền · phụ lục mã tỉnh (34 tỉnh/thành)</a:t>
-                      </a:r>
-                    </a:p>
-                  </a:txBody>
-                </a:tc>
-              </a:tr>
-              <a:tr h="0">
-                <a:tc>
-                  <a:txBody>
-                    <a:bodyPr/>
-                    <a:lstStyle/>
-                    <a:p>
-                      <a:pPr lvl="0" indent="0" marL="0">
-                        <a:buNone/>
-                      </a:pPr>
-                      <a:r>
-                        <a:rPr b="1"/>
-                        <a:t>QCVN 08:2024/BCA</a:t>
-                      </a:r>
-                    </a:p>
-                  </a:txBody>
-                </a:tc>
-                <a:tc>
-                  <a:txBody>
-                    <a:bodyPr/>
-                    <a:lstStyle/>
-                    <a:p>
-                      <a:pPr lvl="0" indent="0" marL="0">
-                        <a:buNone/>
-                      </a:pPr>
-                      <a:r>
-                        <a:rPr/>
-                        <a:t>Kích thước và tỉ lệ khung hình biển số</a:t>
-                      </a:r>
-                    </a:p>
-                  </a:txBody>
-                </a:tc>
-              </a:tr>
-            </a:tbl>
-          </a:graphicData>
-        </a:graphic>
-      </p:graphicFrame>
-      <p:sp>
-        <p:nvSpPr>
-          <p:cNvPr id="449" name="Google Shape;449;p31"/>
-          <p:cNvSpPr txBox="1"/>
-          <p:nvPr>
-            <p:ph idx="12" type="sldNum"/>
-          </p:nvPr>
-        </p:nvSpPr>
-        <p:spPr>
-          <a:xfrm>
-            <a:off x="58380" y="6508358"/>
-            <a:ext cx="349642" cy="349642"/>
-          </a:xfrm>
-          <a:prstGeom prst="rect">
-            <a:avLst/>
-          </a:prstGeom>
-          <a:noFill/>
-          <a:ln>
-            <a:noFill/>
-          </a:ln>
-        </p:spPr>
-        <p:txBody>
-          <a:bodyPr anchor="ctr" anchorCtr="0" bIns="45700" lIns="91425" rIns="91425" spcFirstLastPara="1" tIns="45700" wrap="square">
-            <a:noAutofit/>
-          </a:bodyPr>
-          <a:lstStyle>
-            <a:lvl1pPr algn="ctr" indent="0" lvl="0" marL="0">
-              <a:spcBef>
-                <a:spcPts val="0"/>
-              </a:spcBef>
-              <a:buNone/>
-              <a:defRPr sz="700">
-                <a:solidFill>
-                  <a:schemeClr val="dk1"/>
-                </a:solidFill>
-                <a:latin typeface="Arial"/>
-                <a:ea typeface="Arial"/>
-                <a:cs typeface="Arial"/>
-                <a:sym typeface="Arial"/>
-              </a:defRPr>
-            </a:lvl1pPr>
-            <a:lvl2pPr algn="ctr" indent="0" lvl="1" marL="0">
-              <a:spcBef>
-                <a:spcPts val="0"/>
-              </a:spcBef>
-              <a:buNone/>
-              <a:defRPr sz="700">
-                <a:solidFill>
-                  <a:schemeClr val="dk1"/>
-                </a:solidFill>
-                <a:latin typeface="Arial"/>
-                <a:ea typeface="Arial"/>
-                <a:cs typeface="Arial"/>
-                <a:sym typeface="Arial"/>
-              </a:defRPr>
-            </a:lvl2pPr>
-            <a:lvl3pPr algn="ctr" indent="0" lvl="2" marL="0">
-              <a:spcBef>
-                <a:spcPts val="0"/>
-              </a:spcBef>
-              <a:buNone/>
-              <a:defRPr sz="700">
-                <a:solidFill>
-                  <a:schemeClr val="dk1"/>
-                </a:solidFill>
-                <a:latin typeface="Arial"/>
-                <a:ea typeface="Arial"/>
-                <a:cs typeface="Arial"/>
-                <a:sym typeface="Arial"/>
-              </a:defRPr>
-            </a:lvl3pPr>
-            <a:lvl4pPr algn="ctr" indent="0" lvl="3" marL="0">
-              <a:spcBef>
-                <a:spcPts val="0"/>
-              </a:spcBef>
-              <a:buNone/>
-              <a:defRPr sz="700">
-                <a:solidFill>
-                  <a:schemeClr val="dk1"/>
-                </a:solidFill>
-                <a:latin typeface="Arial"/>
-                <a:ea typeface="Arial"/>
-                <a:cs typeface="Arial"/>
-                <a:sym typeface="Arial"/>
-              </a:defRPr>
-            </a:lvl4pPr>
-            <a:lvl5pPr algn="ctr" indent="0" lvl="4" marL="0">
-              <a:spcBef>
-                <a:spcPts val="0"/>
-              </a:spcBef>
-              <a:buNone/>
-              <a:defRPr sz="700">
-                <a:solidFill>
-                  <a:schemeClr val="dk1"/>
-                </a:solidFill>
-                <a:latin typeface="Arial"/>
-                <a:ea typeface="Arial"/>
-                <a:cs typeface="Arial"/>
-                <a:sym typeface="Arial"/>
-              </a:defRPr>
-            </a:lvl5pPr>
-            <a:lvl6pPr algn="ctr" indent="0" lvl="5" marL="0">
-              <a:spcBef>
-                <a:spcPts val="0"/>
-              </a:spcBef>
-              <a:buNone/>
-              <a:defRPr sz="700">
-                <a:solidFill>
-                  <a:schemeClr val="dk1"/>
-                </a:solidFill>
-                <a:latin typeface="Arial"/>
-                <a:ea typeface="Arial"/>
-                <a:cs typeface="Arial"/>
-                <a:sym typeface="Arial"/>
-              </a:defRPr>
-            </a:lvl6pPr>
-            <a:lvl7pPr algn="ctr" indent="0" lvl="6" marL="0">
-              <a:spcBef>
-                <a:spcPts val="0"/>
-              </a:spcBef>
-              <a:buNone/>
-              <a:defRPr sz="700">
-                <a:solidFill>
-                  <a:schemeClr val="dk1"/>
-                </a:solidFill>
-                <a:latin typeface="Arial"/>
-                <a:ea typeface="Arial"/>
-                <a:cs typeface="Arial"/>
-                <a:sym typeface="Arial"/>
-              </a:defRPr>
-            </a:lvl7pPr>
-            <a:lvl8pPr algn="ctr" indent="0" lvl="7" marL="0">
-              <a:spcBef>
-                <a:spcPts val="0"/>
-              </a:spcBef>
-              <a:buNone/>
-              <a:defRPr sz="700">
-                <a:solidFill>
-                  <a:schemeClr val="dk1"/>
-                </a:solidFill>
-                <a:latin typeface="Arial"/>
-                <a:ea typeface="Arial"/>
-                <a:cs typeface="Arial"/>
-                <a:sym typeface="Arial"/>
-              </a:defRPr>
-            </a:lvl8pPr>
-            <a:lvl9pPr algn="ctr" indent="0" lvl="8" marL="0">
-              <a:spcBef>
-                <a:spcPts val="0"/>
-              </a:spcBef>
-              <a:buNone/>
-              <a:defRPr sz="700">
-                <a:solidFill>
-                  <a:schemeClr val="dk1"/>
-                </a:solidFill>
-                <a:latin typeface="Arial"/>
-                <a:ea typeface="Arial"/>
-                <a:cs typeface="Arial"/>
-                <a:sym typeface="Arial"/>
-              </a:defRPr>
-            </a:lvl9pPr>
-          </a:lstStyle>
-          <a:p>
-            <a:pPr algn="ctr" indent="0" lvl="0" marL="0" rtl="0">
-              <a:spcBef>
-                <a:spcPts val="0"/>
-              </a:spcBef>
-              <a:spcAft>
-                <a:spcPts val="0"/>
-              </a:spcAft>
-              <a:buNone/>
-            </a:pPr>
-            <a:fld id="{00000000-1234-1234-1234-123412341234}" type="slidenum">
-              <a:rPr lang="en-US"/>
-              <a:t>‹#›</a:t>
-            </a:fld>
-            <a:endParaRPr/>
-          </a:p>
-        </p:txBody>
-      </p:sp>
-    </p:spTree>
-  </p:cSld>
-</p:sld>
-</file>
-
-<file path=ppt/slides/slide31.xml><?xml version="1.0" encoding="utf-8"?>
+<file path=ppt/slides/slide27.xml><?xml version="1.0" encoding="utf-8"?>
 <p:sld xmlns:a="http://schemas.openxmlformats.org/drawingml/2006/main" xmlns:r="http://schemas.openxmlformats.org/officeDocument/2006/relationships" xmlns:p="http://schemas.openxmlformats.org/presentationml/2006/main">
   <p:cSld>
     <p:spTree>
@@ -55458,7 +52605,7 @@
             </a:pPr>
             <a:r>
               <a:rPr/>
-              <a:t>Backup 7 — Tra nhanh số liệu</a:t>
+              <a:t>Backup 3 — Tra nhanh số liệu</a:t>
             </a:r>
           </a:p>
         </p:txBody>
@@ -55962,7 +53109,7 @@
 </p:sld>
 </file>
 
-<file path=ppt/slides/slide32.xml><?xml version="1.0" encoding="utf-8"?>
+<file path=ppt/slides/slide28.xml><?xml version="1.0" encoding="utf-8"?>
 <p:sld xmlns:a="http://schemas.openxmlformats.org/drawingml/2006/main" xmlns:r="http://schemas.openxmlformats.org/officeDocument/2006/relationships" xmlns:p="http://schemas.openxmlformats.org/presentationml/2006/main">
   <p:cSld>
     <p:spTree>
@@ -56009,7 +53156,7 @@
             </a:pPr>
             <a:r>
               <a:rPr/>
-              <a:t>Backup 8 — Kịch bản demo trực tiếp</a:t>
+              <a:t>Backup 4 — Kiến trúc hai mô hình: YOLO11n và PP-OCRv5 mobile</a:t>
             </a:r>
           </a:p>
         </p:txBody>
@@ -56032,7 +53179,15 @@
             </a:pPr>
             <a:r>
               <a:rPr/>
-              <a:t>Ba tình huống minh họa trên môi trường thực tế:</a:t>
+              <a:t>Bố cục một dòng hay hai dòng </a:t>
+            </a:r>
+            <a:r>
+              <a:rPr b="1"/>
+              <a:t>không do mô hình quyết</a:t>
+            </a:r>
+            <a:r>
+              <a:rPr/>
+              <a:t> — suy ra ở bước hậu xử lý theo tỉ lệ khung hình</a:t>
             </a:r>
           </a:p>
         </p:txBody>
@@ -56058,10 +53213,21 @@
                 <a:tableStyleId>{45BEF19B-5B1D-4A26-B267-ECC71EF7E2D4}</a:tableStyleId>
               </a:tblPr>
               <a:tblGrid>
-                <a:gridCol w="5283200"/>
-                <a:gridCol w="5283200"/>
+                <a:gridCol w="3517900"/>
+                <a:gridCol w="3517900"/>
+                <a:gridCol w="3517900"/>
               </a:tblGrid>
               <a:tr h="0">
+                <a:tc>
+                  <a:txBody>
+                    <a:bodyPr/>
+                    <a:lstStyle/>
+                    <a:p>
+                      <a:endParaRPr/>
+                    </a:p>
+                  </a:txBody>
+                  <a:tcPr/>
+                </a:tc>
                 <a:tc>
                   <a:txBody>
                     <a:bodyPr/>
@@ -56071,8 +53237,16 @@
                         <a:buNone/>
                       </a:pPr>
                       <a:r>
+                        <a:rPr b="1"/>
+                        <a:t>YOLO11n</a:t>
+                      </a:r>
+                      <a:r>
                         <a:rPr/>
-                        <a:t>Tình huống</a:t>
+                        <a:t> </a:t>
+                      </a:r>
+                      <a:r>
+                        <a:rPr i="1"/>
+                        <a:t>(phát hiện)</a:t>
                       </a:r>
                     </a:p>
                   </a:txBody>
@@ -56087,8 +53261,16 @@
                         <a:buNone/>
                       </a:pPr>
                       <a:r>
+                        <a:rPr b="1"/>
+                        <a:t>PP-OCRv5 mobile</a:t>
+                      </a:r>
+                      <a:r>
                         <a:rPr/>
-                        <a:t>Mục tiêu kiểm chứng</a:t>
+                        <a:t> </a:t>
+                      </a:r>
+                      <a:r>
+                        <a:rPr i="1"/>
+                        <a:t>(nhận dạng)</a:t>
                       </a:r>
                     </a:p>
                   </a:txBody>
@@ -56105,8 +53287,8 @@
                         <a:buNone/>
                       </a:pPr>
                       <a:r>
-                        <a:rPr/>
-                        <a:t>Ảnh ô tô — biển 1 dòng</a:t>
+                        <a:rPr b="1"/>
+                        <a:t>Backbone</a:t>
                       </a:r>
                     </a:p>
                   </a:txBody>
@@ -56121,7 +53303,42 @@
                       </a:pPr>
                       <a:r>
                         <a:rPr/>
-                        <a:t>Luồng cơ bản, nhận dạng chính xác dưới 1 giây</a:t>
+                        <a:t>C3k2 + </a:t>
+                      </a:r>
+                      <a:r>
+                        <a:rPr b="1"/>
+                        <a:t>C2PSA</a:t>
+                      </a:r>
+                      <a:r>
+                        <a:rPr/>
+                        <a:t> </a:t>
+                      </a:r>
+                      <a:r>
+                        <a:rPr i="1"/>
+                        <a:t>(attention)</a:t>
+                      </a:r>
+                    </a:p>
+                  </a:txBody>
+                </a:tc>
+                <a:tc>
+                  <a:txBody>
+                    <a:bodyPr/>
+                    <a:lstStyle/>
+                    <a:p>
+                      <a:pPr lvl="0" indent="0" marL="0">
+                        <a:buNone/>
+                      </a:pPr>
+                      <a:r>
+                        <a:rPr b="1"/>
+                        <a:t>PP-LCNetV3</a:t>
+                      </a:r>
+                      <a:r>
+                        <a:rPr/>
+                        <a:t> </a:t>
+                      </a:r>
+                      <a:r>
+                        <a:rPr i="1"/>
+                        <a:t>(lightweight CPU net)</a:t>
                       </a:r>
                     </a:p>
                   </a:txBody>
@@ -56137,8 +53354,8 @@
                         <a:buNone/>
                       </a:pPr>
                       <a:r>
-                        <a:rPr/>
-                        <a:t>Ảnh xe máy — biển 2 dòng</a:t>
+                        <a:rPr b="1"/>
+                        <a:t>Cơ chế đặc trưng</a:t>
                       </a:r>
                     </a:p>
                   </a:txBody>
@@ -56153,7 +53370,26 @@
                       </a:pPr>
                       <a:r>
                         <a:rPr/>
-                        <a:t>Luồng phân tách hai nửa và ghép ngang chạy thực tế</a:t>
+                        <a:t>SPPF — gộp ngữ cảnh đa tỉ lệ</a:t>
+                      </a:r>
+                    </a:p>
+                  </a:txBody>
+                </a:tc>
+                <a:tc>
+                  <a:txBody>
+                    <a:bodyPr/>
+                    <a:lstStyle/>
+                    <a:p>
+                      <a:pPr lvl="0" indent="0" marL="0">
+                        <a:buNone/>
+                      </a:pPr>
+                      <a:r>
+                        <a:rPr b="1"/>
+                        <a:t>SVTR-HG</a:t>
+                      </a:r>
+                      <a:r>
+                        <a:rPr/>
+                        <a:t> — transformer có cổng, trên dải cao 64 px</a:t>
                       </a:r>
                     </a:p>
                   </a:txBody>
@@ -56169,8 +53405,8 @@
                         <a:buNone/>
                       </a:pPr>
                       <a:r>
-                        <a:rPr/>
-                        <a:t>Video + Lịch sử</a:t>
+                        <a:rPr b="1"/>
+                        <a:t>Đầu ra</a:t>
                       </a:r>
                     </a:p>
                   </a:txBody>
@@ -56185,7 +53421,144 @@
                       </a:pPr>
                       <a:r>
                         <a:rPr/>
-                        <a:t>Xử lý bất đồng bộ, tra cứu và hiển thị lịch sử</a:t>
+                        <a:t>Anchor-free decoupled head, một lớp </a:t>
+                      </a:r>
+                      <a:r>
+                        <a:rPr>
+                          <a:latin typeface="Courier"/>
+                        </a:rPr>
+                        <a:t>license_plate</a:t>
+                      </a:r>
+                    </a:p>
+                  </a:txBody>
+                </a:tc>
+                <a:tc>
+                  <a:txBody>
+                    <a:bodyPr/>
+                    <a:lstStyle/>
+                    <a:p>
+                      <a:pPr lvl="0" indent="0" marL="0">
+                        <a:buNone/>
+                      </a:pPr>
+                      <a:r>
+                        <a:rPr b="1"/>
+                        <a:t>CTC head</a:t>
+                      </a:r>
+                      <a:r>
+                        <a:rPr/>
+                        <a:t> — giải mã chuỗi không cần nhãn từng vạch</a:t>
+                      </a:r>
+                    </a:p>
+                  </a:txBody>
+                </a:tc>
+              </a:tr>
+              <a:tr h="0">
+                <a:tc>
+                  <a:txBody>
+                    <a:bodyPr/>
+                    <a:lstStyle/>
+                    <a:p>
+                      <a:pPr lvl="0" indent="0" marL="0">
+                        <a:buNone/>
+                      </a:pPr>
+                      <a:r>
+                        <a:rPr b="1"/>
+                        <a:t>Quy mô</a:t>
+                      </a:r>
+                    </a:p>
+                  </a:txBody>
+                </a:tc>
+                <a:tc>
+                  <a:txBody>
+                    <a:bodyPr/>
+                    <a:lstStyle/>
+                    <a:p>
+                      <a:pPr lvl="0" indent="0" marL="0">
+                        <a:buNone/>
+                      </a:pPr>
+                      <a:r>
+                        <a:rPr b="1"/>
+                        <a:t>2,6M tham số</a:t>
+                      </a:r>
+                      <a:r>
+                        <a:rPr/>
+                        <a:t> · 6,5 GFLOPs</a:t>
+                      </a:r>
+                    </a:p>
+                  </a:txBody>
+                </a:tc>
+                <a:tc>
+                  <a:txBody>
+                    <a:bodyPr/>
+                    <a:lstStyle/>
+                    <a:p>
+                      <a:pPr lvl="0" indent="0" marL="0">
+                        <a:buNone/>
+                      </a:pPr>
+                      <a:r>
+                        <a:rPr b="1"/>
+                        <a:t>4,5 MB</a:t>
+                      </a:r>
+                    </a:p>
+                  </a:txBody>
+                </a:tc>
+              </a:tr>
+              <a:tr h="0">
+                <a:tc>
+                  <a:txBody>
+                    <a:bodyPr/>
+                    <a:lstStyle/>
+                    <a:p>
+                      <a:pPr lvl="0" indent="0" marL="0">
+                        <a:buNone/>
+                      </a:pPr>
+                      <a:r>
+                        <a:rPr b="1"/>
+                        <a:t>Đo được</a:t>
+                      </a:r>
+                    </a:p>
+                  </a:txBody>
+                </a:tc>
+                <a:tc>
+                  <a:txBody>
+                    <a:bodyPr/>
+                    <a:lstStyle/>
+                    <a:p>
+                      <a:pPr lvl="0" indent="0" marL="0">
+                        <a:buNone/>
+                      </a:pPr>
+                      <a:r>
+                        <a:rPr>
+                          <a:hlinkClick r:id="rId2"/>
+                        </a:rPr>
+                        <a:t>mAP@0.5</a:t>
+                      </a:r>
+                      <a:r>
+                        <a:rPr/>
+                        <a:t> = </a:t>
+                      </a:r>
+                      <a:r>
+                        <a:rPr b="1"/>
+                        <a:t>0,9829</a:t>
+                      </a:r>
+                    </a:p>
+                  </a:txBody>
+                </a:tc>
+                <a:tc>
+                  <a:txBody>
+                    <a:bodyPr/>
+                    <a:lstStyle/>
+                    <a:p>
+                      <a:pPr lvl="0" indent="0" marL="0">
+                        <a:buNone/>
+                      </a:pPr>
+                      <a:r>
+                        <a:rPr/>
+                        <a:t>1 − CER = </a:t>
+                      </a:r>
+                      <a:r>
+                        <a:rPr b="1"/>
+                        <a:t>94,83%</a:t>
                       </a:r>
                     </a:p>
                   </a:txBody>
@@ -56195,6 +53568,329 @@
           </a:graphicData>
         </a:graphic>
       </p:graphicFrame>
+      <p:sp>
+        <p:nvSpPr>
+          <p:cNvPr id="449" name="Google Shape;449;p31"/>
+          <p:cNvSpPr txBox="1"/>
+          <p:nvPr>
+            <p:ph idx="12" type="sldNum"/>
+          </p:nvPr>
+        </p:nvSpPr>
+        <p:spPr>
+          <a:xfrm>
+            <a:off x="58380" y="6508358"/>
+            <a:ext cx="349642" cy="349642"/>
+          </a:xfrm>
+          <a:prstGeom prst="rect">
+            <a:avLst/>
+          </a:prstGeom>
+          <a:noFill/>
+          <a:ln>
+            <a:noFill/>
+          </a:ln>
+        </p:spPr>
+        <p:txBody>
+          <a:bodyPr anchor="ctr" anchorCtr="0" bIns="45700" lIns="91425" rIns="91425" spcFirstLastPara="1" tIns="45700" wrap="square">
+            <a:noAutofit/>
+          </a:bodyPr>
+          <a:lstStyle>
+            <a:lvl1pPr algn="ctr" indent="0" lvl="0" marL="0">
+              <a:spcBef>
+                <a:spcPts val="0"/>
+              </a:spcBef>
+              <a:buNone/>
+              <a:defRPr sz="700">
+                <a:solidFill>
+                  <a:schemeClr val="dk1"/>
+                </a:solidFill>
+                <a:latin typeface="Arial"/>
+                <a:ea typeface="Arial"/>
+                <a:cs typeface="Arial"/>
+                <a:sym typeface="Arial"/>
+              </a:defRPr>
+            </a:lvl1pPr>
+            <a:lvl2pPr algn="ctr" indent="0" lvl="1" marL="0">
+              <a:spcBef>
+                <a:spcPts val="0"/>
+              </a:spcBef>
+              <a:buNone/>
+              <a:defRPr sz="700">
+                <a:solidFill>
+                  <a:schemeClr val="dk1"/>
+                </a:solidFill>
+                <a:latin typeface="Arial"/>
+                <a:ea typeface="Arial"/>
+                <a:cs typeface="Arial"/>
+                <a:sym typeface="Arial"/>
+              </a:defRPr>
+            </a:lvl2pPr>
+            <a:lvl3pPr algn="ctr" indent="0" lvl="2" marL="0">
+              <a:spcBef>
+                <a:spcPts val="0"/>
+              </a:spcBef>
+              <a:buNone/>
+              <a:defRPr sz="700">
+                <a:solidFill>
+                  <a:schemeClr val="dk1"/>
+                </a:solidFill>
+                <a:latin typeface="Arial"/>
+                <a:ea typeface="Arial"/>
+                <a:cs typeface="Arial"/>
+                <a:sym typeface="Arial"/>
+              </a:defRPr>
+            </a:lvl3pPr>
+            <a:lvl4pPr algn="ctr" indent="0" lvl="3" marL="0">
+              <a:spcBef>
+                <a:spcPts val="0"/>
+              </a:spcBef>
+              <a:buNone/>
+              <a:defRPr sz="700">
+                <a:solidFill>
+                  <a:schemeClr val="dk1"/>
+                </a:solidFill>
+                <a:latin typeface="Arial"/>
+                <a:ea typeface="Arial"/>
+                <a:cs typeface="Arial"/>
+                <a:sym typeface="Arial"/>
+              </a:defRPr>
+            </a:lvl4pPr>
+            <a:lvl5pPr algn="ctr" indent="0" lvl="4" marL="0">
+              <a:spcBef>
+                <a:spcPts val="0"/>
+              </a:spcBef>
+              <a:buNone/>
+              <a:defRPr sz="700">
+                <a:solidFill>
+                  <a:schemeClr val="dk1"/>
+                </a:solidFill>
+                <a:latin typeface="Arial"/>
+                <a:ea typeface="Arial"/>
+                <a:cs typeface="Arial"/>
+                <a:sym typeface="Arial"/>
+              </a:defRPr>
+            </a:lvl5pPr>
+            <a:lvl6pPr algn="ctr" indent="0" lvl="5" marL="0">
+              <a:spcBef>
+                <a:spcPts val="0"/>
+              </a:spcBef>
+              <a:buNone/>
+              <a:defRPr sz="700">
+                <a:solidFill>
+                  <a:schemeClr val="dk1"/>
+                </a:solidFill>
+                <a:latin typeface="Arial"/>
+                <a:ea typeface="Arial"/>
+                <a:cs typeface="Arial"/>
+                <a:sym typeface="Arial"/>
+              </a:defRPr>
+            </a:lvl6pPr>
+            <a:lvl7pPr algn="ctr" indent="0" lvl="6" marL="0">
+              <a:spcBef>
+                <a:spcPts val="0"/>
+              </a:spcBef>
+              <a:buNone/>
+              <a:defRPr sz="700">
+                <a:solidFill>
+                  <a:schemeClr val="dk1"/>
+                </a:solidFill>
+                <a:latin typeface="Arial"/>
+                <a:ea typeface="Arial"/>
+                <a:cs typeface="Arial"/>
+                <a:sym typeface="Arial"/>
+              </a:defRPr>
+            </a:lvl7pPr>
+            <a:lvl8pPr algn="ctr" indent="0" lvl="7" marL="0">
+              <a:spcBef>
+                <a:spcPts val="0"/>
+              </a:spcBef>
+              <a:buNone/>
+              <a:defRPr sz="700">
+                <a:solidFill>
+                  <a:schemeClr val="dk1"/>
+                </a:solidFill>
+                <a:latin typeface="Arial"/>
+                <a:ea typeface="Arial"/>
+                <a:cs typeface="Arial"/>
+                <a:sym typeface="Arial"/>
+              </a:defRPr>
+            </a:lvl8pPr>
+            <a:lvl9pPr algn="ctr" indent="0" lvl="8" marL="0">
+              <a:spcBef>
+                <a:spcPts val="0"/>
+              </a:spcBef>
+              <a:buNone/>
+              <a:defRPr sz="700">
+                <a:solidFill>
+                  <a:schemeClr val="dk1"/>
+                </a:solidFill>
+                <a:latin typeface="Arial"/>
+                <a:ea typeface="Arial"/>
+                <a:cs typeface="Arial"/>
+                <a:sym typeface="Arial"/>
+              </a:defRPr>
+            </a:lvl9pPr>
+          </a:lstStyle>
+          <a:p>
+            <a:pPr algn="ctr" indent="0" lvl="0" marL="0" rtl="0">
+              <a:spcBef>
+                <a:spcPts val="0"/>
+              </a:spcBef>
+              <a:spcAft>
+                <a:spcPts val="0"/>
+              </a:spcAft>
+              <a:buNone/>
+            </a:pPr>
+            <a:fld id="{00000000-1234-1234-1234-123412341234}" type="slidenum">
+              <a:rPr lang="en-US"/>
+              <a:t>‹#›</a:t>
+            </a:fld>
+            <a:endParaRPr/>
+          </a:p>
+        </p:txBody>
+      </p:sp>
+    </p:spTree>
+  </p:cSld>
+</p:sld>
+</file>
+
+<file path=ppt/slides/slide3.xml><?xml version="1.0" encoding="utf-8"?>
+<p:sld xmlns:a="http://schemas.openxmlformats.org/drawingml/2006/main" xmlns:r="http://schemas.openxmlformats.org/officeDocument/2006/relationships" xmlns:p="http://schemas.openxmlformats.org/presentationml/2006/main">
+  <p:cSld>
+    <p:spTree>
+      <p:nvGrpSpPr>
+        <p:cNvPr id="428" name="Shape 428"/>
+        <p:cNvGrpSpPr/>
+        <p:nvPr/>
+      </p:nvGrpSpPr>
+      <p:grpSpPr>
+        <a:xfrm>
+          <a:off x="0" y="0"/>
+          <a:ext cx="0" cy="0"/>
+          <a:chOff x="0" y="0"/>
+          <a:chExt cx="0" cy="0"/>
+        </a:xfrm>
+      </p:grpSpPr>
+      <p:sp>
+        <p:nvSpPr>
+          <p:cNvPr id="436" name="Google Shape;436;p31"/>
+          <p:cNvSpPr txBox="1"/>
+          <p:nvPr>
+            <p:ph type="title"/>
+          </p:nvPr>
+        </p:nvSpPr>
+        <p:spPr>
+          <a:xfrm>
+            <a:off x="771525" y="200025"/>
+            <a:ext cx="10582275" cy="790575"/>
+          </a:xfrm>
+          <a:prstGeom prst="rect">
+            <a:avLst/>
+          </a:prstGeom>
+          <a:noFill/>
+          <a:ln>
+            <a:noFill/>
+          </a:ln>
+        </p:spPr>
+        <p:txBody>
+          <a:bodyPr/>
+          <a:lstStyle/>
+          <a:p>
+            <a:pPr lvl="0" indent="0" marL="0">
+              <a:buNone/>
+            </a:pPr>
+            <a:r>
+              <a:rPr/>
+              <a:t>Vì sao đề tài này</a:t>
+            </a:r>
+          </a:p>
+        </p:txBody>
+      </p:sp>
+      <p:sp>
+        <p:nvSpPr>
+          <p:cNvPr id="437" name="Google Shape;437;p31"/>
+          <p:cNvSpPr txBox="1"/>
+          <p:nvPr>
+            <p:ph idx="2" sz="half" type="body"/>
+          </p:nvPr>
+        </p:nvSpPr>
+        <p:spPr/>
+        <p:txBody>
+          <a:bodyPr/>
+          <a:lstStyle/>
+          <a:p>
+            <a:pPr lvl="0" indent="0" marL="0">
+              <a:buNone/>
+            </a:pPr>
+            <a:r>
+              <a:rPr b="1"/>
+              <a:t>~77 triệu xe máy</a:t>
+            </a:r>
+            <a:r>
+              <a:rPr/>
+              <a:t> — </a:t>
+            </a:r>
+            <a:r>
+              <a:rPr b="1"/>
+              <a:t>85–90%</a:t>
+            </a:r>
+            <a:r>
+              <a:rPr/>
+              <a:t> lưu lượng đường bộ Việt Nam</a:t>
+            </a:r>
+          </a:p>
+          <a:p>
+            <a:pPr lvl="0" indent="0" marL="0">
+              <a:buNone/>
+            </a:pPr>
+            <a:r>
+              <a:rPr/>
+              <a:t>Cùng hệ thống, cùng phép đo: </a:t>
+            </a:r>
+            <a:r>
+              <a:rPr b="1"/>
+              <a:t>chênh 48,6 điểm</a:t>
+            </a:r>
+            <a:r>
+              <a:rPr/>
+              <a:t> </a:t>
+            </a:r>
+            <a:r>
+              <a:rPr i="1"/>
+              <a:t>(số liệu Brazil)</a:t>
+            </a:r>
+          </a:p>
+        </p:txBody>
+      </p:sp>
+      <p:pic>
+        <p:nvPicPr>
+          <p:cNvPr descr="figures/fig-gap.png" id="0" name="Picture 1"/>
+          <p:cNvPicPr>
+            <a:picLocks noGrp="1" noChangeAspect="1"/>
+          </p:cNvPicPr>
+          <p:nvPr/>
+        </p:nvPicPr>
+        <p:blipFill>
+          <a:blip r:embed="rId2"/>
+          <a:stretch>
+            <a:fillRect/>
+          </a:stretch>
+        </p:blipFill>
+        <p:spPr bwMode="auto">
+          <a:xfrm>
+            <a:off x="3530600" y="2324100"/>
+            <a:ext cx="5029200" cy="3848100"/>
+          </a:xfrm>
+          <a:prstGeom prst="rect">
+            <a:avLst/>
+          </a:prstGeom>
+          <a:noFill/>
+          <a:ln w="9525">
+            <a:noFill/>
+            <a:headEnd/>
+            <a:tailEnd/>
+          </a:ln>
+        </p:spPr>
+      </p:pic>
       <p:sp>
         <p:nvSpPr>
           <p:cNvPr id="449" name="Google Shape;449;p31"/>

--- a/docs/slides/slides.pptx
+++ b/docs/slides/slides.pptx
@@ -53528,14 +53528,8 @@
                         <a:buNone/>
                       </a:pPr>
                       <a:r>
-                        <a:rPr>
-                          <a:hlinkClick r:id="rId2"/>
-                        </a:rPr>
-                        <a:t>mAP@0.5</a:t>
-                      </a:r>
-                      <a:r>
                         <a:rPr/>
-                        <a:t> = </a:t>
+                        <a:t>mAP@0.5 = </a:t>
                       </a:r>
                       <a:r>
                         <a:rPr b="1"/>
